--- a/presentations/progress_report/Jordan_Sorting_Progress_Report_ZH.pptx
+++ b/presentations/progress_report/Jordan_Sorting_Progress_Report_ZH.pptx
@@ -2,33 +2,33 @@
 <file path=ppt/presentation.xml><?xml version="1.0" encoding="utf-8"?>
 <p:presentation xmlns:p="http://schemas.openxmlformats.org/presentationml/2006/main">
   <p:sldMasterIdLst>
-    <p:sldMasterId xmlns:r="http://schemas.openxmlformats.org/officeDocument/2006/relationships" id="2147483648" r:id="R12472bae986d4603"/>
+    <p:sldMasterId xmlns:r="http://schemas.openxmlformats.org/officeDocument/2006/relationships" id="2147483648" r:id="Rf7ba4c76cfb748e9"/>
   </p:sldMasterIdLst>
   <p:notesMasterIdLst>
-    <p:notesMasterId xmlns:r="http://schemas.openxmlformats.org/officeDocument/2006/relationships" r:id="Rb8b50e5edf884864"/>
+    <p:notesMasterId xmlns:r="http://schemas.openxmlformats.org/officeDocument/2006/relationships" r:id="R9bd8e017059d460a"/>
   </p:notesMasterIdLst>
   <p:sldIdLst>
-    <p:sldId xmlns:r="http://schemas.openxmlformats.org/officeDocument/2006/relationships" id="256" r:id="R29f0577659d5429e"/>
-    <p:sldId xmlns:r="http://schemas.openxmlformats.org/officeDocument/2006/relationships" id="257" r:id="Rdcc05ef92b8047ce"/>
-    <p:sldId xmlns:r="http://schemas.openxmlformats.org/officeDocument/2006/relationships" id="258" r:id="Ra21b36831ed44c26"/>
-    <p:sldId xmlns:r="http://schemas.openxmlformats.org/officeDocument/2006/relationships" id="259" r:id="R413d1ee1d5cb448a"/>
-    <p:sldId xmlns:r="http://schemas.openxmlformats.org/officeDocument/2006/relationships" id="260" r:id="R8218938f03364a23"/>
-    <p:sldId xmlns:r="http://schemas.openxmlformats.org/officeDocument/2006/relationships" id="261" r:id="Rffe12564364446bc"/>
-    <p:sldId xmlns:r="http://schemas.openxmlformats.org/officeDocument/2006/relationships" id="262" r:id="Rc956749fe186443a"/>
-    <p:sldId xmlns:r="http://schemas.openxmlformats.org/officeDocument/2006/relationships" id="263" r:id="R59f88042d9594cb1"/>
-    <p:sldId xmlns:r="http://schemas.openxmlformats.org/officeDocument/2006/relationships" id="264" r:id="R088de24cdb134ab9"/>
-    <p:sldId xmlns:r="http://schemas.openxmlformats.org/officeDocument/2006/relationships" id="265" r:id="R38dd0fc2893a4823"/>
-    <p:sldId xmlns:r="http://schemas.openxmlformats.org/officeDocument/2006/relationships" id="266" r:id="R915871d46fba4f45"/>
-    <p:sldId xmlns:r="http://schemas.openxmlformats.org/officeDocument/2006/relationships" id="267" r:id="R198bc995ed5341f8"/>
-    <p:sldId xmlns:r="http://schemas.openxmlformats.org/officeDocument/2006/relationships" id="268" r:id="R9123943ae28b4a44"/>
-    <p:sldId xmlns:r="http://schemas.openxmlformats.org/officeDocument/2006/relationships" id="269" r:id="Rd69fa393f0274dcb"/>
-    <p:sldId xmlns:r="http://schemas.openxmlformats.org/officeDocument/2006/relationships" id="270" r:id="R3a08dc82316f4207"/>
-    <p:sldId xmlns:r="http://schemas.openxmlformats.org/officeDocument/2006/relationships" id="271" r:id="Ra98d44ffe7d54916"/>
-    <p:sldId xmlns:r="http://schemas.openxmlformats.org/officeDocument/2006/relationships" id="272" r:id="Rd03c5ae92f8d4362"/>
-    <p:sldId xmlns:r="http://schemas.openxmlformats.org/officeDocument/2006/relationships" id="273" r:id="R9c4c3645f8934896"/>
-    <p:sldId xmlns:r="http://schemas.openxmlformats.org/officeDocument/2006/relationships" id="274" r:id="Rfbf2fac97fad4894"/>
-    <p:sldId xmlns:r="http://schemas.openxmlformats.org/officeDocument/2006/relationships" id="275" r:id="R31e97695c37e4267"/>
-    <p:sldId xmlns:r="http://schemas.openxmlformats.org/officeDocument/2006/relationships" id="276" r:id="R968aa3e3653a4ef4"/>
+    <p:sldId xmlns:r="http://schemas.openxmlformats.org/officeDocument/2006/relationships" id="256" r:id="Rf89fca5c6d434d79"/>
+    <p:sldId xmlns:r="http://schemas.openxmlformats.org/officeDocument/2006/relationships" id="257" r:id="R9b625e1d0fbe41c4"/>
+    <p:sldId xmlns:r="http://schemas.openxmlformats.org/officeDocument/2006/relationships" id="258" r:id="Re55de8729af048a7"/>
+    <p:sldId xmlns:r="http://schemas.openxmlformats.org/officeDocument/2006/relationships" id="259" r:id="Rc8bb640cc06642f4"/>
+    <p:sldId xmlns:r="http://schemas.openxmlformats.org/officeDocument/2006/relationships" id="260" r:id="R57f1a3194c924c90"/>
+    <p:sldId xmlns:r="http://schemas.openxmlformats.org/officeDocument/2006/relationships" id="261" r:id="Rbcb416c712d4489a"/>
+    <p:sldId xmlns:r="http://schemas.openxmlformats.org/officeDocument/2006/relationships" id="262" r:id="Rb2c0dda682444f70"/>
+    <p:sldId xmlns:r="http://schemas.openxmlformats.org/officeDocument/2006/relationships" id="263" r:id="R0b6f8ff3005346b0"/>
+    <p:sldId xmlns:r="http://schemas.openxmlformats.org/officeDocument/2006/relationships" id="264" r:id="Rfc7d467870484ea8"/>
+    <p:sldId xmlns:r="http://schemas.openxmlformats.org/officeDocument/2006/relationships" id="265" r:id="Rdd7e98080dd04082"/>
+    <p:sldId xmlns:r="http://schemas.openxmlformats.org/officeDocument/2006/relationships" id="266" r:id="R1d59fefc5e014fca"/>
+    <p:sldId xmlns:r="http://schemas.openxmlformats.org/officeDocument/2006/relationships" id="267" r:id="Rca3f955f4a234a10"/>
+    <p:sldId xmlns:r="http://schemas.openxmlformats.org/officeDocument/2006/relationships" id="268" r:id="R12f240c7384c44e7"/>
+    <p:sldId xmlns:r="http://schemas.openxmlformats.org/officeDocument/2006/relationships" id="269" r:id="Rd126f4d7a50a4e0b"/>
+    <p:sldId xmlns:r="http://schemas.openxmlformats.org/officeDocument/2006/relationships" id="270" r:id="R17311a171f114d5b"/>
+    <p:sldId xmlns:r="http://schemas.openxmlformats.org/officeDocument/2006/relationships" id="271" r:id="R14d9cee1ec674407"/>
+    <p:sldId xmlns:r="http://schemas.openxmlformats.org/officeDocument/2006/relationships" id="272" r:id="R81ae2435738f4063"/>
+    <p:sldId xmlns:r="http://schemas.openxmlformats.org/officeDocument/2006/relationships" id="273" r:id="R9b1a734dafdd4906"/>
+    <p:sldId xmlns:r="http://schemas.openxmlformats.org/officeDocument/2006/relationships" id="274" r:id="R6ecb50270ec54bb3"/>
+    <p:sldId xmlns:r="http://schemas.openxmlformats.org/officeDocument/2006/relationships" id="275" r:id="Ra9177718a8024461"/>
+    <p:sldId xmlns:r="http://schemas.openxmlformats.org/officeDocument/2006/relationships" id="276" r:id="R534f22b3f0ad44f7"/>
   </p:sldIdLst>
   <p:sldSz cx="12192000" cy="6858000"/>
   <p:notesSz cx="6858000" cy="9144000"/>
@@ -462,37 +462,7 @@
           <a:lstStyle xmlns:a="http://schemas.openxmlformats.org/drawingml/2006/main"/>
           <a:p xmlns:a="http://schemas.openxmlformats.org/drawingml/2006/main">
             <a:r>
-              <a:t>Simplified Jordan Sorting 的可执行重构进展</a:t>
-            </a:r>
-          </a:p>
-          <a:p xmlns:a="http://schemas.openxmlformats.org/drawingml/2006/main">
-            <a:r>
-              <a:t/>
-            </a:r>
-          </a:p>
-          <a:p xmlns:a="http://schemas.openxmlformats.org/drawingml/2006/main">
-            <a:r>
-              <a:t>大家好。这次汇报介绍我的硕士论文目前的进展，研究主题是 Simplified Jordan Sorting 的可执行重构。</a:t>
-            </a:r>
-          </a:p>
-          <a:p xmlns:a="http://schemas.openxmlformats.org/drawingml/2006/main">
-            <a:r>
-              <a:t/>
-            </a:r>
-          </a:p>
-          <a:p xmlns:a="http://schemas.openxmlformats.org/drawingml/2006/main">
-            <a:r>
-              <a:t>在上一次研究讨论课汇报中，我主要介绍了静态结构框架，包括 rank interval、upper family 和 lower family、family tree，以及一个由 oracle 支持的 reference implementation。此后的核心问题是：论文中描述的动态过程，能否在普通 Python list 上被重构成一套真正可执行、可以检查、并且能够从自身状态恢复输出的实现。</a:t>
-            </a:r>
-          </a:p>
-          <a:p xmlns:a="http://schemas.openxmlformats.org/drawingml/2006/main">
-            <a:r>
-              <a:t/>
-            </a:r>
-          </a:p>
-          <a:p xmlns:a="http://schemas.openxmlformats.org/drawingml/2006/main">
-            <a:r>
-              <a:t>今天我会依次介绍这套重构、验证策略，以及在明确限定的计时范围下得到的正式实验结果。</a:t>
+              <a:t>大家好。这次汇报介绍我的硕士论文进展，主题是 Simplified Jordan Sorting 的可执行重构。上次我主要讨论静态结构，包括 rank interval、upper 和 lower family、family tree，以及 oracle 支持的 reference implementation。此后的核心问题是，论文描述的动态过程能否在普通 Python list 上成为真正可执行、可检查，并能从自身状态恢复输出的实现。今天我会介绍重构中的关键决定、验证方法，以及在明确计时范围下得到的实验结果。</a:t>
             </a:r>
           </a:p>
           <a:p xmlns:a="http://schemas.openxmlformats.org/drawingml/2006/main">
@@ -587,67 +557,7 @@
           <a:lstStyle xmlns:a="http://schemas.openxmlformats.org/drawingml/2006/main"/>
           <a:p xmlns:a="http://schemas.openxmlformats.org/drawingml/2006/main">
             <a:r>
-              <a:t>正确插入还要求 ownership-safe transactional update</a:t>
-            </a:r>
-          </a:p>
-          <a:p xmlns:a="http://schemas.openxmlformats.org/drawingml/2006/main">
-            <a:r>
-              <a:t/>
-            </a:r>
-          </a:p>
-          <a:p xmlns:a="http://schemas.openxmlformats.org/drawingml/2006/main">
-            <a:r>
-              <a:t>Sorted-order insertion 只是 state 问题的一部分。每个 finite pair 还必须恰好拥有一个 parent 和一个 sibling-list owner。</a:t>
-            </a:r>
-          </a:p>
-          <a:p xmlns:a="http://schemas.openxmlformats.org/drawingml/2006/main">
-            <a:r>
-              <a:t/>
-            </a:r>
-          </a:p>
-          <a:p xmlns:a="http://schemas.openxmlformats.org/drawingml/2006/main">
-            <a:r>
-              <a:t>左侧图展示了局部 transaction。Split 之前，existing owner 控制一个 sibling list，其中包含 retained segment 和即将被 acquired 的 segment。Split 之后，existing owner 保留 retained segment，而 new owner 接收 acquired 的非空 segment。只有 transferred segment 的 ownership 会被重新绑定。</a:t>
-            </a:r>
-          </a:p>
-          <a:p xmlns:a="http://schemas.openxmlformats.org/drawingml/2006/main">
-            <a:r>
-              <a:t/>
-            </a:r>
-          </a:p>
-          <a:p xmlns:a="http://schemas.openxmlformats.org/drawingml/2006/main">
-            <a:r>
-              <a:t>因此，实现把 split 和 transfer 当作 transaction：先保存受影响状态，再执行 split，发布 ownership transfer，检查局部 postcondition；如果任何检查失败，就 rollback。</a:t>
-            </a:r>
-          </a:p>
-          <a:p xmlns:a="http://schemas.openxmlformats.org/drawingml/2006/main">
-            <a:r>
-              <a:t/>
-            </a:r>
-          </a:p>
-          <a:p xmlns:a="http://schemas.openxmlformats.org/drawingml/2006/main">
-            <a:r>
-              <a:t>检查还会拒绝无效的 split boundary 和不一致的 ownership state。</a:t>
-            </a:r>
-          </a:p>
-          <a:p xmlns:a="http://schemas.openxmlformats.org/drawingml/2006/main">
-            <a:r>
-              <a:t/>
-            </a:r>
-          </a:p>
-          <a:p xmlns:a="http://schemas.openxmlformats.org/drawingml/2006/main">
-            <a:r>
-              <a:t>Maintained state 同时还包括 sorted processed prefix，以及 upper 和 lower pair family。</a:t>
-            </a:r>
-          </a:p>
-          <a:p xmlns:a="http://schemas.openxmlformats.org/drawingml/2006/main">
-            <a:r>
-              <a:t/>
-            </a:r>
-          </a:p>
-          <a:p xmlns:a="http://schemas.openxmlformats.org/drawingml/2006/main">
-            <a:r>
-              <a:t>由于 backend 使用 ordinary list，scanning、copying、slicing 和 ownership rebinding 都仍然是实际成本。Transaction 可以保护正确性，但 ordinary list 并不提供历史 linear-time analysis 所需的 update bound。</a:t>
+              <a:t>正确插入还要求 ownership 一致。每个有限 pair 必须只有一个 parent 和一个 sibling-list owner。拆分前，原 owner 控制 retained 与 acquired 两部分；拆分后，原 owner 保留 retained segment，新 owner 接收 acquired segment。实现可能为两个非空侧都创建新的 sibling list，所以两侧的 list ID 都可能改变。但只有 acquired segment 改变 parent ownership。代码把 split 与 transfer 当作一个 transaction：保存受影响状态，执行更新，检查 split boundary、ownership 与局部后置条件；失败时恢复 registry、ownership link 与 list ID。普通列表使扫描、复制、切片和 ownership rebinding 都成为明确成本。这些检查保护正确性，但不提供历史线性时间分析所需的更新界。</a:t>
             </a:r>
           </a:p>
           <a:p xmlns:a="http://schemas.openxmlformats.org/drawingml/2006/main">
@@ -742,57 +652,7 @@
           <a:lstStyle xmlns:a="http://schemas.openxmlformats.org/drawingml/2006/main"/>
           <a:p xmlns:a="http://schemas.openxmlformats.org/drawingml/2006/main">
             <a:r>
-              <a:t>Validation 同时覆盖 implementation state 和 evidence integrity</a:t>
-            </a:r>
-          </a:p>
-          <a:p xmlns:a="http://schemas.openxmlformats.org/drawingml/2006/main">
-            <a:r>
-              <a:t/>
-            </a:r>
-          </a:p>
-          <a:p xmlns:a="http://schemas.openxmlformats.org/drawingml/2006/main">
-            <a:r>
-              <a:t>验证策略分成两个不同侧面。</a:t>
-            </a:r>
-          </a:p>
-          <a:p xmlns:a="http://schemas.openxmlformats.org/drawingml/2006/main">
-            <a:r>
-              <a:t/>
-            </a:r>
-          </a:p>
-          <a:p xmlns:a="http://schemas.openxmlformats.org/drawingml/2006/main">
-            <a:r>
-              <a:t>左侧是 implementation 和 state validation。Focused regression case 覆盖已知 edge condition；bounded exhaustive validation 覆盖 n 不超过 8 的 2,074 个 oracle-valid permutation；checked-state audit 检查完整 maintained state，包括 parent chain、ownership、list registry、split pair 和 recovered output；same-core deterministic replay 检查结果状态的 deterministic consistency。</a:t>
-            </a:r>
-          </a:p>
-          <a:p xmlns:a="http://schemas.openxmlformats.org/drawingml/2006/main">
-            <a:r>
-              <a:t/>
-            </a:r>
-          </a:p>
-          <a:p xmlns:a="http://schemas.openxmlformats.org/drawingml/2006/main">
-            <a:r>
-              <a:t>Replay 不是第二套独立的 Jordan-sorting implementation，而是对同一 core 的一致性检查。</a:t>
-            </a:r>
-          </a:p>
-          <a:p xmlns:a="http://schemas.openxmlformats.org/drawingml/2006/main">
-            <a:r>
-              <a:t/>
-            </a:r>
-          </a:p>
-          <a:p xmlns:a="http://schemas.openxmlformats.org/drawingml/2006/main">
-            <a:r>
-              <a:t>右侧是 evidence integrity 和 reproducibility。正式实验采用 pre-specified protocol、manifest-bound archive、schema 和 schedule 检查、row count、summary recomputation 和 hash verification。单独的 evidence-contract validator 会重新生成 expected case、重算相关 summary，并验证 archive。</a:t>
-            </a:r>
-          </a:p>
-          <a:p xmlns:a="http://schemas.openxmlformats.org/drawingml/2006/main">
-            <a:r>
-              <a:t/>
-            </a:r>
-          </a:p>
-          <a:p xmlns:a="http://schemas.openxmlformats.org/drawingml/2006/main">
-            <a:r>
-              <a:t>这两类 validation 支持不同主张。它们共同提供 bounded correctness evidence 和可复现的 evidence chain，但不构成对所有 Jordan sequence 的数学证明。</a:t>
+              <a:t>实现层面使用四类主要检查。Focused regression case 覆盖已知边界；有界穷举验证覆盖 n 不超过 8 的 2,074 个 oracle-valid permutation；checked-state audit 检查 parent、ownership、sibling list 与恢复输出；确定性重放再次运行同一 core 并比较状态。重放检查一致性，不是第二套独立算法。另有一条实验验证路径确认保存结果与固定实验设置及重算汇总一致，详细合同放在 Backup C。这里的重点仍是算法状态。这些检查支持已评估用例，但不是对所有 Jordan sequence 的数学证明。</a:t>
             </a:r>
           </a:p>
           <a:p xmlns:a="http://schemas.openxmlformats.org/drawingml/2006/main">
@@ -892,77 +752,7 @@
           <a:lstStyle xmlns:a="http://schemas.openxmlformats.org/drawingml/2006/main"/>
           <a:p xmlns:a="http://schemas.openxmlformats.org/drawingml/2006/main">
             <a:r>
-              <a:t>正式实验把 certification 和 audit 放在 paper timing 之外</a:t>
-            </a:r>
-          </a:p>
-          <a:p xmlns:a="http://schemas.openxmlformats.org/drawingml/2006/main">
-            <a:r>
-              <a:t/>
-            </a:r>
-          </a:p>
-          <a:p xmlns:a="http://schemas.openxmlformats.org/drawingml/2006/main">
-            <a:r>
-              <a:t>正式实验的设计重点之一，是让 paper timing boundary 可以被清楚观察。</a:t>
-            </a:r>
-          </a:p>
-          <a:p xmlns:a="http://schemas.openxmlformats.org/drawingml/2006/main">
-            <a:r>
-              <a:t/>
-            </a:r>
-          </a:p>
-          <a:p xmlns:a="http://schemas.openxmlformats.org/drawingml/2006/main">
-            <a:r>
-              <a:t>Protocol 包含 5 个 input size、每个 size 12 个 exact case、3 个 algorithm，以及每个 case-algorithm cell 的 20 次 measured call，因此一共产生 3,600 条 measured row。</a:t>
-            </a:r>
-          </a:p>
-          <a:p xmlns:a="http://schemas.openxmlformats.org/drawingml/2006/main">
-            <a:r>
-              <a:t/>
-            </a:r>
-          </a:p>
-          <a:p xmlns:a="http://schemas.openxmlformats.org/drawingml/2006/main">
-            <a:r>
-              <a:t>每个 exact case 只生成一次、certify 一次，并在计时前执行一次 checked-state audit。每个 case-algorithm cell 先执行 5 次 warm-up，再执行 20 次 measured call。Schedule 是确定性的，并在 measured round 中轮转 algorithm position。每次 timed call 都使用 fresh input list。</a:t>
-            </a:r>
-          </a:p>
-          <a:p xmlns:a="http://schemas.openxmlformats.org/drawingml/2006/main">
-            <a:r>
-              <a:t/>
-            </a:r>
-          </a:p>
-          <a:p xmlns:a="http://schemas.openxmlformats.org/drawingml/2006/main">
-            <a:r>
-              <a:t>对 paper algorithm 来说，certification 和 checked-state audit 位于 timer 之外，而 pre-certified input 上的 minimal paper-core call 位于 timer 内。需要特别强调的是，从 maintained partial order 恢复 output 仍属于 paper timed call。Runner-level normalization 和 correctness comparison 在计时后执行。</a:t>
-            </a:r>
-          </a:p>
-          <a:p xmlns:a="http://schemas.openxmlformats.org/drawingml/2006/main">
-            <a:r>
-              <a:t/>
-            </a:r>
-          </a:p>
-          <a:p xmlns:a="http://schemas.openxmlformats.org/drawingml/2006/main">
-            <a:r>
-              <a:t>三个 pipeline 的 timed scope 并不相同。Python timing 覆盖完整 sorting call；reference timing 包含完整 oracle-backed pipeline。</a:t>
-            </a:r>
-          </a:p>
-          <a:p xmlns:a="http://schemas.openxmlformats.org/drawingml/2006/main">
-            <a:r>
-              <a:t/>
-            </a:r>
-          </a:p>
-          <a:p xmlns:a="http://schemas.openxmlformats.org/drawingml/2006/main">
-            <a:r>
-              <a:t>因此，后面看到的 paper/reference 数值被称为 pipeline-scope ratio。它可以描述这次固定实验，但不是 like-for-like end-to-end speedup。</a:t>
-            </a:r>
-          </a:p>
-          <a:p xmlns:a="http://schemas.openxmlformats.org/drawingml/2006/main">
-            <a:r>
-              <a:t/>
-            </a:r>
-          </a:p>
-          <a:p xmlns:a="http://schemas.openxmlformats.org/drawingml/2006/main">
-            <a:r>
-              <a:t>测量完成后，runner 聚合 raw row，写入 manifest-bound archive，并执行 evidence-contract validation。</a:t>
+              <a:t>正式实验覆盖 5 个规模，每个规模 12 个 exact case，并比较 3 个算法。每个 case-algorithm cell 先做 5 次 warm-up，再做 20 次 measured call，因此得到 3,600 条记录。这 20 次是同一个 exact case 的重复调用，不是 20 个独立输入；每次调用会获得包含相同值的 fresh list。调度会轮转算法位置。对 paper algorithm，oracle certification 与 checked-state audit 在计时前完成，minimal paper call 位于计时内，其中包括从维护顺序恢复输出。返回值比较发生在计时后。Python 与 reference 的计时范围也各自不同，因此 paper/reference 只能作为 pipeline-scope 比值，不能解释为同口径端到端加速。</a:t>
             </a:r>
           </a:p>
           <a:p xmlns:a="http://schemas.openxmlformats.org/drawingml/2006/main">
@@ -1062,47 +852,7 @@
           <a:lstStyle xmlns:a="http://schemas.openxmlformats.org/drawingml/2006/main"/>
           <a:p xmlns:a="http://schemas.openxmlformats.org/drawingml/2006/main">
             <a:r>
-              <a:t>所有预先指定的 formal case 都通过检查</a:t>
-            </a:r>
-          </a:p>
-          <a:p xmlns:a="http://schemas.openxmlformats.org/drawingml/2006/main">
-            <a:r>
-              <a:t/>
-            </a:r>
-          </a:p>
-          <a:p xmlns:a="http://schemas.openxmlformats.org/drawingml/2006/main">
-            <a:r>
-              <a:t>全部 60 个 pre-specified formal case 都通过了相应检查。</a:t>
-            </a:r>
-          </a:p>
-          <a:p xmlns:a="http://schemas.openxmlformats.org/drawingml/2006/main">
-            <a:r>
-              <a:t/>
-            </a:r>
-          </a:p>
-          <a:p xmlns:a="http://schemas.openxmlformats.org/drawingml/2006/main">
-            <a:r>
-              <a:t>Archive 包含 3,600 条 measured row，60 个 case-level checked-state audit 全部通过，并且没有记录 correctness error。每个 case 在计时前都通过 oracle certification，每次 measured call 都返回 expected output。</a:t>
-            </a:r>
-          </a:p>
-          <a:p xmlns:a="http://schemas.openxmlformats.org/drawingml/2006/main">
-            <a:r>
-              <a:t/>
-            </a:r>
-          </a:p>
-          <a:p xmlns:a="http://schemas.openxmlformats.org/drawingml/2006/main">
-            <a:r>
-              <a:t>这里必须区分 row 和 audit。实验只执行了 60 次 audit，也就是每个 exact case 一次；audit result 随后关联到该 case 的 timing row。并不是执行了 3,600 次独立 audit。</a:t>
-            </a:r>
-          </a:p>
-          <a:p xmlns:a="http://schemas.openxmlformats.org/drawingml/2006/main">
-            <a:r>
-              <a:t/>
-            </a:r>
-          </a:p>
-          <a:p xmlns:a="http://schemas.openxmlformats.org/drawingml/2006/main">
-            <a:r>
-              <a:t>这些结果为 protocol 中受控的 valid case 提供经验正确性证据。它们不评估 arbitrary-input recognition，也不是对所有 Jordan sequence 的正确性证明。</a:t>
+              <a:t>全部 60 个评估用例都通过认证与 case-level checked-state audit。每次 measured call 都返回 expected output，正式运行没有记录正确性错误。实验是每个 exact case 做一次 audit；3,600 条 timing row 携带对应的 case-level audit 结果，并不表示执行了 3,600 次独立 audit。这些结果只支持本次测试的有效用例，不评估任意输入 recognition，也不是对全部 Jordan sequence 的证明。</a:t>
             </a:r>
           </a:p>
           <a:p xmlns:a="http://schemas.openxmlformats.org/drawingml/2006/main">
@@ -1202,67 +952,7 @@
           <a:lstStyle xmlns:a="http://schemas.openxmlformats.org/drawingml/2006/main"/>
           <a:p xmlns:a="http://schemas.openxmlformats.org/drawingml/2006/main">
             <a:r>
-              <a:t>Paper/reference ratio 随五个测试规模下降</a:t>
-            </a:r>
-          </a:p>
-          <a:p xmlns:a="http://schemas.openxmlformats.org/drawingml/2006/main">
-            <a:r>
-              <a:t/>
-            </a:r>
-          </a:p>
-          <a:p xmlns:a="http://schemas.openxmlformats.org/drawingml/2006/main">
-            <a:r>
-              <a:t>主要 runtime pattern 是 median exact-case paper/reference ratio 随五个 tested size 持续下降。</a:t>
-            </a:r>
-          </a:p>
-          <a:p xmlns:a="http://schemas.openxmlformats.org/drawingml/2006/main">
-            <a:r>
-              <a:t/>
-            </a:r>
-          </a:p>
-          <a:p xmlns:a="http://schemas.openxmlformats.org/drawingml/2006/main">
-            <a:r>
-              <a:t>计算时，先在每个 exact case 内用 paper median 除以 reference median，再让各个 case 以相同权重进行汇总。</a:t>
-            </a:r>
-          </a:p>
-          <a:p xmlns:a="http://schemas.openxmlformats.org/drawingml/2006/main">
-            <a:r>
-              <a:t/>
-            </a:r>
-          </a:p>
-          <a:p xmlns:a="http://schemas.openxmlformats.org/drawingml/2006/main">
-            <a:r>
-              <a:t>在 n 等于 32 时，median ratio 是 3.226，因此在定义的 timing scope 下，paper call 大于 reference call。在 n 等于 64 时 ratio 降到 2.202，在 n 等于 128 时降到 1.351。在 n 等于 256 时，ratio 是 0.851；在 n 等于 512 时，ratio 是 0.567。</a:t>
-            </a:r>
-          </a:p>
-          <a:p xmlns:a="http://schemas.openxmlformats.org/drawingml/2006/main">
-            <a:r>
-              <a:t/>
-            </a:r>
-          </a:p>
-          <a:p xmlns:a="http://schemas.openxmlformats.org/drawingml/2006/main">
-            <a:r>
-              <a:t>因此，observed crossover 位于测试规模 128 和 256 之间。</a:t>
-            </a:r>
-          </a:p>
-          <a:p xmlns:a="http://schemas.openxmlformats.org/drawingml/2006/main">
-            <a:r>
-              <a:t/>
-            </a:r>
-          </a:p>
-          <a:p xmlns:a="http://schemas.openxmlformats.org/drawingml/2006/main">
-            <a:r>
-              <a:t>这只是有限范围内的 empirical pattern，不是 asymptotic claim。它也不代表 paper implementation 在一般意义上更快，因为 numerator 和 denominator 对应不同 pipeline。Reference call 包含 oracle-backed work，而 paper call 从 certified valid input 开始，只计时 minimal core。</a:t>
-            </a:r>
-          </a:p>
-          <a:p xmlns:a="http://schemas.openxmlformats.org/drawingml/2006/main">
-            <a:r>
-              <a:t/>
-            </a:r>
-          </a:p>
-          <a:p xmlns:a="http://schemas.openxmlformats.org/drawingml/2006/main">
-            <a:r>
-              <a:t>Backup A 中还可以看到，Python sort 在每个 tested size 上仍然具有最低的 median call time。</a:t>
+              <a:t>主要运行时间模式是 paper/reference 比值随五个测试规模下降。比值先在每个 exact case 内计算，再让每个 case 在规模中位数中具有相同权重。它从 n 等于 32 时的 3.226，降到 64 时的 2.202、128 时的 1.351，并在 256 时低于 1，达到 0.851；在 512 时为 0.567。观测到的 crossover 位于 128 和 256 之间。Pilot 也呈现相同下降方向，但两次运行的绝对时间不会合并。由于 paper 与 reference 的计时范围不同，这个趋势不是一般性能加速，也不能用五个规模推断渐近行为。</a:t>
             </a:r>
           </a:p>
           <a:p xmlns:a="http://schemas.openxmlformats.org/drawingml/2006/main">
@@ -1357,7 +1047,7 @@
           <a:lstStyle xmlns:a="http://schemas.openxmlformats.org/drawingml/2006/main"/>
           <a:p xmlns:a="http://schemas.openxmlformats.org/drawingml/2006/main">
             <a:r>
-              <a:t>当前 evidence 支持四个有限结论：ordinary-list reconstruction 是可执行的；它从 maintained state 恢复 output；每个 evaluated valid case 都返回正确结果；在定义的 timing scope 下，runtime observation 可复现。但更强的结论仍未成立：这不是 linear-time implementation；五个 tested size 不能确定 asymptotic complexity；实验没有评估 arbitrary-input recognition；paper/reference ratio 也不是 like-for-like end-to-end speedup。本页的限制适用于今天报告的 ordinary-list evidence。未来的 finger-tree backend 必须拥有自己的正确性验证、复杂度分析和实验证据。</a:t>
+              <a:t>当前证据支持两类主要结论：普通列表重构可以执行，并从自身维护状态恢复输出；在测试的有效用例和固定计时范围下，记录到了正确输出与明确的运行时间趋势。主要限制也同样明确：普通 Python list 不构成线性时间实现，五个规模不能确定渐近复杂度。此外，本实验没有评估 recognition，paper 与 reference 也采用不同计时范围。因此这些数值只是固定条件下的运行时间观测。</a:t>
             </a:r>
           </a:p>
           <a:p xmlns:a="http://schemas.openxmlformats.org/drawingml/2006/main">
@@ -1452,7 +1142,7 @@
           <a:lstStyle xmlns:a="http://schemas.openxmlformats.org/drawingml/2006/main"/>
           <a:p xmlns:a="http://schemas.openxmlformats.org/drawingml/2006/main">
             <a:r>
-              <a:t>已验证的 ordinary-list baseline 现在为 finger-tree 扩展提供了一个受控起点。可执行重构已经稳定，输出从 maintained state 恢复，state 和 ownership validation 已经建立，formal evidence 也已经归档。归档的 ordinary-list experiment 会继续作为固定基线，不会被覆盖。如果 finger-tree backend 进入论文，它必须使用独立的源码版本、validation pass 和 experiment，不能复用现有结果。第一目标是实现语义等价的 backend，并通过 differential tests 与 Jordan-sorting correctness tests。更强的 complexity claim 还需要额外论证：split、boundary insertion 和 ownership handling 必须满足历史分析所使用的 operation bounds。因此我希望向导师确认两点：扩展应特别针对历史 heterogeneous finger tree，还是一个支持所需列表操作的等价后端；语义等价加实验比较是否足够，还是还需要 amortized operation-bound 论证。</a:t>
+              <a:t>一个可能的下一步是在保持 Step 1、Step 2 和 Step 3 语义不变的前提下研究 finger-tree 后端。普通列表实现提供了经过测试的参照点，详细的接口与 ownership-transfer 难点放在 Backup E。我希望向导师确认两个问题：第一，应专门实现历史 heterogeneous finger tree，还是实现支持所需列表操作的等价后端？第二，论文只做语义等价和实验比较是否足够，还是还应给出 amortized operation-bound 论证？这个选择决定扩展主要是实验性工作，还是还需要证明层面的内容。</a:t>
             </a:r>
           </a:p>
           <a:p xmlns:a="http://schemas.openxmlformats.org/drawingml/2006/main">
@@ -1557,17 +1247,7 @@
           <a:lstStyle xmlns:a="http://schemas.openxmlformats.org/drawingml/2006/main"/>
           <a:p xmlns:a="http://schemas.openxmlformats.org/drawingml/2006/main">
             <a:r>
-              <a:t>按输入规模列出的 median runtime</a:t>
-            </a:r>
-          </a:p>
-          <a:p xmlns:a="http://schemas.openxmlformats.org/drawingml/2006/main">
-            <a:r>
-              <a:t/>
-            </a:r>
-          </a:p>
-          <a:p xmlns:a="http://schemas.openxmlformats.org/drawingml/2006/main">
-            <a:r>
-              <a:t>如果有人询问精确 runtime，可以使用这一页。表格给出三个 algorithm 的 median call time。数值只属于一次记录的 Apple M4、CPython 3.12.4 执行环境。图采用 logarithmic scale，使 Python 数值能够与 reference 和 paper 数值同时显示。绝对时间不能直接推广到其他硬件或软件环境。</a:t>
+              <a:t>如果需要查看绝对时间，这一页列出三个算法在五个规模上的 median call time。数值来自一次 Apple M4、CPython 3.12.4 的执行，不能推广到其他环境。对数坐标只是为了让 Python sort 与另外两条 pipeline 同时可见。</a:t>
             </a:r>
           </a:p>
           <a:p xmlns:a="http://schemas.openxmlformats.org/drawingml/2006/main">
@@ -1657,17 +1337,7 @@
           <a:lstStyle xmlns:a="http://schemas.openxmlformats.org/drawingml/2006/main"/>
           <a:p xmlns:a="http://schemas.openxmlformats.org/drawingml/2006/main">
             <a:r>
-              <a:t>Paper output 的来源</a:t>
-            </a:r>
-          </a:p>
-          <a:p xmlns:a="http://schemas.openxmlformats.org/drawingml/2006/main">
-            <a:r>
-              <a:t/>
-            </a:r>
-          </a:p>
-          <a:p xmlns:a="http://schemas.openxmlformats.org/drawingml/2006/main">
-            <a:r>
-              <a:t>这一页直接回答 output provenance 问题。Reference pipeline 返回 oracle_result["sorted"]；paper core 返回 state.partial_order.to_list()。Certification 位于 paper call 之前，comparison 位于调用之后，因此两者都不会向 paper core 提供返回值。</a:t>
+              <a:t>这页直接回答输出来源问题。Reference pipeline 返回 oracle_result 中的 sorted output；paper core 返回 state.partial_order.to_list。认证发生在 paper call 之前，比较发生在调用之后，因此二者都不会向 paper core 提供返回值。</a:t>
             </a:r>
           </a:p>
           <a:p xmlns:a="http://schemas.openxmlformats.org/drawingml/2006/main">
@@ -1762,17 +1432,7 @@
           <a:lstStyle xmlns:a="http://schemas.openxmlformats.org/drawingml/2006/main"/>
           <a:p xmlns:a="http://schemas.openxmlformats.org/drawingml/2006/main">
             <a:r>
-              <a:t>当前 implementation baseline 的 validation summary</a:t>
-            </a:r>
-          </a:p>
-          <a:p xmlns:a="http://schemas.openxmlformats.org/drawingml/2006/main">
-            <a:r>
-              <a:t/>
-            </a:r>
-          </a:p>
-          <a:p xmlns:a="http://schemas.openxmlformats.org/drawingml/2006/main">
-            <a:r>
-              <a:t>这一页汇总 bounded validation evidence，包括 repository tests、n 不超过 8 的 exhaustive valid permutation、fixed generated case、formal case-level checked-state audit，以及一份通过 evidence-contract validation 的 formal evidence archive。这些检查相互补充，但都不是 universal proof。</a:t>
+              <a:t>这页汇总有界验证证据，包括仓库测试、n 不超过 8 的有效排列穷举、固定生成用例、正式 case-level checked-state audit，以及通过 evidence-contract validation 的实验输出。这些检查互相补充，但都不是普遍性证明。</a:t>
             </a:r>
           </a:p>
           <a:p xmlns:a="http://schemas.openxmlformats.org/drawingml/2006/main">
@@ -1867,37 +1527,7 @@
           <a:lstStyle xmlns:a="http://schemas.openxmlformats.org/drawingml/2006/main"/>
           <a:p xmlns:a="http://schemas.openxmlformats.org/drawingml/2006/main">
             <a:r>
-              <a:t>上一次汇报建立了静态结构基线</a:t>
-            </a:r>
-          </a:p>
-          <a:p xmlns:a="http://schemas.openxmlformats.org/drawingml/2006/main">
-            <a:r>
-              <a:t/>
-            </a:r>
-          </a:p>
-          <a:p xmlns:a="http://schemas.openxmlformats.org/drawingml/2006/main">
-            <a:r>
-              <a:t>上一次实现已经提供了一个有用的静态基线。它用 rank interval 表示输入，区分 upper 和 lower 两个 pair family，重构它们的 laminar family tree，并计算相应的结构指标。它还使用 oracle 验证输入，并提供 reference output。</a:t>
-            </a:r>
-          </a:p>
-          <a:p xmlns:a="http://schemas.openxmlformats.org/drawingml/2006/main">
-            <a:r>
-              <a:t/>
-            </a:r>
-          </a:p>
-          <a:p xmlns:a="http://schemas.openxmlformats.org/drawingml/2006/main">
-            <a:r>
-              <a:t>这个框架能够解释为什么同一 family 内的 interval 只能 nested 或 disjoint，但它还没有真正执行动态的 Jordan-sorting procedure。具体来说，它没有随着新 point 的加入持续维护 processed prefix，没有执行 sibling list 的 split 或 transfer ownership，也没有从算法自己维护的状态中恢复最终 sorted output。</a:t>
-            </a:r>
-          </a:p>
-          <a:p xmlns:a="http://schemas.openxmlformats.org/drawingml/2006/main">
-            <a:r>
-              <a:t/>
-            </a:r>
-          </a:p>
-          <a:p xmlns:a="http://schemas.openxmlformats.org/drawingml/2006/main">
-            <a:r>
-              <a:t>因此，主要缺口不是再增加一个静态数据模型，而是把结构描述转化成一系列安全、明确、可执行的动态更新。</a:t>
+              <a:t>上一次实现已经把静态结构说明得比较清楚。它用 rank interval 表示输入，区分 upper 和 lower pair family，重构 laminar family tree，并计算结构指标。Oracle 用来确认输入和提供 reference output。但它还没有执行动态 Jordan-sorting procedure：没有持续维护 processed prefix，没有完成 sibling-list 的 split 和 ownership transfer，也没有从算法自己的状态恢复最终输出。因此，主要缺口是把结构描述转化为安全而明确的动态更新。</a:t>
             </a:r>
           </a:p>
           <a:p xmlns:a="http://schemas.openxmlformats.org/drawingml/2006/main">
@@ -1997,17 +1627,7 @@
           <a:lstStyle xmlns:a="http://schemas.openxmlformats.org/drawingml/2006/main"/>
           <a:p xmlns:a="http://schemas.openxmlformats.org/drawingml/2006/main">
             <a:r>
-              <a:t>Increasing 和 decreasing iteration 的反射关系</a:t>
-            </a:r>
-          </a:p>
-          <a:p xmlns:a="http://schemas.openxmlformats.org/drawingml/2006/main">
-            <a:r>
-              <a:t/>
-            </a:r>
-          </a:p>
-          <a:p xmlns:a="http://schemas.openxmlformats.org/drawingml/2006/main">
-            <a:r>
-              <a:t>Step 1 始终选择 predecessor-side boundary A_i，Step 2 始终选择 successor-side boundary B_i。Step 3 反射的是这些 boundary 的使用方式。Increasing iteration 获取 left split side，并使用 rightmost child 和 right endpoint；decreasing iteration 对这些局部选择进行镜像。</a:t>
+              <a:t>这张表汇总镜像后的局部选择。Step 1 始终计算 predecessor-side boundary A_i，Step 2 始终计算 successor-side boundary B_i。镜像发生在 Step 3 如何使用这些 boundary，以及 split side、extreme child 与几何端点的选择上。</a:t>
             </a:r>
           </a:p>
           <a:p xmlns:a="http://schemas.openxmlformats.org/drawingml/2006/main">
@@ -2102,7 +1722,7 @@
           <a:lstStyle xmlns:a="http://schemas.openxmlformats.org/drawingml/2006/main"/>
           <a:p xmlns:a="http://schemas.openxmlformats.org/drawingml/2006/main">
             <a:r>
-              <a:t>这一拟议边界把 paper-facing 的 Step 1、Step 2 和 Step 3 control flow 放在一个小型 sibling-list interface 之上。当前 ordinary-list backend 继续作为已验证基线；finger-tree backend 则是同一组语义操作的独立实现，包括 singleton creation、boundary insertion、split、extreme-child access、ownership preservation 和 stable handles。具体的数据结构目标——是历史 heterogeneous finger tree，还是一个具有等价效率的后端——仍需与导师确认。最关键的风险是：高效的 tree splitting 本身并不足够。如果 ownership transfer 仍然扫描 acquired segment 并逐个重新绑定元素，这个 backend 仍可能无法满足历史分析所需的 operation bounds。因此第一里程碑是语义等价和 differential correctness；任何复杂度主张都需要另外的证明层论证。</a:t>
+              <a:t>拟议结构把 Step 1、Step 2 和 Step 3 放在一个小型 sibling-list 接口之上。普通列表后端保留为当前参照，finger-tree 后端实现相同语义操作。具体目标是历史 heterogeneous finger tree，还是具有等价操作界的后端，仍需与导师确认。主要风险是，高效 tree split 本身不够；若 ownership transfer 仍逐项扫描并重新绑定，就无法得到历史分析所需的操作界。第一步应先保证语义等价与 differential correctness，任何复杂度主张都需要独立的证明论证。</a:t>
             </a:r>
           </a:p>
           <a:p xmlns:a="http://schemas.openxmlformats.org/drawingml/2006/main">
@@ -2202,67 +1822,7 @@
           <a:lstStyle xmlns:a="http://schemas.openxmlformats.org/drawingml/2006/main"/>
           <a:p xmlns:a="http://schemas.openxmlformats.org/drawingml/2006/main">
             <a:r>
-              <a:t>四个工作包共同处理主要实现缺口</a:t>
-            </a:r>
-          </a:p>
-          <a:p xmlns:a="http://schemas.openxmlformats.org/drawingml/2006/main">
-            <a:r>
-              <a:t/>
-            </a:r>
-          </a:p>
-          <a:p xmlns:a="http://schemas.openxmlformats.org/drawingml/2006/main">
-            <a:r>
-              <a:t>我把这个过程分成四个相互关联的工作包。</a:t>
-            </a:r>
-          </a:p>
-          <a:p xmlns:a="http://schemas.openxmlformats.org/drawingml/2006/main">
-            <a:r>
-              <a:t/>
-            </a:r>
-          </a:p>
-          <a:p xmlns:a="http://schemas.openxmlformats.org/drawingml/2006/main">
-            <a:r>
-              <a:t>第一，稳定研究 scope，把 valid-input sorting、recognition 和历史 linear-time bound 所需的 specialized backend 分开。</a:t>
-            </a:r>
-          </a:p>
-          <a:p xmlns:a="http://schemas.openxmlformats.org/drawingml/2006/main">
-            <a:r>
-              <a:t/>
-            </a:r>
-          </a:p>
-          <a:p xmlns:a="http://schemas.openxmlformats.org/drawingml/2006/main">
-            <a:r>
-              <a:t>第二，把论文中的 Step 1、Step 2 和 Step 3 控制流重构为可执行代码。</a:t>
-            </a:r>
-          </a:p>
-          <a:p xmlns:a="http://schemas.openxmlformats.org/drawingml/2006/main">
-            <a:r>
-              <a:t/>
-            </a:r>
-          </a:p>
-          <a:p xmlns:a="http://schemas.openxmlformats.org/drawingml/2006/main">
-            <a:r>
-              <a:t>第三，加入 state invariant、ownership 检查、transactional update、deterministic replay 和 bounded validation。</a:t>
-            </a:r>
-          </a:p>
-          <a:p xmlns:a="http://schemas.openxmlformats.org/drawingml/2006/main">
-            <a:r>
-              <a:t/>
-            </a:r>
-          </a:p>
-          <a:p xmlns:a="http://schemas.openxmlformats.org/drawingml/2006/main">
-            <a:r>
-              <a:t>第四，在 implementation 和 validation boundary 稳定之后，按照预先固定的 protocol 完成第一轮正式 evaluation。</a:t>
-            </a:r>
-          </a:p>
-          <a:p xmlns:a="http://schemas.openxmlformats.org/drawingml/2006/main">
-            <a:r>
-              <a:t/>
-            </a:r>
-          </a:p>
-          <a:p xmlns:a="http://schemas.openxmlformats.org/drawingml/2006/main">
-            <a:r>
-              <a:t>最终得到的是一套稳定的 ordinary-list implementation baseline。这里的区别很重要：它是对算法控制流的可执行重构，但不是对历史 linear-time bound 所需 specialized data structure 的实现。</a:t>
+              <a:t>上次汇报之后，我集中完成了四项工作。第一，缩小范围，把有效输入排序、recognition 和理论后端主张分开。第二，实现 Step 1、Step 2 和 Step 3 的控制流。第三，加入 ownership 不变量、事务式更新、重放和有界验证。第四，在实现和验证边界稳定后，执行固定协议的正式实验。这些工作相互依赖，尤其是输出来源与状态检查明确之后，实验才有解释意义。当前成果是可执行的普通列表实现，历史论文中的专用后端仍属于未来工作。</a:t>
             </a:r>
           </a:p>
           <a:p xmlns:a="http://schemas.openxmlformats.org/drawingml/2006/main">
@@ -2357,7 +1917,7 @@
           <a:lstStyle xmlns:a="http://schemas.openxmlformats.org/drawingml/2006/main"/>
           <a:p xmlns:a="http://schemas.openxmlformats.org/drawingml/2006/main">
             <a:r>
-              <a:t>随着实现逐渐明确，研究范围也进行了有意的收敛。早期计划把 valid/invalid input 生成、静态 family tree、recognition、更广泛的 reference evaluation，以及理论 backend 的可能实现放在一起。当前 scope 更窄，但技术上更清楚：论文重构的是 1990 年 sorting procedure，输入已经预先通过 oracle certification；实验比较 Python sort、完整的 oracle-backed reference pipeline 和重构后的 paper core。Recognition 不属于正式实验，backend 仍然使用普通 Python list。这个 ordinary-list implementation 继续作为已经验证的基线。按照导师的新建议，我也在研究是否可以在不改变 paper-facing control flow 的前提下，把 sibling-list representation 替换成 finger-tree backend。</a:t>
+              <a:t>随着实现逐渐明确，论文范围也有意收窄。当前研究的是 1990 年 sorting procedure 在 oracle 已认证有效的输入上如何运行。实验比较 Python sort、完整的 oracle-backed reference pipeline 和重构后的 paper core。Recognition 保持独立，不能从这次实验推断任意输入的识别能力。Paper core 也仍使用普通 Python list，而不是历史理论分析所需的专用后端。这个范围让论文可以集中回答一个具体问题：动态过程能否正确执行，并从自身维护状态恢复输出。Finger-tree 后端只是可能的扩展。</a:t>
             </a:r>
           </a:p>
           <a:p xmlns:a="http://schemas.openxmlformats.org/drawingml/2006/main">
@@ -2457,57 +2017,7 @@
           <a:lstStyle xmlns:a="http://schemas.openxmlformats.org/drawingml/2006/main"/>
           <a:p xmlns:a="http://schemas.openxmlformats.org/drawingml/2006/main">
             <a:r>
-              <a:t>三个研究问题连接重构、测量和解释</a:t>
-            </a:r>
-          </a:p>
-          <a:p xmlns:a="http://schemas.openxmlformats.org/drawingml/2006/main">
-            <a:r>
-              <a:t/>
-            </a:r>
-          </a:p>
-          <a:p xmlns:a="http://schemas.openxmlformats.org/drawingml/2006/main">
-            <a:r>
-              <a:t>由此得到三个研究问题。</a:t>
-            </a:r>
-          </a:p>
-          <a:p xmlns:a="http://schemas.openxmlformats.org/drawingml/2006/main">
-            <a:r>
-              <a:t/>
-            </a:r>
-          </a:p>
-          <a:p xmlns:a="http://schemas.openxmlformats.org/drawingml/2006/main">
-            <a:r>
-              <a:t>第一个，也是主要技术问题，是 ordinary-list reconstruction 能否针对 oracle-certified valid input，从自己维护的状态中恢复正确的 sorted order。</a:t>
-            </a:r>
-          </a:p>
-          <a:p xmlns:a="http://schemas.openxmlformats.org/drawingml/2006/main">
-            <a:r>
-              <a:t/>
-            </a:r>
-          </a:p>
-          <a:p xmlns:a="http://schemas.openxmlformats.org/drawingml/2006/main">
-            <a:r>
-              <a:t>第二个问题关注观测到的 runtime behavior：paper core 在 pre-certified input 上调用时，相对于 Python sort 和完整 reference pipeline，在各自定义的 timing scope 下表现如何。</a:t>
-            </a:r>
-          </a:p>
-          <a:p xmlns:a="http://schemas.openxmlformats.org/drawingml/2006/main">
-            <a:r>
-              <a:t/>
-            </a:r>
-          </a:p>
-          <a:p xmlns:a="http://schemas.openxmlformats.org/drawingml/2006/main">
-            <a:r>
-              <a:t>第三个问题是 exploratory 的：input structure、checked operation counter 和 runtime 之间出现了哪些描述性关系。</a:t>
-            </a:r>
-          </a:p>
-          <a:p xmlns:a="http://schemas.openxmlformats.org/drawingml/2006/main">
-            <a:r>
-              <a:t/>
-            </a:r>
-          </a:p>
-          <a:p xmlns:a="http://schemas.openxmlformats.org/drawingml/2006/main">
-            <a:r>
-              <a:t>这些区别会贯穿整个汇报。第一个问题对应可执行重构和有限正确性证据；第二个问题对应不同 timing scope 下的测量，而不是一般性能主张；第三个问题只做描述，不做因果解释。</a:t>
+              <a:t>论文有三个研究问题。RQ1 问普通列表重构能否在认证后的有效输入上，从维护状态恢复正确排序。RQ2 问 paper call 相对于 Python sort 和完整 reference pipeline，在各自计时范围下呈现什么行为。RQ3 只探索输入结构、checked operation counter 与运行时间之间的描述性关系。RQ1 是主要技术问题，RQ2 报告测量结果，RQ3 不作因果解释。</a:t>
             </a:r>
           </a:p>
           <a:p xmlns:a="http://schemas.openxmlformats.org/drawingml/2006/main">
@@ -2592,67 +2102,7 @@
           <a:lstStyle xmlns:a="http://schemas.openxmlformats.org/drawingml/2006/main"/>
           <a:p xmlns:a="http://schemas.openxmlformats.org/drawingml/2006/main">
             <a:r>
-              <a:t>Oracle、reference pipeline 和 paper core 承担不同角色</a:t>
-            </a:r>
-          </a:p>
-          <a:p xmlns:a="http://schemas.openxmlformats.org/drawingml/2006/main">
-            <a:r>
-              <a:t/>
-            </a:r>
-          </a:p>
-          <a:p xmlns:a="http://schemas.openxmlformats.org/drawingml/2006/main">
-            <a:r>
-              <a:t>在介绍控制流之前，需要先明确 oracle、reference pipeline 和 paper core 的不同角色。</a:t>
-            </a:r>
-          </a:p>
-          <a:p xmlns:a="http://schemas.openxmlformats.org/drawingml/2006/main">
-            <a:r>
-              <a:t/>
-            </a:r>
-          </a:p>
-          <a:p xmlns:a="http://schemas.openxmlformats.org/drawingml/2006/main">
-            <a:r>
-              <a:t>Oracle 有两个外部角色。在 paper call 之前，它确认 valid-input precondition；在调用之后，它提供用于 correctness comparison 的 expected sorted order。</a:t>
-            </a:r>
-          </a:p>
-          <a:p xmlns:a="http://schemas.openxmlformats.org/drawingml/2006/main">
-            <a:r>
-              <a:t/>
-            </a:r>
-          </a:p>
-          <a:p xmlns:a="http://schemas.openxmlformats.org/drawingml/2006/main">
-            <a:r>
-              <a:t>相比之下，reference pipeline 有意使用完整的 oracle result，包括 sorted output，并把它与 family tree 和 structural information 组合起来。</a:t>
-            </a:r>
-          </a:p>
-          <a:p xmlns:a="http://schemas.openxmlformats.org/drawingml/2006/main">
-            <a:r>
-              <a:t/>
-            </a:r>
-          </a:p>
-          <a:p xmlns:a="http://schemas.openxmlformats.org/drawingml/2006/main">
-            <a:r>
-              <a:t>Paper ordinary-list core 接收原始 sequence，以及已经成立的 valid-input precondition。它执行 Step 1、Step 2 和 Step 3，维护自己的 partial sorted order 和 sibling-list state，最后从这些状态中恢复输出。</a:t>
-            </a:r>
-          </a:p>
-          <a:p xmlns:a="http://schemas.openxmlformats.org/drawingml/2006/main">
-            <a:r>
-              <a:t/>
-            </a:r>
-          </a:p>
-          <a:p xmlns:a="http://schemas.openxmlformats.org/drawingml/2006/main">
-            <a:r>
-              <a:t>右下方的虚线框明确位于 core 之外，说明 output comparison 只在调用结束后发生。</a:t>
-            </a:r>
-          </a:p>
-          <a:p xmlns:a="http://schemas.openxmlformats.org/drawingml/2006/main">
-            <a:r>
-              <a:t/>
-            </a:r>
-          </a:p>
-          <a:p xmlns:a="http://schemas.openxmlformats.org/drawingml/2006/main">
-            <a:r>
-              <a:t>因此，两条路径共享同一个 expected answer，但输出来源完全不同。Oracle-derived sorted list 从未传入 paper core，也不会决定它的返回值。这样可以使用 oracle 检查正确性，而不把答案交给被研究的实现。</a:t>
+              <a:t>Oracle、reference pipeline 和 paper core 的角色必须明确区分。Paper call 之前，oracle 只确认有效输入条件；调用之后，runner 才用 oracle 的排序结果作正确性比较。Reference pipeline 则有意消费完整 oracle result，包括 sorted output。Paper core 只接收原始 sequence 和已经成立的有效输入前提。它执行 Step 1、2、3，维护 partial order 与 sibling-list 状态，并从这些状态恢复输出。图中的虚线比较框位于 core 外部。两条路径面对同一个 expected answer，但输出来源不同。Oracle 排序结果不会进入 paper core，也不会决定它的返回值。</a:t>
             </a:r>
           </a:p>
           <a:p xmlns:a="http://schemas.openxmlformats.org/drawingml/2006/main">
@@ -2752,67 +2202,7 @@
           <a:lstStyle xmlns:a="http://schemas.openxmlformats.org/drawingml/2006/main"/>
           <a:p xmlns:a="http://schemas.openxmlformats.org/drawingml/2006/main">
             <a:r>
-              <a:t>一套 Step 1/2/3 控制流支持反射后的 decreasing orientation</a:t>
-            </a:r>
-          </a:p>
-          <a:p xmlns:a="http://schemas.openxmlformats.org/drawingml/2006/main">
-            <a:r>
-              <a:t/>
-            </a:r>
-          </a:p>
-          <a:p xmlns:a="http://schemas.openxmlformats.org/drawingml/2006/main">
-            <a:r>
-              <a:t>可执行重构使用一套统一的主控制流。</a:t>
-            </a:r>
-          </a:p>
-          <a:p xmlns:a="http://schemas.openxmlformats.org/drawingml/2006/main">
-            <a:r>
-              <a:t/>
-            </a:r>
-          </a:p>
-          <a:p xmlns:a="http://schemas.openxmlformats.org/drawingml/2006/main">
-            <a:r>
-              <a:t>在最初三个 point 排序完成后，每个新 point 都依次经过 Step 1、Step 2 和 Step 3。</a:t>
-            </a:r>
-          </a:p>
-          <a:p xmlns:a="http://schemas.openxmlformats.org/drawingml/2006/main">
-            <a:r>
-              <a:t/>
-            </a:r>
-          </a:p>
-          <a:p xmlns:a="http://schemas.openxmlformats.org/drawingml/2006/main">
-            <a:r>
-              <a:t>Step 1 找到 predecessor-side boundary；Step 2 找到 successor-side boundary。Step 3(a) 插入新 pair，Step 3(b) 在需要时执行 sibling-list split 和 ownership transfer，Step 3(c) 把新 point 插入 maintained sorted order。</a:t>
-            </a:r>
-          </a:p>
-          <a:p xmlns:a="http://schemas.openxmlformats.org/drawingml/2006/main">
-            <a:r>
-              <a:t/>
-            </a:r>
-          </a:p>
-          <a:p xmlns:a="http://schemas.openxmlformats.org/drawingml/2006/main">
-            <a:r>
-              <a:t>更精确地说，Step 1 始终计算 predecessor-side boundary A_i，Step 2 始终计算 successor-side boundary B_i。真正发生反射的是 Step 3：increasing iteration 在 Step 3(a) 使用 A_i、在 Step 3(b) 使用 B_i；decreasing iteration 则交换这两个 boundary 的用途。</a:t>
-            </a:r>
-          </a:p>
-          <a:p xmlns:a="http://schemas.openxmlformats.org/drawingml/2006/main">
-            <a:r>
-              <a:t/>
-            </a:r>
-          </a:p>
-          <a:p xmlns:a="http://schemas.openxmlformats.org/drawingml/2006/main">
-            <a:r>
-              <a:t>下方单独列出了不同的重构依据。1990 年论文明确描述 increasing case；decreasing case 通过 reflection 重构；geometric endpoint 和 odd-index z_1 output anchor 则属于局部 executable clarification。</a:t>
-            </a:r>
-          </a:p>
-          <a:p xmlns:a="http://schemas.openxmlformats.org/drawingml/2006/main">
-            <a:r>
-              <a:t/>
-            </a:r>
-          </a:p>
-          <a:p xmlns:a="http://schemas.openxmlformats.org/drawingml/2006/main">
-            <a:r>
-              <a:t>这样可以清楚区分：哪些规则由论文直接给出，哪些由镜像对称性重构，哪些是为了得到无歧义的可执行行为而明确补充的。</a:t>
+              <a:t>可执行重构采用统一的控制流。先排序 z1、z2、z3并初始化 partial order 与首批 upper、lower pair；随后每个新点都依次经过 Step 1、Step 2 和 Step 3。Step 1 计算 predecessor-side boundary A_i，Step 2 计算 successor-side boundary B_i。Step 3(a) 插入新 pair，Step 3(b) 在需要时拆分 sibling list 并转移 ownership，Step 3(c) 把新点插入维护的顺序。Increasing 与 decreasing 方向共享这些阶段，真正镜像的是 Step 3 对两个 boundary 的使用。1990 年论文直接描述 increasing case，decreasing case由对称性重构。几何端点和奇数索引 z1 输出锚点则是为了得到无歧义执行行为而明确补充的局部规则。</a:t>
             </a:r>
           </a:p>
           <a:p xmlns:a="http://schemas.openxmlformats.org/drawingml/2006/main">
@@ -2907,77 +2297,7 @@
           <a:lstStyle xmlns:a="http://schemas.openxmlformats.org/drawingml/2006/main"/>
           <a:p xmlns:a="http://schemas.openxmlformats.org/drawingml/2006/main">
             <a:r>
-              <a:t>Step 3(c) 使用 geometric extreme，而不是第二个 stored endpoint</a:t>
-            </a:r>
-          </a:p>
-          <a:p xmlns:a="http://schemas.openxmlformats.org/drawingml/2006/main">
-            <a:r>
-              <a:t/>
-            </a:r>
-          </a:p>
-          <a:p xmlns:a="http://schemas.openxmlformats.org/drawingml/2006/main">
-            <a:r>
-              <a:t>第一个 clarification 与 Step 3(c) 使用的 endpoint 有关。</a:t>
-            </a:r>
-          </a:p>
-          <a:p xmlns:a="http://schemas.openxmlformats.org/drawingml/2006/main">
-            <a:r>
-              <a:t/>
-            </a:r>
-          </a:p>
-          <a:p xmlns:a="http://schemas.openxmlformats.org/drawingml/2006/main">
-            <a:r>
-              <a:t>考虑这里的 valid prefix：3、2、1、4。Acquired pair 是 P_2，并按照 curve order 保存为 3、2。</a:t>
-            </a:r>
-          </a:p>
-          <a:p xmlns:a="http://schemas.openxmlformats.org/drawingml/2006/main">
-            <a:r>
-              <a:t/>
-            </a:r>
-          </a:p>
-          <a:p xmlns:a="http://schemas.openxmlformats.org/drawingml/2006/main">
-            <a:r>
-              <a:t>一种机械式解释是：直接把 stored pair 的第二个元素 2 当作 insertion anchor。这样会得到 1、2、4、3，它并没有按 axis order 排序。</a:t>
-            </a:r>
-          </a:p>
-          <a:p xmlns:a="http://schemas.openxmlformats.org/drawingml/2006/main">
-            <a:r>
-              <a:t/>
-            </a:r>
-          </a:p>
-          <a:p xmlns:a="http://schemas.openxmlformats.org/drawingml/2006/main">
-            <a:r>
-              <a:t>原因是 curve order 和 axis order 是两个不同概念。Pair 的存储顺序来自沿 curve 的遍历顺序，而 Step 3(c) 需要的是 x-axis 上的 geometric extreme。</a:t>
-            </a:r>
-          </a:p>
-          <a:p xmlns:a="http://schemas.openxmlformats.org/drawingml/2006/main">
-            <a:r>
-              <a:t/>
-            </a:r>
-          </a:p>
-          <a:p xmlns:a="http://schemas.openxmlformats.org/drawingml/2006/main">
-            <a:r>
-              <a:t>在这个例子中，正确的 geometric endpoint 是 3，把 4 插在 3 之后会得到正确顺序 1、2、3、4。</a:t>
-            </a:r>
-          </a:p>
-          <a:p xmlns:a="http://schemas.openxmlformats.org/drawingml/2006/main">
-            <a:r>
-              <a:t/>
-            </a:r>
-          </a:p>
-          <a:p xmlns:a="http://schemas.openxmlformats.org/drawingml/2006/main">
-            <a:r>
-              <a:t>在反射后的控制流中，orientation 决定使用哪一个 geometric extreme：increasing case 使用 right endpoint，decreasing case 使用 left endpoint。这和“哪个元素刚好排在 stored pair 的第二位”不是同一个问题。</a:t>
-            </a:r>
-          </a:p>
-          <a:p xmlns:a="http://schemas.openxmlformats.org/drawingml/2006/main">
-            <a:r>
-              <a:t/>
-            </a:r>
-          </a:p>
-          <a:p xmlns:a="http://schemas.openxmlformats.org/drawingml/2006/main">
-            <a:r>
-              <a:t>因此，可执行规则是选择 geometric extreme，而不是简单选择第二个 stored endpoint。我把它视为 reconstruction clarification，而不把这条规则直接归于 1990 年论文。缺少它时，maintained order 会在有效输入上出错。</a:t>
+              <a:t>第一个关键问题是 Step 3(c) 应使用哪个端点。考虑有效前缀 3、2、1、4。Acquired pair P2 按 curve order 存为 3、2。如果机械地取第二个存储元素 2 作为锚点，插入 4 后得到 1、2、4、3，在 axis order 上是错误的。原因是 curve order 和 axis order 描述不同关系。Pair 的存储顺序来自曲线遍历，但 Step 3(c) 需要 x 轴上的几何极值。在这里正确端点是 3，把 4 插在 3 后得到 1、2、3、4。于是可执行规则选择几何极值，而不是固定选择第二个存储元素。Increasing 使用右端几何极值，decreasing 使用左端几何极值。我把它称为可执行化澄清，而不是直接归为 1990 年论文的原文规则。</a:t>
             </a:r>
           </a:p>
           <a:p xmlns:a="http://schemas.openxmlformats.org/drawingml/2006/main">
@@ -3067,67 +2387,7 @@
           <a:lstStyle xmlns:a="http://schemas.openxmlformats.org/drawingml/2006/main"/>
           <a:p xmlns:a="http://schemas.openxmlformats.org/drawingml/2006/main">
             <a:r>
-              <a:t>Odd iteration 需要独立的 z_1 output-anchor correction</a:t>
-            </a:r>
-          </a:p>
-          <a:p xmlns:a="http://schemas.openxmlformats.org/drawingml/2006/main">
-            <a:r>
-              <a:t/>
-            </a:r>
-          </a:p>
-          <a:p xmlns:a="http://schemas.openxmlformats.org/drawingml/2006/main">
-            <a:r>
-              <a:t>第二个 clarification 是 odd-index z_1 anomaly。</a:t>
-            </a:r>
-          </a:p>
-          <a:p xmlns:a="http://schemas.openxmlformats.org/drawingml/2006/main">
-            <a:r>
-              <a:t/>
-            </a:r>
-          </a:p>
-          <a:p xmlns:a="http://schemas.openxmlformats.org/drawingml/2006/main">
-            <a:r>
-              <a:t>这里的 valid prefix 是 1、2、3、4、6、7、0。在这个 decreasing iteration 中，普通 geometric base anchor 是 z_2，它的值为 2。</a:t>
-            </a:r>
-          </a:p>
-          <a:p xmlns:a="http://schemas.openxmlformats.org/drawingml/2006/main">
-            <a:r>
-              <a:t/>
-            </a:r>
-          </a:p>
-          <a:p xmlns:a="http://schemas.openxmlformats.org/drawingml/2006/main">
-            <a:r>
-              <a:t>如果直接把新 point 0 插入 2 之前，会得到 1、0、2、3、4、6、7。这样 z_1，也就是值 1，仍然位于新 point 的错误一侧。</a:t>
-            </a:r>
-          </a:p>
-          <a:p xmlns:a="http://schemas.openxmlformats.org/drawingml/2006/main">
-            <a:r>
-              <a:t/>
-            </a:r>
-          </a:p>
-          <a:p xmlns:a="http://schemas.openxmlformats.org/drawingml/2006/main">
-            <a:r>
-              <a:t>这里的关键顺序是：0 小于 z_1，而 z_1 又小于原来的 anchor 2。在这个 odd-index condition 下，output anchor 必须从 z_2 修正为 z_1。</a:t>
-            </a:r>
-          </a:p>
-          <a:p xmlns:a="http://schemas.openxmlformats.org/drawingml/2006/main">
-            <a:r>
-              <a:t/>
-            </a:r>
-          </a:p>
-          <a:p xmlns:a="http://schemas.openxmlformats.org/drawingml/2006/main">
-            <a:r>
-              <a:t>把 0 插入 z_1 之前后，得到正确 axis order：0、1、2、3、4、6、7。</a:t>
-            </a:r>
-          </a:p>
-          <a:p xmlns:a="http://schemas.openxmlformats.org/drawingml/2006/main">
-            <a:r>
-              <a:t/>
-            </a:r>
-          </a:p>
-          <a:p xmlns:a="http://schemas.openxmlformats.org/drawingml/2006/main">
-            <a:r>
-              <a:t>这里不能把它和 predecessor/successor boundary adjustment 合并。它们是两个独立决定：一个选择 family update 使用的 boundary pair，另一个选择 maintained order 更新时使用的 output anchor。只有明确分离这两个职责，maintained order 才能保持正确。</a:t>
+              <a:t>第二个问题是奇数索引的 z1 特例。例子中的有效前缀为 1、2、3、4、6、7、0。当前是 decreasing iteration，普通几何锚点为 z2，也就是值 2。若直接把 0 插到 z2 前，会得到 1、0、2、3、4、6、7，z1 仍在新点错误的一侧。因为 0 小于 z1，且 z1 小于原锚点，所以输出锚点必须从 z2 改为 z1。这样插入后得到正确顺序 0、1、2、3、4、6、7。这个修正只影响输出插入，不替代 predecessor 或 successor boundary 的计算。二者分别决定 family update 的 pair 与 partial order 更新的点，代码也将它们分开记录。</a:t>
             </a:r>
           </a:p>
           <a:p xmlns:a="http://schemas.openxmlformats.org/drawingml/2006/main">
@@ -3220,7 +2480,7 @@
   </p:cSld>
   <p:clrMap bg1="lt1" tx1="dk1" bg2="lt2" tx2="dk2" accent1="accent1" accent2="accent2" accent3="accent3" accent4="accent4" accent5="accent5" accent6="accent6" hlink="hlink" folHlink="folHlink"/>
   <p:sldLayoutIdLst>
-    <p:sldLayoutId xmlns:r="http://schemas.openxmlformats.org/officeDocument/2006/relationships" id="2147483649" r:id="R58ad4667a9074bcd"/>
+    <p:sldLayoutId xmlns:r="http://schemas.openxmlformats.org/officeDocument/2006/relationships" id="2147483649" r:id="R856ae76245d64f4d"/>
   </p:sldLayoutIdLst>
   <p:txStyles>
     <p:titleStyle>
@@ -3748,7 +3008,7 @@
 </file>
 
 <file path=ppt/slides/charts/chart1.xml><?xml version="1.0" encoding="utf-8"?>
-<c:chartSpace xmlns:c="http://schemas.openxmlformats.org/drawingml/2006/chart">
+<c:chartSpace xmlns:c="http://schemas.openxmlformats.org/drawingml/2006/chart" xmlns:r="http://schemas.openxmlformats.org/officeDocument/2006/relationships">
   <c:lang val="en-US"/>
   <c:chart>
     <c:plotArea>
@@ -3779,46 +3039,52 @@
             </c:spPr>
           </c:marker>
           <c:cat>
-            <c:numLit>
-              <c:formatCode>General</c:formatCode>
-              <c:ptCount val="5"/>
-              <c:pt idx="0">
-                <c:v>32</c:v>
-              </c:pt>
-              <c:pt idx="1">
-                <c:v>64</c:v>
-              </c:pt>
-              <c:pt idx="2">
-                <c:v>128</c:v>
-              </c:pt>
-              <c:pt idx="3">
-                <c:v>256</c:v>
-              </c:pt>
-              <c:pt idx="4">
-                <c:v>512</c:v>
-              </c:pt>
-            </c:numLit>
+            <c:numRef>
+              <c:f>'Chart Data'!$A$2:$A$6</c:f>
+              <c:numCache>
+                <c:formatCode>General</c:formatCode>
+                <c:ptCount val="5"/>
+                <c:pt idx="0">
+                  <c:v>32</c:v>
+                </c:pt>
+                <c:pt idx="1">
+                  <c:v>64</c:v>
+                </c:pt>
+                <c:pt idx="2">
+                  <c:v>128</c:v>
+                </c:pt>
+                <c:pt idx="3">
+                  <c:v>256</c:v>
+                </c:pt>
+                <c:pt idx="4">
+                  <c:v>512</c:v>
+                </c:pt>
+              </c:numCache>
+            </c:numRef>
           </c:cat>
           <c:val>
-            <c:numLit>
-              <c:formatCode>0.0</c:formatCode>
-              <c:ptCount val="5"/>
-              <c:pt idx="0">
-                <c:v>3.22642</c:v>
-              </c:pt>
-              <c:pt idx="1">
-                <c:v>2.202394</c:v>
-              </c:pt>
-              <c:pt idx="2">
-                <c:v>1.351064</c:v>
-              </c:pt>
-              <c:pt idx="3">
-                <c:v>0.850597</c:v>
-              </c:pt>
-              <c:pt idx="4">
-                <c:v>0.567187</c:v>
-              </c:pt>
-            </c:numLit>
+            <c:numRef>
+              <c:f>'Chart Data'!$B$2:$B$6</c:f>
+              <c:numCache>
+                <c:formatCode>0.0</c:formatCode>
+                <c:ptCount val="5"/>
+                <c:pt idx="0">
+                  <c:v>3.22642</c:v>
+                </c:pt>
+                <c:pt idx="1">
+                  <c:v>2.202394</c:v>
+                </c:pt>
+                <c:pt idx="2">
+                  <c:v>1.351064</c:v>
+                </c:pt>
+                <c:pt idx="3">
+                  <c:v>0.850597</c:v>
+                </c:pt>
+                <c:pt idx="4">
+                  <c:v>0.567187</c:v>
+                </c:pt>
+              </c:numCache>
+            </c:numRef>
           </c:val>
           <c:smooth val="0"/>
         </c:ser>
@@ -3840,46 +3106,52 @@
             <c:symbol val="none"/>
           </c:marker>
           <c:cat>
-            <c:numLit>
-              <c:formatCode>General</c:formatCode>
-              <c:ptCount val="5"/>
-              <c:pt idx="0">
-                <c:v>32</c:v>
-              </c:pt>
-              <c:pt idx="1">
-                <c:v>64</c:v>
-              </c:pt>
-              <c:pt idx="2">
-                <c:v>128</c:v>
-              </c:pt>
-              <c:pt idx="3">
-                <c:v>256</c:v>
-              </c:pt>
-              <c:pt idx="4">
-                <c:v>512</c:v>
-              </c:pt>
-            </c:numLit>
+            <c:numRef>
+              <c:f>'Chart Data'!$C$2:$C$6</c:f>
+              <c:numCache>
+                <c:formatCode>General</c:formatCode>
+                <c:ptCount val="5"/>
+                <c:pt idx="0">
+                  <c:v>32</c:v>
+                </c:pt>
+                <c:pt idx="1">
+                  <c:v>64</c:v>
+                </c:pt>
+                <c:pt idx="2">
+                  <c:v>128</c:v>
+                </c:pt>
+                <c:pt idx="3">
+                  <c:v>256</c:v>
+                </c:pt>
+                <c:pt idx="4">
+                  <c:v>512</c:v>
+                </c:pt>
+              </c:numCache>
+            </c:numRef>
           </c:cat>
           <c:val>
-            <c:numLit>
-              <c:formatCode>0.0</c:formatCode>
-              <c:ptCount val="5"/>
-              <c:pt idx="0">
-                <c:v>1</c:v>
-              </c:pt>
-              <c:pt idx="1">
-                <c:v>1</c:v>
-              </c:pt>
-              <c:pt idx="2">
-                <c:v>1</c:v>
-              </c:pt>
-              <c:pt idx="3">
-                <c:v>1</c:v>
-              </c:pt>
-              <c:pt idx="4">
-                <c:v>1</c:v>
-              </c:pt>
-            </c:numLit>
+            <c:numRef>
+              <c:f>'Chart Data'!$D$2:$D$6</c:f>
+              <c:numCache>
+                <c:formatCode>0.0</c:formatCode>
+                <c:ptCount val="5"/>
+                <c:pt idx="0">
+                  <c:v>1</c:v>
+                </c:pt>
+                <c:pt idx="1">
+                  <c:v>1</c:v>
+                </c:pt>
+                <c:pt idx="2">
+                  <c:v>1</c:v>
+                </c:pt>
+                <c:pt idx="3">
+                  <c:v>1</c:v>
+                </c:pt>
+                <c:pt idx="4">
+                  <c:v>1</c:v>
+                </c:pt>
+              </c:numCache>
+            </c:numRef>
           </c:val>
           <c:smooth val="0"/>
         </c:ser>
@@ -4073,6 +3345,9 @@
       <a:prstDash val="solid"/>
     </a:ln>
   </c:spPr>
+  <c:externalData r:id="rIdChartSnapshot1">
+    <c:autoUpdate val="0"/>
+  </c:externalData>
 </c:chartSpace>
 </file>
 
@@ -4137,7 +3412,7 @@
           <p:nvPr/>
         </p:nvPicPr>
         <p:blipFill>
-          <a:blip xmlns:r="http://schemas.openxmlformats.org/officeDocument/2006/relationships" xmlns:a="http://schemas.openxmlformats.org/drawingml/2006/main" r:embed="R934ea58fea55426d"/>
+          <a:blip xmlns:r="http://schemas.openxmlformats.org/officeDocument/2006/relationships" xmlns:a="http://schemas.openxmlformats.org/drawingml/2006/main" r:embed="R6296062fc1934160"/>
           <a:stretch xmlns:a="http://schemas.openxmlformats.org/drawingml/2006/main"/>
         </p:blipFill>
         <p:spPr>
@@ -4597,7 +3872,7 @@
                   <a:srgbClr val="102A43"/>
                 </a:solidFill>
               </a:rPr>
-              <a:t>正确插入还需要 ownership 安全的事务式更新</a:t>
+              <a:t>Ownership 安全的拆分与转移</a:t>
             </a:r>
           </a:p>
         </p:txBody>
@@ -5856,7 +5131,7 @@
                   <a:srgbClr val="52606D"/>
                 </a:solidFill>
               </a:rPr>
-              <a:t>只重新绑定获得的非空片段。</a:t>
+              <a:t>只有 acquired 的非空片段改变 parent ownership。</a:t>
             </a:r>
           </a:p>
         </p:txBody>
@@ -6633,7 +5908,7 @@
                   <a:srgbClr val="102A43"/>
                 </a:solidFill>
               </a:rPr>
-              <a:t>验证同时覆盖实现状态与证据完整性</a:t>
+              <a:t>实现检查与实验一致性</a:t>
             </a:r>
           </a:p>
         </p:txBody>
@@ -6814,10 +6089,10 @@
       </p:sp>
       <p:sp>
         <p:nvSpPr>
-          <p:cNvPr id="7" name="">
-            <a:extLst xmlns:a="http://schemas.openxmlformats.org/drawingml/2006/main">
-              <a:ext uri="{FF2B5EF4-FFF2-40B4-BE49-F238E27FC236}">
-                <a16:creationId xmlns:a16="http://schemas.microsoft.com/office/drawing/2014/main" id="{E213557C-438B-4912-9E93-02F2C3B8E1AB}"/>
+          <p:cNvPr id="33" name="">
+            <a:extLst xmlns:a="http://schemas.openxmlformats.org/drawingml/2006/main">
+              <a:ext uri="{FF2B5EF4-FFF2-40B4-BE49-F238E27FC236}">
+                <a16:creationId xmlns:a16="http://schemas.microsoft.com/office/drawing/2014/main" id="{F52AC86B-2CC7-4F0F-B20E-61027C928C73}"/>
               </a:ext>
             </a:extLst>
           </p:cNvPr>
@@ -6851,16 +6126,16 @@
                 <a:spcPct val="105000"/>
               </a:lnSpc>
               <a:buNone/>
-              <a:defRPr sz="1125" b="1" i="0">
-                <a:solidFill>
-                  <a:srgbClr val="2A9D8F"/>
-                </a:solidFill>
-              </a:defRPr>
-            </a:pPr>
-            <a:r>
-              <a:rPr sz="1125" b="1" i="0">
-                <a:solidFill>
-                  <a:srgbClr val="2A9D8F"/>
+              <a:defRPr sz="1125" b="1">
+                <a:solidFill>
+                  <a:srgbClr val="187A84"/>
+                </a:solidFill>
+              </a:defRPr>
+            </a:pPr>
+            <a:r>
+              <a:rPr sz="1125" b="1">
+                <a:solidFill>
+                  <a:srgbClr val="187A84"/>
                 </a:solidFill>
               </a:rPr>
               <a:t>实现与状态验证</a:t>
@@ -6870,10 +6145,10 @@
       </p:sp>
       <p:sp>
         <p:nvSpPr>
-          <p:cNvPr id="8" name="">
-            <a:extLst xmlns:a="http://schemas.openxmlformats.org/drawingml/2006/main">
-              <a:ext uri="{FF2B5EF4-FFF2-40B4-BE49-F238E27FC236}">
-                <a16:creationId xmlns:a16="http://schemas.microsoft.com/office/drawing/2014/main" id="{C2757D5B-7A88-4F7A-B010-57A2C555FBF2}"/>
+          <p:cNvPr id="34" name="">
+            <a:extLst xmlns:a="http://schemas.openxmlformats.org/drawingml/2006/main">
+              <a:ext uri="{FF2B5EF4-FFF2-40B4-BE49-F238E27FC236}">
+                <a16:creationId xmlns:a16="http://schemas.microsoft.com/office/drawing/2014/main" id="{67FFC9D5-1FEB-4283-8ED5-4FE4D3D58289}"/>
               </a:ext>
             </a:extLst>
           </p:cNvPr>
@@ -6907,29 +6182,29 @@
                 <a:spcPct val="105000"/>
               </a:lnSpc>
               <a:buNone/>
-              <a:defRPr sz="1125" b="1" i="0">
-                <a:solidFill>
-                  <a:srgbClr val="E76F51"/>
-                </a:solidFill>
-              </a:defRPr>
-            </a:pPr>
-            <a:r>
-              <a:rPr sz="1125" b="1" i="0">
-                <a:solidFill>
-                  <a:srgbClr val="E76F51"/>
-                </a:solidFill>
-              </a:rPr>
-              <a:t>证据完整性与可复现性</a:t>
-            </a:r>
-          </a:p>
-        </p:txBody>
-      </p:sp>
-      <p:sp>
-        <p:nvSpPr>
-          <p:cNvPr id="9" name="">
-            <a:extLst xmlns:a="http://schemas.openxmlformats.org/drawingml/2006/main">
-              <a:ext uri="{FF2B5EF4-FFF2-40B4-BE49-F238E27FC236}">
-                <a16:creationId xmlns:a16="http://schemas.microsoft.com/office/drawing/2014/main" id="{ED06CB57-9841-4BEA-80FB-2A26E0DE0527}"/>
+              <a:defRPr sz="1125" b="1">
+                <a:solidFill>
+                  <a:srgbClr val="D36B4A"/>
+                </a:solidFill>
+              </a:defRPr>
+            </a:pPr>
+            <a:r>
+              <a:rPr sz="1125" b="1">
+                <a:solidFill>
+                  <a:srgbClr val="D36B4A"/>
+                </a:solidFill>
+              </a:rPr>
+              <a:t>实验输出检查</a:t>
+            </a:r>
+          </a:p>
+        </p:txBody>
+      </p:sp>
+      <p:sp>
+        <p:nvSpPr>
+          <p:cNvPr id="35" name="">
+            <a:extLst xmlns:a="http://schemas.openxmlformats.org/drawingml/2006/main">
+              <a:ext uri="{FF2B5EF4-FFF2-40B4-BE49-F238E27FC236}">
+                <a16:creationId xmlns:a16="http://schemas.microsoft.com/office/drawing/2014/main" id="{DFB28C63-E5E9-48EA-9738-6109E5CAE012}"/>
               </a:ext>
             </a:extLst>
           </p:cNvPr>
@@ -6949,11 +6224,11 @@
             </a:avLst>
           </a:prstGeom>
           <a:solidFill xmlns:a="http://schemas.openxmlformats.org/drawingml/2006/main">
-            <a:srgbClr val="E8F5F3"/>
+            <a:srgbClr val="E8F4F3"/>
           </a:solidFill>
           <a:ln xmlns:a="http://schemas.openxmlformats.org/drawingml/2006/main" w="11430">
             <a:solidFill>
-              <a:srgbClr val="2A9D8F"/>
+              <a:srgbClr val="187A84"/>
             </a:solidFill>
             <a:prstDash val="solid"/>
           </a:ln>
@@ -6961,10 +6236,10 @@
       </p:sp>
       <p:sp>
         <p:nvSpPr>
-          <p:cNvPr id="10" name="">
-            <a:extLst xmlns:a="http://schemas.openxmlformats.org/drawingml/2006/main">
-              <a:ext uri="{FF2B5EF4-FFF2-40B4-BE49-F238E27FC236}">
-                <a16:creationId xmlns:a16="http://schemas.microsoft.com/office/drawing/2014/main" id="{3D601CF1-9398-4518-8CCF-0913AD699491}"/>
+          <p:cNvPr id="36" name="">
+            <a:extLst xmlns:a="http://schemas.openxmlformats.org/drawingml/2006/main">
+              <a:ext uri="{FF2B5EF4-FFF2-40B4-BE49-F238E27FC236}">
+                <a16:creationId xmlns:a16="http://schemas.microsoft.com/office/drawing/2014/main" id="{90ABBBD4-F6B7-4D85-A16C-577D178D5C0C}"/>
               </a:ext>
             </a:extLst>
           </p:cNvPr>
@@ -6998,16 +6273,16 @@
                 <a:spcPct val="105000"/>
               </a:lnSpc>
               <a:buNone/>
-              <a:defRPr sz="1500" b="0" i="0">
-                <a:solidFill>
-                  <a:srgbClr val="243B53"/>
-                </a:solidFill>
-              </a:defRPr>
-            </a:pPr>
-            <a:r>
-              <a:rPr sz="1500" b="0" i="0">
-                <a:solidFill>
-                  <a:srgbClr val="243B53"/>
+              <a:defRPr sz="1500" b="0">
+                <a:solidFill>
+                  <a:srgbClr val="243746"/>
+                </a:solidFill>
+              </a:defRPr>
+            </a:pPr>
+            <a:r>
+              <a:rPr sz="1500" b="0">
+                <a:solidFill>
+                  <a:srgbClr val="243746"/>
                 </a:solidFill>
               </a:rPr>
               <a:t>重点回归用例</a:t>
@@ -7017,21 +6292,245 @@
       </p:sp>
       <p:sp>
         <p:nvSpPr>
-          <p:cNvPr id="11" name="">
-            <a:extLst xmlns:a="http://schemas.openxmlformats.org/drawingml/2006/main">
-              <a:ext uri="{FF2B5EF4-FFF2-40B4-BE49-F238E27FC236}">
-                <a16:creationId xmlns:a16="http://schemas.microsoft.com/office/drawing/2014/main" id="{0CADD423-AB34-4710-AF0D-66E7347884AF}"/>
-              </a:ext>
-            </a:extLst>
-          </p:cNvPr>
-          <p:cNvSpPr>
-            <a:spLocks xmlns:a="http://schemas.openxmlformats.org/drawingml/2006/main" noGrp="1"/>
-          </p:cNvSpPr>
-          <p:nvPr/>
-        </p:nvSpPr>
-        <p:spPr>
-          <a:xfrm xmlns:a="http://schemas.openxmlformats.org/drawingml/2006/main">
-            <a:off x="6877050" y="1924050"/>
+          <p:cNvPr id="37" name="">
+            <a:extLst xmlns:a="http://schemas.openxmlformats.org/drawingml/2006/main">
+              <a:ext uri="{FF2B5EF4-FFF2-40B4-BE49-F238E27FC236}">
+                <a16:creationId xmlns:a16="http://schemas.microsoft.com/office/drawing/2014/main" id="{A5E089FC-ECB9-45AD-B60A-E8AE35983B42}"/>
+              </a:ext>
+            </a:extLst>
+          </p:cNvPr>
+          <p:cNvSpPr>
+            <a:spLocks xmlns:a="http://schemas.openxmlformats.org/drawingml/2006/main" noGrp="1"/>
+          </p:cNvSpPr>
+          <p:nvPr/>
+        </p:nvSpPr>
+        <p:spPr>
+          <a:xfrm xmlns:a="http://schemas.openxmlformats.org/drawingml/2006/main">
+            <a:off x="2724150" y="2505075"/>
+            <a:ext cx="685800" cy="266700"/>
+          </a:xfrm>
+          <a:prstGeom xmlns:a="http://schemas.openxmlformats.org/drawingml/2006/main" prst="rect">
+            <a:avLst/>
+          </a:prstGeom>
+          <a:noFill xmlns:a="http://schemas.openxmlformats.org/drawingml/2006/main"/>
+          <a:ln xmlns:a="http://schemas.openxmlformats.org/drawingml/2006/main" w="0">
+            <a:noFill/>
+            <a:prstDash val="solid"/>
+          </a:ln>
+        </p:spPr>
+        <p:txBody>
+          <a:bodyPr xmlns:a="http://schemas.openxmlformats.org/drawingml/2006/main" wrap="square" lIns="38100" tIns="19050" rIns="38100" bIns="19050" anchor="t">
+            <a:normAutofit fontScale="73260"/>
+          </a:bodyPr>
+          <a:lstStyle xmlns:a="http://schemas.openxmlformats.org/drawingml/2006/main"/>
+          <a:p xmlns:a="http://schemas.openxmlformats.org/drawingml/2006/main">
+            <a:pPr algn="ctr">
+              <a:lnSpc>
+                <a:spcPct val="105000"/>
+              </a:lnSpc>
+              <a:buNone/>
+              <a:defRPr sz="1950" b="1">
+                <a:solidFill>
+                  <a:srgbClr val="187A84"/>
+                </a:solidFill>
+              </a:defRPr>
+            </a:pPr>
+            <a:r>
+              <a:rPr sz="1950" b="1">
+                <a:solidFill>
+                  <a:srgbClr val="187A84"/>
+                </a:solidFill>
+              </a:rPr>
+              <a:t>↓</a:t>
+            </a:r>
+          </a:p>
+        </p:txBody>
+      </p:sp>
+      <p:sp>
+        <p:nvSpPr>
+          <p:cNvPr id="38" name="">
+            <a:extLst xmlns:a="http://schemas.openxmlformats.org/drawingml/2006/main">
+              <a:ext uri="{FF2B5EF4-FFF2-40B4-BE49-F238E27FC236}">
+                <a16:creationId xmlns:a16="http://schemas.microsoft.com/office/drawing/2014/main" id="{7DC4DF5D-8874-4618-96BF-42EB879878B5}"/>
+              </a:ext>
+            </a:extLst>
+          </p:cNvPr>
+          <p:cNvSpPr>
+            <a:spLocks xmlns:a="http://schemas.openxmlformats.org/drawingml/2006/main" noGrp="1"/>
+          </p:cNvSpPr>
+          <p:nvPr/>
+        </p:nvSpPr>
+        <p:spPr>
+          <a:xfrm xmlns:a="http://schemas.openxmlformats.org/drawingml/2006/main">
+            <a:off x="838200" y="2800350"/>
+            <a:ext cx="4476750" cy="781050"/>
+          </a:xfrm>
+          <a:prstGeom xmlns:a="http://schemas.openxmlformats.org/drawingml/2006/main" prst="roundRect">
+            <a:avLst>
+              <a:gd name="adj" fmla="val 8537"/>
+            </a:avLst>
+          </a:prstGeom>
+          <a:solidFill xmlns:a="http://schemas.openxmlformats.org/drawingml/2006/main">
+            <a:srgbClr val="E8F4F3"/>
+          </a:solidFill>
+          <a:ln xmlns:a="http://schemas.openxmlformats.org/drawingml/2006/main" w="11430">
+            <a:solidFill>
+              <a:srgbClr val="187A84"/>
+            </a:solidFill>
+            <a:prstDash val="solid"/>
+          </a:ln>
+        </p:spPr>
+      </p:sp>
+      <p:sp>
+        <p:nvSpPr>
+          <p:cNvPr id="39" name="">
+            <a:extLst xmlns:a="http://schemas.openxmlformats.org/drawingml/2006/main">
+              <a:ext uri="{FF2B5EF4-FFF2-40B4-BE49-F238E27FC236}">
+                <a16:creationId xmlns:a16="http://schemas.microsoft.com/office/drawing/2014/main" id="{D56ED2C9-F25D-48F5-8F3C-DBE96999C08E}"/>
+              </a:ext>
+            </a:extLst>
+          </p:cNvPr>
+          <p:cNvSpPr>
+            <a:spLocks xmlns:a="http://schemas.openxmlformats.org/drawingml/2006/main" noGrp="1"/>
+          </p:cNvSpPr>
+          <p:nvPr/>
+        </p:nvSpPr>
+        <p:spPr>
+          <a:xfrm xmlns:a="http://schemas.openxmlformats.org/drawingml/2006/main">
+            <a:off x="990600" y="2876550"/>
+            <a:ext cx="4171950" cy="628650"/>
+          </a:xfrm>
+          <a:prstGeom xmlns:a="http://schemas.openxmlformats.org/drawingml/2006/main" prst="rect">
+            <a:avLst/>
+          </a:prstGeom>
+          <a:noFill xmlns:a="http://schemas.openxmlformats.org/drawingml/2006/main"/>
+          <a:ln xmlns:a="http://schemas.openxmlformats.org/drawingml/2006/main" w="0">
+            <a:noFill/>
+            <a:prstDash val="solid"/>
+          </a:ln>
+        </p:spPr>
+        <p:txBody>
+          <a:bodyPr xmlns:a="http://schemas.openxmlformats.org/drawingml/2006/main" wrap="square" lIns="38100" tIns="19050" rIns="38100" bIns="19050" anchor="ctr">
+            <a:normAutofit fontScale="100000"/>
+          </a:bodyPr>
+          <a:lstStyle xmlns:a="http://schemas.openxmlformats.org/drawingml/2006/main"/>
+          <a:p xmlns:a="http://schemas.openxmlformats.org/drawingml/2006/main">
+            <a:pPr algn="ctr">
+              <a:lnSpc>
+                <a:spcPct val="105000"/>
+              </a:lnSpc>
+              <a:buNone/>
+              <a:defRPr sz="1350" b="1">
+                <a:solidFill>
+                  <a:srgbClr val="243746"/>
+                </a:solidFill>
+              </a:defRPr>
+            </a:pPr>
+            <a:r>
+              <a:rPr sz="1350" b="1">
+                <a:solidFill>
+                  <a:srgbClr val="243746"/>
+                </a:solidFill>
+              </a:rPr>
+              <a:t>有界穷举验证</a:t>
+            </a:r>
+          </a:p>
+          <a:p xmlns:a="http://schemas.openxmlformats.org/drawingml/2006/main">
+            <a:pPr algn="ctr">
+              <a:lnSpc>
+                <a:spcPct val="105000"/>
+              </a:lnSpc>
+              <a:buNone/>
+              <a:defRPr sz="1350" b="1">
+                <a:solidFill>
+                  <a:srgbClr val="243746"/>
+                </a:solidFill>
+              </a:defRPr>
+            </a:pPr>
+            <a:r>
+              <a:rPr sz="1350" b="1">
+                <a:solidFill>
+                  <a:srgbClr val="243746"/>
+                </a:solidFill>
+              </a:rPr>
+              <a:t>2,074 个 oracle-valid 排列，n ≤ 8</a:t>
+            </a:r>
+          </a:p>
+        </p:txBody>
+      </p:sp>
+      <p:sp>
+        <p:nvSpPr>
+          <p:cNvPr id="40" name="">
+            <a:extLst xmlns:a="http://schemas.openxmlformats.org/drawingml/2006/main">
+              <a:ext uri="{FF2B5EF4-FFF2-40B4-BE49-F238E27FC236}">
+                <a16:creationId xmlns:a16="http://schemas.microsoft.com/office/drawing/2014/main" id="{4C879051-7F58-4C2E-936A-C894B4016B9A}"/>
+              </a:ext>
+            </a:extLst>
+          </p:cNvPr>
+          <p:cNvSpPr>
+            <a:spLocks xmlns:a="http://schemas.openxmlformats.org/drawingml/2006/main" noGrp="1"/>
+          </p:cNvSpPr>
+          <p:nvPr/>
+        </p:nvSpPr>
+        <p:spPr>
+          <a:xfrm xmlns:a="http://schemas.openxmlformats.org/drawingml/2006/main">
+            <a:off x="2724150" y="3552825"/>
+            <a:ext cx="685800" cy="266700"/>
+          </a:xfrm>
+          <a:prstGeom xmlns:a="http://schemas.openxmlformats.org/drawingml/2006/main" prst="rect">
+            <a:avLst/>
+          </a:prstGeom>
+          <a:noFill xmlns:a="http://schemas.openxmlformats.org/drawingml/2006/main"/>
+          <a:ln xmlns:a="http://schemas.openxmlformats.org/drawingml/2006/main" w="0">
+            <a:noFill/>
+            <a:prstDash val="solid"/>
+          </a:ln>
+        </p:spPr>
+        <p:txBody>
+          <a:bodyPr xmlns:a="http://schemas.openxmlformats.org/drawingml/2006/main" wrap="square" lIns="38100" tIns="19050" rIns="38100" bIns="19050" anchor="t">
+            <a:normAutofit fontScale="73260"/>
+          </a:bodyPr>
+          <a:lstStyle xmlns:a="http://schemas.openxmlformats.org/drawingml/2006/main"/>
+          <a:p xmlns:a="http://schemas.openxmlformats.org/drawingml/2006/main">
+            <a:pPr algn="ctr">
+              <a:lnSpc>
+                <a:spcPct val="105000"/>
+              </a:lnSpc>
+              <a:buNone/>
+              <a:defRPr sz="1950" b="1">
+                <a:solidFill>
+                  <a:srgbClr val="187A84"/>
+                </a:solidFill>
+              </a:defRPr>
+            </a:pPr>
+            <a:r>
+              <a:rPr sz="1950" b="1">
+                <a:solidFill>
+                  <a:srgbClr val="187A84"/>
+                </a:solidFill>
+              </a:rPr>
+              <a:t>↓</a:t>
+            </a:r>
+          </a:p>
+        </p:txBody>
+      </p:sp>
+      <p:sp>
+        <p:nvSpPr>
+          <p:cNvPr id="41" name="">
+            <a:extLst xmlns:a="http://schemas.openxmlformats.org/drawingml/2006/main">
+              <a:ext uri="{FF2B5EF4-FFF2-40B4-BE49-F238E27FC236}">
+                <a16:creationId xmlns:a16="http://schemas.microsoft.com/office/drawing/2014/main" id="{72ACB93E-B5CC-4978-A889-5E845A2AD383}"/>
+              </a:ext>
+            </a:extLst>
+          </p:cNvPr>
+          <p:cNvSpPr>
+            <a:spLocks xmlns:a="http://schemas.openxmlformats.org/drawingml/2006/main" noGrp="1"/>
+          </p:cNvSpPr>
+          <p:nvPr/>
+        </p:nvSpPr>
+        <p:spPr>
+          <a:xfrm xmlns:a="http://schemas.openxmlformats.org/drawingml/2006/main">
+            <a:off x="838200" y="3829050"/>
             <a:ext cx="4476750" cy="609600"/>
           </a:xfrm>
           <a:prstGeom xmlns:a="http://schemas.openxmlformats.org/drawingml/2006/main" prst="roundRect">
@@ -7040,11 +6539,11 @@
             </a:avLst>
           </a:prstGeom>
           <a:solidFill xmlns:a="http://schemas.openxmlformats.org/drawingml/2006/main">
-            <a:srgbClr val="FCEEEA"/>
+            <a:srgbClr val="E8F4F3"/>
           </a:solidFill>
           <a:ln xmlns:a="http://schemas.openxmlformats.org/drawingml/2006/main" w="11430">
             <a:solidFill>
-              <a:srgbClr val="E76F51"/>
+              <a:srgbClr val="187A84"/>
             </a:solidFill>
             <a:prstDash val="solid"/>
           </a:ln>
@@ -7052,21 +6551,21 @@
       </p:sp>
       <p:sp>
         <p:nvSpPr>
-          <p:cNvPr id="12" name="">
-            <a:extLst xmlns:a="http://schemas.openxmlformats.org/drawingml/2006/main">
-              <a:ext uri="{FF2B5EF4-FFF2-40B4-BE49-F238E27FC236}">
-                <a16:creationId xmlns:a16="http://schemas.microsoft.com/office/drawing/2014/main" id="{F1018C57-28E1-4440-B72D-290612D4465B}"/>
-              </a:ext>
-            </a:extLst>
-          </p:cNvPr>
-          <p:cNvSpPr>
-            <a:spLocks xmlns:a="http://schemas.openxmlformats.org/drawingml/2006/main" noGrp="1"/>
-          </p:cNvSpPr>
-          <p:nvPr/>
-        </p:nvSpPr>
-        <p:spPr>
-          <a:xfrm xmlns:a="http://schemas.openxmlformats.org/drawingml/2006/main">
-            <a:off x="7029450" y="2000250"/>
+          <p:cNvPr id="42" name="">
+            <a:extLst xmlns:a="http://schemas.openxmlformats.org/drawingml/2006/main">
+              <a:ext uri="{FF2B5EF4-FFF2-40B4-BE49-F238E27FC236}">
+                <a16:creationId xmlns:a16="http://schemas.microsoft.com/office/drawing/2014/main" id="{755C337C-405F-4619-BDB3-A62D2EE00FB5}"/>
+              </a:ext>
+            </a:extLst>
+          </p:cNvPr>
+          <p:cNvSpPr>
+            <a:spLocks xmlns:a="http://schemas.openxmlformats.org/drawingml/2006/main" noGrp="1"/>
+          </p:cNvSpPr>
+          <p:nvPr/>
+        </p:nvSpPr>
+        <p:spPr>
+          <a:xfrm xmlns:a="http://schemas.openxmlformats.org/drawingml/2006/main">
+            <a:off x="990600" y="3905250"/>
             <a:ext cx="4171950" cy="457200"/>
           </a:xfrm>
           <a:prstGeom xmlns:a="http://schemas.openxmlformats.org/drawingml/2006/main" prst="rect">
@@ -7089,40 +6588,40 @@
                 <a:spcPct val="105000"/>
               </a:lnSpc>
               <a:buNone/>
-              <a:defRPr sz="1500" b="0" i="0">
-                <a:solidFill>
-                  <a:srgbClr val="243B53"/>
-                </a:solidFill>
-              </a:defRPr>
-            </a:pPr>
-            <a:r>
-              <a:rPr sz="1500" b="0" i="0">
-                <a:solidFill>
-                  <a:srgbClr val="243B53"/>
-                </a:solidFill>
-              </a:rPr>
-              <a:t>预先规定的协议</a:t>
-            </a:r>
-          </a:p>
-        </p:txBody>
-      </p:sp>
-      <p:sp>
-        <p:nvSpPr>
-          <p:cNvPr id="13" name="">
-            <a:extLst xmlns:a="http://schemas.openxmlformats.org/drawingml/2006/main">
-              <a:ext uri="{FF2B5EF4-FFF2-40B4-BE49-F238E27FC236}">
-                <a16:creationId xmlns:a16="http://schemas.microsoft.com/office/drawing/2014/main" id="{1F9B8142-6A54-4023-BCCE-7D86A8090582}"/>
-              </a:ext>
-            </a:extLst>
-          </p:cNvPr>
-          <p:cNvSpPr>
-            <a:spLocks xmlns:a="http://schemas.openxmlformats.org/drawingml/2006/main" noGrp="1"/>
-          </p:cNvSpPr>
-          <p:nvPr/>
-        </p:nvSpPr>
-        <p:spPr>
-          <a:xfrm xmlns:a="http://schemas.openxmlformats.org/drawingml/2006/main">
-            <a:off x="2724150" y="2505075"/>
+              <a:defRPr sz="1500" b="0">
+                <a:solidFill>
+                  <a:srgbClr val="243746"/>
+                </a:solidFill>
+              </a:defRPr>
+            </a:pPr>
+            <a:r>
+              <a:rPr sz="1500" b="0">
+                <a:solidFill>
+                  <a:srgbClr val="243746"/>
+                </a:solidFill>
+              </a:rPr>
+              <a:t>checked-state audit</a:t>
+            </a:r>
+          </a:p>
+        </p:txBody>
+      </p:sp>
+      <p:sp>
+        <p:nvSpPr>
+          <p:cNvPr id="43" name="">
+            <a:extLst xmlns:a="http://schemas.openxmlformats.org/drawingml/2006/main">
+              <a:ext uri="{FF2B5EF4-FFF2-40B4-BE49-F238E27FC236}">
+                <a16:creationId xmlns:a16="http://schemas.microsoft.com/office/drawing/2014/main" id="{5CF3D8E6-9A1D-4F82-A68D-EF77417A2316}"/>
+              </a:ext>
+            </a:extLst>
+          </p:cNvPr>
+          <p:cNvSpPr>
+            <a:spLocks xmlns:a="http://schemas.openxmlformats.org/drawingml/2006/main" noGrp="1"/>
+          </p:cNvSpPr>
+          <p:nvPr/>
+        </p:nvSpPr>
+        <p:spPr>
+          <a:xfrm xmlns:a="http://schemas.openxmlformats.org/drawingml/2006/main">
+            <a:off x="2724150" y="4410075"/>
             <a:ext cx="685800" cy="266700"/>
           </a:xfrm>
           <a:prstGeom xmlns:a="http://schemas.openxmlformats.org/drawingml/2006/main" prst="rect">
@@ -7145,16 +6644,16 @@
                 <a:spcPct val="105000"/>
               </a:lnSpc>
               <a:buNone/>
-              <a:defRPr sz="1950" b="1" i="0">
-                <a:solidFill>
-                  <a:srgbClr val="2A9D8F"/>
-                </a:solidFill>
-              </a:defRPr>
-            </a:pPr>
-            <a:r>
-              <a:rPr sz="1950" b="1" i="0">
-                <a:solidFill>
-                  <a:srgbClr val="2A9D8F"/>
+              <a:defRPr sz="1950" b="1">
+                <a:solidFill>
+                  <a:srgbClr val="187A84"/>
+                </a:solidFill>
+              </a:defRPr>
+            </a:pPr>
+            <a:r>
+              <a:rPr sz="1950" b="1">
+                <a:solidFill>
+                  <a:srgbClr val="187A84"/>
                 </a:solidFill>
               </a:rPr>
               <a:t>↓</a:t>
@@ -7164,189 +6663,21 @@
       </p:sp>
       <p:sp>
         <p:nvSpPr>
-          <p:cNvPr id="14" name="">
-            <a:extLst xmlns:a="http://schemas.openxmlformats.org/drawingml/2006/main">
-              <a:ext uri="{FF2B5EF4-FFF2-40B4-BE49-F238E27FC236}">
-                <a16:creationId xmlns:a16="http://schemas.microsoft.com/office/drawing/2014/main" id="{EEF6E43E-1B53-40BA-AA8F-250FDD8691FD}"/>
-              </a:ext>
-            </a:extLst>
-          </p:cNvPr>
-          <p:cNvSpPr>
-            <a:spLocks xmlns:a="http://schemas.openxmlformats.org/drawingml/2006/main" noGrp="1"/>
-          </p:cNvSpPr>
-          <p:nvPr/>
-        </p:nvSpPr>
-        <p:spPr>
-          <a:xfrm xmlns:a="http://schemas.openxmlformats.org/drawingml/2006/main">
-            <a:off x="8763000" y="2505075"/>
-            <a:ext cx="685800" cy="266700"/>
-          </a:xfrm>
-          <a:prstGeom xmlns:a="http://schemas.openxmlformats.org/drawingml/2006/main" prst="rect">
-            <a:avLst/>
-          </a:prstGeom>
-          <a:noFill xmlns:a="http://schemas.openxmlformats.org/drawingml/2006/main"/>
-          <a:ln xmlns:a="http://schemas.openxmlformats.org/drawingml/2006/main" w="0">
-            <a:noFill/>
-            <a:prstDash val="solid"/>
-          </a:ln>
-        </p:spPr>
-        <p:txBody>
-          <a:bodyPr xmlns:a="http://schemas.openxmlformats.org/drawingml/2006/main" wrap="square" lIns="38100" tIns="19050" rIns="38100" bIns="19050" anchor="t">
-            <a:normAutofit fontScale="73260"/>
-          </a:bodyPr>
-          <a:lstStyle xmlns:a="http://schemas.openxmlformats.org/drawingml/2006/main"/>
-          <a:p xmlns:a="http://schemas.openxmlformats.org/drawingml/2006/main">
-            <a:pPr algn="ctr">
-              <a:lnSpc>
-                <a:spcPct val="105000"/>
-              </a:lnSpc>
-              <a:buNone/>
-              <a:defRPr sz="1950" b="1" i="0">
-                <a:solidFill>
-                  <a:srgbClr val="E76F51"/>
-                </a:solidFill>
-              </a:defRPr>
-            </a:pPr>
-            <a:r>
-              <a:rPr sz="1950" b="1" i="0">
-                <a:solidFill>
-                  <a:srgbClr val="E76F51"/>
-                </a:solidFill>
-              </a:rPr>
-              <a:t>↓</a:t>
-            </a:r>
-          </a:p>
-        </p:txBody>
-      </p:sp>
-      <p:sp>
-        <p:nvSpPr>
-          <p:cNvPr id="15" name="">
-            <a:extLst xmlns:a="http://schemas.openxmlformats.org/drawingml/2006/main">
-              <a:ext uri="{FF2B5EF4-FFF2-40B4-BE49-F238E27FC236}">
-                <a16:creationId xmlns:a16="http://schemas.microsoft.com/office/drawing/2014/main" id="{64D2361B-060F-4D25-88E6-89E535297AEE}"/>
-              </a:ext>
-            </a:extLst>
-          </p:cNvPr>
-          <p:cNvSpPr>
-            <a:spLocks xmlns:a="http://schemas.openxmlformats.org/drawingml/2006/main" noGrp="1"/>
-          </p:cNvSpPr>
-          <p:nvPr/>
-        </p:nvSpPr>
-        <p:spPr>
-          <a:xfrm xmlns:a="http://schemas.openxmlformats.org/drawingml/2006/main">
-            <a:off x="838200" y="2800350"/>
-            <a:ext cx="4476750" cy="781050"/>
-          </a:xfrm>
-          <a:prstGeom xmlns:a="http://schemas.openxmlformats.org/drawingml/2006/main" prst="roundRect">
-            <a:avLst>
-              <a:gd name="adj" fmla="val 8537"/>
-            </a:avLst>
-          </a:prstGeom>
-          <a:solidFill xmlns:a="http://schemas.openxmlformats.org/drawingml/2006/main">
-            <a:srgbClr val="E8F5F3"/>
-          </a:solidFill>
-          <a:ln xmlns:a="http://schemas.openxmlformats.org/drawingml/2006/main" w="11430">
-            <a:solidFill>
-              <a:srgbClr val="2A9D8F"/>
-            </a:solidFill>
-            <a:prstDash val="solid"/>
-          </a:ln>
-        </p:spPr>
-      </p:sp>
-      <p:sp>
-        <p:nvSpPr>
-          <p:cNvPr id="16" name="">
-            <a:extLst xmlns:a="http://schemas.openxmlformats.org/drawingml/2006/main">
-              <a:ext uri="{FF2B5EF4-FFF2-40B4-BE49-F238E27FC236}">
-                <a16:creationId xmlns:a16="http://schemas.microsoft.com/office/drawing/2014/main" id="{6F4B3F2D-0EED-4CE1-83A9-02DB0E003E4C}"/>
-              </a:ext>
-            </a:extLst>
-          </p:cNvPr>
-          <p:cNvSpPr>
-            <a:spLocks xmlns:a="http://schemas.openxmlformats.org/drawingml/2006/main" noGrp="1"/>
-          </p:cNvSpPr>
-          <p:nvPr/>
-        </p:nvSpPr>
-        <p:spPr>
-          <a:xfrm xmlns:a="http://schemas.openxmlformats.org/drawingml/2006/main">
-            <a:off x="990600" y="2876550"/>
-            <a:ext cx="4171950" cy="628650"/>
-          </a:xfrm>
-          <a:prstGeom xmlns:a="http://schemas.openxmlformats.org/drawingml/2006/main" prst="rect">
-            <a:avLst/>
-          </a:prstGeom>
-          <a:noFill xmlns:a="http://schemas.openxmlformats.org/drawingml/2006/main"/>
-          <a:ln xmlns:a="http://schemas.openxmlformats.org/drawingml/2006/main" w="0">
-            <a:noFill/>
-            <a:prstDash val="solid"/>
-          </a:ln>
-        </p:spPr>
-        <p:txBody>
-          <a:bodyPr xmlns:a="http://schemas.openxmlformats.org/drawingml/2006/main" wrap="square" lIns="38100" tIns="19050" rIns="38100" bIns="19050" anchor="ctr">
-            <a:normAutofit fontScale="100000"/>
-          </a:bodyPr>
-          <a:lstStyle xmlns:a="http://schemas.openxmlformats.org/drawingml/2006/main"/>
-          <a:p xmlns:a="http://schemas.openxmlformats.org/drawingml/2006/main">
-            <a:pPr algn="ctr">
-              <a:lnSpc>
-                <a:spcPct val="105000"/>
-              </a:lnSpc>
-              <a:buNone/>
-              <a:defRPr sz="1350" b="1" i="0">
-                <a:solidFill>
-                  <a:srgbClr val="243B53"/>
-                </a:solidFill>
-              </a:defRPr>
-            </a:pPr>
-            <a:r>
-              <a:rPr sz="1350" b="1" i="0">
-                <a:solidFill>
-                  <a:srgbClr val="243B53"/>
-                </a:solidFill>
-              </a:rPr>
-              <a:t>有界穷举验证</a:t>
-            </a:r>
-          </a:p>
-          <a:p xmlns:a="http://schemas.openxmlformats.org/drawingml/2006/main">
-            <a:pPr algn="ctr">
-              <a:lnSpc>
-                <a:spcPct val="105000"/>
-              </a:lnSpc>
-              <a:buNone/>
-              <a:defRPr sz="1350" b="1" i="0">
-                <a:solidFill>
-                  <a:srgbClr val="243B53"/>
-                </a:solidFill>
-              </a:defRPr>
-            </a:pPr>
-            <a:r>
-              <a:rPr sz="1350" b="1" i="0">
-                <a:solidFill>
-                  <a:srgbClr val="243B53"/>
-                </a:solidFill>
-              </a:rPr>
-              <a:t>2,074 个 oracle-valid 排列，n ≤ 8</a:t>
-            </a:r>
-          </a:p>
-        </p:txBody>
-      </p:sp>
-      <p:sp>
-        <p:nvSpPr>
-          <p:cNvPr id="17" name="">
-            <a:extLst xmlns:a="http://schemas.openxmlformats.org/drawingml/2006/main">
-              <a:ext uri="{FF2B5EF4-FFF2-40B4-BE49-F238E27FC236}">
-                <a16:creationId xmlns:a16="http://schemas.microsoft.com/office/drawing/2014/main" id="{FDA845BD-3B9E-4C5C-A54E-6C9929D5C2F4}"/>
-              </a:ext>
-            </a:extLst>
-          </p:cNvPr>
-          <p:cNvSpPr>
-            <a:spLocks xmlns:a="http://schemas.openxmlformats.org/drawingml/2006/main" noGrp="1"/>
-          </p:cNvSpPr>
-          <p:nvPr/>
-        </p:nvSpPr>
-        <p:spPr>
-          <a:xfrm xmlns:a="http://schemas.openxmlformats.org/drawingml/2006/main">
-            <a:off x="6877050" y="2800350"/>
+          <p:cNvPr id="44" name="">
+            <a:extLst xmlns:a="http://schemas.openxmlformats.org/drawingml/2006/main">
+              <a:ext uri="{FF2B5EF4-FFF2-40B4-BE49-F238E27FC236}">
+                <a16:creationId xmlns:a16="http://schemas.microsoft.com/office/drawing/2014/main" id="{331B1B55-D0A6-4C42-8CC6-3B0D9FB8DDA6}"/>
+              </a:ext>
+            </a:extLst>
+          </p:cNvPr>
+          <p:cNvSpPr>
+            <a:spLocks xmlns:a="http://schemas.openxmlformats.org/drawingml/2006/main" noGrp="1"/>
+          </p:cNvSpPr>
+          <p:nvPr/>
+        </p:nvSpPr>
+        <p:spPr>
+          <a:xfrm xmlns:a="http://schemas.openxmlformats.org/drawingml/2006/main">
+            <a:off x="838200" y="4705350"/>
             <a:ext cx="4476750" cy="609600"/>
           </a:xfrm>
           <a:prstGeom xmlns:a="http://schemas.openxmlformats.org/drawingml/2006/main" prst="roundRect">
@@ -7355,11 +6686,11 @@
             </a:avLst>
           </a:prstGeom>
           <a:solidFill xmlns:a="http://schemas.openxmlformats.org/drawingml/2006/main">
-            <a:srgbClr val="FCEEEA"/>
+            <a:srgbClr val="E8F4F3"/>
           </a:solidFill>
           <a:ln xmlns:a="http://schemas.openxmlformats.org/drawingml/2006/main" w="11430">
             <a:solidFill>
-              <a:srgbClr val="E76F51"/>
+              <a:srgbClr val="187A84"/>
             </a:solidFill>
             <a:prstDash val="solid"/>
           </a:ln>
@@ -7367,21 +6698,21 @@
       </p:sp>
       <p:sp>
         <p:nvSpPr>
-          <p:cNvPr id="18" name="">
-            <a:extLst xmlns:a="http://schemas.openxmlformats.org/drawingml/2006/main">
-              <a:ext uri="{FF2B5EF4-FFF2-40B4-BE49-F238E27FC236}">
-                <a16:creationId xmlns:a16="http://schemas.microsoft.com/office/drawing/2014/main" id="{15E88922-4C23-4B23-AB96-289A85274274}"/>
-              </a:ext>
-            </a:extLst>
-          </p:cNvPr>
-          <p:cNvSpPr>
-            <a:spLocks xmlns:a="http://schemas.openxmlformats.org/drawingml/2006/main" noGrp="1"/>
-          </p:cNvSpPr>
-          <p:nvPr/>
-        </p:nvSpPr>
-        <p:spPr>
-          <a:xfrm xmlns:a="http://schemas.openxmlformats.org/drawingml/2006/main">
-            <a:off x="7029450" y="2876550"/>
+          <p:cNvPr id="45" name="">
+            <a:extLst xmlns:a="http://schemas.openxmlformats.org/drawingml/2006/main">
+              <a:ext uri="{FF2B5EF4-FFF2-40B4-BE49-F238E27FC236}">
+                <a16:creationId xmlns:a16="http://schemas.microsoft.com/office/drawing/2014/main" id="{E88503C1-7D0A-4046-B4C2-54179F3C0D7E}"/>
+              </a:ext>
+            </a:extLst>
+          </p:cNvPr>
+          <p:cNvSpPr>
+            <a:spLocks xmlns:a="http://schemas.openxmlformats.org/drawingml/2006/main" noGrp="1"/>
+          </p:cNvSpPr>
+          <p:nvPr/>
+        </p:nvSpPr>
+        <p:spPr>
+          <a:xfrm xmlns:a="http://schemas.openxmlformats.org/drawingml/2006/main">
+            <a:off x="990600" y="4781550"/>
             <a:ext cx="4171950" cy="457200"/>
           </a:xfrm>
           <a:prstGeom xmlns:a="http://schemas.openxmlformats.org/drawingml/2006/main" prst="rect">
@@ -7404,165 +6735,53 @@
                 <a:spcPct val="105000"/>
               </a:lnSpc>
               <a:buNone/>
-              <a:defRPr sz="1500" b="0" i="0">
-                <a:solidFill>
-                  <a:srgbClr val="243B53"/>
-                </a:solidFill>
-              </a:defRPr>
-            </a:pPr>
-            <a:r>
-              <a:rPr sz="1500" b="0" i="0">
-                <a:solidFill>
-                  <a:srgbClr val="243B53"/>
-                </a:solidFill>
-              </a:rPr>
-              <a:t>manifest 绑定的归档</a:t>
-            </a:r>
-          </a:p>
-        </p:txBody>
-      </p:sp>
-      <p:sp>
-        <p:nvSpPr>
-          <p:cNvPr id="19" name="">
-            <a:extLst xmlns:a="http://schemas.openxmlformats.org/drawingml/2006/main">
-              <a:ext uri="{FF2B5EF4-FFF2-40B4-BE49-F238E27FC236}">
-                <a16:creationId xmlns:a16="http://schemas.microsoft.com/office/drawing/2014/main" id="{714FF898-2FA2-4322-829A-4A8948FEC094}"/>
-              </a:ext>
-            </a:extLst>
-          </p:cNvPr>
-          <p:cNvSpPr>
-            <a:spLocks xmlns:a="http://schemas.openxmlformats.org/drawingml/2006/main" noGrp="1"/>
-          </p:cNvSpPr>
-          <p:nvPr/>
-        </p:nvSpPr>
-        <p:spPr>
-          <a:xfrm xmlns:a="http://schemas.openxmlformats.org/drawingml/2006/main">
-            <a:off x="2724150" y="3552825"/>
-            <a:ext cx="685800" cy="266700"/>
-          </a:xfrm>
-          <a:prstGeom xmlns:a="http://schemas.openxmlformats.org/drawingml/2006/main" prst="rect">
-            <a:avLst/>
-          </a:prstGeom>
-          <a:noFill xmlns:a="http://schemas.openxmlformats.org/drawingml/2006/main"/>
-          <a:ln xmlns:a="http://schemas.openxmlformats.org/drawingml/2006/main" w="0">
-            <a:noFill/>
-            <a:prstDash val="solid"/>
-          </a:ln>
-        </p:spPr>
-        <p:txBody>
-          <a:bodyPr xmlns:a="http://schemas.openxmlformats.org/drawingml/2006/main" wrap="square" lIns="38100" tIns="19050" rIns="38100" bIns="19050" anchor="t">
-            <a:normAutofit fontScale="73260"/>
-          </a:bodyPr>
-          <a:lstStyle xmlns:a="http://schemas.openxmlformats.org/drawingml/2006/main"/>
-          <a:p xmlns:a="http://schemas.openxmlformats.org/drawingml/2006/main">
-            <a:pPr algn="ctr">
-              <a:lnSpc>
-                <a:spcPct val="105000"/>
-              </a:lnSpc>
-              <a:buNone/>
-              <a:defRPr sz="1950" b="1" i="0">
-                <a:solidFill>
-                  <a:srgbClr val="2A9D8F"/>
-                </a:solidFill>
-              </a:defRPr>
-            </a:pPr>
-            <a:r>
-              <a:rPr sz="1950" b="1" i="0">
-                <a:solidFill>
-                  <a:srgbClr val="2A9D8F"/>
-                </a:solidFill>
-              </a:rPr>
-              <a:t>↓</a:t>
-            </a:r>
-          </a:p>
-        </p:txBody>
-      </p:sp>
-      <p:sp>
-        <p:nvSpPr>
-          <p:cNvPr id="20" name="">
-            <a:extLst xmlns:a="http://schemas.openxmlformats.org/drawingml/2006/main">
-              <a:ext uri="{FF2B5EF4-FFF2-40B4-BE49-F238E27FC236}">
-                <a16:creationId xmlns:a16="http://schemas.microsoft.com/office/drawing/2014/main" id="{316E73D2-3E6F-43D0-9DBD-E263708E60EF}"/>
-              </a:ext>
-            </a:extLst>
-          </p:cNvPr>
-          <p:cNvSpPr>
-            <a:spLocks xmlns:a="http://schemas.openxmlformats.org/drawingml/2006/main" noGrp="1"/>
-          </p:cNvSpPr>
-          <p:nvPr/>
-        </p:nvSpPr>
-        <p:spPr>
-          <a:xfrm xmlns:a="http://schemas.openxmlformats.org/drawingml/2006/main">
-            <a:off x="8763000" y="3381375"/>
-            <a:ext cx="685800" cy="266700"/>
-          </a:xfrm>
-          <a:prstGeom xmlns:a="http://schemas.openxmlformats.org/drawingml/2006/main" prst="rect">
-            <a:avLst/>
-          </a:prstGeom>
-          <a:noFill xmlns:a="http://schemas.openxmlformats.org/drawingml/2006/main"/>
-          <a:ln xmlns:a="http://schemas.openxmlformats.org/drawingml/2006/main" w="0">
-            <a:noFill/>
-            <a:prstDash val="solid"/>
-          </a:ln>
-        </p:spPr>
-        <p:txBody>
-          <a:bodyPr xmlns:a="http://schemas.openxmlformats.org/drawingml/2006/main" wrap="square" lIns="38100" tIns="19050" rIns="38100" bIns="19050" anchor="t">
-            <a:normAutofit fontScale="73260"/>
-          </a:bodyPr>
-          <a:lstStyle xmlns:a="http://schemas.openxmlformats.org/drawingml/2006/main"/>
-          <a:p xmlns:a="http://schemas.openxmlformats.org/drawingml/2006/main">
-            <a:pPr algn="ctr">
-              <a:lnSpc>
-                <a:spcPct val="105000"/>
-              </a:lnSpc>
-              <a:buNone/>
-              <a:defRPr sz="1950" b="1" i="0">
-                <a:solidFill>
-                  <a:srgbClr val="E76F51"/>
-                </a:solidFill>
-              </a:defRPr>
-            </a:pPr>
-            <a:r>
-              <a:rPr sz="1950" b="1" i="0">
-                <a:solidFill>
-                  <a:srgbClr val="E76F51"/>
-                </a:solidFill>
-              </a:rPr>
-              <a:t>↓</a:t>
-            </a:r>
-          </a:p>
-        </p:txBody>
-      </p:sp>
-      <p:sp>
-        <p:nvSpPr>
-          <p:cNvPr id="21" name="">
-            <a:extLst xmlns:a="http://schemas.openxmlformats.org/drawingml/2006/main">
-              <a:ext uri="{FF2B5EF4-FFF2-40B4-BE49-F238E27FC236}">
-                <a16:creationId xmlns:a16="http://schemas.microsoft.com/office/drawing/2014/main" id="{CCE030A7-93DA-4ED0-A3FB-A295E17FB8CF}"/>
-              </a:ext>
-            </a:extLst>
-          </p:cNvPr>
-          <p:cNvSpPr>
-            <a:spLocks xmlns:a="http://schemas.openxmlformats.org/drawingml/2006/main" noGrp="1"/>
-          </p:cNvSpPr>
-          <p:nvPr/>
-        </p:nvSpPr>
-        <p:spPr>
-          <a:xfrm xmlns:a="http://schemas.openxmlformats.org/drawingml/2006/main">
-            <a:off x="838200" y="3829050"/>
-            <a:ext cx="4476750" cy="609600"/>
+              <a:defRPr sz="1500" b="0">
+                <a:solidFill>
+                  <a:srgbClr val="243746"/>
+                </a:solidFill>
+              </a:defRPr>
+            </a:pPr>
+            <a:r>
+              <a:rPr sz="1500" b="0">
+                <a:solidFill>
+                  <a:srgbClr val="243746"/>
+                </a:solidFill>
+              </a:rPr>
+              <a:t>同一 core 的确定性重放</a:t>
+            </a:r>
+          </a:p>
+        </p:txBody>
+      </p:sp>
+      <p:sp>
+        <p:nvSpPr>
+          <p:cNvPr id="46" name="">
+            <a:extLst xmlns:a="http://schemas.openxmlformats.org/drawingml/2006/main">
+              <a:ext uri="{FF2B5EF4-FFF2-40B4-BE49-F238E27FC236}">
+                <a16:creationId xmlns:a16="http://schemas.microsoft.com/office/drawing/2014/main" id="{794829F8-9718-478C-8E9D-220D28AAE38F}"/>
+              </a:ext>
+            </a:extLst>
+          </p:cNvPr>
+          <p:cNvSpPr>
+            <a:spLocks xmlns:a="http://schemas.openxmlformats.org/drawingml/2006/main" noGrp="1"/>
+          </p:cNvSpPr>
+          <p:nvPr/>
+        </p:nvSpPr>
+        <p:spPr>
+          <a:xfrm xmlns:a="http://schemas.openxmlformats.org/drawingml/2006/main">
+            <a:off x="6877050" y="2209800"/>
+            <a:ext cx="4476750" cy="2381250"/>
           </a:xfrm>
           <a:prstGeom xmlns:a="http://schemas.openxmlformats.org/drawingml/2006/main" prst="roundRect">
             <a:avLst>
-              <a:gd name="adj" fmla="val 10938"/>
+              <a:gd name="adj" fmla="val 3200"/>
             </a:avLst>
           </a:prstGeom>
           <a:solidFill xmlns:a="http://schemas.openxmlformats.org/drawingml/2006/main">
-            <a:srgbClr val="E8F5F3"/>
+            <a:srgbClr val="FBEDE8"/>
           </a:solidFill>
-          <a:ln xmlns:a="http://schemas.openxmlformats.org/drawingml/2006/main" w="11430">
+          <a:ln xmlns:a="http://schemas.openxmlformats.org/drawingml/2006/main" w="14288">
             <a:solidFill>
-              <a:srgbClr val="2A9D8F"/>
+              <a:srgbClr val="D36B4A"/>
             </a:solidFill>
             <a:prstDash val="solid"/>
           </a:ln>
@@ -7570,22 +6789,22 @@
       </p:sp>
       <p:sp>
         <p:nvSpPr>
-          <p:cNvPr id="22" name="">
-            <a:extLst xmlns:a="http://schemas.openxmlformats.org/drawingml/2006/main">
-              <a:ext uri="{FF2B5EF4-FFF2-40B4-BE49-F238E27FC236}">
-                <a16:creationId xmlns:a16="http://schemas.microsoft.com/office/drawing/2014/main" id="{A8A1CCD9-DB2A-4D62-8452-8565060AA5AE}"/>
-              </a:ext>
-            </a:extLst>
-          </p:cNvPr>
-          <p:cNvSpPr>
-            <a:spLocks xmlns:a="http://schemas.openxmlformats.org/drawingml/2006/main" noGrp="1"/>
-          </p:cNvSpPr>
-          <p:nvPr/>
-        </p:nvSpPr>
-        <p:spPr>
-          <a:xfrm xmlns:a="http://schemas.openxmlformats.org/drawingml/2006/main">
-            <a:off x="990600" y="3905250"/>
-            <a:ext cx="4171950" cy="457200"/>
+          <p:cNvPr id="47" name="">
+            <a:extLst xmlns:a="http://schemas.openxmlformats.org/drawingml/2006/main">
+              <a:ext uri="{FF2B5EF4-FFF2-40B4-BE49-F238E27FC236}">
+                <a16:creationId xmlns:a16="http://schemas.microsoft.com/office/drawing/2014/main" id="{C4D1B5C1-01A3-4A67-809F-203B17D65117}"/>
+              </a:ext>
+            </a:extLst>
+          </p:cNvPr>
+          <p:cNvSpPr>
+            <a:spLocks xmlns:a="http://schemas.openxmlformats.org/drawingml/2006/main" noGrp="1"/>
+          </p:cNvSpPr>
+          <p:nvPr/>
+        </p:nvSpPr>
+        <p:spPr>
+          <a:xfrm xmlns:a="http://schemas.openxmlformats.org/drawingml/2006/main">
+            <a:off x="7219950" y="2686050"/>
+            <a:ext cx="3790950" cy="1352550"/>
           </a:xfrm>
           <a:prstGeom xmlns:a="http://schemas.openxmlformats.org/drawingml/2006/main" prst="rect">
             <a:avLst/>
@@ -7607,76 +6826,41 @@
                 <a:spcPct val="105000"/>
               </a:lnSpc>
               <a:buNone/>
-              <a:defRPr sz="1500" b="0" i="0">
-                <a:solidFill>
-                  <a:srgbClr val="243B53"/>
-                </a:solidFill>
-              </a:defRPr>
-            </a:pPr>
-            <a:r>
-              <a:rPr sz="1500" b="0" i="0">
-                <a:solidFill>
-                  <a:srgbClr val="243B53"/>
-                </a:solidFill>
-              </a:rPr>
-              <a:t>checked-state audit</a:t>
-            </a:r>
-          </a:p>
-        </p:txBody>
-      </p:sp>
-      <p:sp>
-        <p:nvSpPr>
-          <p:cNvPr id="23" name="">
-            <a:extLst xmlns:a="http://schemas.openxmlformats.org/drawingml/2006/main">
-              <a:ext uri="{FF2B5EF4-FFF2-40B4-BE49-F238E27FC236}">
-                <a16:creationId xmlns:a16="http://schemas.microsoft.com/office/drawing/2014/main" id="{25E47573-43D2-4B72-98C3-BD3F15DC1C30}"/>
-              </a:ext>
-            </a:extLst>
-          </p:cNvPr>
-          <p:cNvSpPr>
-            <a:spLocks xmlns:a="http://schemas.openxmlformats.org/drawingml/2006/main" noGrp="1"/>
-          </p:cNvSpPr>
-          <p:nvPr/>
-        </p:nvSpPr>
-        <p:spPr>
-          <a:xfrm xmlns:a="http://schemas.openxmlformats.org/drawingml/2006/main">
-            <a:off x="6877050" y="3829050"/>
-            <a:ext cx="4476750" cy="781050"/>
-          </a:xfrm>
-          <a:prstGeom xmlns:a="http://schemas.openxmlformats.org/drawingml/2006/main" prst="roundRect">
-            <a:avLst>
-              <a:gd name="adj" fmla="val 8537"/>
-            </a:avLst>
-          </a:prstGeom>
-          <a:solidFill xmlns:a="http://schemas.openxmlformats.org/drawingml/2006/main">
-            <a:srgbClr val="FCEEEA"/>
-          </a:solidFill>
-          <a:ln xmlns:a="http://schemas.openxmlformats.org/drawingml/2006/main" w="11430">
-            <a:solidFill>
-              <a:srgbClr val="E76F51"/>
-            </a:solidFill>
-            <a:prstDash val="solid"/>
-          </a:ln>
-        </p:spPr>
-      </p:sp>
-      <p:sp>
-        <p:nvSpPr>
-          <p:cNvPr id="24" name="">
-            <a:extLst xmlns:a="http://schemas.openxmlformats.org/drawingml/2006/main">
-              <a:ext uri="{FF2B5EF4-FFF2-40B4-BE49-F238E27FC236}">
-                <a16:creationId xmlns:a16="http://schemas.microsoft.com/office/drawing/2014/main" id="{86BFADAA-B675-47AC-81E1-48934210F1B8}"/>
-              </a:ext>
-            </a:extLst>
-          </p:cNvPr>
-          <p:cNvSpPr>
-            <a:spLocks xmlns:a="http://schemas.openxmlformats.org/drawingml/2006/main" noGrp="1"/>
-          </p:cNvSpPr>
-          <p:nvPr/>
-        </p:nvSpPr>
-        <p:spPr>
-          <a:xfrm xmlns:a="http://schemas.openxmlformats.org/drawingml/2006/main">
-            <a:off x="7029450" y="3905250"/>
-            <a:ext cx="4171950" cy="628650"/>
+              <a:defRPr sz="1725" b="1">
+                <a:solidFill>
+                  <a:srgbClr val="243746"/>
+                </a:solidFill>
+              </a:defRPr>
+            </a:pPr>
+            <a:r>
+              <a:rPr sz="1725" b="1">
+                <a:solidFill>
+                  <a:srgbClr val="243746"/>
+                </a:solidFill>
+              </a:rPr>
+              <a:t>另一条验证路径确认保存的输出与固定实验设置及重算汇总一致。</a:t>
+            </a:r>
+          </a:p>
+        </p:txBody>
+      </p:sp>
+      <p:sp>
+        <p:nvSpPr>
+          <p:cNvPr id="48" name="">
+            <a:extLst xmlns:a="http://schemas.openxmlformats.org/drawingml/2006/main">
+              <a:ext uri="{FF2B5EF4-FFF2-40B4-BE49-F238E27FC236}">
+                <a16:creationId xmlns:a16="http://schemas.microsoft.com/office/drawing/2014/main" id="{D7D38EBF-ACA1-4562-BC5D-46BF627F7E40}"/>
+              </a:ext>
+            </a:extLst>
+          </p:cNvPr>
+          <p:cNvSpPr>
+            <a:spLocks xmlns:a="http://schemas.openxmlformats.org/drawingml/2006/main" noGrp="1"/>
+          </p:cNvSpPr>
+          <p:nvPr/>
+        </p:nvSpPr>
+        <p:spPr>
+          <a:xfrm xmlns:a="http://schemas.openxmlformats.org/drawingml/2006/main">
+            <a:off x="7239000" y="4819650"/>
+            <a:ext cx="3752850" cy="323850"/>
           </a:xfrm>
           <a:prstGeom xmlns:a="http://schemas.openxmlformats.org/drawingml/2006/main" prst="rect">
             <a:avLst/>
@@ -7698,323 +6882,29 @@
                 <a:spcPct val="105000"/>
               </a:lnSpc>
               <a:buNone/>
-              <a:defRPr sz="1350" b="1" i="0">
-                <a:solidFill>
-                  <a:srgbClr val="243B53"/>
-                </a:solidFill>
-              </a:defRPr>
-            </a:pPr>
-            <a:r>
-              <a:rPr sz="1350" b="1" i="0">
-                <a:solidFill>
-                  <a:srgbClr val="243B53"/>
-                </a:solidFill>
-              </a:rPr>
-              <a:t>schema、调度、数量与哈希检查</a:t>
-            </a:r>
-          </a:p>
-        </p:txBody>
-      </p:sp>
-      <p:sp>
-        <p:nvSpPr>
-          <p:cNvPr id="25" name="">
-            <a:extLst xmlns:a="http://schemas.openxmlformats.org/drawingml/2006/main">
-              <a:ext uri="{FF2B5EF4-FFF2-40B4-BE49-F238E27FC236}">
-                <a16:creationId xmlns:a16="http://schemas.microsoft.com/office/drawing/2014/main" id="{7DFE2EFF-ABD4-4A6B-9E6F-66103C41F441}"/>
-              </a:ext>
-            </a:extLst>
-          </p:cNvPr>
-          <p:cNvSpPr>
-            <a:spLocks xmlns:a="http://schemas.openxmlformats.org/drawingml/2006/main" noGrp="1"/>
-          </p:cNvSpPr>
-          <p:nvPr/>
-        </p:nvSpPr>
-        <p:spPr>
-          <a:xfrm xmlns:a="http://schemas.openxmlformats.org/drawingml/2006/main">
-            <a:off x="2724150" y="4410075"/>
-            <a:ext cx="685800" cy="266700"/>
-          </a:xfrm>
-          <a:prstGeom xmlns:a="http://schemas.openxmlformats.org/drawingml/2006/main" prst="rect">
-            <a:avLst/>
-          </a:prstGeom>
-          <a:noFill xmlns:a="http://schemas.openxmlformats.org/drawingml/2006/main"/>
-          <a:ln xmlns:a="http://schemas.openxmlformats.org/drawingml/2006/main" w="0">
-            <a:noFill/>
-            <a:prstDash val="solid"/>
-          </a:ln>
-        </p:spPr>
-        <p:txBody>
-          <a:bodyPr xmlns:a="http://schemas.openxmlformats.org/drawingml/2006/main" wrap="square" lIns="38100" tIns="19050" rIns="38100" bIns="19050" anchor="t">
-            <a:normAutofit fontScale="73260"/>
-          </a:bodyPr>
-          <a:lstStyle xmlns:a="http://schemas.openxmlformats.org/drawingml/2006/main"/>
-          <a:p xmlns:a="http://schemas.openxmlformats.org/drawingml/2006/main">
-            <a:pPr algn="ctr">
-              <a:lnSpc>
-                <a:spcPct val="105000"/>
-              </a:lnSpc>
-              <a:buNone/>
-              <a:defRPr sz="1950" b="1" i="0">
-                <a:solidFill>
-                  <a:srgbClr val="2A9D8F"/>
-                </a:solidFill>
-              </a:defRPr>
-            </a:pPr>
-            <a:r>
-              <a:rPr sz="1950" b="1" i="0">
-                <a:solidFill>
-                  <a:srgbClr val="2A9D8F"/>
-                </a:solidFill>
-              </a:rPr>
-              <a:t>↓</a:t>
-            </a:r>
-          </a:p>
-        </p:txBody>
-      </p:sp>
-      <p:sp>
-        <p:nvSpPr>
-          <p:cNvPr id="26" name="">
-            <a:extLst xmlns:a="http://schemas.openxmlformats.org/drawingml/2006/main">
-              <a:ext uri="{FF2B5EF4-FFF2-40B4-BE49-F238E27FC236}">
-                <a16:creationId xmlns:a16="http://schemas.microsoft.com/office/drawing/2014/main" id="{DCDBB88E-9897-4AC7-A8D8-2D0C358C8D1F}"/>
-              </a:ext>
-            </a:extLst>
-          </p:cNvPr>
-          <p:cNvSpPr>
-            <a:spLocks xmlns:a="http://schemas.openxmlformats.org/drawingml/2006/main" noGrp="1"/>
-          </p:cNvSpPr>
-          <p:nvPr/>
-        </p:nvSpPr>
-        <p:spPr>
-          <a:xfrm xmlns:a="http://schemas.openxmlformats.org/drawingml/2006/main">
-            <a:off x="8763000" y="4581525"/>
-            <a:ext cx="685800" cy="266700"/>
-          </a:xfrm>
-          <a:prstGeom xmlns:a="http://schemas.openxmlformats.org/drawingml/2006/main" prst="rect">
-            <a:avLst/>
-          </a:prstGeom>
-          <a:noFill xmlns:a="http://schemas.openxmlformats.org/drawingml/2006/main"/>
-          <a:ln xmlns:a="http://schemas.openxmlformats.org/drawingml/2006/main" w="0">
-            <a:noFill/>
-            <a:prstDash val="solid"/>
-          </a:ln>
-        </p:spPr>
-        <p:txBody>
-          <a:bodyPr xmlns:a="http://schemas.openxmlformats.org/drawingml/2006/main" wrap="square" lIns="38100" tIns="19050" rIns="38100" bIns="19050" anchor="t">
-            <a:normAutofit fontScale="73260"/>
-          </a:bodyPr>
-          <a:lstStyle xmlns:a="http://schemas.openxmlformats.org/drawingml/2006/main"/>
-          <a:p xmlns:a="http://schemas.openxmlformats.org/drawingml/2006/main">
-            <a:pPr algn="ctr">
-              <a:lnSpc>
-                <a:spcPct val="105000"/>
-              </a:lnSpc>
-              <a:buNone/>
-              <a:defRPr sz="1950" b="1" i="0">
-                <a:solidFill>
-                  <a:srgbClr val="E76F51"/>
-                </a:solidFill>
-              </a:defRPr>
-            </a:pPr>
-            <a:r>
-              <a:rPr sz="1950" b="1" i="0">
-                <a:solidFill>
-                  <a:srgbClr val="E76F51"/>
-                </a:solidFill>
-              </a:rPr>
-              <a:t>↓</a:t>
-            </a:r>
-          </a:p>
-        </p:txBody>
-      </p:sp>
-      <p:sp>
-        <p:nvSpPr>
-          <p:cNvPr id="27" name="">
-            <a:extLst xmlns:a="http://schemas.openxmlformats.org/drawingml/2006/main">
-              <a:ext uri="{FF2B5EF4-FFF2-40B4-BE49-F238E27FC236}">
-                <a16:creationId xmlns:a16="http://schemas.microsoft.com/office/drawing/2014/main" id="{AD7B6672-FB8F-4AD3-AEC9-93B198A09C17}"/>
-              </a:ext>
-            </a:extLst>
-          </p:cNvPr>
-          <p:cNvSpPr>
-            <a:spLocks xmlns:a="http://schemas.openxmlformats.org/drawingml/2006/main" noGrp="1"/>
-          </p:cNvSpPr>
-          <p:nvPr/>
-        </p:nvSpPr>
-        <p:spPr>
-          <a:xfrm xmlns:a="http://schemas.openxmlformats.org/drawingml/2006/main">
-            <a:off x="838200" y="4705350"/>
-            <a:ext cx="4476750" cy="609600"/>
-          </a:xfrm>
-          <a:prstGeom xmlns:a="http://schemas.openxmlformats.org/drawingml/2006/main" prst="roundRect">
-            <a:avLst>
-              <a:gd name="adj" fmla="val 10938"/>
-            </a:avLst>
-          </a:prstGeom>
-          <a:solidFill xmlns:a="http://schemas.openxmlformats.org/drawingml/2006/main">
-            <a:srgbClr val="E8F5F3"/>
-          </a:solidFill>
-          <a:ln xmlns:a="http://schemas.openxmlformats.org/drawingml/2006/main" w="11430">
-            <a:solidFill>
-              <a:srgbClr val="2A9D8F"/>
-            </a:solidFill>
-            <a:prstDash val="solid"/>
-          </a:ln>
-        </p:spPr>
-      </p:sp>
-      <p:sp>
-        <p:nvSpPr>
-          <p:cNvPr id="28" name="">
-            <a:extLst xmlns:a="http://schemas.openxmlformats.org/drawingml/2006/main">
-              <a:ext uri="{FF2B5EF4-FFF2-40B4-BE49-F238E27FC236}">
-                <a16:creationId xmlns:a16="http://schemas.microsoft.com/office/drawing/2014/main" id="{B7C750BD-53D1-4D53-BD62-DC088761E3B6}"/>
-              </a:ext>
-            </a:extLst>
-          </p:cNvPr>
-          <p:cNvSpPr>
-            <a:spLocks xmlns:a="http://schemas.openxmlformats.org/drawingml/2006/main" noGrp="1"/>
-          </p:cNvSpPr>
-          <p:nvPr/>
-        </p:nvSpPr>
-        <p:spPr>
-          <a:xfrm xmlns:a="http://schemas.openxmlformats.org/drawingml/2006/main">
-            <a:off x="990600" y="4781550"/>
-            <a:ext cx="4171950" cy="457200"/>
-          </a:xfrm>
-          <a:prstGeom xmlns:a="http://schemas.openxmlformats.org/drawingml/2006/main" prst="rect">
-            <a:avLst/>
-          </a:prstGeom>
-          <a:noFill xmlns:a="http://schemas.openxmlformats.org/drawingml/2006/main"/>
-          <a:ln xmlns:a="http://schemas.openxmlformats.org/drawingml/2006/main" w="0">
-            <a:noFill/>
-            <a:prstDash val="solid"/>
-          </a:ln>
-        </p:spPr>
-        <p:txBody>
-          <a:bodyPr xmlns:a="http://schemas.openxmlformats.org/drawingml/2006/main" wrap="square" lIns="38100" tIns="19050" rIns="38100" bIns="19050" anchor="ctr">
-            <a:normAutofit fontScale="100000"/>
-          </a:bodyPr>
-          <a:lstStyle xmlns:a="http://schemas.openxmlformats.org/drawingml/2006/main"/>
-          <a:p xmlns:a="http://schemas.openxmlformats.org/drawingml/2006/main">
-            <a:pPr algn="ctr">
-              <a:lnSpc>
-                <a:spcPct val="105000"/>
-              </a:lnSpc>
-              <a:buNone/>
-              <a:defRPr sz="1500" b="0" i="0">
-                <a:solidFill>
-                  <a:srgbClr val="243B53"/>
-                </a:solidFill>
-              </a:defRPr>
-            </a:pPr>
-            <a:r>
-              <a:rPr sz="1500" b="0" i="0">
-                <a:solidFill>
-                  <a:srgbClr val="243B53"/>
-                </a:solidFill>
-              </a:rPr>
-              <a:t>同一 core 的确定性重放</a:t>
-            </a:r>
-          </a:p>
-        </p:txBody>
-      </p:sp>
-      <p:sp>
-        <p:nvSpPr>
-          <p:cNvPr id="29" name="">
-            <a:extLst xmlns:a="http://schemas.openxmlformats.org/drawingml/2006/main">
-              <a:ext uri="{FF2B5EF4-FFF2-40B4-BE49-F238E27FC236}">
-                <a16:creationId xmlns:a16="http://schemas.microsoft.com/office/drawing/2014/main" id="{C6F30508-B3A6-45F6-9BF9-5D173C37226A}"/>
-              </a:ext>
-            </a:extLst>
-          </p:cNvPr>
-          <p:cNvSpPr>
-            <a:spLocks xmlns:a="http://schemas.openxmlformats.org/drawingml/2006/main" noGrp="1"/>
-          </p:cNvSpPr>
-          <p:nvPr/>
-        </p:nvSpPr>
-        <p:spPr>
-          <a:xfrm xmlns:a="http://schemas.openxmlformats.org/drawingml/2006/main">
-            <a:off x="6877050" y="4705350"/>
-            <a:ext cx="4476750" cy="609600"/>
-          </a:xfrm>
-          <a:prstGeom xmlns:a="http://schemas.openxmlformats.org/drawingml/2006/main" prst="roundRect">
-            <a:avLst>
-              <a:gd name="adj" fmla="val 10938"/>
-            </a:avLst>
-          </a:prstGeom>
-          <a:solidFill xmlns:a="http://schemas.openxmlformats.org/drawingml/2006/main">
-            <a:srgbClr val="FCEEEA"/>
-          </a:solidFill>
-          <a:ln xmlns:a="http://schemas.openxmlformats.org/drawingml/2006/main" w="11430">
-            <a:solidFill>
-              <a:srgbClr val="E76F51"/>
-            </a:solidFill>
-            <a:prstDash val="solid"/>
-          </a:ln>
-        </p:spPr>
-      </p:sp>
-      <p:sp>
-        <p:nvSpPr>
-          <p:cNvPr id="30" name="">
-            <a:extLst xmlns:a="http://schemas.openxmlformats.org/drawingml/2006/main">
-              <a:ext uri="{FF2B5EF4-FFF2-40B4-BE49-F238E27FC236}">
-                <a16:creationId xmlns:a16="http://schemas.microsoft.com/office/drawing/2014/main" id="{E7B8475D-8C0B-4AA1-BEC3-4C095858B15D}"/>
-              </a:ext>
-            </a:extLst>
-          </p:cNvPr>
-          <p:cNvSpPr>
-            <a:spLocks xmlns:a="http://schemas.openxmlformats.org/drawingml/2006/main" noGrp="1"/>
-          </p:cNvSpPr>
-          <p:nvPr/>
-        </p:nvSpPr>
-        <p:spPr>
-          <a:xfrm xmlns:a="http://schemas.openxmlformats.org/drawingml/2006/main">
-            <a:off x="7029450" y="4781550"/>
-            <a:ext cx="4171950" cy="457200"/>
-          </a:xfrm>
-          <a:prstGeom xmlns:a="http://schemas.openxmlformats.org/drawingml/2006/main" prst="rect">
-            <a:avLst/>
-          </a:prstGeom>
-          <a:noFill xmlns:a="http://schemas.openxmlformats.org/drawingml/2006/main"/>
-          <a:ln xmlns:a="http://schemas.openxmlformats.org/drawingml/2006/main" w="0">
-            <a:noFill/>
-            <a:prstDash val="solid"/>
-          </a:ln>
-        </p:spPr>
-        <p:txBody>
-          <a:bodyPr xmlns:a="http://schemas.openxmlformats.org/drawingml/2006/main" wrap="square" lIns="38100" tIns="19050" rIns="38100" bIns="19050" anchor="ctr">
-            <a:normAutofit fontScale="100000"/>
-          </a:bodyPr>
-          <a:lstStyle xmlns:a="http://schemas.openxmlformats.org/drawingml/2006/main"/>
-          <a:p xmlns:a="http://schemas.openxmlformats.org/drawingml/2006/main">
-            <a:pPr algn="ctr">
-              <a:lnSpc>
-                <a:spcPct val="105000"/>
-              </a:lnSpc>
-              <a:buNone/>
-              <a:defRPr sz="1500" b="0" i="0">
-                <a:solidFill>
-                  <a:srgbClr val="243B53"/>
-                </a:solidFill>
-              </a:defRPr>
-            </a:pPr>
-            <a:r>
-              <a:rPr sz="1500" b="0" i="0">
-                <a:solidFill>
-                  <a:srgbClr val="243B53"/>
-                </a:solidFill>
-              </a:rPr>
-              <a:t>独立的 evidence-contract 验证</a:t>
-            </a:r>
-          </a:p>
-        </p:txBody>
-      </p:sp>
-      <p:sp>
-        <p:nvSpPr>
-          <p:cNvPr id="31" name="">
-            <a:extLst xmlns:a="http://schemas.openxmlformats.org/drawingml/2006/main">
-              <a:ext uri="{FF2B5EF4-FFF2-40B4-BE49-F238E27FC236}">
-                <a16:creationId xmlns:a16="http://schemas.microsoft.com/office/drawing/2014/main" id="{7EAE8468-4E2A-4C66-9B7E-530B391F22B0}"/>
+              <a:defRPr sz="1275" b="0">
+                <a:solidFill>
+                  <a:srgbClr val="5A6B78"/>
+                </a:solidFill>
+              </a:defRPr>
+            </a:pPr>
+            <a:r>
+              <a:rPr sz="1275" b="0">
+                <a:solidFill>
+                  <a:srgbClr val="5A6B78"/>
+                </a:solidFill>
+              </a:rPr>
+              <a:t>完整一致性检查：见备用 C</a:t>
+            </a:r>
+          </a:p>
+        </p:txBody>
+      </p:sp>
+      <p:sp>
+        <p:nvSpPr>
+          <p:cNvPr id="49" name="">
+            <a:extLst xmlns:a="http://schemas.openxmlformats.org/drawingml/2006/main">
+              <a:ext uri="{FF2B5EF4-FFF2-40B4-BE49-F238E27FC236}">
+                <a16:creationId xmlns:a16="http://schemas.microsoft.com/office/drawing/2014/main" id="{29B41B06-6625-435A-BF3F-D66B7B9AFF55}"/>
               </a:ext>
             </a:extLst>
           </p:cNvPr>
@@ -8048,19 +6938,19 @@
                 <a:spcPct val="105000"/>
               </a:lnSpc>
               <a:buNone/>
-              <a:defRPr sz="1575" b="1" i="0">
-                <a:solidFill>
-                  <a:srgbClr val="102A43"/>
-                </a:solidFill>
-              </a:defRPr>
-            </a:pPr>
-            <a:r>
-              <a:rPr sz="1575" b="1" i="0">
-                <a:solidFill>
-                  <a:srgbClr val="102A43"/>
-                </a:solidFill>
-              </a:rPr>
-              <a:t>两者共同提供有界正确性证据与可复现证据链，而不是普遍性证明。</a:t>
+              <a:defRPr sz="1575" b="1">
+                <a:solidFill>
+                  <a:srgbClr val="18324A"/>
+                </a:solidFill>
+              </a:defRPr>
+            </a:pPr>
+            <a:r>
+              <a:rPr sz="1575" b="1">
+                <a:solidFill>
+                  <a:srgbClr val="18324A"/>
+                </a:solidFill>
+              </a:rPr>
+              <a:t>这些检查支持已评估用例，但不是对全部 Jordan sequence 的证明。</a:t>
             </a:r>
           </a:p>
         </p:txBody>
@@ -8466,7 +7356,7 @@
                   <a:srgbClr val="FFFFFF"/>
                 </a:solidFill>
               </a:rPr>
-              <a:t>5 个规模  ×  12 个用例  ×  3 个算法  ×  20 次调用</a:t>
+              <a:t>5 个规模  ×  12 个用例  ×  3 个算法  ×  20 次重复调用</a:t>
             </a:r>
           </a:p>
         </p:txBody>
@@ -9208,7 +8098,7 @@
       </p:sp>
       <p:cxnSp>
         <p:nvCxnSpPr>
-          <p:cNvPr id="239" name=""/>
+          <p:cNvPr id="268" name=""/>
           <p:cNvCxnSpPr>
             <a:stCxn xmlns:a="http://schemas.openxmlformats.org/drawingml/2006/main" id="10" idx="3"/>
             <a:endCxn xmlns:a="http://schemas.openxmlformats.org/drawingml/2006/main" id="12" idx="1"/>
@@ -9234,7 +8124,7 @@
       </p:cxnSp>
       <p:cxnSp>
         <p:nvCxnSpPr>
-          <p:cNvPr id="240" name=""/>
+          <p:cNvPr id="269" name=""/>
           <p:cNvCxnSpPr>
             <a:stCxn xmlns:a="http://schemas.openxmlformats.org/drawingml/2006/main" id="12" idx="3"/>
             <a:endCxn xmlns:a="http://schemas.openxmlformats.org/drawingml/2006/main" id="14" idx="1"/>
@@ -9260,7 +8150,7 @@
       </p:cxnSp>
       <p:cxnSp>
         <p:nvCxnSpPr>
-          <p:cNvPr id="241" name=""/>
+          <p:cNvPr id="270" name=""/>
           <p:cNvCxnSpPr>
             <a:stCxn xmlns:a="http://schemas.openxmlformats.org/drawingml/2006/main" id="14" idx="3"/>
             <a:endCxn xmlns:a="http://schemas.openxmlformats.org/drawingml/2006/main" id="16" idx="1"/>
@@ -9286,7 +8176,7 @@
       </p:cxnSp>
       <p:cxnSp>
         <p:nvCxnSpPr>
-          <p:cNvPr id="242" name=""/>
+          <p:cNvPr id="271" name=""/>
           <p:cNvCxnSpPr>
             <a:stCxn xmlns:a="http://schemas.openxmlformats.org/drawingml/2006/main" id="16" idx="3"/>
             <a:endCxn xmlns:a="http://schemas.openxmlformats.org/drawingml/2006/main" id="18" idx="1"/>
@@ -9312,7 +8202,7 @@
       </p:cxnSp>
       <p:cxnSp>
         <p:nvCxnSpPr>
-          <p:cNvPr id="243" name=""/>
+          <p:cNvPr id="272" name=""/>
           <p:cNvCxnSpPr>
             <a:stCxn xmlns:a="http://schemas.openxmlformats.org/drawingml/2006/main" id="18" idx="3"/>
             <a:endCxn xmlns:a="http://schemas.openxmlformats.org/drawingml/2006/main" id="20" idx="1"/>
@@ -9338,7 +8228,7 @@
       </p:cxnSp>
       <p:cxnSp>
         <p:nvCxnSpPr>
-          <p:cNvPr id="244" name=""/>
+          <p:cNvPr id="273" name=""/>
           <p:cNvCxnSpPr>
             <a:stCxn xmlns:a="http://schemas.openxmlformats.org/drawingml/2006/main" id="20" idx="3"/>
             <a:endCxn xmlns:a="http://schemas.openxmlformats.org/drawingml/2006/main" id="22" idx="1"/>
@@ -9854,7 +8744,7 @@
                   <a:srgbClr val="52606D"/>
                 </a:solidFill>
               </a:rPr>
-              <a:t>reference 计时包含完整 oracle-backed pipeline；Python 计时覆盖完整排序调用。</a:t>
+              <a:t>Reference 计时包含完整 oracle-backed pipeline。Python 计时覆盖完整排序调用。</a:t>
             </a:r>
           </a:p>
         </p:txBody>
@@ -9945,7 +8835,7 @@
                   <a:srgbClr val="E76F51"/>
                 </a:solidFill>
               </a:rPr>
-              <a:t>paper/reference 是 pipeline-scope 比值，不是同口径的端到端加速。</a:t>
+              <a:t>Paper 与 reference 使用不同计时范围，因此该比值不是端到端加速。</a:t>
             </a:r>
           </a:p>
         </p:txBody>
@@ -10086,7 +8976,7 @@
                   <a:srgbClr val="102A43"/>
                 </a:solidFill>
               </a:rPr>
-              <a:t>所有预先规定的正式用例都通过认证、audit 与输出检查</a:t>
+              <a:t>全部 60 个评估用例均返回正确输出</a:t>
             </a:r>
           </a:p>
         </p:txBody>
@@ -10267,22 +9157,22 @@
       </p:sp>
       <p:sp>
         <p:nvSpPr>
-          <p:cNvPr id="7" name="">
-            <a:extLst xmlns:a="http://schemas.openxmlformats.org/drawingml/2006/main">
-              <a:ext uri="{FF2B5EF4-FFF2-40B4-BE49-F238E27FC236}">
-                <a16:creationId xmlns:a16="http://schemas.microsoft.com/office/drawing/2014/main" id="{272472BF-5158-474D-8AAA-F81CBD39FB02}"/>
-              </a:ext>
-            </a:extLst>
-          </p:cNvPr>
-          <p:cNvSpPr>
-            <a:spLocks xmlns:a="http://schemas.openxmlformats.org/drawingml/2006/main" noGrp="1"/>
-          </p:cNvSpPr>
-          <p:nvPr/>
-        </p:nvSpPr>
-        <p:spPr>
-          <a:xfrm xmlns:a="http://schemas.openxmlformats.org/drawingml/2006/main">
-            <a:off x="723900" y="1619250"/>
-            <a:ext cx="2381250" cy="647700"/>
+          <p:cNvPr id="21" name="">
+            <a:extLst xmlns:a="http://schemas.openxmlformats.org/drawingml/2006/main">
+              <a:ext uri="{FF2B5EF4-FFF2-40B4-BE49-F238E27FC236}">
+                <a16:creationId xmlns:a16="http://schemas.microsoft.com/office/drawing/2014/main" id="{492E646C-9784-4D02-8670-7391E6743B8E}"/>
+              </a:ext>
+            </a:extLst>
+          </p:cNvPr>
+          <p:cNvSpPr>
+            <a:spLocks xmlns:a="http://schemas.openxmlformats.org/drawingml/2006/main" noGrp="1"/>
+          </p:cNvSpPr>
+          <p:nvPr/>
+        </p:nvSpPr>
+        <p:spPr>
+          <a:xfrm xmlns:a="http://schemas.openxmlformats.org/drawingml/2006/main">
+            <a:off x="1238250" y="1676400"/>
+            <a:ext cx="3905250" cy="952500"/>
           </a:xfrm>
           <a:prstGeom xmlns:a="http://schemas.openxmlformats.org/drawingml/2006/main" prst="rect">
             <a:avLst/>
@@ -10304,16 +9194,16 @@
                 <a:spcPct val="105000"/>
               </a:lnSpc>
               <a:buNone/>
-              <a:defRPr sz="3600" b="1" i="0">
-                <a:solidFill>
-                  <a:srgbClr val="102A43"/>
-                </a:solidFill>
-              </a:defRPr>
-            </a:pPr>
-            <a:r>
-              <a:rPr sz="3600" b="1" i="0">
-                <a:solidFill>
-                  <a:srgbClr val="102A43"/>
+              <a:defRPr sz="5400" b="1">
+                <a:solidFill>
+                  <a:srgbClr val="187A84"/>
+                </a:solidFill>
+              </a:defRPr>
+            </a:pPr>
+            <a:r>
+              <a:rPr sz="5400" b="1">
+                <a:solidFill>
+                  <a:srgbClr val="187A84"/>
                 </a:solidFill>
               </a:rPr>
               <a:t>60</a:t>
@@ -10323,34 +9213,34 @@
       </p:sp>
       <p:sp>
         <p:nvSpPr>
-          <p:cNvPr id="8" name="">
-            <a:extLst xmlns:a="http://schemas.openxmlformats.org/drawingml/2006/main">
-              <a:ext uri="{FF2B5EF4-FFF2-40B4-BE49-F238E27FC236}">
-                <a16:creationId xmlns:a16="http://schemas.microsoft.com/office/drawing/2014/main" id="{6607EB4D-D72A-402F-8A5A-ED9A30B5DE70}"/>
-              </a:ext>
-            </a:extLst>
-          </p:cNvPr>
-          <p:cNvSpPr>
-            <a:spLocks xmlns:a="http://schemas.openxmlformats.org/drawingml/2006/main" noGrp="1"/>
-          </p:cNvSpPr>
-          <p:nvPr/>
-        </p:nvSpPr>
-        <p:spPr>
-          <a:xfrm xmlns:a="http://schemas.openxmlformats.org/drawingml/2006/main">
-            <a:off x="762000" y="2266950"/>
-            <a:ext cx="2305050" cy="457200"/>
-          </a:xfrm>
-          <a:prstGeom xmlns:a="http://schemas.openxmlformats.org/drawingml/2006/main" prst="rect">
-            <a:avLst/>
-          </a:prstGeom>
-          <a:noFill xmlns:a="http://schemas.openxmlformats.org/drawingml/2006/main"/>
-          <a:ln xmlns:a="http://schemas.openxmlformats.org/drawingml/2006/main" w="0">
-            <a:noFill/>
-            <a:prstDash val="solid"/>
-          </a:ln>
-        </p:spPr>
-        <p:txBody>
-          <a:bodyPr xmlns:a="http://schemas.openxmlformats.org/drawingml/2006/main" wrap="square" lIns="38100" tIns="19050" rIns="38100" bIns="19050" anchor="t">
+          <p:cNvPr id="22" name="">
+            <a:extLst xmlns:a="http://schemas.openxmlformats.org/drawingml/2006/main">
+              <a:ext uri="{FF2B5EF4-FFF2-40B4-BE49-F238E27FC236}">
+                <a16:creationId xmlns:a16="http://schemas.microsoft.com/office/drawing/2014/main" id="{276F15B7-CA4A-48D4-8A71-A9F383090FB1}"/>
+              </a:ext>
+            </a:extLst>
+          </p:cNvPr>
+          <p:cNvSpPr>
+            <a:spLocks xmlns:a="http://schemas.openxmlformats.org/drawingml/2006/main" noGrp="1"/>
+          </p:cNvSpPr>
+          <p:nvPr/>
+        </p:nvSpPr>
+        <p:spPr>
+          <a:xfrm xmlns:a="http://schemas.openxmlformats.org/drawingml/2006/main">
+            <a:off x="1238250" y="2647950"/>
+            <a:ext cx="3905250" cy="438150"/>
+          </a:xfrm>
+          <a:prstGeom xmlns:a="http://schemas.openxmlformats.org/drawingml/2006/main" prst="rect">
+            <a:avLst/>
+          </a:prstGeom>
+          <a:noFill xmlns:a="http://schemas.openxmlformats.org/drawingml/2006/main"/>
+          <a:ln xmlns:a="http://schemas.openxmlformats.org/drawingml/2006/main" w="0">
+            <a:noFill/>
+            <a:prstDash val="solid"/>
+          </a:ln>
+        </p:spPr>
+        <p:txBody>
+          <a:bodyPr xmlns:a="http://schemas.openxmlformats.org/drawingml/2006/main" wrap="square" lIns="38100" tIns="19050" rIns="38100" bIns="19050" anchor="ctr">
             <a:normAutofit fontScale="100000"/>
           </a:bodyPr>
           <a:lstStyle xmlns:a="http://schemas.openxmlformats.org/drawingml/2006/main"/>
@@ -10360,16 +9250,16 @@
                 <a:spcPct val="105000"/>
               </a:lnSpc>
               <a:buNone/>
-              <a:defRPr sz="1350" b="0" i="0">
-                <a:solidFill>
-                  <a:srgbClr val="52606D"/>
-                </a:solidFill>
-              </a:defRPr>
-            </a:pPr>
-            <a:r>
-              <a:rPr sz="1350" b="0" i="0">
-                <a:solidFill>
-                  <a:srgbClr val="52606D"/>
+              <a:defRPr sz="1950" b="1">
+                <a:solidFill>
+                  <a:srgbClr val="18324A"/>
+                </a:solidFill>
+              </a:defRPr>
+            </a:pPr>
+            <a:r>
+              <a:rPr sz="1950" b="1">
+                <a:solidFill>
+                  <a:srgbClr val="18324A"/>
                 </a:solidFill>
               </a:rPr>
               <a:t>exact cases</a:t>
@@ -10379,22 +9269,22 @@
       </p:sp>
       <p:sp>
         <p:nvSpPr>
-          <p:cNvPr id="9" name="">
-            <a:extLst xmlns:a="http://schemas.openxmlformats.org/drawingml/2006/main">
-              <a:ext uri="{FF2B5EF4-FFF2-40B4-BE49-F238E27FC236}">
-                <a16:creationId xmlns:a16="http://schemas.microsoft.com/office/drawing/2014/main" id="{9FDD1D4F-BD28-4837-BECB-F3D4E447D3F9}"/>
-              </a:ext>
-            </a:extLst>
-          </p:cNvPr>
-          <p:cNvSpPr>
-            <a:spLocks xmlns:a="http://schemas.openxmlformats.org/drawingml/2006/main" noGrp="1"/>
-          </p:cNvSpPr>
-          <p:nvPr/>
-        </p:nvSpPr>
-        <p:spPr>
-          <a:xfrm xmlns:a="http://schemas.openxmlformats.org/drawingml/2006/main">
-            <a:off x="3467100" y="1619250"/>
-            <a:ext cx="2381250" cy="647700"/>
+          <p:cNvPr id="23" name="">
+            <a:extLst xmlns:a="http://schemas.openxmlformats.org/drawingml/2006/main">
+              <a:ext uri="{FF2B5EF4-FFF2-40B4-BE49-F238E27FC236}">
+                <a16:creationId xmlns:a16="http://schemas.microsoft.com/office/drawing/2014/main" id="{7C110DA7-BA4A-49C9-93D3-BC17A6422A90}"/>
+              </a:ext>
+            </a:extLst>
+          </p:cNvPr>
+          <p:cNvSpPr>
+            <a:spLocks xmlns:a="http://schemas.openxmlformats.org/drawingml/2006/main" noGrp="1"/>
+          </p:cNvSpPr>
+          <p:nvPr/>
+        </p:nvSpPr>
+        <p:spPr>
+          <a:xfrm xmlns:a="http://schemas.openxmlformats.org/drawingml/2006/main">
+            <a:off x="7048500" y="1676400"/>
+            <a:ext cx="3905250" cy="952500"/>
           </a:xfrm>
           <a:prstGeom xmlns:a="http://schemas.openxmlformats.org/drawingml/2006/main" prst="rect">
             <a:avLst/>
@@ -10416,53 +9306,53 @@
                 <a:spcPct val="105000"/>
               </a:lnSpc>
               <a:buNone/>
-              <a:defRPr sz="3600" b="1" i="0">
-                <a:solidFill>
-                  <a:srgbClr val="2A9D8F"/>
-                </a:solidFill>
-              </a:defRPr>
-            </a:pPr>
-            <a:r>
-              <a:rPr sz="3600" b="1" i="0">
-                <a:solidFill>
-                  <a:srgbClr val="2A9D8F"/>
-                </a:solidFill>
-              </a:rPr>
-              <a:t>3,600</a:t>
-            </a:r>
-          </a:p>
-        </p:txBody>
-      </p:sp>
-      <p:sp>
-        <p:nvSpPr>
-          <p:cNvPr id="10" name="">
-            <a:extLst xmlns:a="http://schemas.openxmlformats.org/drawingml/2006/main">
-              <a:ext uri="{FF2B5EF4-FFF2-40B4-BE49-F238E27FC236}">
-                <a16:creationId xmlns:a16="http://schemas.microsoft.com/office/drawing/2014/main" id="{5BA4207D-A418-4BD8-BAFE-8C086ED3106A}"/>
-              </a:ext>
-            </a:extLst>
-          </p:cNvPr>
-          <p:cNvSpPr>
-            <a:spLocks xmlns:a="http://schemas.openxmlformats.org/drawingml/2006/main" noGrp="1"/>
-          </p:cNvSpPr>
-          <p:nvPr/>
-        </p:nvSpPr>
-        <p:spPr>
-          <a:xfrm xmlns:a="http://schemas.openxmlformats.org/drawingml/2006/main">
-            <a:off x="3505200" y="2266950"/>
-            <a:ext cx="2305050" cy="457200"/>
-          </a:xfrm>
-          <a:prstGeom xmlns:a="http://schemas.openxmlformats.org/drawingml/2006/main" prst="rect">
-            <a:avLst/>
-          </a:prstGeom>
-          <a:noFill xmlns:a="http://schemas.openxmlformats.org/drawingml/2006/main"/>
-          <a:ln xmlns:a="http://schemas.openxmlformats.org/drawingml/2006/main" w="0">
-            <a:noFill/>
-            <a:prstDash val="solid"/>
-          </a:ln>
-        </p:spPr>
-        <p:txBody>
-          <a:bodyPr xmlns:a="http://schemas.openxmlformats.org/drawingml/2006/main" wrap="square" lIns="38100" tIns="19050" rIns="38100" bIns="19050" anchor="t">
+              <a:defRPr sz="5400" b="1">
+                <a:solidFill>
+                  <a:srgbClr val="2E8B57"/>
+                </a:solidFill>
+              </a:defRPr>
+            </a:pPr>
+            <a:r>
+              <a:rPr sz="5400" b="1">
+                <a:solidFill>
+                  <a:srgbClr val="2E8B57"/>
+                </a:solidFill>
+              </a:rPr>
+              <a:t>0</a:t>
+            </a:r>
+          </a:p>
+        </p:txBody>
+      </p:sp>
+      <p:sp>
+        <p:nvSpPr>
+          <p:cNvPr id="24" name="">
+            <a:extLst xmlns:a="http://schemas.openxmlformats.org/drawingml/2006/main">
+              <a:ext uri="{FF2B5EF4-FFF2-40B4-BE49-F238E27FC236}">
+                <a16:creationId xmlns:a16="http://schemas.microsoft.com/office/drawing/2014/main" id="{BFF574DA-5C2F-45F9-BC3E-D6A8278BBFD6}"/>
+              </a:ext>
+            </a:extLst>
+          </p:cNvPr>
+          <p:cNvSpPr>
+            <a:spLocks xmlns:a="http://schemas.openxmlformats.org/drawingml/2006/main" noGrp="1"/>
+          </p:cNvSpPr>
+          <p:nvPr/>
+        </p:nvSpPr>
+        <p:spPr>
+          <a:xfrm xmlns:a="http://schemas.openxmlformats.org/drawingml/2006/main">
+            <a:off x="7048500" y="2647950"/>
+            <a:ext cx="3905250" cy="438150"/>
+          </a:xfrm>
+          <a:prstGeom xmlns:a="http://schemas.openxmlformats.org/drawingml/2006/main" prst="rect">
+            <a:avLst/>
+          </a:prstGeom>
+          <a:noFill xmlns:a="http://schemas.openxmlformats.org/drawingml/2006/main"/>
+          <a:ln xmlns:a="http://schemas.openxmlformats.org/drawingml/2006/main" w="0">
+            <a:noFill/>
+            <a:prstDash val="solid"/>
+          </a:ln>
+        </p:spPr>
+        <p:txBody>
+          <a:bodyPr xmlns:a="http://schemas.openxmlformats.org/drawingml/2006/main" wrap="square" lIns="38100" tIns="19050" rIns="38100" bIns="19050" anchor="ctr">
             <a:normAutofit fontScale="100000"/>
           </a:bodyPr>
           <a:lstStyle xmlns:a="http://schemas.openxmlformats.org/drawingml/2006/main"/>
@@ -10472,240 +9362,16 @@
                 <a:spcPct val="105000"/>
               </a:lnSpc>
               <a:buNone/>
-              <a:defRPr sz="1350" b="0" i="0">
-                <a:solidFill>
-                  <a:srgbClr val="52606D"/>
-                </a:solidFill>
-              </a:defRPr>
-            </a:pPr>
-            <a:r>
-              <a:rPr sz="1350" b="0" i="0">
-                <a:solidFill>
-                  <a:srgbClr val="52606D"/>
-                </a:solidFill>
-              </a:rPr>
-              <a:t>测量记录</a:t>
-            </a:r>
-          </a:p>
-        </p:txBody>
-      </p:sp>
-      <p:sp>
-        <p:nvSpPr>
-          <p:cNvPr id="11" name="">
-            <a:extLst xmlns:a="http://schemas.openxmlformats.org/drawingml/2006/main">
-              <a:ext uri="{FF2B5EF4-FFF2-40B4-BE49-F238E27FC236}">
-                <a16:creationId xmlns:a16="http://schemas.microsoft.com/office/drawing/2014/main" id="{3E5453A3-709A-4440-9EB8-1541C07C257D}"/>
-              </a:ext>
-            </a:extLst>
-          </p:cNvPr>
-          <p:cNvSpPr>
-            <a:spLocks xmlns:a="http://schemas.openxmlformats.org/drawingml/2006/main" noGrp="1"/>
-          </p:cNvSpPr>
-          <p:nvPr/>
-        </p:nvSpPr>
-        <p:spPr>
-          <a:xfrm xmlns:a="http://schemas.openxmlformats.org/drawingml/2006/main">
-            <a:off x="6210300" y="1619250"/>
-            <a:ext cx="2381250" cy="647700"/>
-          </a:xfrm>
-          <a:prstGeom xmlns:a="http://schemas.openxmlformats.org/drawingml/2006/main" prst="rect">
-            <a:avLst/>
-          </a:prstGeom>
-          <a:noFill xmlns:a="http://schemas.openxmlformats.org/drawingml/2006/main"/>
-          <a:ln xmlns:a="http://schemas.openxmlformats.org/drawingml/2006/main" w="0">
-            <a:noFill/>
-            <a:prstDash val="solid"/>
-          </a:ln>
-        </p:spPr>
-        <p:txBody>
-          <a:bodyPr xmlns:a="http://schemas.openxmlformats.org/drawingml/2006/main" wrap="square" lIns="38100" tIns="19050" rIns="38100" bIns="19050" anchor="ctr">
-            <a:normAutofit fontScale="100000"/>
-          </a:bodyPr>
-          <a:lstStyle xmlns:a="http://schemas.openxmlformats.org/drawingml/2006/main"/>
-          <a:p xmlns:a="http://schemas.openxmlformats.org/drawingml/2006/main">
-            <a:pPr algn="ctr">
-              <a:lnSpc>
-                <a:spcPct val="105000"/>
-              </a:lnSpc>
-              <a:buNone/>
-              <a:defRPr sz="3600" b="1" i="0">
-                <a:solidFill>
-                  <a:srgbClr val="E76F51"/>
-                </a:solidFill>
-              </a:defRPr>
-            </a:pPr>
-            <a:r>
-              <a:rPr sz="3600" b="1" i="0">
-                <a:solidFill>
-                  <a:srgbClr val="E76F51"/>
-                </a:solidFill>
-              </a:rPr>
-              <a:t>60 / 60</a:t>
-            </a:r>
-          </a:p>
-        </p:txBody>
-      </p:sp>
-      <p:sp>
-        <p:nvSpPr>
-          <p:cNvPr id="12" name="">
-            <a:extLst xmlns:a="http://schemas.openxmlformats.org/drawingml/2006/main">
-              <a:ext uri="{FF2B5EF4-FFF2-40B4-BE49-F238E27FC236}">
-                <a16:creationId xmlns:a16="http://schemas.microsoft.com/office/drawing/2014/main" id="{C4BF964A-9181-4337-8BF7-2F2E7A7571C6}"/>
-              </a:ext>
-            </a:extLst>
-          </p:cNvPr>
-          <p:cNvSpPr>
-            <a:spLocks xmlns:a="http://schemas.openxmlformats.org/drawingml/2006/main" noGrp="1"/>
-          </p:cNvSpPr>
-          <p:nvPr/>
-        </p:nvSpPr>
-        <p:spPr>
-          <a:xfrm xmlns:a="http://schemas.openxmlformats.org/drawingml/2006/main">
-            <a:off x="6248400" y="2266950"/>
-            <a:ext cx="2305050" cy="457200"/>
-          </a:xfrm>
-          <a:prstGeom xmlns:a="http://schemas.openxmlformats.org/drawingml/2006/main" prst="rect">
-            <a:avLst/>
-          </a:prstGeom>
-          <a:noFill xmlns:a="http://schemas.openxmlformats.org/drawingml/2006/main"/>
-          <a:ln xmlns:a="http://schemas.openxmlformats.org/drawingml/2006/main" w="0">
-            <a:noFill/>
-            <a:prstDash val="solid"/>
-          </a:ln>
-        </p:spPr>
-        <p:txBody>
-          <a:bodyPr xmlns:a="http://schemas.openxmlformats.org/drawingml/2006/main" wrap="square" lIns="38100" tIns="19050" rIns="38100" bIns="19050" anchor="t">
-            <a:normAutofit fontScale="100000"/>
-          </a:bodyPr>
-          <a:lstStyle xmlns:a="http://schemas.openxmlformats.org/drawingml/2006/main"/>
-          <a:p xmlns:a="http://schemas.openxmlformats.org/drawingml/2006/main">
-            <a:pPr algn="ctr">
-              <a:lnSpc>
-                <a:spcPct val="105000"/>
-              </a:lnSpc>
-              <a:buNone/>
-              <a:defRPr sz="1350" b="0" i="0">
-                <a:solidFill>
-                  <a:srgbClr val="52606D"/>
-                </a:solidFill>
-              </a:defRPr>
-            </a:pPr>
-            <a:r>
-              <a:rPr sz="1350" b="0" i="0">
-                <a:solidFill>
-                  <a:srgbClr val="52606D"/>
-                </a:solidFill>
-              </a:rPr>
-              <a:t>checked-state audit 通过</a:t>
-            </a:r>
-          </a:p>
-        </p:txBody>
-      </p:sp>
-      <p:sp>
-        <p:nvSpPr>
-          <p:cNvPr id="13" name="">
-            <a:extLst xmlns:a="http://schemas.openxmlformats.org/drawingml/2006/main">
-              <a:ext uri="{FF2B5EF4-FFF2-40B4-BE49-F238E27FC236}">
-                <a16:creationId xmlns:a16="http://schemas.microsoft.com/office/drawing/2014/main" id="{0DE862D5-AC9C-4049-B0F4-3EAAC0B06A2E}"/>
-              </a:ext>
-            </a:extLst>
-          </p:cNvPr>
-          <p:cNvSpPr>
-            <a:spLocks xmlns:a="http://schemas.openxmlformats.org/drawingml/2006/main" noGrp="1"/>
-          </p:cNvSpPr>
-          <p:nvPr/>
-        </p:nvSpPr>
-        <p:spPr>
-          <a:xfrm xmlns:a="http://schemas.openxmlformats.org/drawingml/2006/main">
-            <a:off x="8953500" y="1619250"/>
-            <a:ext cx="2381250" cy="647700"/>
-          </a:xfrm>
-          <a:prstGeom xmlns:a="http://schemas.openxmlformats.org/drawingml/2006/main" prst="rect">
-            <a:avLst/>
-          </a:prstGeom>
-          <a:noFill xmlns:a="http://schemas.openxmlformats.org/drawingml/2006/main"/>
-          <a:ln xmlns:a="http://schemas.openxmlformats.org/drawingml/2006/main" w="0">
-            <a:noFill/>
-            <a:prstDash val="solid"/>
-          </a:ln>
-        </p:spPr>
-        <p:txBody>
-          <a:bodyPr xmlns:a="http://schemas.openxmlformats.org/drawingml/2006/main" wrap="square" lIns="38100" tIns="19050" rIns="38100" bIns="19050" anchor="ctr">
-            <a:normAutofit fontScale="100000"/>
-          </a:bodyPr>
-          <a:lstStyle xmlns:a="http://schemas.openxmlformats.org/drawingml/2006/main"/>
-          <a:p xmlns:a="http://schemas.openxmlformats.org/drawingml/2006/main">
-            <a:pPr algn="ctr">
-              <a:lnSpc>
-                <a:spcPct val="105000"/>
-              </a:lnSpc>
-              <a:buNone/>
-              <a:defRPr sz="3600" b="1" i="0">
-                <a:solidFill>
-                  <a:srgbClr val="1F8A70"/>
-                </a:solidFill>
-              </a:defRPr>
-            </a:pPr>
-            <a:r>
-              <a:rPr sz="3600" b="1" i="0">
-                <a:solidFill>
-                  <a:srgbClr val="1F8A70"/>
-                </a:solidFill>
-              </a:rPr>
-              <a:t>0</a:t>
-            </a:r>
-          </a:p>
-        </p:txBody>
-      </p:sp>
-      <p:sp>
-        <p:nvSpPr>
-          <p:cNvPr id="14" name="">
-            <a:extLst xmlns:a="http://schemas.openxmlformats.org/drawingml/2006/main">
-              <a:ext uri="{FF2B5EF4-FFF2-40B4-BE49-F238E27FC236}">
-                <a16:creationId xmlns:a16="http://schemas.microsoft.com/office/drawing/2014/main" id="{B3177758-FA1F-4460-AC5C-E809461338DF}"/>
-              </a:ext>
-            </a:extLst>
-          </p:cNvPr>
-          <p:cNvSpPr>
-            <a:spLocks xmlns:a="http://schemas.openxmlformats.org/drawingml/2006/main" noGrp="1"/>
-          </p:cNvSpPr>
-          <p:nvPr/>
-        </p:nvSpPr>
-        <p:spPr>
-          <a:xfrm xmlns:a="http://schemas.openxmlformats.org/drawingml/2006/main">
-            <a:off x="8991600" y="2266950"/>
-            <a:ext cx="2305050" cy="457200"/>
-          </a:xfrm>
-          <a:prstGeom xmlns:a="http://schemas.openxmlformats.org/drawingml/2006/main" prst="rect">
-            <a:avLst/>
-          </a:prstGeom>
-          <a:noFill xmlns:a="http://schemas.openxmlformats.org/drawingml/2006/main"/>
-          <a:ln xmlns:a="http://schemas.openxmlformats.org/drawingml/2006/main" w="0">
-            <a:noFill/>
-            <a:prstDash val="solid"/>
-          </a:ln>
-        </p:spPr>
-        <p:txBody>
-          <a:bodyPr xmlns:a="http://schemas.openxmlformats.org/drawingml/2006/main" wrap="square" lIns="38100" tIns="19050" rIns="38100" bIns="19050" anchor="t">
-            <a:normAutofit fontScale="100000"/>
-          </a:bodyPr>
-          <a:lstStyle xmlns:a="http://schemas.openxmlformats.org/drawingml/2006/main"/>
-          <a:p xmlns:a="http://schemas.openxmlformats.org/drawingml/2006/main">
-            <a:pPr algn="ctr">
-              <a:lnSpc>
-                <a:spcPct val="105000"/>
-              </a:lnSpc>
-              <a:buNone/>
-              <a:defRPr sz="1350" b="0" i="0">
-                <a:solidFill>
-                  <a:srgbClr val="52606D"/>
-                </a:solidFill>
-              </a:defRPr>
-            </a:pPr>
-            <a:r>
-              <a:rPr sz="1350" b="0" i="0">
-                <a:solidFill>
-                  <a:srgbClr val="52606D"/>
+              <a:defRPr sz="1950" b="1">
+                <a:solidFill>
+                  <a:srgbClr val="18324A"/>
+                </a:solidFill>
+              </a:defRPr>
+            </a:pPr>
+            <a:r>
+              <a:rPr sz="1950" b="1">
+                <a:solidFill>
+                  <a:srgbClr val="18324A"/>
                 </a:solidFill>
               </a:rPr>
               <a:t>记录的正确性错误</a:t>
@@ -10715,21 +9381,21 @@
       </p:sp>
       <p:sp>
         <p:nvSpPr>
-          <p:cNvPr id="15" name="">
-            <a:extLst xmlns:a="http://schemas.openxmlformats.org/drawingml/2006/main">
-              <a:ext uri="{FF2B5EF4-FFF2-40B4-BE49-F238E27FC236}">
-                <a16:creationId xmlns:a16="http://schemas.microsoft.com/office/drawing/2014/main" id="{A3925198-3B5D-4E88-9FD8-B38F42274E3D}"/>
-              </a:ext>
-            </a:extLst>
-          </p:cNvPr>
-          <p:cNvSpPr>
-            <a:spLocks xmlns:a="http://schemas.openxmlformats.org/drawingml/2006/main" noGrp="1"/>
-          </p:cNvSpPr>
-          <p:nvPr/>
-        </p:nvSpPr>
-        <p:spPr>
-          <a:xfrm xmlns:a="http://schemas.openxmlformats.org/drawingml/2006/main">
-            <a:off x="723900" y="3067050"/>
+          <p:cNvPr id="25" name="">
+            <a:extLst xmlns:a="http://schemas.openxmlformats.org/drawingml/2006/main">
+              <a:ext uri="{FF2B5EF4-FFF2-40B4-BE49-F238E27FC236}">
+                <a16:creationId xmlns:a16="http://schemas.microsoft.com/office/drawing/2014/main" id="{7D066514-866D-4E7E-B31F-BC89F3DF3DF9}"/>
+              </a:ext>
+            </a:extLst>
+          </p:cNvPr>
+          <p:cNvSpPr>
+            <a:spLocks xmlns:a="http://schemas.openxmlformats.org/drawingml/2006/main" noGrp="1"/>
+          </p:cNvSpPr>
+          <p:nvPr/>
+        </p:nvSpPr>
+        <p:spPr>
+          <a:xfrm xmlns:a="http://schemas.openxmlformats.org/drawingml/2006/main">
+            <a:off x="723900" y="3371850"/>
             <a:ext cx="10744200" cy="9525"/>
           </a:xfrm>
           <a:prstGeom xmlns:a="http://schemas.openxmlformats.org/drawingml/2006/main" prst="line">
@@ -10738,7 +9404,7 @@
           <a:noFill xmlns:a="http://schemas.openxmlformats.org/drawingml/2006/main"/>
           <a:ln xmlns:a="http://schemas.openxmlformats.org/drawingml/2006/main" w="19050">
             <a:solidFill>
-              <a:srgbClr val="D9E2EC"/>
+              <a:srgbClr val="CBD5DE"/>
             </a:solidFill>
             <a:prstDash val="solid"/>
           </a:ln>
@@ -10746,21 +9412,21 @@
       </p:sp>
       <p:sp>
         <p:nvSpPr>
-          <p:cNvPr id="16" name="">
-            <a:extLst xmlns:a="http://schemas.openxmlformats.org/drawingml/2006/main">
-              <a:ext uri="{FF2B5EF4-FFF2-40B4-BE49-F238E27FC236}">
-                <a16:creationId xmlns:a16="http://schemas.microsoft.com/office/drawing/2014/main" id="{25FAB753-788B-4413-A600-2E60A4D64DEA}"/>
-              </a:ext>
-            </a:extLst>
-          </p:cNvPr>
-          <p:cNvSpPr>
-            <a:spLocks xmlns:a="http://schemas.openxmlformats.org/drawingml/2006/main" noGrp="1"/>
-          </p:cNvSpPr>
-          <p:nvPr/>
-        </p:nvSpPr>
-        <p:spPr>
-          <a:xfrm xmlns:a="http://schemas.openxmlformats.org/drawingml/2006/main">
-            <a:off x="1524000" y="3429000"/>
+          <p:cNvPr id="26" name="">
+            <a:extLst xmlns:a="http://schemas.openxmlformats.org/drawingml/2006/main">
+              <a:ext uri="{FF2B5EF4-FFF2-40B4-BE49-F238E27FC236}">
+                <a16:creationId xmlns:a16="http://schemas.microsoft.com/office/drawing/2014/main" id="{E4A5421D-19F9-4626-B39F-1F9000DBF7D4}"/>
+              </a:ext>
+            </a:extLst>
+          </p:cNvPr>
+          <p:cNvSpPr>
+            <a:spLocks xmlns:a="http://schemas.openxmlformats.org/drawingml/2006/main" noGrp="1"/>
+          </p:cNvSpPr>
+          <p:nvPr/>
+        </p:nvSpPr>
+        <p:spPr>
+          <a:xfrm xmlns:a="http://schemas.openxmlformats.org/drawingml/2006/main">
+            <a:off x="1524000" y="3638550"/>
             <a:ext cx="9144000" cy="533400"/>
           </a:xfrm>
           <a:prstGeom xmlns:a="http://schemas.openxmlformats.org/drawingml/2006/main" prst="rect">
@@ -10783,45 +9449,45 @@
                 <a:spcPct val="105000"/>
               </a:lnSpc>
               <a:buNone/>
-              <a:defRPr sz="2250" b="1" i="0">
-                <a:solidFill>
-                  <a:srgbClr val="102A43"/>
-                </a:solidFill>
-              </a:defRPr>
-            </a:pPr>
-            <a:r>
-              <a:rPr sz="2250" b="1" i="0">
-                <a:solidFill>
-                  <a:srgbClr val="102A43"/>
-                </a:solidFill>
-              </a:rPr>
-              <a:t>每个用例均在计时前通过 oracle 认证。</a:t>
-            </a:r>
-          </a:p>
-        </p:txBody>
-      </p:sp>
-      <p:sp>
-        <p:nvSpPr>
-          <p:cNvPr id="17" name="">
-            <a:extLst xmlns:a="http://schemas.openxmlformats.org/drawingml/2006/main">
-              <a:ext uri="{FF2B5EF4-FFF2-40B4-BE49-F238E27FC236}">
-                <a16:creationId xmlns:a16="http://schemas.microsoft.com/office/drawing/2014/main" id="{6910ACE7-8FA2-47FB-8F49-BF141E218B7E}"/>
-              </a:ext>
-            </a:extLst>
-          </p:cNvPr>
-          <p:cNvSpPr>
-            <a:spLocks xmlns:a="http://schemas.openxmlformats.org/drawingml/2006/main" noGrp="1"/>
-          </p:cNvSpPr>
-          <p:nvPr/>
-        </p:nvSpPr>
-        <p:spPr>
-          <a:xfrm xmlns:a="http://schemas.openxmlformats.org/drawingml/2006/main">
-            <a:off x="1581150" y="4362450"/>
-            <a:ext cx="9029700" cy="1066800"/>
+              <a:defRPr sz="2175" b="1">
+                <a:solidFill>
+                  <a:srgbClr val="18324A"/>
+                </a:solidFill>
+              </a:defRPr>
+            </a:pPr>
+            <a:r>
+              <a:rPr sz="2175" b="1">
+                <a:solidFill>
+                  <a:srgbClr val="18324A"/>
+                </a:solidFill>
+              </a:rPr>
+              <a:t>每个用例均在计时前完成 oracle 认证和一次检查。</a:t>
+            </a:r>
+          </a:p>
+        </p:txBody>
+      </p:sp>
+      <p:sp>
+        <p:nvSpPr>
+          <p:cNvPr id="27" name="">
+            <a:extLst xmlns:a="http://schemas.openxmlformats.org/drawingml/2006/main">
+              <a:ext uri="{FF2B5EF4-FFF2-40B4-BE49-F238E27FC236}">
+                <a16:creationId xmlns:a16="http://schemas.microsoft.com/office/drawing/2014/main" id="{4258502F-41A3-4522-950E-39D6E3A705F2}"/>
+              </a:ext>
+            </a:extLst>
+          </p:cNvPr>
+          <p:cNvSpPr>
+            <a:spLocks xmlns:a="http://schemas.openxmlformats.org/drawingml/2006/main" noGrp="1"/>
+          </p:cNvSpPr>
+          <p:nvPr/>
+        </p:nvSpPr>
+        <p:spPr>
+          <a:xfrm xmlns:a="http://schemas.openxmlformats.org/drawingml/2006/main">
+            <a:off x="1581150" y="4514850"/>
+            <a:ext cx="9029700" cy="876300"/>
           </a:xfrm>
           <a:prstGeom xmlns:a="http://schemas.openxmlformats.org/drawingml/2006/main" prst="roundRect">
             <a:avLst>
-              <a:gd name="adj" fmla="val 7143"/>
+              <a:gd name="adj" fmla="val 8696"/>
             </a:avLst>
           </a:prstGeom>
           <a:solidFill xmlns:a="http://schemas.openxmlformats.org/drawingml/2006/main">
@@ -10829,7 +9495,7 @@
           </a:solidFill>
           <a:ln xmlns:a="http://schemas.openxmlformats.org/drawingml/2006/main" w="14288">
             <a:solidFill>
-              <a:srgbClr val="102A43"/>
+              <a:srgbClr val="18324A"/>
             </a:solidFill>
             <a:prstDash val="solid"/>
           </a:ln>
@@ -10837,22 +9503,22 @@
       </p:sp>
       <p:sp>
         <p:nvSpPr>
-          <p:cNvPr id="18" name="">
-            <a:extLst xmlns:a="http://schemas.openxmlformats.org/drawingml/2006/main">
-              <a:ext uri="{FF2B5EF4-FFF2-40B4-BE49-F238E27FC236}">
-                <a16:creationId xmlns:a16="http://schemas.microsoft.com/office/drawing/2014/main" id="{5E685324-0F96-428C-9D51-A8E26B8D630A}"/>
-              </a:ext>
-            </a:extLst>
-          </p:cNvPr>
-          <p:cNvSpPr>
-            <a:spLocks xmlns:a="http://schemas.openxmlformats.org/drawingml/2006/main" noGrp="1"/>
-          </p:cNvSpPr>
-          <p:nvPr/>
-        </p:nvSpPr>
-        <p:spPr>
-          <a:xfrm xmlns:a="http://schemas.openxmlformats.org/drawingml/2006/main">
-            <a:off x="1847850" y="4533900"/>
-            <a:ext cx="8496300" cy="685800"/>
+          <p:cNvPr id="28" name="">
+            <a:extLst xmlns:a="http://schemas.openxmlformats.org/drawingml/2006/main">
+              <a:ext uri="{FF2B5EF4-FFF2-40B4-BE49-F238E27FC236}">
+                <a16:creationId xmlns:a16="http://schemas.microsoft.com/office/drawing/2014/main" id="{A37DC4E0-6AFC-4906-B04A-E3F5609FCBC4}"/>
+              </a:ext>
+            </a:extLst>
+          </p:cNvPr>
+          <p:cNvSpPr>
+            <a:spLocks xmlns:a="http://schemas.openxmlformats.org/drawingml/2006/main" noGrp="1"/>
+          </p:cNvSpPr>
+          <p:nvPr/>
+        </p:nvSpPr>
+        <p:spPr>
+          <a:xfrm xmlns:a="http://schemas.openxmlformats.org/drawingml/2006/main">
+            <a:off x="1847850" y="4686300"/>
+            <a:ext cx="8496300" cy="533400"/>
           </a:xfrm>
           <a:prstGeom xmlns:a="http://schemas.openxmlformats.org/drawingml/2006/main" prst="rect">
             <a:avLst/>
@@ -10874,41 +9540,41 @@
                 <a:spcPct val="105000"/>
               </a:lnSpc>
               <a:buNone/>
-              <a:defRPr sz="1650" b="0" i="0">
-                <a:solidFill>
-                  <a:srgbClr val="243B53"/>
-                </a:solidFill>
-              </a:defRPr>
-            </a:pPr>
-            <a:r>
-              <a:rPr sz="1650" b="0" i="0">
-                <a:solidFill>
-                  <a:srgbClr val="243B53"/>
-                </a:solidFill>
-              </a:rPr>
-              <a:t>3,600 条记录来自 60 个 exact case；每个用例在计时前接受一次不计时的 checked-state audit。</a:t>
-            </a:r>
-          </a:p>
-        </p:txBody>
-      </p:sp>
-      <p:sp>
-        <p:nvSpPr>
-          <p:cNvPr id="19" name="">
-            <a:extLst xmlns:a="http://schemas.openxmlformats.org/drawingml/2006/main">
-              <a:ext uri="{FF2B5EF4-FFF2-40B4-BE49-F238E27FC236}">
-                <a16:creationId xmlns:a16="http://schemas.microsoft.com/office/drawing/2014/main" id="{535FA943-A04F-436F-BE58-8B224C8E365B}"/>
-              </a:ext>
-            </a:extLst>
-          </p:cNvPr>
-          <p:cNvSpPr>
-            <a:spLocks xmlns:a="http://schemas.openxmlformats.org/drawingml/2006/main" noGrp="1"/>
-          </p:cNvSpPr>
-          <p:nvPr/>
-        </p:nvSpPr>
-        <p:spPr>
-          <a:xfrm xmlns:a="http://schemas.openxmlformats.org/drawingml/2006/main">
-            <a:off x="1485900" y="5734050"/>
-            <a:ext cx="9220200" cy="400050"/>
+              <a:defRPr sz="1650" b="0">
+                <a:solidFill>
+                  <a:srgbClr val="243746"/>
+                </a:solidFill>
+              </a:defRPr>
+            </a:pPr>
+            <a:r>
+              <a:rPr sz="1650" b="0">
+                <a:solidFill>
+                  <a:srgbClr val="243746"/>
+                </a:solidFill>
+              </a:rPr>
+              <a:t>3,600 条计时记录携带对应的 case-level audit 结果。</a:t>
+            </a:r>
+          </a:p>
+        </p:txBody>
+      </p:sp>
+      <p:sp>
+        <p:nvSpPr>
+          <p:cNvPr id="29" name="">
+            <a:extLst xmlns:a="http://schemas.openxmlformats.org/drawingml/2006/main">
+              <a:ext uri="{FF2B5EF4-FFF2-40B4-BE49-F238E27FC236}">
+                <a16:creationId xmlns:a16="http://schemas.microsoft.com/office/drawing/2014/main" id="{8D59FC4B-1354-43F8-8063-89005C000E2A}"/>
+              </a:ext>
+            </a:extLst>
+          </p:cNvPr>
+          <p:cNvSpPr>
+            <a:spLocks xmlns:a="http://schemas.openxmlformats.org/drawingml/2006/main" noGrp="1"/>
+          </p:cNvSpPr>
+          <p:nvPr/>
+        </p:nvSpPr>
+        <p:spPr>
+          <a:xfrm xmlns:a="http://schemas.openxmlformats.org/drawingml/2006/main">
+            <a:off x="1485900" y="5772150"/>
+            <a:ext cx="9220200" cy="342900"/>
           </a:xfrm>
           <a:prstGeom xmlns:a="http://schemas.openxmlformats.org/drawingml/2006/main" prst="rect">
             <a:avLst/>
@@ -10930,19 +9596,19 @@
                 <a:spcPct val="105000"/>
               </a:lnSpc>
               <a:buNone/>
-              <a:defRPr sz="1425" b="1" i="0">
-                <a:solidFill>
-                  <a:srgbClr val="E76F51"/>
-                </a:solidFill>
-              </a:defRPr>
-            </a:pPr>
-            <a:r>
-              <a:rPr sz="1425" b="1" i="0">
-                <a:solidFill>
-                  <a:srgbClr val="E76F51"/>
-                </a:solidFill>
-              </a:rPr>
-              <a:t>这是受控有效用例的证据，不是 recognition 证据，也不是对全部 Jordan sequence 的证明。</a:t>
+              <a:defRPr sz="1500" b="1">
+                <a:solidFill>
+                  <a:srgbClr val="D36B4A"/>
+                </a:solidFill>
+              </a:defRPr>
+            </a:pPr>
+            <a:r>
+              <a:rPr sz="1500" b="1">
+                <a:solidFill>
+                  <a:srgbClr val="D36B4A"/>
+                </a:solidFill>
+              </a:rPr>
+              <a:t>这些结果仅覆盖本次测试的有效用例。</a:t>
             </a:r>
           </a:p>
         </p:txBody>
@@ -11274,7 +9940,7 @@
         </p:xfrm>
         <a:graphic xmlns:a="http://schemas.openxmlformats.org/drawingml/2006/main">
           <a:graphicData uri="http://schemas.openxmlformats.org/drawingml/2006/chart">
-            <c:chart xmlns:r="http://schemas.openxmlformats.org/officeDocument/2006/relationships" xmlns:c="http://schemas.openxmlformats.org/drawingml/2006/chart" r:id="R4cb7ac3985154cd2"/>
+            <c:chart xmlns:r="http://schemas.openxmlformats.org/officeDocument/2006/relationships" xmlns:c="http://schemas.openxmlformats.org/drawingml/2006/chart" r:id="R2bda0ec29d9d4bfa"/>
           </a:graphicData>
         </a:graphic>
       </p:graphicFrame>
@@ -11946,7 +10612,7 @@
                   <a:srgbClr val="102A43"/>
                 </a:solidFill>
               </a:rPr>
-              <a:t>证据支持有界重构结论，而非线性时间主张</a:t>
+              <a:t>当前证据说明了什么</a:t>
             </a:r>
           </a:p>
         </p:txBody>
@@ -12127,10 +10793,10 @@
       </p:sp>
       <p:sp>
         <p:nvSpPr>
-          <p:cNvPr id="7" name="">
-            <a:extLst xmlns:a="http://schemas.openxmlformats.org/drawingml/2006/main">
-              <a:ext uri="{FF2B5EF4-FFF2-40B4-BE49-F238E27FC236}">
-                <a16:creationId xmlns:a16="http://schemas.microsoft.com/office/drawing/2014/main" id="{D15F2E63-7ABA-457A-9805-B7097F3A9A0E}"/>
+          <p:cNvPr id="30" name="">
+            <a:extLst xmlns:a="http://schemas.openxmlformats.org/drawingml/2006/main">
+              <a:ext uri="{FF2B5EF4-FFF2-40B4-BE49-F238E27FC236}">
+                <a16:creationId xmlns:a16="http://schemas.microsoft.com/office/drawing/2014/main" id="{F6D9052C-2E4F-4905-AB39-60D4882E7AB0}"/>
               </a:ext>
             </a:extLst>
           </p:cNvPr>
@@ -12150,11 +10816,11 @@
             </a:avLst>
           </a:prstGeom>
           <a:solidFill xmlns:a="http://schemas.openxmlformats.org/drawingml/2006/main">
-            <a:srgbClr val="E8F5F3"/>
+            <a:srgbClr val="E8F4F3"/>
           </a:solidFill>
           <a:ln xmlns:a="http://schemas.openxmlformats.org/drawingml/2006/main" w="19050">
             <a:solidFill>
-              <a:srgbClr val="2A9D8F"/>
+              <a:srgbClr val="187A84"/>
             </a:solidFill>
             <a:prstDash val="solid"/>
           </a:ln>
@@ -12162,10 +10828,10 @@
       </p:sp>
       <p:sp>
         <p:nvSpPr>
-          <p:cNvPr id="8" name="">
-            <a:extLst xmlns:a="http://schemas.openxmlformats.org/drawingml/2006/main">
-              <a:ext uri="{FF2B5EF4-FFF2-40B4-BE49-F238E27FC236}">
-                <a16:creationId xmlns:a16="http://schemas.microsoft.com/office/drawing/2014/main" id="{D461065A-9010-42DC-B6B1-0640A5D5BC30}"/>
+          <p:cNvPr id="31" name="">
+            <a:extLst xmlns:a="http://schemas.openxmlformats.org/drawingml/2006/main">
+              <a:ext uri="{FF2B5EF4-FFF2-40B4-BE49-F238E27FC236}">
+                <a16:creationId xmlns:a16="http://schemas.microsoft.com/office/drawing/2014/main" id="{1A678C18-6B9D-4719-A070-9770424D997C}"/>
               </a:ext>
             </a:extLst>
           </p:cNvPr>
@@ -12185,11 +10851,11 @@
             </a:avLst>
           </a:prstGeom>
           <a:solidFill xmlns:a="http://schemas.openxmlformats.org/drawingml/2006/main">
-            <a:srgbClr val="FCEEEA"/>
+            <a:srgbClr val="FBEDE8"/>
           </a:solidFill>
           <a:ln xmlns:a="http://schemas.openxmlformats.org/drawingml/2006/main" w="19050">
             <a:solidFill>
-              <a:srgbClr val="E76F51"/>
+              <a:srgbClr val="D36B4A"/>
             </a:solidFill>
             <a:prstDash val="solid"/>
           </a:ln>
@@ -12197,10 +10863,10 @@
       </p:sp>
       <p:sp>
         <p:nvSpPr>
-          <p:cNvPr id="9" name="">
-            <a:extLst xmlns:a="http://schemas.openxmlformats.org/drawingml/2006/main">
-              <a:ext uri="{FF2B5EF4-FFF2-40B4-BE49-F238E27FC236}">
-                <a16:creationId xmlns:a16="http://schemas.microsoft.com/office/drawing/2014/main" id="{F63B3CE2-88CA-4363-AFA4-64B66100F081}"/>
+          <p:cNvPr id="32" name="">
+            <a:extLst xmlns:a="http://schemas.openxmlformats.org/drawingml/2006/main">
+              <a:ext uri="{FF2B5EF4-FFF2-40B4-BE49-F238E27FC236}">
+                <a16:creationId xmlns:a16="http://schemas.microsoft.com/office/drawing/2014/main" id="{DF786850-49F2-4FD7-A417-F5C877BB6FA1}"/>
               </a:ext>
             </a:extLst>
           </p:cNvPr>
@@ -12234,29 +10900,29 @@
                 <a:spcPct val="105000"/>
               </a:lnSpc>
               <a:buNone/>
-              <a:defRPr sz="1950" b="1" i="0">
-                <a:solidFill>
-                  <a:srgbClr val="2A9D8F"/>
-                </a:solidFill>
-              </a:defRPr>
-            </a:pPr>
-            <a:r>
-              <a:rPr sz="1950" b="1" i="0">
-                <a:solidFill>
-                  <a:srgbClr val="2A9D8F"/>
-                </a:solidFill>
-              </a:rPr>
-              <a:t>当前证据支持</a:t>
-            </a:r>
-          </a:p>
-        </p:txBody>
-      </p:sp>
-      <p:sp>
-        <p:nvSpPr>
-          <p:cNvPr id="10" name="">
-            <a:extLst xmlns:a="http://schemas.openxmlformats.org/drawingml/2006/main">
-              <a:ext uri="{FF2B5EF4-FFF2-40B4-BE49-F238E27FC236}">
-                <a16:creationId xmlns:a16="http://schemas.microsoft.com/office/drawing/2014/main" id="{A488945C-8D1A-46D4-935E-50A02653B83B}"/>
+              <a:defRPr sz="1950" b="1">
+                <a:solidFill>
+                  <a:srgbClr val="187A84"/>
+                </a:solidFill>
+              </a:defRPr>
+            </a:pPr>
+            <a:r>
+              <a:rPr sz="1950" b="1">
+                <a:solidFill>
+                  <a:srgbClr val="187A84"/>
+                </a:solidFill>
+              </a:rPr>
+              <a:t>当前结果</a:t>
+            </a:r>
+          </a:p>
+        </p:txBody>
+      </p:sp>
+      <p:sp>
+        <p:nvSpPr>
+          <p:cNvPr id="33" name="">
+            <a:extLst xmlns:a="http://schemas.openxmlformats.org/drawingml/2006/main">
+              <a:ext uri="{FF2B5EF4-FFF2-40B4-BE49-F238E27FC236}">
+                <a16:creationId xmlns:a16="http://schemas.microsoft.com/office/drawing/2014/main" id="{776A3770-411E-4E00-8193-2A2DD1746663}"/>
               </a:ext>
             </a:extLst>
           </p:cNvPr>
@@ -12290,51 +10956,51 @@
                 <a:spcPct val="105000"/>
               </a:lnSpc>
               <a:buNone/>
-              <a:defRPr sz="1950" b="1" i="0">
-                <a:solidFill>
-                  <a:srgbClr val="E76F51"/>
-                </a:solidFill>
-              </a:defRPr>
-            </a:pPr>
-            <a:r>
-              <a:rPr sz="1950" b="1" i="0">
-                <a:solidFill>
-                  <a:srgbClr val="E76F51"/>
-                </a:solidFill>
-              </a:rPr>
-              <a:t>尚未成立</a:t>
-            </a:r>
-          </a:p>
-        </p:txBody>
-      </p:sp>
-      <p:sp>
-        <p:nvSpPr>
-          <p:cNvPr id="11" name="">
-            <a:extLst xmlns:a="http://schemas.openxmlformats.org/drawingml/2006/main">
-              <a:ext uri="{FF2B5EF4-FFF2-40B4-BE49-F238E27FC236}">
-                <a16:creationId xmlns:a16="http://schemas.microsoft.com/office/drawing/2014/main" id="{091AF135-79D3-49DD-BAA5-0517C6C82893}"/>
-              </a:ext>
-            </a:extLst>
-          </p:cNvPr>
-          <p:cNvSpPr>
-            <a:spLocks xmlns:a="http://schemas.openxmlformats.org/drawingml/2006/main" noGrp="1"/>
-          </p:cNvSpPr>
-          <p:nvPr/>
-        </p:nvSpPr>
-        <p:spPr>
-          <a:xfrm xmlns:a="http://schemas.openxmlformats.org/drawingml/2006/main">
-            <a:off x="1066800" y="2476500"/>
+              <a:defRPr sz="1950" b="1">
+                <a:solidFill>
+                  <a:srgbClr val="D36B4A"/>
+                </a:solidFill>
+              </a:defRPr>
+            </a:pPr>
+            <a:r>
+              <a:rPr sz="1950" b="1">
+                <a:solidFill>
+                  <a:srgbClr val="D36B4A"/>
+                </a:solidFill>
+              </a:rPr>
+              <a:t>主要限制</a:t>
+            </a:r>
+          </a:p>
+        </p:txBody>
+      </p:sp>
+      <p:sp>
+        <p:nvSpPr>
+          <p:cNvPr id="34" name="">
+            <a:extLst xmlns:a="http://schemas.openxmlformats.org/drawingml/2006/main">
+              <a:ext uri="{FF2B5EF4-FFF2-40B4-BE49-F238E27FC236}">
+                <a16:creationId xmlns:a16="http://schemas.microsoft.com/office/drawing/2014/main" id="{502EEEF3-04F7-4552-BB38-0C829EAC76A3}"/>
+              </a:ext>
+            </a:extLst>
+          </p:cNvPr>
+          <p:cNvSpPr>
+            <a:spLocks xmlns:a="http://schemas.openxmlformats.org/drawingml/2006/main" noGrp="1"/>
+          </p:cNvSpPr>
+          <p:nvPr/>
+        </p:nvSpPr>
+        <p:spPr>
+          <a:xfrm xmlns:a="http://schemas.openxmlformats.org/drawingml/2006/main">
+            <a:off x="1066800" y="2647950"/>
             <a:ext cx="95250" cy="95250"/>
           </a:xfrm>
           <a:prstGeom xmlns:a="http://schemas.openxmlformats.org/drawingml/2006/main" prst="ellipse">
             <a:avLst/>
           </a:prstGeom>
           <a:solidFill xmlns:a="http://schemas.openxmlformats.org/drawingml/2006/main">
-            <a:srgbClr val="2A9D8F"/>
+            <a:srgbClr val="187A84"/>
           </a:solidFill>
           <a:ln xmlns:a="http://schemas.openxmlformats.org/drawingml/2006/main" w="0">
             <a:solidFill>
-              <a:srgbClr val="2A9D8F"/>
+              <a:srgbClr val="187A84"/>
             </a:solidFill>
             <a:prstDash val="solid"/>
           </a:ln>
@@ -12342,22 +11008,22 @@
       </p:sp>
       <p:sp>
         <p:nvSpPr>
-          <p:cNvPr id="12" name="">
-            <a:extLst xmlns:a="http://schemas.openxmlformats.org/drawingml/2006/main">
-              <a:ext uri="{FF2B5EF4-FFF2-40B4-BE49-F238E27FC236}">
-                <a16:creationId xmlns:a16="http://schemas.microsoft.com/office/drawing/2014/main" id="{243DDF7A-B57D-460C-85A3-F17FFB9A3A0C}"/>
-              </a:ext>
-            </a:extLst>
-          </p:cNvPr>
-          <p:cNvSpPr>
-            <a:spLocks xmlns:a="http://schemas.openxmlformats.org/drawingml/2006/main" noGrp="1"/>
-          </p:cNvSpPr>
-          <p:nvPr/>
-        </p:nvSpPr>
-        <p:spPr>
-          <a:xfrm xmlns:a="http://schemas.openxmlformats.org/drawingml/2006/main">
-            <a:off x="1276350" y="2400300"/>
-            <a:ext cx="4133850" cy="609600"/>
+          <p:cNvPr id="35" name="">
+            <a:extLst xmlns:a="http://schemas.openxmlformats.org/drawingml/2006/main">
+              <a:ext uri="{FF2B5EF4-FFF2-40B4-BE49-F238E27FC236}">
+                <a16:creationId xmlns:a16="http://schemas.microsoft.com/office/drawing/2014/main" id="{E032722B-3F7D-4D1D-B524-8971777C6D3E}"/>
+              </a:ext>
+            </a:extLst>
+          </p:cNvPr>
+          <p:cNvSpPr>
+            <a:spLocks xmlns:a="http://schemas.openxmlformats.org/drawingml/2006/main" noGrp="1"/>
+          </p:cNvSpPr>
+          <p:nvPr/>
+        </p:nvSpPr>
+        <p:spPr>
+          <a:xfrm xmlns:a="http://schemas.openxmlformats.org/drawingml/2006/main">
+            <a:off x="1276350" y="2571750"/>
+            <a:ext cx="4133850" cy="1238250"/>
           </a:xfrm>
           <a:prstGeom xmlns:a="http://schemas.openxmlformats.org/drawingml/2006/main" prst="rect">
             <a:avLst/>
@@ -12379,51 +11045,51 @@
                 <a:spcPct val="100000"/>
               </a:lnSpc>
               <a:buNone/>
-              <a:defRPr sz="1500" b="0" i="0">
-                <a:solidFill>
-                  <a:srgbClr val="243B53"/>
-                </a:solidFill>
-              </a:defRPr>
-            </a:pPr>
-            <a:r>
-              <a:rPr sz="1500" b="0" i="0">
-                <a:solidFill>
-                  <a:srgbClr val="243B53"/>
-                </a:solidFill>
-              </a:rPr>
-              <a:t>可执行的普通列表重构</a:t>
-            </a:r>
-          </a:p>
-        </p:txBody>
-      </p:sp>
-      <p:sp>
-        <p:nvSpPr>
-          <p:cNvPr id="13" name="">
-            <a:extLst xmlns:a="http://schemas.openxmlformats.org/drawingml/2006/main">
-              <a:ext uri="{FF2B5EF4-FFF2-40B4-BE49-F238E27FC236}">
-                <a16:creationId xmlns:a16="http://schemas.microsoft.com/office/drawing/2014/main" id="{E8387360-41FA-4298-92C5-3845EF7CED8F}"/>
-              </a:ext>
-            </a:extLst>
-          </p:cNvPr>
-          <p:cNvSpPr>
-            <a:spLocks xmlns:a="http://schemas.openxmlformats.org/drawingml/2006/main" noGrp="1"/>
-          </p:cNvSpPr>
-          <p:nvPr/>
-        </p:nvSpPr>
-        <p:spPr>
-          <a:xfrm xmlns:a="http://schemas.openxmlformats.org/drawingml/2006/main">
-            <a:off x="1066800" y="3105150"/>
+              <a:defRPr sz="1650" b="0">
+                <a:solidFill>
+                  <a:srgbClr val="243746"/>
+                </a:solidFill>
+              </a:defRPr>
+            </a:pPr>
+            <a:r>
+              <a:rPr sz="1650" b="0">
+                <a:solidFill>
+                  <a:srgbClr val="243746"/>
+                </a:solidFill>
+              </a:rPr>
+              <a:t>可执行重构从维护状态恢复输出</a:t>
+            </a:r>
+          </a:p>
+        </p:txBody>
+      </p:sp>
+      <p:sp>
+        <p:nvSpPr>
+          <p:cNvPr id="36" name="">
+            <a:extLst xmlns:a="http://schemas.openxmlformats.org/drawingml/2006/main">
+              <a:ext uri="{FF2B5EF4-FFF2-40B4-BE49-F238E27FC236}">
+                <a16:creationId xmlns:a16="http://schemas.microsoft.com/office/drawing/2014/main" id="{8063D65C-D7CF-4234-A55B-AF01D76403E4}"/>
+              </a:ext>
+            </a:extLst>
+          </p:cNvPr>
+          <p:cNvSpPr>
+            <a:spLocks xmlns:a="http://schemas.openxmlformats.org/drawingml/2006/main" noGrp="1"/>
+          </p:cNvSpPr>
+          <p:nvPr/>
+        </p:nvSpPr>
+        <p:spPr>
+          <a:xfrm xmlns:a="http://schemas.openxmlformats.org/drawingml/2006/main">
+            <a:off x="1066800" y="3905250"/>
             <a:ext cx="95250" cy="95250"/>
           </a:xfrm>
           <a:prstGeom xmlns:a="http://schemas.openxmlformats.org/drawingml/2006/main" prst="ellipse">
             <a:avLst/>
           </a:prstGeom>
           <a:solidFill xmlns:a="http://schemas.openxmlformats.org/drawingml/2006/main">
-            <a:srgbClr val="2A9D8F"/>
+            <a:srgbClr val="187A84"/>
           </a:solidFill>
           <a:ln xmlns:a="http://schemas.openxmlformats.org/drawingml/2006/main" w="0">
             <a:solidFill>
-              <a:srgbClr val="2A9D8F"/>
+              <a:srgbClr val="187A84"/>
             </a:solidFill>
             <a:prstDash val="solid"/>
           </a:ln>
@@ -12431,22 +11097,22 @@
       </p:sp>
       <p:sp>
         <p:nvSpPr>
-          <p:cNvPr id="14" name="">
-            <a:extLst xmlns:a="http://schemas.openxmlformats.org/drawingml/2006/main">
-              <a:ext uri="{FF2B5EF4-FFF2-40B4-BE49-F238E27FC236}">
-                <a16:creationId xmlns:a16="http://schemas.microsoft.com/office/drawing/2014/main" id="{8F436BDE-292F-443B-9202-6A9C86ECE2B7}"/>
-              </a:ext>
-            </a:extLst>
-          </p:cNvPr>
-          <p:cNvSpPr>
-            <a:spLocks xmlns:a="http://schemas.openxmlformats.org/drawingml/2006/main" noGrp="1"/>
-          </p:cNvSpPr>
-          <p:nvPr/>
-        </p:nvSpPr>
-        <p:spPr>
-          <a:xfrm xmlns:a="http://schemas.openxmlformats.org/drawingml/2006/main">
-            <a:off x="1276350" y="3028950"/>
-            <a:ext cx="4133850" cy="609600"/>
+          <p:cNvPr id="37" name="">
+            <a:extLst xmlns:a="http://schemas.openxmlformats.org/drawingml/2006/main">
+              <a:ext uri="{FF2B5EF4-FFF2-40B4-BE49-F238E27FC236}">
+                <a16:creationId xmlns:a16="http://schemas.microsoft.com/office/drawing/2014/main" id="{0C1F941E-D16C-4A04-9479-9508A35E6FB5}"/>
+              </a:ext>
+            </a:extLst>
+          </p:cNvPr>
+          <p:cNvSpPr>
+            <a:spLocks xmlns:a="http://schemas.openxmlformats.org/drawingml/2006/main" noGrp="1"/>
+          </p:cNvSpPr>
+          <p:nvPr/>
+        </p:nvSpPr>
+        <p:spPr>
+          <a:xfrm xmlns:a="http://schemas.openxmlformats.org/drawingml/2006/main">
+            <a:off x="1276350" y="3829050"/>
+            <a:ext cx="4133850" cy="1238250"/>
           </a:xfrm>
           <a:prstGeom xmlns:a="http://schemas.openxmlformats.org/drawingml/2006/main" prst="rect">
             <a:avLst/>
@@ -12468,51 +11134,51 @@
                 <a:spcPct val="100000"/>
               </a:lnSpc>
               <a:buNone/>
-              <a:defRPr sz="1500" b="0" i="0">
-                <a:solidFill>
-                  <a:srgbClr val="243B53"/>
-                </a:solidFill>
-              </a:defRPr>
-            </a:pPr>
-            <a:r>
-              <a:rPr sz="1500" b="0" i="0">
-                <a:solidFill>
-                  <a:srgbClr val="243B53"/>
-                </a:solidFill>
-              </a:rPr>
-              <a:t>从维护状态恢复输出</a:t>
-            </a:r>
-          </a:p>
-        </p:txBody>
-      </p:sp>
-      <p:sp>
-        <p:nvSpPr>
-          <p:cNvPr id="15" name="">
-            <a:extLst xmlns:a="http://schemas.openxmlformats.org/drawingml/2006/main">
-              <a:ext uri="{FF2B5EF4-FFF2-40B4-BE49-F238E27FC236}">
-                <a16:creationId xmlns:a16="http://schemas.microsoft.com/office/drawing/2014/main" id="{78DF8471-699C-4DD1-BDA4-5EFAE03AE8FB}"/>
-              </a:ext>
-            </a:extLst>
-          </p:cNvPr>
-          <p:cNvSpPr>
-            <a:spLocks xmlns:a="http://schemas.openxmlformats.org/drawingml/2006/main" noGrp="1"/>
-          </p:cNvSpPr>
-          <p:nvPr/>
-        </p:nvSpPr>
-        <p:spPr>
-          <a:xfrm xmlns:a="http://schemas.openxmlformats.org/drawingml/2006/main">
-            <a:off x="1066800" y="3733800"/>
+              <a:defRPr sz="1650" b="0">
+                <a:solidFill>
+                  <a:srgbClr val="243746"/>
+                </a:solidFill>
+              </a:defRPr>
+            </a:pPr>
+            <a:r>
+              <a:rPr sz="1650" b="0">
+                <a:solidFill>
+                  <a:srgbClr val="243746"/>
+                </a:solidFill>
+              </a:rPr>
+              <a:t>在已评估用例中得到正确输出与固定范围的运行时间趋势</a:t>
+            </a:r>
+          </a:p>
+        </p:txBody>
+      </p:sp>
+      <p:sp>
+        <p:nvSpPr>
+          <p:cNvPr id="38" name="">
+            <a:extLst xmlns:a="http://schemas.openxmlformats.org/drawingml/2006/main">
+              <a:ext uri="{FF2B5EF4-FFF2-40B4-BE49-F238E27FC236}">
+                <a16:creationId xmlns:a16="http://schemas.microsoft.com/office/drawing/2014/main" id="{8ACE35F4-0638-4969-99D0-AC153FC3746E}"/>
+              </a:ext>
+            </a:extLst>
+          </p:cNvPr>
+          <p:cNvSpPr>
+            <a:spLocks xmlns:a="http://schemas.openxmlformats.org/drawingml/2006/main" noGrp="1"/>
+          </p:cNvSpPr>
+          <p:nvPr/>
+        </p:nvSpPr>
+        <p:spPr>
+          <a:xfrm xmlns:a="http://schemas.openxmlformats.org/drawingml/2006/main">
+            <a:off x="6667500" y="2647950"/>
             <a:ext cx="95250" cy="95250"/>
           </a:xfrm>
           <a:prstGeom xmlns:a="http://schemas.openxmlformats.org/drawingml/2006/main" prst="ellipse">
             <a:avLst/>
           </a:prstGeom>
           <a:solidFill xmlns:a="http://schemas.openxmlformats.org/drawingml/2006/main">
-            <a:srgbClr val="2A9D8F"/>
+            <a:srgbClr val="D36B4A"/>
           </a:solidFill>
           <a:ln xmlns:a="http://schemas.openxmlformats.org/drawingml/2006/main" w="0">
             <a:solidFill>
-              <a:srgbClr val="2A9D8F"/>
+              <a:srgbClr val="D36B4A"/>
             </a:solidFill>
             <a:prstDash val="solid"/>
           </a:ln>
@@ -12520,22 +11186,22 @@
       </p:sp>
       <p:sp>
         <p:nvSpPr>
-          <p:cNvPr id="16" name="">
-            <a:extLst xmlns:a="http://schemas.openxmlformats.org/drawingml/2006/main">
-              <a:ext uri="{FF2B5EF4-FFF2-40B4-BE49-F238E27FC236}">
-                <a16:creationId xmlns:a16="http://schemas.microsoft.com/office/drawing/2014/main" id="{713A7B7C-CABE-4847-8B5C-9D7291D6F01E}"/>
-              </a:ext>
-            </a:extLst>
-          </p:cNvPr>
-          <p:cNvSpPr>
-            <a:spLocks xmlns:a="http://schemas.openxmlformats.org/drawingml/2006/main" noGrp="1"/>
-          </p:cNvSpPr>
-          <p:nvPr/>
-        </p:nvSpPr>
-        <p:spPr>
-          <a:xfrm xmlns:a="http://schemas.openxmlformats.org/drawingml/2006/main">
-            <a:off x="1276350" y="3657600"/>
-            <a:ext cx="4133850" cy="609600"/>
+          <p:cNvPr id="39" name="">
+            <a:extLst xmlns:a="http://schemas.openxmlformats.org/drawingml/2006/main">
+              <a:ext uri="{FF2B5EF4-FFF2-40B4-BE49-F238E27FC236}">
+                <a16:creationId xmlns:a16="http://schemas.microsoft.com/office/drawing/2014/main" id="{0DE0DC3D-E619-4D82-A371-9D1051569E38}"/>
+              </a:ext>
+            </a:extLst>
+          </p:cNvPr>
+          <p:cNvSpPr>
+            <a:spLocks xmlns:a="http://schemas.openxmlformats.org/drawingml/2006/main" noGrp="1"/>
+          </p:cNvSpPr>
+          <p:nvPr/>
+        </p:nvSpPr>
+        <p:spPr>
+          <a:xfrm xmlns:a="http://schemas.openxmlformats.org/drawingml/2006/main">
+            <a:off x="6877050" y="2571750"/>
+            <a:ext cx="4133850" cy="1238250"/>
           </a:xfrm>
           <a:prstGeom xmlns:a="http://schemas.openxmlformats.org/drawingml/2006/main" prst="rect">
             <a:avLst/>
@@ -12557,51 +11223,51 @@
                 <a:spcPct val="100000"/>
               </a:lnSpc>
               <a:buNone/>
-              <a:defRPr sz="1500" b="0" i="0">
-                <a:solidFill>
-                  <a:srgbClr val="243B53"/>
-                </a:solidFill>
-              </a:defRPr>
-            </a:pPr>
-            <a:r>
-              <a:rPr sz="1500" b="0" i="0">
-                <a:solidFill>
-                  <a:srgbClr val="243B53"/>
-                </a:solidFill>
-              </a:rPr>
-              <a:t>在已评估有效用例上的正确性</a:t>
-            </a:r>
-          </a:p>
-        </p:txBody>
-      </p:sp>
-      <p:sp>
-        <p:nvSpPr>
-          <p:cNvPr id="17" name="">
-            <a:extLst xmlns:a="http://schemas.openxmlformats.org/drawingml/2006/main">
-              <a:ext uri="{FF2B5EF4-FFF2-40B4-BE49-F238E27FC236}">
-                <a16:creationId xmlns:a16="http://schemas.microsoft.com/office/drawing/2014/main" id="{09076827-D6DB-4F15-B27A-830F95F20DC3}"/>
-              </a:ext>
-            </a:extLst>
-          </p:cNvPr>
-          <p:cNvSpPr>
-            <a:spLocks xmlns:a="http://schemas.openxmlformats.org/drawingml/2006/main" noGrp="1"/>
-          </p:cNvSpPr>
-          <p:nvPr/>
-        </p:nvSpPr>
-        <p:spPr>
-          <a:xfrm xmlns:a="http://schemas.openxmlformats.org/drawingml/2006/main">
-            <a:off x="1066800" y="4362450"/>
+              <a:defRPr sz="1650" b="0">
+                <a:solidFill>
+                  <a:srgbClr val="243746"/>
+                </a:solidFill>
+              </a:defRPr>
+            </a:pPr>
+            <a:r>
+              <a:rPr sz="1650" b="0">
+                <a:solidFill>
+                  <a:srgbClr val="243746"/>
+                </a:solidFill>
+              </a:rPr>
+              <a:t>普通列表不能证明线性时间实现</a:t>
+            </a:r>
+          </a:p>
+        </p:txBody>
+      </p:sp>
+      <p:sp>
+        <p:nvSpPr>
+          <p:cNvPr id="40" name="">
+            <a:extLst xmlns:a="http://schemas.openxmlformats.org/drawingml/2006/main">
+              <a:ext uri="{FF2B5EF4-FFF2-40B4-BE49-F238E27FC236}">
+                <a16:creationId xmlns:a16="http://schemas.microsoft.com/office/drawing/2014/main" id="{B5F0F9FA-698E-47D1-B599-0BFE20777A69}"/>
+              </a:ext>
+            </a:extLst>
+          </p:cNvPr>
+          <p:cNvSpPr>
+            <a:spLocks xmlns:a="http://schemas.openxmlformats.org/drawingml/2006/main" noGrp="1"/>
+          </p:cNvSpPr>
+          <p:nvPr/>
+        </p:nvSpPr>
+        <p:spPr>
+          <a:xfrm xmlns:a="http://schemas.openxmlformats.org/drawingml/2006/main">
+            <a:off x="6667500" y="3905250"/>
             <a:ext cx="95250" cy="95250"/>
           </a:xfrm>
           <a:prstGeom xmlns:a="http://schemas.openxmlformats.org/drawingml/2006/main" prst="ellipse">
             <a:avLst/>
           </a:prstGeom>
           <a:solidFill xmlns:a="http://schemas.openxmlformats.org/drawingml/2006/main">
-            <a:srgbClr val="2A9D8F"/>
+            <a:srgbClr val="D36B4A"/>
           </a:solidFill>
           <a:ln xmlns:a="http://schemas.openxmlformats.org/drawingml/2006/main" w="0">
             <a:solidFill>
-              <a:srgbClr val="2A9D8F"/>
+              <a:srgbClr val="D36B4A"/>
             </a:solidFill>
             <a:prstDash val="solid"/>
           </a:ln>
@@ -12609,22 +11275,22 @@
       </p:sp>
       <p:sp>
         <p:nvSpPr>
-          <p:cNvPr id="18" name="">
-            <a:extLst xmlns:a="http://schemas.openxmlformats.org/drawingml/2006/main">
-              <a:ext uri="{FF2B5EF4-FFF2-40B4-BE49-F238E27FC236}">
-                <a16:creationId xmlns:a16="http://schemas.microsoft.com/office/drawing/2014/main" id="{A70D107B-1145-43F5-A816-07919A6B0D37}"/>
-              </a:ext>
-            </a:extLst>
-          </p:cNvPr>
-          <p:cNvSpPr>
-            <a:spLocks xmlns:a="http://schemas.openxmlformats.org/drawingml/2006/main" noGrp="1"/>
-          </p:cNvSpPr>
-          <p:nvPr/>
-        </p:nvSpPr>
-        <p:spPr>
-          <a:xfrm xmlns:a="http://schemas.openxmlformats.org/drawingml/2006/main">
-            <a:off x="1276350" y="4286250"/>
-            <a:ext cx="4133850" cy="609600"/>
+          <p:cNvPr id="41" name="">
+            <a:extLst xmlns:a="http://schemas.openxmlformats.org/drawingml/2006/main">
+              <a:ext uri="{FF2B5EF4-FFF2-40B4-BE49-F238E27FC236}">
+                <a16:creationId xmlns:a16="http://schemas.microsoft.com/office/drawing/2014/main" id="{1BFCD2CD-EEE3-43CC-8520-CCFE6F8F2DB0}"/>
+              </a:ext>
+            </a:extLst>
+          </p:cNvPr>
+          <p:cNvSpPr>
+            <a:spLocks xmlns:a="http://schemas.openxmlformats.org/drawingml/2006/main" noGrp="1"/>
+          </p:cNvSpPr>
+          <p:nvPr/>
+        </p:nvSpPr>
+        <p:spPr>
+          <a:xfrm xmlns:a="http://schemas.openxmlformats.org/drawingml/2006/main">
+            <a:off x="6877050" y="3829050"/>
+            <a:ext cx="4133850" cy="1238250"/>
           </a:xfrm>
           <a:prstGeom xmlns:a="http://schemas.openxmlformats.org/drawingml/2006/main" prst="rect">
             <a:avLst/>
@@ -12646,74 +11312,41 @@
                 <a:spcPct val="100000"/>
               </a:lnSpc>
               <a:buNone/>
-              <a:defRPr sz="1500" b="0" i="0">
-                <a:solidFill>
-                  <a:srgbClr val="243B53"/>
-                </a:solidFill>
-              </a:defRPr>
-            </a:pPr>
-            <a:r>
-              <a:rPr sz="1500" b="0" i="0">
-                <a:solidFill>
-                  <a:srgbClr val="243B53"/>
-                </a:solidFill>
-              </a:rPr>
-              <a:t>固定范围下可复现的运行时间观测</a:t>
-            </a:r>
-          </a:p>
-        </p:txBody>
-      </p:sp>
-      <p:sp>
-        <p:nvSpPr>
-          <p:cNvPr id="19" name="">
-            <a:extLst xmlns:a="http://schemas.openxmlformats.org/drawingml/2006/main">
-              <a:ext uri="{FF2B5EF4-FFF2-40B4-BE49-F238E27FC236}">
-                <a16:creationId xmlns:a16="http://schemas.microsoft.com/office/drawing/2014/main" id="{5A89C5A8-51D9-40B5-8E5C-60D495BF0BF9}"/>
-              </a:ext>
-            </a:extLst>
-          </p:cNvPr>
-          <p:cNvSpPr>
-            <a:spLocks xmlns:a="http://schemas.openxmlformats.org/drawingml/2006/main" noGrp="1"/>
-          </p:cNvSpPr>
-          <p:nvPr/>
-        </p:nvSpPr>
-        <p:spPr>
-          <a:xfrm xmlns:a="http://schemas.openxmlformats.org/drawingml/2006/main">
-            <a:off x="6667500" y="2476500"/>
-            <a:ext cx="95250" cy="95250"/>
-          </a:xfrm>
-          <a:prstGeom xmlns:a="http://schemas.openxmlformats.org/drawingml/2006/main" prst="ellipse">
-            <a:avLst/>
-          </a:prstGeom>
-          <a:solidFill xmlns:a="http://schemas.openxmlformats.org/drawingml/2006/main">
-            <a:srgbClr val="E76F51"/>
-          </a:solidFill>
-          <a:ln xmlns:a="http://schemas.openxmlformats.org/drawingml/2006/main" w="0">
-            <a:solidFill>
-              <a:srgbClr val="E76F51"/>
-            </a:solidFill>
-            <a:prstDash val="solid"/>
-          </a:ln>
-        </p:spPr>
-      </p:sp>
-      <p:sp>
-        <p:nvSpPr>
-          <p:cNvPr id="20" name="">
-            <a:extLst xmlns:a="http://schemas.openxmlformats.org/drawingml/2006/main">
-              <a:ext uri="{FF2B5EF4-FFF2-40B4-BE49-F238E27FC236}">
-                <a16:creationId xmlns:a16="http://schemas.microsoft.com/office/drawing/2014/main" id="{E6F9BA62-7963-43CB-97EA-13F38A210371}"/>
-              </a:ext>
-            </a:extLst>
-          </p:cNvPr>
-          <p:cNvSpPr>
-            <a:spLocks xmlns:a="http://schemas.openxmlformats.org/drawingml/2006/main" noGrp="1"/>
-          </p:cNvSpPr>
-          <p:nvPr/>
-        </p:nvSpPr>
-        <p:spPr>
-          <a:xfrm xmlns:a="http://schemas.openxmlformats.org/drawingml/2006/main">
-            <a:off x="6877050" y="2400300"/>
-            <a:ext cx="4133850" cy="609600"/>
+              <a:defRPr sz="1650" b="0">
+                <a:solidFill>
+                  <a:srgbClr val="243746"/>
+                </a:solidFill>
+              </a:defRPr>
+            </a:pPr>
+            <a:r>
+              <a:rPr sz="1650" b="0">
+                <a:solidFill>
+                  <a:srgbClr val="243746"/>
+                </a:solidFill>
+              </a:rPr>
+              <a:t>五个测试规模不能确定渐近复杂度</a:t>
+            </a:r>
+          </a:p>
+        </p:txBody>
+      </p:sp>
+      <p:sp>
+        <p:nvSpPr>
+          <p:cNvPr id="42" name="">
+            <a:extLst xmlns:a="http://schemas.openxmlformats.org/drawingml/2006/main">
+              <a:ext uri="{FF2B5EF4-FFF2-40B4-BE49-F238E27FC236}">
+                <a16:creationId xmlns:a16="http://schemas.microsoft.com/office/drawing/2014/main" id="{C61A718D-977F-4E40-899C-9AFDA2A05E3E}"/>
+              </a:ext>
+            </a:extLst>
+          </p:cNvPr>
+          <p:cNvSpPr>
+            <a:spLocks xmlns:a="http://schemas.openxmlformats.org/drawingml/2006/main" noGrp="1"/>
+          </p:cNvSpPr>
+          <p:nvPr/>
+        </p:nvSpPr>
+        <p:spPr>
+          <a:xfrm xmlns:a="http://schemas.openxmlformats.org/drawingml/2006/main">
+            <a:off x="1428750" y="5715000"/>
+            <a:ext cx="9334500" cy="381000"/>
           </a:xfrm>
           <a:prstGeom xmlns:a="http://schemas.openxmlformats.org/drawingml/2006/main" prst="rect">
             <a:avLst/>
@@ -12730,403 +11363,24 @@
           </a:bodyPr>
           <a:lstStyle xmlns:a="http://schemas.openxmlformats.org/drawingml/2006/main"/>
           <a:p xmlns:a="http://schemas.openxmlformats.org/drawingml/2006/main">
-            <a:pPr algn="l">
-              <a:lnSpc>
-                <a:spcPct val="100000"/>
-              </a:lnSpc>
-              <a:buNone/>
-              <a:defRPr sz="1500" b="0" i="0">
-                <a:solidFill>
-                  <a:srgbClr val="243B53"/>
-                </a:solidFill>
-              </a:defRPr>
-            </a:pPr>
-            <a:r>
-              <a:rPr sz="1500" b="0" i="0">
-                <a:solidFill>
-                  <a:srgbClr val="243B53"/>
-                </a:solidFill>
-              </a:rPr>
-              <a:t>线性时间实现</a:t>
-            </a:r>
-          </a:p>
-        </p:txBody>
-      </p:sp>
-      <p:sp>
-        <p:nvSpPr>
-          <p:cNvPr id="21" name="">
-            <a:extLst xmlns:a="http://schemas.openxmlformats.org/drawingml/2006/main">
-              <a:ext uri="{FF2B5EF4-FFF2-40B4-BE49-F238E27FC236}">
-                <a16:creationId xmlns:a16="http://schemas.microsoft.com/office/drawing/2014/main" id="{7E9635E4-96E3-4C3F-8E68-5184FC520B8C}"/>
-              </a:ext>
-            </a:extLst>
-          </p:cNvPr>
-          <p:cNvSpPr>
-            <a:spLocks xmlns:a="http://schemas.openxmlformats.org/drawingml/2006/main" noGrp="1"/>
-          </p:cNvSpPr>
-          <p:nvPr/>
-        </p:nvSpPr>
-        <p:spPr>
-          <a:xfrm xmlns:a="http://schemas.openxmlformats.org/drawingml/2006/main">
-            <a:off x="6667500" y="3105150"/>
-            <a:ext cx="95250" cy="95250"/>
-          </a:xfrm>
-          <a:prstGeom xmlns:a="http://schemas.openxmlformats.org/drawingml/2006/main" prst="ellipse">
-            <a:avLst/>
-          </a:prstGeom>
-          <a:solidFill xmlns:a="http://schemas.openxmlformats.org/drawingml/2006/main">
-            <a:srgbClr val="E76F51"/>
-          </a:solidFill>
-          <a:ln xmlns:a="http://schemas.openxmlformats.org/drawingml/2006/main" w="0">
-            <a:solidFill>
-              <a:srgbClr val="E76F51"/>
-            </a:solidFill>
-            <a:prstDash val="solid"/>
-          </a:ln>
-        </p:spPr>
-      </p:sp>
-      <p:sp>
-        <p:nvSpPr>
-          <p:cNvPr id="22" name="">
-            <a:extLst xmlns:a="http://schemas.openxmlformats.org/drawingml/2006/main">
-              <a:ext uri="{FF2B5EF4-FFF2-40B4-BE49-F238E27FC236}">
-                <a16:creationId xmlns:a16="http://schemas.microsoft.com/office/drawing/2014/main" id="{5F1AA781-D403-46C5-AAEB-F50659EED59D}"/>
-              </a:ext>
-            </a:extLst>
-          </p:cNvPr>
-          <p:cNvSpPr>
-            <a:spLocks xmlns:a="http://schemas.openxmlformats.org/drawingml/2006/main" noGrp="1"/>
-          </p:cNvSpPr>
-          <p:nvPr/>
-        </p:nvSpPr>
-        <p:spPr>
-          <a:xfrm xmlns:a="http://schemas.openxmlformats.org/drawingml/2006/main">
-            <a:off x="6877050" y="3028950"/>
-            <a:ext cx="4133850" cy="609600"/>
-          </a:xfrm>
-          <a:prstGeom xmlns:a="http://schemas.openxmlformats.org/drawingml/2006/main" prst="rect">
-            <a:avLst/>
-          </a:prstGeom>
-          <a:noFill xmlns:a="http://schemas.openxmlformats.org/drawingml/2006/main"/>
-          <a:ln xmlns:a="http://schemas.openxmlformats.org/drawingml/2006/main" w="0">
-            <a:noFill/>
-            <a:prstDash val="solid"/>
-          </a:ln>
-        </p:spPr>
-        <p:txBody>
-          <a:bodyPr xmlns:a="http://schemas.openxmlformats.org/drawingml/2006/main" wrap="square" lIns="38100" tIns="19050" rIns="38100" bIns="19050" anchor="ctr">
-            <a:normAutofit fontScale="100000"/>
-          </a:bodyPr>
-          <a:lstStyle xmlns:a="http://schemas.openxmlformats.org/drawingml/2006/main"/>
-          <a:p xmlns:a="http://schemas.openxmlformats.org/drawingml/2006/main">
-            <a:pPr algn="l">
-              <a:lnSpc>
-                <a:spcPct val="100000"/>
-              </a:lnSpc>
-              <a:buNone/>
-              <a:defRPr sz="1500" b="0" i="0">
-                <a:solidFill>
-                  <a:srgbClr val="243B53"/>
-                </a:solidFill>
-              </a:defRPr>
-            </a:pPr>
-            <a:r>
-              <a:rPr sz="1500" b="0" i="0">
-                <a:solidFill>
-                  <a:srgbClr val="243B53"/>
-                </a:solidFill>
-              </a:rPr>
-              <a:t>渐近复杂度结论</a:t>
-            </a:r>
-          </a:p>
-        </p:txBody>
-      </p:sp>
-      <p:sp>
-        <p:nvSpPr>
-          <p:cNvPr id="23" name="">
-            <a:extLst xmlns:a="http://schemas.openxmlformats.org/drawingml/2006/main">
-              <a:ext uri="{FF2B5EF4-FFF2-40B4-BE49-F238E27FC236}">
-                <a16:creationId xmlns:a16="http://schemas.microsoft.com/office/drawing/2014/main" id="{2159F660-67E2-48F1-A787-E1D39FB7B704}"/>
-              </a:ext>
-            </a:extLst>
-          </p:cNvPr>
-          <p:cNvSpPr>
-            <a:spLocks xmlns:a="http://schemas.openxmlformats.org/drawingml/2006/main" noGrp="1"/>
-          </p:cNvSpPr>
-          <p:nvPr/>
-        </p:nvSpPr>
-        <p:spPr>
-          <a:xfrm xmlns:a="http://schemas.openxmlformats.org/drawingml/2006/main">
-            <a:off x="6667500" y="3733800"/>
-            <a:ext cx="95250" cy="95250"/>
-          </a:xfrm>
-          <a:prstGeom xmlns:a="http://schemas.openxmlformats.org/drawingml/2006/main" prst="ellipse">
-            <a:avLst/>
-          </a:prstGeom>
-          <a:solidFill xmlns:a="http://schemas.openxmlformats.org/drawingml/2006/main">
-            <a:srgbClr val="E76F51"/>
-          </a:solidFill>
-          <a:ln xmlns:a="http://schemas.openxmlformats.org/drawingml/2006/main" w="0">
-            <a:solidFill>
-              <a:srgbClr val="E76F51"/>
-            </a:solidFill>
-            <a:prstDash val="solid"/>
-          </a:ln>
-        </p:spPr>
-      </p:sp>
-      <p:sp>
-        <p:nvSpPr>
-          <p:cNvPr id="24" name="">
-            <a:extLst xmlns:a="http://schemas.openxmlformats.org/drawingml/2006/main">
-              <a:ext uri="{FF2B5EF4-FFF2-40B4-BE49-F238E27FC236}">
-                <a16:creationId xmlns:a16="http://schemas.microsoft.com/office/drawing/2014/main" id="{C67C8EDD-55B5-4AFA-8F9F-F8E86D34BC78}"/>
-              </a:ext>
-            </a:extLst>
-          </p:cNvPr>
-          <p:cNvSpPr>
-            <a:spLocks xmlns:a="http://schemas.openxmlformats.org/drawingml/2006/main" noGrp="1"/>
-          </p:cNvSpPr>
-          <p:nvPr/>
-        </p:nvSpPr>
-        <p:spPr>
-          <a:xfrm xmlns:a="http://schemas.openxmlformats.org/drawingml/2006/main">
-            <a:off x="6877050" y="3657600"/>
-            <a:ext cx="4133850" cy="609600"/>
-          </a:xfrm>
-          <a:prstGeom xmlns:a="http://schemas.openxmlformats.org/drawingml/2006/main" prst="rect">
-            <a:avLst/>
-          </a:prstGeom>
-          <a:noFill xmlns:a="http://schemas.openxmlformats.org/drawingml/2006/main"/>
-          <a:ln xmlns:a="http://schemas.openxmlformats.org/drawingml/2006/main" w="0">
-            <a:noFill/>
-            <a:prstDash val="solid"/>
-          </a:ln>
-        </p:spPr>
-        <p:txBody>
-          <a:bodyPr xmlns:a="http://schemas.openxmlformats.org/drawingml/2006/main" wrap="square" lIns="38100" tIns="19050" rIns="38100" bIns="19050" anchor="ctr">
-            <a:normAutofit fontScale="100000"/>
-          </a:bodyPr>
-          <a:lstStyle xmlns:a="http://schemas.openxmlformats.org/drawingml/2006/main"/>
-          <a:p xmlns:a="http://schemas.openxmlformats.org/drawingml/2006/main">
-            <a:pPr algn="l">
-              <a:lnSpc>
-                <a:spcPct val="100000"/>
-              </a:lnSpc>
-              <a:buNone/>
-              <a:defRPr sz="1500" b="0" i="0">
-                <a:solidFill>
-                  <a:srgbClr val="243B53"/>
-                </a:solidFill>
-              </a:defRPr>
-            </a:pPr>
-            <a:r>
-              <a:rPr sz="1500" b="0" i="0">
-                <a:solidFill>
-                  <a:srgbClr val="243B53"/>
-                </a:solidFill>
-              </a:rPr>
-              <a:t>任意输入 recognition</a:t>
-            </a:r>
-          </a:p>
-        </p:txBody>
-      </p:sp>
-      <p:sp>
-        <p:nvSpPr>
-          <p:cNvPr id="25" name="">
-            <a:extLst xmlns:a="http://schemas.openxmlformats.org/drawingml/2006/main">
-              <a:ext uri="{FF2B5EF4-FFF2-40B4-BE49-F238E27FC236}">
-                <a16:creationId xmlns:a16="http://schemas.microsoft.com/office/drawing/2014/main" id="{ACA589B4-4853-4C1A-A937-6942E283D934}"/>
-              </a:ext>
-            </a:extLst>
-          </p:cNvPr>
-          <p:cNvSpPr>
-            <a:spLocks xmlns:a="http://schemas.openxmlformats.org/drawingml/2006/main" noGrp="1"/>
-          </p:cNvSpPr>
-          <p:nvPr/>
-        </p:nvSpPr>
-        <p:spPr>
-          <a:xfrm xmlns:a="http://schemas.openxmlformats.org/drawingml/2006/main">
-            <a:off x="6667500" y="4362450"/>
-            <a:ext cx="95250" cy="95250"/>
-          </a:xfrm>
-          <a:prstGeom xmlns:a="http://schemas.openxmlformats.org/drawingml/2006/main" prst="ellipse">
-            <a:avLst/>
-          </a:prstGeom>
-          <a:solidFill xmlns:a="http://schemas.openxmlformats.org/drawingml/2006/main">
-            <a:srgbClr val="E76F51"/>
-          </a:solidFill>
-          <a:ln xmlns:a="http://schemas.openxmlformats.org/drawingml/2006/main" w="0">
-            <a:solidFill>
-              <a:srgbClr val="E76F51"/>
-            </a:solidFill>
-            <a:prstDash val="solid"/>
-          </a:ln>
-        </p:spPr>
-      </p:sp>
-      <p:sp>
-        <p:nvSpPr>
-          <p:cNvPr id="26" name="">
-            <a:extLst xmlns:a="http://schemas.openxmlformats.org/drawingml/2006/main">
-              <a:ext uri="{FF2B5EF4-FFF2-40B4-BE49-F238E27FC236}">
-                <a16:creationId xmlns:a16="http://schemas.microsoft.com/office/drawing/2014/main" id="{1265F424-0F9D-47F8-9F86-CD67BE6E07E9}"/>
-              </a:ext>
-            </a:extLst>
-          </p:cNvPr>
-          <p:cNvSpPr>
-            <a:spLocks xmlns:a="http://schemas.openxmlformats.org/drawingml/2006/main" noGrp="1"/>
-          </p:cNvSpPr>
-          <p:nvPr/>
-        </p:nvSpPr>
-        <p:spPr>
-          <a:xfrm xmlns:a="http://schemas.openxmlformats.org/drawingml/2006/main">
-            <a:off x="6877050" y="4286250"/>
-            <a:ext cx="4133850" cy="609600"/>
-          </a:xfrm>
-          <a:prstGeom xmlns:a="http://schemas.openxmlformats.org/drawingml/2006/main" prst="rect">
-            <a:avLst/>
-          </a:prstGeom>
-          <a:noFill xmlns:a="http://schemas.openxmlformats.org/drawingml/2006/main"/>
-          <a:ln xmlns:a="http://schemas.openxmlformats.org/drawingml/2006/main" w="0">
-            <a:noFill/>
-            <a:prstDash val="solid"/>
-          </a:ln>
-        </p:spPr>
-        <p:txBody>
-          <a:bodyPr xmlns:a="http://schemas.openxmlformats.org/drawingml/2006/main" wrap="square" lIns="38100" tIns="19050" rIns="38100" bIns="19050" anchor="ctr">
-            <a:normAutofit fontScale="100000"/>
-          </a:bodyPr>
-          <a:lstStyle xmlns:a="http://schemas.openxmlformats.org/drawingml/2006/main"/>
-          <a:p xmlns:a="http://schemas.openxmlformats.org/drawingml/2006/main">
-            <a:pPr algn="l">
-              <a:lnSpc>
-                <a:spcPct val="100000"/>
-              </a:lnSpc>
-              <a:buNone/>
-              <a:defRPr sz="1500" b="0" i="0">
-                <a:solidFill>
-                  <a:srgbClr val="243B53"/>
-                </a:solidFill>
-              </a:defRPr>
-            </a:pPr>
-            <a:r>
-              <a:rPr sz="1500" b="0" i="0">
-                <a:solidFill>
-                  <a:srgbClr val="243B53"/>
-                </a:solidFill>
-              </a:rPr>
-              <a:t>同口径的端到端加速</a:t>
-            </a:r>
-          </a:p>
-        </p:txBody>
-      </p:sp>
-      <p:sp>
-        <p:nvSpPr>
-          <p:cNvPr id="27" name="">
-            <a:extLst xmlns:a="http://schemas.openxmlformats.org/drawingml/2006/main">
-              <a:ext uri="{FF2B5EF4-FFF2-40B4-BE49-F238E27FC236}">
-                <a16:creationId xmlns:a16="http://schemas.microsoft.com/office/drawing/2014/main" id="{1A3FEA0E-998C-4010-80D6-2FF023C0AA24}"/>
-              </a:ext>
-            </a:extLst>
-          </p:cNvPr>
-          <p:cNvSpPr>
-            <a:spLocks xmlns:a="http://schemas.openxmlformats.org/drawingml/2006/main" noGrp="1"/>
-          </p:cNvSpPr>
-          <p:nvPr/>
-        </p:nvSpPr>
-        <p:spPr>
-          <a:xfrm xmlns:a="http://schemas.openxmlformats.org/drawingml/2006/main">
-            <a:off x="1428750" y="5486400"/>
-            <a:ext cx="9334500" cy="285750"/>
-          </a:xfrm>
-          <a:prstGeom xmlns:a="http://schemas.openxmlformats.org/drawingml/2006/main" prst="rect">
-            <a:avLst/>
-          </a:prstGeom>
-          <a:noFill xmlns:a="http://schemas.openxmlformats.org/drawingml/2006/main"/>
-          <a:ln xmlns:a="http://schemas.openxmlformats.org/drawingml/2006/main" w="0">
-            <a:noFill/>
-            <a:prstDash val="solid"/>
-          </a:ln>
-        </p:spPr>
-        <p:txBody>
-          <a:bodyPr xmlns:a="http://schemas.openxmlformats.org/drawingml/2006/main" wrap="square" lIns="38100" tIns="19050" rIns="38100" bIns="19050" anchor="ctr">
-            <a:normAutofit fontScale="100000"/>
-          </a:bodyPr>
-          <a:lstStyle xmlns:a="http://schemas.openxmlformats.org/drawingml/2006/main"/>
-          <a:p xmlns:a="http://schemas.openxmlformats.org/drawingml/2006/main">
             <a:pPr algn="ctr">
               <a:lnSpc>
                 <a:spcPct val="105000"/>
               </a:lnSpc>
               <a:buNone/>
-              <a:defRPr sz="1350" b="0" i="0">
-                <a:solidFill>
-                  <a:srgbClr val="52606D"/>
-                </a:solidFill>
-              </a:defRPr>
-            </a:pPr>
-            <a:r>
-              <a:rPr sz="1350" b="0" i="0">
-                <a:solidFill>
-                  <a:srgbClr val="52606D"/>
-                </a:solidFill>
-              </a:rPr>
-              <a:t>结构关系仍是描述性的；finger-tree 后端尚未纳入已验证基线。</a:t>
-            </a:r>
-          </a:p>
-        </p:txBody>
-      </p:sp>
-      <p:sp>
-        <p:nvSpPr>
-          <p:cNvPr id="28" name="">
-            <a:extLst xmlns:a="http://schemas.openxmlformats.org/drawingml/2006/main">
-              <a:ext uri="{FF2B5EF4-FFF2-40B4-BE49-F238E27FC236}">
-                <a16:creationId xmlns:a16="http://schemas.microsoft.com/office/drawing/2014/main" id="{3379034E-4414-43E5-9649-A0D78344D050}"/>
-              </a:ext>
-            </a:extLst>
-          </p:cNvPr>
-          <p:cNvSpPr>
-            <a:spLocks xmlns:a="http://schemas.openxmlformats.org/drawingml/2006/main" noGrp="1"/>
-          </p:cNvSpPr>
-          <p:nvPr/>
-        </p:nvSpPr>
-        <p:spPr>
-          <a:xfrm xmlns:a="http://schemas.openxmlformats.org/drawingml/2006/main">
-            <a:off x="1428750" y="5867400"/>
-            <a:ext cx="9334500" cy="342900"/>
-          </a:xfrm>
-          <a:prstGeom xmlns:a="http://schemas.openxmlformats.org/drawingml/2006/main" prst="rect">
-            <a:avLst/>
-          </a:prstGeom>
-          <a:noFill xmlns:a="http://schemas.openxmlformats.org/drawingml/2006/main"/>
-          <a:ln xmlns:a="http://schemas.openxmlformats.org/drawingml/2006/main" w="0">
-            <a:noFill/>
-            <a:prstDash val="solid"/>
-          </a:ln>
-        </p:spPr>
-        <p:txBody>
-          <a:bodyPr xmlns:a="http://schemas.openxmlformats.org/drawingml/2006/main" wrap="square" lIns="38100" tIns="19050" rIns="38100" bIns="19050" anchor="ctr">
-            <a:normAutofit fontScale="100000"/>
-          </a:bodyPr>
-          <a:lstStyle xmlns:a="http://schemas.openxmlformats.org/drawingml/2006/main"/>
-          <a:p xmlns:a="http://schemas.openxmlformats.org/drawingml/2006/main">
-            <a:pPr algn="ctr">
-              <a:lnSpc>
-                <a:spcPct val="105000"/>
-              </a:lnSpc>
-              <a:buNone/>
-              <a:defRPr sz="1575" b="1" i="0">
-                <a:solidFill>
-                  <a:srgbClr val="102A43"/>
-                </a:solidFill>
-              </a:defRPr>
-            </a:pPr>
-            <a:r>
-              <a:rPr sz="1575" b="1" i="0">
-                <a:solidFill>
-                  <a:srgbClr val="102A43"/>
-                </a:solidFill>
-              </a:rPr>
-              <a:t>本次报告的结论仍仅适用于普通列表基线。</a:t>
+              <a:defRPr sz="1500" b="1">
+                <a:solidFill>
+                  <a:srgbClr val="18324A"/>
+                </a:solidFill>
+              </a:defRPr>
+            </a:pPr>
+            <a:r>
+              <a:rPr sz="1500" b="1">
+                <a:solidFill>
+                  <a:srgbClr val="18324A"/>
+                </a:solidFill>
+              </a:rPr>
+              <a:t>未评估 recognition；paper 与 reference 使用不同计时范围。</a:t>
             </a:r>
           </a:p>
         </p:txBody>
@@ -13211,7 +11465,7 @@
                   <a:srgbClr val="2A9D8F"/>
                 </a:solidFill>
               </a:rPr>
-              <a:t>当前里程碑</a:t>
+              <a:t>下一步</a:t>
             </a:r>
           </a:p>
         </p:txBody>
@@ -13267,7 +11521,7 @@
                   <a:srgbClr val="102A43"/>
                 </a:solidFill>
               </a:rPr>
-              <a:t>已验证基线为限定范围的 finger-tree 扩展提供受控基础</a:t>
+              <a:t>可能的下一步：finger-tree 后端</a:t>
             </a:r>
           </a:p>
         </p:txBody>
@@ -13448,167 +11702,22 @@
       </p:sp>
       <p:sp>
         <p:nvSpPr>
-          <p:cNvPr id="7" name="">
-            <a:extLst xmlns:a="http://schemas.openxmlformats.org/drawingml/2006/main">
-              <a:ext uri="{FF2B5EF4-FFF2-40B4-BE49-F238E27FC236}">
-                <a16:creationId xmlns:a16="http://schemas.microsoft.com/office/drawing/2014/main" id="{D1381D98-B273-4148-BC1F-732F1880792D}"/>
-              </a:ext>
-            </a:extLst>
-          </p:cNvPr>
-          <p:cNvSpPr>
-            <a:spLocks xmlns:a="http://schemas.openxmlformats.org/drawingml/2006/main" noGrp="1"/>
-          </p:cNvSpPr>
-          <p:nvPr/>
-        </p:nvSpPr>
-        <p:spPr>
-          <a:xfrm xmlns:a="http://schemas.openxmlformats.org/drawingml/2006/main">
-            <a:off x="838200" y="1504950"/>
-            <a:ext cx="4476750" cy="266700"/>
-          </a:xfrm>
-          <a:prstGeom xmlns:a="http://schemas.openxmlformats.org/drawingml/2006/main" prst="rect">
-            <a:avLst/>
-          </a:prstGeom>
-          <a:noFill xmlns:a="http://schemas.openxmlformats.org/drawingml/2006/main"/>
-          <a:ln xmlns:a="http://schemas.openxmlformats.org/drawingml/2006/main" w="0">
-            <a:noFill/>
-            <a:prstDash val="solid"/>
-          </a:ln>
-        </p:spPr>
-        <p:txBody>
-          <a:bodyPr xmlns:a="http://schemas.openxmlformats.org/drawingml/2006/main" wrap="square" lIns="38100" tIns="19050" rIns="38100" bIns="19050" anchor="t">
-            <a:normAutofit fontScale="100000"/>
-          </a:bodyPr>
-          <a:lstStyle xmlns:a="http://schemas.openxmlformats.org/drawingml/2006/main"/>
-          <a:p xmlns:a="http://schemas.openxmlformats.org/drawingml/2006/main">
-            <a:pPr algn="l">
-              <a:lnSpc>
-                <a:spcPct val="105000"/>
-              </a:lnSpc>
-              <a:buNone/>
-              <a:defRPr sz="1125" b="1" i="0">
-                <a:solidFill>
-                  <a:srgbClr val="2A9D8F"/>
-                </a:solidFill>
-              </a:defRPr>
-            </a:pPr>
-            <a:r>
-              <a:rPr sz="1125" b="1" i="0">
-                <a:solidFill>
-                  <a:srgbClr val="2A9D8F"/>
-                </a:solidFill>
-              </a:rPr>
-              <a:t>已验证基线</a:t>
-            </a:r>
-          </a:p>
-        </p:txBody>
-      </p:sp>
-      <p:sp>
-        <p:nvSpPr>
-          <p:cNvPr id="8" name="">
-            <a:extLst xmlns:a="http://schemas.openxmlformats.org/drawingml/2006/main">
-              <a:ext uri="{FF2B5EF4-FFF2-40B4-BE49-F238E27FC236}">
-                <a16:creationId xmlns:a16="http://schemas.microsoft.com/office/drawing/2014/main" id="{A7692A19-E969-495F-BC2D-2B7577BAFC54}"/>
-              </a:ext>
-            </a:extLst>
-          </p:cNvPr>
-          <p:cNvSpPr>
-            <a:spLocks xmlns:a="http://schemas.openxmlformats.org/drawingml/2006/main" noGrp="1"/>
-          </p:cNvSpPr>
-          <p:nvPr/>
-        </p:nvSpPr>
-        <p:spPr>
-          <a:xfrm xmlns:a="http://schemas.openxmlformats.org/drawingml/2006/main">
-            <a:off x="6877050" y="1504950"/>
-            <a:ext cx="4476750" cy="266700"/>
-          </a:xfrm>
-          <a:prstGeom xmlns:a="http://schemas.openxmlformats.org/drawingml/2006/main" prst="rect">
-            <a:avLst/>
-          </a:prstGeom>
-          <a:noFill xmlns:a="http://schemas.openxmlformats.org/drawingml/2006/main"/>
-          <a:ln xmlns:a="http://schemas.openxmlformats.org/drawingml/2006/main" w="0">
-            <a:noFill/>
-            <a:prstDash val="solid"/>
-          </a:ln>
-        </p:spPr>
-        <p:txBody>
-          <a:bodyPr xmlns:a="http://schemas.openxmlformats.org/drawingml/2006/main" wrap="square" lIns="38100" tIns="19050" rIns="38100" bIns="19050" anchor="t">
-            <a:normAutofit fontScale="100000"/>
-          </a:bodyPr>
-          <a:lstStyle xmlns:a="http://schemas.openxmlformats.org/drawingml/2006/main"/>
-          <a:p xmlns:a="http://schemas.openxmlformats.org/drawingml/2006/main">
-            <a:pPr algn="l">
-              <a:lnSpc>
-                <a:spcPct val="105000"/>
-              </a:lnSpc>
-              <a:buNone/>
-              <a:defRPr sz="1125" b="1" i="0">
-                <a:solidFill>
-                  <a:srgbClr val="E76F51"/>
-                </a:solidFill>
-              </a:defRPr>
-            </a:pPr>
-            <a:r>
-              <a:rPr sz="1125" b="1" i="0">
-                <a:solidFill>
-                  <a:srgbClr val="E76F51"/>
-                </a:solidFill>
-              </a:rPr>
-              <a:t>FINGER-TREE 扩展</a:t>
-            </a:r>
-          </a:p>
-        </p:txBody>
-      </p:sp>
-      <p:sp>
-        <p:nvSpPr>
-          <p:cNvPr id="9" name="">
-            <a:extLst xmlns:a="http://schemas.openxmlformats.org/drawingml/2006/main">
-              <a:ext uri="{FF2B5EF4-FFF2-40B4-BE49-F238E27FC236}">
-                <a16:creationId xmlns:a16="http://schemas.microsoft.com/office/drawing/2014/main" id="{22E94FFF-8F4C-4029-9F9A-705AA33F87D4}"/>
-              </a:ext>
-            </a:extLst>
-          </p:cNvPr>
-          <p:cNvSpPr>
-            <a:spLocks xmlns:a="http://schemas.openxmlformats.org/drawingml/2006/main" noGrp="1"/>
-          </p:cNvSpPr>
-          <p:nvPr/>
-        </p:nvSpPr>
-        <p:spPr>
-          <a:xfrm xmlns:a="http://schemas.openxmlformats.org/drawingml/2006/main">
-            <a:off x="895350" y="2057400"/>
-            <a:ext cx="95250" cy="95250"/>
-          </a:xfrm>
-          <a:prstGeom xmlns:a="http://schemas.openxmlformats.org/drawingml/2006/main" prst="ellipse">
-            <a:avLst/>
-          </a:prstGeom>
-          <a:solidFill xmlns:a="http://schemas.openxmlformats.org/drawingml/2006/main">
-            <a:srgbClr val="2A9D8F"/>
-          </a:solidFill>
-          <a:ln xmlns:a="http://schemas.openxmlformats.org/drawingml/2006/main" w="0">
-            <a:solidFill>
-              <a:srgbClr val="2A9D8F"/>
-            </a:solidFill>
-            <a:prstDash val="solid"/>
-          </a:ln>
-        </p:spPr>
-      </p:sp>
-      <p:sp>
-        <p:nvSpPr>
-          <p:cNvPr id="10" name="">
-            <a:extLst xmlns:a="http://schemas.openxmlformats.org/drawingml/2006/main">
-              <a:ext uri="{FF2B5EF4-FFF2-40B4-BE49-F238E27FC236}">
-                <a16:creationId xmlns:a16="http://schemas.microsoft.com/office/drawing/2014/main" id="{09D824BA-589D-4ABC-9A76-1F3FDDB8C5FB}"/>
-              </a:ext>
-            </a:extLst>
-          </p:cNvPr>
-          <p:cNvSpPr>
-            <a:spLocks xmlns:a="http://schemas.openxmlformats.org/drawingml/2006/main" noGrp="1"/>
-          </p:cNvSpPr>
-          <p:nvPr/>
-        </p:nvSpPr>
-        <p:spPr>
-          <a:xfrm xmlns:a="http://schemas.openxmlformats.org/drawingml/2006/main">
-            <a:off x="1104900" y="1981200"/>
-            <a:ext cx="4438650" cy="609600"/>
+          <p:cNvPr id="31" name="">
+            <a:extLst xmlns:a="http://schemas.openxmlformats.org/drawingml/2006/main">
+              <a:ext uri="{FF2B5EF4-FFF2-40B4-BE49-F238E27FC236}">
+                <a16:creationId xmlns:a16="http://schemas.microsoft.com/office/drawing/2014/main" id="{EF92F3BF-6FF5-4B66-8841-11B7CAF00577}"/>
+              </a:ext>
+            </a:extLst>
+          </p:cNvPr>
+          <p:cNvSpPr>
+            <a:spLocks xmlns:a="http://schemas.openxmlformats.org/drawingml/2006/main" noGrp="1"/>
+          </p:cNvSpPr>
+          <p:nvPr/>
+        </p:nvSpPr>
+        <p:spPr>
+          <a:xfrm xmlns:a="http://schemas.openxmlformats.org/drawingml/2006/main">
+            <a:off x="1066800" y="1485900"/>
+            <a:ext cx="10058400" cy="514350"/>
           </a:xfrm>
           <a:prstGeom xmlns:a="http://schemas.openxmlformats.org/drawingml/2006/main" prst="rect">
             <a:avLst/>
@@ -13625,681 +11734,205 @@
           </a:bodyPr>
           <a:lstStyle xmlns:a="http://schemas.openxmlformats.org/drawingml/2006/main"/>
           <a:p xmlns:a="http://schemas.openxmlformats.org/drawingml/2006/main">
-            <a:pPr algn="l">
-              <a:lnSpc>
-                <a:spcPct val="100000"/>
-              </a:lnSpc>
-              <a:buNone/>
-              <a:defRPr sz="1575" b="0" i="0">
-                <a:solidFill>
-                  <a:srgbClr val="243B53"/>
-                </a:solidFill>
-              </a:defRPr>
-            </a:pPr>
-            <a:r>
-              <a:rPr sz="1575" b="0" i="0">
-                <a:solidFill>
-                  <a:srgbClr val="243B53"/>
-                </a:solidFill>
-              </a:rPr>
-              <a:t>可执行的普通列表重构</a:t>
-            </a:r>
-          </a:p>
-        </p:txBody>
-      </p:sp>
-      <p:sp>
-        <p:nvSpPr>
-          <p:cNvPr id="11" name="">
-            <a:extLst xmlns:a="http://schemas.openxmlformats.org/drawingml/2006/main">
-              <a:ext uri="{FF2B5EF4-FFF2-40B4-BE49-F238E27FC236}">
-                <a16:creationId xmlns:a16="http://schemas.microsoft.com/office/drawing/2014/main" id="{09115D28-2166-4E97-84BC-C47FBE5FE95A}"/>
-              </a:ext>
-            </a:extLst>
-          </p:cNvPr>
-          <p:cNvSpPr>
-            <a:spLocks xmlns:a="http://schemas.openxmlformats.org/drawingml/2006/main" noGrp="1"/>
-          </p:cNvSpPr>
-          <p:nvPr/>
-        </p:nvSpPr>
-        <p:spPr>
-          <a:xfrm xmlns:a="http://schemas.openxmlformats.org/drawingml/2006/main">
-            <a:off x="895350" y="2686050"/>
-            <a:ext cx="95250" cy="95250"/>
-          </a:xfrm>
-          <a:prstGeom xmlns:a="http://schemas.openxmlformats.org/drawingml/2006/main" prst="ellipse">
-            <a:avLst/>
-          </a:prstGeom>
-          <a:solidFill xmlns:a="http://schemas.openxmlformats.org/drawingml/2006/main">
-            <a:srgbClr val="2A9D8F"/>
-          </a:solidFill>
-          <a:ln xmlns:a="http://schemas.openxmlformats.org/drawingml/2006/main" w="0">
-            <a:solidFill>
-              <a:srgbClr val="2A9D8F"/>
-            </a:solidFill>
-            <a:prstDash val="solid"/>
-          </a:ln>
-        </p:spPr>
-      </p:sp>
-      <p:sp>
-        <p:nvSpPr>
-          <p:cNvPr id="12" name="">
-            <a:extLst xmlns:a="http://schemas.openxmlformats.org/drawingml/2006/main">
-              <a:ext uri="{FF2B5EF4-FFF2-40B4-BE49-F238E27FC236}">
-                <a16:creationId xmlns:a16="http://schemas.microsoft.com/office/drawing/2014/main" id="{E55EFC05-BD2E-4DF6-96B3-9EB7625E3293}"/>
-              </a:ext>
-            </a:extLst>
-          </p:cNvPr>
-          <p:cNvSpPr>
-            <a:spLocks xmlns:a="http://schemas.openxmlformats.org/drawingml/2006/main" noGrp="1"/>
-          </p:cNvSpPr>
-          <p:nvPr/>
-        </p:nvSpPr>
-        <p:spPr>
-          <a:xfrm xmlns:a="http://schemas.openxmlformats.org/drawingml/2006/main">
-            <a:off x="1104900" y="2609850"/>
-            <a:ext cx="4438650" cy="609600"/>
-          </a:xfrm>
-          <a:prstGeom xmlns:a="http://schemas.openxmlformats.org/drawingml/2006/main" prst="rect">
-            <a:avLst/>
-          </a:prstGeom>
-          <a:noFill xmlns:a="http://schemas.openxmlformats.org/drawingml/2006/main"/>
-          <a:ln xmlns:a="http://schemas.openxmlformats.org/drawingml/2006/main" w="0">
-            <a:noFill/>
-            <a:prstDash val="solid"/>
-          </a:ln>
-        </p:spPr>
-        <p:txBody>
-          <a:bodyPr xmlns:a="http://schemas.openxmlformats.org/drawingml/2006/main" wrap="square" lIns="38100" tIns="19050" rIns="38100" bIns="19050" anchor="ctr">
-            <a:normAutofit fontScale="100000"/>
-          </a:bodyPr>
-          <a:lstStyle xmlns:a="http://schemas.openxmlformats.org/drawingml/2006/main"/>
-          <a:p xmlns:a="http://schemas.openxmlformats.org/drawingml/2006/main">
-            <a:pPr algn="l">
-              <a:lnSpc>
-                <a:spcPct val="100000"/>
-              </a:lnSpc>
-              <a:buNone/>
-              <a:defRPr sz="1575" b="0" i="0">
-                <a:solidFill>
-                  <a:srgbClr val="243B53"/>
-                </a:solidFill>
-              </a:defRPr>
-            </a:pPr>
-            <a:r>
-              <a:rPr sz="1575" b="0" i="0">
-                <a:solidFill>
-                  <a:srgbClr val="243B53"/>
-                </a:solidFill>
-              </a:rPr>
-              <a:t>从维护状态恢复输出</a:t>
-            </a:r>
-          </a:p>
-        </p:txBody>
-      </p:sp>
-      <p:sp>
-        <p:nvSpPr>
-          <p:cNvPr id="13" name="">
-            <a:extLst xmlns:a="http://schemas.openxmlformats.org/drawingml/2006/main">
-              <a:ext uri="{FF2B5EF4-FFF2-40B4-BE49-F238E27FC236}">
-                <a16:creationId xmlns:a16="http://schemas.microsoft.com/office/drawing/2014/main" id="{5E5D569D-0C53-4AA0-90C6-841E9BCEE907}"/>
-              </a:ext>
-            </a:extLst>
-          </p:cNvPr>
-          <p:cNvSpPr>
-            <a:spLocks xmlns:a="http://schemas.openxmlformats.org/drawingml/2006/main" noGrp="1"/>
-          </p:cNvSpPr>
-          <p:nvPr/>
-        </p:nvSpPr>
-        <p:spPr>
-          <a:xfrm xmlns:a="http://schemas.openxmlformats.org/drawingml/2006/main">
-            <a:off x="895350" y="3314700"/>
-            <a:ext cx="95250" cy="95250"/>
-          </a:xfrm>
-          <a:prstGeom xmlns:a="http://schemas.openxmlformats.org/drawingml/2006/main" prst="ellipse">
-            <a:avLst/>
-          </a:prstGeom>
-          <a:solidFill xmlns:a="http://schemas.openxmlformats.org/drawingml/2006/main">
-            <a:srgbClr val="2A9D8F"/>
-          </a:solidFill>
-          <a:ln xmlns:a="http://schemas.openxmlformats.org/drawingml/2006/main" w="0">
-            <a:solidFill>
-              <a:srgbClr val="2A9D8F"/>
-            </a:solidFill>
-            <a:prstDash val="solid"/>
-          </a:ln>
-        </p:spPr>
-      </p:sp>
-      <p:sp>
-        <p:nvSpPr>
-          <p:cNvPr id="14" name="">
-            <a:extLst xmlns:a="http://schemas.openxmlformats.org/drawingml/2006/main">
-              <a:ext uri="{FF2B5EF4-FFF2-40B4-BE49-F238E27FC236}">
-                <a16:creationId xmlns:a16="http://schemas.microsoft.com/office/drawing/2014/main" id="{41562512-AD2B-42F9-9FDF-B0A74A663E47}"/>
-              </a:ext>
-            </a:extLst>
-          </p:cNvPr>
-          <p:cNvSpPr>
-            <a:spLocks xmlns:a="http://schemas.openxmlformats.org/drawingml/2006/main" noGrp="1"/>
-          </p:cNvSpPr>
-          <p:nvPr/>
-        </p:nvSpPr>
-        <p:spPr>
-          <a:xfrm xmlns:a="http://schemas.openxmlformats.org/drawingml/2006/main">
-            <a:off x="1104900" y="3238500"/>
-            <a:ext cx="4438650" cy="609600"/>
-          </a:xfrm>
-          <a:prstGeom xmlns:a="http://schemas.openxmlformats.org/drawingml/2006/main" prst="rect">
-            <a:avLst/>
-          </a:prstGeom>
-          <a:noFill xmlns:a="http://schemas.openxmlformats.org/drawingml/2006/main"/>
-          <a:ln xmlns:a="http://schemas.openxmlformats.org/drawingml/2006/main" w="0">
-            <a:noFill/>
-            <a:prstDash val="solid"/>
-          </a:ln>
-        </p:spPr>
-        <p:txBody>
-          <a:bodyPr xmlns:a="http://schemas.openxmlformats.org/drawingml/2006/main" wrap="square" lIns="38100" tIns="19050" rIns="38100" bIns="19050" anchor="ctr">
-            <a:normAutofit fontScale="100000"/>
-          </a:bodyPr>
-          <a:lstStyle xmlns:a="http://schemas.openxmlformats.org/drawingml/2006/main"/>
-          <a:p xmlns:a="http://schemas.openxmlformats.org/drawingml/2006/main">
-            <a:pPr algn="l">
-              <a:lnSpc>
-                <a:spcPct val="100000"/>
-              </a:lnSpc>
-              <a:buNone/>
-              <a:defRPr sz="1575" b="0" i="0">
-                <a:solidFill>
-                  <a:srgbClr val="243B53"/>
-                </a:solidFill>
-              </a:defRPr>
-            </a:pPr>
-            <a:r>
-              <a:rPr sz="1575" b="0" i="0">
-                <a:solidFill>
-                  <a:srgbClr val="243B53"/>
-                </a:solidFill>
-              </a:rPr>
-              <a:t>状态与 ownership 验证</a:t>
-            </a:r>
-          </a:p>
-        </p:txBody>
-      </p:sp>
-      <p:sp>
-        <p:nvSpPr>
-          <p:cNvPr id="15" name="">
-            <a:extLst xmlns:a="http://schemas.openxmlformats.org/drawingml/2006/main">
-              <a:ext uri="{FF2B5EF4-FFF2-40B4-BE49-F238E27FC236}">
-                <a16:creationId xmlns:a16="http://schemas.microsoft.com/office/drawing/2014/main" id="{339414E3-BC16-488F-A44C-4B174082552D}"/>
-              </a:ext>
-            </a:extLst>
-          </p:cNvPr>
-          <p:cNvSpPr>
-            <a:spLocks xmlns:a="http://schemas.openxmlformats.org/drawingml/2006/main" noGrp="1"/>
-          </p:cNvSpPr>
-          <p:nvPr/>
-        </p:nvSpPr>
-        <p:spPr>
-          <a:xfrm xmlns:a="http://schemas.openxmlformats.org/drawingml/2006/main">
-            <a:off x="895350" y="3943350"/>
-            <a:ext cx="95250" cy="95250"/>
-          </a:xfrm>
-          <a:prstGeom xmlns:a="http://schemas.openxmlformats.org/drawingml/2006/main" prst="ellipse">
-            <a:avLst/>
-          </a:prstGeom>
-          <a:solidFill xmlns:a="http://schemas.openxmlformats.org/drawingml/2006/main">
-            <a:srgbClr val="2A9D8F"/>
-          </a:solidFill>
-          <a:ln xmlns:a="http://schemas.openxmlformats.org/drawingml/2006/main" w="0">
-            <a:solidFill>
-              <a:srgbClr val="2A9D8F"/>
-            </a:solidFill>
-            <a:prstDash val="solid"/>
-          </a:ln>
-        </p:spPr>
-      </p:sp>
-      <p:sp>
-        <p:nvSpPr>
-          <p:cNvPr id="16" name="">
-            <a:extLst xmlns:a="http://schemas.openxmlformats.org/drawingml/2006/main">
-              <a:ext uri="{FF2B5EF4-FFF2-40B4-BE49-F238E27FC236}">
-                <a16:creationId xmlns:a16="http://schemas.microsoft.com/office/drawing/2014/main" id="{3B85E4AB-D846-4465-A2C3-A12DDF3323D5}"/>
-              </a:ext>
-            </a:extLst>
-          </p:cNvPr>
-          <p:cNvSpPr>
-            <a:spLocks xmlns:a="http://schemas.openxmlformats.org/drawingml/2006/main" noGrp="1"/>
-          </p:cNvSpPr>
-          <p:nvPr/>
-        </p:nvSpPr>
-        <p:spPr>
-          <a:xfrm xmlns:a="http://schemas.openxmlformats.org/drawingml/2006/main">
-            <a:off x="1104900" y="3867150"/>
-            <a:ext cx="4438650" cy="609600"/>
-          </a:xfrm>
-          <a:prstGeom xmlns:a="http://schemas.openxmlformats.org/drawingml/2006/main" prst="rect">
-            <a:avLst/>
-          </a:prstGeom>
-          <a:noFill xmlns:a="http://schemas.openxmlformats.org/drawingml/2006/main"/>
-          <a:ln xmlns:a="http://schemas.openxmlformats.org/drawingml/2006/main" w="0">
-            <a:noFill/>
-            <a:prstDash val="solid"/>
-          </a:ln>
-        </p:spPr>
-        <p:txBody>
-          <a:bodyPr xmlns:a="http://schemas.openxmlformats.org/drawingml/2006/main" wrap="square" lIns="38100" tIns="19050" rIns="38100" bIns="19050" anchor="ctr">
-            <a:normAutofit fontScale="100000"/>
-          </a:bodyPr>
-          <a:lstStyle xmlns:a="http://schemas.openxmlformats.org/drawingml/2006/main"/>
-          <a:p xmlns:a="http://schemas.openxmlformats.org/drawingml/2006/main">
-            <a:pPr algn="l">
-              <a:lnSpc>
-                <a:spcPct val="100000"/>
-              </a:lnSpc>
-              <a:buNone/>
-              <a:defRPr sz="1575" b="0" i="0">
-                <a:solidFill>
-                  <a:srgbClr val="243B53"/>
-                </a:solidFill>
-              </a:defRPr>
-            </a:pPr>
-            <a:r>
-              <a:rPr sz="1575" b="0" i="0">
-                <a:solidFill>
-                  <a:srgbClr val="243B53"/>
-                </a:solidFill>
-              </a:rPr>
-              <a:t>已归档的普通列表正式证据</a:t>
-            </a:r>
-          </a:p>
-        </p:txBody>
-      </p:sp>
-      <p:sp>
-        <p:nvSpPr>
-          <p:cNvPr id="17" name="">
-            <a:extLst xmlns:a="http://schemas.openxmlformats.org/drawingml/2006/main">
-              <a:ext uri="{FF2B5EF4-FFF2-40B4-BE49-F238E27FC236}">
-                <a16:creationId xmlns:a16="http://schemas.microsoft.com/office/drawing/2014/main" id="{FCDA597A-AC8A-4A56-991A-17B6D75BA1E5}"/>
-              </a:ext>
-            </a:extLst>
-          </p:cNvPr>
-          <p:cNvSpPr>
-            <a:spLocks xmlns:a="http://schemas.openxmlformats.org/drawingml/2006/main" noGrp="1"/>
-          </p:cNvSpPr>
-          <p:nvPr/>
-        </p:nvSpPr>
-        <p:spPr>
-          <a:xfrm xmlns:a="http://schemas.openxmlformats.org/drawingml/2006/main">
-            <a:off x="6934200" y="2000250"/>
-            <a:ext cx="95250" cy="95250"/>
-          </a:xfrm>
-          <a:prstGeom xmlns:a="http://schemas.openxmlformats.org/drawingml/2006/main" prst="ellipse">
-            <a:avLst/>
-          </a:prstGeom>
-          <a:solidFill xmlns:a="http://schemas.openxmlformats.org/drawingml/2006/main">
-            <a:srgbClr val="E76F51"/>
-          </a:solidFill>
-          <a:ln xmlns:a="http://schemas.openxmlformats.org/drawingml/2006/main" w="0">
-            <a:solidFill>
-              <a:srgbClr val="E76F51"/>
-            </a:solidFill>
-            <a:prstDash val="solid"/>
-          </a:ln>
-        </p:spPr>
-      </p:sp>
-      <p:sp>
-        <p:nvSpPr>
-          <p:cNvPr id="18" name="">
-            <a:extLst xmlns:a="http://schemas.openxmlformats.org/drawingml/2006/main">
-              <a:ext uri="{FF2B5EF4-FFF2-40B4-BE49-F238E27FC236}">
-                <a16:creationId xmlns:a16="http://schemas.microsoft.com/office/drawing/2014/main" id="{18B92819-C01A-4581-A66C-6DED016E6902}"/>
-              </a:ext>
-            </a:extLst>
-          </p:cNvPr>
-          <p:cNvSpPr>
-            <a:spLocks xmlns:a="http://schemas.openxmlformats.org/drawingml/2006/main" noGrp="1"/>
-          </p:cNvSpPr>
-          <p:nvPr/>
-        </p:nvSpPr>
-        <p:spPr>
-          <a:xfrm xmlns:a="http://schemas.openxmlformats.org/drawingml/2006/main">
-            <a:off x="7143750" y="1924050"/>
-            <a:ext cx="4305300" cy="523875"/>
-          </a:xfrm>
-          <a:prstGeom xmlns:a="http://schemas.openxmlformats.org/drawingml/2006/main" prst="rect">
-            <a:avLst/>
-          </a:prstGeom>
-          <a:noFill xmlns:a="http://schemas.openxmlformats.org/drawingml/2006/main"/>
-          <a:ln xmlns:a="http://schemas.openxmlformats.org/drawingml/2006/main" w="0">
-            <a:noFill/>
-            <a:prstDash val="solid"/>
-          </a:ln>
-        </p:spPr>
-        <p:txBody>
-          <a:bodyPr xmlns:a="http://schemas.openxmlformats.org/drawingml/2006/main" wrap="square" lIns="38100" tIns="19050" rIns="38100" bIns="19050" anchor="ctr">
-            <a:normAutofit fontScale="100000"/>
-          </a:bodyPr>
-          <a:lstStyle xmlns:a="http://schemas.openxmlformats.org/drawingml/2006/main"/>
-          <a:p xmlns:a="http://schemas.openxmlformats.org/drawingml/2006/main">
-            <a:pPr algn="l">
-              <a:lnSpc>
-                <a:spcPct val="100000"/>
-              </a:lnSpc>
-              <a:buNone/>
-              <a:defRPr sz="1425" b="0" i="0">
-                <a:solidFill>
-                  <a:srgbClr val="243B53"/>
-                </a:solidFill>
-              </a:defRPr>
-            </a:pPr>
-            <a:r>
-              <a:rPr sz="1425" b="0" i="0">
-                <a:solidFill>
-                  <a:srgbClr val="243B53"/>
-                </a:solidFill>
-              </a:rPr>
-              <a:t>抽取与后端无关的接口</a:t>
-            </a:r>
-          </a:p>
-        </p:txBody>
-      </p:sp>
-      <p:sp>
-        <p:nvSpPr>
-          <p:cNvPr id="19" name="">
-            <a:extLst xmlns:a="http://schemas.openxmlformats.org/drawingml/2006/main">
-              <a:ext uri="{FF2B5EF4-FFF2-40B4-BE49-F238E27FC236}">
-                <a16:creationId xmlns:a16="http://schemas.microsoft.com/office/drawing/2014/main" id="{9C2025DB-2761-4C0C-AF4E-01942F377E13}"/>
-              </a:ext>
-            </a:extLst>
-          </p:cNvPr>
-          <p:cNvSpPr>
-            <a:spLocks xmlns:a="http://schemas.openxmlformats.org/drawingml/2006/main" noGrp="1"/>
-          </p:cNvSpPr>
-          <p:nvPr/>
-        </p:nvSpPr>
-        <p:spPr>
-          <a:xfrm xmlns:a="http://schemas.openxmlformats.org/drawingml/2006/main">
-            <a:off x="6934200" y="2543175"/>
-            <a:ext cx="95250" cy="95250"/>
-          </a:xfrm>
-          <a:prstGeom xmlns:a="http://schemas.openxmlformats.org/drawingml/2006/main" prst="ellipse">
-            <a:avLst/>
-          </a:prstGeom>
-          <a:solidFill xmlns:a="http://schemas.openxmlformats.org/drawingml/2006/main">
-            <a:srgbClr val="E76F51"/>
-          </a:solidFill>
-          <a:ln xmlns:a="http://schemas.openxmlformats.org/drawingml/2006/main" w="0">
-            <a:solidFill>
-              <a:srgbClr val="E76F51"/>
-            </a:solidFill>
-            <a:prstDash val="solid"/>
-          </a:ln>
-        </p:spPr>
-      </p:sp>
-      <p:sp>
-        <p:nvSpPr>
-          <p:cNvPr id="20" name="">
-            <a:extLst xmlns:a="http://schemas.openxmlformats.org/drawingml/2006/main">
-              <a:ext uri="{FF2B5EF4-FFF2-40B4-BE49-F238E27FC236}">
-                <a16:creationId xmlns:a16="http://schemas.microsoft.com/office/drawing/2014/main" id="{4500892D-EDA7-4832-95BB-229219DF6C86}"/>
-              </a:ext>
-            </a:extLst>
-          </p:cNvPr>
-          <p:cNvSpPr>
-            <a:spLocks xmlns:a="http://schemas.openxmlformats.org/drawingml/2006/main" noGrp="1"/>
-          </p:cNvSpPr>
-          <p:nvPr/>
-        </p:nvSpPr>
-        <p:spPr>
-          <a:xfrm xmlns:a="http://schemas.openxmlformats.org/drawingml/2006/main">
-            <a:off x="7143750" y="2466975"/>
-            <a:ext cx="4305300" cy="523875"/>
-          </a:xfrm>
-          <a:prstGeom xmlns:a="http://schemas.openxmlformats.org/drawingml/2006/main" prst="rect">
-            <a:avLst/>
-          </a:prstGeom>
-          <a:noFill xmlns:a="http://schemas.openxmlformats.org/drawingml/2006/main"/>
-          <a:ln xmlns:a="http://schemas.openxmlformats.org/drawingml/2006/main" w="0">
-            <a:noFill/>
-            <a:prstDash val="solid"/>
-          </a:ln>
-        </p:spPr>
-        <p:txBody>
-          <a:bodyPr xmlns:a="http://schemas.openxmlformats.org/drawingml/2006/main" wrap="square" lIns="38100" tIns="19050" rIns="38100" bIns="19050" anchor="ctr">
-            <a:normAutofit fontScale="100000"/>
-          </a:bodyPr>
-          <a:lstStyle xmlns:a="http://schemas.openxmlformats.org/drawingml/2006/main"/>
-          <a:p xmlns:a="http://schemas.openxmlformats.org/drawingml/2006/main">
-            <a:pPr algn="l">
-              <a:lnSpc>
-                <a:spcPct val="100000"/>
-              </a:lnSpc>
-              <a:buNone/>
-              <a:defRPr sz="1425" b="0" i="0">
-                <a:solidFill>
-                  <a:srgbClr val="243B53"/>
-                </a:solidFill>
-              </a:defRPr>
-            </a:pPr>
-            <a:r>
-              <a:rPr sz="1425" b="0" i="0">
-                <a:solidFill>
-                  <a:srgbClr val="243B53"/>
-                </a:solidFill>
-              </a:rPr>
-              <a:t>实现 finger-tree sibling-list 后端</a:t>
-            </a:r>
-          </a:p>
-        </p:txBody>
-      </p:sp>
-      <p:sp>
-        <p:nvSpPr>
-          <p:cNvPr id="21" name="">
-            <a:extLst xmlns:a="http://schemas.openxmlformats.org/drawingml/2006/main">
-              <a:ext uri="{FF2B5EF4-FFF2-40B4-BE49-F238E27FC236}">
-                <a16:creationId xmlns:a16="http://schemas.microsoft.com/office/drawing/2014/main" id="{DD9FD031-63B6-4C90-9C7D-B235A311B0D1}"/>
-              </a:ext>
-            </a:extLst>
-          </p:cNvPr>
-          <p:cNvSpPr>
-            <a:spLocks xmlns:a="http://schemas.openxmlformats.org/drawingml/2006/main" noGrp="1"/>
-          </p:cNvSpPr>
-          <p:nvPr/>
-        </p:nvSpPr>
-        <p:spPr>
-          <a:xfrm xmlns:a="http://schemas.openxmlformats.org/drawingml/2006/main">
-            <a:off x="6934200" y="3086100"/>
-            <a:ext cx="95250" cy="95250"/>
-          </a:xfrm>
-          <a:prstGeom xmlns:a="http://schemas.openxmlformats.org/drawingml/2006/main" prst="ellipse">
-            <a:avLst/>
-          </a:prstGeom>
-          <a:solidFill xmlns:a="http://schemas.openxmlformats.org/drawingml/2006/main">
-            <a:srgbClr val="E76F51"/>
-          </a:solidFill>
-          <a:ln xmlns:a="http://schemas.openxmlformats.org/drawingml/2006/main" w="0">
-            <a:solidFill>
-              <a:srgbClr val="E76F51"/>
-            </a:solidFill>
-            <a:prstDash val="solid"/>
-          </a:ln>
-        </p:spPr>
-      </p:sp>
-      <p:sp>
-        <p:nvSpPr>
-          <p:cNvPr id="22" name="">
-            <a:extLst xmlns:a="http://schemas.openxmlformats.org/drawingml/2006/main">
-              <a:ext uri="{FF2B5EF4-FFF2-40B4-BE49-F238E27FC236}">
-                <a16:creationId xmlns:a16="http://schemas.microsoft.com/office/drawing/2014/main" id="{4B3042B2-BA08-4ADF-B27D-40278FF94EB1}"/>
-              </a:ext>
-            </a:extLst>
-          </p:cNvPr>
-          <p:cNvSpPr>
-            <a:spLocks xmlns:a="http://schemas.openxmlformats.org/drawingml/2006/main" noGrp="1"/>
-          </p:cNvSpPr>
-          <p:nvPr/>
-        </p:nvSpPr>
-        <p:spPr>
-          <a:xfrm xmlns:a="http://schemas.openxmlformats.org/drawingml/2006/main">
-            <a:off x="7143750" y="3009900"/>
-            <a:ext cx="4305300" cy="523875"/>
-          </a:xfrm>
-          <a:prstGeom xmlns:a="http://schemas.openxmlformats.org/drawingml/2006/main" prst="rect">
-            <a:avLst/>
-          </a:prstGeom>
-          <a:noFill xmlns:a="http://schemas.openxmlformats.org/drawingml/2006/main"/>
-          <a:ln xmlns:a="http://schemas.openxmlformats.org/drawingml/2006/main" w="0">
-            <a:noFill/>
-            <a:prstDash val="solid"/>
-          </a:ln>
-        </p:spPr>
-        <p:txBody>
-          <a:bodyPr xmlns:a="http://schemas.openxmlformats.org/drawingml/2006/main" wrap="square" lIns="38100" tIns="19050" rIns="38100" bIns="19050" anchor="ctr">
-            <a:normAutofit fontScale="100000"/>
-          </a:bodyPr>
-          <a:lstStyle xmlns:a="http://schemas.openxmlformats.org/drawingml/2006/main"/>
-          <a:p xmlns:a="http://schemas.openxmlformats.org/drawingml/2006/main">
-            <a:pPr algn="l">
-              <a:lnSpc>
-                <a:spcPct val="100000"/>
-              </a:lnSpc>
-              <a:buNone/>
-              <a:defRPr sz="1425" b="0" i="0">
-                <a:solidFill>
-                  <a:srgbClr val="243B53"/>
-                </a:solidFill>
-              </a:defRPr>
-            </a:pPr>
-            <a:r>
-              <a:rPr sz="1425" b="0" i="0">
-                <a:solidFill>
-                  <a:srgbClr val="243B53"/>
-                </a:solidFill>
-              </a:rPr>
-              <a:t>与普通列表基线比较</a:t>
-            </a:r>
-          </a:p>
-        </p:txBody>
-      </p:sp>
-      <p:sp>
-        <p:nvSpPr>
-          <p:cNvPr id="23" name="">
-            <a:extLst xmlns:a="http://schemas.openxmlformats.org/drawingml/2006/main">
-              <a:ext uri="{FF2B5EF4-FFF2-40B4-BE49-F238E27FC236}">
-                <a16:creationId xmlns:a16="http://schemas.microsoft.com/office/drawing/2014/main" id="{30435D58-F95E-479A-B97E-D8943A645A01}"/>
-              </a:ext>
-            </a:extLst>
-          </p:cNvPr>
-          <p:cNvSpPr>
-            <a:spLocks xmlns:a="http://schemas.openxmlformats.org/drawingml/2006/main" noGrp="1"/>
-          </p:cNvSpPr>
-          <p:nvPr/>
-        </p:nvSpPr>
-        <p:spPr>
-          <a:xfrm xmlns:a="http://schemas.openxmlformats.org/drawingml/2006/main">
-            <a:off x="6934200" y="3629025"/>
-            <a:ext cx="95250" cy="95250"/>
-          </a:xfrm>
-          <a:prstGeom xmlns:a="http://schemas.openxmlformats.org/drawingml/2006/main" prst="ellipse">
-            <a:avLst/>
-          </a:prstGeom>
-          <a:solidFill xmlns:a="http://schemas.openxmlformats.org/drawingml/2006/main">
-            <a:srgbClr val="E76F51"/>
-          </a:solidFill>
-          <a:ln xmlns:a="http://schemas.openxmlformats.org/drawingml/2006/main" w="0">
-            <a:solidFill>
-              <a:srgbClr val="E76F51"/>
-            </a:solidFill>
-            <a:prstDash val="solid"/>
-          </a:ln>
-        </p:spPr>
-      </p:sp>
-      <p:sp>
-        <p:nvSpPr>
-          <p:cNvPr id="24" name="">
-            <a:extLst xmlns:a="http://schemas.openxmlformats.org/drawingml/2006/main">
-              <a:ext uri="{FF2B5EF4-FFF2-40B4-BE49-F238E27FC236}">
-                <a16:creationId xmlns:a16="http://schemas.microsoft.com/office/drawing/2014/main" id="{C89683B0-A2B8-4F21-AF89-5491F8066A09}"/>
-              </a:ext>
-            </a:extLst>
-          </p:cNvPr>
-          <p:cNvSpPr>
-            <a:spLocks xmlns:a="http://schemas.openxmlformats.org/drawingml/2006/main" noGrp="1"/>
-          </p:cNvSpPr>
-          <p:nvPr/>
-        </p:nvSpPr>
-        <p:spPr>
-          <a:xfrm xmlns:a="http://schemas.openxmlformats.org/drawingml/2006/main">
-            <a:off x="7143750" y="3552825"/>
-            <a:ext cx="4305300" cy="523875"/>
-          </a:xfrm>
-          <a:prstGeom xmlns:a="http://schemas.openxmlformats.org/drawingml/2006/main" prst="rect">
-            <a:avLst/>
-          </a:prstGeom>
-          <a:noFill xmlns:a="http://schemas.openxmlformats.org/drawingml/2006/main"/>
-          <a:ln xmlns:a="http://schemas.openxmlformats.org/drawingml/2006/main" w="0">
-            <a:noFill/>
-            <a:prstDash val="solid"/>
-          </a:ln>
-        </p:spPr>
-        <p:txBody>
-          <a:bodyPr xmlns:a="http://schemas.openxmlformats.org/drawingml/2006/main" wrap="square" lIns="38100" tIns="19050" rIns="38100" bIns="19050" anchor="ctr">
-            <a:normAutofit fontScale="100000"/>
-          </a:bodyPr>
-          <a:lstStyle xmlns:a="http://schemas.openxmlformats.org/drawingml/2006/main"/>
-          <a:p xmlns:a="http://schemas.openxmlformats.org/drawingml/2006/main">
-            <a:pPr algn="l">
-              <a:lnSpc>
-                <a:spcPct val="100000"/>
-              </a:lnSpc>
-              <a:buNone/>
-              <a:defRPr sz="1425" b="0" i="0">
-                <a:solidFill>
-                  <a:srgbClr val="243B53"/>
-                </a:solidFill>
-              </a:defRPr>
-            </a:pPr>
-            <a:r>
-              <a:rPr sz="1425" b="0" i="0">
-                <a:solidFill>
-                  <a:srgbClr val="243B53"/>
-                </a:solidFill>
-              </a:rPr>
-              <a:t>评估所需 operation bound 能否得到论证</a:t>
-            </a:r>
-          </a:p>
-        </p:txBody>
-      </p:sp>
-      <p:sp>
-        <p:nvSpPr>
-          <p:cNvPr id="27" name="">
-            <a:extLst xmlns:a="http://schemas.openxmlformats.org/drawingml/2006/main">
-              <a:ext uri="{FF2B5EF4-FFF2-40B4-BE49-F238E27FC236}">
-                <a16:creationId xmlns:a16="http://schemas.microsoft.com/office/drawing/2014/main" id="{257731E9-311C-43D4-BDD6-9216AA21AAD9}"/>
-              </a:ext>
-            </a:extLst>
-          </p:cNvPr>
-          <p:cNvSpPr>
-            <a:spLocks xmlns:a="http://schemas.openxmlformats.org/drawingml/2006/main" noGrp="1"/>
-          </p:cNvSpPr>
-          <p:nvPr/>
-        </p:nvSpPr>
-        <p:spPr>
-          <a:xfrm xmlns:a="http://schemas.openxmlformats.org/drawingml/2006/main">
-            <a:off x="876300" y="4953000"/>
-            <a:ext cx="10439400" cy="1066800"/>
+            <a:pPr algn="ctr">
+              <a:lnSpc>
+                <a:spcPct val="105000"/>
+              </a:lnSpc>
+              <a:buNone/>
+              <a:defRPr sz="2100" b="1">
+                <a:solidFill>
+                  <a:srgbClr val="18324A"/>
+                </a:solidFill>
+              </a:defRPr>
+            </a:pPr>
+            <a:r>
+              <a:rPr sz="2100" b="1">
+                <a:solidFill>
+                  <a:srgbClr val="18324A"/>
+                </a:solidFill>
+              </a:rPr>
+              <a:t>普通列表实现提供了经过测试的参照点。</a:t>
+            </a:r>
+          </a:p>
+        </p:txBody>
+      </p:sp>
+      <p:sp>
+        <p:nvSpPr>
+          <p:cNvPr id="32" name="">
+            <a:extLst xmlns:a="http://schemas.openxmlformats.org/drawingml/2006/main">
+              <a:ext uri="{FF2B5EF4-FFF2-40B4-BE49-F238E27FC236}">
+                <a16:creationId xmlns:a16="http://schemas.microsoft.com/office/drawing/2014/main" id="{AA76D41B-9924-4413-B459-D49FC9588885}"/>
+              </a:ext>
+            </a:extLst>
+          </p:cNvPr>
+          <p:cNvSpPr>
+            <a:spLocks xmlns:a="http://schemas.openxmlformats.org/drawingml/2006/main" noGrp="1"/>
+          </p:cNvSpPr>
+          <p:nvPr/>
+        </p:nvSpPr>
+        <p:spPr>
+          <a:xfrm xmlns:a="http://schemas.openxmlformats.org/drawingml/2006/main">
+            <a:off x="1638300" y="2324100"/>
+            <a:ext cx="8915400" cy="952500"/>
           </a:xfrm>
           <a:prstGeom xmlns:a="http://schemas.openxmlformats.org/drawingml/2006/main" prst="roundRect">
             <a:avLst>
-              <a:gd name="adj" fmla="val 7143"/>
+              <a:gd name="adj" fmla="val 8000"/>
             </a:avLst>
           </a:prstGeom>
           <a:solidFill xmlns:a="http://schemas.openxmlformats.org/drawingml/2006/main">
-            <a:srgbClr val="102A43"/>
+            <a:srgbClr val="E8F4F3"/>
+          </a:solidFill>
+          <a:ln xmlns:a="http://schemas.openxmlformats.org/drawingml/2006/main" w="14288">
+            <a:solidFill>
+              <a:srgbClr val="187A84"/>
+            </a:solidFill>
+            <a:prstDash val="solid"/>
+          </a:ln>
+        </p:spPr>
+      </p:sp>
+      <p:sp>
+        <p:nvSpPr>
+          <p:cNvPr id="33" name="">
+            <a:extLst xmlns:a="http://schemas.openxmlformats.org/drawingml/2006/main">
+              <a:ext uri="{FF2B5EF4-FFF2-40B4-BE49-F238E27FC236}">
+                <a16:creationId xmlns:a16="http://schemas.microsoft.com/office/drawing/2014/main" id="{4EF56FE8-44CD-450D-A51C-FEADC54557D3}"/>
+              </a:ext>
+            </a:extLst>
+          </p:cNvPr>
+          <p:cNvSpPr>
+            <a:spLocks xmlns:a="http://schemas.openxmlformats.org/drawingml/2006/main" noGrp="1"/>
+          </p:cNvSpPr>
+          <p:nvPr/>
+        </p:nvSpPr>
+        <p:spPr>
+          <a:xfrm xmlns:a="http://schemas.openxmlformats.org/drawingml/2006/main">
+            <a:off x="1943100" y="2552700"/>
+            <a:ext cx="8305800" cy="514350"/>
+          </a:xfrm>
+          <a:prstGeom xmlns:a="http://schemas.openxmlformats.org/drawingml/2006/main" prst="rect">
+            <a:avLst/>
+          </a:prstGeom>
+          <a:noFill xmlns:a="http://schemas.openxmlformats.org/drawingml/2006/main"/>
+          <a:ln xmlns:a="http://schemas.openxmlformats.org/drawingml/2006/main" w="0">
+            <a:noFill/>
+            <a:prstDash val="solid"/>
+          </a:ln>
+        </p:spPr>
+        <p:txBody>
+          <a:bodyPr xmlns:a="http://schemas.openxmlformats.org/drawingml/2006/main" wrap="square" lIns="38100" tIns="19050" rIns="38100" bIns="19050" anchor="ctr">
+            <a:normAutofit fontScale="100000"/>
+          </a:bodyPr>
+          <a:lstStyle xmlns:a="http://schemas.openxmlformats.org/drawingml/2006/main"/>
+          <a:p xmlns:a="http://schemas.openxmlformats.org/drawingml/2006/main">
+            <a:pPr algn="ctr">
+              <a:lnSpc>
+                <a:spcPct val="105000"/>
+              </a:lnSpc>
+              <a:buNone/>
+              <a:defRPr sz="1800" b="0">
+                <a:solidFill>
+                  <a:srgbClr val="243746"/>
+                </a:solidFill>
+              </a:defRPr>
+            </a:pPr>
+            <a:r>
+              <a:rPr sz="1800" b="0">
+                <a:solidFill>
+                  <a:srgbClr val="243746"/>
+                </a:solidFill>
+              </a:rPr>
+              <a:t>新后端保持相同的 Step 1/2/3 行为，只替换 sibling-list 操作。</a:t>
+            </a:r>
+          </a:p>
+        </p:txBody>
+      </p:sp>
+      <p:sp>
+        <p:nvSpPr>
+          <p:cNvPr id="34" name="">
+            <a:extLst xmlns:a="http://schemas.openxmlformats.org/drawingml/2006/main">
+              <a:ext uri="{FF2B5EF4-FFF2-40B4-BE49-F238E27FC236}">
+                <a16:creationId xmlns:a16="http://schemas.microsoft.com/office/drawing/2014/main" id="{6D45627C-BF2A-45D5-BBE6-0E5EF35B96AC}"/>
+              </a:ext>
+            </a:extLst>
+          </p:cNvPr>
+          <p:cNvSpPr>
+            <a:spLocks xmlns:a="http://schemas.openxmlformats.org/drawingml/2006/main" noGrp="1"/>
+          </p:cNvSpPr>
+          <p:nvPr/>
+        </p:nvSpPr>
+        <p:spPr>
+          <a:xfrm xmlns:a="http://schemas.openxmlformats.org/drawingml/2006/main">
+            <a:off x="1066800" y="3829050"/>
+            <a:ext cx="10058400" cy="361950"/>
+          </a:xfrm>
+          <a:prstGeom xmlns:a="http://schemas.openxmlformats.org/drawingml/2006/main" prst="rect">
+            <a:avLst/>
+          </a:prstGeom>
+          <a:noFill xmlns:a="http://schemas.openxmlformats.org/drawingml/2006/main"/>
+          <a:ln xmlns:a="http://schemas.openxmlformats.org/drawingml/2006/main" w="0">
+            <a:noFill/>
+            <a:prstDash val="solid"/>
+          </a:ln>
+        </p:spPr>
+        <p:txBody>
+          <a:bodyPr xmlns:a="http://schemas.openxmlformats.org/drawingml/2006/main" wrap="square" lIns="38100" tIns="19050" rIns="38100" bIns="19050" anchor="ctr">
+            <a:normAutofit fontScale="100000"/>
+          </a:bodyPr>
+          <a:lstStyle xmlns:a="http://schemas.openxmlformats.org/drawingml/2006/main"/>
+          <a:p xmlns:a="http://schemas.openxmlformats.org/drawingml/2006/main">
+            <a:pPr algn="ctr">
+              <a:lnSpc>
+                <a:spcPct val="105000"/>
+              </a:lnSpc>
+              <a:buNone/>
+              <a:defRPr sz="1875" b="1">
+                <a:solidFill>
+                  <a:srgbClr val="187A84"/>
+                </a:solidFill>
+              </a:defRPr>
+            </a:pPr>
+            <a:r>
+              <a:rPr sz="1875" b="1">
+                <a:solidFill>
+                  <a:srgbClr val="187A84"/>
+                </a:solidFill>
+              </a:rPr>
+              <a:t>与导师讨论</a:t>
+            </a:r>
+          </a:p>
+        </p:txBody>
+      </p:sp>
+      <p:sp>
+        <p:nvSpPr>
+          <p:cNvPr id="35" name="">
+            <a:extLst xmlns:a="http://schemas.openxmlformats.org/drawingml/2006/main">
+              <a:ext uri="{FF2B5EF4-FFF2-40B4-BE49-F238E27FC236}">
+                <a16:creationId xmlns:a16="http://schemas.microsoft.com/office/drawing/2014/main" id="{5A6D5184-261A-4019-B19A-7FA5B0A0DA8D}"/>
+              </a:ext>
+            </a:extLst>
+          </p:cNvPr>
+          <p:cNvSpPr>
+            <a:spLocks xmlns:a="http://schemas.openxmlformats.org/drawingml/2006/main" noGrp="1"/>
+          </p:cNvSpPr>
+          <p:nvPr/>
+        </p:nvSpPr>
+        <p:spPr>
+          <a:xfrm xmlns:a="http://schemas.openxmlformats.org/drawingml/2006/main">
+            <a:off x="1066800" y="4343400"/>
+            <a:ext cx="10058400" cy="1543050"/>
+          </a:xfrm>
+          <a:prstGeom xmlns:a="http://schemas.openxmlformats.org/drawingml/2006/main" prst="roundRect">
+            <a:avLst>
+              <a:gd name="adj" fmla="val 4938"/>
+            </a:avLst>
+          </a:prstGeom>
+          <a:solidFill xmlns:a="http://schemas.openxmlformats.org/drawingml/2006/main">
+            <a:srgbClr val="18324A"/>
           </a:solidFill>
           <a:ln xmlns:a="http://schemas.openxmlformats.org/drawingml/2006/main" w="11430">
             <a:solidFill>
-              <a:srgbClr val="102A43"/>
+              <a:srgbClr val="18324A"/>
             </a:solidFill>
             <a:prstDash val="solid"/>
           </a:ln>
@@ -14307,35 +11940,35 @@
       </p:sp>
       <p:sp>
         <p:nvSpPr>
-          <p:cNvPr id="28" name="">
-            <a:extLst xmlns:a="http://schemas.openxmlformats.org/drawingml/2006/main">
-              <a:ext uri="{FF2B5EF4-FFF2-40B4-BE49-F238E27FC236}">
-                <a16:creationId xmlns:a16="http://schemas.microsoft.com/office/drawing/2014/main" id="{8779671C-6EC3-4DF7-9795-EB682AF75EFD}"/>
-              </a:ext>
-            </a:extLst>
-          </p:cNvPr>
-          <p:cNvSpPr>
-            <a:spLocks xmlns:a="http://schemas.openxmlformats.org/drawingml/2006/main" noGrp="1"/>
-          </p:cNvSpPr>
-          <p:nvPr/>
-        </p:nvSpPr>
-        <p:spPr>
-          <a:xfrm xmlns:a="http://schemas.openxmlformats.org/drawingml/2006/main">
-            <a:off x="1143000" y="5143500"/>
-            <a:ext cx="1524000" cy="285750"/>
-          </a:xfrm>
-          <a:prstGeom xmlns:a="http://schemas.openxmlformats.org/drawingml/2006/main" prst="rect">
-            <a:avLst/>
-          </a:prstGeom>
-          <a:noFill xmlns:a="http://schemas.openxmlformats.org/drawingml/2006/main"/>
-          <a:ln xmlns:a="http://schemas.openxmlformats.org/drawingml/2006/main" w="0">
-            <a:noFill/>
-            <a:prstDash val="solid"/>
-          </a:ln>
-        </p:spPr>
-        <p:txBody>
-          <a:bodyPr xmlns:a="http://schemas.openxmlformats.org/drawingml/2006/main" wrap="square" lIns="38100" tIns="19050" rIns="38100" bIns="19050" anchor="t">
-            <a:normAutofit fontScale="98261"/>
+          <p:cNvPr id="36" name="">
+            <a:extLst xmlns:a="http://schemas.openxmlformats.org/drawingml/2006/main">
+              <a:ext uri="{FF2B5EF4-FFF2-40B4-BE49-F238E27FC236}">
+                <a16:creationId xmlns:a16="http://schemas.microsoft.com/office/drawing/2014/main" id="{BABFCDCD-8EF6-4880-AB4F-DE4ACA3CD493}"/>
+              </a:ext>
+            </a:extLst>
+          </p:cNvPr>
+          <p:cNvSpPr>
+            <a:spLocks xmlns:a="http://schemas.openxmlformats.org/drawingml/2006/main" noGrp="1"/>
+          </p:cNvSpPr>
+          <p:nvPr/>
+        </p:nvSpPr>
+        <p:spPr>
+          <a:xfrm xmlns:a="http://schemas.openxmlformats.org/drawingml/2006/main">
+            <a:off x="1466850" y="4533900"/>
+            <a:ext cx="9258300" cy="1162050"/>
+          </a:xfrm>
+          <a:prstGeom xmlns:a="http://schemas.openxmlformats.org/drawingml/2006/main" prst="rect">
+            <a:avLst/>
+          </a:prstGeom>
+          <a:noFill xmlns:a="http://schemas.openxmlformats.org/drawingml/2006/main"/>
+          <a:ln xmlns:a="http://schemas.openxmlformats.org/drawingml/2006/main" w="0">
+            <a:noFill/>
+            <a:prstDash val="solid"/>
+          </a:ln>
+        </p:spPr>
+        <p:txBody>
+          <a:bodyPr xmlns:a="http://schemas.openxmlformats.org/drawingml/2006/main" wrap="square" lIns="38100" tIns="19050" rIns="38100" bIns="19050" anchor="ctr">
+            <a:normAutofit fontScale="100000"/>
           </a:bodyPr>
           <a:lstStyle xmlns:a="http://schemas.openxmlformats.org/drawingml/2006/main"/>
           <a:p xmlns:a="http://schemas.openxmlformats.org/drawingml/2006/main">
@@ -14344,152 +11977,40 @@
                 <a:spcPct val="105000"/>
               </a:lnSpc>
               <a:buNone/>
-              <a:defRPr sz="1575" b="1" i="0">
-                <a:solidFill>
-                  <a:srgbClr val="2A9D8F"/>
-                </a:solidFill>
-              </a:defRPr>
-            </a:pPr>
-            <a:r>
-              <a:rPr sz="1575" b="1" i="0">
-                <a:solidFill>
-                  <a:srgbClr val="2A9D8F"/>
-                </a:solidFill>
-              </a:rPr>
-              <a:t>讨论</a:t>
-            </a:r>
-          </a:p>
-        </p:txBody>
-      </p:sp>
-      <p:sp>
-        <p:nvSpPr>
-          <p:cNvPr id="29" name="">
-            <a:extLst xmlns:a="http://schemas.openxmlformats.org/drawingml/2006/main">
-              <a:ext uri="{FF2B5EF4-FFF2-40B4-BE49-F238E27FC236}">
-                <a16:creationId xmlns:a16="http://schemas.microsoft.com/office/drawing/2014/main" id="{0F597526-2092-4671-B4F7-40C604C4DD0D}"/>
-              </a:ext>
-            </a:extLst>
-          </p:cNvPr>
-          <p:cNvSpPr>
-            <a:spLocks xmlns:a="http://schemas.openxmlformats.org/drawingml/2006/main" noGrp="1"/>
-          </p:cNvSpPr>
-          <p:nvPr/>
-        </p:nvSpPr>
-        <p:spPr>
-          <a:xfrm xmlns:a="http://schemas.openxmlformats.org/drawingml/2006/main">
-            <a:off x="2743200" y="5010150"/>
-            <a:ext cx="8210550" cy="876300"/>
-          </a:xfrm>
-          <a:prstGeom xmlns:a="http://schemas.openxmlformats.org/drawingml/2006/main" prst="rect">
-            <a:avLst/>
-          </a:prstGeom>
-          <a:noFill xmlns:a="http://schemas.openxmlformats.org/drawingml/2006/main"/>
-          <a:ln xmlns:a="http://schemas.openxmlformats.org/drawingml/2006/main" w="0">
-            <a:noFill/>
-            <a:prstDash val="solid"/>
-          </a:ln>
-        </p:spPr>
-        <p:txBody>
-          <a:bodyPr xmlns:a="http://schemas.openxmlformats.org/drawingml/2006/main" wrap="square" lIns="38100" tIns="19050" rIns="38100" bIns="19050" anchor="ctr">
-            <a:normAutofit fontScale="100000"/>
-          </a:bodyPr>
-          <a:lstStyle xmlns:a="http://schemas.openxmlformats.org/drawingml/2006/main"/>
+              <a:defRPr sz="1800" b="0">
+                <a:solidFill>
+                  <a:srgbClr val="FFFFFF"/>
+                </a:solidFill>
+              </a:defRPr>
+            </a:pPr>
+            <a:r>
+              <a:rPr sz="1800" b="0">
+                <a:solidFill>
+                  <a:srgbClr val="FFFFFF"/>
+                </a:solidFill>
+              </a:rPr>
+              <a:t>1. 应实现历史 heterogeneous finger tree，还是具有所需操作的等价后端？</a:t>
+            </a:r>
+          </a:p>
           <a:p xmlns:a="http://schemas.openxmlformats.org/drawingml/2006/main">
             <a:pPr algn="l">
               <a:lnSpc>
                 <a:spcPct val="105000"/>
               </a:lnSpc>
               <a:buNone/>
-              <a:defRPr sz="1500" b="0" i="0">
+              <a:defRPr sz="1800" b="0">
                 <a:solidFill>
                   <a:srgbClr val="FFFFFF"/>
                 </a:solidFill>
               </a:defRPr>
             </a:pPr>
             <a:r>
-              <a:rPr sz="1500" b="0" i="0">
+              <a:rPr sz="1800" b="0">
                 <a:solidFill>
                   <a:srgbClr val="FFFFFF"/>
                 </a:solidFill>
               </a:rPr>
-              <a:t>1. 扩展应特别针对历史 heterogeneous finger tree，还是针对支持所需列表操作的等价后端？</a:t>
-            </a:r>
-          </a:p>
-          <a:p xmlns:a="http://schemas.openxmlformats.org/drawingml/2006/main">
-            <a:pPr algn="l">
-              <a:lnSpc>
-                <a:spcPct val="105000"/>
-              </a:lnSpc>
-              <a:buNone/>
-              <a:defRPr sz="1500" b="0" i="0">
-                <a:solidFill>
-                  <a:srgbClr val="FFFFFF"/>
-                </a:solidFill>
-              </a:defRPr>
-            </a:pPr>
-            <a:r>
-              <a:rPr sz="1500" b="0" i="0">
-                <a:solidFill>
-                  <a:srgbClr val="FFFFFF"/>
-                </a:solidFill>
-              </a:rPr>
-              <a:t>2. 语义等价加实验比较是否足够，还是论文还应包含 amortized operation-bound 论证？</a:t>
-            </a:r>
-          </a:p>
-        </p:txBody>
-      </p:sp>
-      <p:sp>
-        <p:nvSpPr>
-          <p:cNvPr id="31" name="">
-            <a:extLst xmlns:a="http://schemas.openxmlformats.org/drawingml/2006/main">
-              <a:ext uri="{FF2B5EF4-FFF2-40B4-BE49-F238E27FC236}">
-                <a16:creationId xmlns:a16="http://schemas.microsoft.com/office/drawing/2014/main" id="{FCF12E6E-FF94-4346-AEBC-DE2EF6494ADA}"/>
-              </a:ext>
-            </a:extLst>
-          </p:cNvPr>
-          <p:cNvSpPr>
-            <a:spLocks xmlns:a="http://schemas.openxmlformats.org/drawingml/2006/main" noGrp="1"/>
-          </p:cNvSpPr>
-          <p:nvPr/>
-        </p:nvSpPr>
-        <p:spPr>
-          <a:xfrm xmlns:a="http://schemas.openxmlformats.org/drawingml/2006/main">
-            <a:off x="876300" y="4610100"/>
-            <a:ext cx="10439400" cy="266700"/>
-          </a:xfrm>
-          <a:prstGeom xmlns:a="http://schemas.openxmlformats.org/drawingml/2006/main" prst="rect">
-            <a:avLst/>
-          </a:prstGeom>
-          <a:noFill xmlns:a="http://schemas.openxmlformats.org/drawingml/2006/main"/>
-          <a:ln xmlns:a="http://schemas.openxmlformats.org/drawingml/2006/main" w="0">
-            <a:noFill/>
-            <a:prstDash val="solid"/>
-          </a:ln>
-        </p:spPr>
-        <p:txBody>
-          <a:bodyPr xmlns:a="http://schemas.openxmlformats.org/drawingml/2006/main" wrap="square" lIns="38100" tIns="19050" rIns="38100" bIns="19050" anchor="ctr">
-            <a:normAutofit fontScale="100000"/>
-          </a:bodyPr>
-          <a:lstStyle xmlns:a="http://schemas.openxmlformats.org/drawingml/2006/main"/>
-          <a:p xmlns:a="http://schemas.openxmlformats.org/drawingml/2006/main">
-            <a:pPr algn="ctr">
-              <a:lnSpc>
-                <a:spcPct val="100000"/>
-              </a:lnSpc>
-              <a:buNone/>
-              <a:defRPr sz="1050" b="0">
-                <a:solidFill>
-                  <a:srgbClr val="52606D"/>
-                </a:solidFill>
-              </a:defRPr>
-            </a:pPr>
-            <a:r>
-              <a:rPr sz="1050" b="0">
-                <a:solidFill>
-                  <a:srgbClr val="52606D"/>
-                </a:solidFill>
-              </a:rPr>
-              <a:t>现有普通列表证据保持只读；finger-tree 结果必须使用独立的验证与实验版本。</a:t>
+              <a:t>2. 论文只做语义与实验评估，还是还要给出 amortized operation-bound 论证？</a:t>
             </a:r>
           </a:p>
         </p:txBody>
@@ -14818,7 +12339,7 @@
           <p:nvPr/>
         </p:nvPicPr>
         <p:blipFill>
-          <a:blip xmlns:r="http://schemas.openxmlformats.org/officeDocument/2006/relationships" xmlns:a="http://schemas.openxmlformats.org/drawingml/2006/main" r:embed="Ra1ea5027077a401d"/>
+          <a:blip xmlns:r="http://schemas.openxmlformats.org/officeDocument/2006/relationships" xmlns:a="http://schemas.openxmlformats.org/drawingml/2006/main" r:embed="R0767e81d63dc4a72"/>
           <a:stretch xmlns:a="http://schemas.openxmlformats.org/drawingml/2006/main"/>
         </p:blipFill>
         <p:spPr>
@@ -24417,7 +21938,7 @@
       </p:sp>
       <p:cxnSp>
         <p:nvCxnSpPr>
-          <p:cNvPr id="45" name=""/>
+          <p:cNvPr id="68" name=""/>
           <p:cNvCxnSpPr>
             <a:stCxn xmlns:a="http://schemas.openxmlformats.org/drawingml/2006/main" id="17" idx="3"/>
             <a:endCxn xmlns:a="http://schemas.openxmlformats.org/drawingml/2006/main" id="19" idx="1"/>
@@ -24443,7 +21964,7 @@
       </p:cxnSp>
       <p:cxnSp>
         <p:nvCxnSpPr>
-          <p:cNvPr id="46" name=""/>
+          <p:cNvPr id="69" name=""/>
           <p:cNvCxnSpPr>
             <a:stCxn xmlns:a="http://schemas.openxmlformats.org/drawingml/2006/main" id="19" idx="2"/>
             <a:endCxn xmlns:a="http://schemas.openxmlformats.org/drawingml/2006/main" id="7" idx="0"/>
@@ -24472,7 +21993,7 @@
       </p:cxnSp>
       <p:cxnSp>
         <p:nvCxnSpPr>
-          <p:cNvPr id="47" name=""/>
+          <p:cNvPr id="70" name=""/>
           <p:cNvCxnSpPr>
             <a:stCxn xmlns:a="http://schemas.openxmlformats.org/drawingml/2006/main" id="19" idx="2"/>
             <a:endCxn xmlns:a="http://schemas.openxmlformats.org/drawingml/2006/main" id="8" idx="0"/>
@@ -24635,7 +22156,7 @@
                   <a:srgbClr val="102A43"/>
                 </a:solidFill>
               </a:rPr>
-              <a:t>四项工作解决了主要实现缺口</a:t>
+              <a:t>上次汇报后的进展</a:t>
             </a:r>
           </a:p>
         </p:txBody>
@@ -25043,7 +22564,7 @@
                   <a:srgbClr val="243B53"/>
                 </a:solidFill>
               </a:rPr>
-              <a:t>区分有效输入排序、识别问题与理论后端主张</a:t>
+              <a:t>区分有效输入排序、识别问题与理论后端边界</a:t>
             </a:r>
           </a:p>
         </p:txBody>
@@ -25801,7 +23322,7 @@
                   <a:srgbClr val="102A43"/>
                 </a:solidFill>
               </a:rPr>
-              <a:t>成果是稳定的普通列表研究基线，而不是历史上的线性时间后端。</a:t>
+              <a:t>当前成果：可执行的普通列表实现；历史专用后端仍属于未来工作。</a:t>
             </a:r>
           </a:p>
         </p:txBody>
@@ -25942,7 +23463,7 @@
                   <a:srgbClr val="102A43"/>
                 </a:solidFill>
               </a:rPr>
-              <a:t>论文现在将有效输入排序与两个相邻问题分开</a:t>
+              <a:t>当前范围：有效输入排序</a:t>
             </a:r>
           </a:p>
         </p:txBody>
@@ -27306,7 +24827,7 @@
                   <a:srgbClr val="243B53"/>
                 </a:solidFill>
               </a:rPr>
-              <a:t>普通列表后端作为已验证基线</a:t>
+              <a:t>当前实现使用普通列表</a:t>
             </a:r>
           </a:p>
         </p:txBody>
@@ -27362,7 +24883,7 @@
                   <a:srgbClr val="102A43"/>
                 </a:solidFill>
               </a:rPr>
-              <a:t>当前证据仍绑定于普通列表基线；finger-tree 后端正作为独立扩展进行研究。</a:t>
+              <a:t>实验评估普通列表实现；finger-tree 后端仍只是可能的扩展。</a:t>
             </a:r>
           </a:p>
         </p:txBody>
@@ -28916,7 +26437,7 @@
       </p:sp>
       <p:cxnSp>
         <p:nvCxnSpPr>
-          <p:cNvPr id="182" name=""/>
+          <p:cNvPr id="206" name=""/>
           <p:cNvCxnSpPr>
             <a:stCxn xmlns:a="http://schemas.openxmlformats.org/drawingml/2006/main" id="7" idx="2"/>
             <a:endCxn xmlns:a="http://schemas.openxmlformats.org/drawingml/2006/main" id="10" idx="0"/>
@@ -28945,7 +26466,7 @@
       </p:cxnSp>
       <p:cxnSp>
         <p:nvCxnSpPr>
-          <p:cNvPr id="183" name=""/>
+          <p:cNvPr id="207" name=""/>
           <p:cNvCxnSpPr>
             <a:stCxn xmlns:a="http://schemas.openxmlformats.org/drawingml/2006/main" id="7" idx="2"/>
             <a:endCxn xmlns:a="http://schemas.openxmlformats.org/drawingml/2006/main" id="11" idx="0"/>
@@ -29555,7 +27076,7 @@
       </p:sp>
       <p:cxnSp>
         <p:nvCxnSpPr>
-          <p:cNvPr id="194" name=""/>
+          <p:cNvPr id="218" name=""/>
           <p:cNvCxnSpPr>
             <a:stCxn xmlns:a="http://schemas.openxmlformats.org/drawingml/2006/main" id="11" idx="2"/>
             <a:endCxn xmlns:a="http://schemas.openxmlformats.org/drawingml/2006/main" id="22" idx="0"/>
@@ -29806,7 +27327,7 @@
                   <a:srgbClr val="102A43"/>
                 </a:solidFill>
               </a:rPr>
-              <a:t>同一套 Step 1/2/3 控制流支持镜像的 decreasing orientation</a:t>
+              <a:t>Step 1/2/3 控制流与镜像方向</a:t>
             </a:r>
           </a:p>
         </p:txBody>
@@ -30869,7 +28390,7 @@
       </p:sp>
       <p:cxnSp>
         <p:nvCxnSpPr>
-          <p:cNvPr id="238" name=""/>
+          <p:cNvPr id="267" name=""/>
           <p:cNvCxnSpPr>
             <a:stCxn xmlns:a="http://schemas.openxmlformats.org/drawingml/2006/main" id="7" idx="3"/>
             <a:endCxn xmlns:a="http://schemas.openxmlformats.org/drawingml/2006/main" id="10" idx="1"/>
@@ -30895,7 +28416,7 @@
       </p:cxnSp>
       <p:cxnSp>
         <p:nvCxnSpPr>
-          <p:cNvPr id="239" name=""/>
+          <p:cNvPr id="268" name=""/>
           <p:cNvCxnSpPr>
             <a:stCxn xmlns:a="http://schemas.openxmlformats.org/drawingml/2006/main" id="10" idx="3"/>
             <a:endCxn xmlns:a="http://schemas.openxmlformats.org/drawingml/2006/main" id="13" idx="1"/>
@@ -30921,7 +28442,7 @@
       </p:cxnSp>
       <p:cxnSp>
         <p:nvCxnSpPr>
-          <p:cNvPr id="240" name=""/>
+          <p:cNvPr id="269" name=""/>
           <p:cNvCxnSpPr>
             <a:stCxn xmlns:a="http://schemas.openxmlformats.org/drawingml/2006/main" id="13" idx="3"/>
             <a:endCxn xmlns:a="http://schemas.openxmlformats.org/drawingml/2006/main" id="16" idx="1"/>
@@ -30947,7 +28468,7 @@
       </p:cxnSp>
       <p:cxnSp>
         <p:nvCxnSpPr>
-          <p:cNvPr id="241" name=""/>
+          <p:cNvPr id="270" name=""/>
           <p:cNvCxnSpPr>
             <a:stCxn xmlns:a="http://schemas.openxmlformats.org/drawingml/2006/main" id="16" idx="3"/>
             <a:endCxn xmlns:a="http://schemas.openxmlformats.org/drawingml/2006/main" id="19" idx="1"/>
@@ -30973,7 +28494,7 @@
       </p:cxnSp>
       <p:cxnSp>
         <p:nvCxnSpPr>
-          <p:cNvPr id="242" name=""/>
+          <p:cNvPr id="271" name=""/>
           <p:cNvCxnSpPr>
             <a:stCxn xmlns:a="http://schemas.openxmlformats.org/drawingml/2006/main" id="19" idx="2"/>
             <a:endCxn xmlns:a="http://schemas.openxmlformats.org/drawingml/2006/main" id="22" idx="0"/>
@@ -31437,62 +28958,6 @@
                 </a:solidFill>
               </a:rPr>
               <a:t>几何端点与奇数索引 z₁ anchor</a:t>
-            </a:r>
-          </a:p>
-        </p:txBody>
-      </p:sp>
-      <p:sp>
-        <p:nvSpPr>
-          <p:cNvPr id="39" name="">
-            <a:extLst xmlns:a="http://schemas.openxmlformats.org/drawingml/2006/main">
-              <a:ext uri="{FF2B5EF4-FFF2-40B4-BE49-F238E27FC236}">
-                <a16:creationId xmlns:a16="http://schemas.microsoft.com/office/drawing/2014/main" id="{AC214E00-70DE-4F4D-85F4-1C7B7390CE5A}"/>
-              </a:ext>
-            </a:extLst>
-          </p:cNvPr>
-          <p:cNvSpPr>
-            <a:spLocks xmlns:a="http://schemas.openxmlformats.org/drawingml/2006/main" noGrp="1"/>
-          </p:cNvSpPr>
-          <p:nvPr/>
-        </p:nvSpPr>
-        <p:spPr>
-          <a:xfrm xmlns:a="http://schemas.openxmlformats.org/drawingml/2006/main">
-            <a:off x="1485900" y="5772150"/>
-            <a:ext cx="9220200" cy="323850"/>
-          </a:xfrm>
-          <a:prstGeom xmlns:a="http://schemas.openxmlformats.org/drawingml/2006/main" prst="rect">
-            <a:avLst/>
-          </a:prstGeom>
-          <a:noFill xmlns:a="http://schemas.openxmlformats.org/drawingml/2006/main"/>
-          <a:ln xmlns:a="http://schemas.openxmlformats.org/drawingml/2006/main" w="0">
-            <a:noFill/>
-            <a:prstDash val="solid"/>
-          </a:ln>
-        </p:spPr>
-        <p:txBody>
-          <a:bodyPr xmlns:a="http://schemas.openxmlformats.org/drawingml/2006/main" wrap="square" lIns="38100" tIns="19050" rIns="38100" bIns="19050" anchor="ctr">
-            <a:normAutofit fontScale="100000"/>
-          </a:bodyPr>
-          <a:lstStyle xmlns:a="http://schemas.openxmlformats.org/drawingml/2006/main"/>
-          <a:p xmlns:a="http://schemas.openxmlformats.org/drawingml/2006/main">
-            <a:pPr algn="ctr">
-              <a:lnSpc>
-                <a:spcPct val="105000"/>
-              </a:lnSpc>
-              <a:buNone/>
-              <a:defRPr sz="1350" b="1" i="0">
-                <a:solidFill>
-                  <a:srgbClr val="102A43"/>
-                </a:solidFill>
-              </a:defRPr>
-            </a:pPr>
-            <a:r>
-              <a:rPr sz="1350" b="1" i="0">
-                <a:solidFill>
-                  <a:srgbClr val="102A43"/>
-                </a:solidFill>
-              </a:rPr>
-              <a:t>颜色表示重构依据，而不是各算法步骤的归属。</a:t>
             </a:r>
           </a:p>
         </p:txBody>

--- a/presentations/progress_report/Jordan_Sorting_Progress_Report_ZH.pptx
+++ b/presentations/progress_report/Jordan_Sorting_Progress_Report_ZH.pptx
@@ -462,7 +462,7 @@
           <a:lstStyle xmlns:a="http://schemas.openxmlformats.org/drawingml/2006/main"/>
           <a:p xmlns:a="http://schemas.openxmlformats.org/drawingml/2006/main">
             <a:r>
-              <a:t>大家好。这次汇报介绍我的硕士论文进展，主题是 Simplified Jordan Sorting 的可执行重构。上次我主要讨论静态结构，包括 rank interval、upper 和 lower family、family tree，以及 oracle 支持的 reference implementation。此后的核心问题是，论文描述的动态过程能否在普通 Python list 上成为真正可执行、可检查，并能从自身状态恢复输出的实现。今天我会介绍重构中的关键决定、验证方法，以及在明确计时范围下得到的实验结果。</a:t>
+              <a:t>大家好。这次汇报介绍我的硕士论文进展，主题是 Simplified Jordan Sorting 的可执行重构。上次我主要讨论静态结构，包括 rank interval、upper 和 lower family、family tree，以及 oracle 支持的 reference implementation。此后的核心问题是，论文描述的动态过程能否在普通 Python list 上成为真正可执行、可检查，并能从自身状态恢复输出的实现。今天我会介绍重构中的关键决定、验证方法，以及正式实验中在明确计时范围下观察到的运行时间趋势。汇报将重点解释两处需要将论文描述明确为可执行规则的地方。</a:t>
             </a:r>
           </a:p>
           <a:p xmlns:a="http://schemas.openxmlformats.org/drawingml/2006/main">
@@ -557,7 +557,7 @@
           <a:lstStyle xmlns:a="http://schemas.openxmlformats.org/drawingml/2006/main"/>
           <a:p xmlns:a="http://schemas.openxmlformats.org/drawingml/2006/main">
             <a:r>
-              <a:t>正确插入还要求 ownership 一致。每个有限 pair 必须只有一个 parent 和一个 sibling-list owner。拆分前，原 owner 控制 retained 与 acquired 两部分；拆分后，原 owner 保留 retained segment，新 owner 接收 acquired segment。实现可能为两个非空侧都创建新的 sibling list，所以两侧的 list ID 都可能改变。但只有 acquired segment 改变 parent ownership。代码把 split 与 transfer 当作一个 transaction：保存受影响状态，执行更新，检查 split boundary、ownership 与局部后置条件；失败时恢复 registry、ownership link 与 list ID。普通列表使扫描、复制、切片和 ownership rebinding 都成为明确成本。这些检查保护正确性，但不提供历史线性时间分析所需的更新界。</a:t>
+              <a:t>正确插入还要求 ownership 一致。每个有限 pair 必须只有一个 parent 和一个 sibling-list owner。拆分前，原 owner 控制 retained 与 acquired 两部分；拆分后，原 owner 保留 retained segment，新 owner 接收 acquired segment。实现可能为两个非空侧都创建新的 sibling list，所以两侧的 list ID 都可能改变。但只有 acquired segment 改变 parent ownership。代码把 split 与 transfer 当作一个 transaction：保存受影响状态，执行更新，检查 split boundary、ownership 与局部后置条件；失败时恢复 registry、ownership link 与 list ID。维护状态还包括已处理前缀的排序结果，以及 upper 和 lower 两类 pair family。普通列表使扫描、复制、切片和 ownership rebinding 都成为明确成本。这些检查保护正确性，但不提供历史线性时间分析所需的更新界。</a:t>
             </a:r>
           </a:p>
           <a:p xmlns:a="http://schemas.openxmlformats.org/drawingml/2006/main">
@@ -652,7 +652,7 @@
           <a:lstStyle xmlns:a="http://schemas.openxmlformats.org/drawingml/2006/main"/>
           <a:p xmlns:a="http://schemas.openxmlformats.org/drawingml/2006/main">
             <a:r>
-              <a:t>实现层面使用四类主要检查。Focused regression case 覆盖已知边界；有界穷举验证覆盖 n 不超过 8 的 2,074 个 oracle-valid permutation；checked-state audit 检查 parent、ownership、sibling list 与恢复输出；确定性重放再次运行同一 core 并比较状态。重放检查一致性，不是第二套独立算法。另有一条实验验证路径确认保存结果与固定实验设置及重算汇总一致，详细合同放在 Backup C。这里的重点仍是算法状态。这些检查支持已评估用例，但不是对所有 Jordan sequence 的数学证明。</a:t>
+              <a:t>实现层面使用四类主要检查。Focused regression case 覆盖已知边界；有界穷举验证覆盖 n 不超过 8 的全部 2,074 个 oracle-valid permutation；checked-state audit 检查 parent、ownership、sibling list 与恢复输出；确定性重放再次运行同一 core 并比较状态。重放检查一致性，不是第二套独立算法。另有一条实验验证路径确认保存结果与固定实验设置及重算汇总一致，详细合同放在 Backup C。这里的重点仍是算法状态。这些检查支持已评估用例，但不是对所有 Jordan sequence 的数学证明。</a:t>
             </a:r>
           </a:p>
           <a:p xmlns:a="http://schemas.openxmlformats.org/drawingml/2006/main">
@@ -752,7 +752,7 @@
           <a:lstStyle xmlns:a="http://schemas.openxmlformats.org/drawingml/2006/main"/>
           <a:p xmlns:a="http://schemas.openxmlformats.org/drawingml/2006/main">
             <a:r>
-              <a:t>正式实验覆盖 5 个规模，每个规模 12 个 exact case，并比较 3 个算法。每个 case-algorithm cell 先做 5 次 warm-up，再做 20 次 measured call，因此得到 3,600 条记录。这 20 次是同一个 exact case 的重复调用，不是 20 个独立输入；每次调用会获得包含相同值的 fresh list。调度会轮转算法位置。对 paper algorithm，oracle certification 与 checked-state audit 在计时前完成，minimal paper call 位于计时内，其中包括从维护顺序恢复输出。返回值比较发生在计时后。Python 与 reference 的计时范围也各自不同，因此 paper/reference 只能作为 pipeline-scope 比值，不能解释为同口径端到端加速。</a:t>
+              <a:t>正式实验覆盖 5 个规模，每个规模 12 个 exact case，并比较 3 个算法。每个 case-algorithm cell 先做 5 次 warm-up，再做 20 次 measured call，因此得到 3,600 条记录。这 20 次是同一个 exact case 的重复调用，不是 20 个独立输入；每次调用会获得包含相同值的 fresh list。调度会轮转算法位置，避免某个算法总是先运行。对 paper algorithm，oracle certification 与 checked-state audit 在计时前完成，minimal paper call 位于计时内，其中包括从维护顺序恢复输出。返回值比较发生在计时后。Python 计时覆盖排序调用，reference 计时覆盖完整的 oracle-backed reference pipeline。Paper 与 reference 的计时范围不同，因此 paper/reference 比值不能解释为端到端加速。</a:t>
             </a:r>
           </a:p>
           <a:p xmlns:a="http://schemas.openxmlformats.org/drawingml/2006/main">
@@ -852,7 +852,7 @@
           <a:lstStyle xmlns:a="http://schemas.openxmlformats.org/drawingml/2006/main"/>
           <a:p xmlns:a="http://schemas.openxmlformats.org/drawingml/2006/main">
             <a:r>
-              <a:t>全部 60 个评估用例都通过认证与 case-level checked-state audit。每次 measured call 都返回 expected output，正式运行没有记录正确性错误。实验是每个 exact case 做一次 audit；3,600 条 timing row 携带对应的 case-level audit 结果，并不表示执行了 3,600 次独立 audit。这些结果只支持本次测试的有效用例，不评估任意输入 recognition，也不是对全部 Jordan sequence 的证明。</a:t>
+              <a:t>全部 60 个评估用例均通过认证，并且每个用例各通过一次 case-level checked-state audit。每次 measured call 都返回 expected output，正式运行没有记录正确性错误。实验是每个 exact case 做一次 audit；3,600 条 timing row 携带对应的 case-level audit 结果，并不表示执行了 3,600 次独立 audit。这些结果只支持本次测试的有效用例，不评估任意输入 recognition，也不是对全部 Jordan sequence 的证明。</a:t>
             </a:r>
           </a:p>
           <a:p xmlns:a="http://schemas.openxmlformats.org/drawingml/2006/main">
@@ -952,7 +952,7 @@
           <a:lstStyle xmlns:a="http://schemas.openxmlformats.org/drawingml/2006/main"/>
           <a:p xmlns:a="http://schemas.openxmlformats.org/drawingml/2006/main">
             <a:r>
-              <a:t>主要运行时间模式是 paper/reference 比值随五个测试规模下降。比值先在每个 exact case 内计算，再让每个 case 在规模中位数中具有相同权重。它从 n 等于 32 时的 3.226，降到 64 时的 2.202、128 时的 1.351，并在 256 时低于 1，达到 0.851；在 512 时为 0.567。观测到的 crossover 位于 128 和 256 之间。Pilot 也呈现相同下降方向，但两次运行的绝对时间不会合并。由于 paper 与 reference 的计时范围不同，这个趋势不是一般性能加速，也不能用五个规模推断渐近行为。</a:t>
+              <a:t>主要运行时间模式是 paper/reference 比值随五个测试规模下降。比值先在每个 exact case 内计算，再让每个 case 在规模中位数中具有相同权重。它从 n 等于 32 时的 3.226，降到 64 时的 2.202、128 时的 1.351，并在 256 时低于 1，达到 0.851；在 512 时为 0.567。在 n = 128 时，比值大于 1；在 n = 256 时，比值小于 1。在上述计时范围下，两个较大规模中记录的 paper 调用时间均小于 reference pipeline 调用时间。由于两者计时范围不同，这一趋势不能证明一般性的加速，五个测试规模也不能确定渐近行为。备用 A 中的 Python sort 在每个测试规模上都有最低的调用时间中位数。</a:t>
             </a:r>
           </a:p>
           <a:p xmlns:a="http://schemas.openxmlformats.org/drawingml/2006/main">
@@ -1047,7 +1047,7 @@
           <a:lstStyle xmlns:a="http://schemas.openxmlformats.org/drawingml/2006/main"/>
           <a:p xmlns:a="http://schemas.openxmlformats.org/drawingml/2006/main">
             <a:r>
-              <a:t>当前证据支持两类主要结论：普通列表重构可以执行，并从自身维护状态恢复输出；在测试的有效用例和固定计时范围下，记录到了正确输出与明确的运行时间趋势。主要限制也同样明确：普通 Python list 不构成线性时间实现，五个规模不能确定渐近复杂度。此外，本实验没有评估 recognition，paper 与 reference 也采用不同计时范围。因此这些数值只是固定条件下的运行时间观测。</a:t>
+              <a:t>当前证据支持两类主要结论：普通列表重构可以执行，并从自身维护状态恢复输出；在测试的有效用例和固定计时范围下，记录到了正确输出与明确的运行时间趋势。主要限制也同样明确：普通 Python list 不构成线性时间实现，五个规模不能确定渐近复杂度。此外，本实验没有评估 recognition，paper 与 reference 也采用不同计时范围。因此这些数值只是当前实现和实验条件下的运行时间观测，不能作为一般性的算法复杂度界。</a:t>
             </a:r>
           </a:p>
           <a:p xmlns:a="http://schemas.openxmlformats.org/drawingml/2006/main">
@@ -1142,7 +1142,7 @@
           <a:lstStyle xmlns:a="http://schemas.openxmlformats.org/drawingml/2006/main"/>
           <a:p xmlns:a="http://schemas.openxmlformats.org/drawingml/2006/main">
             <a:r>
-              <a:t>一个可能的下一步是在保持 Step 1、Step 2 和 Step 3 语义不变的前提下研究 finger-tree 后端。普通列表实现提供了经过测试的参照点，详细的接口与 ownership-transfer 难点放在 Backup E。我希望向导师确认两个问题：第一，应专门实现历史 heterogeneous finger tree，还是实现支持所需列表操作的等价后端？第二，论文只做语义等价和实验比较是否足够，还是还应给出 amortized operation-bound 论证？这个选择决定扩展主要是实验性工作，还是还需要证明层面的内容。</a:t>
+              <a:t>一个可能的下一步是在保持 Step 1、Step 2 和 Step 3 语义不变的前提下研究 finger-tree 后端。普通列表实现提供了经过测试的参照点，详细的接口与 ownership-transfer 难点放在 Backup E。我希望向导师确认两个问题：第一，应专门实现历史 heterogeneous finger tree，还是实现支持所需列表操作的等价后端？第二，一个经过测试、语义等价的原型是否足够，还是还应证明所需的摊还操作界（amortized operation bounds）？这个选择决定扩展主要是实验性工作，还是还需要证明层面的内容。</a:t>
             </a:r>
           </a:p>
           <a:p xmlns:a="http://schemas.openxmlformats.org/drawingml/2006/main">
@@ -1527,7 +1527,7 @@
           <a:lstStyle xmlns:a="http://schemas.openxmlformats.org/drawingml/2006/main"/>
           <a:p xmlns:a="http://schemas.openxmlformats.org/drawingml/2006/main">
             <a:r>
-              <a:t>上一次实现已经把静态结构说明得比较清楚。它用 rank interval 表示输入，区分 upper 和 lower pair family，重构 laminar family tree，并计算结构指标。Oracle 用来确认输入和提供 reference output。但它还没有执行动态 Jordan-sorting procedure：没有持续维护 processed prefix，没有完成 sibling-list 的 split 和 ownership transfer，也没有从算法自己的状态恢复最终输出。因此，主要缺口是把结构描述转化为安全而明确的动态更新。</a:t>
+              <a:t>上一次实现已经把静态结构说明得比较清楚。它用 rank interval 表示输入，区分 upper 和 lower pair family，重构 laminar family tree，并计算结构指标。Oracle 用来确认输入和提供 reference output。但它还没有执行动态 Jordan-sorting procedure：没有持续维护 processed prefix，没有完成 sibling-list 的 split 和 ownership transfer，也没有从算法自己的状态恢复最终输出。这些操作中任何一次更新出错，都可能同时破坏 partial order 和 family structure。因此，主要缺口是把结构描述转化为安全而明确的动态更新。</a:t>
             </a:r>
           </a:p>
           <a:p xmlns:a="http://schemas.openxmlformats.org/drawingml/2006/main">
@@ -1627,7 +1627,7 @@
           <a:lstStyle xmlns:a="http://schemas.openxmlformats.org/drawingml/2006/main"/>
           <a:p xmlns:a="http://schemas.openxmlformats.org/drawingml/2006/main">
             <a:r>
-              <a:t>这张表汇总镜像后的局部选择。Step 1 始终计算 predecessor-side boundary A_i，Step 2 始终计算 successor-side boundary B_i。镜像发生在 Step 3 如何使用这些 boundary，以及 split side、extreme child 与几何端点的选择上。</a:t>
+              <a:t>这张表汇总镜像后的局部选择。Step 1 始终计算 predecessor-side boundary A_i，Step 2 始终计算 successor-side boundary B_i。镜像发生在 Step 3 如何使用这些 boundary。在 increasing iteration 中，获得左侧拆分片段，并使用最右 child 与右侧几何端点；decreasing iteration 则镜像为右侧拆分片段、最左 child 与左侧几何端点。</a:t>
             </a:r>
           </a:p>
           <a:p xmlns:a="http://schemas.openxmlformats.org/drawingml/2006/main">
@@ -1722,7 +1722,7 @@
           <a:lstStyle xmlns:a="http://schemas.openxmlformats.org/drawingml/2006/main"/>
           <a:p xmlns:a="http://schemas.openxmlformats.org/drawingml/2006/main">
             <a:r>
-              <a:t>拟议结构把 Step 1、Step 2 和 Step 3 放在一个小型 sibling-list 接口之上。普通列表后端保留为当前参照，finger-tree 后端实现相同语义操作。具体目标是历史 heterogeneous finger tree，还是具有等价操作界的后端，仍需与导师确认。主要风险是，高效 tree split 本身不够；若 ownership transfer 仍逐项扫描并重新绑定，就无法得到历史分析所需的操作界。第一步应先保证语义等价与 differential correctness，任何复杂度主张都需要独立的证明论证。</a:t>
+              <a:t>拟议结构把 Step 1、Step 2 和 Step 3 放在一个小型 sibling-list 接口之上。普通列表后端仍是当前已验证的基线。拟议的 finger-tree 后端将独立实现相同的语义操作：创建 singleton list、在左或右边界插入、按新点值拆分、访问 first/last child，以及保持 ownership 和 stable handle。具体目标是历史 heterogeneous finger tree，还是具有等价操作界的后端，仍需与导师确认。主要风险是，高效 tree split 本身不够；若 ownership transfer 仍扫描 acquired segment 并逐项重新绑定，后端就可能无法满足历史分析所需的操作界。第一步应先保证语义等价与 differential correctness，任何复杂度主张都需要独立的证明论证。</a:t>
             </a:r>
           </a:p>
           <a:p xmlns:a="http://schemas.openxmlformats.org/drawingml/2006/main">
@@ -1822,7 +1822,7 @@
           <a:lstStyle xmlns:a="http://schemas.openxmlformats.org/drawingml/2006/main"/>
           <a:p xmlns:a="http://schemas.openxmlformats.org/drawingml/2006/main">
             <a:r>
-              <a:t>上次汇报之后，我集中完成了四项工作。第一，缩小范围，把有效输入排序、recognition 和理论后端主张分开。第二，实现 Step 1、Step 2 和 Step 3 的控制流。第三，加入 ownership 不变量、事务式更新、重放和有界验证。第四，在实现和验证边界稳定后，执行固定协议的正式实验。这些工作相互依赖，尤其是输出来源与状态检查明确之后，实验才有解释意义。当前成果是可执行的普通列表实现，历史论文中的专用后端仍属于未来工作。</a:t>
+              <a:t>上次汇报之后，我集中完成了四项工作。第一，缩小范围，聚焦外部 oracle 已认证的有效输入排序。第二，实现 Step 1、Step 2 和 Step 3 的控制流。第三，加入 ownership 不变量、事务式更新、重放和有界验证。第四，在实现和验证边界稳定后，执行固定协议的正式实验。当前成果是可执行的普通列表实现，历史线性时间分析所使用的专用后端仍属于未来工作。</a:t>
             </a:r>
           </a:p>
           <a:p xmlns:a="http://schemas.openxmlformats.org/drawingml/2006/main">
@@ -2102,7 +2102,7 @@
           <a:lstStyle xmlns:a="http://schemas.openxmlformats.org/drawingml/2006/main"/>
           <a:p xmlns:a="http://schemas.openxmlformats.org/drawingml/2006/main">
             <a:r>
-              <a:t>Oracle、reference pipeline 和 paper core 的角色必须明确区分。Paper call 之前，oracle 只确认有效输入条件；调用之后，runner 才用 oracle 的排序结果作正确性比较。Reference pipeline 则有意消费完整 oracle result，包括 sorted output。Paper core 只接收原始 sequence 和已经成立的有效输入前提。它执行 Step 1、2、3，维护 partial order 与 sibling-list 状态，并从这些状态恢复输出。图中的虚线比较框位于 core 外部。两条路径面对同一个 expected answer，但输出来源不同。Oracle 排序结果不会进入 paper core，也不会决定它的返回值。</a:t>
+              <a:t>Oracle、reference pipeline 和 paper core 的角色必须明确区分。Paper call 之前，oracle 只确认有效输入条件；调用之后，runner 才用 oracle 的排序结果作正确性比较。Reference pipeline 则有意消费完整 oracle result，包括 sorted output。Paper core 只接收原始 sequence 和已经成立的有效输入前提。它执行 Step 1、2、3，维护 partial order 与 sibling-list 状态，并从这些状态恢复输出。图中的虚线比较框位于 core 外部。两条路径面对同一个 expected answer，但输出来源不同。这样就能在不把答案作为输入的情况下检查 paper core。Oracle 排序结果不会进入 paper core，也不会决定它的返回值。</a:t>
             </a:r>
           </a:p>
           <a:p xmlns:a="http://schemas.openxmlformats.org/drawingml/2006/main">
@@ -2202,7 +2202,7 @@
           <a:lstStyle xmlns:a="http://schemas.openxmlformats.org/drawingml/2006/main"/>
           <a:p xmlns:a="http://schemas.openxmlformats.org/drawingml/2006/main">
             <a:r>
-              <a:t>可执行重构采用统一的控制流。先排序 z1、z2、z3并初始化 partial order 与首批 upper、lower pair；随后每个新点都依次经过 Step 1、Step 2 和 Step 3。Step 1 计算 predecessor-side boundary A_i，Step 2 计算 successor-side boundary B_i。Step 3(a) 插入新 pair，Step 3(b) 在需要时拆分 sibling list 并转移 ownership，Step 3(c) 把新点插入维护的顺序。Increasing 与 decreasing 方向共享这些阶段，真正镜像的是 Step 3 对两个 boundary 的使用。1990 年论文直接描述 increasing case，decreasing case由对称性重构。几何端点和奇数索引 z1 输出锚点则是为了得到无歧义执行行为而明确补充的局部规则。</a:t>
+              <a:t>可执行重构采用统一的控制流。先排序 z1、z2、z3，并初始化 partial order 与首批 upper、lower pair；随后每个新点都依次经过 Step 1、Step 2 和 Step 3。Step 1 计算 predecessor-side boundary A_i，Step 2 计算 successor-side boundary B_i。Step 3(a) 插入新 pair，Step 3(b) 在需要时拆分 sibling list 并转移 ownership，Step 3(c) 把新点插入维护的顺序。Increasing 与 decreasing 方向共享这些阶段，局部角色则互为镜像。在 increasing iteration 中，Step 3(a) 使用 A_i，Step 3(b) 使用 B_i；decreasing iteration 交换这两个边界的用途。1990 年论文直接描述 increasing case，decreasing case 由对称性重构。几何端点和奇数索引 z1 输出锚点则是为了得到无歧义执行行为而明确补充的局部规则。</a:t>
             </a:r>
           </a:p>
           <a:p xmlns:a="http://schemas.openxmlformats.org/drawingml/2006/main">
@@ -2297,7 +2297,7 @@
           <a:lstStyle xmlns:a="http://schemas.openxmlformats.org/drawingml/2006/main"/>
           <a:p xmlns:a="http://schemas.openxmlformats.org/drawingml/2006/main">
             <a:r>
-              <a:t>第一个关键问题是 Step 3(c) 应使用哪个端点。考虑有效前缀 3、2、1、4。Acquired pair P2 按 curve order 存为 3、2。如果机械地取第二个存储元素 2 作为锚点，插入 4 后得到 1、2、4、3，在 axis order 上是错误的。原因是 curve order 和 axis order 描述不同关系。Pair 的存储顺序来自曲线遍历，但 Step 3(c) 需要 x 轴上的几何极值。在这里正确端点是 3，把 4 插在 3 后得到 1、2、3、4。于是可执行规则选择几何极值，而不是固定选择第二个存储元素。Increasing 使用右端几何极值，decreasing 使用左端几何极值。我把它称为可执行化澄清，而不是直接归为 1990 年论文的原文规则。</a:t>
+              <a:t>第一个关键问题是 Step 3(c) 应使用哪个端点。考虑有效前缀 3、2、1、4。Acquired pair P2 按 curve order 存为 3、2。如果机械地取第二个存储元素 2 作为锚点，插入 4 后得到 1、2、4、3，在 axis order 上是错误的。原因是 curve order 和 axis order 描述不同关系。Pair 的存储顺序来自曲线遍历，但 Step 3(c) 需要 x 轴上的几何极值。在这里正确端点是 3，把 4 插在 3 后得到 1、2、3、4。这是表示方式的问题，并不只是这四个数字的特例：pair 的存储顺序沿曲线排列，所以第二个元素未必位于当前 axis order 所需的一侧。于是可执行规则选择几何极值，而不是固定选择第二个存储元素。Increasing 使用右端几何极值，decreasing 使用左端几何极值。我把它称为可执行化澄清，因为 1990 年论文没有以这种形式明确给出规则。缺少这一澄清时，有效输入的例子也会失败。</a:t>
             </a:r>
           </a:p>
           <a:p xmlns:a="http://schemas.openxmlformats.org/drawingml/2006/main">
@@ -2387,7 +2387,7 @@
           <a:lstStyle xmlns:a="http://schemas.openxmlformats.org/drawingml/2006/main"/>
           <a:p xmlns:a="http://schemas.openxmlformats.org/drawingml/2006/main">
             <a:r>
-              <a:t>第二个问题是奇数索引的 z1 特例。例子中的有效前缀为 1、2、3、4、6、7、0。当前是 decreasing iteration，普通几何锚点为 z2，也就是值 2。若直接把 0 插到 z2 前，会得到 1、0、2、3、4、6、7，z1 仍在新点错误的一侧。因为 0 小于 z1，且 z1 小于原锚点，所以输出锚点必须从 z2 改为 z1。这样插入后得到正确顺序 0、1、2、3、4、6、7。这个修正只影响输出插入，不替代 predecessor 或 successor boundary 的计算。二者分别决定 family update 的 pair 与 partial order 更新的点，代码也将它们分开记录。</a:t>
+              <a:t>第二个问题是奇数索引的 z1 特例。例子中的有效前缀为 1、2、3、4、6、7、0。当前是 decreasing iteration，普通几何锚点为 z2，也就是值 2。若直接把 0 插到 z2 前，会得到 1、0、2、3、4、6、7，z1 仍在新点错误的一侧。因为 0 小于 z1，且 z1 小于原锚点，所以输出锚点必须从 z2 改为 z1。这样插入后得到正确顺序 0、1、2、3、4、6、7。这个修正只影响输出插入，不替代 predecessor 或 successor boundary 的计算。二者分别决定 family update 的 pair 与 partial order 更新的点，代码也将它们分开记录，便于检查诊断 trace。</a:t>
             </a:r>
           </a:p>
           <a:p xmlns:a="http://schemas.openxmlformats.org/drawingml/2006/main">
@@ -3588,7 +3588,7 @@
                   <a:srgbClr val="D9EAF2"/>
                 </a:solidFill>
               </a:rPr>
-              <a:t>实现、验证与正式实验证据</a:t>
+              <a:t>实现进展、验证与初步实验结果</a:t>
             </a:r>
           </a:p>
         </p:txBody>
@@ -12010,7 +12010,7 @@
                   <a:srgbClr val="FFFFFF"/>
                 </a:solidFill>
               </a:rPr>
-              <a:t>2. 论文只做语义与实验评估，还是还要给出 amortized operation-bound 论证？</a:t>
+              <a:t>2. 经过测试且语义等价的原型是否足够，还是还需证明所需的摊还操作界？</a:t>
             </a:r>
           </a:p>
         </p:txBody>

--- a/presentations/progress_report/Jordan_Sorting_Progress_Report_ZH.pptx
+++ b/presentations/progress_report/Jordan_Sorting_Progress_Report_ZH.pptx
@@ -462,7 +462,7 @@
           <a:lstStyle xmlns:a="http://schemas.openxmlformats.org/drawingml/2006/main"/>
           <a:p xmlns:a="http://schemas.openxmlformats.org/drawingml/2006/main">
             <a:r>
-              <a:t>大家好。这次汇报介绍我的硕士论文进展，主题是 Simplified Jordan Sorting 的可执行重构。上次我主要讨论静态结构，包括 rank interval、upper 和 lower family、family tree，以及 oracle 支持的 reference implementation。此后的核心问题是，论文描述的动态过程能否在普通 Python list 上成为真正可执行、可检查，并能从自身状态恢复输出的实现。今天我会介绍重构中的关键决定、验证方法，以及正式实验中在明确计时范围下观察到的运行时间趋势。汇报将重点解释两处需要将论文描述明确为可执行规则的地方。</a:t>
+              <a:t>大家好。这次汇报介绍我的硕士论文进展，主题是使用普通 Python list 对 Simplified Jordan Sorting 进行可执行重构。上次汇报聚焦静态结构，包括 rank interval、upper 和 lower pair family、family tree，以及 oracle 支持的 reference。核心问题是，论文中的动态过程能否维护自身状态，并从中恢复输出。我将重点解释两处重构决定，再介绍验证检查和正式实验的运行时间结果。</a:t>
             </a:r>
           </a:p>
           <a:p xmlns:a="http://schemas.openxmlformats.org/drawingml/2006/main">
@@ -557,7 +557,7 @@
           <a:lstStyle xmlns:a="http://schemas.openxmlformats.org/drawingml/2006/main"/>
           <a:p xmlns:a="http://schemas.openxmlformats.org/drawingml/2006/main">
             <a:r>
-              <a:t>正确插入还要求 ownership 一致。每个有限 pair 必须只有一个 parent 和一个 sibling-list owner。拆分前，原 owner 控制 retained 与 acquired 两部分；拆分后，原 owner 保留 retained segment，新 owner 接收 acquired segment。实现可能为两个非空侧都创建新的 sibling list，所以两侧的 list ID 都可能改变。但只有 acquired segment 改变 parent ownership。代码把 split 与 transfer 当作一个 transaction：保存受影响状态，执行更新，检查 split boundary、ownership 与局部后置条件；失败时恢复 registry、ownership link 与 list ID。维护状态还包括已处理前缀的排序结果，以及 upper 和 lower 两类 pair family。普通列表使扫描、复制、切片和 ownership rebinding 都成为明确成本。这些检查保护正确性，但不提供历史线性时间分析所需的更新界。</a:t>
+              <a:t>每个有限 pair 只有一个 parent 和一个 sibling-list owner。拆分前，原 owner 控制 retained 和 acquired 两部分。拆分后，原 owner 保留 retained segment，新 owner 接收 acquired segment。两个非空侧都可能得到新 list，但只有 acquired segment 改变 parent。Split 和 transfer 构成一个 transaction：保存受影响状态，执行更新，再检查 split boundary、ownership 和局部后置条件。若检查失败，rollback 恢复 registry、ownership link 和 list ID。维护状态还包括已处理前缀的排序结果，以及两类 pair family。普通列表会产生扫描、复制、切片和 ownership rebinding 成本。这些正确性检查不能建立历史线性时间分析所需的更新界。</a:t>
             </a:r>
           </a:p>
           <a:p xmlns:a="http://schemas.openxmlformats.org/drawingml/2006/main">
@@ -652,7 +652,7 @@
           <a:lstStyle xmlns:a="http://schemas.openxmlformats.org/drawingml/2006/main"/>
           <a:p xmlns:a="http://schemas.openxmlformats.org/drawingml/2006/main">
             <a:r>
-              <a:t>实现层面使用四类主要检查。Focused regression case 覆盖已知边界；有界穷举验证覆盖 n 不超过 8 的全部 2,074 个 oracle-valid permutation；checked-state audit 检查 parent、ownership、sibling list 与恢复输出；确定性重放再次运行同一 core 并比较状态。重放检查一致性，不是第二套独立算法。另有一条实验验证路径确认保存结果与固定实验设置及重算汇总一致，详细合同放在 Backup C。这里的重点仍是算法状态。这些检查支持已评估用例，但不是对所有 Jordan sequence 的数学证明。</a:t>
+              <a:t>Focused regression case 覆盖已知边界条件。有界穷举验证覆盖 n 不超过 8 的全部 2,074 个 oracle-valid permutation。Checked-state audit 检查 parent link、ownership、sibling list 与恢复输出。确定性重放比较同一 core 多次运行后的状态，并不是第二套独立实现。重放检查的是同一过程是否得到一致状态。另有实验检查，将保存的输出与固定设置及重算汇总比较，详情见 Backup C。这些有限证据支持已评估用例，但不是对所有 Jordan sequence 的数学证明。</a:t>
             </a:r>
           </a:p>
           <a:p xmlns:a="http://schemas.openxmlformats.org/drawingml/2006/main">
@@ -752,7 +752,7 @@
           <a:lstStyle xmlns:a="http://schemas.openxmlformats.org/drawingml/2006/main"/>
           <a:p xmlns:a="http://schemas.openxmlformats.org/drawingml/2006/main">
             <a:r>
-              <a:t>正式实验覆盖 5 个规模，每个规模 12 个 exact case，并比较 3 个算法。每个 case-algorithm cell 先做 5 次 warm-up，再做 20 次 measured call，因此得到 3,600 条记录。这 20 次是同一个 exact case 的重复调用，不是 20 个独立输入；每次调用会获得包含相同值的 fresh list。调度会轮转算法位置，避免某个算法总是先运行。对 paper algorithm，oracle certification 与 checked-state audit 在计时前完成，minimal paper call 位于计时内，其中包括从维护顺序恢复输出。返回值比较发生在计时后。Python 计时覆盖排序调用，reference 计时覆盖完整的 oracle-backed reference pipeline。Paper 与 reference 的计时范围不同，因此 paper/reference 比值不能解释为端到端加速。</a:t>
+              <a:t>实验使用 5 个规模，每个规模 12 个 exact case，并比较 3 个算法。每个 case-algorithm cell 包含 5 次 warm-up 和 20 次 measured call，共得到 3,600 条测量记录。这 20 次调用重复同一个 exact case，并非 20 个独立输入。每次调用获得包含相同值的 fresh list。算法位置轮转，避免某个算法总是先运行。Paper 的认证与 checked-state audit 在计时前完成。Paper 计时包含 minimal core call，以及从维护顺序恢复输出。输出比较发生在计时后。Python 计时覆盖排序调用；reference 计时覆盖完整的 oracle-backed pipeline。这是三种不同的计时范围。</a:t>
             </a:r>
           </a:p>
           <a:p xmlns:a="http://schemas.openxmlformats.org/drawingml/2006/main">
@@ -852,7 +852,7 @@
           <a:lstStyle xmlns:a="http://schemas.openxmlformats.org/drawingml/2006/main"/>
           <a:p xmlns:a="http://schemas.openxmlformats.org/drawingml/2006/main">
             <a:r>
-              <a:t>全部 60 个评估用例均通过认证，并且每个用例各通过一次 case-level checked-state audit。每次 measured call 都返回 expected output，正式运行没有记录正确性错误。实验是每个 exact case 做一次 audit；3,600 条 timing row 携带对应的 case-level audit 结果，并不表示执行了 3,600 次独立 audit。这些结果只支持本次测试的有效用例，不评估任意输入 recognition，也不是对全部 Jordan sequence 的证明。</a:t>
+              <a:t>全部 60 个 case 均通过认证，并各通过一次 checked-state audit。每次 measured call 都返回 expected output，没有记录正确性错误。3,600 条测量记录携带各自的 case-level audit 结果，不代表进行了 3,600 次独立 audit。这些结果仅覆盖本次测试的有效用例。</a:t>
             </a:r>
           </a:p>
           <a:p xmlns:a="http://schemas.openxmlformats.org/drawingml/2006/main">
@@ -952,7 +952,7 @@
           <a:lstStyle xmlns:a="http://schemas.openxmlformats.org/drawingml/2006/main"/>
           <a:p xmlns:a="http://schemas.openxmlformats.org/drawingml/2006/main">
             <a:r>
-              <a:t>主要运行时间模式是 paper/reference 比值随五个测试规模下降。比值先在每个 exact case 内计算，再让每个 case 在规模中位数中具有相同权重。它从 n 等于 32 时的 3.226，降到 64 时的 2.202、128 时的 1.351，并在 256 时低于 1，达到 0.851；在 512 时为 0.567。在 n = 128 时，比值大于 1；在 n = 256 时，比值小于 1。在上述计时范围下，两个较大规模中记录的 paper 调用时间均小于 reference pipeline 调用时间。由于两者计时范围不同，这一趋势不能证明一般性的加速，五个测试规模也不能确定渐近行为。备用 A 中的 Python sort 在每个测试规模上都有最低的调用时间中位数。</a:t>
+              <a:t>我先计算每个 exact case 的 paper/reference 比值，再按规模取中位数，每个 case 权重相同。比值在 n 为 32 时是 3.226，64 时是 2.202，128 时是 1.351，256 时是 0.851，512 时是 0.567。因此，128 时比值大于 1，256 时小于 1。在这些计时范围下，两个较大规模的 paper 调用耗时更少。由于计时范围不同，这不能证明端到端加速。Python sort 在每个测试规模上都有最低的调用时间中位数，见 Backup A。</a:t>
             </a:r>
           </a:p>
           <a:p xmlns:a="http://schemas.openxmlformats.org/drawingml/2006/main">
@@ -1047,7 +1047,7 @@
           <a:lstStyle xmlns:a="http://schemas.openxmlformats.org/drawingml/2006/main"/>
           <a:p xmlns:a="http://schemas.openxmlformats.org/drawingml/2006/main">
             <a:r>
-              <a:t>当前证据支持两类主要结论：普通列表重构可以执行，并从自身维护状态恢复输出；在测试的有效用例和固定计时范围下，记录到了正确输出与明确的运行时间趋势。主要限制也同样明确：普通 Python list 不构成线性时间实现，五个规模不能确定渐近复杂度。此外，本实验没有评估 recognition，paper 与 reference 也采用不同计时范围。因此这些数值只是当前实现和实验条件下的运行时间观测，不能作为一般性的算法复杂度界。</a:t>
+              <a:t>当前证据支持一个从维护状态恢复输出的可执行普通列表重构，并在已评估用例上得到正确结果。运行时间趋势描述的是当前实现及其计时范围。普通列表不构成线性时间实现，五个测试规模也不能确定渐近复杂度。本实验没有评估 recognition。</a:t>
             </a:r>
           </a:p>
           <a:p xmlns:a="http://schemas.openxmlformats.org/drawingml/2006/main">
@@ -1142,7 +1142,7 @@
           <a:lstStyle xmlns:a="http://schemas.openxmlformats.org/drawingml/2006/main"/>
           <a:p xmlns:a="http://schemas.openxmlformats.org/drawingml/2006/main">
             <a:r>
-              <a:t>一个可能的下一步是在保持 Step 1、Step 2 和 Step 3 语义不变的前提下研究 finger-tree 后端。普通列表实现提供了经过测试的参照点，详细的接口与 ownership-transfer 难点放在 Backup E。我希望向导师确认两个问题：第一，应专门实现历史 heterogeneous finger tree，还是实现支持所需列表操作的等价后端？第二，一个经过测试、语义等价的原型是否足够，还是还应证明所需的摊还操作界（amortized operation bounds）？这个选择决定扩展主要是实验性工作，还是还需要证明层面的内容。</a:t>
+              <a:t>Finger-tree 后端是可能的未来扩展，不属于当前实验证据。它将保持相同的 Step 1、Step 2 和 Step 3 行为。普通列表实现为检查新后端的行为提供了经过测试的参照点。Backup E 说明接口及 ownership-transfer 难点。我希望向导师确认两个问题：应实现历史 heterogeneous finger tree，还是支持所需列表操作的等价后端？一个经过测试、语义等价的原型是否足够，还是还应证明所需的摊还操作界？</a:t>
             </a:r>
           </a:p>
           <a:p xmlns:a="http://schemas.openxmlformats.org/drawingml/2006/main">
@@ -1527,7 +1527,7 @@
           <a:lstStyle xmlns:a="http://schemas.openxmlformats.org/drawingml/2006/main"/>
           <a:p xmlns:a="http://schemas.openxmlformats.org/drawingml/2006/main">
             <a:r>
-              <a:t>上一次实现已经把静态结构说明得比较清楚。它用 rank interval 表示输入，区分 upper 和 lower pair family，重构 laminar family tree，并计算结构指标。Oracle 用来确认输入和提供 reference output。但它还没有执行动态 Jordan-sorting procedure：没有持续维护 processed prefix，没有完成 sibling-list 的 split 和 ownership transfer，也没有从算法自己的状态恢复最终输出。这些操作中任何一次更新出错，都可能同时破坏 partial order 和 family structure。因此，主要缺口是把结构描述转化为安全而明确的动态更新。</a:t>
+              <a:t>上次实现用 rank interval 表示输入，区分 upper 和 lower pair family，重构 laminar family tree，并计算结构指标。Oracle 检查输入有效性并提供参考答案。尚未实现的是动态过程：更新 processed prefix、拆分 sibling list、转移 ownership，以及从维护状态恢复输出。每次更新都必须保持 partial order 和 family structure 一致。一次更新出错就可能同时破坏两者，因此安全的动态更新是当时的主要实现缺口。</a:t>
             </a:r>
           </a:p>
           <a:p xmlns:a="http://schemas.openxmlformats.org/drawingml/2006/main">
@@ -1822,7 +1822,7 @@
           <a:lstStyle xmlns:a="http://schemas.openxmlformats.org/drawingml/2006/main"/>
           <a:p xmlns:a="http://schemas.openxmlformats.org/drawingml/2006/main">
             <a:r>
-              <a:t>上次汇报之后，我集中完成了四项工作。第一，缩小范围，聚焦外部 oracle 已认证的有效输入排序。第二，实现 Step 1、Step 2 和 Step 3 的控制流。第三，加入 ownership 不变量、事务式更新、重放和有界验证。第四，在实现和验证边界稳定后，执行固定协议的正式实验。当前成果是可执行的普通列表实现，历史线性时间分析所使用的专用后端仍属于未来工作。</a:t>
+              <a:t>此后，我将范围缩小到外部 oracle 已认证的有效输入，并实现 Step 1、Step 2 和 Step 3 控制流。我加入 ownership 检查、事务式更新、重放和有界验证。实现通过这些检查后，我按固定协议运行了正式实验。当前成果是可执行的普通列表重构。</a:t>
             </a:r>
           </a:p>
           <a:p xmlns:a="http://schemas.openxmlformats.org/drawingml/2006/main">
@@ -1917,7 +1917,7 @@
           <a:lstStyle xmlns:a="http://schemas.openxmlformats.org/drawingml/2006/main"/>
           <a:p xmlns:a="http://schemas.openxmlformats.org/drawingml/2006/main">
             <a:r>
-              <a:t>随着实现逐渐明确，论文范围也有意收窄。当前研究的是 1990 年 sorting procedure 在 oracle 已认证有效的输入上如何运行。实验比较 Python sort、完整的 oracle-backed reference pipeline 和重构后的 paper core。Recognition 保持独立，不能从这次实验推断任意输入的识别能力。Paper core 也仍使用普通 Python list，而不是历史理论分析所需的专用后端。这个范围让论文可以集中回答一个具体问题：动态过程能否正确执行，并从自身维护状态恢复输出。Finger-tree 后端只是可能的扩展。</a:t>
+              <a:t>论文研究的是 1990 年 sorting procedure 在 oracle 已认证有效的输入上的运行。实验比较 Python sort、完整的 oracle-backed reference pipeline 和重构后的 paper core。Recognition 不在本次实验范围内。当前 core 使用普通 Python list，尚未实现历史线性时间分析所使用的专用后端。</a:t>
             </a:r>
           </a:p>
           <a:p xmlns:a="http://schemas.openxmlformats.org/drawingml/2006/main">
@@ -2017,7 +2017,7 @@
           <a:lstStyle xmlns:a="http://schemas.openxmlformats.org/drawingml/2006/main"/>
           <a:p xmlns:a="http://schemas.openxmlformats.org/drawingml/2006/main">
             <a:r>
-              <a:t>论文有三个研究问题。RQ1 问普通列表重构能否在认证后的有效输入上，从维护状态恢复正确排序。RQ2 问 paper call 相对于 Python sort 和完整 reference pipeline，在各自计时范围下呈现什么行为。RQ3 只探索输入结构、checked operation counter 与运行时间之间的描述性关系。RQ1 是主要技术问题，RQ2 报告测量结果，RQ3 不作因果解释。</a:t>
+              <a:t>RQ1 是主要技术问题：普通列表重构能否在认证后的有效输入上，从维护状态恢复正确排序？RQ2 比较 paper call、Python sort 和完整 reference pipeline 在各自计时范围下的表现。RQ3 探索输入结构、checked operation counter 与运行时间之间的描述性关系，不作因果解释。</a:t>
             </a:r>
           </a:p>
           <a:p xmlns:a="http://schemas.openxmlformats.org/drawingml/2006/main">
@@ -2102,7 +2102,7 @@
           <a:lstStyle xmlns:a="http://schemas.openxmlformats.org/drawingml/2006/main"/>
           <a:p xmlns:a="http://schemas.openxmlformats.org/drawingml/2006/main">
             <a:r>
-              <a:t>Oracle、reference pipeline 和 paper core 的角色必须明确区分。Paper call 之前，oracle 只确认有效输入条件；调用之后，runner 才用 oracle 的排序结果作正确性比较。Reference pipeline 则有意消费完整 oracle result，包括 sorted output。Paper core 只接收原始 sequence 和已经成立的有效输入前提。它执行 Step 1、2、3，维护 partial order 与 sibling-list 状态，并从这些状态恢复输出。图中的虚线比较框位于 core 外部。两条路径面对同一个 expected answer，但输出来源不同。这样就能在不把答案作为输入的情况下检查 paper core。Oracle 排序结果不会进入 paper core，也不会决定它的返回值。</a:t>
+              <a:t>Paper call 之前，oracle 认证输入有效性；调用之后，runner 将返回值与 oracle 的排序结果比较。Reference pipeline 使用完整 oracle result，包括 sorted output。Paper core 只接收原始序列，并以已认证有效为前提。它执行 Step 1、Step 2 和 Step 3，维护 partial order 与 sibling list，再从 partial order 恢复输出。两条路径使用同一个 expected answer 检查，但输出来源不同。Oracle 的排序答案不会进入 paper core，因此图中的虚线比较框位于 core 外部。</a:t>
             </a:r>
           </a:p>
           <a:p xmlns:a="http://schemas.openxmlformats.org/drawingml/2006/main">
@@ -2202,7 +2202,7 @@
           <a:lstStyle xmlns:a="http://schemas.openxmlformats.org/drawingml/2006/main"/>
           <a:p xmlns:a="http://schemas.openxmlformats.org/drawingml/2006/main">
             <a:r>
-              <a:t>可执行重构采用统一的控制流。先排序 z1、z2、z3，并初始化 partial order 与首批 upper、lower pair；随后每个新点都依次经过 Step 1、Step 2 和 Step 3。Step 1 计算 predecessor-side boundary A_i，Step 2 计算 successor-side boundary B_i。Step 3(a) 插入新 pair，Step 3(b) 在需要时拆分 sibling list 并转移 ownership，Step 3(c) 把新点插入维护的顺序。Increasing 与 decreasing 方向共享这些阶段，局部角色则互为镜像。在 increasing iteration 中，Step 3(a) 使用 A_i，Step 3(b) 使用 B_i；decreasing iteration 交换这两个边界的用途。1990 年论文直接描述 increasing case，decreasing case 由对称性重构。几何端点和奇数索引 z1 输出锚点则是为了得到无歧义执行行为而明确补充的局部规则。</a:t>
+              <a:t>算法先排序 z1、z2、z3，再初始化 partial order 和首批 upper、lower pair。对每个新点，Step 1 找 predecessor boundary pair A_i，Step 2 找 successor boundary pair B_i。Step 3(a) 插入 pair，Step 3(b) 在需要时拆分 sibling list 并转移 ownership；这两步更新 pair family。Step 3(c) 将新点插入维护的顺序。在 increasing iteration 中，Step 3(a) 使用 A_i，Step 3(b) 使用 B_i；decreasing iteration 交换两者的用途。论文直接描述 increasing case，decreasing case 由对称性重构。两个方向共享相同阶段，但局部角色互为镜像。接下来两页解释两处可执行化澄清：几何端点与奇数索引 z1 输出 anchor。</a:t>
             </a:r>
           </a:p>
           <a:p xmlns:a="http://schemas.openxmlformats.org/drawingml/2006/main">
@@ -2297,7 +2297,7 @@
           <a:lstStyle xmlns:a="http://schemas.openxmlformats.org/drawingml/2006/main"/>
           <a:p xmlns:a="http://schemas.openxmlformats.org/drawingml/2006/main">
             <a:r>
-              <a:t>第一个关键问题是 Step 3(c) 应使用哪个端点。考虑有效前缀 3、2、1、4。Acquired pair P2 按 curve order 存为 3、2。如果机械地取第二个存储元素 2 作为锚点，插入 4 后得到 1、2、4、3，在 axis order 上是错误的。原因是 curve order 和 axis order 描述不同关系。Pair 的存储顺序来自曲线遍历，但 Step 3(c) 需要 x 轴上的几何极值。在这里正确端点是 3，把 4 插在 3 后得到 1、2、3、4。这是表示方式的问题，并不只是这四个数字的特例：pair 的存储顺序沿曲线排列，所以第二个元素未必位于当前 axis order 所需的一侧。于是可执行规则选择几何极值，而不是固定选择第二个存储元素。Increasing 使用右端几何极值，decreasing 使用左端几何极值。我把它称为可执行化澄清，因为 1990 年论文没有以这种形式明确给出规则。缺少这一澄清时，有效输入的例子也会失败。</a:t>
+              <a:t>考虑有效前缀 (3,2,1,4)。Acquired pair P2 按 curve order 存为 (3,2)。若取第二个存储元素 2 为 anchor，得到 (1,2,4,3)，在 axis order 上是错误的。Step 3(c) 需要几何极值，而不是 curve order 中的第二个元素。这里正确的 anchor 是 3，将 4 插在 3 后得到 (1,2,3,4)。Pair 记录沿曲线的遍历顺序，插入则必须遵循 axis order。这是表示方式的问题：curve order 未必能标识 axis order 中所需的一侧。Increasing iteration 使用右端几何极值，decreasing iteration 使用左端几何极值。这属于可执行化澄清，因为 1990 年论文没有以这种形式明确给出规则。缺少这一澄清时，有效输入的例子也会失败。</a:t>
             </a:r>
           </a:p>
           <a:p xmlns:a="http://schemas.openxmlformats.org/drawingml/2006/main">
@@ -2387,7 +2387,7 @@
           <a:lstStyle xmlns:a="http://schemas.openxmlformats.org/drawingml/2006/main"/>
           <a:p xmlns:a="http://schemas.openxmlformats.org/drawingml/2006/main">
             <a:r>
-              <a:t>第二个问题是奇数索引的 z1 特例。例子中的有效前缀为 1、2、3、4、6、7、0。当前是 decreasing iteration，普通几何锚点为 z2，也就是值 2。若直接把 0 插到 z2 前，会得到 1、0、2、3、4、6、7，z1 仍在新点错误的一侧。因为 0 小于 z1，且 z1 小于原锚点，所以输出锚点必须从 z2 改为 z1。这样插入后得到正确顺序 0、1、2、3、4、6、7。这个修正只影响输出插入，不替代 predecessor 或 successor boundary 的计算。二者分别决定 family update 的 pair 与 partial order 更新的点，代码也将它们分开记录，便于检查诊断 trace。</a:t>
+              <a:t>奇数索引 z1 的例子使用有效前缀 (1,2,3,4,6,7,0)。当前是 decreasing iteration，普通 anchor 为 z2，值为 2。直接把 0 插在它前面会得到 (1,0,2,3,4,6,7)。Z1 仍位于新点的错误一侧。这里 0 小于 z1，且 z1 小于原 anchor，因此输出 anchor 必须改为 z1。把 0 插在 z1 前得到 (0,1,2,3,4,6,7)。这一修正只改变输出插入，不替代先前的 predecessor 或 successor boundary 计算。Boundary selection 仍负责为 family update 选择 pair；输出 anchor 则选择用于 partial order 插入的点。</a:t>
             </a:r>
           </a:p>
           <a:p xmlns:a="http://schemas.openxmlformats.org/drawingml/2006/main">

--- a/presentations/progress_report/Jordan_Sorting_Progress_Report_ZH.pptx
+++ b/presentations/progress_report/Jordan_Sorting_Progress_Report_ZH.pptx
@@ -952,7 +952,7 @@
           <a:lstStyle xmlns:a="http://schemas.openxmlformats.org/drawingml/2006/main"/>
           <a:p xmlns:a="http://schemas.openxmlformats.org/drawingml/2006/main">
             <a:r>
-              <a:t>我先计算每个 exact case 的 paper/reference 比值，再按规模取中位数，每个 case 权重相同。比值在 n 为 32 时是 3.226，64 时是 2.202，128 时是 1.351，256 时是 0.851，512 时是 0.567。因此，128 时比值大于 1，256 时小于 1。在这些计时范围下，两个较大规模的 paper 调用耗时更少。由于计时范围不同，这不能证明端到端加速。Python sort 在每个测试规模上都有最低的调用时间中位数，见 Backup A。</a:t>
+              <a:t>对每个 case，我用 paper 调用时间的中位数除以 reference 调用时间的中位数。然后对每个规模下的这些比值取中位数。比值在 n 为 32 时是 3.226，64 时是 2.202，128 时是 1.351，256 时是 0.851，512 时是 0.567。因此，128 时比值大于 1，256 时小于 1。在这些计时范围下，两个较大规模的 paper 调用耗时更少。由于计时范围不同，这不能证明端到端加速。Python sort 在每个测试规模上都有最低的调用时间中位数，见 Backup A。</a:t>
             </a:r>
           </a:p>
           <a:p xmlns:a="http://schemas.openxmlformats.org/drawingml/2006/main">

--- a/presentations/progress_report/Jordan_Sorting_Progress_Report_ZH.pptx
+++ b/presentations/progress_report/Jordan_Sorting_Progress_Report_ZH.pptx
@@ -2387,7 +2387,7 @@
           <a:lstStyle xmlns:a="http://schemas.openxmlformats.org/drawingml/2006/main"/>
           <a:p xmlns:a="http://schemas.openxmlformats.org/drawingml/2006/main">
             <a:r>
-              <a:t>奇数索引 z1 的例子使用有效前缀 (1,2,3,4,6,7,0)。当前是 decreasing iteration，普通 anchor 为 z2，值为 2。直接把 0 插在它前面会得到 (1,0,2,3,4,6,7)。Z1 仍位于新点的错误一侧。这里 0 小于 z1，且 z1 小于原 anchor，因此输出 anchor 必须改为 z1。把 0 插在 z1 前得到 (0,1,2,3,4,6,7)。这一修正只改变输出插入，不替代先前的 predecessor 或 successor boundary 计算。Boundary selection 仍负责为 family update 选择 pair；输出 anchor 则选择用于 partial order 插入的点。</a:t>
+              <a:t>这里在第 7 次迭代插入 0。结束下标为奇数，因此新 pair 属于 lower family；0 小于旧端点 7，因此本次为 decreasing。Step 3(b) 后，新 pair 获得图中的 P₃ 和 P₅。Step 3(c) 取最左 child P₃ 的几何左端点。P₃ 的端点为 2 和 3，所以 base anchor 是 2。但是 z₁ 的值为 1，它不是任何 lower pair 的端点，却仍在有序列表中。若直接把 0 插在 2 前，会让 0 留在 1 后面。本例下标为奇数，且 0 小于 z₁，z₁ 又小于 base anchor，因此最终 anchor 改为 z₁。这只改变输出插入，不替代先前的 boundary-pair selection。</a:t>
             </a:r>
           </a:p>
           <a:p xmlns:a="http://schemas.openxmlformats.org/drawingml/2006/main">
@@ -30479,10 +30479,10 @@
       </p:grpSpPr>
       <p:sp>
         <p:nvSpPr>
-          <p:cNvPr id="31" name="">
-            <a:extLst xmlns:a="http://schemas.openxmlformats.org/drawingml/2006/main">
-              <a:ext uri="{FF2B5EF4-FFF2-40B4-BE49-F238E27FC236}">
-                <a16:creationId xmlns:a16="http://schemas.microsoft.com/office/drawing/2014/main" id="{3CF6A973-080F-4157-AB1A-9A4E6542E6C7}"/>
+          <p:cNvPr id="36" name="">
+            <a:extLst xmlns:a="http://schemas.openxmlformats.org/drawingml/2006/main">
+              <a:ext uri="{FF2B5EF4-FFF2-40B4-BE49-F238E27FC236}">
+                <a16:creationId xmlns:a16="http://schemas.microsoft.com/office/drawing/2014/main" id="{8AB87199-1BA7-42CE-8DAC-185DBB2A1AF9}"/>
               </a:ext>
             </a:extLst>
           </p:cNvPr>
@@ -30538,7 +30538,7 @@
           <p:cNvPr id="2" name="">
             <a:extLst xmlns:a="http://schemas.openxmlformats.org/drawingml/2006/main">
               <a:ext uri="{FF2B5EF4-FFF2-40B4-BE49-F238E27FC236}">
-                <a16:creationId xmlns:a16="http://schemas.microsoft.com/office/drawing/2014/main" id="{7CFCFE4B-AE96-4E4E-A951-F3252282CBE2}"/>
+                <a16:creationId xmlns:a16="http://schemas.microsoft.com/office/drawing/2014/main" id="{4F681D41-3196-49BE-98B5-3F1D31F4E5B8}"/>
               </a:ext>
             </a:extLst>
           </p:cNvPr>
@@ -30584,7 +30584,7 @@
                   <a:srgbClr val="102A43"/>
                 </a:solidFill>
               </a:rPr>
-              <a:t>奇数次迭代需要独立的 z₁ 输出 anchor 修正</a:t>
+              <a:t>为什么需要单独检查 z₁ 输出锚点</a:t>
             </a:r>
           </a:p>
         </p:txBody>
@@ -30594,7 +30594,7 @@
           <p:cNvPr id="3" name="">
             <a:extLst xmlns:a="http://schemas.openxmlformats.org/drawingml/2006/main">
               <a:ext uri="{FF2B5EF4-FFF2-40B4-BE49-F238E27FC236}">
-                <a16:creationId xmlns:a16="http://schemas.microsoft.com/office/drawing/2014/main" id="{18AD95B6-D297-44A3-8BA4-6874F17C3BE6}"/>
+                <a16:creationId xmlns:a16="http://schemas.microsoft.com/office/drawing/2014/main" id="{81A34603-B4E9-477E-9DAF-619538A79491}"/>
               </a:ext>
             </a:extLst>
           </p:cNvPr>
@@ -30625,7 +30625,7 @@
           <p:cNvPr id="4" name="">
             <a:extLst xmlns:a="http://schemas.openxmlformats.org/drawingml/2006/main">
               <a:ext uri="{FF2B5EF4-FFF2-40B4-BE49-F238E27FC236}">
-                <a16:creationId xmlns:a16="http://schemas.microsoft.com/office/drawing/2014/main" id="{DDC22834-9CD9-418E-81BE-345C0F898C51}"/>
+                <a16:creationId xmlns:a16="http://schemas.microsoft.com/office/drawing/2014/main" id="{5433816A-A145-43BA-9370-2F197C4F9A42}"/>
               </a:ext>
             </a:extLst>
           </p:cNvPr>
@@ -30656,7 +30656,7 @@
           <p:cNvPr id="5" name="">
             <a:extLst xmlns:a="http://schemas.openxmlformats.org/drawingml/2006/main">
               <a:ext uri="{FF2B5EF4-FFF2-40B4-BE49-F238E27FC236}">
-                <a16:creationId xmlns:a16="http://schemas.microsoft.com/office/drawing/2014/main" id="{020A6172-5EC5-4AFF-B0D5-BD0CD60D5A32}"/>
+                <a16:creationId xmlns:a16="http://schemas.microsoft.com/office/drawing/2014/main" id="{E56450E1-0894-455E-AFCB-B1E4864443F1}"/>
               </a:ext>
             </a:extLst>
           </p:cNvPr>
@@ -30712,7 +30712,7 @@
           <p:cNvPr id="6" name="">
             <a:extLst xmlns:a="http://schemas.openxmlformats.org/drawingml/2006/main">
               <a:ext uri="{FF2B5EF4-FFF2-40B4-BE49-F238E27FC236}">
-                <a16:creationId xmlns:a16="http://schemas.microsoft.com/office/drawing/2014/main" id="{F776F8BE-0539-4AB2-843A-0BD7B2C0676A}"/>
+                <a16:creationId xmlns:a16="http://schemas.microsoft.com/office/drawing/2014/main" id="{677D4D8A-03AA-43F0-8638-3AE3FFD13D0A}"/>
               </a:ext>
             </a:extLst>
           </p:cNvPr>
@@ -30768,31 +30768,311 @@
           <p:cNvPr id="7" name="">
             <a:extLst xmlns:a="http://schemas.openxmlformats.org/drawingml/2006/main">
               <a:ext uri="{FF2B5EF4-FFF2-40B4-BE49-F238E27FC236}">
-                <a16:creationId xmlns:a16="http://schemas.microsoft.com/office/drawing/2014/main" id="{68F795D3-62E6-4A90-96B1-16726182B014}"/>
-              </a:ext>
-            </a:extLst>
-          </p:cNvPr>
-          <p:cNvSpPr>
-            <a:spLocks xmlns:a="http://schemas.openxmlformats.org/drawingml/2006/main" noGrp="1"/>
-          </p:cNvSpPr>
-          <p:nvPr/>
-        </p:nvSpPr>
-        <p:spPr>
-          <a:xfrm xmlns:a="http://schemas.openxmlformats.org/drawingml/2006/main">
-            <a:off x="685800" y="1428750"/>
-            <a:ext cx="7239000" cy="1866900"/>
+                <a16:creationId xmlns:a16="http://schemas.microsoft.com/office/drawing/2014/main" id="{244B6FB8-1A1D-466E-86C2-E055FA3EE28E}"/>
+              </a:ext>
+            </a:extLst>
+          </p:cNvPr>
+          <p:cNvSpPr>
+            <a:spLocks xmlns:a="http://schemas.openxmlformats.org/drawingml/2006/main" noGrp="1"/>
+          </p:cNvSpPr>
+          <p:nvPr/>
+        </p:nvSpPr>
+        <p:spPr>
+          <a:xfrm xmlns:a="http://schemas.openxmlformats.org/drawingml/2006/main">
+            <a:off x="723900" y="1295400"/>
+            <a:ext cx="6667500" cy="304800"/>
+          </a:xfrm>
+          <a:prstGeom xmlns:a="http://schemas.openxmlformats.org/drawingml/2006/main" prst="rect">
+            <a:avLst/>
+          </a:prstGeom>
+          <a:noFill xmlns:a="http://schemas.openxmlformats.org/drawingml/2006/main"/>
+          <a:ln xmlns:a="http://schemas.openxmlformats.org/drawingml/2006/main" w="0">
+            <a:noFill/>
+            <a:prstDash val="solid"/>
+          </a:ln>
+        </p:spPr>
+        <p:txBody>
+          <a:bodyPr xmlns:a="http://schemas.openxmlformats.org/drawingml/2006/main" wrap="square" lIns="38100" tIns="19050" rIns="38100" bIns="19050" anchor="t">
+            <a:normAutofit fontScale="100000"/>
+          </a:bodyPr>
+          <a:lstStyle xmlns:a="http://schemas.openxmlformats.org/drawingml/2006/main"/>
+          <a:p xmlns:a="http://schemas.openxmlformats.org/drawingml/2006/main">
+            <a:pPr algn="l">
+              <a:lnSpc>
+                <a:spcPct val="105000"/>
+              </a:lnSpc>
+              <a:buNone/>
+              <a:defRPr sz="1650" b="1" i="0">
+                <a:solidFill>
+                  <a:srgbClr val="102A43"/>
+                </a:solidFill>
+              </a:defRPr>
+            </a:pPr>
+            <a:r>
+              <a:rPr sz="1650" b="1" i="0">
+                <a:solidFill>
+                  <a:srgbClr val="102A43"/>
+                </a:solidFill>
+              </a:rPr>
+              <a:t>输入 (z₁, …, z₇) = (1, 2, 3, 4, 6, 7, 0)</a:t>
+            </a:r>
+          </a:p>
+        </p:txBody>
+      </p:sp>
+      <p:sp>
+        <p:nvSpPr>
+          <p:cNvPr id="8" name="">
+            <a:extLst xmlns:a="http://schemas.openxmlformats.org/drawingml/2006/main">
+              <a:ext uri="{FF2B5EF4-FFF2-40B4-BE49-F238E27FC236}">
+                <a16:creationId xmlns:a16="http://schemas.microsoft.com/office/drawing/2014/main" id="{5CE1C577-5D0B-4C4E-91F7-3893B088A7D3}"/>
+              </a:ext>
+            </a:extLst>
+          </p:cNvPr>
+          <p:cNvSpPr>
+            <a:spLocks xmlns:a="http://schemas.openxmlformats.org/drawingml/2006/main" noGrp="1"/>
+          </p:cNvSpPr>
+          <p:nvPr/>
+        </p:nvSpPr>
+        <p:spPr>
+          <a:xfrm xmlns:a="http://schemas.openxmlformats.org/drawingml/2006/main">
+            <a:off x="7639050" y="1314450"/>
+            <a:ext cx="3829050" cy="285750"/>
+          </a:xfrm>
+          <a:prstGeom xmlns:a="http://schemas.openxmlformats.org/drawingml/2006/main" prst="rect">
+            <a:avLst/>
+          </a:prstGeom>
+          <a:noFill xmlns:a="http://schemas.openxmlformats.org/drawingml/2006/main"/>
+          <a:ln xmlns:a="http://schemas.openxmlformats.org/drawingml/2006/main" w="0">
+            <a:noFill/>
+            <a:prstDash val="solid"/>
+          </a:ln>
+        </p:spPr>
+        <p:txBody>
+          <a:bodyPr xmlns:a="http://schemas.openxmlformats.org/drawingml/2006/main" wrap="square" lIns="38100" tIns="19050" rIns="38100" bIns="19050" anchor="t">
+            <a:normAutofit fontScale="98261"/>
+          </a:bodyPr>
+          <a:lstStyle xmlns:a="http://schemas.openxmlformats.org/drawingml/2006/main"/>
+          <a:p xmlns:a="http://schemas.openxmlformats.org/drawingml/2006/main">
+            <a:pPr algn="l">
+              <a:lnSpc>
+                <a:spcPct val="105000"/>
+              </a:lnSpc>
+              <a:buNone/>
+              <a:defRPr sz="1575" b="0" i="0">
+                <a:solidFill>
+                  <a:srgbClr val="52606D"/>
+                </a:solidFill>
+              </a:defRPr>
+            </a:pPr>
+            <a:r>
+              <a:rPr sz="1575" b="0" i="0">
+                <a:solidFill>
+                  <a:srgbClr val="52606D"/>
+                </a:solidFill>
+              </a:rPr>
+              <a:t>S₆ = [1, 2, 3, 4, 6, 7]</a:t>
+            </a:r>
+          </a:p>
+        </p:txBody>
+      </p:sp>
+      <p:sp>
+        <p:nvSpPr>
+          <p:cNvPr id="9" name="">
+            <a:extLst xmlns:a="http://schemas.openxmlformats.org/drawingml/2006/main">
+              <a:ext uri="{FF2B5EF4-FFF2-40B4-BE49-F238E27FC236}">
+                <a16:creationId xmlns:a16="http://schemas.microsoft.com/office/drawing/2014/main" id="{038AC149-304D-4AAD-A579-CEF42207A4E5}"/>
+              </a:ext>
+            </a:extLst>
+          </p:cNvPr>
+          <p:cNvSpPr>
+            <a:spLocks xmlns:a="http://schemas.openxmlformats.org/drawingml/2006/main" noGrp="1"/>
+          </p:cNvSpPr>
+          <p:nvPr/>
+        </p:nvSpPr>
+        <p:spPr>
+          <a:xfrm xmlns:a="http://schemas.openxmlformats.org/drawingml/2006/main">
+            <a:off x="723900" y="1733550"/>
+            <a:ext cx="5048250" cy="285750"/>
+          </a:xfrm>
+          <a:prstGeom xmlns:a="http://schemas.openxmlformats.org/drawingml/2006/main" prst="rect">
+            <a:avLst/>
+          </a:prstGeom>
+          <a:noFill xmlns:a="http://schemas.openxmlformats.org/drawingml/2006/main"/>
+          <a:ln xmlns:a="http://schemas.openxmlformats.org/drawingml/2006/main" w="0">
+            <a:noFill/>
+            <a:prstDash val="solid"/>
+          </a:ln>
+        </p:spPr>
+        <p:txBody>
+          <a:bodyPr xmlns:a="http://schemas.openxmlformats.org/drawingml/2006/main" wrap="square" lIns="38100" tIns="19050" rIns="38100" bIns="19050" anchor="t">
+            <a:normAutofit fontScale="93795"/>
+          </a:bodyPr>
+          <a:lstStyle xmlns:a="http://schemas.openxmlformats.org/drawingml/2006/main"/>
+          <a:p xmlns:a="http://schemas.openxmlformats.org/drawingml/2006/main">
+            <a:pPr algn="l">
+              <a:lnSpc>
+                <a:spcPct val="105000"/>
+              </a:lnSpc>
+              <a:buNone/>
+              <a:defRPr sz="1650" b="1" i="0">
+                <a:solidFill>
+                  <a:srgbClr val="2A9D8F"/>
+                </a:solidFill>
+              </a:defRPr>
+            </a:pPr>
+            <a:r>
+              <a:rPr sz="1650" b="1" i="0">
+                <a:solidFill>
+                  <a:srgbClr val="2A9D8F"/>
+                </a:solidFill>
+              </a:rPr>
+              <a:t>i = 7（奇数）→ lower family</a:t>
+            </a:r>
+          </a:p>
+        </p:txBody>
+      </p:sp>
+      <p:sp>
+        <p:nvSpPr>
+          <p:cNvPr id="10" name="">
+            <a:extLst xmlns:a="http://schemas.openxmlformats.org/drawingml/2006/main">
+              <a:ext uri="{FF2B5EF4-FFF2-40B4-BE49-F238E27FC236}">
+                <a16:creationId xmlns:a16="http://schemas.microsoft.com/office/drawing/2014/main" id="{E8E43D58-5EBA-4CEC-AC04-A6284A404C83}"/>
+              </a:ext>
+            </a:extLst>
+          </p:cNvPr>
+          <p:cNvSpPr>
+            <a:spLocks xmlns:a="http://schemas.openxmlformats.org/drawingml/2006/main" noGrp="1"/>
+          </p:cNvSpPr>
+          <p:nvPr/>
+        </p:nvSpPr>
+        <p:spPr>
+          <a:xfrm xmlns:a="http://schemas.openxmlformats.org/drawingml/2006/main">
+            <a:off x="6362700" y="1733550"/>
+            <a:ext cx="5105400" cy="285750"/>
+          </a:xfrm>
+          <a:prstGeom xmlns:a="http://schemas.openxmlformats.org/drawingml/2006/main" prst="rect">
+            <a:avLst/>
+          </a:prstGeom>
+          <a:noFill xmlns:a="http://schemas.openxmlformats.org/drawingml/2006/main"/>
+          <a:ln xmlns:a="http://schemas.openxmlformats.org/drawingml/2006/main" w="0">
+            <a:noFill/>
+            <a:prstDash val="solid"/>
+          </a:ln>
+        </p:spPr>
+        <p:txBody>
+          <a:bodyPr xmlns:a="http://schemas.openxmlformats.org/drawingml/2006/main" wrap="square" lIns="38100" tIns="19050" rIns="38100" bIns="19050" anchor="t">
+            <a:normAutofit fontScale="93795"/>
+          </a:bodyPr>
+          <a:lstStyle xmlns:a="http://schemas.openxmlformats.org/drawingml/2006/main"/>
+          <a:p xmlns:a="http://schemas.openxmlformats.org/drawingml/2006/main">
+            <a:pPr algn="l">
+              <a:lnSpc>
+                <a:spcPct val="105000"/>
+              </a:lnSpc>
+              <a:buNone/>
+              <a:defRPr sz="1650" b="1" i="0">
+                <a:solidFill>
+                  <a:srgbClr val="2A9D8F"/>
+                </a:solidFill>
+              </a:defRPr>
+            </a:pPr>
+            <a:r>
+              <a:rPr sz="1650" b="1" i="0">
+                <a:solidFill>
+                  <a:srgbClr val="2A9D8F"/>
+                </a:solidFill>
+              </a:rPr>
+              <a:t>z₇ = 0 &lt; z₆ = 7 → decreasing</a:t>
+            </a:r>
+          </a:p>
+        </p:txBody>
+      </p:sp>
+      <p:sp>
+        <p:nvSpPr>
+          <p:cNvPr id="11" name="">
+            <a:extLst xmlns:a="http://schemas.openxmlformats.org/drawingml/2006/main">
+              <a:ext uri="{FF2B5EF4-FFF2-40B4-BE49-F238E27FC236}">
+                <a16:creationId xmlns:a16="http://schemas.microsoft.com/office/drawing/2014/main" id="{57034123-51E4-48FF-B5E4-060F6AE9C1D3}"/>
+              </a:ext>
+            </a:extLst>
+          </p:cNvPr>
+          <p:cNvSpPr>
+            <a:spLocks xmlns:a="http://schemas.openxmlformats.org/drawingml/2006/main" noGrp="1"/>
+          </p:cNvSpPr>
+          <p:nvPr/>
+        </p:nvSpPr>
+        <p:spPr>
+          <a:xfrm xmlns:a="http://schemas.openxmlformats.org/drawingml/2006/main">
+            <a:off x="723900" y="2228850"/>
+            <a:ext cx="5257800" cy="304800"/>
+          </a:xfrm>
+          <a:prstGeom xmlns:a="http://schemas.openxmlformats.org/drawingml/2006/main" prst="rect">
+            <a:avLst/>
+          </a:prstGeom>
+          <a:noFill xmlns:a="http://schemas.openxmlformats.org/drawingml/2006/main"/>
+          <a:ln xmlns:a="http://schemas.openxmlformats.org/drawingml/2006/main" w="0">
+            <a:noFill/>
+            <a:prstDash val="solid"/>
+          </a:ln>
+        </p:spPr>
+        <p:txBody>
+          <a:bodyPr xmlns:a="http://schemas.openxmlformats.org/drawingml/2006/main" wrap="square" lIns="38100" tIns="19050" rIns="38100" bIns="19050" anchor="t">
+            <a:normAutofit fontScale="100000"/>
+          </a:bodyPr>
+          <a:lstStyle xmlns:a="http://schemas.openxmlformats.org/drawingml/2006/main"/>
+          <a:p xmlns:a="http://schemas.openxmlformats.org/drawingml/2006/main">
+            <a:pPr algn="l">
+              <a:lnSpc>
+                <a:spcPct val="105000"/>
+              </a:lnSpc>
+              <a:buNone/>
+              <a:defRPr sz="1650" b="1" i="0">
+                <a:solidFill>
+                  <a:srgbClr val="102A43"/>
+                </a:solidFill>
+              </a:defRPr>
+            </a:pPr>
+            <a:r>
+              <a:rPr sz="1650" b="1" i="0">
+                <a:solidFill>
+                  <a:srgbClr val="102A43"/>
+                </a:solidFill>
+              </a:rPr>
+              <a:t>Decreasing：最左 child → 几何左端点</a:t>
+            </a:r>
+          </a:p>
+        </p:txBody>
+      </p:sp>
+      <p:sp>
+        <p:nvSpPr>
+          <p:cNvPr id="12" name="">
+            <a:extLst xmlns:a="http://schemas.openxmlformats.org/drawingml/2006/main">
+              <a:ext uri="{FF2B5EF4-FFF2-40B4-BE49-F238E27FC236}">
+                <a16:creationId xmlns:a16="http://schemas.microsoft.com/office/drawing/2014/main" id="{56674932-767B-4597-AB10-73A2D7ED1EA0}"/>
+              </a:ext>
+            </a:extLst>
+          </p:cNvPr>
+          <p:cNvSpPr>
+            <a:spLocks xmlns:a="http://schemas.openxmlformats.org/drawingml/2006/main" noGrp="1"/>
+          </p:cNvSpPr>
+          <p:nvPr/>
+        </p:nvSpPr>
+        <p:spPr>
+          <a:xfrm xmlns:a="http://schemas.openxmlformats.org/drawingml/2006/main">
+            <a:off x="2190750" y="2933700"/>
+            <a:ext cx="2286000" cy="457200"/>
           </a:xfrm>
           <a:prstGeom xmlns:a="http://schemas.openxmlformats.org/drawingml/2006/main" prst="roundRect">
             <a:avLst>
-              <a:gd name="adj" fmla="val 4082"/>
+              <a:gd name="adj" fmla="val 12500"/>
             </a:avLst>
           </a:prstGeom>
           <a:solidFill xmlns:a="http://schemas.openxmlformats.org/drawingml/2006/main">
-            <a:srgbClr val="FFFFFF"/>
+            <a:srgbClr val="EAF1F8"/>
           </a:solidFill>
-          <a:ln xmlns:a="http://schemas.openxmlformats.org/drawingml/2006/main" w="14288">
+          <a:ln xmlns:a="http://schemas.openxmlformats.org/drawingml/2006/main" w="11430">
             <a:solidFill>
-              <a:srgbClr val="E76F51"/>
+              <a:srgbClr val="102A43"/>
             </a:solidFill>
             <a:prstDash val="solid"/>
           </a:ln>
@@ -30800,22 +31080,22 @@
       </p:sp>
       <p:sp>
         <p:nvSpPr>
-          <p:cNvPr id="8" name="">
-            <a:extLst xmlns:a="http://schemas.openxmlformats.org/drawingml/2006/main">
-              <a:ext uri="{FF2B5EF4-FFF2-40B4-BE49-F238E27FC236}">
-                <a16:creationId xmlns:a16="http://schemas.microsoft.com/office/drawing/2014/main" id="{8D296615-DF7C-4A5F-B754-082AF81D1221}"/>
-              </a:ext>
-            </a:extLst>
-          </p:cNvPr>
-          <p:cNvSpPr>
-            <a:spLocks xmlns:a="http://schemas.openxmlformats.org/drawingml/2006/main" noGrp="1"/>
-          </p:cNvSpPr>
-          <p:nvPr/>
-        </p:nvSpPr>
-        <p:spPr>
-          <a:xfrm xmlns:a="http://schemas.openxmlformats.org/drawingml/2006/main">
-            <a:off x="914400" y="1600200"/>
-            <a:ext cx="6781800" cy="323850"/>
+          <p:cNvPr id="13" name="">
+            <a:extLst xmlns:a="http://schemas.openxmlformats.org/drawingml/2006/main">
+              <a:ext uri="{FF2B5EF4-FFF2-40B4-BE49-F238E27FC236}">
+                <a16:creationId xmlns:a16="http://schemas.microsoft.com/office/drawing/2014/main" id="{F57B3AFB-A1C4-4F75-A808-C6F7F2719271}"/>
+              </a:ext>
+            </a:extLst>
+          </p:cNvPr>
+          <p:cNvSpPr>
+            <a:spLocks xmlns:a="http://schemas.openxmlformats.org/drawingml/2006/main" noGrp="1"/>
+          </p:cNvSpPr>
+          <p:nvPr/>
+        </p:nvSpPr>
+        <p:spPr>
+          <a:xfrm xmlns:a="http://schemas.openxmlformats.org/drawingml/2006/main">
+            <a:off x="2266950" y="2990850"/>
+            <a:ext cx="2133600" cy="342900"/>
           </a:xfrm>
           <a:prstGeom xmlns:a="http://schemas.openxmlformats.org/drawingml/2006/main" prst="rect">
             <a:avLst/>
@@ -30832,46 +31112,46 @@
           </a:bodyPr>
           <a:lstStyle xmlns:a="http://schemas.openxmlformats.org/drawingml/2006/main"/>
           <a:p xmlns:a="http://schemas.openxmlformats.org/drawingml/2006/main">
-            <a:pPr algn="l">
-              <a:lnSpc>
-                <a:spcPct val="105000"/>
-              </a:lnSpc>
-              <a:buNone/>
-              <a:defRPr sz="1725" b="1" i="0">
-                <a:solidFill>
-                  <a:srgbClr val="E76F51"/>
-                </a:solidFill>
-              </a:defRPr>
-            </a:pPr>
-            <a:r>
-              <a:rPr sz="1725" b="1" i="0">
-                <a:solidFill>
-                  <a:srgbClr val="E76F51"/>
-                </a:solidFill>
-              </a:rPr>
-              <a:t>普通几何基准 anchor = z₂ = 2</a:t>
-            </a:r>
-          </a:p>
-        </p:txBody>
-      </p:sp>
-      <p:sp>
-        <p:nvSpPr>
-          <p:cNvPr id="9" name="">
-            <a:extLst xmlns:a="http://schemas.openxmlformats.org/drawingml/2006/main">
-              <a:ext uri="{FF2B5EF4-FFF2-40B4-BE49-F238E27FC236}">
-                <a16:creationId xmlns:a16="http://schemas.microsoft.com/office/drawing/2014/main" id="{FE643176-DE51-4230-90B4-D34531A749C7}"/>
-              </a:ext>
-            </a:extLst>
-          </p:cNvPr>
-          <p:cNvSpPr>
-            <a:spLocks xmlns:a="http://schemas.openxmlformats.org/drawingml/2006/main" noGrp="1"/>
-          </p:cNvSpPr>
-          <p:nvPr/>
-        </p:nvSpPr>
-        <p:spPr>
-          <a:xfrm xmlns:a="http://schemas.openxmlformats.org/drawingml/2006/main">
-            <a:off x="1009650" y="2190750"/>
-            <a:ext cx="1352550" cy="323850"/>
+            <a:pPr algn="ctr">
+              <a:lnSpc>
+                <a:spcPct val="105000"/>
+              </a:lnSpc>
+              <a:buNone/>
+              <a:defRPr sz="1875" b="1" i="0">
+                <a:solidFill>
+                  <a:srgbClr val="102A43"/>
+                </a:solidFill>
+              </a:defRPr>
+            </a:pPr>
+            <a:r>
+              <a:rPr sz="1875" b="1" i="0">
+                <a:solidFill>
+                  <a:srgbClr val="102A43"/>
+                </a:solidFill>
+              </a:rPr>
+              <a:t>P₇ = (7, 0)</a:t>
+            </a:r>
+          </a:p>
+        </p:txBody>
+      </p:sp>
+      <p:sp>
+        <p:nvSpPr>
+          <p:cNvPr id="14" name="">
+            <a:extLst xmlns:a="http://schemas.openxmlformats.org/drawingml/2006/main">
+              <a:ext uri="{FF2B5EF4-FFF2-40B4-BE49-F238E27FC236}">
+                <a16:creationId xmlns:a16="http://schemas.microsoft.com/office/drawing/2014/main" id="{C0DEA3BD-6585-4897-B977-1B573D7BD2DB}"/>
+              </a:ext>
+            </a:extLst>
+          </p:cNvPr>
+          <p:cNvSpPr>
+            <a:spLocks xmlns:a="http://schemas.openxmlformats.org/drawingml/2006/main" noGrp="1"/>
+          </p:cNvSpPr>
+          <p:nvPr/>
+        </p:nvSpPr>
+        <p:spPr>
+          <a:xfrm xmlns:a="http://schemas.openxmlformats.org/drawingml/2006/main">
+            <a:off x="1200150" y="2609850"/>
+            <a:ext cx="4324350" cy="266700"/>
           </a:xfrm>
           <a:prstGeom xmlns:a="http://schemas.openxmlformats.org/drawingml/2006/main" prst="rect">
             <a:avLst/>
@@ -30893,299 +31173,19 @@
                 <a:spcPct val="105000"/>
               </a:lnSpc>
               <a:buNone/>
-              <a:defRPr sz="1500" b="1" i="0">
-                <a:solidFill>
-                  <a:srgbClr val="102A43"/>
-                </a:solidFill>
-              </a:defRPr>
-            </a:pPr>
-            <a:r>
-              <a:rPr sz="1500" b="1" i="0">
-                <a:solidFill>
-                  <a:srgbClr val="102A43"/>
-                </a:solidFill>
-              </a:rPr>
-              <a:t>新点 0</a:t>
-            </a:r>
-          </a:p>
-        </p:txBody>
-      </p:sp>
-      <p:sp>
-        <p:nvSpPr>
-          <p:cNvPr id="10" name="">
-            <a:extLst xmlns:a="http://schemas.openxmlformats.org/drawingml/2006/main">
-              <a:ext uri="{FF2B5EF4-FFF2-40B4-BE49-F238E27FC236}">
-                <a16:creationId xmlns:a16="http://schemas.microsoft.com/office/drawing/2014/main" id="{65523251-645B-4BEF-A13F-12A485E1BCE5}"/>
-              </a:ext>
-            </a:extLst>
-          </p:cNvPr>
-          <p:cNvSpPr>
-            <a:spLocks xmlns:a="http://schemas.openxmlformats.org/drawingml/2006/main" noGrp="1"/>
-          </p:cNvSpPr>
-          <p:nvPr/>
-        </p:nvSpPr>
-        <p:spPr>
-          <a:xfrm xmlns:a="http://schemas.openxmlformats.org/drawingml/2006/main">
-            <a:off x="2362200" y="2152650"/>
-            <a:ext cx="590550" cy="361950"/>
-          </a:xfrm>
-          <a:prstGeom xmlns:a="http://schemas.openxmlformats.org/drawingml/2006/main" prst="rect">
-            <a:avLst/>
-          </a:prstGeom>
-          <a:noFill xmlns:a="http://schemas.openxmlformats.org/drawingml/2006/main"/>
-          <a:ln xmlns:a="http://schemas.openxmlformats.org/drawingml/2006/main" w="0">
-            <a:noFill/>
-            <a:prstDash val="solid"/>
-          </a:ln>
-        </p:spPr>
-        <p:txBody>
-          <a:bodyPr xmlns:a="http://schemas.openxmlformats.org/drawingml/2006/main" wrap="square" lIns="38100" tIns="19050" rIns="38100" bIns="19050" anchor="t">
-            <a:normAutofit fontScale="96372"/>
-          </a:bodyPr>
-          <a:lstStyle xmlns:a="http://schemas.openxmlformats.org/drawingml/2006/main"/>
-          <a:p xmlns:a="http://schemas.openxmlformats.org/drawingml/2006/main">
-            <a:pPr algn="ctr">
-              <a:lnSpc>
-                <a:spcPct val="105000"/>
-              </a:lnSpc>
-              <a:buNone/>
-              <a:defRPr sz="2100" b="1" i="0">
-                <a:solidFill>
-                  <a:srgbClr val="E76F51"/>
-                </a:solidFill>
-              </a:defRPr>
-            </a:pPr>
-            <a:r>
-              <a:rPr sz="2100" b="1" i="0">
-                <a:solidFill>
-                  <a:srgbClr val="E76F51"/>
-                </a:solidFill>
-              </a:rPr>
-              <a:t>→</a:t>
-            </a:r>
-          </a:p>
-        </p:txBody>
-      </p:sp>
-      <p:sp>
-        <p:nvSpPr>
-          <p:cNvPr id="11" name="">
-            <a:extLst xmlns:a="http://schemas.openxmlformats.org/drawingml/2006/main">
-              <a:ext uri="{FF2B5EF4-FFF2-40B4-BE49-F238E27FC236}">
-                <a16:creationId xmlns:a16="http://schemas.microsoft.com/office/drawing/2014/main" id="{890BF5D7-368C-41D7-8AB5-6BAEC8D0DE8C}"/>
-              </a:ext>
-            </a:extLst>
-          </p:cNvPr>
-          <p:cNvSpPr>
-            <a:spLocks xmlns:a="http://schemas.openxmlformats.org/drawingml/2006/main" noGrp="1"/>
-          </p:cNvSpPr>
-          <p:nvPr/>
-        </p:nvSpPr>
-        <p:spPr>
-          <a:xfrm xmlns:a="http://schemas.openxmlformats.org/drawingml/2006/main">
-            <a:off x="2971800" y="2190750"/>
-            <a:ext cx="1619250" cy="323850"/>
-          </a:xfrm>
-          <a:prstGeom xmlns:a="http://schemas.openxmlformats.org/drawingml/2006/main" prst="rect">
-            <a:avLst/>
-          </a:prstGeom>
-          <a:noFill xmlns:a="http://schemas.openxmlformats.org/drawingml/2006/main"/>
-          <a:ln xmlns:a="http://schemas.openxmlformats.org/drawingml/2006/main" w="0">
-            <a:noFill/>
-            <a:prstDash val="solid"/>
-          </a:ln>
-        </p:spPr>
-        <p:txBody>
-          <a:bodyPr xmlns:a="http://schemas.openxmlformats.org/drawingml/2006/main" wrap="square" lIns="38100" tIns="19050" rIns="38100" bIns="19050" anchor="t">
-            <a:normAutofit fontScale="100000"/>
-          </a:bodyPr>
-          <a:lstStyle xmlns:a="http://schemas.openxmlformats.org/drawingml/2006/main"/>
-          <a:p xmlns:a="http://schemas.openxmlformats.org/drawingml/2006/main">
-            <a:pPr algn="ctr">
-              <a:lnSpc>
-                <a:spcPct val="105000"/>
-              </a:lnSpc>
-              <a:buNone/>
-              <a:defRPr sz="1500" b="1" i="0">
-                <a:solidFill>
-                  <a:srgbClr val="E76F51"/>
-                </a:solidFill>
-              </a:defRPr>
-            </a:pPr>
-            <a:r>
-              <a:rPr sz="1500" b="1" i="0">
-                <a:solidFill>
-                  <a:srgbClr val="E76F51"/>
-                </a:solidFill>
-              </a:rPr>
-              <a:t>插入到 2 之前</a:t>
-            </a:r>
-          </a:p>
-        </p:txBody>
-      </p:sp>
-      <p:sp>
-        <p:nvSpPr>
-          <p:cNvPr id="12" name="">
-            <a:extLst xmlns:a="http://schemas.openxmlformats.org/drawingml/2006/main">
-              <a:ext uri="{FF2B5EF4-FFF2-40B4-BE49-F238E27FC236}">
-                <a16:creationId xmlns:a16="http://schemas.microsoft.com/office/drawing/2014/main" id="{CA5507A9-13B6-4924-8083-C5D32B8EE51B}"/>
-              </a:ext>
-            </a:extLst>
-          </p:cNvPr>
-          <p:cNvSpPr>
-            <a:spLocks xmlns:a="http://schemas.openxmlformats.org/drawingml/2006/main" noGrp="1"/>
-          </p:cNvSpPr>
-          <p:nvPr/>
-        </p:nvSpPr>
-        <p:spPr>
-          <a:xfrm xmlns:a="http://schemas.openxmlformats.org/drawingml/2006/main">
-            <a:off x="4591050" y="2152650"/>
-            <a:ext cx="590550" cy="361950"/>
-          </a:xfrm>
-          <a:prstGeom xmlns:a="http://schemas.openxmlformats.org/drawingml/2006/main" prst="rect">
-            <a:avLst/>
-          </a:prstGeom>
-          <a:noFill xmlns:a="http://schemas.openxmlformats.org/drawingml/2006/main"/>
-          <a:ln xmlns:a="http://schemas.openxmlformats.org/drawingml/2006/main" w="0">
-            <a:noFill/>
-            <a:prstDash val="solid"/>
-          </a:ln>
-        </p:spPr>
-        <p:txBody>
-          <a:bodyPr xmlns:a="http://schemas.openxmlformats.org/drawingml/2006/main" wrap="square" lIns="38100" tIns="19050" rIns="38100" bIns="19050" anchor="t">
-            <a:normAutofit fontScale="96372"/>
-          </a:bodyPr>
-          <a:lstStyle xmlns:a="http://schemas.openxmlformats.org/drawingml/2006/main"/>
-          <a:p xmlns:a="http://schemas.openxmlformats.org/drawingml/2006/main">
-            <a:pPr algn="ctr">
-              <a:lnSpc>
-                <a:spcPct val="105000"/>
-              </a:lnSpc>
-              <a:buNone/>
-              <a:defRPr sz="2100" b="1" i="0">
-                <a:solidFill>
-                  <a:srgbClr val="E76F51"/>
-                </a:solidFill>
-              </a:defRPr>
-            </a:pPr>
-            <a:r>
-              <a:rPr sz="2100" b="1" i="0">
-                <a:solidFill>
-                  <a:srgbClr val="E76F51"/>
-                </a:solidFill>
-              </a:rPr>
-              <a:t>→</a:t>
-            </a:r>
-          </a:p>
-        </p:txBody>
-      </p:sp>
-      <p:sp>
-        <p:nvSpPr>
-          <p:cNvPr id="13" name="">
-            <a:extLst xmlns:a="http://schemas.openxmlformats.org/drawingml/2006/main">
-              <a:ext uri="{FF2B5EF4-FFF2-40B4-BE49-F238E27FC236}">
-                <a16:creationId xmlns:a16="http://schemas.microsoft.com/office/drawing/2014/main" id="{673FEF22-9FD9-4F79-B872-39473489CDBE}"/>
-              </a:ext>
-            </a:extLst>
-          </p:cNvPr>
-          <p:cNvSpPr>
-            <a:spLocks xmlns:a="http://schemas.openxmlformats.org/drawingml/2006/main" noGrp="1"/>
-          </p:cNvSpPr>
-          <p:nvPr/>
-        </p:nvSpPr>
-        <p:spPr>
-          <a:xfrm xmlns:a="http://schemas.openxmlformats.org/drawingml/2006/main">
-            <a:off x="5219700" y="2190750"/>
-            <a:ext cx="2343150" cy="323850"/>
-          </a:xfrm>
-          <a:prstGeom xmlns:a="http://schemas.openxmlformats.org/drawingml/2006/main" prst="rect">
-            <a:avLst/>
-          </a:prstGeom>
-          <a:noFill xmlns:a="http://schemas.openxmlformats.org/drawingml/2006/main"/>
-          <a:ln xmlns:a="http://schemas.openxmlformats.org/drawingml/2006/main" w="0">
-            <a:noFill/>
-            <a:prstDash val="solid"/>
-          </a:ln>
-        </p:spPr>
-        <p:txBody>
-          <a:bodyPr xmlns:a="http://schemas.openxmlformats.org/drawingml/2006/main" wrap="square" lIns="38100" tIns="19050" rIns="38100" bIns="19050" anchor="t">
-            <a:normAutofit fontScale="100000"/>
-          </a:bodyPr>
-          <a:lstStyle xmlns:a="http://schemas.openxmlformats.org/drawingml/2006/main"/>
-          <a:p xmlns:a="http://schemas.openxmlformats.org/drawingml/2006/main">
-            <a:pPr algn="ctr">
-              <a:lnSpc>
-                <a:spcPct val="105000"/>
-              </a:lnSpc>
-              <a:buNone/>
-              <a:defRPr sz="1575" b="1" i="0">
-                <a:solidFill>
-                  <a:srgbClr val="243B53"/>
-                </a:solidFill>
-              </a:defRPr>
-            </a:pPr>
-            <a:r>
-              <a:rPr sz="1575" b="1" i="0">
-                <a:solidFill>
-                  <a:srgbClr val="243B53"/>
-                </a:solidFill>
-              </a:rPr>
-              <a:t>1, 0, 2, 3, 4, 6, 7</a:t>
-            </a:r>
-          </a:p>
-        </p:txBody>
-      </p:sp>
-      <p:sp>
-        <p:nvSpPr>
-          <p:cNvPr id="14" name="">
-            <a:extLst xmlns:a="http://schemas.openxmlformats.org/drawingml/2006/main">
-              <a:ext uri="{FF2B5EF4-FFF2-40B4-BE49-F238E27FC236}">
-                <a16:creationId xmlns:a16="http://schemas.microsoft.com/office/drawing/2014/main" id="{09F5B03A-5E82-41FE-AA07-74E7CAC8DAF6}"/>
-              </a:ext>
-            </a:extLst>
-          </p:cNvPr>
-          <p:cNvSpPr>
-            <a:spLocks xmlns:a="http://schemas.openxmlformats.org/drawingml/2006/main" noGrp="1"/>
-          </p:cNvSpPr>
-          <p:nvPr/>
-        </p:nvSpPr>
-        <p:spPr>
-          <a:xfrm xmlns:a="http://schemas.openxmlformats.org/drawingml/2006/main">
-            <a:off x="1104900" y="2762250"/>
-            <a:ext cx="6381750" cy="323850"/>
-          </a:xfrm>
-          <a:prstGeom xmlns:a="http://schemas.openxmlformats.org/drawingml/2006/main" prst="rect">
-            <a:avLst/>
-          </a:prstGeom>
-          <a:noFill xmlns:a="http://schemas.openxmlformats.org/drawingml/2006/main"/>
-          <a:ln xmlns:a="http://schemas.openxmlformats.org/drawingml/2006/main" w="0">
-            <a:noFill/>
-            <a:prstDash val="solid"/>
-          </a:ln>
-        </p:spPr>
-        <p:txBody>
-          <a:bodyPr xmlns:a="http://schemas.openxmlformats.org/drawingml/2006/main" wrap="square" lIns="38100" tIns="19050" rIns="38100" bIns="19050" anchor="t">
-            <a:normAutofit fontScale="100000"/>
-          </a:bodyPr>
-          <a:lstStyle xmlns:a="http://schemas.openxmlformats.org/drawingml/2006/main"/>
-          <a:p xmlns:a="http://schemas.openxmlformats.org/drawingml/2006/main">
-            <a:pPr algn="ctr">
-              <a:lnSpc>
-                <a:spcPct val="105000"/>
-              </a:lnSpc>
-              <a:buNone/>
-              <a:defRPr sz="1425" b="0" i="0">
+              <a:defRPr sz="1350" b="0" i="0">
                 <a:solidFill>
                   <a:srgbClr val="52606D"/>
                 </a:solidFill>
               </a:defRPr>
             </a:pPr>
             <a:r>
-              <a:rPr sz="1425" b="0" i="0">
+              <a:rPr sz="1350" b="0" i="0">
                 <a:solidFill>
                   <a:srgbClr val="52606D"/>
                 </a:solidFill>
               </a:rPr>
-              <a:t>z₁ = 1 仍位于新点的错误一侧。</a:t>
+              <a:t>曲线顺序 (7, 0)；几何区间 [0, 7]</a:t>
             </a:r>
           </a:p>
         </p:txBody>
@@ -31195,23 +31195,23 @@
           <p:cNvPr id="15" name="">
             <a:extLst xmlns:a="http://schemas.openxmlformats.org/drawingml/2006/main">
               <a:ext uri="{FF2B5EF4-FFF2-40B4-BE49-F238E27FC236}">
-                <a16:creationId xmlns:a16="http://schemas.microsoft.com/office/drawing/2014/main" id="{7AAE0A43-4793-41A3-8F86-646FEAE207CA}"/>
-              </a:ext>
-            </a:extLst>
-          </p:cNvPr>
-          <p:cNvSpPr>
-            <a:spLocks xmlns:a="http://schemas.openxmlformats.org/drawingml/2006/main" noGrp="1"/>
-          </p:cNvSpPr>
-          <p:nvPr/>
-        </p:nvSpPr>
-        <p:spPr>
-          <a:xfrm xmlns:a="http://schemas.openxmlformats.org/drawingml/2006/main">
-            <a:off x="685800" y="3543300"/>
-            <a:ext cx="7239000" cy="1866900"/>
+                <a16:creationId xmlns:a16="http://schemas.microsoft.com/office/drawing/2014/main" id="{680CE808-B822-46E4-A7F9-0DC3A3910A18}"/>
+              </a:ext>
+            </a:extLst>
+          </p:cNvPr>
+          <p:cNvSpPr>
+            <a:spLocks xmlns:a="http://schemas.openxmlformats.org/drawingml/2006/main" noGrp="1"/>
+          </p:cNvSpPr>
+          <p:nvPr/>
+        </p:nvSpPr>
+        <p:spPr>
+          <a:xfrm xmlns:a="http://schemas.openxmlformats.org/drawingml/2006/main">
+            <a:off x="895350" y="3657600"/>
+            <a:ext cx="2095500" cy="457200"/>
           </a:xfrm>
           <a:prstGeom xmlns:a="http://schemas.openxmlformats.org/drawingml/2006/main" prst="roundRect">
             <a:avLst>
-              <a:gd name="adj" fmla="val 4082"/>
+              <a:gd name="adj" fmla="val 12500"/>
             </a:avLst>
           </a:prstGeom>
           <a:solidFill xmlns:a="http://schemas.openxmlformats.org/drawingml/2006/main">
@@ -31230,415 +31230,23 @@
           <p:cNvPr id="16" name="">
             <a:extLst xmlns:a="http://schemas.openxmlformats.org/drawingml/2006/main">
               <a:ext uri="{FF2B5EF4-FFF2-40B4-BE49-F238E27FC236}">
-                <a16:creationId xmlns:a16="http://schemas.microsoft.com/office/drawing/2014/main" id="{2974F43F-027D-4F03-9DF0-8B806B2FFC45}"/>
-              </a:ext>
-            </a:extLst>
-          </p:cNvPr>
-          <p:cNvSpPr>
-            <a:spLocks xmlns:a="http://schemas.openxmlformats.org/drawingml/2006/main" noGrp="1"/>
-          </p:cNvSpPr>
-          <p:nvPr/>
-        </p:nvSpPr>
-        <p:spPr>
-          <a:xfrm xmlns:a="http://schemas.openxmlformats.org/drawingml/2006/main">
-            <a:off x="914400" y="3714750"/>
-            <a:ext cx="6781800" cy="323850"/>
-          </a:xfrm>
-          <a:prstGeom xmlns:a="http://schemas.openxmlformats.org/drawingml/2006/main" prst="rect">
-            <a:avLst/>
-          </a:prstGeom>
-          <a:noFill xmlns:a="http://schemas.openxmlformats.org/drawingml/2006/main"/>
-          <a:ln xmlns:a="http://schemas.openxmlformats.org/drawingml/2006/main" w="0">
-            <a:noFill/>
-            <a:prstDash val="solid"/>
-          </a:ln>
-        </p:spPr>
-        <p:txBody>
-          <a:bodyPr xmlns:a="http://schemas.openxmlformats.org/drawingml/2006/main" wrap="square" lIns="38100" tIns="19050" rIns="38100" bIns="19050" anchor="t">
-            <a:normAutofit fontScale="100000"/>
-          </a:bodyPr>
-          <a:lstStyle xmlns:a="http://schemas.openxmlformats.org/drawingml/2006/main"/>
-          <a:p xmlns:a="http://schemas.openxmlformats.org/drawingml/2006/main">
-            <a:pPr algn="l">
-              <a:lnSpc>
-                <a:spcPct val="105000"/>
-              </a:lnSpc>
-              <a:buNone/>
-              <a:defRPr sz="1725" b="1" i="0">
-                <a:solidFill>
-                  <a:srgbClr val="2A9D8F"/>
-                </a:solidFill>
-              </a:defRPr>
-            </a:pPr>
-            <a:r>
-              <a:rPr sz="1725" b="1" i="0">
-                <a:solidFill>
-                  <a:srgbClr val="2A9D8F"/>
-                </a:solidFill>
-              </a:rPr>
-              <a:t>修正后的输出 anchor = z₁ = 1</a:t>
-            </a:r>
-          </a:p>
-        </p:txBody>
-      </p:sp>
-      <p:sp>
-        <p:nvSpPr>
-          <p:cNvPr id="17" name="">
-            <a:extLst xmlns:a="http://schemas.openxmlformats.org/drawingml/2006/main">
-              <a:ext uri="{FF2B5EF4-FFF2-40B4-BE49-F238E27FC236}">
-                <a16:creationId xmlns:a16="http://schemas.microsoft.com/office/drawing/2014/main" id="{0AA5D21A-357F-494A-AE57-95FFB35D6F26}"/>
-              </a:ext>
-            </a:extLst>
-          </p:cNvPr>
-          <p:cNvSpPr>
-            <a:spLocks xmlns:a="http://schemas.openxmlformats.org/drawingml/2006/main" noGrp="1"/>
-          </p:cNvSpPr>
-          <p:nvPr/>
-        </p:nvSpPr>
-        <p:spPr>
-          <a:xfrm xmlns:a="http://schemas.openxmlformats.org/drawingml/2006/main">
-            <a:off x="1009650" y="4305300"/>
-            <a:ext cx="1352550" cy="323850"/>
-          </a:xfrm>
-          <a:prstGeom xmlns:a="http://schemas.openxmlformats.org/drawingml/2006/main" prst="rect">
-            <a:avLst/>
-          </a:prstGeom>
-          <a:noFill xmlns:a="http://schemas.openxmlformats.org/drawingml/2006/main"/>
-          <a:ln xmlns:a="http://schemas.openxmlformats.org/drawingml/2006/main" w="0">
-            <a:noFill/>
-            <a:prstDash val="solid"/>
-          </a:ln>
-        </p:spPr>
-        <p:txBody>
-          <a:bodyPr xmlns:a="http://schemas.openxmlformats.org/drawingml/2006/main" wrap="square" lIns="38100" tIns="19050" rIns="38100" bIns="19050" anchor="t">
-            <a:normAutofit fontScale="100000"/>
-          </a:bodyPr>
-          <a:lstStyle xmlns:a="http://schemas.openxmlformats.org/drawingml/2006/main"/>
-          <a:p xmlns:a="http://schemas.openxmlformats.org/drawingml/2006/main">
-            <a:pPr algn="ctr">
-              <a:lnSpc>
-                <a:spcPct val="105000"/>
-              </a:lnSpc>
-              <a:buNone/>
-              <a:defRPr sz="1500" b="1" i="0">
-                <a:solidFill>
-                  <a:srgbClr val="102A43"/>
-                </a:solidFill>
-              </a:defRPr>
-            </a:pPr>
-            <a:r>
-              <a:rPr sz="1500" b="1" i="0">
-                <a:solidFill>
-                  <a:srgbClr val="102A43"/>
-                </a:solidFill>
-              </a:rPr>
-              <a:t>新点 0</a:t>
-            </a:r>
-          </a:p>
-        </p:txBody>
-      </p:sp>
-      <p:sp>
-        <p:nvSpPr>
-          <p:cNvPr id="18" name="">
-            <a:extLst xmlns:a="http://schemas.openxmlformats.org/drawingml/2006/main">
-              <a:ext uri="{FF2B5EF4-FFF2-40B4-BE49-F238E27FC236}">
-                <a16:creationId xmlns:a16="http://schemas.microsoft.com/office/drawing/2014/main" id="{F56629F8-2880-4947-ADCF-424A40E6FCAA}"/>
-              </a:ext>
-            </a:extLst>
-          </p:cNvPr>
-          <p:cNvSpPr>
-            <a:spLocks xmlns:a="http://schemas.openxmlformats.org/drawingml/2006/main" noGrp="1"/>
-          </p:cNvSpPr>
-          <p:nvPr/>
-        </p:nvSpPr>
-        <p:spPr>
-          <a:xfrm xmlns:a="http://schemas.openxmlformats.org/drawingml/2006/main">
-            <a:off x="2362200" y="4267200"/>
-            <a:ext cx="590550" cy="361950"/>
-          </a:xfrm>
-          <a:prstGeom xmlns:a="http://schemas.openxmlformats.org/drawingml/2006/main" prst="rect">
-            <a:avLst/>
-          </a:prstGeom>
-          <a:noFill xmlns:a="http://schemas.openxmlformats.org/drawingml/2006/main"/>
-          <a:ln xmlns:a="http://schemas.openxmlformats.org/drawingml/2006/main" w="0">
-            <a:noFill/>
-            <a:prstDash val="solid"/>
-          </a:ln>
-        </p:spPr>
-        <p:txBody>
-          <a:bodyPr xmlns:a="http://schemas.openxmlformats.org/drawingml/2006/main" wrap="square" lIns="38100" tIns="19050" rIns="38100" bIns="19050" anchor="t">
-            <a:normAutofit fontScale="96372"/>
-          </a:bodyPr>
-          <a:lstStyle xmlns:a="http://schemas.openxmlformats.org/drawingml/2006/main"/>
-          <a:p xmlns:a="http://schemas.openxmlformats.org/drawingml/2006/main">
-            <a:pPr algn="ctr">
-              <a:lnSpc>
-                <a:spcPct val="105000"/>
-              </a:lnSpc>
-              <a:buNone/>
-              <a:defRPr sz="2100" b="1" i="0">
-                <a:solidFill>
-                  <a:srgbClr val="2A9D8F"/>
-                </a:solidFill>
-              </a:defRPr>
-            </a:pPr>
-            <a:r>
-              <a:rPr sz="2100" b="1" i="0">
-                <a:solidFill>
-                  <a:srgbClr val="2A9D8F"/>
-                </a:solidFill>
-              </a:rPr>
-              <a:t>→</a:t>
-            </a:r>
-          </a:p>
-        </p:txBody>
-      </p:sp>
-      <p:sp>
-        <p:nvSpPr>
-          <p:cNvPr id="19" name="">
-            <a:extLst xmlns:a="http://schemas.openxmlformats.org/drawingml/2006/main">
-              <a:ext uri="{FF2B5EF4-FFF2-40B4-BE49-F238E27FC236}">
-                <a16:creationId xmlns:a16="http://schemas.microsoft.com/office/drawing/2014/main" id="{C33638F6-AE44-4517-87D9-887F09762D18}"/>
-              </a:ext>
-            </a:extLst>
-          </p:cNvPr>
-          <p:cNvSpPr>
-            <a:spLocks xmlns:a="http://schemas.openxmlformats.org/drawingml/2006/main" noGrp="1"/>
-          </p:cNvSpPr>
-          <p:nvPr/>
-        </p:nvSpPr>
-        <p:spPr>
-          <a:xfrm xmlns:a="http://schemas.openxmlformats.org/drawingml/2006/main">
-            <a:off x="2971800" y="4305300"/>
-            <a:ext cx="1619250" cy="323850"/>
-          </a:xfrm>
-          <a:prstGeom xmlns:a="http://schemas.openxmlformats.org/drawingml/2006/main" prst="rect">
-            <a:avLst/>
-          </a:prstGeom>
-          <a:noFill xmlns:a="http://schemas.openxmlformats.org/drawingml/2006/main"/>
-          <a:ln xmlns:a="http://schemas.openxmlformats.org/drawingml/2006/main" w="0">
-            <a:noFill/>
-            <a:prstDash val="solid"/>
-          </a:ln>
-        </p:spPr>
-        <p:txBody>
-          <a:bodyPr xmlns:a="http://schemas.openxmlformats.org/drawingml/2006/main" wrap="square" lIns="38100" tIns="19050" rIns="38100" bIns="19050" anchor="t">
-            <a:normAutofit fontScale="100000"/>
-          </a:bodyPr>
-          <a:lstStyle xmlns:a="http://schemas.openxmlformats.org/drawingml/2006/main"/>
-          <a:p xmlns:a="http://schemas.openxmlformats.org/drawingml/2006/main">
-            <a:pPr algn="ctr">
-              <a:lnSpc>
-                <a:spcPct val="105000"/>
-              </a:lnSpc>
-              <a:buNone/>
-              <a:defRPr sz="1500" b="1" i="0">
-                <a:solidFill>
-                  <a:srgbClr val="2A9D8F"/>
-                </a:solidFill>
-              </a:defRPr>
-            </a:pPr>
-            <a:r>
-              <a:rPr sz="1500" b="1" i="0">
-                <a:solidFill>
-                  <a:srgbClr val="2A9D8F"/>
-                </a:solidFill>
-              </a:rPr>
-              <a:t>插入到 z₁ 之前</a:t>
-            </a:r>
-          </a:p>
-        </p:txBody>
-      </p:sp>
-      <p:sp>
-        <p:nvSpPr>
-          <p:cNvPr id="20" name="">
-            <a:extLst xmlns:a="http://schemas.openxmlformats.org/drawingml/2006/main">
-              <a:ext uri="{FF2B5EF4-FFF2-40B4-BE49-F238E27FC236}">
-                <a16:creationId xmlns:a16="http://schemas.microsoft.com/office/drawing/2014/main" id="{5E5CA889-3395-4F17-82F2-84B8920C34A7}"/>
-              </a:ext>
-            </a:extLst>
-          </p:cNvPr>
-          <p:cNvSpPr>
-            <a:spLocks xmlns:a="http://schemas.openxmlformats.org/drawingml/2006/main" noGrp="1"/>
-          </p:cNvSpPr>
-          <p:nvPr/>
-        </p:nvSpPr>
-        <p:spPr>
-          <a:xfrm xmlns:a="http://schemas.openxmlformats.org/drawingml/2006/main">
-            <a:off x="4591050" y="4267200"/>
-            <a:ext cx="590550" cy="361950"/>
-          </a:xfrm>
-          <a:prstGeom xmlns:a="http://schemas.openxmlformats.org/drawingml/2006/main" prst="rect">
-            <a:avLst/>
-          </a:prstGeom>
-          <a:noFill xmlns:a="http://schemas.openxmlformats.org/drawingml/2006/main"/>
-          <a:ln xmlns:a="http://schemas.openxmlformats.org/drawingml/2006/main" w="0">
-            <a:noFill/>
-            <a:prstDash val="solid"/>
-          </a:ln>
-        </p:spPr>
-        <p:txBody>
-          <a:bodyPr xmlns:a="http://schemas.openxmlformats.org/drawingml/2006/main" wrap="square" lIns="38100" tIns="19050" rIns="38100" bIns="19050" anchor="t">
-            <a:normAutofit fontScale="96372"/>
-          </a:bodyPr>
-          <a:lstStyle xmlns:a="http://schemas.openxmlformats.org/drawingml/2006/main"/>
-          <a:p xmlns:a="http://schemas.openxmlformats.org/drawingml/2006/main">
-            <a:pPr algn="ctr">
-              <a:lnSpc>
-                <a:spcPct val="105000"/>
-              </a:lnSpc>
-              <a:buNone/>
-              <a:defRPr sz="2100" b="1" i="0">
-                <a:solidFill>
-                  <a:srgbClr val="2A9D8F"/>
-                </a:solidFill>
-              </a:defRPr>
-            </a:pPr>
-            <a:r>
-              <a:rPr sz="2100" b="1" i="0">
-                <a:solidFill>
-                  <a:srgbClr val="2A9D8F"/>
-                </a:solidFill>
-              </a:rPr>
-              <a:t>→</a:t>
-            </a:r>
-          </a:p>
-        </p:txBody>
-      </p:sp>
-      <p:sp>
-        <p:nvSpPr>
-          <p:cNvPr id="21" name="">
-            <a:extLst xmlns:a="http://schemas.openxmlformats.org/drawingml/2006/main">
-              <a:ext uri="{FF2B5EF4-FFF2-40B4-BE49-F238E27FC236}">
-                <a16:creationId xmlns:a16="http://schemas.microsoft.com/office/drawing/2014/main" id="{245C9C8C-F163-49EA-8829-5E9EB7C355AB}"/>
-              </a:ext>
-            </a:extLst>
-          </p:cNvPr>
-          <p:cNvSpPr>
-            <a:spLocks xmlns:a="http://schemas.openxmlformats.org/drawingml/2006/main" noGrp="1"/>
-          </p:cNvSpPr>
-          <p:nvPr/>
-        </p:nvSpPr>
-        <p:spPr>
-          <a:xfrm xmlns:a="http://schemas.openxmlformats.org/drawingml/2006/main">
-            <a:off x="5219700" y="4305300"/>
-            <a:ext cx="2343150" cy="323850"/>
-          </a:xfrm>
-          <a:prstGeom xmlns:a="http://schemas.openxmlformats.org/drawingml/2006/main" prst="rect">
-            <a:avLst/>
-          </a:prstGeom>
-          <a:noFill xmlns:a="http://schemas.openxmlformats.org/drawingml/2006/main"/>
-          <a:ln xmlns:a="http://schemas.openxmlformats.org/drawingml/2006/main" w="0">
-            <a:noFill/>
-            <a:prstDash val="solid"/>
-          </a:ln>
-        </p:spPr>
-        <p:txBody>
-          <a:bodyPr xmlns:a="http://schemas.openxmlformats.org/drawingml/2006/main" wrap="square" lIns="38100" tIns="19050" rIns="38100" bIns="19050" anchor="t">
-            <a:normAutofit fontScale="100000"/>
-          </a:bodyPr>
-          <a:lstStyle xmlns:a="http://schemas.openxmlformats.org/drawingml/2006/main"/>
-          <a:p xmlns:a="http://schemas.openxmlformats.org/drawingml/2006/main">
-            <a:pPr algn="ctr">
-              <a:lnSpc>
-                <a:spcPct val="105000"/>
-              </a:lnSpc>
-              <a:buNone/>
-              <a:defRPr sz="1575" b="1" i="0">
-                <a:solidFill>
-                  <a:srgbClr val="243B53"/>
-                </a:solidFill>
-              </a:defRPr>
-            </a:pPr>
-            <a:r>
-              <a:rPr sz="1575" b="1" i="0">
-                <a:solidFill>
-                  <a:srgbClr val="243B53"/>
-                </a:solidFill>
-              </a:rPr>
-              <a:t>0, 1, 2, 3, 4, 6, 7</a:t>
-            </a:r>
-          </a:p>
-        </p:txBody>
-      </p:sp>
-      <p:sp>
-        <p:nvSpPr>
-          <p:cNvPr id="22" name="">
-            <a:extLst xmlns:a="http://schemas.openxmlformats.org/drawingml/2006/main">
-              <a:ext uri="{FF2B5EF4-FFF2-40B4-BE49-F238E27FC236}">
-                <a16:creationId xmlns:a16="http://schemas.microsoft.com/office/drawing/2014/main" id="{71F48FC6-F188-4D5F-8260-087E1971F33B}"/>
-              </a:ext>
-            </a:extLst>
-          </p:cNvPr>
-          <p:cNvSpPr>
-            <a:spLocks xmlns:a="http://schemas.openxmlformats.org/drawingml/2006/main" noGrp="1"/>
-          </p:cNvSpPr>
-          <p:nvPr/>
-        </p:nvSpPr>
-        <p:spPr>
-          <a:xfrm xmlns:a="http://schemas.openxmlformats.org/drawingml/2006/main">
-            <a:off x="1104900" y="4876800"/>
-            <a:ext cx="6381750" cy="323850"/>
-          </a:xfrm>
-          <a:prstGeom xmlns:a="http://schemas.openxmlformats.org/drawingml/2006/main" prst="rect">
-            <a:avLst/>
-          </a:prstGeom>
-          <a:noFill xmlns:a="http://schemas.openxmlformats.org/drawingml/2006/main"/>
-          <a:ln xmlns:a="http://schemas.openxmlformats.org/drawingml/2006/main" w="0">
-            <a:noFill/>
-            <a:prstDash val="solid"/>
-          </a:ln>
-        </p:spPr>
-        <p:txBody>
-          <a:bodyPr xmlns:a="http://schemas.openxmlformats.org/drawingml/2006/main" wrap="square" lIns="38100" tIns="19050" rIns="38100" bIns="19050" anchor="t">
-            <a:normAutofit fontScale="100000"/>
-          </a:bodyPr>
-          <a:lstStyle xmlns:a="http://schemas.openxmlformats.org/drawingml/2006/main"/>
-          <a:p xmlns:a="http://schemas.openxmlformats.org/drawingml/2006/main">
-            <a:pPr algn="ctr">
-              <a:lnSpc>
-                <a:spcPct val="105000"/>
-              </a:lnSpc>
-              <a:buNone/>
-              <a:defRPr sz="1425" b="0" i="0">
-                <a:solidFill>
-                  <a:srgbClr val="52606D"/>
-                </a:solidFill>
-              </a:defRPr>
-            </a:pPr>
-            <a:r>
-              <a:rPr sz="1425" b="0" i="0">
-                <a:solidFill>
-                  <a:srgbClr val="52606D"/>
-                </a:solidFill>
-              </a:rPr>
-              <a:t>维护的 partial order 现在与几何坐标轴顺序一致。</a:t>
-            </a:r>
-          </a:p>
-        </p:txBody>
-      </p:sp>
-      <p:sp>
-        <p:nvSpPr>
-          <p:cNvPr id="23" name="">
-            <a:extLst xmlns:a="http://schemas.openxmlformats.org/drawingml/2006/main">
-              <a:ext uri="{FF2B5EF4-FFF2-40B4-BE49-F238E27FC236}">
-                <a16:creationId xmlns:a16="http://schemas.microsoft.com/office/drawing/2014/main" id="{168A2150-7912-4755-B72E-D07BCC9C9D3B}"/>
-              </a:ext>
-            </a:extLst>
-          </p:cNvPr>
-          <p:cNvSpPr>
-            <a:spLocks xmlns:a="http://schemas.openxmlformats.org/drawingml/2006/main" noGrp="1"/>
-          </p:cNvSpPr>
-          <p:nvPr/>
-        </p:nvSpPr>
-        <p:spPr>
-          <a:xfrm xmlns:a="http://schemas.openxmlformats.org/drawingml/2006/main">
-            <a:off x="8286750" y="1524000"/>
-            <a:ext cx="3143250" cy="1562100"/>
+                <a16:creationId xmlns:a16="http://schemas.microsoft.com/office/drawing/2014/main" id="{A6572AEB-974D-477D-B50F-CCA1CD6E0494}"/>
+              </a:ext>
+            </a:extLst>
+          </p:cNvPr>
+          <p:cNvSpPr>
+            <a:spLocks xmlns:a="http://schemas.openxmlformats.org/drawingml/2006/main" noGrp="1"/>
+          </p:cNvSpPr>
+          <p:nvPr/>
+        </p:nvSpPr>
+        <p:spPr>
+          <a:xfrm xmlns:a="http://schemas.openxmlformats.org/drawingml/2006/main">
+            <a:off x="3562350" y="3657600"/>
+            <a:ext cx="2095500" cy="457200"/>
           </a:xfrm>
           <a:prstGeom xmlns:a="http://schemas.openxmlformats.org/drawingml/2006/main" prst="roundRect">
             <a:avLst>
-              <a:gd name="adj" fmla="val 4878"/>
+              <a:gd name="adj" fmla="val 12500"/>
             </a:avLst>
           </a:prstGeom>
           <a:solidFill xmlns:a="http://schemas.openxmlformats.org/drawingml/2006/main">
@@ -31646,233 +31254,586 @@
           </a:solidFill>
           <a:ln xmlns:a="http://schemas.openxmlformats.org/drawingml/2006/main" w="11430">
             <a:solidFill>
-              <a:srgbClr val="D9E2EC"/>
+              <a:srgbClr val="52606D"/>
             </a:solidFill>
             <a:prstDash val="solid"/>
           </a:ln>
         </p:spPr>
       </p:sp>
-      <p:sp>
-        <p:nvSpPr>
-          <p:cNvPr id="24" name="">
-            <a:extLst xmlns:a="http://schemas.openxmlformats.org/drawingml/2006/main">
-              <a:ext uri="{FF2B5EF4-FFF2-40B4-BE49-F238E27FC236}">
-                <a16:creationId xmlns:a16="http://schemas.microsoft.com/office/drawing/2014/main" id="{6702EF20-900F-4213-84A1-832499BC9913}"/>
-              </a:ext>
-            </a:extLst>
-          </p:cNvPr>
-          <p:cNvSpPr>
-            <a:spLocks xmlns:a="http://schemas.openxmlformats.org/drawingml/2006/main" noGrp="1"/>
-          </p:cNvSpPr>
-          <p:nvPr/>
-        </p:nvSpPr>
-        <p:spPr>
-          <a:xfrm xmlns:a="http://schemas.openxmlformats.org/drawingml/2006/main">
-            <a:off x="8496300" y="1695450"/>
-            <a:ext cx="2724150" cy="247650"/>
-          </a:xfrm>
-          <a:prstGeom xmlns:a="http://schemas.openxmlformats.org/drawingml/2006/main" prst="rect">
-            <a:avLst/>
-          </a:prstGeom>
-          <a:noFill xmlns:a="http://schemas.openxmlformats.org/drawingml/2006/main"/>
-          <a:ln xmlns:a="http://schemas.openxmlformats.org/drawingml/2006/main" w="0">
-            <a:noFill/>
-            <a:prstDash val="solid"/>
-          </a:ln>
-        </p:spPr>
-        <p:txBody>
-          <a:bodyPr xmlns:a="http://schemas.openxmlformats.org/drawingml/2006/main" wrap="square" lIns="38100" tIns="19050" rIns="38100" bIns="19050" anchor="t">
-            <a:normAutofit fontScale="100000"/>
-          </a:bodyPr>
-          <a:lstStyle xmlns:a="http://schemas.openxmlformats.org/drawingml/2006/main"/>
-          <a:p xmlns:a="http://schemas.openxmlformats.org/drawingml/2006/main">
-            <a:pPr algn="l">
-              <a:lnSpc>
-                <a:spcPct val="105000"/>
-              </a:lnSpc>
-              <a:buNone/>
-              <a:defRPr sz="1200" b="1" i="0">
-                <a:solidFill>
-                  <a:srgbClr val="7B8794"/>
-                </a:solidFill>
-              </a:defRPr>
-            </a:pPr>
-            <a:r>
-              <a:rPr sz="1200" b="1" i="0">
-                <a:solidFill>
-                  <a:srgbClr val="7B8794"/>
-                </a:solidFill>
-              </a:rPr>
-              <a:t>有效前缀</a:t>
-            </a:r>
-          </a:p>
-        </p:txBody>
-      </p:sp>
-      <p:sp>
-        <p:nvSpPr>
-          <p:cNvPr id="25" name="">
-            <a:extLst xmlns:a="http://schemas.openxmlformats.org/drawingml/2006/main">
-              <a:ext uri="{FF2B5EF4-FFF2-40B4-BE49-F238E27FC236}">
-                <a16:creationId xmlns:a16="http://schemas.microsoft.com/office/drawing/2014/main" id="{C20C116E-979E-4610-BA2A-D59E9FD0A8C1}"/>
-              </a:ext>
-            </a:extLst>
-          </p:cNvPr>
-          <p:cNvSpPr>
-            <a:spLocks xmlns:a="http://schemas.openxmlformats.org/drawingml/2006/main" noGrp="1"/>
-          </p:cNvSpPr>
-          <p:nvPr/>
-        </p:nvSpPr>
-        <p:spPr>
-          <a:xfrm xmlns:a="http://schemas.openxmlformats.org/drawingml/2006/main">
-            <a:off x="8496300" y="2000250"/>
-            <a:ext cx="2724150" cy="495300"/>
-          </a:xfrm>
-          <a:prstGeom xmlns:a="http://schemas.openxmlformats.org/drawingml/2006/main" prst="rect">
-            <a:avLst/>
-          </a:prstGeom>
-          <a:noFill xmlns:a="http://schemas.openxmlformats.org/drawingml/2006/main"/>
-          <a:ln xmlns:a="http://schemas.openxmlformats.org/drawingml/2006/main" w="0">
-            <a:noFill/>
-            <a:prstDash val="solid"/>
-          </a:ln>
-        </p:spPr>
-        <p:txBody>
-          <a:bodyPr xmlns:a="http://schemas.openxmlformats.org/drawingml/2006/main" wrap="square" lIns="38100" tIns="19050" rIns="38100" bIns="19050" anchor="ctr">
-            <a:normAutofit fontScale="100000"/>
-          </a:bodyPr>
-          <a:lstStyle xmlns:a="http://schemas.openxmlformats.org/drawingml/2006/main"/>
-          <a:p xmlns:a="http://schemas.openxmlformats.org/drawingml/2006/main">
-            <a:pPr algn="ctr">
-              <a:lnSpc>
-                <a:spcPct val="105000"/>
-              </a:lnSpc>
-              <a:buNone/>
-              <a:defRPr sz="1575" b="1" i="0">
-                <a:solidFill>
-                  <a:srgbClr val="102A43"/>
-                </a:solidFill>
-              </a:defRPr>
-            </a:pPr>
-            <a:r>
-              <a:rPr sz="1575" b="1" i="0">
-                <a:solidFill>
-                  <a:srgbClr val="102A43"/>
-                </a:solidFill>
-              </a:rPr>
-              <a:t>(1, 2, 3, 4, 6, 7, 0)</a:t>
-            </a:r>
-          </a:p>
-        </p:txBody>
-      </p:sp>
-      <p:sp>
-        <p:nvSpPr>
-          <p:cNvPr id="26" name="">
-            <a:extLst xmlns:a="http://schemas.openxmlformats.org/drawingml/2006/main">
-              <a:ext uri="{FF2B5EF4-FFF2-40B4-BE49-F238E27FC236}">
-                <a16:creationId xmlns:a16="http://schemas.microsoft.com/office/drawing/2014/main" id="{4BF69F51-F926-4711-91A3-B6C40ADD4701}"/>
-              </a:ext>
-            </a:extLst>
-          </p:cNvPr>
-          <p:cNvSpPr>
-            <a:spLocks xmlns:a="http://schemas.openxmlformats.org/drawingml/2006/main" noGrp="1"/>
-          </p:cNvSpPr>
-          <p:nvPr/>
-        </p:nvSpPr>
-        <p:spPr>
-          <a:xfrm xmlns:a="http://schemas.openxmlformats.org/drawingml/2006/main">
-            <a:off x="8496300" y="2552700"/>
-            <a:ext cx="2724150" cy="361950"/>
-          </a:xfrm>
-          <a:prstGeom xmlns:a="http://schemas.openxmlformats.org/drawingml/2006/main" prst="rect">
-            <a:avLst/>
-          </a:prstGeom>
-          <a:noFill xmlns:a="http://schemas.openxmlformats.org/drawingml/2006/main"/>
-          <a:ln xmlns:a="http://schemas.openxmlformats.org/drawingml/2006/main" w="0">
-            <a:noFill/>
-            <a:prstDash val="solid"/>
-          </a:ln>
-        </p:spPr>
-        <p:txBody>
-          <a:bodyPr xmlns:a="http://schemas.openxmlformats.org/drawingml/2006/main" wrap="square" lIns="38100" tIns="19050" rIns="38100" bIns="19050" anchor="ctr">
-            <a:normAutofit fontScale="99941"/>
-          </a:bodyPr>
-          <a:lstStyle xmlns:a="http://schemas.openxmlformats.org/drawingml/2006/main"/>
-          <a:p xmlns:a="http://schemas.openxmlformats.org/drawingml/2006/main">
-            <a:pPr algn="ctr">
-              <a:lnSpc>
-                <a:spcPct val="105000"/>
-              </a:lnSpc>
-              <a:buNone/>
-              <a:defRPr sz="2025" b="1" i="0">
-                <a:solidFill>
-                  <a:srgbClr val="E76F51"/>
-                </a:solidFill>
-              </a:defRPr>
-            </a:pPr>
-            <a:r>
-              <a:rPr sz="2025" b="1" i="0">
-                <a:solidFill>
-                  <a:srgbClr val="E76F51"/>
-                </a:solidFill>
-              </a:rPr>
-              <a:t>0 &lt; z₁ &lt; 2</a:t>
-            </a:r>
-          </a:p>
-        </p:txBody>
-      </p:sp>
-      <p:sp>
-        <p:nvSpPr>
-          <p:cNvPr id="27" name="">
-            <a:extLst xmlns:a="http://schemas.openxmlformats.org/drawingml/2006/main">
-              <a:ext uri="{FF2B5EF4-FFF2-40B4-BE49-F238E27FC236}">
-                <a16:creationId xmlns:a16="http://schemas.microsoft.com/office/drawing/2014/main" id="{9A6E0AC0-56F6-4CB5-BD4A-7D2397EB68A7}"/>
-              </a:ext>
-            </a:extLst>
-          </p:cNvPr>
-          <p:cNvSpPr>
-            <a:spLocks xmlns:a="http://schemas.openxmlformats.org/drawingml/2006/main" noGrp="1"/>
-          </p:cNvSpPr>
-          <p:nvPr/>
-        </p:nvSpPr>
-        <p:spPr>
-          <a:xfrm xmlns:a="http://schemas.openxmlformats.org/drawingml/2006/main">
-            <a:off x="8286750" y="3543300"/>
-            <a:ext cx="3143250" cy="1657350"/>
-          </a:xfrm>
-          <a:prstGeom xmlns:a="http://schemas.openxmlformats.org/drawingml/2006/main" prst="roundRect">
-            <a:avLst>
-              <a:gd name="adj" fmla="val 4598"/>
-            </a:avLst>
-          </a:prstGeom>
-          <a:solidFill xmlns:a="http://schemas.openxmlformats.org/drawingml/2006/main">
-            <a:srgbClr val="FFFFFF"/>
-          </a:solidFill>
-          <a:ln xmlns:a="http://schemas.openxmlformats.org/drawingml/2006/main" w="14288">
+      <p:cxnSp>
+        <p:nvCxnSpPr>
+          <p:cNvPr id="52" name=""/>
+          <p:cNvCxnSpPr>
+            <a:stCxn xmlns:a="http://schemas.openxmlformats.org/drawingml/2006/main" id="12" idx="1"/>
+            <a:endCxn xmlns:a="http://schemas.openxmlformats.org/drawingml/2006/main" id="15" idx="0"/>
+          </p:cNvCxnSpPr>
+          <p:nvPr/>
+        </p:nvCxnSpPr>
+        <p:spPr>
+          <a:xfrm xmlns:a="http://schemas.openxmlformats.org/drawingml/2006/main" flipH="1">
+            <a:off x="1943100" y="3162300"/>
+            <a:ext cx="247650" cy="495300"/>
+          </a:xfrm>
+          <a:prstGeom xmlns:a="http://schemas.openxmlformats.org/drawingml/2006/main" prst="bentConnector2">
+            <a:avLst/>
+          </a:prstGeom>
+          <a:ln xmlns:a="http://schemas.openxmlformats.org/drawingml/2006/main" w="19050">
             <a:solidFill>
               <a:srgbClr val="2A9D8F"/>
             </a:solidFill>
             <a:prstDash val="solid"/>
-          </a:ln>
-        </p:spPr>
+            <a:tailEnd type="arrow" w="sm" len="sm"/>
+          </a:ln>
+        </p:spPr>
+      </p:cxnSp>
+      <p:cxnSp>
+        <p:nvCxnSpPr>
+          <p:cNvPr id="53" name=""/>
+          <p:cNvCxnSpPr>
+            <a:stCxn xmlns:a="http://schemas.openxmlformats.org/drawingml/2006/main" id="12" idx="3"/>
+            <a:endCxn xmlns:a="http://schemas.openxmlformats.org/drawingml/2006/main" id="16" idx="0"/>
+          </p:cNvCxnSpPr>
+          <p:nvPr/>
+        </p:nvCxnSpPr>
+        <p:spPr>
+          <a:xfrm xmlns:a="http://schemas.openxmlformats.org/drawingml/2006/main">
+            <a:off x="4476750" y="3162300"/>
+            <a:ext cx="228600" cy="495300"/>
+          </a:xfrm>
+          <a:prstGeom xmlns:a="http://schemas.openxmlformats.org/drawingml/2006/main" prst="bentConnector4">
+            <a:avLst/>
+          </a:prstGeom>
+          <a:ln xmlns:a="http://schemas.openxmlformats.org/drawingml/2006/main" w="19050">
+            <a:solidFill>
+              <a:srgbClr val="52606D"/>
+            </a:solidFill>
+            <a:prstDash val="solid"/>
+            <a:tailEnd type="arrow" w="sm" len="sm"/>
+          </a:ln>
+        </p:spPr>
+      </p:cxnSp>
+      <p:sp>
+        <p:nvSpPr>
+          <p:cNvPr id="19" name="">
+            <a:extLst xmlns:a="http://schemas.openxmlformats.org/drawingml/2006/main">
+              <a:ext uri="{FF2B5EF4-FFF2-40B4-BE49-F238E27FC236}">
+                <a16:creationId xmlns:a16="http://schemas.microsoft.com/office/drawing/2014/main" id="{F635D5A9-6041-4CCD-8575-36D97E63CAD1}"/>
+              </a:ext>
+            </a:extLst>
+          </p:cNvPr>
+          <p:cNvSpPr>
+            <a:spLocks xmlns:a="http://schemas.openxmlformats.org/drawingml/2006/main" noGrp="1"/>
+          </p:cNvSpPr>
+          <p:nvPr/>
+        </p:nvSpPr>
+        <p:spPr>
+          <a:xfrm xmlns:a="http://schemas.openxmlformats.org/drawingml/2006/main">
+            <a:off x="971550" y="3705225"/>
+            <a:ext cx="1943100" cy="342900"/>
+          </a:xfrm>
+          <a:prstGeom xmlns:a="http://schemas.openxmlformats.org/drawingml/2006/main" prst="rect">
+            <a:avLst/>
+          </a:prstGeom>
+          <a:noFill xmlns:a="http://schemas.openxmlformats.org/drawingml/2006/main"/>
+          <a:ln xmlns:a="http://schemas.openxmlformats.org/drawingml/2006/main" w="0">
+            <a:noFill/>
+            <a:prstDash val="solid"/>
+          </a:ln>
+        </p:spPr>
+        <p:txBody>
+          <a:bodyPr xmlns:a="http://schemas.openxmlformats.org/drawingml/2006/main" wrap="square" lIns="38100" tIns="19050" rIns="38100" bIns="19050" anchor="t">
+            <a:normAutofit fontScale="100000"/>
+          </a:bodyPr>
+          <a:lstStyle xmlns:a="http://schemas.openxmlformats.org/drawingml/2006/main"/>
+          <a:p xmlns:a="http://schemas.openxmlformats.org/drawingml/2006/main">
+            <a:pPr algn="ctr">
+              <a:lnSpc>
+                <a:spcPct val="105000"/>
+              </a:lnSpc>
+              <a:buNone/>
+              <a:defRPr sz="1800" b="1" i="0">
+                <a:solidFill>
+                  <a:srgbClr val="2A9D8F"/>
+                </a:solidFill>
+              </a:defRPr>
+            </a:pPr>
+            <a:r>
+              <a:rPr sz="1800" b="1" i="0">
+                <a:solidFill>
+                  <a:srgbClr val="2A9D8F"/>
+                </a:solidFill>
+              </a:rPr>
+              <a:t>P₃ = (2, 3)</a:t>
+            </a:r>
+          </a:p>
+        </p:txBody>
+      </p:sp>
+      <p:sp>
+        <p:nvSpPr>
+          <p:cNvPr id="20" name="">
+            <a:extLst xmlns:a="http://schemas.openxmlformats.org/drawingml/2006/main">
+              <a:ext uri="{FF2B5EF4-FFF2-40B4-BE49-F238E27FC236}">
+                <a16:creationId xmlns:a16="http://schemas.microsoft.com/office/drawing/2014/main" id="{08C50C4B-E128-4E86-8E65-C486F3B2C7AF}"/>
+              </a:ext>
+            </a:extLst>
+          </p:cNvPr>
+          <p:cNvSpPr>
+            <a:spLocks xmlns:a="http://schemas.openxmlformats.org/drawingml/2006/main" noGrp="1"/>
+          </p:cNvSpPr>
+          <p:nvPr/>
+        </p:nvSpPr>
+        <p:spPr>
+          <a:xfrm xmlns:a="http://schemas.openxmlformats.org/drawingml/2006/main">
+            <a:off x="3638550" y="3705225"/>
+            <a:ext cx="1943100" cy="342900"/>
+          </a:xfrm>
+          <a:prstGeom xmlns:a="http://schemas.openxmlformats.org/drawingml/2006/main" prst="rect">
+            <a:avLst/>
+          </a:prstGeom>
+          <a:noFill xmlns:a="http://schemas.openxmlformats.org/drawingml/2006/main"/>
+          <a:ln xmlns:a="http://schemas.openxmlformats.org/drawingml/2006/main" w="0">
+            <a:noFill/>
+            <a:prstDash val="solid"/>
+          </a:ln>
+        </p:spPr>
+        <p:txBody>
+          <a:bodyPr xmlns:a="http://schemas.openxmlformats.org/drawingml/2006/main" wrap="square" lIns="38100" tIns="19050" rIns="38100" bIns="19050" anchor="t">
+            <a:normAutofit fontScale="100000"/>
+          </a:bodyPr>
+          <a:lstStyle xmlns:a="http://schemas.openxmlformats.org/drawingml/2006/main"/>
+          <a:p xmlns:a="http://schemas.openxmlformats.org/drawingml/2006/main">
+            <a:pPr algn="ctr">
+              <a:lnSpc>
+                <a:spcPct val="105000"/>
+              </a:lnSpc>
+              <a:buNone/>
+              <a:defRPr sz="1800" b="1" i="0">
+                <a:solidFill>
+                  <a:srgbClr val="102A43"/>
+                </a:solidFill>
+              </a:defRPr>
+            </a:pPr>
+            <a:r>
+              <a:rPr sz="1800" b="1" i="0">
+                <a:solidFill>
+                  <a:srgbClr val="102A43"/>
+                </a:solidFill>
+              </a:rPr>
+              <a:t>P₅ = (4, 6)</a:t>
+            </a:r>
+          </a:p>
+        </p:txBody>
+      </p:sp>
+      <p:sp>
+        <p:nvSpPr>
+          <p:cNvPr id="21" name="">
+            <a:extLst xmlns:a="http://schemas.openxmlformats.org/drawingml/2006/main">
+              <a:ext uri="{FF2B5EF4-FFF2-40B4-BE49-F238E27FC236}">
+                <a16:creationId xmlns:a16="http://schemas.microsoft.com/office/drawing/2014/main" id="{08ABC46C-9331-4CA1-A5DB-2D30AFC1A18F}"/>
+              </a:ext>
+            </a:extLst>
+          </p:cNvPr>
+          <p:cNvSpPr>
+            <a:spLocks xmlns:a="http://schemas.openxmlformats.org/drawingml/2006/main" noGrp="1"/>
+          </p:cNvSpPr>
+          <p:nvPr/>
+        </p:nvSpPr>
+        <p:spPr>
+          <a:xfrm xmlns:a="http://schemas.openxmlformats.org/drawingml/2006/main">
+            <a:off x="933450" y="4133850"/>
+            <a:ext cx="2000250" cy="247650"/>
+          </a:xfrm>
+          <a:prstGeom xmlns:a="http://schemas.openxmlformats.org/drawingml/2006/main" prst="rect">
+            <a:avLst/>
+          </a:prstGeom>
+          <a:noFill xmlns:a="http://schemas.openxmlformats.org/drawingml/2006/main"/>
+          <a:ln xmlns:a="http://schemas.openxmlformats.org/drawingml/2006/main" w="0">
+            <a:noFill/>
+            <a:prstDash val="solid"/>
+          </a:ln>
+        </p:spPr>
+        <p:txBody>
+          <a:bodyPr xmlns:a="http://schemas.openxmlformats.org/drawingml/2006/main" wrap="square" lIns="38100" tIns="19050" rIns="38100" bIns="19050" anchor="t">
+            <a:normAutofit fontScale="97002"/>
+          </a:bodyPr>
+          <a:lstStyle xmlns:a="http://schemas.openxmlformats.org/drawingml/2006/main"/>
+          <a:p xmlns:a="http://schemas.openxmlformats.org/drawingml/2006/main">
+            <a:pPr algn="ctr">
+              <a:lnSpc>
+                <a:spcPct val="105000"/>
+              </a:lnSpc>
+              <a:buNone/>
+              <a:defRPr sz="1350" b="1" i="0">
+                <a:solidFill>
+                  <a:srgbClr val="2A9D8F"/>
+                </a:solidFill>
+              </a:defRPr>
+            </a:pPr>
+            <a:r>
+              <a:rPr sz="1350" b="1" i="0">
+                <a:solidFill>
+                  <a:srgbClr val="2A9D8F"/>
+                </a:solidFill>
+              </a:rPr>
+              <a:t>最左 child</a:t>
+            </a:r>
+          </a:p>
+        </p:txBody>
+      </p:sp>
+      <p:sp>
+        <p:nvSpPr>
+          <p:cNvPr id="22" name="">
+            <a:extLst xmlns:a="http://schemas.openxmlformats.org/drawingml/2006/main">
+              <a:ext uri="{FF2B5EF4-FFF2-40B4-BE49-F238E27FC236}">
+                <a16:creationId xmlns:a16="http://schemas.microsoft.com/office/drawing/2014/main" id="{7D05369F-044C-446D-A11C-D6BDE474AF92}"/>
+              </a:ext>
+            </a:extLst>
+          </p:cNvPr>
+          <p:cNvSpPr>
+            <a:spLocks xmlns:a="http://schemas.openxmlformats.org/drawingml/2006/main" noGrp="1"/>
+          </p:cNvSpPr>
+          <p:nvPr/>
+        </p:nvSpPr>
+        <p:spPr>
+          <a:xfrm xmlns:a="http://schemas.openxmlformats.org/drawingml/2006/main">
+            <a:off x="723900" y="4457700"/>
+            <a:ext cx="5257800" cy="304800"/>
+          </a:xfrm>
+          <a:prstGeom xmlns:a="http://schemas.openxmlformats.org/drawingml/2006/main" prst="rect">
+            <a:avLst/>
+          </a:prstGeom>
+          <a:noFill xmlns:a="http://schemas.openxmlformats.org/drawingml/2006/main"/>
+          <a:ln xmlns:a="http://schemas.openxmlformats.org/drawingml/2006/main" w="0">
+            <a:noFill/>
+            <a:prstDash val="solid"/>
+          </a:ln>
+        </p:spPr>
+        <p:txBody>
+          <a:bodyPr xmlns:a="http://schemas.openxmlformats.org/drawingml/2006/main" wrap="square" lIns="38100" tIns="19050" rIns="38100" bIns="19050" anchor="t">
+            <a:normAutofit fontScale="100000"/>
+          </a:bodyPr>
+          <a:lstStyle xmlns:a="http://schemas.openxmlformats.org/drawingml/2006/main"/>
+          <a:p xmlns:a="http://schemas.openxmlformats.org/drawingml/2006/main">
+            <a:pPr algn="ctr">
+              <a:lnSpc>
+                <a:spcPct val="105000"/>
+              </a:lnSpc>
+              <a:buNone/>
+              <a:defRPr sz="1575" b="1" i="0">
+                <a:solidFill>
+                  <a:srgbClr val="2A9D8F"/>
+                </a:solidFill>
+              </a:defRPr>
+            </a:pPr>
+            <a:r>
+              <a:rPr sz="1575" b="1" i="0">
+                <a:solidFill>
+                  <a:srgbClr val="2A9D8F"/>
+                </a:solidFill>
+              </a:rPr>
+              <a:t>P₃ → 几何左端点 2 → base anchor z₂</a:t>
+            </a:r>
+          </a:p>
+        </p:txBody>
+      </p:sp>
+      <p:sp>
+        <p:nvSpPr>
+          <p:cNvPr id="23" name="">
+            <a:extLst xmlns:a="http://schemas.openxmlformats.org/drawingml/2006/main">
+              <a:ext uri="{FF2B5EF4-FFF2-40B4-BE49-F238E27FC236}">
+                <a16:creationId xmlns:a16="http://schemas.microsoft.com/office/drawing/2014/main" id="{A4F1DEE0-D33F-49C8-A928-BCE020721878}"/>
+              </a:ext>
+            </a:extLst>
+          </p:cNvPr>
+          <p:cNvSpPr>
+            <a:spLocks xmlns:a="http://schemas.openxmlformats.org/drawingml/2006/main" noGrp="1"/>
+          </p:cNvSpPr>
+          <p:nvPr/>
+        </p:nvSpPr>
+        <p:spPr>
+          <a:xfrm xmlns:a="http://schemas.openxmlformats.org/drawingml/2006/main">
+            <a:off x="6362700" y="2228850"/>
+            <a:ext cx="5105400" cy="304800"/>
+          </a:xfrm>
+          <a:prstGeom xmlns:a="http://schemas.openxmlformats.org/drawingml/2006/main" prst="rect">
+            <a:avLst/>
+          </a:prstGeom>
+          <a:noFill xmlns:a="http://schemas.openxmlformats.org/drawingml/2006/main"/>
+          <a:ln xmlns:a="http://schemas.openxmlformats.org/drawingml/2006/main" w="0">
+            <a:noFill/>
+            <a:prstDash val="solid"/>
+          </a:ln>
+        </p:spPr>
+        <p:txBody>
+          <a:bodyPr xmlns:a="http://schemas.openxmlformats.org/drawingml/2006/main" wrap="square" lIns="38100" tIns="19050" rIns="38100" bIns="19050" anchor="t">
+            <a:normAutofit fontScale="92593"/>
+          </a:bodyPr>
+          <a:lstStyle xmlns:a="http://schemas.openxmlformats.org/drawingml/2006/main"/>
+          <a:p xmlns:a="http://schemas.openxmlformats.org/drawingml/2006/main">
+            <a:pPr algn="l">
+              <a:lnSpc>
+                <a:spcPct val="105000"/>
+              </a:lnSpc>
+              <a:buNone/>
+              <a:defRPr sz="1800" b="1" i="0">
+                <a:solidFill>
+                  <a:srgbClr val="102A43"/>
+                </a:solidFill>
+              </a:defRPr>
+            </a:pPr>
+            <a:r>
+              <a:rPr sz="1800" b="1" i="0">
+                <a:solidFill>
+                  <a:srgbClr val="102A43"/>
+                </a:solidFill>
+              </a:rPr>
+              <a:t>为什么还要检查 z₁？</a:t>
+            </a:r>
+          </a:p>
+        </p:txBody>
+      </p:sp>
+      <p:sp>
+        <p:nvSpPr>
+          <p:cNvPr id="24" name="">
+            <a:extLst xmlns:a="http://schemas.openxmlformats.org/drawingml/2006/main">
+              <a:ext uri="{FF2B5EF4-FFF2-40B4-BE49-F238E27FC236}">
+                <a16:creationId xmlns:a16="http://schemas.microsoft.com/office/drawing/2014/main" id="{39902587-2E7C-450E-AE07-E2B37594B113}"/>
+              </a:ext>
+            </a:extLst>
+          </p:cNvPr>
+          <p:cNvSpPr>
+            <a:spLocks xmlns:a="http://schemas.openxmlformats.org/drawingml/2006/main" noGrp="1"/>
+          </p:cNvSpPr>
+          <p:nvPr/>
+        </p:nvSpPr>
+        <p:spPr>
+          <a:xfrm xmlns:a="http://schemas.openxmlformats.org/drawingml/2006/main">
+            <a:off x="6362700" y="2686050"/>
+            <a:ext cx="5105400" cy="323850"/>
+          </a:xfrm>
+          <a:prstGeom xmlns:a="http://schemas.openxmlformats.org/drawingml/2006/main" prst="rect">
+            <a:avLst/>
+          </a:prstGeom>
+          <a:noFill xmlns:a="http://schemas.openxmlformats.org/drawingml/2006/main"/>
+          <a:ln xmlns:a="http://schemas.openxmlformats.org/drawingml/2006/main" w="0">
+            <a:noFill/>
+            <a:prstDash val="solid"/>
+          </a:ln>
+        </p:spPr>
+        <p:txBody>
+          <a:bodyPr xmlns:a="http://schemas.openxmlformats.org/drawingml/2006/main" wrap="square" lIns="38100" tIns="19050" rIns="38100" bIns="19050" anchor="t">
+            <a:normAutofit fontScale="100000"/>
+          </a:bodyPr>
+          <a:lstStyle xmlns:a="http://schemas.openxmlformats.org/drawingml/2006/main"/>
+          <a:p xmlns:a="http://schemas.openxmlformats.org/drawingml/2006/main">
+            <a:pPr algn="l">
+              <a:lnSpc>
+                <a:spcPct val="105000"/>
+              </a:lnSpc>
+              <a:buNone/>
+              <a:defRPr sz="1650" b="0" i="0">
+                <a:solidFill>
+                  <a:srgbClr val="243B53"/>
+                </a:solidFill>
+              </a:defRPr>
+            </a:pPr>
+            <a:r>
+              <a:rPr sz="1650" b="0" i="0">
+                <a:solidFill>
+                  <a:srgbClr val="243B53"/>
+                </a:solidFill>
+              </a:rPr>
+              <a:t>z₁ = 1 属于 upper pair P₂ = (1, 2)。</a:t>
+            </a:r>
+          </a:p>
+        </p:txBody>
+      </p:sp>
+      <p:sp>
+        <p:nvSpPr>
+          <p:cNvPr id="25" name="">
+            <a:extLst xmlns:a="http://schemas.openxmlformats.org/drawingml/2006/main">
+              <a:ext uri="{FF2B5EF4-FFF2-40B4-BE49-F238E27FC236}">
+                <a16:creationId xmlns:a16="http://schemas.microsoft.com/office/drawing/2014/main" id="{41EEE40C-BC60-48B3-B8F5-C25F79D858D8}"/>
+              </a:ext>
+            </a:extLst>
+          </p:cNvPr>
+          <p:cNvSpPr>
+            <a:spLocks xmlns:a="http://schemas.openxmlformats.org/drawingml/2006/main" noGrp="1"/>
+          </p:cNvSpPr>
+          <p:nvPr/>
+        </p:nvSpPr>
+        <p:spPr>
+          <a:xfrm xmlns:a="http://schemas.openxmlformats.org/drawingml/2006/main">
+            <a:off x="6362700" y="3067050"/>
+            <a:ext cx="5105400" cy="323850"/>
+          </a:xfrm>
+          <a:prstGeom xmlns:a="http://schemas.openxmlformats.org/drawingml/2006/main" prst="rect">
+            <a:avLst/>
+          </a:prstGeom>
+          <a:noFill xmlns:a="http://schemas.openxmlformats.org/drawingml/2006/main"/>
+          <a:ln xmlns:a="http://schemas.openxmlformats.org/drawingml/2006/main" w="0">
+            <a:noFill/>
+            <a:prstDash val="solid"/>
+          </a:ln>
+        </p:spPr>
+        <p:txBody>
+          <a:bodyPr xmlns:a="http://schemas.openxmlformats.org/drawingml/2006/main" wrap="square" lIns="38100" tIns="19050" rIns="38100" bIns="19050" anchor="t">
+            <a:normAutofit fontScale="100000"/>
+          </a:bodyPr>
+          <a:lstStyle xmlns:a="http://schemas.openxmlformats.org/drawingml/2006/main"/>
+          <a:p xmlns:a="http://schemas.openxmlformats.org/drawingml/2006/main">
+            <a:pPr algn="l">
+              <a:lnSpc>
+                <a:spcPct val="105000"/>
+              </a:lnSpc>
+              <a:buNone/>
+              <a:defRPr sz="1650" b="1" i="0">
+                <a:solidFill>
+                  <a:srgbClr val="102A43"/>
+                </a:solidFill>
+              </a:defRPr>
+            </a:pPr>
+            <a:r>
+              <a:rPr sz="1650" b="1" i="0">
+                <a:solidFill>
+                  <a:srgbClr val="102A43"/>
+                </a:solidFill>
+              </a:rPr>
+              <a:t>它不是任何 lower pair 的端点。</a:t>
+            </a:r>
+          </a:p>
+        </p:txBody>
+      </p:sp>
+      <p:sp>
+        <p:nvSpPr>
+          <p:cNvPr id="26" name="">
+            <a:extLst xmlns:a="http://schemas.openxmlformats.org/drawingml/2006/main">
+              <a:ext uri="{FF2B5EF4-FFF2-40B4-BE49-F238E27FC236}">
+                <a16:creationId xmlns:a16="http://schemas.microsoft.com/office/drawing/2014/main" id="{8CD48AAC-5B90-4808-BEC0-1A2A8581B4C0}"/>
+              </a:ext>
+            </a:extLst>
+          </p:cNvPr>
+          <p:cNvSpPr>
+            <a:spLocks xmlns:a="http://schemas.openxmlformats.org/drawingml/2006/main" noGrp="1"/>
+          </p:cNvSpPr>
+          <p:nvPr/>
+        </p:nvSpPr>
+        <p:spPr>
+          <a:xfrm xmlns:a="http://schemas.openxmlformats.org/drawingml/2006/main">
+            <a:off x="6362700" y="3448050"/>
+            <a:ext cx="5105400" cy="323850"/>
+          </a:xfrm>
+          <a:prstGeom xmlns:a="http://schemas.openxmlformats.org/drawingml/2006/main" prst="rect">
+            <a:avLst/>
+          </a:prstGeom>
+          <a:noFill xmlns:a="http://schemas.openxmlformats.org/drawingml/2006/main"/>
+          <a:ln xmlns:a="http://schemas.openxmlformats.org/drawingml/2006/main" w="0">
+            <a:noFill/>
+            <a:prstDash val="solid"/>
+          </a:ln>
+        </p:spPr>
+        <p:txBody>
+          <a:bodyPr xmlns:a="http://schemas.openxmlformats.org/drawingml/2006/main" wrap="square" lIns="38100" tIns="19050" rIns="38100" bIns="19050" anchor="t">
+            <a:normAutofit fontScale="100000"/>
+          </a:bodyPr>
+          <a:lstStyle xmlns:a="http://schemas.openxmlformats.org/drawingml/2006/main"/>
+          <a:p xmlns:a="http://schemas.openxmlformats.org/drawingml/2006/main">
+            <a:pPr algn="l">
+              <a:lnSpc>
+                <a:spcPct val="105000"/>
+              </a:lnSpc>
+              <a:buNone/>
+              <a:defRPr sz="1650" b="0" i="0">
+                <a:solidFill>
+                  <a:srgbClr val="243B53"/>
+                </a:solidFill>
+              </a:defRPr>
+            </a:pPr>
+            <a:r>
+              <a:rPr sz="1650" b="0" i="0">
+                <a:solidFill>
+                  <a:srgbClr val="243B53"/>
+                </a:solidFill>
+              </a:rPr>
+              <a:t>它仍在有序列表 S₆ 中。</a:t>
+            </a:r>
+          </a:p>
+        </p:txBody>
+      </p:sp>
+      <p:sp>
+        <p:nvSpPr>
+          <p:cNvPr id="27" name="">
+            <a:extLst xmlns:a="http://schemas.openxmlformats.org/drawingml/2006/main">
+              <a:ext uri="{FF2B5EF4-FFF2-40B4-BE49-F238E27FC236}">
+                <a16:creationId xmlns:a16="http://schemas.microsoft.com/office/drawing/2014/main" id="{19C15ABF-E84C-4AFC-BAE2-FAE4A77862D0}"/>
+              </a:ext>
+            </a:extLst>
+          </p:cNvPr>
+          <p:cNvSpPr>
+            <a:spLocks xmlns:a="http://schemas.openxmlformats.org/drawingml/2006/main" noGrp="1"/>
+          </p:cNvSpPr>
+          <p:nvPr/>
+        </p:nvSpPr>
+        <p:spPr>
+          <a:xfrm xmlns:a="http://schemas.openxmlformats.org/drawingml/2006/main">
+            <a:off x="6362700" y="3962400"/>
+            <a:ext cx="5105400" cy="361950"/>
+          </a:xfrm>
+          <a:prstGeom xmlns:a="http://schemas.openxmlformats.org/drawingml/2006/main" prst="rect">
+            <a:avLst/>
+          </a:prstGeom>
+          <a:noFill xmlns:a="http://schemas.openxmlformats.org/drawingml/2006/main"/>
+          <a:ln xmlns:a="http://schemas.openxmlformats.org/drawingml/2006/main" w="0">
+            <a:noFill/>
+            <a:prstDash val="solid"/>
+          </a:ln>
+        </p:spPr>
+        <p:txBody>
+          <a:bodyPr xmlns:a="http://schemas.openxmlformats.org/drawingml/2006/main" wrap="square" lIns="38100" tIns="19050" rIns="38100" bIns="19050" anchor="t">
+            <a:normAutofit fontScale="100000"/>
+          </a:bodyPr>
+          <a:lstStyle xmlns:a="http://schemas.openxmlformats.org/drawingml/2006/main"/>
+          <a:p xmlns:a="http://schemas.openxmlformats.org/drawingml/2006/main">
+            <a:pPr algn="l">
+              <a:lnSpc>
+                <a:spcPct val="105000"/>
+              </a:lnSpc>
+              <a:buNone/>
+              <a:defRPr sz="1800" b="1" i="0">
+                <a:solidFill>
+                  <a:srgbClr val="E76F51"/>
+                </a:solidFill>
+              </a:defRPr>
+            </a:pPr>
+            <a:r>
+              <a:rPr sz="1800" b="1" i="0">
+                <a:solidFill>
+                  <a:srgbClr val="E76F51"/>
+                </a:solidFill>
+              </a:rPr>
+              <a:t>i 为奇数且 0 &lt; z₁ = 1 &lt; base anchor = 2</a:t>
+            </a:r>
+          </a:p>
+        </p:txBody>
       </p:sp>
       <p:sp>
         <p:nvSpPr>
           <p:cNvPr id="28" name="">
             <a:extLst xmlns:a="http://schemas.openxmlformats.org/drawingml/2006/main">
               <a:ext uri="{FF2B5EF4-FFF2-40B4-BE49-F238E27FC236}">
-                <a16:creationId xmlns:a16="http://schemas.microsoft.com/office/drawing/2014/main" id="{57B78BF2-CBDF-44B6-B89A-DE809410698E}"/>
-              </a:ext>
-            </a:extLst>
-          </p:cNvPr>
-          <p:cNvSpPr>
-            <a:spLocks xmlns:a="http://schemas.openxmlformats.org/drawingml/2006/main" noGrp="1"/>
-          </p:cNvSpPr>
-          <p:nvPr/>
-        </p:nvSpPr>
-        <p:spPr>
-          <a:xfrm xmlns:a="http://schemas.openxmlformats.org/drawingml/2006/main">
-            <a:off x="8496300" y="3714750"/>
-            <a:ext cx="2724150" cy="323850"/>
+                <a16:creationId xmlns:a16="http://schemas.microsoft.com/office/drawing/2014/main" id="{18B160CD-16A9-4FFC-B9D5-2CB16F7636BA}"/>
+              </a:ext>
+            </a:extLst>
+          </p:cNvPr>
+          <p:cNvSpPr>
+            <a:spLocks xmlns:a="http://schemas.openxmlformats.org/drawingml/2006/main" noGrp="1"/>
+          </p:cNvSpPr>
+          <p:nvPr/>
+        </p:nvSpPr>
+        <p:spPr>
+          <a:xfrm xmlns:a="http://schemas.openxmlformats.org/drawingml/2006/main">
+            <a:off x="6362700" y="4410075"/>
+            <a:ext cx="5105400" cy="323850"/>
           </a:xfrm>
           <a:prstGeom xmlns:a="http://schemas.openxmlformats.org/drawingml/2006/main" prst="rect">
             <a:avLst/>
@@ -31889,178 +31850,374 @@
           </a:bodyPr>
           <a:lstStyle xmlns:a="http://schemas.openxmlformats.org/drawingml/2006/main"/>
           <a:p xmlns:a="http://schemas.openxmlformats.org/drawingml/2006/main">
+            <a:pPr algn="l">
+              <a:lnSpc>
+                <a:spcPct val="105000"/>
+              </a:lnSpc>
+              <a:buNone/>
+              <a:defRPr sz="1725" b="1" i="0">
+                <a:solidFill>
+                  <a:srgbClr val="2A9D8F"/>
+                </a:solidFill>
+              </a:defRPr>
+            </a:pPr>
+            <a:r>
+              <a:rPr sz="1725" b="1" i="0">
+                <a:solidFill>
+                  <a:srgbClr val="2A9D8F"/>
+                </a:solidFill>
+              </a:rPr>
+              <a:t>最终输出 anchor：z₁</a:t>
+            </a:r>
+          </a:p>
+        </p:txBody>
+      </p:sp>
+      <p:sp>
+        <p:nvSpPr>
+          <p:cNvPr id="29" name="">
+            <a:extLst xmlns:a="http://schemas.openxmlformats.org/drawingml/2006/main">
+              <a:ext uri="{FF2B5EF4-FFF2-40B4-BE49-F238E27FC236}">
+                <a16:creationId xmlns:a16="http://schemas.microsoft.com/office/drawing/2014/main" id="{397DEBA1-AD63-48AC-B58F-A6585C556BC0}"/>
+              </a:ext>
+            </a:extLst>
+          </p:cNvPr>
+          <p:cNvSpPr>
+            <a:spLocks xmlns:a="http://schemas.openxmlformats.org/drawingml/2006/main" noGrp="1"/>
+          </p:cNvSpPr>
+          <p:nvPr/>
+        </p:nvSpPr>
+        <p:spPr>
+          <a:xfrm xmlns:a="http://schemas.openxmlformats.org/drawingml/2006/main">
+            <a:off x="723900" y="4972050"/>
+            <a:ext cx="5257800" cy="990600"/>
+          </a:xfrm>
+          <a:prstGeom xmlns:a="http://schemas.openxmlformats.org/drawingml/2006/main" prst="roundRect">
+            <a:avLst>
+              <a:gd name="adj" fmla="val 5769"/>
+            </a:avLst>
+          </a:prstGeom>
+          <a:solidFill xmlns:a="http://schemas.openxmlformats.org/drawingml/2006/main">
+            <a:srgbClr val="FCEEEA"/>
+          </a:solidFill>
+          <a:ln xmlns:a="http://schemas.openxmlformats.org/drawingml/2006/main" w="11430">
+            <a:solidFill>
+              <a:srgbClr val="E76F51"/>
+            </a:solidFill>
+            <a:prstDash val="solid"/>
+          </a:ln>
+        </p:spPr>
+      </p:sp>
+      <p:sp>
+        <p:nvSpPr>
+          <p:cNvPr id="30" name="">
+            <a:extLst xmlns:a="http://schemas.openxmlformats.org/drawingml/2006/main">
+              <a:ext uri="{FF2B5EF4-FFF2-40B4-BE49-F238E27FC236}">
+                <a16:creationId xmlns:a16="http://schemas.microsoft.com/office/drawing/2014/main" id="{12405562-6272-4395-BFAE-8A1C2DF55C7B}"/>
+              </a:ext>
+            </a:extLst>
+          </p:cNvPr>
+          <p:cNvSpPr>
+            <a:spLocks xmlns:a="http://schemas.openxmlformats.org/drawingml/2006/main" noGrp="1"/>
+          </p:cNvSpPr>
+          <p:nvPr/>
+        </p:nvSpPr>
+        <p:spPr>
+          <a:xfrm xmlns:a="http://schemas.openxmlformats.org/drawingml/2006/main">
+            <a:off x="876300" y="5048250"/>
+            <a:ext cx="4953000" cy="285750"/>
+          </a:xfrm>
+          <a:prstGeom xmlns:a="http://schemas.openxmlformats.org/drawingml/2006/main" prst="rect">
+            <a:avLst/>
+          </a:prstGeom>
+          <a:noFill xmlns:a="http://schemas.openxmlformats.org/drawingml/2006/main"/>
+          <a:ln xmlns:a="http://schemas.openxmlformats.org/drawingml/2006/main" w="0">
+            <a:noFill/>
+            <a:prstDash val="solid"/>
+          </a:ln>
+        </p:spPr>
+        <p:txBody>
+          <a:bodyPr xmlns:a="http://schemas.openxmlformats.org/drawingml/2006/main" wrap="square" lIns="38100" tIns="19050" rIns="38100" bIns="19050" anchor="t">
+            <a:normAutofit fontScale="98261"/>
+          </a:bodyPr>
+          <a:lstStyle xmlns:a="http://schemas.openxmlformats.org/drawingml/2006/main"/>
+          <a:p xmlns:a="http://schemas.openxmlformats.org/drawingml/2006/main">
+            <a:pPr algn="l">
+              <a:lnSpc>
+                <a:spcPct val="105000"/>
+              </a:lnSpc>
+              <a:buNone/>
+              <a:defRPr sz="1575" b="1" i="0">
+                <a:solidFill>
+                  <a:srgbClr val="E76F51"/>
+                </a:solidFill>
+              </a:defRPr>
+            </a:pPr>
+            <a:r>
+              <a:rPr sz="1575" b="1" i="0">
+                <a:solidFill>
+                  <a:srgbClr val="E76F51"/>
+                </a:solidFill>
+              </a:rPr>
+              <a:t>省略修正时（错误插入示意）</a:t>
+            </a:r>
+          </a:p>
+        </p:txBody>
+      </p:sp>
+      <p:sp>
+        <p:nvSpPr>
+          <p:cNvPr id="31" name="">
+            <a:extLst xmlns:a="http://schemas.openxmlformats.org/drawingml/2006/main">
+              <a:ext uri="{FF2B5EF4-FFF2-40B4-BE49-F238E27FC236}">
+                <a16:creationId xmlns:a16="http://schemas.microsoft.com/office/drawing/2014/main" id="{E01454D7-FA7D-4717-9C16-CC4A17D3ED16}"/>
+              </a:ext>
+            </a:extLst>
+          </p:cNvPr>
+          <p:cNvSpPr>
+            <a:spLocks xmlns:a="http://schemas.openxmlformats.org/drawingml/2006/main" noGrp="1"/>
+          </p:cNvSpPr>
+          <p:nvPr/>
+        </p:nvSpPr>
+        <p:spPr>
+          <a:xfrm xmlns:a="http://schemas.openxmlformats.org/drawingml/2006/main">
+            <a:off x="876300" y="5467350"/>
+            <a:ext cx="4953000" cy="323850"/>
+          </a:xfrm>
+          <a:prstGeom xmlns:a="http://schemas.openxmlformats.org/drawingml/2006/main" prst="rect">
+            <a:avLst/>
+          </a:prstGeom>
+          <a:noFill xmlns:a="http://schemas.openxmlformats.org/drawingml/2006/main"/>
+          <a:ln xmlns:a="http://schemas.openxmlformats.org/drawingml/2006/main" w="0">
+            <a:noFill/>
+            <a:prstDash val="solid"/>
+          </a:ln>
+        </p:spPr>
+        <p:txBody>
+          <a:bodyPr xmlns:a="http://schemas.openxmlformats.org/drawingml/2006/main" wrap="square" lIns="38100" tIns="19050" rIns="38100" bIns="19050" anchor="t">
+            <a:normAutofit fontScale="100000"/>
+          </a:bodyPr>
+          <a:lstStyle xmlns:a="http://schemas.openxmlformats.org/drawingml/2006/main"/>
+          <a:p xmlns:a="http://schemas.openxmlformats.org/drawingml/2006/main">
+            <a:pPr algn="l">
+              <a:lnSpc>
+                <a:spcPct val="105000"/>
+              </a:lnSpc>
+              <a:buNone/>
+              <a:defRPr sz="1650" b="0" i="0">
+                <a:solidFill>
+                  <a:srgbClr val="243B53"/>
+                </a:solidFill>
+              </a:defRPr>
+            </a:pPr>
+            <a:r>
+              <a:rPr sz="1650" b="0" i="0">
+                <a:solidFill>
+                  <a:srgbClr val="243B53"/>
+                </a:solidFill>
+              </a:rPr>
+              <a:t>将 0 插在 2 前 → [1, 0, 2, 3, 4, 6, 7]</a:t>
+            </a:r>
+          </a:p>
+        </p:txBody>
+      </p:sp>
+      <p:sp>
+        <p:nvSpPr>
+          <p:cNvPr id="32" name="">
+            <a:extLst xmlns:a="http://schemas.openxmlformats.org/drawingml/2006/main">
+              <a:ext uri="{FF2B5EF4-FFF2-40B4-BE49-F238E27FC236}">
+                <a16:creationId xmlns:a16="http://schemas.microsoft.com/office/drawing/2014/main" id="{DA21BC6B-259D-4342-8C0C-7598779D3891}"/>
+              </a:ext>
+            </a:extLst>
+          </p:cNvPr>
+          <p:cNvSpPr>
+            <a:spLocks xmlns:a="http://schemas.openxmlformats.org/drawingml/2006/main" noGrp="1"/>
+          </p:cNvSpPr>
+          <p:nvPr/>
+        </p:nvSpPr>
+        <p:spPr>
+          <a:xfrm xmlns:a="http://schemas.openxmlformats.org/drawingml/2006/main">
+            <a:off x="6210300" y="4972050"/>
+            <a:ext cx="5257800" cy="990600"/>
+          </a:xfrm>
+          <a:prstGeom xmlns:a="http://schemas.openxmlformats.org/drawingml/2006/main" prst="roundRect">
+            <a:avLst>
+              <a:gd name="adj" fmla="val 5769"/>
+            </a:avLst>
+          </a:prstGeom>
+          <a:solidFill xmlns:a="http://schemas.openxmlformats.org/drawingml/2006/main">
+            <a:srgbClr val="E8F5F3"/>
+          </a:solidFill>
+          <a:ln xmlns:a="http://schemas.openxmlformats.org/drawingml/2006/main" w="11430">
+            <a:solidFill>
+              <a:srgbClr val="2A9D8F"/>
+            </a:solidFill>
+            <a:prstDash val="solid"/>
+          </a:ln>
+        </p:spPr>
+      </p:sp>
+      <p:sp>
+        <p:nvSpPr>
+          <p:cNvPr id="33" name="">
+            <a:extLst xmlns:a="http://schemas.openxmlformats.org/drawingml/2006/main">
+              <a:ext uri="{FF2B5EF4-FFF2-40B4-BE49-F238E27FC236}">
+                <a16:creationId xmlns:a16="http://schemas.microsoft.com/office/drawing/2014/main" id="{225C61AF-19A3-4A0F-9A9E-99AC414A59D7}"/>
+              </a:ext>
+            </a:extLst>
+          </p:cNvPr>
+          <p:cNvSpPr>
+            <a:spLocks xmlns:a="http://schemas.openxmlformats.org/drawingml/2006/main" noGrp="1"/>
+          </p:cNvSpPr>
+          <p:nvPr/>
+        </p:nvSpPr>
+        <p:spPr>
+          <a:xfrm xmlns:a="http://schemas.openxmlformats.org/drawingml/2006/main">
+            <a:off x="6362700" y="5048250"/>
+            <a:ext cx="4953000" cy="285750"/>
+          </a:xfrm>
+          <a:prstGeom xmlns:a="http://schemas.openxmlformats.org/drawingml/2006/main" prst="rect">
+            <a:avLst/>
+          </a:prstGeom>
+          <a:noFill xmlns:a="http://schemas.openxmlformats.org/drawingml/2006/main"/>
+          <a:ln xmlns:a="http://schemas.openxmlformats.org/drawingml/2006/main" w="0">
+            <a:noFill/>
+            <a:prstDash val="solid"/>
+          </a:ln>
+        </p:spPr>
+        <p:txBody>
+          <a:bodyPr xmlns:a="http://schemas.openxmlformats.org/drawingml/2006/main" wrap="square" lIns="38100" tIns="19050" rIns="38100" bIns="19050" anchor="t">
+            <a:normAutofit fontScale="98261"/>
+          </a:bodyPr>
+          <a:lstStyle xmlns:a="http://schemas.openxmlformats.org/drawingml/2006/main"/>
+          <a:p xmlns:a="http://schemas.openxmlformats.org/drawingml/2006/main">
+            <a:pPr algn="l">
+              <a:lnSpc>
+                <a:spcPct val="105000"/>
+              </a:lnSpc>
+              <a:buNone/>
+              <a:defRPr sz="1575" b="1" i="0">
+                <a:solidFill>
+                  <a:srgbClr val="2A9D8F"/>
+                </a:solidFill>
+              </a:defRPr>
+            </a:pPr>
+            <a:r>
+              <a:rPr sz="1575" b="1" i="0">
+                <a:solidFill>
+                  <a:srgbClr val="2A9D8F"/>
+                </a:solidFill>
+              </a:rPr>
+              <a:t>修正后</a:t>
+            </a:r>
+          </a:p>
+        </p:txBody>
+      </p:sp>
+      <p:sp>
+        <p:nvSpPr>
+          <p:cNvPr id="34" name="">
+            <a:extLst xmlns:a="http://schemas.openxmlformats.org/drawingml/2006/main">
+              <a:ext uri="{FF2B5EF4-FFF2-40B4-BE49-F238E27FC236}">
+                <a16:creationId xmlns:a16="http://schemas.microsoft.com/office/drawing/2014/main" id="{80223CDB-9240-4D85-9911-DECDB6FED90D}"/>
+              </a:ext>
+            </a:extLst>
+          </p:cNvPr>
+          <p:cNvSpPr>
+            <a:spLocks xmlns:a="http://schemas.openxmlformats.org/drawingml/2006/main" noGrp="1"/>
+          </p:cNvSpPr>
+          <p:nvPr/>
+        </p:nvSpPr>
+        <p:spPr>
+          <a:xfrm xmlns:a="http://schemas.openxmlformats.org/drawingml/2006/main">
+            <a:off x="6362700" y="5467350"/>
+            <a:ext cx="4953000" cy="323850"/>
+          </a:xfrm>
+          <a:prstGeom xmlns:a="http://schemas.openxmlformats.org/drawingml/2006/main" prst="rect">
+            <a:avLst/>
+          </a:prstGeom>
+          <a:noFill xmlns:a="http://schemas.openxmlformats.org/drawingml/2006/main"/>
+          <a:ln xmlns:a="http://schemas.openxmlformats.org/drawingml/2006/main" w="0">
+            <a:noFill/>
+            <a:prstDash val="solid"/>
+          </a:ln>
+        </p:spPr>
+        <p:txBody>
+          <a:bodyPr xmlns:a="http://schemas.openxmlformats.org/drawingml/2006/main" wrap="square" lIns="38100" tIns="19050" rIns="38100" bIns="19050" anchor="t">
+            <a:normAutofit fontScale="100000"/>
+          </a:bodyPr>
+          <a:lstStyle xmlns:a="http://schemas.openxmlformats.org/drawingml/2006/main"/>
+          <a:p xmlns:a="http://schemas.openxmlformats.org/drawingml/2006/main">
+            <a:pPr algn="l">
+              <a:lnSpc>
+                <a:spcPct val="105000"/>
+              </a:lnSpc>
+              <a:buNone/>
+              <a:defRPr sz="1650" b="0" i="0">
+                <a:solidFill>
+                  <a:srgbClr val="243B53"/>
+                </a:solidFill>
+              </a:defRPr>
+            </a:pPr>
+            <a:r>
+              <a:rPr sz="1650" b="0" i="0">
+                <a:solidFill>
+                  <a:srgbClr val="243B53"/>
+                </a:solidFill>
+              </a:rPr>
+              <a:t>将 0 插在 z₁ 前 → [0, 1, 2, 3, 4, 6, 7]</a:t>
+            </a:r>
+          </a:p>
+        </p:txBody>
+      </p:sp>
+      <p:sp>
+        <p:nvSpPr>
+          <p:cNvPr id="35" name="">
+            <a:extLst xmlns:a="http://schemas.openxmlformats.org/drawingml/2006/main">
+              <a:ext uri="{FF2B5EF4-FFF2-40B4-BE49-F238E27FC236}">
+                <a16:creationId xmlns:a16="http://schemas.microsoft.com/office/drawing/2014/main" id="{DE271865-A5A5-4E06-9207-DD6503843ACD}"/>
+              </a:ext>
+            </a:extLst>
+          </p:cNvPr>
+          <p:cNvSpPr>
+            <a:spLocks xmlns:a="http://schemas.openxmlformats.org/drawingml/2006/main" noGrp="1"/>
+          </p:cNvSpPr>
+          <p:nvPr/>
+        </p:nvSpPr>
+        <p:spPr>
+          <a:xfrm xmlns:a="http://schemas.openxmlformats.org/drawingml/2006/main">
+            <a:off x="723900" y="6115050"/>
+            <a:ext cx="10744200" cy="285750"/>
+          </a:xfrm>
+          <a:prstGeom xmlns:a="http://schemas.openxmlformats.org/drawingml/2006/main" prst="rect">
+            <a:avLst/>
+          </a:prstGeom>
+          <a:noFill xmlns:a="http://schemas.openxmlformats.org/drawingml/2006/main"/>
+          <a:ln xmlns:a="http://schemas.openxmlformats.org/drawingml/2006/main" w="0">
+            <a:noFill/>
+            <a:prstDash val="solid"/>
+          </a:ln>
+        </p:spPr>
+        <p:txBody>
+          <a:bodyPr xmlns:a="http://schemas.openxmlformats.org/drawingml/2006/main" wrap="square" lIns="38100" tIns="19050" rIns="38100" bIns="19050" anchor="t">
+            <a:normAutofit fontScale="98261"/>
+          </a:bodyPr>
+          <a:lstStyle xmlns:a="http://schemas.openxmlformats.org/drawingml/2006/main"/>
+          <a:p xmlns:a="http://schemas.openxmlformats.org/drawingml/2006/main">
             <a:pPr algn="ctr">
               <a:lnSpc>
                 <a:spcPct val="105000"/>
               </a:lnSpc>
               <a:buNone/>
-              <a:defRPr sz="1650" b="1" i="0">
-                <a:solidFill>
-                  <a:srgbClr val="2A9D8F"/>
-                </a:solidFill>
-              </a:defRPr>
-            </a:pPr>
-            <a:r>
-              <a:rPr sz="1650" b="1" i="0">
-                <a:solidFill>
-                  <a:srgbClr val="2A9D8F"/>
-                </a:solidFill>
-              </a:rPr>
-              <a:t>两个独立决策</a:t>
-            </a:r>
-          </a:p>
-        </p:txBody>
-      </p:sp>
-      <p:sp>
-        <p:nvSpPr>
-          <p:cNvPr id="29" name="">
-            <a:extLst xmlns:a="http://schemas.openxmlformats.org/drawingml/2006/main">
-              <a:ext uri="{FF2B5EF4-FFF2-40B4-BE49-F238E27FC236}">
-                <a16:creationId xmlns:a16="http://schemas.microsoft.com/office/drawing/2014/main" id="{8AE9331B-BC56-4DF5-9B5A-0C4E2E89E3B5}"/>
-              </a:ext>
-            </a:extLst>
-          </p:cNvPr>
-          <p:cNvSpPr>
-            <a:spLocks xmlns:a="http://schemas.openxmlformats.org/drawingml/2006/main" noGrp="1"/>
-          </p:cNvSpPr>
-          <p:nvPr/>
-        </p:nvSpPr>
-        <p:spPr>
-          <a:xfrm xmlns:a="http://schemas.openxmlformats.org/drawingml/2006/main">
-            <a:off x="8572500" y="4114800"/>
-            <a:ext cx="2571750" cy="876300"/>
-          </a:xfrm>
-          <a:prstGeom xmlns:a="http://schemas.openxmlformats.org/drawingml/2006/main" prst="rect">
-            <a:avLst/>
-          </a:prstGeom>
-          <a:noFill xmlns:a="http://schemas.openxmlformats.org/drawingml/2006/main"/>
-          <a:ln xmlns:a="http://schemas.openxmlformats.org/drawingml/2006/main" w="0">
-            <a:noFill/>
-            <a:prstDash val="solid"/>
-          </a:ln>
-        </p:spPr>
-        <p:txBody>
-          <a:bodyPr xmlns:a="http://schemas.openxmlformats.org/drawingml/2006/main" wrap="square" lIns="38100" tIns="19050" rIns="38100" bIns="19050" anchor="ctr">
-            <a:normAutofit fontScale="100000"/>
-          </a:bodyPr>
-          <a:lstStyle xmlns:a="http://schemas.openxmlformats.org/drawingml/2006/main"/>
-          <a:p xmlns:a="http://schemas.openxmlformats.org/drawingml/2006/main">
-            <a:pPr algn="ctr">
-              <a:lnSpc>
-                <a:spcPct val="105000"/>
-              </a:lnSpc>
-              <a:buNone/>
-              <a:defRPr sz="1425" b="0" i="0">
-                <a:solidFill>
-                  <a:srgbClr val="243B53"/>
-                </a:solidFill>
-              </a:defRPr>
-            </a:pPr>
-            <a:r>
-              <a:rPr sz="1425" b="0" i="0">
-                <a:solidFill>
-                  <a:srgbClr val="243B53"/>
-                </a:solidFill>
-              </a:rPr>
-              <a:t>边界 pair 选择</a:t>
-            </a:r>
-          </a:p>
-          <a:p xmlns:a="http://schemas.openxmlformats.org/drawingml/2006/main">
-            <a:pPr algn="ctr">
-              <a:lnSpc>
-                <a:spcPct val="105000"/>
-              </a:lnSpc>
-              <a:buNone/>
-              <a:defRPr sz="1425" b="0" i="0">
-                <a:solidFill>
-                  <a:srgbClr val="243B53"/>
-                </a:solidFill>
-              </a:defRPr>
-            </a:pPr>
-            <a:r>
-              <a:rPr sz="1425" b="0" i="0">
-                <a:solidFill>
-                  <a:srgbClr val="243B53"/>
-                </a:solidFill>
-              </a:rPr>
-              <a:t>≠</a:t>
-            </a:r>
-          </a:p>
-          <a:p xmlns:a="http://schemas.openxmlformats.org/drawingml/2006/main">
-            <a:pPr algn="ctr">
-              <a:lnSpc>
-                <a:spcPct val="105000"/>
-              </a:lnSpc>
-              <a:buNone/>
-              <a:defRPr sz="1425" b="0" i="0">
-                <a:solidFill>
-                  <a:srgbClr val="243B53"/>
-                </a:solidFill>
-              </a:defRPr>
-            </a:pPr>
-            <a:r>
-              <a:rPr sz="1425" b="0" i="0">
-                <a:solidFill>
-                  <a:srgbClr val="243B53"/>
-                </a:solidFill>
-              </a:rPr>
-              <a:t>输出 anchor 选择</a:t>
-            </a:r>
-          </a:p>
-        </p:txBody>
-      </p:sp>
-      <p:sp>
-        <p:nvSpPr>
-          <p:cNvPr id="30" name="">
-            <a:extLst xmlns:a="http://schemas.openxmlformats.org/drawingml/2006/main">
-              <a:ext uri="{FF2B5EF4-FFF2-40B4-BE49-F238E27FC236}">
-                <a16:creationId xmlns:a16="http://schemas.microsoft.com/office/drawing/2014/main" id="{C3D80F8D-7870-4865-9C85-B961F1F0A452}"/>
-              </a:ext>
-            </a:extLst>
-          </p:cNvPr>
-          <p:cNvSpPr>
-            <a:spLocks xmlns:a="http://schemas.openxmlformats.org/drawingml/2006/main" noGrp="1"/>
-          </p:cNvSpPr>
-          <p:nvPr/>
-        </p:nvSpPr>
-        <p:spPr>
-          <a:xfrm xmlns:a="http://schemas.openxmlformats.org/drawingml/2006/main">
-            <a:off x="8229600" y="5524500"/>
-            <a:ext cx="3257550" cy="552450"/>
-          </a:xfrm>
-          <a:prstGeom xmlns:a="http://schemas.openxmlformats.org/drawingml/2006/main" prst="rect">
-            <a:avLst/>
-          </a:prstGeom>
-          <a:noFill xmlns:a="http://schemas.openxmlformats.org/drawingml/2006/main"/>
-          <a:ln xmlns:a="http://schemas.openxmlformats.org/drawingml/2006/main" w="0">
-            <a:noFill/>
-            <a:prstDash val="solid"/>
-          </a:ln>
-        </p:spPr>
-        <p:txBody>
-          <a:bodyPr xmlns:a="http://schemas.openxmlformats.org/drawingml/2006/main" wrap="square" lIns="38100" tIns="19050" rIns="38100" bIns="19050" anchor="ctr">
-            <a:normAutofit fontScale="100000"/>
-          </a:bodyPr>
-          <a:lstStyle xmlns:a="http://schemas.openxmlformats.org/drawingml/2006/main"/>
-          <a:p xmlns:a="http://schemas.openxmlformats.org/drawingml/2006/main">
-            <a:pPr algn="ctr">
-              <a:lnSpc>
-                <a:spcPct val="105000"/>
-              </a:lnSpc>
-              <a:buNone/>
-              <a:defRPr sz="1350" b="1" i="0">
+              <a:defRPr sz="1575" b="1" i="0">
                 <a:solidFill>
                   <a:srgbClr val="102A43"/>
                 </a:solidFill>
               </a:defRPr>
             </a:pPr>
             <a:r>
-              <a:rPr sz="1350" b="1" i="0">
+              <a:rPr sz="1575" b="1" i="0">
                 <a:solidFill>
                   <a:srgbClr val="102A43"/>
                 </a:solidFill>
               </a:rPr>
-              <a:t>该修正独立于 predecessor / successor 边界选择。</a:t>
+              <a:t>只修正输出 anchor，不替代先前的 boundary-pair selection。</a:t>
             </a:r>
           </a:p>
         </p:txBody>

--- a/presentations/progress_report/Jordan_Sorting_Progress_Report_ZH.pptx
+++ b/presentations/progress_report/Jordan_Sorting_Progress_Report_ZH.pptx
@@ -2202,7 +2202,7 @@
           <a:lstStyle xmlns:a="http://schemas.openxmlformats.org/drawingml/2006/main"/>
           <a:p xmlns:a="http://schemas.openxmlformats.org/drawingml/2006/main">
             <a:r>
-              <a:t>算法先排序 z1、z2、z3，再初始化 partial order 和首批 upper、lower pair。对每个新点，Step 1 找 predecessor boundary pair A_i，Step 2 找 successor boundary pair B_i。Step 3(a) 插入 pair，Step 3(b) 在需要时拆分 sibling list 并转移 ownership；这两步更新 pair family。Step 3(c) 将新点插入维护的顺序。在 increasing iteration 中，Step 3(a) 使用 A_i，Step 3(b) 使用 B_i；decreasing iteration 交换两者的用途。论文直接描述 increasing case，decreasing case 由对称性重构。两个方向共享相同阶段，但局部角色互为镜像。接下来两页解释两处可执行化澄清：几何端点与奇数索引 z1 输出 anchor。</a:t>
+              <a:t>初始化只做一次。Core 仅将前三个点按 x 坐标排序，建立 S₃ 和 upper、lower pair family，不使用 oracle 的排序答案。点的编号和 pair 的端点存储仍保持曲线顺序。从第 4 个点开始，每轮加入一个新点。Step 1、2 查看旧端点 zᵢ₋₁ 在维护列表中的邻居，不是直接取前一个曲线点 zᵢ₋₂，也不是先查新点的排序位置。它们分别找到 predecessor boundary Aᵢ 和 successor boundary Bᵢ。Step 3(a) 插入新 pair；Step 3(b) 在需要时拆分 sibling list 并转移 ownership；Step 3(c) 将新点插入有序列表。Increasing 时，Step 3(a) 使用 Aᵢ，3(b) 使用 Bᵢ。Decreasing 交换这两者的用途，并镜像左右操作；Step 1、2 仍分别返回 Aᵢ、Bᵢ。论文明确描述 increasing 情形；decreasing 来自对称重构，anchor 的细节属于可执行化澄清。这三个类别并不分别对应某个步骤。接下来两页解释 anchor 的澄清。</a:t>
             </a:r>
           </a:p>
           <a:p xmlns:a="http://schemas.openxmlformats.org/drawingml/2006/main">
@@ -2297,7 +2297,7 @@
           <a:lstStyle xmlns:a="http://schemas.openxmlformats.org/drawingml/2006/main"/>
           <a:p xmlns:a="http://schemas.openxmlformats.org/drawingml/2006/main">
             <a:r>
-              <a:t>考虑有效前缀 (3,2,1,4)。Acquired pair P2 按 curve order 存为 (3,2)。若取第二个存储元素 2 为 anchor，得到 (1,2,4,3)，在 axis order 上是错误的。Step 3(c) 需要几何极值，而不是 curve order 中的第二个元素。这里正确的 anchor 是 3，将 4 插在 3 后得到 (1,2,3,4)。Pair 记录沿曲线的遍历顺序，插入则必须遵循 axis order。这是表示方式的问题：curve order 未必能标识 axis order 中所需的一侧。Increasing iteration 使用右端几何极值，decreasing iteration 使用左端几何极值。这属于可执行化澄清，因为 1990 年论文没有以这种形式明确给出规则。缺少这一澄清时，有效输入的例子也会失败。</a:t>
+              <a:t>输入是 (3,2,1,4)。初始化只将前三个值排成 [1,2,3]，对应编号仍是 [z₃,z₂,z₁]。现在插入值为 4 的 z₄。新 upper pair P₄ 的端点是 (1,4)。Step 3(b) 后，它获得 child P₂；P₂ 仍按曲线顺序存为 (3,2)。本次从 1 到 4，因此是 increasing。我们取 child 的几何右端点作为 anchor，也就是要紧接着插入 4 的已有点。若取第二个存储端点 2，会得到 [1,2,4,3]；取几何右端点 3，则得到 [1,2,3,4]。错误顺序只是示意。存储的曲线顺序不等于几何顺序。这属于可执行化澄清，1990 年论文并未以这一具体形式表述该规则。</a:t>
             </a:r>
           </a:p>
           <a:p xmlns:a="http://schemas.openxmlformats.org/drawingml/2006/main">
@@ -27222,10 +27222,10 @@
       </p:grpSpPr>
       <p:sp>
         <p:nvSpPr>
-          <p:cNvPr id="40" name="">
-            <a:extLst xmlns:a="http://schemas.openxmlformats.org/drawingml/2006/main">
-              <a:ext uri="{FF2B5EF4-FFF2-40B4-BE49-F238E27FC236}">
-                <a16:creationId xmlns:a16="http://schemas.microsoft.com/office/drawing/2014/main" id="{69E70D4B-765E-48F5-A7EB-90D46A1D92EF}"/>
+          <p:cNvPr id="45" name="">
+            <a:extLst xmlns:a="http://schemas.openxmlformats.org/drawingml/2006/main">
+              <a:ext uri="{FF2B5EF4-FFF2-40B4-BE49-F238E27FC236}">
+                <a16:creationId xmlns:a16="http://schemas.microsoft.com/office/drawing/2014/main" id="{D3927F38-A182-4D88-8720-9B37F0B04354}"/>
               </a:ext>
             </a:extLst>
           </p:cNvPr>
@@ -27281,7 +27281,7 @@
           <p:cNvPr id="2" name="">
             <a:extLst xmlns:a="http://schemas.openxmlformats.org/drawingml/2006/main">
               <a:ext uri="{FF2B5EF4-FFF2-40B4-BE49-F238E27FC236}">
-                <a16:creationId xmlns:a16="http://schemas.microsoft.com/office/drawing/2014/main" id="{1A2A54F6-5758-4BC2-8B9A-8EAAA4F9931C}"/>
+                <a16:creationId xmlns:a16="http://schemas.microsoft.com/office/drawing/2014/main" id="{0F4A2FBA-7D2A-455E-A16D-89ECCA081E41}"/>
               </a:ext>
             </a:extLst>
           </p:cNvPr>
@@ -27327,7 +27327,7 @@
                   <a:srgbClr val="102A43"/>
                 </a:solidFill>
               </a:rPr>
-              <a:t>Step 1/2/3 控制流与镜像方向</a:t>
+              <a:t>初始化一次，再逐点更新</a:t>
             </a:r>
           </a:p>
         </p:txBody>
@@ -27337,7 +27337,7 @@
           <p:cNvPr id="3" name="">
             <a:extLst xmlns:a="http://schemas.openxmlformats.org/drawingml/2006/main">
               <a:ext uri="{FF2B5EF4-FFF2-40B4-BE49-F238E27FC236}">
-                <a16:creationId xmlns:a16="http://schemas.microsoft.com/office/drawing/2014/main" id="{1C833EB7-46A9-41E4-A147-FB08F5E34A8C}"/>
+                <a16:creationId xmlns:a16="http://schemas.microsoft.com/office/drawing/2014/main" id="{AA7EE3A4-F17E-4C57-8E49-28C0D6598665}"/>
               </a:ext>
             </a:extLst>
           </p:cNvPr>
@@ -27368,7 +27368,7 @@
           <p:cNvPr id="4" name="">
             <a:extLst xmlns:a="http://schemas.openxmlformats.org/drawingml/2006/main">
               <a:ext uri="{FF2B5EF4-FFF2-40B4-BE49-F238E27FC236}">
-                <a16:creationId xmlns:a16="http://schemas.microsoft.com/office/drawing/2014/main" id="{5DF899DA-9EB7-4D3E-8828-35DFF97E6DCD}"/>
+                <a16:creationId xmlns:a16="http://schemas.microsoft.com/office/drawing/2014/main" id="{80711626-2F76-4823-8AF6-0ABFEAEFA149}"/>
               </a:ext>
             </a:extLst>
           </p:cNvPr>
@@ -27399,7 +27399,7 @@
           <p:cNvPr id="5" name="">
             <a:extLst xmlns:a="http://schemas.openxmlformats.org/drawingml/2006/main">
               <a:ext uri="{FF2B5EF4-FFF2-40B4-BE49-F238E27FC236}">
-                <a16:creationId xmlns:a16="http://schemas.microsoft.com/office/drawing/2014/main" id="{1EC6AAA2-3554-49A2-8B4A-1CFFF2A44F0E}"/>
+                <a16:creationId xmlns:a16="http://schemas.microsoft.com/office/drawing/2014/main" id="{7376BE3A-915A-4391-B3FA-11F3106A1059}"/>
               </a:ext>
             </a:extLst>
           </p:cNvPr>
@@ -27455,7 +27455,7 @@
           <p:cNvPr id="6" name="">
             <a:extLst xmlns:a="http://schemas.openxmlformats.org/drawingml/2006/main">
               <a:ext uri="{FF2B5EF4-FFF2-40B4-BE49-F238E27FC236}">
-                <a16:creationId xmlns:a16="http://schemas.microsoft.com/office/drawing/2014/main" id="{3489E690-82F5-42D3-909E-8E27111D66C7}"/>
+                <a16:creationId xmlns:a16="http://schemas.microsoft.com/office/drawing/2014/main" id="{6C697E75-EE8D-4E64-9DE9-4C5DB98FA477}"/>
               </a:ext>
             </a:extLst>
           </p:cNvPr>
@@ -27511,29 +27511,29 @@
           <p:cNvPr id="7" name="">
             <a:extLst xmlns:a="http://schemas.openxmlformats.org/drawingml/2006/main">
               <a:ext uri="{FF2B5EF4-FFF2-40B4-BE49-F238E27FC236}">
-                <a16:creationId xmlns:a16="http://schemas.microsoft.com/office/drawing/2014/main" id="{10001FE6-F2C2-49F4-A681-9FD59D6C55F4}"/>
-              </a:ext>
-            </a:extLst>
-          </p:cNvPr>
-          <p:cNvSpPr>
-            <a:spLocks xmlns:a="http://schemas.openxmlformats.org/drawingml/2006/main" noGrp="1"/>
-          </p:cNvSpPr>
-          <p:nvPr/>
-        </p:nvSpPr>
-        <p:spPr>
-          <a:xfrm xmlns:a="http://schemas.openxmlformats.org/drawingml/2006/main">
-            <a:off x="819150" y="1619250"/>
-            <a:ext cx="1752600" cy="800100"/>
+                <a16:creationId xmlns:a16="http://schemas.microsoft.com/office/drawing/2014/main" id="{167906C2-664D-4733-BCE7-635B744E422A}"/>
+              </a:ext>
+            </a:extLst>
+          </p:cNvPr>
+          <p:cNvSpPr>
+            <a:spLocks xmlns:a="http://schemas.openxmlformats.org/drawingml/2006/main" noGrp="1"/>
+          </p:cNvSpPr>
+          <p:nvPr/>
+        </p:nvSpPr>
+        <p:spPr>
+          <a:xfrm xmlns:a="http://schemas.openxmlformats.org/drawingml/2006/main">
+            <a:off x="723900" y="1314450"/>
+            <a:ext cx="10744200" cy="1504950"/>
           </a:xfrm>
           <a:prstGeom xmlns:a="http://schemas.openxmlformats.org/drawingml/2006/main" prst="roundRect">
             <a:avLst>
-              <a:gd name="adj" fmla="val 9524"/>
+              <a:gd name="adj" fmla="val 5063"/>
             </a:avLst>
           </a:prstGeom>
           <a:solidFill xmlns:a="http://schemas.openxmlformats.org/drawingml/2006/main">
             <a:srgbClr val="EAF1F8"/>
           </a:solidFill>
-          <a:ln xmlns:a="http://schemas.openxmlformats.org/drawingml/2006/main" w="19050">
+          <a:ln xmlns:a="http://schemas.openxmlformats.org/drawingml/2006/main" w="11430">
             <a:solidFill>
               <a:srgbClr val="52606D"/>
             </a:solidFill>
@@ -27546,19 +27546,19 @@
           <p:cNvPr id="8" name="">
             <a:extLst xmlns:a="http://schemas.openxmlformats.org/drawingml/2006/main">
               <a:ext uri="{FF2B5EF4-FFF2-40B4-BE49-F238E27FC236}">
-                <a16:creationId xmlns:a16="http://schemas.microsoft.com/office/drawing/2014/main" id="{F7D4DC5F-2ED7-4523-86B4-032DFAE8DFB7}"/>
-              </a:ext>
-            </a:extLst>
-          </p:cNvPr>
-          <p:cNvSpPr>
-            <a:spLocks xmlns:a="http://schemas.openxmlformats.org/drawingml/2006/main" noGrp="1"/>
-          </p:cNvSpPr>
-          <p:nvPr/>
-        </p:nvSpPr>
-        <p:spPr>
-          <a:xfrm xmlns:a="http://schemas.openxmlformats.org/drawingml/2006/main">
-            <a:off x="895350" y="1714500"/>
-            <a:ext cx="1600200" cy="285750"/>
+                <a16:creationId xmlns:a16="http://schemas.microsoft.com/office/drawing/2014/main" id="{311BD840-0CA0-4974-B06C-902617A9898A}"/>
+              </a:ext>
+            </a:extLst>
+          </p:cNvPr>
+          <p:cNvSpPr>
+            <a:spLocks xmlns:a="http://schemas.openxmlformats.org/drawingml/2006/main" noGrp="1"/>
+          </p:cNvSpPr>
+          <p:nvPr/>
+        </p:nvSpPr>
+        <p:spPr>
+          <a:xfrm xmlns:a="http://schemas.openxmlformats.org/drawingml/2006/main">
+            <a:off x="876300" y="1390650"/>
+            <a:ext cx="10363200" cy="285750"/>
           </a:xfrm>
           <a:prstGeom xmlns:a="http://schemas.openxmlformats.org/drawingml/2006/main" prst="rect">
             <a:avLst/>
@@ -27571,7 +27571,63 @@
         </p:spPr>
         <p:txBody>
           <a:bodyPr xmlns:a="http://schemas.openxmlformats.org/drawingml/2006/main" wrap="square" lIns="38100" tIns="19050" rIns="38100" bIns="19050" anchor="t">
-            <a:normAutofit fontScale="93795"/>
+            <a:normAutofit fontScale="89717"/>
+          </a:bodyPr>
+          <a:lstStyle xmlns:a="http://schemas.openxmlformats.org/drawingml/2006/main"/>
+          <a:p xmlns:a="http://schemas.openxmlformats.org/drawingml/2006/main">
+            <a:pPr algn="l">
+              <a:lnSpc>
+                <a:spcPct val="105000"/>
+              </a:lnSpc>
+              <a:buNone/>
+              <a:defRPr sz="1725" b="1" i="0">
+                <a:solidFill>
+                  <a:srgbClr val="102A43"/>
+                </a:solidFill>
+              </a:defRPr>
+            </a:pPr>
+            <a:r>
+              <a:rPr sz="1725" b="1" i="0">
+                <a:solidFill>
+                  <a:srgbClr val="102A43"/>
+                </a:solidFill>
+              </a:rPr>
+              <a:t>A. 仅初始化一次（n ≥ 3）</a:t>
+            </a:r>
+          </a:p>
+        </p:txBody>
+      </p:sp>
+      <p:sp>
+        <p:nvSpPr>
+          <p:cNvPr id="9" name="">
+            <a:extLst xmlns:a="http://schemas.openxmlformats.org/drawingml/2006/main">
+              <a:ext uri="{FF2B5EF4-FFF2-40B4-BE49-F238E27FC236}">
+                <a16:creationId xmlns:a16="http://schemas.microsoft.com/office/drawing/2014/main" id="{7046BE00-3CC3-433C-A12B-9EB097BE5753}"/>
+              </a:ext>
+            </a:extLst>
+          </p:cNvPr>
+          <p:cNvSpPr>
+            <a:spLocks xmlns:a="http://schemas.openxmlformats.org/drawingml/2006/main" noGrp="1"/>
+          </p:cNvSpPr>
+          <p:nvPr/>
+        </p:nvSpPr>
+        <p:spPr>
+          <a:xfrm xmlns:a="http://schemas.openxmlformats.org/drawingml/2006/main">
+            <a:off x="914400" y="1809750"/>
+            <a:ext cx="2857500" cy="590550"/>
+          </a:xfrm>
+          <a:prstGeom xmlns:a="http://schemas.openxmlformats.org/drawingml/2006/main" prst="rect">
+            <a:avLst/>
+          </a:prstGeom>
+          <a:noFill xmlns:a="http://schemas.openxmlformats.org/drawingml/2006/main"/>
+          <a:ln xmlns:a="http://schemas.openxmlformats.org/drawingml/2006/main" w="0">
+            <a:noFill/>
+            <a:prstDash val="solid"/>
+          </a:ln>
+        </p:spPr>
+        <p:txBody>
+          <a:bodyPr xmlns:a="http://schemas.openxmlformats.org/drawingml/2006/main" wrap="square" lIns="38100" tIns="19050" rIns="38100" bIns="19050" anchor="t">
+            <a:normAutofit fontScale="100000"/>
           </a:bodyPr>
           <a:lstStyle xmlns:a="http://schemas.openxmlformats.org/drawingml/2006/main"/>
           <a:p xmlns:a="http://schemas.openxmlformats.org/drawingml/2006/main">
@@ -27580,107 +27636,485 @@
                 <a:spcPct val="105000"/>
               </a:lnSpc>
               <a:buNone/>
-              <a:defRPr sz="1650" b="1" i="0">
+              <a:defRPr sz="1725" b="0" i="0">
+                <a:solidFill>
+                  <a:srgbClr val="243B53"/>
+                </a:solidFill>
+              </a:defRPr>
+            </a:pPr>
+            <a:r>
+              <a:rPr sz="1725" b="0" i="0">
+                <a:solidFill>
+                  <a:srgbClr val="243B53"/>
+                </a:solidFill>
+              </a:rPr>
+              <a:t>仅将 z₁、z₂、z₃</a:t>
+            </a:r>
+          </a:p>
+          <a:p xmlns:a="http://schemas.openxmlformats.org/drawingml/2006/main">
+            <a:pPr algn="ctr">
+              <a:lnSpc>
+                <a:spcPct val="105000"/>
+              </a:lnSpc>
+              <a:buNone/>
+              <a:defRPr sz="1725" b="0" i="0">
+                <a:solidFill>
+                  <a:srgbClr val="243B53"/>
+                </a:solidFill>
+              </a:defRPr>
+            </a:pPr>
+            <a:r>
+              <a:rPr sz="1725" b="0" i="0">
+                <a:solidFill>
+                  <a:srgbClr val="243B53"/>
+                </a:solidFill>
+              </a:rPr>
+              <a:t>按 x 坐标排序</a:t>
+            </a:r>
+          </a:p>
+        </p:txBody>
+      </p:sp>
+      <p:sp>
+        <p:nvSpPr>
+          <p:cNvPr id="10" name="">
+            <a:extLst xmlns:a="http://schemas.openxmlformats.org/drawingml/2006/main">
+              <a:ext uri="{FF2B5EF4-FFF2-40B4-BE49-F238E27FC236}">
+                <a16:creationId xmlns:a16="http://schemas.microsoft.com/office/drawing/2014/main" id="{D56A38E9-1269-43D1-AE3C-F29E9574FCAE}"/>
+              </a:ext>
+            </a:extLst>
+          </p:cNvPr>
+          <p:cNvSpPr>
+            <a:spLocks xmlns:a="http://schemas.openxmlformats.org/drawingml/2006/main" noGrp="1"/>
+          </p:cNvSpPr>
+          <p:nvPr/>
+        </p:nvSpPr>
+        <p:spPr>
+          <a:xfrm xmlns:a="http://schemas.openxmlformats.org/drawingml/2006/main">
+            <a:off x="3790950" y="1847850"/>
+            <a:ext cx="438150" cy="381000"/>
+          </a:xfrm>
+          <a:prstGeom xmlns:a="http://schemas.openxmlformats.org/drawingml/2006/main" prst="rect">
+            <a:avLst/>
+          </a:prstGeom>
+          <a:noFill xmlns:a="http://schemas.openxmlformats.org/drawingml/2006/main"/>
+          <a:ln xmlns:a="http://schemas.openxmlformats.org/drawingml/2006/main" w="0">
+            <a:noFill/>
+            <a:prstDash val="solid"/>
+          </a:ln>
+        </p:spPr>
+        <p:txBody>
+          <a:bodyPr xmlns:a="http://schemas.openxmlformats.org/drawingml/2006/main" wrap="square" lIns="38100" tIns="19050" rIns="38100" bIns="19050" anchor="t">
+            <a:normAutofit fontScale="95238"/>
+          </a:bodyPr>
+          <a:lstStyle xmlns:a="http://schemas.openxmlformats.org/drawingml/2006/main"/>
+          <a:p xmlns:a="http://schemas.openxmlformats.org/drawingml/2006/main">
+            <a:pPr algn="ctr">
+              <a:lnSpc>
+                <a:spcPct val="105000"/>
+              </a:lnSpc>
+              <a:buNone/>
+              <a:defRPr sz="2250" b="0" i="0">
+                <a:solidFill>
+                  <a:srgbClr val="2A9D8F"/>
+                </a:solidFill>
+              </a:defRPr>
+            </a:pPr>
+            <a:r>
+              <a:rPr sz="2250" b="0" i="0">
+                <a:solidFill>
+                  <a:srgbClr val="2A9D8F"/>
+                </a:solidFill>
+              </a:rPr>
+              <a:t>→</a:t>
+            </a:r>
+          </a:p>
+        </p:txBody>
+      </p:sp>
+      <p:sp>
+        <p:nvSpPr>
+          <p:cNvPr id="11" name="">
+            <a:extLst xmlns:a="http://schemas.openxmlformats.org/drawingml/2006/main">
+              <a:ext uri="{FF2B5EF4-FFF2-40B4-BE49-F238E27FC236}">
+                <a16:creationId xmlns:a16="http://schemas.microsoft.com/office/drawing/2014/main" id="{BD78C6F4-B0D6-4C5D-A37C-087EFEC0F965}"/>
+              </a:ext>
+            </a:extLst>
+          </p:cNvPr>
+          <p:cNvSpPr>
+            <a:spLocks xmlns:a="http://schemas.openxmlformats.org/drawingml/2006/main" noGrp="1"/>
+          </p:cNvSpPr>
+          <p:nvPr/>
+        </p:nvSpPr>
+        <p:spPr>
+          <a:xfrm xmlns:a="http://schemas.openxmlformats.org/drawingml/2006/main">
+            <a:off x="4305300" y="1847850"/>
+            <a:ext cx="2952750" cy="400050"/>
+          </a:xfrm>
+          <a:prstGeom xmlns:a="http://schemas.openxmlformats.org/drawingml/2006/main" prst="rect">
+            <a:avLst/>
+          </a:prstGeom>
+          <a:noFill xmlns:a="http://schemas.openxmlformats.org/drawingml/2006/main"/>
+          <a:ln xmlns:a="http://schemas.openxmlformats.org/drawingml/2006/main" w="0">
+            <a:noFill/>
+            <a:prstDash val="solid"/>
+          </a:ln>
+        </p:spPr>
+        <p:txBody>
+          <a:bodyPr xmlns:a="http://schemas.openxmlformats.org/drawingml/2006/main" wrap="square" lIns="38100" tIns="19050" rIns="38100" bIns="19050" anchor="t">
+            <a:normAutofit fontScale="100000"/>
+          </a:bodyPr>
+          <a:lstStyle xmlns:a="http://schemas.openxmlformats.org/drawingml/2006/main"/>
+          <a:p xmlns:a="http://schemas.openxmlformats.org/drawingml/2006/main">
+            <a:pPr algn="ctr">
+              <a:lnSpc>
+                <a:spcPct val="105000"/>
+              </a:lnSpc>
+              <a:buNone/>
+              <a:defRPr sz="1800" b="1" i="0">
+                <a:solidFill>
+                  <a:srgbClr val="2A9D8F"/>
+                </a:solidFill>
+              </a:defRPr>
+            </a:pPr>
+            <a:r>
+              <a:rPr sz="1800" b="1" i="0">
+                <a:solidFill>
+                  <a:srgbClr val="2A9D8F"/>
+                </a:solidFill>
+              </a:rPr>
+              <a:t>初始有序列表 S₃</a:t>
+            </a:r>
+          </a:p>
+        </p:txBody>
+      </p:sp>
+      <p:sp>
+        <p:nvSpPr>
+          <p:cNvPr id="12" name="">
+            <a:extLst xmlns:a="http://schemas.openxmlformats.org/drawingml/2006/main">
+              <a:ext uri="{FF2B5EF4-FFF2-40B4-BE49-F238E27FC236}">
+                <a16:creationId xmlns:a16="http://schemas.microsoft.com/office/drawing/2014/main" id="{AE9B13BF-3957-4454-8E1D-623C631D237C}"/>
+              </a:ext>
+            </a:extLst>
+          </p:cNvPr>
+          <p:cNvSpPr>
+            <a:spLocks xmlns:a="http://schemas.openxmlformats.org/drawingml/2006/main" noGrp="1"/>
+          </p:cNvSpPr>
+          <p:nvPr/>
+        </p:nvSpPr>
+        <p:spPr>
+          <a:xfrm xmlns:a="http://schemas.openxmlformats.org/drawingml/2006/main">
+            <a:off x="7296150" y="1847850"/>
+            <a:ext cx="438150" cy="381000"/>
+          </a:xfrm>
+          <a:prstGeom xmlns:a="http://schemas.openxmlformats.org/drawingml/2006/main" prst="rect">
+            <a:avLst/>
+          </a:prstGeom>
+          <a:noFill xmlns:a="http://schemas.openxmlformats.org/drawingml/2006/main"/>
+          <a:ln xmlns:a="http://schemas.openxmlformats.org/drawingml/2006/main" w="0">
+            <a:noFill/>
+            <a:prstDash val="solid"/>
+          </a:ln>
+        </p:spPr>
+        <p:txBody>
+          <a:bodyPr xmlns:a="http://schemas.openxmlformats.org/drawingml/2006/main" wrap="square" lIns="38100" tIns="19050" rIns="38100" bIns="19050" anchor="t">
+            <a:normAutofit fontScale="95238"/>
+          </a:bodyPr>
+          <a:lstStyle xmlns:a="http://schemas.openxmlformats.org/drawingml/2006/main"/>
+          <a:p xmlns:a="http://schemas.openxmlformats.org/drawingml/2006/main">
+            <a:pPr algn="ctr">
+              <a:lnSpc>
+                <a:spcPct val="105000"/>
+              </a:lnSpc>
+              <a:buNone/>
+              <a:defRPr sz="2250" b="0" i="0">
+                <a:solidFill>
+                  <a:srgbClr val="2A9D8F"/>
+                </a:solidFill>
+              </a:defRPr>
+            </a:pPr>
+            <a:r>
+              <a:rPr sz="2250" b="0" i="0">
+                <a:solidFill>
+                  <a:srgbClr val="2A9D8F"/>
+                </a:solidFill>
+              </a:rPr>
+              <a:t>→</a:t>
+            </a:r>
+          </a:p>
+        </p:txBody>
+      </p:sp>
+      <p:sp>
+        <p:nvSpPr>
+          <p:cNvPr id="13" name="">
+            <a:extLst xmlns:a="http://schemas.openxmlformats.org/drawingml/2006/main">
+              <a:ext uri="{FF2B5EF4-FFF2-40B4-BE49-F238E27FC236}">
+                <a16:creationId xmlns:a16="http://schemas.microsoft.com/office/drawing/2014/main" id="{AB83083F-F94B-4B8D-A172-2D9441D1464D}"/>
+              </a:ext>
+            </a:extLst>
+          </p:cNvPr>
+          <p:cNvSpPr>
+            <a:spLocks xmlns:a="http://schemas.openxmlformats.org/drawingml/2006/main" noGrp="1"/>
+          </p:cNvSpPr>
+          <p:nvPr/>
+        </p:nvSpPr>
+        <p:spPr>
+          <a:xfrm xmlns:a="http://schemas.openxmlformats.org/drawingml/2006/main">
+            <a:off x="7829550" y="1771650"/>
+            <a:ext cx="3429000" cy="609600"/>
+          </a:xfrm>
+          <a:prstGeom xmlns:a="http://schemas.openxmlformats.org/drawingml/2006/main" prst="rect">
+            <a:avLst/>
+          </a:prstGeom>
+          <a:noFill xmlns:a="http://schemas.openxmlformats.org/drawingml/2006/main"/>
+          <a:ln xmlns:a="http://schemas.openxmlformats.org/drawingml/2006/main" w="0">
+            <a:noFill/>
+            <a:prstDash val="solid"/>
+          </a:ln>
+        </p:spPr>
+        <p:txBody>
+          <a:bodyPr xmlns:a="http://schemas.openxmlformats.org/drawingml/2006/main" wrap="square" lIns="38100" tIns="19050" rIns="38100" bIns="19050" anchor="t">
+            <a:normAutofit fontScale="100000"/>
+          </a:bodyPr>
+          <a:lstStyle xmlns:a="http://schemas.openxmlformats.org/drawingml/2006/main"/>
+          <a:p xmlns:a="http://schemas.openxmlformats.org/drawingml/2006/main">
+            <a:pPr algn="ctr">
+              <a:lnSpc>
+                <a:spcPct val="105000"/>
+              </a:lnSpc>
+              <a:buNone/>
+              <a:defRPr sz="1650" b="0" i="0">
+                <a:solidFill>
+                  <a:srgbClr val="243B53"/>
+                </a:solidFill>
+              </a:defRPr>
+            </a:pPr>
+            <a:r>
+              <a:rPr sz="1650" b="0" i="0">
+                <a:solidFill>
+                  <a:srgbClr val="243B53"/>
+                </a:solidFill>
+              </a:rPr>
+              <a:t>Upper/lower pair family</a:t>
+            </a:r>
+          </a:p>
+          <a:p xmlns:a="http://schemas.openxmlformats.org/drawingml/2006/main">
+            <a:pPr algn="ctr">
+              <a:lnSpc>
+                <a:spcPct val="105000"/>
+              </a:lnSpc>
+              <a:buNone/>
+              <a:defRPr sz="1650" b="0" i="0">
+                <a:solidFill>
+                  <a:srgbClr val="243B53"/>
+                </a:solidFill>
+              </a:defRPr>
+            </a:pPr>
+            <a:r>
+              <a:rPr sz="1650" b="0" i="0">
+                <a:solidFill>
+                  <a:srgbClr val="243B53"/>
+                </a:solidFill>
+              </a:rPr>
+              <a:t>P₂、P₃ 与 dummy roots</a:t>
+            </a:r>
+          </a:p>
+        </p:txBody>
+      </p:sp>
+      <p:sp>
+        <p:nvSpPr>
+          <p:cNvPr id="14" name="">
+            <a:extLst xmlns:a="http://schemas.openxmlformats.org/drawingml/2006/main">
+              <a:ext uri="{FF2B5EF4-FFF2-40B4-BE49-F238E27FC236}">
+                <a16:creationId xmlns:a16="http://schemas.microsoft.com/office/drawing/2014/main" id="{E25AE998-4FC3-4212-B157-78719B551541}"/>
+              </a:ext>
+            </a:extLst>
+          </p:cNvPr>
+          <p:cNvSpPr>
+            <a:spLocks xmlns:a="http://schemas.openxmlformats.org/drawingml/2006/main" noGrp="1"/>
+          </p:cNvSpPr>
+          <p:nvPr/>
+        </p:nvSpPr>
+        <p:spPr>
+          <a:xfrm xmlns:a="http://schemas.openxmlformats.org/drawingml/2006/main">
+            <a:off x="895350" y="2457450"/>
+            <a:ext cx="10401300" cy="266700"/>
+          </a:xfrm>
+          <a:prstGeom xmlns:a="http://schemas.openxmlformats.org/drawingml/2006/main" prst="rect">
+            <a:avLst/>
+          </a:prstGeom>
+          <a:noFill xmlns:a="http://schemas.openxmlformats.org/drawingml/2006/main"/>
+          <a:ln xmlns:a="http://schemas.openxmlformats.org/drawingml/2006/main" w="0">
+            <a:noFill/>
+            <a:prstDash val="solid"/>
+          </a:ln>
+        </p:spPr>
+        <p:txBody>
+          <a:bodyPr xmlns:a="http://schemas.openxmlformats.org/drawingml/2006/main" wrap="square" lIns="38100" tIns="19050" rIns="38100" bIns="19050" anchor="t">
+            <a:normAutofit fontScale="95238"/>
+          </a:bodyPr>
+          <a:lstStyle xmlns:a="http://schemas.openxmlformats.org/drawingml/2006/main"/>
+          <a:p xmlns:a="http://schemas.openxmlformats.org/drawingml/2006/main">
+            <a:pPr algn="ctr">
+              <a:lnSpc>
+                <a:spcPct val="105000"/>
+              </a:lnSpc>
+              <a:buNone/>
+              <a:defRPr sz="1500" b="0" i="0">
+                <a:solidFill>
+                  <a:srgbClr val="52606D"/>
+                </a:solidFill>
+              </a:defRPr>
+            </a:pPr>
+            <a:r>
+              <a:rPr sz="1500" b="0" i="0">
+                <a:solidFill>
+                  <a:srgbClr val="52606D"/>
+                </a:solidFill>
+              </a:rPr>
+              <a:t>Core 自行局部初始化，不使用 oracle 答案。点编号与 pair 端点存储保持曲线顺序。</a:t>
+            </a:r>
+          </a:p>
+        </p:txBody>
+      </p:sp>
+      <p:sp>
+        <p:nvSpPr>
+          <p:cNvPr id="15" name="">
+            <a:extLst xmlns:a="http://schemas.openxmlformats.org/drawingml/2006/main">
+              <a:ext uri="{FF2B5EF4-FFF2-40B4-BE49-F238E27FC236}">
+                <a16:creationId xmlns:a16="http://schemas.microsoft.com/office/drawing/2014/main" id="{E95BD6DB-8F3E-4FFF-9585-0BD379E32829}"/>
+              </a:ext>
+            </a:extLst>
+          </p:cNvPr>
+          <p:cNvSpPr>
+            <a:spLocks xmlns:a="http://schemas.openxmlformats.org/drawingml/2006/main" noGrp="1"/>
+          </p:cNvSpPr>
+          <p:nvPr/>
+        </p:nvSpPr>
+        <p:spPr>
+          <a:xfrm xmlns:a="http://schemas.openxmlformats.org/drawingml/2006/main">
+            <a:off x="723900" y="2971800"/>
+            <a:ext cx="10744200" cy="304800"/>
+          </a:xfrm>
+          <a:prstGeom xmlns:a="http://schemas.openxmlformats.org/drawingml/2006/main" prst="rect">
+            <a:avLst/>
+          </a:prstGeom>
+          <a:noFill xmlns:a="http://schemas.openxmlformats.org/drawingml/2006/main"/>
+          <a:ln xmlns:a="http://schemas.openxmlformats.org/drawingml/2006/main" w="0">
+            <a:noFill/>
+            <a:prstDash val="solid"/>
+          </a:ln>
+        </p:spPr>
+        <p:txBody>
+          <a:bodyPr xmlns:a="http://schemas.openxmlformats.org/drawingml/2006/main" wrap="square" lIns="38100" tIns="19050" rIns="38100" bIns="19050" anchor="t">
+            <a:normAutofit fontScale="92593"/>
+          </a:bodyPr>
+          <a:lstStyle xmlns:a="http://schemas.openxmlformats.org/drawingml/2006/main"/>
+          <a:p xmlns:a="http://schemas.openxmlformats.org/drawingml/2006/main">
+            <a:pPr algn="l">
+              <a:lnSpc>
+                <a:spcPct val="105000"/>
+              </a:lnSpc>
+              <a:buNone/>
+              <a:defRPr sz="1800" b="1" i="0">
+                <a:solidFill>
+                  <a:srgbClr val="2A9D8F"/>
+                </a:solidFill>
+              </a:defRPr>
+            </a:pPr>
+            <a:r>
+              <a:rPr sz="1800" b="1" i="0">
+                <a:solidFill>
+                  <a:srgbClr val="2A9D8F"/>
+                </a:solidFill>
+              </a:rPr>
+              <a:t>B. 对 i = 4, …, n：每轮处理一个新点</a:t>
+            </a:r>
+          </a:p>
+        </p:txBody>
+      </p:sp>
+      <p:sp>
+        <p:nvSpPr>
+          <p:cNvPr id="16" name="">
+            <a:extLst xmlns:a="http://schemas.openxmlformats.org/drawingml/2006/main">
+              <a:ext uri="{FF2B5EF4-FFF2-40B4-BE49-F238E27FC236}">
+                <a16:creationId xmlns:a16="http://schemas.microsoft.com/office/drawing/2014/main" id="{70A7FA74-8C71-462D-8844-36EF52B92648}"/>
+              </a:ext>
+            </a:extLst>
+          </p:cNvPr>
+          <p:cNvSpPr>
+            <a:spLocks xmlns:a="http://schemas.openxmlformats.org/drawingml/2006/main" noGrp="1"/>
+          </p:cNvSpPr>
+          <p:nvPr/>
+        </p:nvSpPr>
+        <p:spPr>
+          <a:xfrm xmlns:a="http://schemas.openxmlformats.org/drawingml/2006/main">
+            <a:off x="723900" y="3333750"/>
+            <a:ext cx="10744200" cy="304800"/>
+          </a:xfrm>
+          <a:prstGeom xmlns:a="http://schemas.openxmlformats.org/drawingml/2006/main" prst="rect">
+            <a:avLst/>
+          </a:prstGeom>
+          <a:noFill xmlns:a="http://schemas.openxmlformats.org/drawingml/2006/main"/>
+          <a:ln xmlns:a="http://schemas.openxmlformats.org/drawingml/2006/main" w="0">
+            <a:noFill/>
+            <a:prstDash val="solid"/>
+          </a:ln>
+        </p:spPr>
+        <p:txBody>
+          <a:bodyPr xmlns:a="http://schemas.openxmlformats.org/drawingml/2006/main" wrap="square" lIns="38100" tIns="19050" rIns="38100" bIns="19050" anchor="t">
+            <a:normAutofit fontScale="96618"/>
+          </a:bodyPr>
+          <a:lstStyle xmlns:a="http://schemas.openxmlformats.org/drawingml/2006/main"/>
+          <a:p xmlns:a="http://schemas.openxmlformats.org/drawingml/2006/main">
+            <a:pPr algn="ctr">
+              <a:lnSpc>
+                <a:spcPct val="105000"/>
+              </a:lnSpc>
+              <a:buNone/>
+              <a:defRPr sz="1725" b="1" i="0">
                 <a:solidFill>
                   <a:srgbClr val="102A43"/>
                 </a:solidFill>
               </a:defRPr>
             </a:pPr>
             <a:r>
-              <a:rPr sz="1650" b="1" i="0">
+              <a:rPr sz="1725" b="1" i="0">
                 <a:solidFill>
                   <a:srgbClr val="102A43"/>
                 </a:solidFill>
               </a:rPr>
-              <a:t>初始化</a:t>
-            </a:r>
-          </a:p>
-        </p:txBody>
-      </p:sp>
-      <p:sp>
-        <p:nvSpPr>
-          <p:cNvPr id="9" name="">
-            <a:extLst xmlns:a="http://schemas.openxmlformats.org/drawingml/2006/main">
-              <a:ext uri="{FF2B5EF4-FFF2-40B4-BE49-F238E27FC236}">
-                <a16:creationId xmlns:a16="http://schemas.microsoft.com/office/drawing/2014/main" id="{A9D7B850-B5AC-4327-8D2E-4CB284441822}"/>
-              </a:ext>
-            </a:extLst>
-          </p:cNvPr>
-          <p:cNvSpPr>
-            <a:spLocks xmlns:a="http://schemas.openxmlformats.org/drawingml/2006/main" noGrp="1"/>
-          </p:cNvSpPr>
-          <p:nvPr/>
-        </p:nvSpPr>
-        <p:spPr>
-          <a:xfrm xmlns:a="http://schemas.openxmlformats.org/drawingml/2006/main">
-            <a:off x="914400" y="2019300"/>
-            <a:ext cx="1562100" cy="342900"/>
-          </a:xfrm>
-          <a:prstGeom xmlns:a="http://schemas.openxmlformats.org/drawingml/2006/main" prst="rect">
-            <a:avLst/>
-          </a:prstGeom>
-          <a:noFill xmlns:a="http://schemas.openxmlformats.org/drawingml/2006/main"/>
-          <a:ln xmlns:a="http://schemas.openxmlformats.org/drawingml/2006/main" w="0">
-            <a:noFill/>
-            <a:prstDash val="solid"/>
-          </a:ln>
-        </p:spPr>
-        <p:txBody>
-          <a:bodyPr xmlns:a="http://schemas.openxmlformats.org/drawingml/2006/main" wrap="square" lIns="38100" tIns="19050" rIns="38100" bIns="19050" anchor="ctr">
-            <a:normAutofit fontScale="100000"/>
-          </a:bodyPr>
-          <a:lstStyle xmlns:a="http://schemas.openxmlformats.org/drawingml/2006/main"/>
-          <a:p xmlns:a="http://schemas.openxmlformats.org/drawingml/2006/main">
-            <a:pPr algn="ctr">
-              <a:lnSpc>
-                <a:spcPct val="105000"/>
-              </a:lnSpc>
-              <a:buNone/>
-              <a:defRPr sz="1200" b="0" i="0">
-                <a:solidFill>
-                  <a:srgbClr val="243B53"/>
-                </a:solidFill>
-              </a:defRPr>
-            </a:pPr>
-            <a:r>
-              <a:rPr sz="1200" b="0" i="0">
-                <a:solidFill>
-                  <a:srgbClr val="243B53"/>
-                </a:solidFill>
-              </a:rPr>
-              <a:t>排序 z₁、z₂、z₃</a:t>
-            </a:r>
-          </a:p>
-        </p:txBody>
-      </p:sp>
-      <p:sp>
-        <p:nvSpPr>
-          <p:cNvPr id="10" name="">
-            <a:extLst xmlns:a="http://schemas.openxmlformats.org/drawingml/2006/main">
-              <a:ext uri="{FF2B5EF4-FFF2-40B4-BE49-F238E27FC236}">
-                <a16:creationId xmlns:a16="http://schemas.microsoft.com/office/drawing/2014/main" id="{74F1CD79-FA11-4118-B6DB-FCD655313547}"/>
-              </a:ext>
-            </a:extLst>
-          </p:cNvPr>
-          <p:cNvSpPr>
-            <a:spLocks xmlns:a="http://schemas.openxmlformats.org/drawingml/2006/main" noGrp="1"/>
-          </p:cNvSpPr>
-          <p:nvPr/>
-        </p:nvSpPr>
-        <p:spPr>
-          <a:xfrm xmlns:a="http://schemas.openxmlformats.org/drawingml/2006/main">
-            <a:off x="2952750" y="1619250"/>
-            <a:ext cx="1752600" cy="800100"/>
+              <a:t>Sᵢ₋₁ + 新点 zᵢ → 执行下面一轮更新 → Sᵢ</a:t>
+            </a:r>
+          </a:p>
+        </p:txBody>
+      </p:sp>
+      <p:sp>
+        <p:nvSpPr>
+          <p:cNvPr id="17" name="">
+            <a:extLst xmlns:a="http://schemas.openxmlformats.org/drawingml/2006/main">
+              <a:ext uri="{FF2B5EF4-FFF2-40B4-BE49-F238E27FC236}">
+                <a16:creationId xmlns:a16="http://schemas.microsoft.com/office/drawing/2014/main" id="{97C16C04-A69D-46D9-A649-E4B811AFDF7D}"/>
+              </a:ext>
+            </a:extLst>
+          </p:cNvPr>
+          <p:cNvSpPr>
+            <a:spLocks xmlns:a="http://schemas.openxmlformats.org/drawingml/2006/main" noGrp="1"/>
+          </p:cNvSpPr>
+          <p:nvPr/>
+        </p:nvSpPr>
+        <p:spPr>
+          <a:xfrm xmlns:a="http://schemas.openxmlformats.org/drawingml/2006/main">
+            <a:off x="723900" y="3790950"/>
+            <a:ext cx="1981200" cy="1085850"/>
           </a:xfrm>
           <a:prstGeom xmlns:a="http://schemas.openxmlformats.org/drawingml/2006/main" prst="roundRect">
             <a:avLst>
-              <a:gd name="adj" fmla="val 9524"/>
+              <a:gd name="adj" fmla="val 5263"/>
             </a:avLst>
           </a:prstGeom>
           <a:solidFill xmlns:a="http://schemas.openxmlformats.org/drawingml/2006/main">
             <a:srgbClr val="EAF1F8"/>
           </a:solidFill>
-          <a:ln xmlns:a="http://schemas.openxmlformats.org/drawingml/2006/main" w="19050">
+          <a:ln xmlns:a="http://schemas.openxmlformats.org/drawingml/2006/main" w="11430">
             <a:solidFill>
               <a:srgbClr val="52606D"/>
             </a:solidFill>
@@ -27690,22 +28124,22 @@
       </p:sp>
       <p:sp>
         <p:nvSpPr>
-          <p:cNvPr id="11" name="">
-            <a:extLst xmlns:a="http://schemas.openxmlformats.org/drawingml/2006/main">
-              <a:ext uri="{FF2B5EF4-FFF2-40B4-BE49-F238E27FC236}">
-                <a16:creationId xmlns:a16="http://schemas.microsoft.com/office/drawing/2014/main" id="{37254231-658D-40EE-BEFF-61D0AB80F85A}"/>
-              </a:ext>
-            </a:extLst>
-          </p:cNvPr>
-          <p:cNvSpPr>
-            <a:spLocks xmlns:a="http://schemas.openxmlformats.org/drawingml/2006/main" noGrp="1"/>
-          </p:cNvSpPr>
-          <p:nvPr/>
-        </p:nvSpPr>
-        <p:spPr>
-          <a:xfrm xmlns:a="http://schemas.openxmlformats.org/drawingml/2006/main">
-            <a:off x="3028950" y="1714500"/>
-            <a:ext cx="1600200" cy="285750"/>
+          <p:cNvPr id="18" name="">
+            <a:extLst xmlns:a="http://schemas.openxmlformats.org/drawingml/2006/main">
+              <a:ext uri="{FF2B5EF4-FFF2-40B4-BE49-F238E27FC236}">
+                <a16:creationId xmlns:a16="http://schemas.microsoft.com/office/drawing/2014/main" id="{5D692A13-DD32-44F6-898E-C6C588D11798}"/>
+              </a:ext>
+            </a:extLst>
+          </p:cNvPr>
+          <p:cNvSpPr>
+            <a:spLocks xmlns:a="http://schemas.openxmlformats.org/drawingml/2006/main" noGrp="1"/>
+          </p:cNvSpPr>
+          <p:nvPr/>
+        </p:nvSpPr>
+        <p:spPr>
+          <a:xfrm xmlns:a="http://schemas.openxmlformats.org/drawingml/2006/main">
+            <a:off x="800100" y="3867150"/>
+            <a:ext cx="1828800" cy="285750"/>
           </a:xfrm>
           <a:prstGeom xmlns:a="http://schemas.openxmlformats.org/drawingml/2006/main" prst="rect">
             <a:avLst/>
@@ -27746,22 +28180,22 @@
       </p:sp>
       <p:sp>
         <p:nvSpPr>
-          <p:cNvPr id="12" name="">
-            <a:extLst xmlns:a="http://schemas.openxmlformats.org/drawingml/2006/main">
-              <a:ext uri="{FF2B5EF4-FFF2-40B4-BE49-F238E27FC236}">
-                <a16:creationId xmlns:a16="http://schemas.microsoft.com/office/drawing/2014/main" id="{CB667A1A-A2DC-4163-82DE-B532DE4FEA39}"/>
-              </a:ext>
-            </a:extLst>
-          </p:cNvPr>
-          <p:cNvSpPr>
-            <a:spLocks xmlns:a="http://schemas.openxmlformats.org/drawingml/2006/main" noGrp="1"/>
-          </p:cNvSpPr>
-          <p:nvPr/>
-        </p:nvSpPr>
-        <p:spPr>
-          <a:xfrm xmlns:a="http://schemas.openxmlformats.org/drawingml/2006/main">
-            <a:off x="3048000" y="2019300"/>
-            <a:ext cx="1562100" cy="342900"/>
+          <p:cNvPr id="19" name="">
+            <a:extLst xmlns:a="http://schemas.openxmlformats.org/drawingml/2006/main">
+              <a:ext uri="{FF2B5EF4-FFF2-40B4-BE49-F238E27FC236}">
+                <a16:creationId xmlns:a16="http://schemas.microsoft.com/office/drawing/2014/main" id="{4DF4B48D-6AA6-45EE-822F-6CBB9877DE89}"/>
+              </a:ext>
+            </a:extLst>
+          </p:cNvPr>
+          <p:cNvSpPr>
+            <a:spLocks xmlns:a="http://schemas.openxmlformats.org/drawingml/2006/main" noGrp="1"/>
+          </p:cNvSpPr>
+          <p:nvPr/>
+        </p:nvSpPr>
+        <p:spPr>
+          <a:xfrm xmlns:a="http://schemas.openxmlformats.org/drawingml/2006/main">
+            <a:off x="790575" y="4200525"/>
+            <a:ext cx="1847850" cy="628650"/>
           </a:xfrm>
           <a:prstGeom xmlns:a="http://schemas.openxmlformats.org/drawingml/2006/main" prst="rect">
             <a:avLst/>
@@ -27783,51 +28217,72 @@
                 <a:spcPct val="105000"/>
               </a:lnSpc>
               <a:buNone/>
-              <a:defRPr sz="1200" b="0" i="0">
+              <a:defRPr sz="1425" b="0" i="0">
                 <a:solidFill>
                   <a:srgbClr val="243B53"/>
                 </a:solidFill>
               </a:defRPr>
             </a:pPr>
             <a:r>
-              <a:rPr sz="1200" b="0" i="0">
+              <a:rPr sz="1425" b="0" i="0">
                 <a:solidFill>
                   <a:srgbClr val="243B53"/>
                 </a:solidFill>
               </a:rPr>
-              <a:t>predecessor 侧边界</a:t>
-            </a:r>
-          </a:p>
-        </p:txBody>
-      </p:sp>
-      <p:sp>
-        <p:nvSpPr>
-          <p:cNvPr id="13" name="">
-            <a:extLst xmlns:a="http://schemas.openxmlformats.org/drawingml/2006/main">
-              <a:ext uri="{FF2B5EF4-FFF2-40B4-BE49-F238E27FC236}">
-                <a16:creationId xmlns:a16="http://schemas.microsoft.com/office/drawing/2014/main" id="{7DC98B44-3D75-4AB8-9F8C-CCE48A099DCD}"/>
-              </a:ext>
-            </a:extLst>
-          </p:cNvPr>
-          <p:cNvSpPr>
-            <a:spLocks xmlns:a="http://schemas.openxmlformats.org/drawingml/2006/main" noGrp="1"/>
-          </p:cNvSpPr>
-          <p:nvPr/>
-        </p:nvSpPr>
-        <p:spPr>
-          <a:xfrm xmlns:a="http://schemas.openxmlformats.org/drawingml/2006/main">
-            <a:off x="5086350" y="1619250"/>
-            <a:ext cx="1752600" cy="800100"/>
+              <a:t>找 predecessor 侧</a:t>
+            </a:r>
+          </a:p>
+          <a:p xmlns:a="http://schemas.openxmlformats.org/drawingml/2006/main">
+            <a:pPr algn="ctr">
+              <a:lnSpc>
+                <a:spcPct val="105000"/>
+              </a:lnSpc>
+              <a:buNone/>
+              <a:defRPr sz="1425" b="0" i="0">
+                <a:solidFill>
+                  <a:srgbClr val="243B53"/>
+                </a:solidFill>
+              </a:defRPr>
+            </a:pPr>
+            <a:r>
+              <a:rPr sz="1425" b="0" i="0">
+                <a:solidFill>
+                  <a:srgbClr val="243B53"/>
+                </a:solidFill>
+              </a:rPr>
+              <a:t>boundary Aᵢ</a:t>
+            </a:r>
+          </a:p>
+        </p:txBody>
+      </p:sp>
+      <p:sp>
+        <p:nvSpPr>
+          <p:cNvPr id="20" name="">
+            <a:extLst xmlns:a="http://schemas.openxmlformats.org/drawingml/2006/main">
+              <a:ext uri="{FF2B5EF4-FFF2-40B4-BE49-F238E27FC236}">
+                <a16:creationId xmlns:a16="http://schemas.microsoft.com/office/drawing/2014/main" id="{474164AF-EE89-45D1-8E09-1815B366EF2A}"/>
+              </a:ext>
+            </a:extLst>
+          </p:cNvPr>
+          <p:cNvSpPr>
+            <a:spLocks xmlns:a="http://schemas.openxmlformats.org/drawingml/2006/main" noGrp="1"/>
+          </p:cNvSpPr>
+          <p:nvPr/>
+        </p:nvSpPr>
+        <p:spPr>
+          <a:xfrm xmlns:a="http://schemas.openxmlformats.org/drawingml/2006/main">
+            <a:off x="2914650" y="3790950"/>
+            <a:ext cx="1981200" cy="1085850"/>
           </a:xfrm>
           <a:prstGeom xmlns:a="http://schemas.openxmlformats.org/drawingml/2006/main" prst="roundRect">
             <a:avLst>
-              <a:gd name="adj" fmla="val 9524"/>
+              <a:gd name="adj" fmla="val 5263"/>
             </a:avLst>
           </a:prstGeom>
           <a:solidFill xmlns:a="http://schemas.openxmlformats.org/drawingml/2006/main">
             <a:srgbClr val="EAF1F8"/>
           </a:solidFill>
-          <a:ln xmlns:a="http://schemas.openxmlformats.org/drawingml/2006/main" w="19050">
+          <a:ln xmlns:a="http://schemas.openxmlformats.org/drawingml/2006/main" w="11430">
             <a:solidFill>
               <a:srgbClr val="52606D"/>
             </a:solidFill>
@@ -27837,22 +28292,22 @@
       </p:sp>
       <p:sp>
         <p:nvSpPr>
-          <p:cNvPr id="14" name="">
-            <a:extLst xmlns:a="http://schemas.openxmlformats.org/drawingml/2006/main">
-              <a:ext uri="{FF2B5EF4-FFF2-40B4-BE49-F238E27FC236}">
-                <a16:creationId xmlns:a16="http://schemas.microsoft.com/office/drawing/2014/main" id="{9CC581FE-077D-4F1C-AC2C-CF264DD4FDCB}"/>
-              </a:ext>
-            </a:extLst>
-          </p:cNvPr>
-          <p:cNvSpPr>
-            <a:spLocks xmlns:a="http://schemas.openxmlformats.org/drawingml/2006/main" noGrp="1"/>
-          </p:cNvSpPr>
-          <p:nvPr/>
-        </p:nvSpPr>
-        <p:spPr>
-          <a:xfrm xmlns:a="http://schemas.openxmlformats.org/drawingml/2006/main">
-            <a:off x="5162550" y="1714500"/>
-            <a:ext cx="1600200" cy="285750"/>
+          <p:cNvPr id="21" name="">
+            <a:extLst xmlns:a="http://schemas.openxmlformats.org/drawingml/2006/main">
+              <a:ext uri="{FF2B5EF4-FFF2-40B4-BE49-F238E27FC236}">
+                <a16:creationId xmlns:a16="http://schemas.microsoft.com/office/drawing/2014/main" id="{3B2B8E92-2DF0-4EEC-A434-C692E7C1A1B8}"/>
+              </a:ext>
+            </a:extLst>
+          </p:cNvPr>
+          <p:cNvSpPr>
+            <a:spLocks xmlns:a="http://schemas.openxmlformats.org/drawingml/2006/main" noGrp="1"/>
+          </p:cNvSpPr>
+          <p:nvPr/>
+        </p:nvSpPr>
+        <p:spPr>
+          <a:xfrm xmlns:a="http://schemas.openxmlformats.org/drawingml/2006/main">
+            <a:off x="2990850" y="3867150"/>
+            <a:ext cx="1828800" cy="285750"/>
           </a:xfrm>
           <a:prstGeom xmlns:a="http://schemas.openxmlformats.org/drawingml/2006/main" prst="rect">
             <a:avLst/>
@@ -27893,22 +28348,22 @@
       </p:sp>
       <p:sp>
         <p:nvSpPr>
-          <p:cNvPr id="15" name="">
-            <a:extLst xmlns:a="http://schemas.openxmlformats.org/drawingml/2006/main">
-              <a:ext uri="{FF2B5EF4-FFF2-40B4-BE49-F238E27FC236}">
-                <a16:creationId xmlns:a16="http://schemas.microsoft.com/office/drawing/2014/main" id="{41B66F2E-BDBC-4AC2-BBFA-B3CB4B0C83FB}"/>
-              </a:ext>
-            </a:extLst>
-          </p:cNvPr>
-          <p:cNvSpPr>
-            <a:spLocks xmlns:a="http://schemas.openxmlformats.org/drawingml/2006/main" noGrp="1"/>
-          </p:cNvSpPr>
-          <p:nvPr/>
-        </p:nvSpPr>
-        <p:spPr>
-          <a:xfrm xmlns:a="http://schemas.openxmlformats.org/drawingml/2006/main">
-            <a:off x="5181600" y="2019300"/>
-            <a:ext cx="1562100" cy="342900"/>
+          <p:cNvPr id="22" name="">
+            <a:extLst xmlns:a="http://schemas.openxmlformats.org/drawingml/2006/main">
+              <a:ext uri="{FF2B5EF4-FFF2-40B4-BE49-F238E27FC236}">
+                <a16:creationId xmlns:a16="http://schemas.microsoft.com/office/drawing/2014/main" id="{B4C9F201-B049-42DF-A60A-271D43828564}"/>
+              </a:ext>
+            </a:extLst>
+          </p:cNvPr>
+          <p:cNvSpPr>
+            <a:spLocks xmlns:a="http://schemas.openxmlformats.org/drawingml/2006/main" noGrp="1"/>
+          </p:cNvSpPr>
+          <p:nvPr/>
+        </p:nvSpPr>
+        <p:spPr>
+          <a:xfrm xmlns:a="http://schemas.openxmlformats.org/drawingml/2006/main">
+            <a:off x="2981325" y="4200525"/>
+            <a:ext cx="1847850" cy="628650"/>
           </a:xfrm>
           <a:prstGeom xmlns:a="http://schemas.openxmlformats.org/drawingml/2006/main" prst="rect">
             <a:avLst/>
@@ -27930,625 +28385,848 @@
                 <a:spcPct val="105000"/>
               </a:lnSpc>
               <a:buNone/>
-              <a:defRPr sz="1200" b="0" i="0">
+              <a:defRPr sz="1425" b="0" i="0">
                 <a:solidFill>
                   <a:srgbClr val="243B53"/>
                 </a:solidFill>
               </a:defRPr>
             </a:pPr>
             <a:r>
-              <a:rPr sz="1200" b="0" i="0">
+              <a:rPr sz="1425" b="0" i="0">
                 <a:solidFill>
                   <a:srgbClr val="243B53"/>
                 </a:solidFill>
               </a:rPr>
-              <a:t>successor 侧边界</a:t>
-            </a:r>
-          </a:p>
-        </p:txBody>
-      </p:sp>
-      <p:sp>
-        <p:nvSpPr>
-          <p:cNvPr id="16" name="">
-            <a:extLst xmlns:a="http://schemas.openxmlformats.org/drawingml/2006/main">
-              <a:ext uri="{FF2B5EF4-FFF2-40B4-BE49-F238E27FC236}">
-                <a16:creationId xmlns:a16="http://schemas.microsoft.com/office/drawing/2014/main" id="{3F2EE600-C198-4F7A-A68A-E9D75DBDCD1D}"/>
-              </a:ext>
-            </a:extLst>
-          </p:cNvPr>
-          <p:cNvSpPr>
-            <a:spLocks xmlns:a="http://schemas.openxmlformats.org/drawingml/2006/main" noGrp="1"/>
-          </p:cNvSpPr>
-          <p:nvPr/>
-        </p:nvSpPr>
-        <p:spPr>
-          <a:xfrm xmlns:a="http://schemas.openxmlformats.org/drawingml/2006/main">
-            <a:off x="7219950" y="1619250"/>
-            <a:ext cx="1752600" cy="800100"/>
+              <a:t>找 successor 侧</a:t>
+            </a:r>
+          </a:p>
+          <a:p xmlns:a="http://schemas.openxmlformats.org/drawingml/2006/main">
+            <a:pPr algn="ctr">
+              <a:lnSpc>
+                <a:spcPct val="105000"/>
+              </a:lnSpc>
+              <a:buNone/>
+              <a:defRPr sz="1425" b="0" i="0">
+                <a:solidFill>
+                  <a:srgbClr val="243B53"/>
+                </a:solidFill>
+              </a:defRPr>
+            </a:pPr>
+            <a:r>
+              <a:rPr sz="1425" b="0" i="0">
+                <a:solidFill>
+                  <a:srgbClr val="243B53"/>
+                </a:solidFill>
+              </a:rPr>
+              <a:t>boundary Bᵢ</a:t>
+            </a:r>
+          </a:p>
+        </p:txBody>
+      </p:sp>
+      <p:sp>
+        <p:nvSpPr>
+          <p:cNvPr id="23" name="">
+            <a:extLst xmlns:a="http://schemas.openxmlformats.org/drawingml/2006/main">
+              <a:ext uri="{FF2B5EF4-FFF2-40B4-BE49-F238E27FC236}">
+                <a16:creationId xmlns:a16="http://schemas.microsoft.com/office/drawing/2014/main" id="{A249EA53-5FF1-48A9-BE62-7BB8A402DBA9}"/>
+              </a:ext>
+            </a:extLst>
+          </p:cNvPr>
+          <p:cNvSpPr>
+            <a:spLocks xmlns:a="http://schemas.openxmlformats.org/drawingml/2006/main" noGrp="1"/>
+          </p:cNvSpPr>
+          <p:nvPr/>
+        </p:nvSpPr>
+        <p:spPr>
+          <a:xfrm xmlns:a="http://schemas.openxmlformats.org/drawingml/2006/main">
+            <a:off x="5105400" y="3790950"/>
+            <a:ext cx="1981200" cy="1085850"/>
           </a:xfrm>
           <a:prstGeom xmlns:a="http://schemas.openxmlformats.org/drawingml/2006/main" prst="roundRect">
             <a:avLst>
-              <a:gd name="adj" fmla="val 9524"/>
+              <a:gd name="adj" fmla="val 5263"/>
+            </a:avLst>
+          </a:prstGeom>
+          <a:solidFill xmlns:a="http://schemas.openxmlformats.org/drawingml/2006/main">
+            <a:srgbClr val="E8F5F3"/>
+          </a:solidFill>
+          <a:ln xmlns:a="http://schemas.openxmlformats.org/drawingml/2006/main" w="11430">
+            <a:solidFill>
+              <a:srgbClr val="52606D"/>
+            </a:solidFill>
+            <a:prstDash val="solid"/>
+          </a:ln>
+        </p:spPr>
+      </p:sp>
+      <p:sp>
+        <p:nvSpPr>
+          <p:cNvPr id="24" name="">
+            <a:extLst xmlns:a="http://schemas.openxmlformats.org/drawingml/2006/main">
+              <a:ext uri="{FF2B5EF4-FFF2-40B4-BE49-F238E27FC236}">
+                <a16:creationId xmlns:a16="http://schemas.microsoft.com/office/drawing/2014/main" id="{37F2A08C-9C73-4182-8D97-657FC3C4E7A9}"/>
+              </a:ext>
+            </a:extLst>
+          </p:cNvPr>
+          <p:cNvSpPr>
+            <a:spLocks xmlns:a="http://schemas.openxmlformats.org/drawingml/2006/main" noGrp="1"/>
+          </p:cNvSpPr>
+          <p:nvPr/>
+        </p:nvSpPr>
+        <p:spPr>
+          <a:xfrm xmlns:a="http://schemas.openxmlformats.org/drawingml/2006/main">
+            <a:off x="5181600" y="3867150"/>
+            <a:ext cx="1828800" cy="285750"/>
+          </a:xfrm>
+          <a:prstGeom xmlns:a="http://schemas.openxmlformats.org/drawingml/2006/main" prst="rect">
+            <a:avLst/>
+          </a:prstGeom>
+          <a:noFill xmlns:a="http://schemas.openxmlformats.org/drawingml/2006/main"/>
+          <a:ln xmlns:a="http://schemas.openxmlformats.org/drawingml/2006/main" w="0">
+            <a:noFill/>
+            <a:prstDash val="solid"/>
+          </a:ln>
+        </p:spPr>
+        <p:txBody>
+          <a:bodyPr xmlns:a="http://schemas.openxmlformats.org/drawingml/2006/main" wrap="square" lIns="38100" tIns="19050" rIns="38100" bIns="19050" anchor="t">
+            <a:normAutofit fontScale="93795"/>
+          </a:bodyPr>
+          <a:lstStyle xmlns:a="http://schemas.openxmlformats.org/drawingml/2006/main"/>
+          <a:p xmlns:a="http://schemas.openxmlformats.org/drawingml/2006/main">
+            <a:pPr algn="ctr">
+              <a:lnSpc>
+                <a:spcPct val="105000"/>
+              </a:lnSpc>
+              <a:buNone/>
+              <a:defRPr sz="1650" b="1" i="0">
+                <a:solidFill>
+                  <a:srgbClr val="102A43"/>
+                </a:solidFill>
+              </a:defRPr>
+            </a:pPr>
+            <a:r>
+              <a:rPr sz="1650" b="1" i="0">
+                <a:solidFill>
+                  <a:srgbClr val="102A43"/>
+                </a:solidFill>
+              </a:rPr>
+              <a:t>Step 3(a)</a:t>
+            </a:r>
+          </a:p>
+        </p:txBody>
+      </p:sp>
+      <p:sp>
+        <p:nvSpPr>
+          <p:cNvPr id="25" name="">
+            <a:extLst xmlns:a="http://schemas.openxmlformats.org/drawingml/2006/main">
+              <a:ext uri="{FF2B5EF4-FFF2-40B4-BE49-F238E27FC236}">
+                <a16:creationId xmlns:a16="http://schemas.microsoft.com/office/drawing/2014/main" id="{D277F34E-A5EC-4654-A99C-A5D0008BD601}"/>
+              </a:ext>
+            </a:extLst>
+          </p:cNvPr>
+          <p:cNvSpPr>
+            <a:spLocks xmlns:a="http://schemas.openxmlformats.org/drawingml/2006/main" noGrp="1"/>
+          </p:cNvSpPr>
+          <p:nvPr/>
+        </p:nvSpPr>
+        <p:spPr>
+          <a:xfrm xmlns:a="http://schemas.openxmlformats.org/drawingml/2006/main">
+            <a:off x="5172075" y="4200525"/>
+            <a:ext cx="1847850" cy="628650"/>
+          </a:xfrm>
+          <a:prstGeom xmlns:a="http://schemas.openxmlformats.org/drawingml/2006/main" prst="rect">
+            <a:avLst/>
+          </a:prstGeom>
+          <a:noFill xmlns:a="http://schemas.openxmlformats.org/drawingml/2006/main"/>
+          <a:ln xmlns:a="http://schemas.openxmlformats.org/drawingml/2006/main" w="0">
+            <a:noFill/>
+            <a:prstDash val="solid"/>
+          </a:ln>
+        </p:spPr>
+        <p:txBody>
+          <a:bodyPr xmlns:a="http://schemas.openxmlformats.org/drawingml/2006/main" wrap="square" lIns="38100" tIns="19050" rIns="38100" bIns="19050" anchor="ctr">
+            <a:normAutofit fontScale="100000"/>
+          </a:bodyPr>
+          <a:lstStyle xmlns:a="http://schemas.openxmlformats.org/drawingml/2006/main"/>
+          <a:p xmlns:a="http://schemas.openxmlformats.org/drawingml/2006/main">
+            <a:pPr algn="ctr">
+              <a:lnSpc>
+                <a:spcPct val="105000"/>
+              </a:lnSpc>
+              <a:buNone/>
+              <a:defRPr sz="1425" b="0" i="0">
+                <a:solidFill>
+                  <a:srgbClr val="243B53"/>
+                </a:solidFill>
+              </a:defRPr>
+            </a:pPr>
+            <a:r>
+              <a:rPr sz="1425" b="0" i="0">
+                <a:solidFill>
+                  <a:srgbClr val="243B53"/>
+                </a:solidFill>
+              </a:rPr>
+              <a:t>插入新 pair</a:t>
+            </a:r>
+          </a:p>
+          <a:p xmlns:a="http://schemas.openxmlformats.org/drawingml/2006/main">
+            <a:pPr algn="ctr">
+              <a:lnSpc>
+                <a:spcPct val="105000"/>
+              </a:lnSpc>
+              <a:buNone/>
+              <a:defRPr sz="1425" b="0" i="0">
+                <a:solidFill>
+                  <a:srgbClr val="243B53"/>
+                </a:solidFill>
+              </a:defRPr>
+            </a:pPr>
+            <a:r>
+              <a:rPr sz="1425" b="0" i="0">
+                <a:solidFill>
+                  <a:srgbClr val="243B53"/>
+                </a:solidFill>
+              </a:rPr>
+              <a:t>Pᵢ = (zᵢ₋₁, zᵢ)</a:t>
+            </a:r>
+          </a:p>
+        </p:txBody>
+      </p:sp>
+      <p:sp>
+        <p:nvSpPr>
+          <p:cNvPr id="26" name="">
+            <a:extLst xmlns:a="http://schemas.openxmlformats.org/drawingml/2006/main">
+              <a:ext uri="{FF2B5EF4-FFF2-40B4-BE49-F238E27FC236}">
+                <a16:creationId xmlns:a16="http://schemas.microsoft.com/office/drawing/2014/main" id="{F6947B58-A8CC-4780-95A1-F4FCEAE75D75}"/>
+              </a:ext>
+            </a:extLst>
+          </p:cNvPr>
+          <p:cNvSpPr>
+            <a:spLocks xmlns:a="http://schemas.openxmlformats.org/drawingml/2006/main" noGrp="1"/>
+          </p:cNvSpPr>
+          <p:nvPr/>
+        </p:nvSpPr>
+        <p:spPr>
+          <a:xfrm xmlns:a="http://schemas.openxmlformats.org/drawingml/2006/main">
+            <a:off x="7296150" y="3790950"/>
+            <a:ext cx="1981200" cy="1085850"/>
+          </a:xfrm>
+          <a:prstGeom xmlns:a="http://schemas.openxmlformats.org/drawingml/2006/main" prst="roundRect">
+            <a:avLst>
+              <a:gd name="adj" fmla="val 5263"/>
+            </a:avLst>
+          </a:prstGeom>
+          <a:solidFill xmlns:a="http://schemas.openxmlformats.org/drawingml/2006/main">
+            <a:srgbClr val="E8F5F3"/>
+          </a:solidFill>
+          <a:ln xmlns:a="http://schemas.openxmlformats.org/drawingml/2006/main" w="11430">
+            <a:solidFill>
+              <a:srgbClr val="52606D"/>
+            </a:solidFill>
+            <a:prstDash val="solid"/>
+          </a:ln>
+        </p:spPr>
+      </p:sp>
+      <p:sp>
+        <p:nvSpPr>
+          <p:cNvPr id="27" name="">
+            <a:extLst xmlns:a="http://schemas.openxmlformats.org/drawingml/2006/main">
+              <a:ext uri="{FF2B5EF4-FFF2-40B4-BE49-F238E27FC236}">
+                <a16:creationId xmlns:a16="http://schemas.microsoft.com/office/drawing/2014/main" id="{AF4F8A37-7ADA-4D1D-9140-BBC389770AA5}"/>
+              </a:ext>
+            </a:extLst>
+          </p:cNvPr>
+          <p:cNvSpPr>
+            <a:spLocks xmlns:a="http://schemas.openxmlformats.org/drawingml/2006/main" noGrp="1"/>
+          </p:cNvSpPr>
+          <p:nvPr/>
+        </p:nvSpPr>
+        <p:spPr>
+          <a:xfrm xmlns:a="http://schemas.openxmlformats.org/drawingml/2006/main">
+            <a:off x="7372350" y="3867150"/>
+            <a:ext cx="1828800" cy="285750"/>
+          </a:xfrm>
+          <a:prstGeom xmlns:a="http://schemas.openxmlformats.org/drawingml/2006/main" prst="rect">
+            <a:avLst/>
+          </a:prstGeom>
+          <a:noFill xmlns:a="http://schemas.openxmlformats.org/drawingml/2006/main"/>
+          <a:ln xmlns:a="http://schemas.openxmlformats.org/drawingml/2006/main" w="0">
+            <a:noFill/>
+            <a:prstDash val="solid"/>
+          </a:ln>
+        </p:spPr>
+        <p:txBody>
+          <a:bodyPr xmlns:a="http://schemas.openxmlformats.org/drawingml/2006/main" wrap="square" lIns="38100" tIns="19050" rIns="38100" bIns="19050" anchor="t">
+            <a:normAutofit fontScale="93795"/>
+          </a:bodyPr>
+          <a:lstStyle xmlns:a="http://schemas.openxmlformats.org/drawingml/2006/main"/>
+          <a:p xmlns:a="http://schemas.openxmlformats.org/drawingml/2006/main">
+            <a:pPr algn="ctr">
+              <a:lnSpc>
+                <a:spcPct val="105000"/>
+              </a:lnSpc>
+              <a:buNone/>
+              <a:defRPr sz="1650" b="1" i="0">
+                <a:solidFill>
+                  <a:srgbClr val="102A43"/>
+                </a:solidFill>
+              </a:defRPr>
+            </a:pPr>
+            <a:r>
+              <a:rPr sz="1650" b="1" i="0">
+                <a:solidFill>
+                  <a:srgbClr val="102A43"/>
+                </a:solidFill>
+              </a:rPr>
+              <a:t>Step 3(b)</a:t>
+            </a:r>
+          </a:p>
+        </p:txBody>
+      </p:sp>
+      <p:sp>
+        <p:nvSpPr>
+          <p:cNvPr id="28" name="">
+            <a:extLst xmlns:a="http://schemas.openxmlformats.org/drawingml/2006/main">
+              <a:ext uri="{FF2B5EF4-FFF2-40B4-BE49-F238E27FC236}">
+                <a16:creationId xmlns:a16="http://schemas.microsoft.com/office/drawing/2014/main" id="{216A6DE7-0EF1-41D7-AC1E-9365210065A5}"/>
+              </a:ext>
+            </a:extLst>
+          </p:cNvPr>
+          <p:cNvSpPr>
+            <a:spLocks xmlns:a="http://schemas.openxmlformats.org/drawingml/2006/main" noGrp="1"/>
+          </p:cNvSpPr>
+          <p:nvPr/>
+        </p:nvSpPr>
+        <p:spPr>
+          <a:xfrm xmlns:a="http://schemas.openxmlformats.org/drawingml/2006/main">
+            <a:off x="7362825" y="4200525"/>
+            <a:ext cx="1847850" cy="628650"/>
+          </a:xfrm>
+          <a:prstGeom xmlns:a="http://schemas.openxmlformats.org/drawingml/2006/main" prst="rect">
+            <a:avLst/>
+          </a:prstGeom>
+          <a:noFill xmlns:a="http://schemas.openxmlformats.org/drawingml/2006/main"/>
+          <a:ln xmlns:a="http://schemas.openxmlformats.org/drawingml/2006/main" w="0">
+            <a:noFill/>
+            <a:prstDash val="solid"/>
+          </a:ln>
+        </p:spPr>
+        <p:txBody>
+          <a:bodyPr xmlns:a="http://schemas.openxmlformats.org/drawingml/2006/main" wrap="square" lIns="38100" tIns="19050" rIns="38100" bIns="19050" anchor="ctr">
+            <a:normAutofit fontScale="100000"/>
+          </a:bodyPr>
+          <a:lstStyle xmlns:a="http://schemas.openxmlformats.org/drawingml/2006/main"/>
+          <a:p xmlns:a="http://schemas.openxmlformats.org/drawingml/2006/main">
+            <a:pPr algn="ctr">
+              <a:lnSpc>
+                <a:spcPct val="105000"/>
+              </a:lnSpc>
+              <a:buNone/>
+              <a:defRPr sz="1425" b="0" i="0">
+                <a:solidFill>
+                  <a:srgbClr val="243B53"/>
+                </a:solidFill>
+              </a:defRPr>
+            </a:pPr>
+            <a:r>
+              <a:rPr sz="1425" b="0" i="0">
+                <a:solidFill>
+                  <a:srgbClr val="243B53"/>
+                </a:solidFill>
+              </a:rPr>
+              <a:t>按需拆分 sibling list</a:t>
+            </a:r>
+          </a:p>
+          <a:p xmlns:a="http://schemas.openxmlformats.org/drawingml/2006/main">
+            <a:pPr algn="ctr">
+              <a:lnSpc>
+                <a:spcPct val="105000"/>
+              </a:lnSpc>
+              <a:buNone/>
+              <a:defRPr sz="1425" b="0" i="0">
+                <a:solidFill>
+                  <a:srgbClr val="243B53"/>
+                </a:solidFill>
+              </a:defRPr>
+            </a:pPr>
+            <a:r>
+              <a:rPr sz="1425" b="0" i="0">
+                <a:solidFill>
+                  <a:srgbClr val="243B53"/>
+                </a:solidFill>
+              </a:rPr>
+              <a:t>并转移 ownership</a:t>
+            </a:r>
+          </a:p>
+        </p:txBody>
+      </p:sp>
+      <p:sp>
+        <p:nvSpPr>
+          <p:cNvPr id="29" name="">
+            <a:extLst xmlns:a="http://schemas.openxmlformats.org/drawingml/2006/main">
+              <a:ext uri="{FF2B5EF4-FFF2-40B4-BE49-F238E27FC236}">
+                <a16:creationId xmlns:a16="http://schemas.microsoft.com/office/drawing/2014/main" id="{4AC4B330-3C6A-48E9-B526-FBED8814D960}"/>
+              </a:ext>
+            </a:extLst>
+          </p:cNvPr>
+          <p:cNvSpPr>
+            <a:spLocks xmlns:a="http://schemas.openxmlformats.org/drawingml/2006/main" noGrp="1"/>
+          </p:cNvSpPr>
+          <p:nvPr/>
+        </p:nvSpPr>
+        <p:spPr>
+          <a:xfrm xmlns:a="http://schemas.openxmlformats.org/drawingml/2006/main">
+            <a:off x="9486900" y="3790950"/>
+            <a:ext cx="1981200" cy="1085850"/>
+          </a:xfrm>
+          <a:prstGeom xmlns:a="http://schemas.openxmlformats.org/drawingml/2006/main" prst="roundRect">
+            <a:avLst>
+              <a:gd name="adj" fmla="val 5263"/>
+            </a:avLst>
+          </a:prstGeom>
+          <a:solidFill xmlns:a="http://schemas.openxmlformats.org/drawingml/2006/main">
+            <a:srgbClr val="E8F5F3"/>
+          </a:solidFill>
+          <a:ln xmlns:a="http://schemas.openxmlformats.org/drawingml/2006/main" w="11430">
+            <a:solidFill>
+              <a:srgbClr val="52606D"/>
+            </a:solidFill>
+            <a:prstDash val="solid"/>
+          </a:ln>
+        </p:spPr>
+      </p:sp>
+      <p:sp>
+        <p:nvSpPr>
+          <p:cNvPr id="30" name="">
+            <a:extLst xmlns:a="http://schemas.openxmlformats.org/drawingml/2006/main">
+              <a:ext uri="{FF2B5EF4-FFF2-40B4-BE49-F238E27FC236}">
+                <a16:creationId xmlns:a16="http://schemas.microsoft.com/office/drawing/2014/main" id="{CD2A2522-D920-48D7-85E2-F914709B7182}"/>
+              </a:ext>
+            </a:extLst>
+          </p:cNvPr>
+          <p:cNvSpPr>
+            <a:spLocks xmlns:a="http://schemas.openxmlformats.org/drawingml/2006/main" noGrp="1"/>
+          </p:cNvSpPr>
+          <p:nvPr/>
+        </p:nvSpPr>
+        <p:spPr>
+          <a:xfrm xmlns:a="http://schemas.openxmlformats.org/drawingml/2006/main">
+            <a:off x="9563100" y="3867150"/>
+            <a:ext cx="1828800" cy="285750"/>
+          </a:xfrm>
+          <a:prstGeom xmlns:a="http://schemas.openxmlformats.org/drawingml/2006/main" prst="rect">
+            <a:avLst/>
+          </a:prstGeom>
+          <a:noFill xmlns:a="http://schemas.openxmlformats.org/drawingml/2006/main"/>
+          <a:ln xmlns:a="http://schemas.openxmlformats.org/drawingml/2006/main" w="0">
+            <a:noFill/>
+            <a:prstDash val="solid"/>
+          </a:ln>
+        </p:spPr>
+        <p:txBody>
+          <a:bodyPr xmlns:a="http://schemas.openxmlformats.org/drawingml/2006/main" wrap="square" lIns="38100" tIns="19050" rIns="38100" bIns="19050" anchor="t">
+            <a:normAutofit fontScale="93795"/>
+          </a:bodyPr>
+          <a:lstStyle xmlns:a="http://schemas.openxmlformats.org/drawingml/2006/main"/>
+          <a:p xmlns:a="http://schemas.openxmlformats.org/drawingml/2006/main">
+            <a:pPr algn="ctr">
+              <a:lnSpc>
+                <a:spcPct val="105000"/>
+              </a:lnSpc>
+              <a:buNone/>
+              <a:defRPr sz="1650" b="1" i="0">
+                <a:solidFill>
+                  <a:srgbClr val="102A43"/>
+                </a:solidFill>
+              </a:defRPr>
+            </a:pPr>
+            <a:r>
+              <a:rPr sz="1650" b="1" i="0">
+                <a:solidFill>
+                  <a:srgbClr val="102A43"/>
+                </a:solidFill>
+              </a:rPr>
+              <a:t>Step 3(c)</a:t>
+            </a:r>
+          </a:p>
+        </p:txBody>
+      </p:sp>
+      <p:sp>
+        <p:nvSpPr>
+          <p:cNvPr id="31" name="">
+            <a:extLst xmlns:a="http://schemas.openxmlformats.org/drawingml/2006/main">
+              <a:ext uri="{FF2B5EF4-FFF2-40B4-BE49-F238E27FC236}">
+                <a16:creationId xmlns:a16="http://schemas.microsoft.com/office/drawing/2014/main" id="{D7FE0D9E-113C-4225-8DA9-4612CE266262}"/>
+              </a:ext>
+            </a:extLst>
+          </p:cNvPr>
+          <p:cNvSpPr>
+            <a:spLocks xmlns:a="http://schemas.openxmlformats.org/drawingml/2006/main" noGrp="1"/>
+          </p:cNvSpPr>
+          <p:nvPr/>
+        </p:nvSpPr>
+        <p:spPr>
+          <a:xfrm xmlns:a="http://schemas.openxmlformats.org/drawingml/2006/main">
+            <a:off x="9553575" y="4200525"/>
+            <a:ext cx="1847850" cy="628650"/>
+          </a:xfrm>
+          <a:prstGeom xmlns:a="http://schemas.openxmlformats.org/drawingml/2006/main" prst="rect">
+            <a:avLst/>
+          </a:prstGeom>
+          <a:noFill xmlns:a="http://schemas.openxmlformats.org/drawingml/2006/main"/>
+          <a:ln xmlns:a="http://schemas.openxmlformats.org/drawingml/2006/main" w="0">
+            <a:noFill/>
+            <a:prstDash val="solid"/>
+          </a:ln>
+        </p:spPr>
+        <p:txBody>
+          <a:bodyPr xmlns:a="http://schemas.openxmlformats.org/drawingml/2006/main" wrap="square" lIns="38100" tIns="19050" rIns="38100" bIns="19050" anchor="ctr">
+            <a:normAutofit fontScale="100000"/>
+          </a:bodyPr>
+          <a:lstStyle xmlns:a="http://schemas.openxmlformats.org/drawingml/2006/main"/>
+          <a:p xmlns:a="http://schemas.openxmlformats.org/drawingml/2006/main">
+            <a:pPr algn="ctr">
+              <a:lnSpc>
+                <a:spcPct val="105000"/>
+              </a:lnSpc>
+              <a:buNone/>
+              <a:defRPr sz="1425" b="0" i="0">
+                <a:solidFill>
+                  <a:srgbClr val="243B53"/>
+                </a:solidFill>
+              </a:defRPr>
+            </a:pPr>
+            <a:r>
+              <a:rPr sz="1425" b="0" i="0">
+                <a:solidFill>
+                  <a:srgbClr val="243B53"/>
+                </a:solidFill>
+              </a:rPr>
+              <a:t>将 zᵢ 插入</a:t>
+            </a:r>
+          </a:p>
+          <a:p xmlns:a="http://schemas.openxmlformats.org/drawingml/2006/main">
+            <a:pPr algn="ctr">
+              <a:lnSpc>
+                <a:spcPct val="105000"/>
+              </a:lnSpc>
+              <a:buNone/>
+              <a:defRPr sz="1425" b="0" i="0">
+                <a:solidFill>
+                  <a:srgbClr val="243B53"/>
+                </a:solidFill>
+              </a:defRPr>
+            </a:pPr>
+            <a:r>
+              <a:rPr sz="1425" b="0" i="0">
+                <a:solidFill>
+                  <a:srgbClr val="243B53"/>
+                </a:solidFill>
+              </a:rPr>
+              <a:t>维护的有序列表</a:t>
+            </a:r>
+          </a:p>
+        </p:txBody>
+      </p:sp>
+      <p:cxnSp>
+        <p:nvCxnSpPr>
+          <p:cNvPr id="76" name=""/>
+          <p:cNvCxnSpPr>
+            <a:stCxn xmlns:a="http://schemas.openxmlformats.org/drawingml/2006/main" id="17" idx="3"/>
+            <a:endCxn xmlns:a="http://schemas.openxmlformats.org/drawingml/2006/main" id="20" idx="1"/>
+          </p:cNvCxnSpPr>
+          <p:nvPr/>
+        </p:nvCxnSpPr>
+        <p:spPr>
+          <a:xfrm xmlns:a="http://schemas.openxmlformats.org/drawingml/2006/main">
+            <a:off x="2705100" y="4333875"/>
+            <a:ext cx="209550" cy="0"/>
+          </a:xfrm>
+          <a:prstGeom xmlns:a="http://schemas.openxmlformats.org/drawingml/2006/main" prst="straightConnector1">
+            <a:avLst/>
+          </a:prstGeom>
+          <a:ln xmlns:a="http://schemas.openxmlformats.org/drawingml/2006/main" w="19050">
+            <a:solidFill>
+              <a:srgbClr val="2A9D8F"/>
+            </a:solidFill>
+            <a:prstDash val="solid"/>
+            <a:tailEnd type="arrow" w="sm" len="sm"/>
+          </a:ln>
+        </p:spPr>
+      </p:cxnSp>
+      <p:cxnSp>
+        <p:nvCxnSpPr>
+          <p:cNvPr id="77" name=""/>
+          <p:cNvCxnSpPr>
+            <a:stCxn xmlns:a="http://schemas.openxmlformats.org/drawingml/2006/main" id="20" idx="3"/>
+            <a:endCxn xmlns:a="http://schemas.openxmlformats.org/drawingml/2006/main" id="23" idx="1"/>
+          </p:cNvCxnSpPr>
+          <p:nvPr/>
+        </p:nvCxnSpPr>
+        <p:spPr>
+          <a:xfrm xmlns:a="http://schemas.openxmlformats.org/drawingml/2006/main">
+            <a:off x="4895850" y="4333875"/>
+            <a:ext cx="209550" cy="0"/>
+          </a:xfrm>
+          <a:prstGeom xmlns:a="http://schemas.openxmlformats.org/drawingml/2006/main" prst="straightConnector1">
+            <a:avLst/>
+          </a:prstGeom>
+          <a:ln xmlns:a="http://schemas.openxmlformats.org/drawingml/2006/main" w="19050">
+            <a:solidFill>
+              <a:srgbClr val="2A9D8F"/>
+            </a:solidFill>
+            <a:prstDash val="solid"/>
+            <a:tailEnd type="arrow" w="sm" len="sm"/>
+          </a:ln>
+        </p:spPr>
+      </p:cxnSp>
+      <p:cxnSp>
+        <p:nvCxnSpPr>
+          <p:cNvPr id="78" name=""/>
+          <p:cNvCxnSpPr>
+            <a:stCxn xmlns:a="http://schemas.openxmlformats.org/drawingml/2006/main" id="23" idx="3"/>
+            <a:endCxn xmlns:a="http://schemas.openxmlformats.org/drawingml/2006/main" id="26" idx="1"/>
+          </p:cNvCxnSpPr>
+          <p:nvPr/>
+        </p:nvCxnSpPr>
+        <p:spPr>
+          <a:xfrm xmlns:a="http://schemas.openxmlformats.org/drawingml/2006/main">
+            <a:off x="7086600" y="4333875"/>
+            <a:ext cx="209550" cy="0"/>
+          </a:xfrm>
+          <a:prstGeom xmlns:a="http://schemas.openxmlformats.org/drawingml/2006/main" prst="straightConnector1">
+            <a:avLst/>
+          </a:prstGeom>
+          <a:ln xmlns:a="http://schemas.openxmlformats.org/drawingml/2006/main" w="19050">
+            <a:solidFill>
+              <a:srgbClr val="2A9D8F"/>
+            </a:solidFill>
+            <a:prstDash val="solid"/>
+            <a:tailEnd type="arrow" w="sm" len="sm"/>
+          </a:ln>
+        </p:spPr>
+      </p:cxnSp>
+      <p:cxnSp>
+        <p:nvCxnSpPr>
+          <p:cNvPr id="79" name=""/>
+          <p:cNvCxnSpPr>
+            <a:stCxn xmlns:a="http://schemas.openxmlformats.org/drawingml/2006/main" id="26" idx="3"/>
+            <a:endCxn xmlns:a="http://schemas.openxmlformats.org/drawingml/2006/main" id="29" idx="1"/>
+          </p:cNvCxnSpPr>
+          <p:nvPr/>
+        </p:nvCxnSpPr>
+        <p:spPr>
+          <a:xfrm xmlns:a="http://schemas.openxmlformats.org/drawingml/2006/main">
+            <a:off x="9277350" y="4333875"/>
+            <a:ext cx="209550" cy="0"/>
+          </a:xfrm>
+          <a:prstGeom xmlns:a="http://schemas.openxmlformats.org/drawingml/2006/main" prst="straightConnector1">
+            <a:avLst/>
+          </a:prstGeom>
+          <a:ln xmlns:a="http://schemas.openxmlformats.org/drawingml/2006/main" w="19050">
+            <a:solidFill>
+              <a:srgbClr val="2A9D8F"/>
+            </a:solidFill>
+            <a:prstDash val="solid"/>
+            <a:tailEnd type="arrow" w="sm" len="sm"/>
+          </a:ln>
+        </p:spPr>
+      </p:cxnSp>
+      <p:sp>
+        <p:nvSpPr>
+          <p:cNvPr id="36" name="">
+            <a:extLst xmlns:a="http://schemas.openxmlformats.org/drawingml/2006/main">
+              <a:ext uri="{FF2B5EF4-FFF2-40B4-BE49-F238E27FC236}">
+                <a16:creationId xmlns:a16="http://schemas.microsoft.com/office/drawing/2014/main" id="{B3646241-66EB-47E1-9F93-6C0583DD3482}"/>
+              </a:ext>
+            </a:extLst>
+          </p:cNvPr>
+          <p:cNvSpPr>
+            <a:spLocks xmlns:a="http://schemas.openxmlformats.org/drawingml/2006/main" noGrp="1"/>
+          </p:cNvSpPr>
+          <p:nvPr/>
+        </p:nvSpPr>
+        <p:spPr>
+          <a:xfrm xmlns:a="http://schemas.openxmlformats.org/drawingml/2006/main">
+            <a:off x="723900" y="4972050"/>
+            <a:ext cx="10744200" cy="266700"/>
+          </a:xfrm>
+          <a:prstGeom xmlns:a="http://schemas.openxmlformats.org/drawingml/2006/main" prst="rect">
+            <a:avLst/>
+          </a:prstGeom>
+          <a:noFill xmlns:a="http://schemas.openxmlformats.org/drawingml/2006/main"/>
+          <a:ln xmlns:a="http://schemas.openxmlformats.org/drawingml/2006/main" w="0">
+            <a:noFill/>
+            <a:prstDash val="solid"/>
+          </a:ln>
+        </p:spPr>
+        <p:txBody>
+          <a:bodyPr xmlns:a="http://schemas.openxmlformats.org/drawingml/2006/main" wrap="square" lIns="38100" tIns="19050" rIns="38100" bIns="19050" anchor="t">
+            <a:normAutofit fontScale="90703"/>
+          </a:bodyPr>
+          <a:lstStyle xmlns:a="http://schemas.openxmlformats.org/drawingml/2006/main"/>
+          <a:p xmlns:a="http://schemas.openxmlformats.org/drawingml/2006/main">
+            <a:pPr algn="ctr">
+              <a:lnSpc>
+                <a:spcPct val="105000"/>
+              </a:lnSpc>
+              <a:buNone/>
+              <a:defRPr sz="1575" b="1" i="0">
+                <a:solidFill>
+                  <a:srgbClr val="102A43"/>
+                </a:solidFill>
+              </a:defRPr>
+            </a:pPr>
+            <a:r>
+              <a:rPr sz="1575" b="1" i="0">
+                <a:solidFill>
+                  <a:srgbClr val="102A43"/>
+                </a:solidFill>
+              </a:rPr>
+              <a:t>两个方向都保持 Step 1 → Aᵢ、Step 2 → Bᵢ</a:t>
+            </a:r>
+          </a:p>
+        </p:txBody>
+      </p:sp>
+      <p:sp>
+        <p:nvSpPr>
+          <p:cNvPr id="37" name="">
+            <a:extLst xmlns:a="http://schemas.openxmlformats.org/drawingml/2006/main">
+              <a:ext uri="{FF2B5EF4-FFF2-40B4-BE49-F238E27FC236}">
+                <a16:creationId xmlns:a16="http://schemas.microsoft.com/office/drawing/2014/main" id="{74FAE0DB-C358-44EF-A042-BD8C166054B9}"/>
+              </a:ext>
+            </a:extLst>
+          </p:cNvPr>
+          <p:cNvSpPr>
+            <a:spLocks xmlns:a="http://schemas.openxmlformats.org/drawingml/2006/main" noGrp="1"/>
+          </p:cNvSpPr>
+          <p:nvPr/>
+        </p:nvSpPr>
+        <p:spPr>
+          <a:xfrm xmlns:a="http://schemas.openxmlformats.org/drawingml/2006/main">
+            <a:off x="723900" y="5257800"/>
+            <a:ext cx="10744200" cy="266700"/>
+          </a:xfrm>
+          <a:prstGeom xmlns:a="http://schemas.openxmlformats.org/drawingml/2006/main" prst="rect">
+            <a:avLst/>
+          </a:prstGeom>
+          <a:noFill xmlns:a="http://schemas.openxmlformats.org/drawingml/2006/main"/>
+          <a:ln xmlns:a="http://schemas.openxmlformats.org/drawingml/2006/main" w="0">
+            <a:noFill/>
+            <a:prstDash val="solid"/>
+          </a:ln>
+        </p:spPr>
+        <p:txBody>
+          <a:bodyPr xmlns:a="http://schemas.openxmlformats.org/drawingml/2006/main" wrap="square" lIns="38100" tIns="19050" rIns="38100" bIns="19050" anchor="t">
+            <a:normAutofit fontScale="95238"/>
+          </a:bodyPr>
+          <a:lstStyle xmlns:a="http://schemas.openxmlformats.org/drawingml/2006/main"/>
+          <a:p xmlns:a="http://schemas.openxmlformats.org/drawingml/2006/main">
+            <a:pPr algn="ctr">
+              <a:lnSpc>
+                <a:spcPct val="105000"/>
+              </a:lnSpc>
+              <a:buNone/>
+              <a:defRPr sz="1500" b="0" i="0">
+                <a:solidFill>
+                  <a:srgbClr val="52606D"/>
+                </a:solidFill>
+              </a:defRPr>
+            </a:pPr>
+            <a:r>
+              <a:rPr sz="1500" b="0" i="0">
+                <a:solidFill>
+                  <a:srgbClr val="52606D"/>
+                </a:solidFill>
+              </a:rPr>
+              <a:t>Increasing：3(a) 用 Aᵢ，3(b) 用 Bᵢ。Decreasing 交换两者用途，并镜像左右操作。</a:t>
+            </a:r>
+          </a:p>
+        </p:txBody>
+      </p:sp>
+      <p:sp>
+        <p:nvSpPr>
+          <p:cNvPr id="38" name="">
+            <a:extLst xmlns:a="http://schemas.openxmlformats.org/drawingml/2006/main">
+              <a:ext uri="{FF2B5EF4-FFF2-40B4-BE49-F238E27FC236}">
+                <a16:creationId xmlns:a16="http://schemas.microsoft.com/office/drawing/2014/main" id="{AF5B4357-62BA-471E-82C3-A0179A29243D}"/>
+              </a:ext>
+            </a:extLst>
+          </p:cNvPr>
+          <p:cNvSpPr>
+            <a:spLocks xmlns:a="http://schemas.openxmlformats.org/drawingml/2006/main" noGrp="1"/>
+          </p:cNvSpPr>
+          <p:nvPr/>
+        </p:nvSpPr>
+        <p:spPr>
+          <a:xfrm xmlns:a="http://schemas.openxmlformats.org/drawingml/2006/main">
+            <a:off x="723900" y="5657850"/>
+            <a:ext cx="10744200" cy="247650"/>
+          </a:xfrm>
+          <a:prstGeom xmlns:a="http://schemas.openxmlformats.org/drawingml/2006/main" prst="rect">
+            <a:avLst/>
+          </a:prstGeom>
+          <a:noFill xmlns:a="http://schemas.openxmlformats.org/drawingml/2006/main"/>
+          <a:ln xmlns:a="http://schemas.openxmlformats.org/drawingml/2006/main" w="0">
+            <a:noFill/>
+            <a:prstDash val="solid"/>
+          </a:ln>
+        </p:spPr>
+        <p:txBody>
+          <a:bodyPr xmlns:a="http://schemas.openxmlformats.org/drawingml/2006/main" wrap="square" lIns="38100" tIns="19050" rIns="38100" bIns="19050" anchor="t">
+            <a:normAutofit fontScale="91896"/>
+          </a:bodyPr>
+          <a:lstStyle xmlns:a="http://schemas.openxmlformats.org/drawingml/2006/main"/>
+          <a:p xmlns:a="http://schemas.openxmlformats.org/drawingml/2006/main">
+            <a:pPr algn="l">
+              <a:lnSpc>
+                <a:spcPct val="105000"/>
+              </a:lnSpc>
+              <a:buNone/>
+              <a:defRPr sz="1425" b="0" i="0">
+                <a:solidFill>
+                  <a:srgbClr val="7B8794"/>
+                </a:solidFill>
+              </a:defRPr>
+            </a:pPr>
+            <a:r>
+              <a:rPr sz="1425" b="0" i="0">
+                <a:solidFill>
+                  <a:srgbClr val="7B8794"/>
+                </a:solidFill>
+              </a:rPr>
+              <a:t>重构依据的类别（不分别对应算法步骤）</a:t>
+            </a:r>
+          </a:p>
+        </p:txBody>
+      </p:sp>
+      <p:sp>
+        <p:nvSpPr>
+          <p:cNvPr id="39" name="">
+            <a:extLst xmlns:a="http://schemas.openxmlformats.org/drawingml/2006/main">
+              <a:ext uri="{FF2B5EF4-FFF2-40B4-BE49-F238E27FC236}">
+                <a16:creationId xmlns:a16="http://schemas.microsoft.com/office/drawing/2014/main" id="{BAFE1BFB-41D7-4DFB-ADFB-5A8D9FC59C8D}"/>
+              </a:ext>
+            </a:extLst>
+          </p:cNvPr>
+          <p:cNvSpPr>
+            <a:spLocks xmlns:a="http://schemas.openxmlformats.org/drawingml/2006/main" noGrp="1"/>
+          </p:cNvSpPr>
+          <p:nvPr/>
+        </p:nvSpPr>
+        <p:spPr>
+          <a:xfrm xmlns:a="http://schemas.openxmlformats.org/drawingml/2006/main">
+            <a:off x="723900" y="6000750"/>
+            <a:ext cx="3429000" cy="381000"/>
+          </a:xfrm>
+          <a:prstGeom xmlns:a="http://schemas.openxmlformats.org/drawingml/2006/main" prst="roundRect">
+            <a:avLst>
+              <a:gd name="adj" fmla="val 15000"/>
             </a:avLst>
           </a:prstGeom>
           <a:solidFill xmlns:a="http://schemas.openxmlformats.org/drawingml/2006/main">
             <a:srgbClr val="EAF1F8"/>
           </a:solidFill>
-          <a:ln xmlns:a="http://schemas.openxmlformats.org/drawingml/2006/main" w="19050">
-            <a:solidFill>
-              <a:srgbClr val="52606D"/>
-            </a:solidFill>
-            <a:prstDash val="solid"/>
-          </a:ln>
-        </p:spPr>
-      </p:sp>
-      <p:sp>
-        <p:nvSpPr>
-          <p:cNvPr id="17" name="">
-            <a:extLst xmlns:a="http://schemas.openxmlformats.org/drawingml/2006/main">
-              <a:ext uri="{FF2B5EF4-FFF2-40B4-BE49-F238E27FC236}">
-                <a16:creationId xmlns:a16="http://schemas.microsoft.com/office/drawing/2014/main" id="{8479F2B8-8DD4-435C-8EDD-EB28BF9BF9AB}"/>
-              </a:ext>
-            </a:extLst>
-          </p:cNvPr>
-          <p:cNvSpPr>
-            <a:spLocks xmlns:a="http://schemas.openxmlformats.org/drawingml/2006/main" noGrp="1"/>
-          </p:cNvSpPr>
-          <p:nvPr/>
-        </p:nvSpPr>
-        <p:spPr>
-          <a:xfrm xmlns:a="http://schemas.openxmlformats.org/drawingml/2006/main">
-            <a:off x="7296150" y="1714500"/>
-            <a:ext cx="1600200" cy="285750"/>
-          </a:xfrm>
-          <a:prstGeom xmlns:a="http://schemas.openxmlformats.org/drawingml/2006/main" prst="rect">
-            <a:avLst/>
-          </a:prstGeom>
-          <a:noFill xmlns:a="http://schemas.openxmlformats.org/drawingml/2006/main"/>
-          <a:ln xmlns:a="http://schemas.openxmlformats.org/drawingml/2006/main" w="0">
-            <a:noFill/>
-            <a:prstDash val="solid"/>
-          </a:ln>
-        </p:spPr>
-        <p:txBody>
-          <a:bodyPr xmlns:a="http://schemas.openxmlformats.org/drawingml/2006/main" wrap="square" lIns="38100" tIns="19050" rIns="38100" bIns="19050" anchor="t">
-            <a:normAutofit fontScale="93795"/>
-          </a:bodyPr>
-          <a:lstStyle xmlns:a="http://schemas.openxmlformats.org/drawingml/2006/main"/>
-          <a:p xmlns:a="http://schemas.openxmlformats.org/drawingml/2006/main">
-            <a:pPr algn="ctr">
-              <a:lnSpc>
-                <a:spcPct val="105000"/>
-              </a:lnSpc>
-              <a:buNone/>
-              <a:defRPr sz="1650" b="1" i="0">
-                <a:solidFill>
-                  <a:srgbClr val="102A43"/>
-                </a:solidFill>
-              </a:defRPr>
-            </a:pPr>
-            <a:r>
-              <a:rPr sz="1650" b="1" i="0">
-                <a:solidFill>
-                  <a:srgbClr val="102A43"/>
-                </a:solidFill>
-              </a:rPr>
-              <a:t>Step 3(a)</a:t>
-            </a:r>
-          </a:p>
-        </p:txBody>
-      </p:sp>
-      <p:sp>
-        <p:nvSpPr>
-          <p:cNvPr id="18" name="">
-            <a:extLst xmlns:a="http://schemas.openxmlformats.org/drawingml/2006/main">
-              <a:ext uri="{FF2B5EF4-FFF2-40B4-BE49-F238E27FC236}">
-                <a16:creationId xmlns:a16="http://schemas.microsoft.com/office/drawing/2014/main" id="{3570035A-50AA-417B-A98D-FCE671A07057}"/>
-              </a:ext>
-            </a:extLst>
-          </p:cNvPr>
-          <p:cNvSpPr>
-            <a:spLocks xmlns:a="http://schemas.openxmlformats.org/drawingml/2006/main" noGrp="1"/>
-          </p:cNvSpPr>
-          <p:nvPr/>
-        </p:nvSpPr>
-        <p:spPr>
-          <a:xfrm xmlns:a="http://schemas.openxmlformats.org/drawingml/2006/main">
-            <a:off x="7315200" y="2019300"/>
-            <a:ext cx="1562100" cy="342900"/>
-          </a:xfrm>
-          <a:prstGeom xmlns:a="http://schemas.openxmlformats.org/drawingml/2006/main" prst="rect">
-            <a:avLst/>
-          </a:prstGeom>
-          <a:noFill xmlns:a="http://schemas.openxmlformats.org/drawingml/2006/main"/>
-          <a:ln xmlns:a="http://schemas.openxmlformats.org/drawingml/2006/main" w="0">
-            <a:noFill/>
-            <a:prstDash val="solid"/>
-          </a:ln>
-        </p:spPr>
-        <p:txBody>
-          <a:bodyPr xmlns:a="http://schemas.openxmlformats.org/drawingml/2006/main" wrap="square" lIns="38100" tIns="19050" rIns="38100" bIns="19050" anchor="ctr">
-            <a:normAutofit fontScale="100000"/>
-          </a:bodyPr>
-          <a:lstStyle xmlns:a="http://schemas.openxmlformats.org/drawingml/2006/main"/>
-          <a:p xmlns:a="http://schemas.openxmlformats.org/drawingml/2006/main">
-            <a:pPr algn="ctr">
-              <a:lnSpc>
-                <a:spcPct val="105000"/>
-              </a:lnSpc>
-              <a:buNone/>
-              <a:defRPr sz="1200" b="0" i="0">
-                <a:solidFill>
-                  <a:srgbClr val="243B53"/>
-                </a:solidFill>
-              </a:defRPr>
-            </a:pPr>
-            <a:r>
-              <a:rPr sz="1200" b="0" i="0">
-                <a:solidFill>
-                  <a:srgbClr val="243B53"/>
-                </a:solidFill>
-              </a:rPr>
-              <a:t>插入新 pair</a:t>
-            </a:r>
-          </a:p>
-        </p:txBody>
-      </p:sp>
-      <p:sp>
-        <p:nvSpPr>
-          <p:cNvPr id="19" name="">
-            <a:extLst xmlns:a="http://schemas.openxmlformats.org/drawingml/2006/main">
-              <a:ext uri="{FF2B5EF4-FFF2-40B4-BE49-F238E27FC236}">
-                <a16:creationId xmlns:a16="http://schemas.microsoft.com/office/drawing/2014/main" id="{7C5D222A-E0ED-48B6-9FB5-B290AD2D1325}"/>
-              </a:ext>
-            </a:extLst>
-          </p:cNvPr>
-          <p:cNvSpPr>
-            <a:spLocks xmlns:a="http://schemas.openxmlformats.org/drawingml/2006/main" noGrp="1"/>
-          </p:cNvSpPr>
-          <p:nvPr/>
-        </p:nvSpPr>
-        <p:spPr>
-          <a:xfrm xmlns:a="http://schemas.openxmlformats.org/drawingml/2006/main">
-            <a:off x="9353550" y="1619250"/>
-            <a:ext cx="1752600" cy="800100"/>
-          </a:xfrm>
-          <a:prstGeom xmlns:a="http://schemas.openxmlformats.org/drawingml/2006/main" prst="roundRect">
-            <a:avLst>
-              <a:gd name="adj" fmla="val 9524"/>
-            </a:avLst>
-          </a:prstGeom>
-          <a:solidFill xmlns:a="http://schemas.openxmlformats.org/drawingml/2006/main">
-            <a:srgbClr val="EAF1F8"/>
-          </a:solidFill>
-          <a:ln xmlns:a="http://schemas.openxmlformats.org/drawingml/2006/main" w="19050">
-            <a:solidFill>
-              <a:srgbClr val="52606D"/>
-            </a:solidFill>
-            <a:prstDash val="solid"/>
-          </a:ln>
-        </p:spPr>
-      </p:sp>
-      <p:sp>
-        <p:nvSpPr>
-          <p:cNvPr id="20" name="">
-            <a:extLst xmlns:a="http://schemas.openxmlformats.org/drawingml/2006/main">
-              <a:ext uri="{FF2B5EF4-FFF2-40B4-BE49-F238E27FC236}">
-                <a16:creationId xmlns:a16="http://schemas.microsoft.com/office/drawing/2014/main" id="{4334D7A9-489C-45B6-AC02-142FFD2833F2}"/>
-              </a:ext>
-            </a:extLst>
-          </p:cNvPr>
-          <p:cNvSpPr>
-            <a:spLocks xmlns:a="http://schemas.openxmlformats.org/drawingml/2006/main" noGrp="1"/>
-          </p:cNvSpPr>
-          <p:nvPr/>
-        </p:nvSpPr>
-        <p:spPr>
-          <a:xfrm xmlns:a="http://schemas.openxmlformats.org/drawingml/2006/main">
-            <a:off x="9429750" y="1714500"/>
-            <a:ext cx="1600200" cy="285750"/>
-          </a:xfrm>
-          <a:prstGeom xmlns:a="http://schemas.openxmlformats.org/drawingml/2006/main" prst="rect">
-            <a:avLst/>
-          </a:prstGeom>
-          <a:noFill xmlns:a="http://schemas.openxmlformats.org/drawingml/2006/main"/>
-          <a:ln xmlns:a="http://schemas.openxmlformats.org/drawingml/2006/main" w="0">
-            <a:noFill/>
-            <a:prstDash val="solid"/>
-          </a:ln>
-        </p:spPr>
-        <p:txBody>
-          <a:bodyPr xmlns:a="http://schemas.openxmlformats.org/drawingml/2006/main" wrap="square" lIns="38100" tIns="19050" rIns="38100" bIns="19050" anchor="t">
-            <a:normAutofit fontScale="93795"/>
-          </a:bodyPr>
-          <a:lstStyle xmlns:a="http://schemas.openxmlformats.org/drawingml/2006/main"/>
-          <a:p xmlns:a="http://schemas.openxmlformats.org/drawingml/2006/main">
-            <a:pPr algn="ctr">
-              <a:lnSpc>
-                <a:spcPct val="105000"/>
-              </a:lnSpc>
-              <a:buNone/>
-              <a:defRPr sz="1650" b="1" i="0">
-                <a:solidFill>
-                  <a:srgbClr val="102A43"/>
-                </a:solidFill>
-              </a:defRPr>
-            </a:pPr>
-            <a:r>
-              <a:rPr sz="1650" b="1" i="0">
-                <a:solidFill>
-                  <a:srgbClr val="102A43"/>
-                </a:solidFill>
-              </a:rPr>
-              <a:t>Step 3(b)</a:t>
-            </a:r>
-          </a:p>
-        </p:txBody>
-      </p:sp>
-      <p:sp>
-        <p:nvSpPr>
-          <p:cNvPr id="21" name="">
-            <a:extLst xmlns:a="http://schemas.openxmlformats.org/drawingml/2006/main">
-              <a:ext uri="{FF2B5EF4-FFF2-40B4-BE49-F238E27FC236}">
-                <a16:creationId xmlns:a16="http://schemas.microsoft.com/office/drawing/2014/main" id="{27F75B6E-4F4F-4BD9-B3A7-02CAA4971D1E}"/>
-              </a:ext>
-            </a:extLst>
-          </p:cNvPr>
-          <p:cNvSpPr>
-            <a:spLocks xmlns:a="http://schemas.openxmlformats.org/drawingml/2006/main" noGrp="1"/>
-          </p:cNvSpPr>
-          <p:nvPr/>
-        </p:nvSpPr>
-        <p:spPr>
-          <a:xfrm xmlns:a="http://schemas.openxmlformats.org/drawingml/2006/main">
-            <a:off x="9448800" y="2019300"/>
-            <a:ext cx="1562100" cy="342900"/>
-          </a:xfrm>
-          <a:prstGeom xmlns:a="http://schemas.openxmlformats.org/drawingml/2006/main" prst="rect">
-            <a:avLst/>
-          </a:prstGeom>
-          <a:noFill xmlns:a="http://schemas.openxmlformats.org/drawingml/2006/main"/>
-          <a:ln xmlns:a="http://schemas.openxmlformats.org/drawingml/2006/main" w="0">
-            <a:noFill/>
-            <a:prstDash val="solid"/>
-          </a:ln>
-        </p:spPr>
-        <p:txBody>
-          <a:bodyPr xmlns:a="http://schemas.openxmlformats.org/drawingml/2006/main" wrap="square" lIns="38100" tIns="19050" rIns="38100" bIns="19050" anchor="ctr">
-            <a:normAutofit fontScale="100000"/>
-          </a:bodyPr>
-          <a:lstStyle xmlns:a="http://schemas.openxmlformats.org/drawingml/2006/main"/>
-          <a:p xmlns:a="http://schemas.openxmlformats.org/drawingml/2006/main">
-            <a:pPr algn="ctr">
-              <a:lnSpc>
-                <a:spcPct val="105000"/>
-              </a:lnSpc>
-              <a:buNone/>
-              <a:defRPr sz="1200" b="0" i="0">
-                <a:solidFill>
-                  <a:srgbClr val="243B53"/>
-                </a:solidFill>
-              </a:defRPr>
-            </a:pPr>
-            <a:r>
-              <a:rPr sz="1200" b="0" i="0">
-                <a:solidFill>
-                  <a:srgbClr val="243B53"/>
-                </a:solidFill>
-              </a:rPr>
-              <a:t>拆分 + 转移</a:t>
-            </a:r>
-          </a:p>
-        </p:txBody>
-      </p:sp>
-      <p:sp>
-        <p:nvSpPr>
-          <p:cNvPr id="22" name="">
-            <a:extLst xmlns:a="http://schemas.openxmlformats.org/drawingml/2006/main">
-              <a:ext uri="{FF2B5EF4-FFF2-40B4-BE49-F238E27FC236}">
-                <a16:creationId xmlns:a16="http://schemas.microsoft.com/office/drawing/2014/main" id="{8A953881-AECB-4245-977A-16D59F358D3F}"/>
-              </a:ext>
-            </a:extLst>
-          </p:cNvPr>
-          <p:cNvSpPr>
-            <a:spLocks xmlns:a="http://schemas.openxmlformats.org/drawingml/2006/main" noGrp="1"/>
-          </p:cNvSpPr>
-          <p:nvPr/>
-        </p:nvSpPr>
-        <p:spPr>
-          <a:xfrm xmlns:a="http://schemas.openxmlformats.org/drawingml/2006/main">
-            <a:off x="4762500" y="3009900"/>
-            <a:ext cx="2667000" cy="838200"/>
-          </a:xfrm>
-          <a:prstGeom xmlns:a="http://schemas.openxmlformats.org/drawingml/2006/main" prst="roundRect">
-            <a:avLst>
-              <a:gd name="adj" fmla="val 9091"/>
-            </a:avLst>
-          </a:prstGeom>
-          <a:solidFill xmlns:a="http://schemas.openxmlformats.org/drawingml/2006/main">
-            <a:srgbClr val="EAF1F8"/>
-          </a:solidFill>
-          <a:ln xmlns:a="http://schemas.openxmlformats.org/drawingml/2006/main" w="19050">
-            <a:solidFill>
-              <a:srgbClr val="52606D"/>
-            </a:solidFill>
-            <a:prstDash val="solid"/>
-          </a:ln>
-        </p:spPr>
-      </p:sp>
-      <p:sp>
-        <p:nvSpPr>
-          <p:cNvPr id="23" name="">
-            <a:extLst xmlns:a="http://schemas.openxmlformats.org/drawingml/2006/main">
-              <a:ext uri="{FF2B5EF4-FFF2-40B4-BE49-F238E27FC236}">
-                <a16:creationId xmlns:a16="http://schemas.microsoft.com/office/drawing/2014/main" id="{A740470C-6025-4B76-96C3-2D45D22A325D}"/>
-              </a:ext>
-            </a:extLst>
-          </p:cNvPr>
-          <p:cNvSpPr>
-            <a:spLocks xmlns:a="http://schemas.openxmlformats.org/drawingml/2006/main" noGrp="1"/>
-          </p:cNvSpPr>
-          <p:nvPr/>
-        </p:nvSpPr>
-        <p:spPr>
-          <a:xfrm xmlns:a="http://schemas.openxmlformats.org/drawingml/2006/main">
-            <a:off x="4838700" y="3105150"/>
-            <a:ext cx="2514600" cy="285750"/>
-          </a:xfrm>
-          <a:prstGeom xmlns:a="http://schemas.openxmlformats.org/drawingml/2006/main" prst="rect">
-            <a:avLst/>
-          </a:prstGeom>
-          <a:noFill xmlns:a="http://schemas.openxmlformats.org/drawingml/2006/main"/>
-          <a:ln xmlns:a="http://schemas.openxmlformats.org/drawingml/2006/main" w="0">
-            <a:noFill/>
-            <a:prstDash val="solid"/>
-          </a:ln>
-        </p:spPr>
-        <p:txBody>
-          <a:bodyPr xmlns:a="http://schemas.openxmlformats.org/drawingml/2006/main" wrap="square" lIns="38100" tIns="19050" rIns="38100" bIns="19050" anchor="t">
-            <a:normAutofit fontScale="93795"/>
-          </a:bodyPr>
-          <a:lstStyle xmlns:a="http://schemas.openxmlformats.org/drawingml/2006/main"/>
-          <a:p xmlns:a="http://schemas.openxmlformats.org/drawingml/2006/main">
-            <a:pPr algn="ctr">
-              <a:lnSpc>
-                <a:spcPct val="105000"/>
-              </a:lnSpc>
-              <a:buNone/>
-              <a:defRPr sz="1650" b="1" i="0">
-                <a:solidFill>
-                  <a:srgbClr val="102A43"/>
-                </a:solidFill>
-              </a:defRPr>
-            </a:pPr>
-            <a:r>
-              <a:rPr sz="1650" b="1" i="0">
-                <a:solidFill>
-                  <a:srgbClr val="102A43"/>
-                </a:solidFill>
-              </a:rPr>
-              <a:t>Step 3(c)</a:t>
-            </a:r>
-          </a:p>
-        </p:txBody>
-      </p:sp>
-      <p:sp>
-        <p:nvSpPr>
-          <p:cNvPr id="24" name="">
-            <a:extLst xmlns:a="http://schemas.openxmlformats.org/drawingml/2006/main">
-              <a:ext uri="{FF2B5EF4-FFF2-40B4-BE49-F238E27FC236}">
-                <a16:creationId xmlns:a16="http://schemas.microsoft.com/office/drawing/2014/main" id="{49FD8DA1-5C9F-43A1-BA1C-BA86D1E06265}"/>
-              </a:ext>
-            </a:extLst>
-          </p:cNvPr>
-          <p:cNvSpPr>
-            <a:spLocks xmlns:a="http://schemas.openxmlformats.org/drawingml/2006/main" noGrp="1"/>
-          </p:cNvSpPr>
-          <p:nvPr/>
-        </p:nvSpPr>
-        <p:spPr>
-          <a:xfrm xmlns:a="http://schemas.openxmlformats.org/drawingml/2006/main">
-            <a:off x="4857750" y="3409950"/>
-            <a:ext cx="2476500" cy="381000"/>
-          </a:xfrm>
-          <a:prstGeom xmlns:a="http://schemas.openxmlformats.org/drawingml/2006/main" prst="rect">
-            <a:avLst/>
-          </a:prstGeom>
-          <a:noFill xmlns:a="http://schemas.openxmlformats.org/drawingml/2006/main"/>
-          <a:ln xmlns:a="http://schemas.openxmlformats.org/drawingml/2006/main" w="0">
-            <a:noFill/>
-            <a:prstDash val="solid"/>
-          </a:ln>
-        </p:spPr>
-        <p:txBody>
-          <a:bodyPr xmlns:a="http://schemas.openxmlformats.org/drawingml/2006/main" wrap="square" lIns="38100" tIns="19050" rIns="38100" bIns="19050" anchor="ctr">
-            <a:normAutofit fontScale="100000"/>
-          </a:bodyPr>
-          <a:lstStyle xmlns:a="http://schemas.openxmlformats.org/drawingml/2006/main"/>
-          <a:p xmlns:a="http://schemas.openxmlformats.org/drawingml/2006/main">
-            <a:pPr algn="ctr">
-              <a:lnSpc>
-                <a:spcPct val="105000"/>
-              </a:lnSpc>
-              <a:buNone/>
-              <a:defRPr sz="1200" b="0" i="0">
-                <a:solidFill>
-                  <a:srgbClr val="243B53"/>
-                </a:solidFill>
-              </a:defRPr>
-            </a:pPr>
-            <a:r>
-              <a:rPr sz="1200" b="0" i="0">
-                <a:solidFill>
-                  <a:srgbClr val="243B53"/>
-                </a:solidFill>
-              </a:rPr>
-              <a:t>将新点插入维护的顺序</a:t>
-            </a:r>
-          </a:p>
-        </p:txBody>
-      </p:sp>
-      <p:cxnSp>
-        <p:nvCxnSpPr>
-          <p:cNvPr id="267" name=""/>
-          <p:cNvCxnSpPr>
-            <a:stCxn xmlns:a="http://schemas.openxmlformats.org/drawingml/2006/main" id="7" idx="3"/>
-            <a:endCxn xmlns:a="http://schemas.openxmlformats.org/drawingml/2006/main" id="10" idx="1"/>
-          </p:cNvCxnSpPr>
-          <p:nvPr/>
-        </p:nvCxnSpPr>
-        <p:spPr>
-          <a:xfrm xmlns:a="http://schemas.openxmlformats.org/drawingml/2006/main">
-            <a:off x="2571750" y="2019300"/>
-            <a:ext cx="381000" cy="0"/>
-          </a:xfrm>
-          <a:prstGeom xmlns:a="http://schemas.openxmlformats.org/drawingml/2006/main" prst="straightConnector1">
-            <a:avLst/>
-          </a:prstGeom>
-          <a:ln xmlns:a="http://schemas.openxmlformats.org/drawingml/2006/main" w="19050">
-            <a:solidFill>
-              <a:srgbClr val="52606D"/>
-            </a:solidFill>
-            <a:prstDash val="solid"/>
-            <a:tailEnd type="arrow" w="med" len="med"/>
-          </a:ln>
-        </p:spPr>
-      </p:cxnSp>
-      <p:cxnSp>
-        <p:nvCxnSpPr>
-          <p:cNvPr id="268" name=""/>
-          <p:cNvCxnSpPr>
-            <a:stCxn xmlns:a="http://schemas.openxmlformats.org/drawingml/2006/main" id="10" idx="3"/>
-            <a:endCxn xmlns:a="http://schemas.openxmlformats.org/drawingml/2006/main" id="13" idx="1"/>
-          </p:cNvCxnSpPr>
-          <p:nvPr/>
-        </p:nvCxnSpPr>
-        <p:spPr>
-          <a:xfrm xmlns:a="http://schemas.openxmlformats.org/drawingml/2006/main">
-            <a:off x="4705350" y="2019300"/>
-            <a:ext cx="381000" cy="0"/>
-          </a:xfrm>
-          <a:prstGeom xmlns:a="http://schemas.openxmlformats.org/drawingml/2006/main" prst="straightConnector1">
-            <a:avLst/>
-          </a:prstGeom>
-          <a:ln xmlns:a="http://schemas.openxmlformats.org/drawingml/2006/main" w="19050">
-            <a:solidFill>
-              <a:srgbClr val="52606D"/>
-            </a:solidFill>
-            <a:prstDash val="solid"/>
-            <a:tailEnd type="arrow" w="med" len="med"/>
-          </a:ln>
-        </p:spPr>
-      </p:cxnSp>
-      <p:cxnSp>
-        <p:nvCxnSpPr>
-          <p:cNvPr id="269" name=""/>
-          <p:cNvCxnSpPr>
-            <a:stCxn xmlns:a="http://schemas.openxmlformats.org/drawingml/2006/main" id="13" idx="3"/>
-            <a:endCxn xmlns:a="http://schemas.openxmlformats.org/drawingml/2006/main" id="16" idx="1"/>
-          </p:cNvCxnSpPr>
-          <p:nvPr/>
-        </p:nvCxnSpPr>
-        <p:spPr>
-          <a:xfrm xmlns:a="http://schemas.openxmlformats.org/drawingml/2006/main">
-            <a:off x="6838950" y="2019300"/>
-            <a:ext cx="381000" cy="0"/>
-          </a:xfrm>
-          <a:prstGeom xmlns:a="http://schemas.openxmlformats.org/drawingml/2006/main" prst="straightConnector1">
-            <a:avLst/>
-          </a:prstGeom>
-          <a:ln xmlns:a="http://schemas.openxmlformats.org/drawingml/2006/main" w="19050">
-            <a:solidFill>
-              <a:srgbClr val="52606D"/>
-            </a:solidFill>
-            <a:prstDash val="solid"/>
-            <a:tailEnd type="arrow" w="med" len="med"/>
-          </a:ln>
-        </p:spPr>
-      </p:cxnSp>
-      <p:cxnSp>
-        <p:nvCxnSpPr>
-          <p:cNvPr id="270" name=""/>
-          <p:cNvCxnSpPr>
-            <a:stCxn xmlns:a="http://schemas.openxmlformats.org/drawingml/2006/main" id="16" idx="3"/>
-            <a:endCxn xmlns:a="http://schemas.openxmlformats.org/drawingml/2006/main" id="19" idx="1"/>
-          </p:cNvCxnSpPr>
-          <p:nvPr/>
-        </p:nvCxnSpPr>
-        <p:spPr>
-          <a:xfrm xmlns:a="http://schemas.openxmlformats.org/drawingml/2006/main">
-            <a:off x="8972550" y="2019300"/>
-            <a:ext cx="381000" cy="0"/>
-          </a:xfrm>
-          <a:prstGeom xmlns:a="http://schemas.openxmlformats.org/drawingml/2006/main" prst="straightConnector1">
-            <a:avLst/>
-          </a:prstGeom>
-          <a:ln xmlns:a="http://schemas.openxmlformats.org/drawingml/2006/main" w="19050">
-            <a:solidFill>
-              <a:srgbClr val="52606D"/>
-            </a:solidFill>
-            <a:prstDash val="solid"/>
-            <a:tailEnd type="arrow" w="med" len="med"/>
-          </a:ln>
-        </p:spPr>
-      </p:cxnSp>
-      <p:cxnSp>
-        <p:nvCxnSpPr>
-          <p:cNvPr id="271" name=""/>
-          <p:cNvCxnSpPr>
-            <a:stCxn xmlns:a="http://schemas.openxmlformats.org/drawingml/2006/main" id="19" idx="2"/>
-            <a:endCxn xmlns:a="http://schemas.openxmlformats.org/drawingml/2006/main" id="22" idx="0"/>
-          </p:cNvCxnSpPr>
-          <p:nvPr/>
-        </p:nvCxnSpPr>
-        <p:spPr>
-          <a:xfrm xmlns:a="http://schemas.openxmlformats.org/drawingml/2006/main" flipH="1">
-            <a:off x="6096000" y="2419350"/>
-            <a:ext cx="4133850" cy="590550"/>
-          </a:xfrm>
-          <a:prstGeom xmlns:a="http://schemas.openxmlformats.org/drawingml/2006/main" prst="bentConnector4">
-            <a:avLst>
-              <a:gd name="adj1" fmla="val 0"/>
-              <a:gd name="adj2" fmla="val 50000"/>
-            </a:avLst>
-          </a:prstGeom>
-          <a:ln xmlns:a="http://schemas.openxmlformats.org/drawingml/2006/main" w="19050">
-            <a:solidFill>
-              <a:srgbClr val="52606D"/>
-            </a:solidFill>
-            <a:prstDash val="solid"/>
-            <a:tailEnd type="arrow" w="med" len="med"/>
-          </a:ln>
-        </p:spPr>
-      </p:cxnSp>
-      <p:sp>
-        <p:nvSpPr>
-          <p:cNvPr id="30" name="">
-            <a:extLst xmlns:a="http://schemas.openxmlformats.org/drawingml/2006/main">
-              <a:ext uri="{FF2B5EF4-FFF2-40B4-BE49-F238E27FC236}">
-                <a16:creationId xmlns:a16="http://schemas.microsoft.com/office/drawing/2014/main" id="{7C405428-7FD7-4F00-AFAF-70AFFE9C97A3}"/>
-              </a:ext>
-            </a:extLst>
-          </p:cNvPr>
-          <p:cNvSpPr>
-            <a:spLocks xmlns:a="http://schemas.openxmlformats.org/drawingml/2006/main" noGrp="1"/>
-          </p:cNvSpPr>
-          <p:nvPr/>
-        </p:nvSpPr>
-        <p:spPr>
-          <a:xfrm xmlns:a="http://schemas.openxmlformats.org/drawingml/2006/main">
-            <a:off x="781050" y="4476750"/>
-            <a:ext cx="3105150" cy="1066800"/>
-          </a:xfrm>
-          <a:prstGeom xmlns:a="http://schemas.openxmlformats.org/drawingml/2006/main" prst="roundRect">
-            <a:avLst>
-              <a:gd name="adj" fmla="val 7143"/>
-            </a:avLst>
-          </a:prstGeom>
-          <a:solidFill xmlns:a="http://schemas.openxmlformats.org/drawingml/2006/main">
-            <a:srgbClr val="EAF1F8"/>
-          </a:solidFill>
-          <a:ln xmlns:a="http://schemas.openxmlformats.org/drawingml/2006/main" w="14288">
+          <a:ln xmlns:a="http://schemas.openxmlformats.org/drawingml/2006/main" w="11430">
             <a:solidFill>
               <a:srgbClr val="102A43"/>
             </a:solidFill>
@@ -28558,22 +29236,22 @@
       </p:sp>
       <p:sp>
         <p:nvSpPr>
-          <p:cNvPr id="31" name="">
-            <a:extLst xmlns:a="http://schemas.openxmlformats.org/drawingml/2006/main">
-              <a:ext uri="{FF2B5EF4-FFF2-40B4-BE49-F238E27FC236}">
-                <a16:creationId xmlns:a16="http://schemas.microsoft.com/office/drawing/2014/main" id="{340F1DA9-0141-4CAF-8DD6-05CB795E6562}"/>
-              </a:ext>
-            </a:extLst>
-          </p:cNvPr>
-          <p:cNvSpPr>
-            <a:spLocks xmlns:a="http://schemas.openxmlformats.org/drawingml/2006/main" noGrp="1"/>
-          </p:cNvSpPr>
-          <p:nvPr/>
-        </p:nvSpPr>
-        <p:spPr>
-          <a:xfrm xmlns:a="http://schemas.openxmlformats.org/drawingml/2006/main">
-            <a:off x="914400" y="4610100"/>
-            <a:ext cx="2838450" cy="285750"/>
+          <p:cNvPr id="40" name="">
+            <a:extLst xmlns:a="http://schemas.openxmlformats.org/drawingml/2006/main">
+              <a:ext uri="{FF2B5EF4-FFF2-40B4-BE49-F238E27FC236}">
+                <a16:creationId xmlns:a16="http://schemas.microsoft.com/office/drawing/2014/main" id="{05928044-5F20-4CD3-83E3-B5EFE25B7B0A}"/>
+              </a:ext>
+            </a:extLst>
+          </p:cNvPr>
+          <p:cNvSpPr>
+            <a:spLocks xmlns:a="http://schemas.openxmlformats.org/drawingml/2006/main" noGrp="1"/>
+          </p:cNvSpPr>
+          <p:nvPr/>
+        </p:nvSpPr>
+        <p:spPr>
+          <a:xfrm xmlns:a="http://schemas.openxmlformats.org/drawingml/2006/main">
+            <a:off x="800100" y="6038850"/>
+            <a:ext cx="3276600" cy="285750"/>
           </a:xfrm>
           <a:prstGeom xmlns:a="http://schemas.openxmlformats.org/drawingml/2006/main" prst="rect">
             <a:avLst/>
@@ -28586,7 +29264,7 @@
         </p:spPr>
         <p:txBody>
           <a:bodyPr xmlns:a="http://schemas.openxmlformats.org/drawingml/2006/main" wrap="square" lIns="38100" tIns="19050" rIns="38100" bIns="19050" anchor="t">
-            <a:normAutofit fontScale="100000"/>
+            <a:normAutofit fontScale="98261"/>
           </a:bodyPr>
           <a:lstStyle xmlns:a="http://schemas.openxmlformats.org/drawingml/2006/main"/>
           <a:p xmlns:a="http://schemas.openxmlformats.org/drawingml/2006/main">
@@ -28595,14 +29273,14 @@
                 <a:spcPct val="105000"/>
               </a:lnSpc>
               <a:buNone/>
-              <a:defRPr sz="1425" b="1" i="0">
+              <a:defRPr sz="1575" b="1" i="0">
                 <a:solidFill>
                   <a:srgbClr val="102A43"/>
                 </a:solidFill>
               </a:defRPr>
             </a:pPr>
             <a:r>
-              <a:rPr sz="1425" b="1" i="0">
+              <a:rPr sz="1575" b="1" i="0">
                 <a:solidFill>
                   <a:srgbClr val="102A43"/>
                 </a:solidFill>
@@ -28614,88 +29292,32 @@
       </p:sp>
       <p:sp>
         <p:nvSpPr>
-          <p:cNvPr id="32" name="">
-            <a:extLst xmlns:a="http://schemas.openxmlformats.org/drawingml/2006/main">
-              <a:ext uri="{FF2B5EF4-FFF2-40B4-BE49-F238E27FC236}">
-                <a16:creationId xmlns:a16="http://schemas.microsoft.com/office/drawing/2014/main" id="{14D04A91-4054-4559-870F-109187CF43DF}"/>
-              </a:ext>
-            </a:extLst>
-          </p:cNvPr>
-          <p:cNvSpPr>
-            <a:spLocks xmlns:a="http://schemas.openxmlformats.org/drawingml/2006/main" noGrp="1"/>
-          </p:cNvSpPr>
-          <p:nvPr/>
-        </p:nvSpPr>
-        <p:spPr>
-          <a:xfrm xmlns:a="http://schemas.openxmlformats.org/drawingml/2006/main">
-            <a:off x="952500" y="5010150"/>
-            <a:ext cx="2762250" cy="400050"/>
-          </a:xfrm>
-          <a:prstGeom xmlns:a="http://schemas.openxmlformats.org/drawingml/2006/main" prst="rect">
-            <a:avLst/>
-          </a:prstGeom>
-          <a:noFill xmlns:a="http://schemas.openxmlformats.org/drawingml/2006/main"/>
-          <a:ln xmlns:a="http://schemas.openxmlformats.org/drawingml/2006/main" w="0">
-            <a:noFill/>
-            <a:prstDash val="solid"/>
-          </a:ln>
-        </p:spPr>
-        <p:txBody>
-          <a:bodyPr xmlns:a="http://schemas.openxmlformats.org/drawingml/2006/main" wrap="square" lIns="38100" tIns="19050" rIns="38100" bIns="19050" anchor="ctr">
-            <a:normAutofit fontScale="100000"/>
-          </a:bodyPr>
-          <a:lstStyle xmlns:a="http://schemas.openxmlformats.org/drawingml/2006/main"/>
-          <a:p xmlns:a="http://schemas.openxmlformats.org/drawingml/2006/main">
-            <a:pPr algn="ctr">
-              <a:lnSpc>
-                <a:spcPct val="105000"/>
-              </a:lnSpc>
-              <a:buNone/>
-              <a:defRPr sz="1275" b="0" i="0">
-                <a:solidFill>
-                  <a:srgbClr val="243B53"/>
-                </a:solidFill>
-              </a:defRPr>
-            </a:pPr>
-            <a:r>
-              <a:rPr sz="1275" b="0" i="0">
-                <a:solidFill>
-                  <a:srgbClr val="243B53"/>
-                </a:solidFill>
-              </a:rPr>
-              <a:t>increasing Step 1/2/3 结构</a:t>
-            </a:r>
-          </a:p>
-        </p:txBody>
-      </p:sp>
-      <p:sp>
-        <p:nvSpPr>
-          <p:cNvPr id="33" name="">
-            <a:extLst xmlns:a="http://schemas.openxmlformats.org/drawingml/2006/main">
-              <a:ext uri="{FF2B5EF4-FFF2-40B4-BE49-F238E27FC236}">
-                <a16:creationId xmlns:a16="http://schemas.microsoft.com/office/drawing/2014/main" id="{84D3A541-28CE-4981-90B7-19D2BBE82413}"/>
-              </a:ext>
-            </a:extLst>
-          </p:cNvPr>
-          <p:cNvSpPr>
-            <a:spLocks xmlns:a="http://schemas.openxmlformats.org/drawingml/2006/main" noGrp="1"/>
-          </p:cNvSpPr>
-          <p:nvPr/>
-        </p:nvSpPr>
-        <p:spPr>
-          <a:xfrm xmlns:a="http://schemas.openxmlformats.org/drawingml/2006/main">
-            <a:off x="4257675" y="4476750"/>
-            <a:ext cx="3105150" cy="1066800"/>
+          <p:cNvPr id="41" name="">
+            <a:extLst xmlns:a="http://schemas.openxmlformats.org/drawingml/2006/main">
+              <a:ext uri="{FF2B5EF4-FFF2-40B4-BE49-F238E27FC236}">
+                <a16:creationId xmlns:a16="http://schemas.microsoft.com/office/drawing/2014/main" id="{977EE3C8-23C0-4DD3-9EDC-B38B51243B2B}"/>
+              </a:ext>
+            </a:extLst>
+          </p:cNvPr>
+          <p:cNvSpPr>
+            <a:spLocks xmlns:a="http://schemas.openxmlformats.org/drawingml/2006/main" noGrp="1"/>
+          </p:cNvSpPr>
+          <p:nvPr/>
+        </p:nvSpPr>
+        <p:spPr>
+          <a:xfrm xmlns:a="http://schemas.openxmlformats.org/drawingml/2006/main">
+            <a:off x="4381500" y="6000750"/>
+            <a:ext cx="3429000" cy="381000"/>
           </a:xfrm>
           <a:prstGeom xmlns:a="http://schemas.openxmlformats.org/drawingml/2006/main" prst="roundRect">
             <a:avLst>
-              <a:gd name="adj" fmla="val 7143"/>
+              <a:gd name="adj" fmla="val 15000"/>
             </a:avLst>
           </a:prstGeom>
           <a:solidFill xmlns:a="http://schemas.openxmlformats.org/drawingml/2006/main">
             <a:srgbClr val="E8F5F3"/>
           </a:solidFill>
-          <a:ln xmlns:a="http://schemas.openxmlformats.org/drawingml/2006/main" w="14288">
+          <a:ln xmlns:a="http://schemas.openxmlformats.org/drawingml/2006/main" w="11430">
             <a:solidFill>
               <a:srgbClr val="2A9D8F"/>
             </a:solidFill>
@@ -28705,22 +29327,22 @@
       </p:sp>
       <p:sp>
         <p:nvSpPr>
-          <p:cNvPr id="34" name="">
-            <a:extLst xmlns:a="http://schemas.openxmlformats.org/drawingml/2006/main">
-              <a:ext uri="{FF2B5EF4-FFF2-40B4-BE49-F238E27FC236}">
-                <a16:creationId xmlns:a16="http://schemas.microsoft.com/office/drawing/2014/main" id="{32B1C363-921C-4E7F-8076-35E0EA55D505}"/>
-              </a:ext>
-            </a:extLst>
-          </p:cNvPr>
-          <p:cNvSpPr>
-            <a:spLocks xmlns:a="http://schemas.openxmlformats.org/drawingml/2006/main" noGrp="1"/>
-          </p:cNvSpPr>
-          <p:nvPr/>
-        </p:nvSpPr>
-        <p:spPr>
-          <a:xfrm xmlns:a="http://schemas.openxmlformats.org/drawingml/2006/main">
-            <a:off x="4391025" y="4610100"/>
-            <a:ext cx="2838450" cy="285750"/>
+          <p:cNvPr id="42" name="">
+            <a:extLst xmlns:a="http://schemas.openxmlformats.org/drawingml/2006/main">
+              <a:ext uri="{FF2B5EF4-FFF2-40B4-BE49-F238E27FC236}">
+                <a16:creationId xmlns:a16="http://schemas.microsoft.com/office/drawing/2014/main" id="{4D635945-2DF6-4D20-882D-1C96546658E0}"/>
+              </a:ext>
+            </a:extLst>
+          </p:cNvPr>
+          <p:cNvSpPr>
+            <a:spLocks xmlns:a="http://schemas.openxmlformats.org/drawingml/2006/main" noGrp="1"/>
+          </p:cNvSpPr>
+          <p:nvPr/>
+        </p:nvSpPr>
+        <p:spPr>
+          <a:xfrm xmlns:a="http://schemas.openxmlformats.org/drawingml/2006/main">
+            <a:off x="4457700" y="6038850"/>
+            <a:ext cx="3276600" cy="285750"/>
           </a:xfrm>
           <a:prstGeom xmlns:a="http://schemas.openxmlformats.org/drawingml/2006/main" prst="rect">
             <a:avLst/>
@@ -28733,7 +29355,7 @@
         </p:spPr>
         <p:txBody>
           <a:bodyPr xmlns:a="http://schemas.openxmlformats.org/drawingml/2006/main" wrap="square" lIns="38100" tIns="19050" rIns="38100" bIns="19050" anchor="t">
-            <a:normAutofit fontScale="100000"/>
+            <a:normAutofit fontScale="98261"/>
           </a:bodyPr>
           <a:lstStyle xmlns:a="http://schemas.openxmlformats.org/drawingml/2006/main"/>
           <a:p xmlns:a="http://schemas.openxmlformats.org/drawingml/2006/main">
@@ -28742,14 +29364,14 @@
                 <a:spcPct val="105000"/>
               </a:lnSpc>
               <a:buNone/>
-              <a:defRPr sz="1425" b="1" i="0">
+              <a:defRPr sz="1575" b="1" i="0">
                 <a:solidFill>
                   <a:srgbClr val="2A9D8F"/>
                 </a:solidFill>
               </a:defRPr>
             </a:pPr>
             <a:r>
-              <a:rPr sz="1425" b="1" i="0">
+              <a:rPr sz="1575" b="1" i="0">
                 <a:solidFill>
                   <a:srgbClr val="2A9D8F"/>
                 </a:solidFill>
@@ -28761,88 +29383,32 @@
       </p:sp>
       <p:sp>
         <p:nvSpPr>
-          <p:cNvPr id="35" name="">
-            <a:extLst xmlns:a="http://schemas.openxmlformats.org/drawingml/2006/main">
-              <a:ext uri="{FF2B5EF4-FFF2-40B4-BE49-F238E27FC236}">
-                <a16:creationId xmlns:a16="http://schemas.microsoft.com/office/drawing/2014/main" id="{E6297597-E023-4881-8322-DA479642E6B1}"/>
-              </a:ext>
-            </a:extLst>
-          </p:cNvPr>
-          <p:cNvSpPr>
-            <a:spLocks xmlns:a="http://schemas.openxmlformats.org/drawingml/2006/main" noGrp="1"/>
-          </p:cNvSpPr>
-          <p:nvPr/>
-        </p:nvSpPr>
-        <p:spPr>
-          <a:xfrm xmlns:a="http://schemas.openxmlformats.org/drawingml/2006/main">
-            <a:off x="4429125" y="5010150"/>
-            <a:ext cx="2762250" cy="400050"/>
-          </a:xfrm>
-          <a:prstGeom xmlns:a="http://schemas.openxmlformats.org/drawingml/2006/main" prst="rect">
-            <a:avLst/>
-          </a:prstGeom>
-          <a:noFill xmlns:a="http://schemas.openxmlformats.org/drawingml/2006/main"/>
-          <a:ln xmlns:a="http://schemas.openxmlformats.org/drawingml/2006/main" w="0">
-            <a:noFill/>
-            <a:prstDash val="solid"/>
-          </a:ln>
-        </p:spPr>
-        <p:txBody>
-          <a:bodyPr xmlns:a="http://schemas.openxmlformats.org/drawingml/2006/main" wrap="square" lIns="38100" tIns="19050" rIns="38100" bIns="19050" anchor="ctr">
-            <a:normAutofit fontScale="100000"/>
-          </a:bodyPr>
-          <a:lstStyle xmlns:a="http://schemas.openxmlformats.org/drawingml/2006/main"/>
-          <a:p xmlns:a="http://schemas.openxmlformats.org/drawingml/2006/main">
-            <a:pPr algn="ctr">
-              <a:lnSpc>
-                <a:spcPct val="105000"/>
-              </a:lnSpc>
-              <a:buNone/>
-              <a:defRPr sz="1275" b="0" i="0">
-                <a:solidFill>
-                  <a:srgbClr val="243B53"/>
-                </a:solidFill>
-              </a:defRPr>
-            </a:pPr>
-            <a:r>
-              <a:rPr sz="1275" b="0" i="0">
-                <a:solidFill>
-                  <a:srgbClr val="243B53"/>
-                </a:solidFill>
-              </a:rPr>
-              <a:t>镜像的 decreasing orientation</a:t>
-            </a:r>
-          </a:p>
-        </p:txBody>
-      </p:sp>
-      <p:sp>
-        <p:nvSpPr>
-          <p:cNvPr id="36" name="">
-            <a:extLst xmlns:a="http://schemas.openxmlformats.org/drawingml/2006/main">
-              <a:ext uri="{FF2B5EF4-FFF2-40B4-BE49-F238E27FC236}">
-                <a16:creationId xmlns:a16="http://schemas.microsoft.com/office/drawing/2014/main" id="{0DFAD539-AD61-4FFB-A799-111B673C33EC}"/>
-              </a:ext>
-            </a:extLst>
-          </p:cNvPr>
-          <p:cNvSpPr>
-            <a:spLocks xmlns:a="http://schemas.openxmlformats.org/drawingml/2006/main" noGrp="1"/>
-          </p:cNvSpPr>
-          <p:nvPr/>
-        </p:nvSpPr>
-        <p:spPr>
-          <a:xfrm xmlns:a="http://schemas.openxmlformats.org/drawingml/2006/main">
-            <a:off x="7734300" y="4476750"/>
-            <a:ext cx="3105150" cy="1066800"/>
+          <p:cNvPr id="43" name="">
+            <a:extLst xmlns:a="http://schemas.openxmlformats.org/drawingml/2006/main">
+              <a:ext uri="{FF2B5EF4-FFF2-40B4-BE49-F238E27FC236}">
+                <a16:creationId xmlns:a16="http://schemas.microsoft.com/office/drawing/2014/main" id="{5A8F5261-80CD-4400-AF31-908F1527F9D2}"/>
+              </a:ext>
+            </a:extLst>
+          </p:cNvPr>
+          <p:cNvSpPr>
+            <a:spLocks xmlns:a="http://schemas.openxmlformats.org/drawingml/2006/main" noGrp="1"/>
+          </p:cNvSpPr>
+          <p:nvPr/>
+        </p:nvSpPr>
+        <p:spPr>
+          <a:xfrm xmlns:a="http://schemas.openxmlformats.org/drawingml/2006/main">
+            <a:off x="8039100" y="6000750"/>
+            <a:ext cx="3429000" cy="381000"/>
           </a:xfrm>
           <a:prstGeom xmlns:a="http://schemas.openxmlformats.org/drawingml/2006/main" prst="roundRect">
             <a:avLst>
-              <a:gd name="adj" fmla="val 7143"/>
+              <a:gd name="adj" fmla="val 15000"/>
             </a:avLst>
           </a:prstGeom>
           <a:solidFill xmlns:a="http://schemas.openxmlformats.org/drawingml/2006/main">
             <a:srgbClr val="FCEEEA"/>
           </a:solidFill>
-          <a:ln xmlns:a="http://schemas.openxmlformats.org/drawingml/2006/main" w="14288">
+          <a:ln xmlns:a="http://schemas.openxmlformats.org/drawingml/2006/main" w="11430">
             <a:solidFill>
               <a:srgbClr val="E76F51"/>
             </a:solidFill>
@@ -28852,22 +29418,22 @@
       </p:sp>
       <p:sp>
         <p:nvSpPr>
-          <p:cNvPr id="37" name="">
-            <a:extLst xmlns:a="http://schemas.openxmlformats.org/drawingml/2006/main">
-              <a:ext uri="{FF2B5EF4-FFF2-40B4-BE49-F238E27FC236}">
-                <a16:creationId xmlns:a16="http://schemas.microsoft.com/office/drawing/2014/main" id="{26A7B894-AC1A-4299-BE0E-6933FE0E237B}"/>
-              </a:ext>
-            </a:extLst>
-          </p:cNvPr>
-          <p:cNvSpPr>
-            <a:spLocks xmlns:a="http://schemas.openxmlformats.org/drawingml/2006/main" noGrp="1"/>
-          </p:cNvSpPr>
-          <p:nvPr/>
-        </p:nvSpPr>
-        <p:spPr>
-          <a:xfrm xmlns:a="http://schemas.openxmlformats.org/drawingml/2006/main">
-            <a:off x="7867650" y="4610100"/>
-            <a:ext cx="2838450" cy="285750"/>
+          <p:cNvPr id="44" name="">
+            <a:extLst xmlns:a="http://schemas.openxmlformats.org/drawingml/2006/main">
+              <a:ext uri="{FF2B5EF4-FFF2-40B4-BE49-F238E27FC236}">
+                <a16:creationId xmlns:a16="http://schemas.microsoft.com/office/drawing/2014/main" id="{A03B112E-EC78-4380-9EA5-5C60D6A1757B}"/>
+              </a:ext>
+            </a:extLst>
+          </p:cNvPr>
+          <p:cNvSpPr>
+            <a:spLocks xmlns:a="http://schemas.openxmlformats.org/drawingml/2006/main" noGrp="1"/>
+          </p:cNvSpPr>
+          <p:nvPr/>
+        </p:nvSpPr>
+        <p:spPr>
+          <a:xfrm xmlns:a="http://schemas.openxmlformats.org/drawingml/2006/main">
+            <a:off x="8115300" y="6038850"/>
+            <a:ext cx="3276600" cy="285750"/>
           </a:xfrm>
           <a:prstGeom xmlns:a="http://schemas.openxmlformats.org/drawingml/2006/main" prst="rect">
             <a:avLst/>
@@ -28880,7 +29446,7 @@
         </p:spPr>
         <p:txBody>
           <a:bodyPr xmlns:a="http://schemas.openxmlformats.org/drawingml/2006/main" wrap="square" lIns="38100" tIns="19050" rIns="38100" bIns="19050" anchor="t">
-            <a:normAutofit fontScale="100000"/>
+            <a:normAutofit fontScale="98261"/>
           </a:bodyPr>
           <a:lstStyle xmlns:a="http://schemas.openxmlformats.org/drawingml/2006/main"/>
           <a:p xmlns:a="http://schemas.openxmlformats.org/drawingml/2006/main">
@@ -28889,75 +29455,19 @@
                 <a:spcPct val="105000"/>
               </a:lnSpc>
               <a:buNone/>
-              <a:defRPr sz="1425" b="1" i="0">
+              <a:defRPr sz="1575" b="1" i="0">
                 <a:solidFill>
                   <a:srgbClr val="E76F51"/>
                 </a:solidFill>
               </a:defRPr>
             </a:pPr>
             <a:r>
-              <a:rPr sz="1425" b="1" i="0">
+              <a:rPr sz="1575" b="1" i="0">
                 <a:solidFill>
                   <a:srgbClr val="E76F51"/>
                 </a:solidFill>
               </a:rPr>
               <a:t>可执行化澄清</a:t>
-            </a:r>
-          </a:p>
-        </p:txBody>
-      </p:sp>
-      <p:sp>
-        <p:nvSpPr>
-          <p:cNvPr id="38" name="">
-            <a:extLst xmlns:a="http://schemas.openxmlformats.org/drawingml/2006/main">
-              <a:ext uri="{FF2B5EF4-FFF2-40B4-BE49-F238E27FC236}">
-                <a16:creationId xmlns:a16="http://schemas.microsoft.com/office/drawing/2014/main" id="{4A4D39E8-1E50-4E64-9D8B-906E0A658D1B}"/>
-              </a:ext>
-            </a:extLst>
-          </p:cNvPr>
-          <p:cNvSpPr>
-            <a:spLocks xmlns:a="http://schemas.openxmlformats.org/drawingml/2006/main" noGrp="1"/>
-          </p:cNvSpPr>
-          <p:nvPr/>
-        </p:nvSpPr>
-        <p:spPr>
-          <a:xfrm xmlns:a="http://schemas.openxmlformats.org/drawingml/2006/main">
-            <a:off x="7905750" y="5010150"/>
-            <a:ext cx="2762250" cy="400050"/>
-          </a:xfrm>
-          <a:prstGeom xmlns:a="http://schemas.openxmlformats.org/drawingml/2006/main" prst="rect">
-            <a:avLst/>
-          </a:prstGeom>
-          <a:noFill xmlns:a="http://schemas.openxmlformats.org/drawingml/2006/main"/>
-          <a:ln xmlns:a="http://schemas.openxmlformats.org/drawingml/2006/main" w="0">
-            <a:noFill/>
-            <a:prstDash val="solid"/>
-          </a:ln>
-        </p:spPr>
-        <p:txBody>
-          <a:bodyPr xmlns:a="http://schemas.openxmlformats.org/drawingml/2006/main" wrap="square" lIns="38100" tIns="19050" rIns="38100" bIns="19050" anchor="ctr">
-            <a:normAutofit fontScale="100000"/>
-          </a:bodyPr>
-          <a:lstStyle xmlns:a="http://schemas.openxmlformats.org/drawingml/2006/main"/>
-          <a:p xmlns:a="http://schemas.openxmlformats.org/drawingml/2006/main">
-            <a:pPr algn="ctr">
-              <a:lnSpc>
-                <a:spcPct val="105000"/>
-              </a:lnSpc>
-              <a:buNone/>
-              <a:defRPr sz="1275" b="0" i="0">
-                <a:solidFill>
-                  <a:srgbClr val="243B53"/>
-                </a:solidFill>
-              </a:defRPr>
-            </a:pPr>
-            <a:r>
-              <a:rPr sz="1275" b="0" i="0">
-                <a:solidFill>
-                  <a:srgbClr val="243B53"/>
-                </a:solidFill>
-              </a:rPr>
-              <a:t>几何端点与奇数索引 z₁ anchor</a:t>
             </a:r>
           </a:p>
         </p:txBody>
@@ -28993,10 +29503,10 @@
       </p:grpSpPr>
       <p:sp>
         <p:nvSpPr>
-          <p:cNvPr id="30" name="">
-            <a:extLst xmlns:a="http://schemas.openxmlformats.org/drawingml/2006/main">
-              <a:ext uri="{FF2B5EF4-FFF2-40B4-BE49-F238E27FC236}">
-                <a16:creationId xmlns:a16="http://schemas.microsoft.com/office/drawing/2014/main" id="{CCE383A7-F913-488A-95AF-609423FAE80D}"/>
+          <p:cNvPr id="29" name="">
+            <a:extLst xmlns:a="http://schemas.openxmlformats.org/drawingml/2006/main">
+              <a:ext uri="{FF2B5EF4-FFF2-40B4-BE49-F238E27FC236}">
+                <a16:creationId xmlns:a16="http://schemas.microsoft.com/office/drawing/2014/main" id="{DAFEEE8C-58F0-4C31-A6AD-45903CCA3294}"/>
               </a:ext>
             </a:extLst>
           </p:cNvPr>
@@ -29052,7 +29562,7 @@
           <p:cNvPr id="2" name="">
             <a:extLst xmlns:a="http://schemas.openxmlformats.org/drawingml/2006/main">
               <a:ext uri="{FF2B5EF4-FFF2-40B4-BE49-F238E27FC236}">
-                <a16:creationId xmlns:a16="http://schemas.microsoft.com/office/drawing/2014/main" id="{E19DBA0E-3899-494A-916E-33FFE813632B}"/>
+                <a16:creationId xmlns:a16="http://schemas.microsoft.com/office/drawing/2014/main" id="{DEE6D42C-F14A-424E-AF68-5948CC11D240}"/>
               </a:ext>
             </a:extLst>
           </p:cNvPr>
@@ -29098,7 +29608,7 @@
                   <a:srgbClr val="102A43"/>
                 </a:solidFill>
               </a:rPr>
-              <a:t>Step 3(c) 使用几何极值，而不是第二个存储端点</a:t>
+              <a:t>从 S₃ 到 S₄：插入需要几何 anchor</a:t>
             </a:r>
           </a:p>
         </p:txBody>
@@ -29108,7 +29618,7 @@
           <p:cNvPr id="3" name="">
             <a:extLst xmlns:a="http://schemas.openxmlformats.org/drawingml/2006/main">
               <a:ext uri="{FF2B5EF4-FFF2-40B4-BE49-F238E27FC236}">
-                <a16:creationId xmlns:a16="http://schemas.microsoft.com/office/drawing/2014/main" id="{A3B0F2EF-DE1B-4E8A-AF94-FF31D5AB2E77}"/>
+                <a16:creationId xmlns:a16="http://schemas.microsoft.com/office/drawing/2014/main" id="{D6AC00C0-F15D-458E-B491-A8C54CB56D31}"/>
               </a:ext>
             </a:extLst>
           </p:cNvPr>
@@ -29139,7 +29649,7 @@
           <p:cNvPr id="4" name="">
             <a:extLst xmlns:a="http://schemas.openxmlformats.org/drawingml/2006/main">
               <a:ext uri="{FF2B5EF4-FFF2-40B4-BE49-F238E27FC236}">
-                <a16:creationId xmlns:a16="http://schemas.microsoft.com/office/drawing/2014/main" id="{48A969B9-4AE9-48A6-96F0-55D5AA4F395E}"/>
+                <a16:creationId xmlns:a16="http://schemas.microsoft.com/office/drawing/2014/main" id="{DABC46D6-86BA-4A82-A18A-554A61B44FBD}"/>
               </a:ext>
             </a:extLst>
           </p:cNvPr>
@@ -29170,7 +29680,7 @@
           <p:cNvPr id="5" name="">
             <a:extLst xmlns:a="http://schemas.openxmlformats.org/drawingml/2006/main">
               <a:ext uri="{FF2B5EF4-FFF2-40B4-BE49-F238E27FC236}">
-                <a16:creationId xmlns:a16="http://schemas.microsoft.com/office/drawing/2014/main" id="{B755296E-FB68-464E-B3E4-59F45E5C350C}"/>
+                <a16:creationId xmlns:a16="http://schemas.microsoft.com/office/drawing/2014/main" id="{8AA516AE-A0A3-4752-8B1C-9B9C6C7E371F}"/>
               </a:ext>
             </a:extLst>
           </p:cNvPr>
@@ -29226,7 +29736,7 @@
           <p:cNvPr id="6" name="">
             <a:extLst xmlns:a="http://schemas.openxmlformats.org/drawingml/2006/main">
               <a:ext uri="{FF2B5EF4-FFF2-40B4-BE49-F238E27FC236}">
-                <a16:creationId xmlns:a16="http://schemas.microsoft.com/office/drawing/2014/main" id="{A6050405-280A-49BB-BD17-62DCC8DE0B29}"/>
+                <a16:creationId xmlns:a16="http://schemas.microsoft.com/office/drawing/2014/main" id="{4C320910-E2E7-46B2-9369-42067104AA5D}"/>
               </a:ext>
             </a:extLst>
           </p:cNvPr>
@@ -29282,19 +29792,19 @@
           <p:cNvPr id="7" name="">
             <a:extLst xmlns:a="http://schemas.openxmlformats.org/drawingml/2006/main">
               <a:ext uri="{FF2B5EF4-FFF2-40B4-BE49-F238E27FC236}">
-                <a16:creationId xmlns:a16="http://schemas.microsoft.com/office/drawing/2014/main" id="{21E53D60-E8E4-4957-8B63-270E14379DD7}"/>
-              </a:ext>
-            </a:extLst>
-          </p:cNvPr>
-          <p:cNvSpPr>
-            <a:spLocks xmlns:a="http://schemas.openxmlformats.org/drawingml/2006/main" noGrp="1"/>
-          </p:cNvSpPr>
-          <p:nvPr/>
-        </p:nvSpPr>
-        <p:spPr>
-          <a:xfrm xmlns:a="http://schemas.openxmlformats.org/drawingml/2006/main">
-            <a:off x="800100" y="1485900"/>
-            <a:ext cx="1619250" cy="285750"/>
+                <a16:creationId xmlns:a16="http://schemas.microsoft.com/office/drawing/2014/main" id="{44CB22D3-1009-4958-8D49-D3307ABA63FD}"/>
+              </a:ext>
+            </a:extLst>
+          </p:cNvPr>
+          <p:cNvSpPr>
+            <a:spLocks xmlns:a="http://schemas.openxmlformats.org/drawingml/2006/main" noGrp="1"/>
+          </p:cNvSpPr>
+          <p:nvPr/>
+        </p:nvSpPr>
+        <p:spPr>
+          <a:xfrm xmlns:a="http://schemas.openxmlformats.org/drawingml/2006/main">
+            <a:off x="723900" y="1314450"/>
+            <a:ext cx="10744200" cy="323850"/>
           </a:xfrm>
           <a:prstGeom xmlns:a="http://schemas.openxmlformats.org/drawingml/2006/main" prst="rect">
             <a:avLst/>
@@ -29307,7 +29817,7 @@
         </p:spPr>
         <p:txBody>
           <a:bodyPr xmlns:a="http://schemas.openxmlformats.org/drawingml/2006/main" wrap="square" lIns="38100" tIns="19050" rIns="38100" bIns="19050" anchor="t">
-            <a:normAutofit fontScale="100000"/>
+            <a:normAutofit fontScale="95238"/>
           </a:bodyPr>
           <a:lstStyle xmlns:a="http://schemas.openxmlformats.org/drawingml/2006/main"/>
           <a:p xmlns:a="http://schemas.openxmlformats.org/drawingml/2006/main">
@@ -29316,19 +29826,19 @@
                 <a:spcPct val="105000"/>
               </a:lnSpc>
               <a:buNone/>
-              <a:defRPr sz="1200" b="1" i="0">
-                <a:solidFill>
-                  <a:srgbClr val="7B8794"/>
-                </a:solidFill>
-              </a:defRPr>
-            </a:pPr>
-            <a:r>
-              <a:rPr sz="1200" b="1" i="0">
-                <a:solidFill>
-                  <a:srgbClr val="7B8794"/>
-                </a:solidFill>
-              </a:rPr>
-              <a:t>输入前缀</a:t>
+              <a:defRPr sz="1875" b="1" i="0">
+                <a:solidFill>
+                  <a:srgbClr val="102A43"/>
+                </a:solidFill>
+              </a:defRPr>
+            </a:pPr>
+            <a:r>
+              <a:rPr sz="1875" b="1" i="0">
+                <a:solidFill>
+                  <a:srgbClr val="102A43"/>
+                </a:solidFill>
+              </a:rPr>
+              <a:t>按曲线顺序输入：(z₁, z₂, z₃, z₄) = (3, 2, 1, 4)</a:t>
             </a:r>
           </a:p>
         </p:txBody>
@@ -29338,193 +29848,29 @@
           <p:cNvPr id="8" name="">
             <a:extLst xmlns:a="http://schemas.openxmlformats.org/drawingml/2006/main">
               <a:ext uri="{FF2B5EF4-FFF2-40B4-BE49-F238E27FC236}">
-                <a16:creationId xmlns:a16="http://schemas.microsoft.com/office/drawing/2014/main" id="{65415A9B-A7D3-4AA8-AC00-9A85CA7B96DC}"/>
-              </a:ext>
-            </a:extLst>
-          </p:cNvPr>
-          <p:cNvSpPr>
-            <a:spLocks xmlns:a="http://schemas.openxmlformats.org/drawingml/2006/main" noGrp="1"/>
-          </p:cNvSpPr>
-          <p:nvPr/>
-        </p:nvSpPr>
-        <p:spPr>
-          <a:xfrm xmlns:a="http://schemas.openxmlformats.org/drawingml/2006/main">
-            <a:off x="800100" y="1790700"/>
-            <a:ext cx="2667000" cy="457200"/>
-          </a:xfrm>
-          <a:prstGeom xmlns:a="http://schemas.openxmlformats.org/drawingml/2006/main" prst="rect">
-            <a:avLst/>
-          </a:prstGeom>
-          <a:noFill xmlns:a="http://schemas.openxmlformats.org/drawingml/2006/main"/>
-          <a:ln xmlns:a="http://schemas.openxmlformats.org/drawingml/2006/main" w="0">
-            <a:noFill/>
-            <a:prstDash val="solid"/>
-          </a:ln>
-        </p:spPr>
-        <p:txBody>
-          <a:bodyPr xmlns:a="http://schemas.openxmlformats.org/drawingml/2006/main" wrap="square" lIns="38100" tIns="19050" rIns="38100" bIns="19050" anchor="t">
-            <a:normAutofit fontScale="100000"/>
-          </a:bodyPr>
-          <a:lstStyle xmlns:a="http://schemas.openxmlformats.org/drawingml/2006/main"/>
-          <a:p xmlns:a="http://schemas.openxmlformats.org/drawingml/2006/main">
-            <a:pPr algn="l">
-              <a:lnSpc>
-                <a:spcPct val="105000"/>
-              </a:lnSpc>
-              <a:buNone/>
-              <a:defRPr sz="2400" b="1" i="0">
-                <a:solidFill>
-                  <a:srgbClr val="102A43"/>
-                </a:solidFill>
-              </a:defRPr>
-            </a:pPr>
-            <a:r>
-              <a:rPr sz="2400" b="1" i="0">
-                <a:solidFill>
-                  <a:srgbClr val="102A43"/>
-                </a:solidFill>
-              </a:rPr>
-              <a:t>(3, 2, 1, 4)</a:t>
-            </a:r>
-          </a:p>
-        </p:txBody>
-      </p:sp>
-      <p:sp>
-        <p:nvSpPr>
-          <p:cNvPr id="9" name="">
-            <a:extLst xmlns:a="http://schemas.openxmlformats.org/drawingml/2006/main">
-              <a:ext uri="{FF2B5EF4-FFF2-40B4-BE49-F238E27FC236}">
-                <a16:creationId xmlns:a16="http://schemas.microsoft.com/office/drawing/2014/main" id="{B6239380-915E-4561-BEEA-AC075C2A3AAA}"/>
-              </a:ext>
-            </a:extLst>
-          </p:cNvPr>
-          <p:cNvSpPr>
-            <a:spLocks xmlns:a="http://schemas.openxmlformats.org/drawingml/2006/main" noGrp="1"/>
-          </p:cNvSpPr>
-          <p:nvPr/>
-        </p:nvSpPr>
-        <p:spPr>
-          <a:xfrm xmlns:a="http://schemas.openxmlformats.org/drawingml/2006/main">
-            <a:off x="800100" y="2419350"/>
-            <a:ext cx="1619250" cy="285750"/>
-          </a:xfrm>
-          <a:prstGeom xmlns:a="http://schemas.openxmlformats.org/drawingml/2006/main" prst="rect">
-            <a:avLst/>
-          </a:prstGeom>
-          <a:noFill xmlns:a="http://schemas.openxmlformats.org/drawingml/2006/main"/>
-          <a:ln xmlns:a="http://schemas.openxmlformats.org/drawingml/2006/main" w="0">
-            <a:noFill/>
-            <a:prstDash val="solid"/>
-          </a:ln>
-        </p:spPr>
-        <p:txBody>
-          <a:bodyPr xmlns:a="http://schemas.openxmlformats.org/drawingml/2006/main" wrap="square" lIns="38100" tIns="19050" rIns="38100" bIns="19050" anchor="t">
-            <a:normAutofit fontScale="100000"/>
-          </a:bodyPr>
-          <a:lstStyle xmlns:a="http://schemas.openxmlformats.org/drawingml/2006/main"/>
-          <a:p xmlns:a="http://schemas.openxmlformats.org/drawingml/2006/main">
-            <a:pPr algn="l">
-              <a:lnSpc>
-                <a:spcPct val="105000"/>
-              </a:lnSpc>
-              <a:buNone/>
-              <a:defRPr sz="1200" b="1" i="0">
-                <a:solidFill>
-                  <a:srgbClr val="7B8794"/>
-                </a:solidFill>
-              </a:defRPr>
-            </a:pPr>
-            <a:r>
-              <a:rPr sz="1200" b="1" i="0">
-                <a:solidFill>
-                  <a:srgbClr val="7B8794"/>
-                </a:solidFill>
-              </a:rPr>
-              <a:t>获得的 pair</a:t>
-            </a:r>
-          </a:p>
-        </p:txBody>
-      </p:sp>
-      <p:sp>
-        <p:nvSpPr>
-          <p:cNvPr id="10" name="">
-            <a:extLst xmlns:a="http://schemas.openxmlformats.org/drawingml/2006/main">
-              <a:ext uri="{FF2B5EF4-FFF2-40B4-BE49-F238E27FC236}">
-                <a16:creationId xmlns:a16="http://schemas.microsoft.com/office/drawing/2014/main" id="{7CAD6038-96A5-4B26-8CA3-4DA4F6005278}"/>
-              </a:ext>
-            </a:extLst>
-          </p:cNvPr>
-          <p:cNvSpPr>
-            <a:spLocks xmlns:a="http://schemas.openxmlformats.org/drawingml/2006/main" noGrp="1"/>
-          </p:cNvSpPr>
-          <p:nvPr/>
-        </p:nvSpPr>
-        <p:spPr>
-          <a:xfrm xmlns:a="http://schemas.openxmlformats.org/drawingml/2006/main">
-            <a:off x="800100" y="2724150"/>
-            <a:ext cx="2667000" cy="457200"/>
-          </a:xfrm>
-          <a:prstGeom xmlns:a="http://schemas.openxmlformats.org/drawingml/2006/main" prst="rect">
-            <a:avLst/>
-          </a:prstGeom>
-          <a:noFill xmlns:a="http://schemas.openxmlformats.org/drawingml/2006/main"/>
-          <a:ln xmlns:a="http://schemas.openxmlformats.org/drawingml/2006/main" w="0">
-            <a:noFill/>
-            <a:prstDash val="solid"/>
-          </a:ln>
-        </p:spPr>
-        <p:txBody>
-          <a:bodyPr xmlns:a="http://schemas.openxmlformats.org/drawingml/2006/main" wrap="square" lIns="38100" tIns="19050" rIns="38100" bIns="19050" anchor="t">
-            <a:normAutofit fontScale="100000"/>
-          </a:bodyPr>
-          <a:lstStyle xmlns:a="http://schemas.openxmlformats.org/drawingml/2006/main"/>
-          <a:p xmlns:a="http://schemas.openxmlformats.org/drawingml/2006/main">
-            <a:pPr algn="l">
-              <a:lnSpc>
-                <a:spcPct val="105000"/>
-              </a:lnSpc>
-              <a:buNone/>
-              <a:defRPr sz="2250" b="1" i="0">
-                <a:solidFill>
-                  <a:srgbClr val="E76F51"/>
-                </a:solidFill>
-              </a:defRPr>
-            </a:pPr>
-            <a:r>
-              <a:rPr sz="2250" b="1" i="0">
-                <a:solidFill>
-                  <a:srgbClr val="E76F51"/>
-                </a:solidFill>
-              </a:rPr>
-              <a:t>P₂ = (3, 2)</a:t>
-            </a:r>
-          </a:p>
-        </p:txBody>
-      </p:sp>
-      <p:sp>
-        <p:nvSpPr>
-          <p:cNvPr id="11" name="">
-            <a:extLst xmlns:a="http://schemas.openxmlformats.org/drawingml/2006/main">
-              <a:ext uri="{FF2B5EF4-FFF2-40B4-BE49-F238E27FC236}">
-                <a16:creationId xmlns:a16="http://schemas.microsoft.com/office/drawing/2014/main" id="{E6893848-4EA1-4632-9EDD-5C8ED3055AF7}"/>
-              </a:ext>
-            </a:extLst>
-          </p:cNvPr>
-          <p:cNvSpPr>
-            <a:spLocks xmlns:a="http://schemas.openxmlformats.org/drawingml/2006/main" noGrp="1"/>
-          </p:cNvSpPr>
-          <p:nvPr/>
-        </p:nvSpPr>
-        <p:spPr>
-          <a:xfrm xmlns:a="http://schemas.openxmlformats.org/drawingml/2006/main">
-            <a:off x="3905250" y="2400300"/>
-            <a:ext cx="6477000" cy="9525"/>
-          </a:xfrm>
-          <a:prstGeom xmlns:a="http://schemas.openxmlformats.org/drawingml/2006/main" prst="line">
-            <a:avLst/>
-          </a:prstGeom>
-          <a:noFill xmlns:a="http://schemas.openxmlformats.org/drawingml/2006/main"/>
-          <a:ln xmlns:a="http://schemas.openxmlformats.org/drawingml/2006/main" w="28575">
+                <a16:creationId xmlns:a16="http://schemas.microsoft.com/office/drawing/2014/main" id="{42A6FA7A-C002-44B8-B391-78E3003C9E22}"/>
+              </a:ext>
+            </a:extLst>
+          </p:cNvPr>
+          <p:cNvSpPr>
+            <a:spLocks xmlns:a="http://schemas.openxmlformats.org/drawingml/2006/main" noGrp="1"/>
+          </p:cNvSpPr>
+          <p:nvPr/>
+        </p:nvSpPr>
+        <p:spPr>
+          <a:xfrm xmlns:a="http://schemas.openxmlformats.org/drawingml/2006/main">
+            <a:off x="723900" y="1790700"/>
+            <a:ext cx="6572250" cy="1066800"/>
+          </a:xfrm>
+          <a:prstGeom xmlns:a="http://schemas.openxmlformats.org/drawingml/2006/main" prst="roundRect">
+            <a:avLst>
+              <a:gd name="adj" fmla="val 5357"/>
+            </a:avLst>
+          </a:prstGeom>
+          <a:solidFill xmlns:a="http://schemas.openxmlformats.org/drawingml/2006/main">
+            <a:srgbClr val="EAF1F8"/>
+          </a:solidFill>
+          <a:ln xmlns:a="http://schemas.openxmlformats.org/drawingml/2006/main" w="11430">
             <a:solidFill>
               <a:srgbClr val="52606D"/>
             </a:solidFill>
@@ -29534,68 +29880,518 @@
       </p:sp>
       <p:sp>
         <p:nvSpPr>
+          <p:cNvPr id="9" name="">
+            <a:extLst xmlns:a="http://schemas.openxmlformats.org/drawingml/2006/main">
+              <a:ext uri="{FF2B5EF4-FFF2-40B4-BE49-F238E27FC236}">
+                <a16:creationId xmlns:a16="http://schemas.microsoft.com/office/drawing/2014/main" id="{9C929CB3-E743-45CE-A9B9-3486222F55AF}"/>
+              </a:ext>
+            </a:extLst>
+          </p:cNvPr>
+          <p:cNvSpPr>
+            <a:spLocks xmlns:a="http://schemas.openxmlformats.org/drawingml/2006/main" noGrp="1"/>
+          </p:cNvSpPr>
+          <p:nvPr/>
+        </p:nvSpPr>
+        <p:spPr>
+          <a:xfrm xmlns:a="http://schemas.openxmlformats.org/drawingml/2006/main">
+            <a:off x="876300" y="1885950"/>
+            <a:ext cx="6267450" cy="342900"/>
+          </a:xfrm>
+          <a:prstGeom xmlns:a="http://schemas.openxmlformats.org/drawingml/2006/main" prst="rect">
+            <a:avLst/>
+          </a:prstGeom>
+          <a:noFill xmlns:a="http://schemas.openxmlformats.org/drawingml/2006/main"/>
+          <a:ln xmlns:a="http://schemas.openxmlformats.org/drawingml/2006/main" w="0">
+            <a:noFill/>
+            <a:prstDash val="solid"/>
+          </a:ln>
+        </p:spPr>
+        <p:txBody>
+          <a:bodyPr xmlns:a="http://schemas.openxmlformats.org/drawingml/2006/main" wrap="square" lIns="38100" tIns="19050" rIns="38100" bIns="19050" anchor="t">
+            <a:normAutofit fontScale="100000"/>
+          </a:bodyPr>
+          <a:lstStyle xmlns:a="http://schemas.openxmlformats.org/drawingml/2006/main"/>
+          <a:p xmlns:a="http://schemas.openxmlformats.org/drawingml/2006/main">
+            <a:pPr algn="l">
+              <a:lnSpc>
+                <a:spcPct val="105000"/>
+              </a:lnSpc>
+              <a:buNone/>
+              <a:defRPr sz="1875" b="1" i="0">
+                <a:solidFill>
+                  <a:srgbClr val="102A43"/>
+                </a:solidFill>
+              </a:defRPr>
+            </a:pPr>
+            <a:r>
+              <a:rPr sz="1875" b="1" i="0">
+                <a:solidFill>
+                  <a:srgbClr val="102A43"/>
+                </a:solidFill>
+              </a:rPr>
+              <a:t>初始化后：S₃ = [1, 2, 3]</a:t>
+            </a:r>
+          </a:p>
+        </p:txBody>
+      </p:sp>
+      <p:sp>
+        <p:nvSpPr>
+          <p:cNvPr id="10" name="">
+            <a:extLst xmlns:a="http://schemas.openxmlformats.org/drawingml/2006/main">
+              <a:ext uri="{FF2B5EF4-FFF2-40B4-BE49-F238E27FC236}">
+                <a16:creationId xmlns:a16="http://schemas.microsoft.com/office/drawing/2014/main" id="{3AF7728A-A695-48C2-877C-44C659A7D568}"/>
+              </a:ext>
+            </a:extLst>
+          </p:cNvPr>
+          <p:cNvSpPr>
+            <a:spLocks xmlns:a="http://schemas.openxmlformats.org/drawingml/2006/main" noGrp="1"/>
+          </p:cNvSpPr>
+          <p:nvPr/>
+        </p:nvSpPr>
+        <p:spPr>
+          <a:xfrm xmlns:a="http://schemas.openxmlformats.org/drawingml/2006/main">
+            <a:off x="876300" y="2381250"/>
+            <a:ext cx="6267450" cy="304800"/>
+          </a:xfrm>
+          <a:prstGeom xmlns:a="http://schemas.openxmlformats.org/drawingml/2006/main" prst="rect">
+            <a:avLst/>
+          </a:prstGeom>
+          <a:noFill xmlns:a="http://schemas.openxmlformats.org/drawingml/2006/main"/>
+          <a:ln xmlns:a="http://schemas.openxmlformats.org/drawingml/2006/main" w="0">
+            <a:noFill/>
+            <a:prstDash val="solid"/>
+          </a:ln>
+        </p:spPr>
+        <p:txBody>
+          <a:bodyPr xmlns:a="http://schemas.openxmlformats.org/drawingml/2006/main" wrap="square" lIns="38100" tIns="19050" rIns="38100" bIns="19050" anchor="t">
+            <a:normAutofit fontScale="100000"/>
+          </a:bodyPr>
+          <a:lstStyle xmlns:a="http://schemas.openxmlformats.org/drawingml/2006/main"/>
+          <a:p xmlns:a="http://schemas.openxmlformats.org/drawingml/2006/main">
+            <a:pPr algn="l">
+              <a:lnSpc>
+                <a:spcPct val="105000"/>
+              </a:lnSpc>
+              <a:buNone/>
+              <a:defRPr sz="1650" b="0" i="0">
+                <a:solidFill>
+                  <a:srgbClr val="52606D"/>
+                </a:solidFill>
+              </a:defRPr>
+            </a:pPr>
+            <a:r>
+              <a:rPr sz="1650" b="0" i="0">
+                <a:solidFill>
+                  <a:srgbClr val="52606D"/>
+                </a:solidFill>
+              </a:rPr>
+              <a:t>对应编号：[z₃,z₂,z₁]。曲线编号保持不变。</a:t>
+            </a:r>
+          </a:p>
+        </p:txBody>
+      </p:sp>
+      <p:sp>
+        <p:nvSpPr>
+          <p:cNvPr id="11" name="">
+            <a:extLst xmlns:a="http://schemas.openxmlformats.org/drawingml/2006/main">
+              <a:ext uri="{FF2B5EF4-FFF2-40B4-BE49-F238E27FC236}">
+                <a16:creationId xmlns:a16="http://schemas.microsoft.com/office/drawing/2014/main" id="{0231B4B3-E926-46A8-A808-D6AA505E0BC6}"/>
+              </a:ext>
+            </a:extLst>
+          </p:cNvPr>
+          <p:cNvSpPr>
+            <a:spLocks xmlns:a="http://schemas.openxmlformats.org/drawingml/2006/main" noGrp="1"/>
+          </p:cNvSpPr>
+          <p:nvPr/>
+        </p:nvSpPr>
+        <p:spPr>
+          <a:xfrm xmlns:a="http://schemas.openxmlformats.org/drawingml/2006/main">
+            <a:off x="7524750" y="1790700"/>
+            <a:ext cx="3943350" cy="1066800"/>
+          </a:xfrm>
+          <a:prstGeom xmlns:a="http://schemas.openxmlformats.org/drawingml/2006/main" prst="roundRect">
+            <a:avLst>
+              <a:gd name="adj" fmla="val 5357"/>
+            </a:avLst>
+          </a:prstGeom>
+          <a:solidFill xmlns:a="http://schemas.openxmlformats.org/drawingml/2006/main">
+            <a:srgbClr val="E8F5F3"/>
+          </a:solidFill>
+          <a:ln xmlns:a="http://schemas.openxmlformats.org/drawingml/2006/main" w="11430">
+            <a:solidFill>
+              <a:srgbClr val="2A9D8F"/>
+            </a:solidFill>
+            <a:prstDash val="solid"/>
+          </a:ln>
+        </p:spPr>
+      </p:sp>
+      <p:sp>
+        <p:nvSpPr>
           <p:cNvPr id="12" name="">
             <a:extLst xmlns:a="http://schemas.openxmlformats.org/drawingml/2006/main">
               <a:ext uri="{FF2B5EF4-FFF2-40B4-BE49-F238E27FC236}">
-                <a16:creationId xmlns:a16="http://schemas.microsoft.com/office/drawing/2014/main" id="{3BC2E166-56E6-4955-AEF7-D8BD2BCDD75F}"/>
-              </a:ext>
-            </a:extLst>
-          </p:cNvPr>
-          <p:cNvSpPr>
-            <a:spLocks xmlns:a="http://schemas.openxmlformats.org/drawingml/2006/main" noGrp="1"/>
-          </p:cNvSpPr>
-          <p:nvPr/>
-        </p:nvSpPr>
-        <p:spPr>
-          <a:xfrm xmlns:a="http://schemas.openxmlformats.org/drawingml/2006/main">
-            <a:off x="4095750" y="2209800"/>
-            <a:ext cx="381000" cy="381000"/>
-          </a:xfrm>
-          <a:prstGeom xmlns:a="http://schemas.openxmlformats.org/drawingml/2006/main" prst="ellipse">
-            <a:avLst/>
-          </a:prstGeom>
-          <a:solidFill xmlns:a="http://schemas.openxmlformats.org/drawingml/2006/main">
-            <a:srgbClr val="FFFFFF"/>
-          </a:solidFill>
-          <a:ln xmlns:a="http://schemas.openxmlformats.org/drawingml/2006/main" w="19050">
-            <a:solidFill>
-              <a:srgbClr val="52606D"/>
-            </a:solidFill>
-            <a:prstDash val="solid"/>
-          </a:ln>
-        </p:spPr>
+                <a16:creationId xmlns:a16="http://schemas.microsoft.com/office/drawing/2014/main" id="{1EDEC31D-25DA-4945-8A0F-FC9108E67C5A}"/>
+              </a:ext>
+            </a:extLst>
+          </p:cNvPr>
+          <p:cNvSpPr>
+            <a:spLocks xmlns:a="http://schemas.openxmlformats.org/drawingml/2006/main" noGrp="1"/>
+          </p:cNvSpPr>
+          <p:nvPr/>
+        </p:nvSpPr>
+        <p:spPr>
+          <a:xfrm xmlns:a="http://schemas.openxmlformats.org/drawingml/2006/main">
+            <a:off x="7677150" y="1885950"/>
+            <a:ext cx="3638550" cy="342900"/>
+          </a:xfrm>
+          <a:prstGeom xmlns:a="http://schemas.openxmlformats.org/drawingml/2006/main" prst="rect">
+            <a:avLst/>
+          </a:prstGeom>
+          <a:noFill xmlns:a="http://schemas.openxmlformats.org/drawingml/2006/main"/>
+          <a:ln xmlns:a="http://schemas.openxmlformats.org/drawingml/2006/main" w="0">
+            <a:noFill/>
+            <a:prstDash val="solid"/>
+          </a:ln>
+        </p:spPr>
+        <p:txBody>
+          <a:bodyPr xmlns:a="http://schemas.openxmlformats.org/drawingml/2006/main" wrap="square" lIns="38100" tIns="19050" rIns="38100" bIns="19050" anchor="t">
+            <a:normAutofit fontScale="100000"/>
+          </a:bodyPr>
+          <a:lstStyle xmlns:a="http://schemas.openxmlformats.org/drawingml/2006/main"/>
+          <a:p xmlns:a="http://schemas.openxmlformats.org/drawingml/2006/main">
+            <a:pPr algn="l">
+              <a:lnSpc>
+                <a:spcPct val="105000"/>
+              </a:lnSpc>
+              <a:buNone/>
+              <a:defRPr sz="1875" b="1" i="0">
+                <a:solidFill>
+                  <a:srgbClr val="2A9D8F"/>
+                </a:solidFill>
+              </a:defRPr>
+            </a:pPr>
+            <a:r>
+              <a:rPr sz="1875" b="1" i="0">
+                <a:solidFill>
+                  <a:srgbClr val="2A9D8F"/>
+                </a:solidFill>
+              </a:rPr>
+              <a:t>现在处理 z₄ = 4</a:t>
+            </a:r>
+          </a:p>
+        </p:txBody>
       </p:sp>
       <p:sp>
         <p:nvSpPr>
           <p:cNvPr id="13" name="">
             <a:extLst xmlns:a="http://schemas.openxmlformats.org/drawingml/2006/main">
               <a:ext uri="{FF2B5EF4-FFF2-40B4-BE49-F238E27FC236}">
-                <a16:creationId xmlns:a16="http://schemas.microsoft.com/office/drawing/2014/main" id="{7111C24A-7FF1-4B0B-B430-9224D658B2BE}"/>
-              </a:ext>
-            </a:extLst>
-          </p:cNvPr>
-          <p:cNvSpPr>
-            <a:spLocks xmlns:a="http://schemas.openxmlformats.org/drawingml/2006/main" noGrp="1"/>
-          </p:cNvSpPr>
-          <p:nvPr/>
-        </p:nvSpPr>
-        <p:spPr>
-          <a:xfrm xmlns:a="http://schemas.openxmlformats.org/drawingml/2006/main">
-            <a:off x="4095750" y="2228850"/>
-            <a:ext cx="381000" cy="342900"/>
-          </a:xfrm>
-          <a:prstGeom xmlns:a="http://schemas.openxmlformats.org/drawingml/2006/main" prst="rect">
-            <a:avLst/>
-          </a:prstGeom>
-          <a:noFill xmlns:a="http://schemas.openxmlformats.org/drawingml/2006/main"/>
-          <a:ln xmlns:a="http://schemas.openxmlformats.org/drawingml/2006/main" w="0">
-            <a:noFill/>
-            <a:prstDash val="solid"/>
-          </a:ln>
-        </p:spPr>
-        <p:txBody>
-          <a:bodyPr xmlns:a="http://schemas.openxmlformats.org/drawingml/2006/main" wrap="square" lIns="38100" tIns="19050" rIns="38100" bIns="19050" anchor="ctr">
-            <a:normAutofit fontScale="100000"/>
+                <a16:creationId xmlns:a16="http://schemas.microsoft.com/office/drawing/2014/main" id="{540A1861-DE75-4D0B-AF9E-5178FD887F08}"/>
+              </a:ext>
+            </a:extLst>
+          </p:cNvPr>
+          <p:cNvSpPr>
+            <a:spLocks xmlns:a="http://schemas.openxmlformats.org/drawingml/2006/main" noGrp="1"/>
+          </p:cNvSpPr>
+          <p:nvPr/>
+        </p:nvSpPr>
+        <p:spPr>
+          <a:xfrm xmlns:a="http://schemas.openxmlformats.org/drawingml/2006/main">
+            <a:off x="7677150" y="2381250"/>
+            <a:ext cx="3638550" cy="304800"/>
+          </a:xfrm>
+          <a:prstGeom xmlns:a="http://schemas.openxmlformats.org/drawingml/2006/main" prst="rect">
+            <a:avLst/>
+          </a:prstGeom>
+          <a:noFill xmlns:a="http://schemas.openxmlformats.org/drawingml/2006/main"/>
+          <a:ln xmlns:a="http://schemas.openxmlformats.org/drawingml/2006/main" w="0">
+            <a:noFill/>
+            <a:prstDash val="solid"/>
+          </a:ln>
+        </p:spPr>
+        <p:txBody>
+          <a:bodyPr xmlns:a="http://schemas.openxmlformats.org/drawingml/2006/main" wrap="square" lIns="38100" tIns="19050" rIns="38100" bIns="19050" anchor="t">
+            <a:normAutofit fontScale="100000"/>
+          </a:bodyPr>
+          <a:lstStyle xmlns:a="http://schemas.openxmlformats.org/drawingml/2006/main"/>
+          <a:p xmlns:a="http://schemas.openxmlformats.org/drawingml/2006/main">
+            <a:pPr algn="l">
+              <a:lnSpc>
+                <a:spcPct val="105000"/>
+              </a:lnSpc>
+              <a:buNone/>
+              <a:defRPr sz="1650" b="0" i="0">
+                <a:solidFill>
+                  <a:srgbClr val="243B53"/>
+                </a:solidFill>
+              </a:defRPr>
+            </a:pPr>
+            <a:r>
+              <a:rPr sz="1650" b="0" i="0">
+                <a:solidFill>
+                  <a:srgbClr val="243B53"/>
+                </a:solidFill>
+              </a:rPr>
+              <a:t>z₃ = 1 → z₄ = 4：increasing</a:t>
+            </a:r>
+          </a:p>
+        </p:txBody>
+      </p:sp>
+      <p:sp>
+        <p:nvSpPr>
+          <p:cNvPr id="14" name="">
+            <a:extLst xmlns:a="http://schemas.openxmlformats.org/drawingml/2006/main">
+              <a:ext uri="{FF2B5EF4-FFF2-40B4-BE49-F238E27FC236}">
+                <a16:creationId xmlns:a16="http://schemas.microsoft.com/office/drawing/2014/main" id="{489C887E-92F5-475B-9352-C455B8FAD749}"/>
+              </a:ext>
+            </a:extLst>
+          </p:cNvPr>
+          <p:cNvSpPr>
+            <a:spLocks xmlns:a="http://schemas.openxmlformats.org/drawingml/2006/main" noGrp="1"/>
+          </p:cNvSpPr>
+          <p:nvPr/>
+        </p:nvSpPr>
+        <p:spPr>
+          <a:xfrm xmlns:a="http://schemas.openxmlformats.org/drawingml/2006/main">
+            <a:off x="723900" y="3086100"/>
+            <a:ext cx="2305050" cy="304800"/>
+          </a:xfrm>
+          <a:prstGeom xmlns:a="http://schemas.openxmlformats.org/drawingml/2006/main" prst="rect">
+            <a:avLst/>
+          </a:prstGeom>
+          <a:noFill xmlns:a="http://schemas.openxmlformats.org/drawingml/2006/main"/>
+          <a:ln xmlns:a="http://schemas.openxmlformats.org/drawingml/2006/main" w="0">
+            <a:noFill/>
+            <a:prstDash val="solid"/>
+          </a:ln>
+        </p:spPr>
+        <p:txBody>
+          <a:bodyPr xmlns:a="http://schemas.openxmlformats.org/drawingml/2006/main" wrap="square" lIns="38100" tIns="19050" rIns="38100" bIns="19050" anchor="t">
+            <a:normAutofit fontScale="100000"/>
+          </a:bodyPr>
+          <a:lstStyle xmlns:a="http://schemas.openxmlformats.org/drawingml/2006/main"/>
+          <a:p xmlns:a="http://schemas.openxmlformats.org/drawingml/2006/main">
+            <a:pPr algn="l">
+              <a:lnSpc>
+                <a:spcPct val="105000"/>
+              </a:lnSpc>
+              <a:buNone/>
+              <a:defRPr sz="1650" b="1" i="0">
+                <a:solidFill>
+                  <a:srgbClr val="102A43"/>
+                </a:solidFill>
+              </a:defRPr>
+            </a:pPr>
+            <a:r>
+              <a:rPr sz="1650" b="1" i="0">
+                <a:solidFill>
+                  <a:srgbClr val="102A43"/>
+                </a:solidFill>
+              </a:rPr>
+              <a:t>Step 3(b) 后</a:t>
+            </a:r>
+          </a:p>
+        </p:txBody>
+      </p:sp>
+      <p:sp>
+        <p:nvSpPr>
+          <p:cNvPr id="15" name="">
+            <a:extLst xmlns:a="http://schemas.openxmlformats.org/drawingml/2006/main">
+              <a:ext uri="{FF2B5EF4-FFF2-40B4-BE49-F238E27FC236}">
+                <a16:creationId xmlns:a16="http://schemas.microsoft.com/office/drawing/2014/main" id="{10EF0258-FF12-415F-B6C0-E50F0191D5FE}"/>
+              </a:ext>
+            </a:extLst>
+          </p:cNvPr>
+          <p:cNvSpPr>
+            <a:spLocks xmlns:a="http://schemas.openxmlformats.org/drawingml/2006/main" noGrp="1"/>
+          </p:cNvSpPr>
+          <p:nvPr/>
+        </p:nvSpPr>
+        <p:spPr>
+          <a:xfrm xmlns:a="http://schemas.openxmlformats.org/drawingml/2006/main">
+            <a:off x="3048000" y="3086100"/>
+            <a:ext cx="4000500" cy="304800"/>
+          </a:xfrm>
+          <a:prstGeom xmlns:a="http://schemas.openxmlformats.org/drawingml/2006/main" prst="rect">
+            <a:avLst/>
+          </a:prstGeom>
+          <a:noFill xmlns:a="http://schemas.openxmlformats.org/drawingml/2006/main"/>
+          <a:ln xmlns:a="http://schemas.openxmlformats.org/drawingml/2006/main" w="0">
+            <a:noFill/>
+            <a:prstDash val="solid"/>
+          </a:ln>
+        </p:spPr>
+        <p:txBody>
+          <a:bodyPr xmlns:a="http://schemas.openxmlformats.org/drawingml/2006/main" wrap="square" lIns="38100" tIns="19050" rIns="38100" bIns="19050" anchor="t">
+            <a:normAutofit fontScale="100000"/>
+          </a:bodyPr>
+          <a:lstStyle xmlns:a="http://schemas.openxmlformats.org/drawingml/2006/main"/>
+          <a:p xmlns:a="http://schemas.openxmlformats.org/drawingml/2006/main">
+            <a:pPr algn="l">
+              <a:lnSpc>
+                <a:spcPct val="105000"/>
+              </a:lnSpc>
+              <a:buNone/>
+              <a:defRPr sz="1650" b="1" i="0">
+                <a:solidFill>
+                  <a:srgbClr val="2A9D8F"/>
+                </a:solidFill>
+              </a:defRPr>
+            </a:pPr>
+            <a:r>
+              <a:rPr sz="1650" b="1" i="0">
+                <a:solidFill>
+                  <a:srgbClr val="2A9D8F"/>
+                </a:solidFill>
+              </a:rPr>
+              <a:t>新 upper P₄ = (z₃, z₄) = (1, 4)</a:t>
+            </a:r>
+          </a:p>
+        </p:txBody>
+      </p:sp>
+      <p:sp>
+        <p:nvSpPr>
+          <p:cNvPr id="16" name="">
+            <a:extLst xmlns:a="http://schemas.openxmlformats.org/drawingml/2006/main">
+              <a:ext uri="{FF2B5EF4-FFF2-40B4-BE49-F238E27FC236}">
+                <a16:creationId xmlns:a16="http://schemas.microsoft.com/office/drawing/2014/main" id="{9BC3143E-A3ED-4ED7-896F-CA749235AF47}"/>
+              </a:ext>
+            </a:extLst>
+          </p:cNvPr>
+          <p:cNvSpPr>
+            <a:spLocks xmlns:a="http://schemas.openxmlformats.org/drawingml/2006/main" noGrp="1"/>
+          </p:cNvSpPr>
+          <p:nvPr/>
+        </p:nvSpPr>
+        <p:spPr>
+          <a:xfrm xmlns:a="http://schemas.openxmlformats.org/drawingml/2006/main">
+            <a:off x="7086600" y="3086100"/>
+            <a:ext cx="1009650" cy="304800"/>
+          </a:xfrm>
+          <a:prstGeom xmlns:a="http://schemas.openxmlformats.org/drawingml/2006/main" prst="rect">
+            <a:avLst/>
+          </a:prstGeom>
+          <a:noFill xmlns:a="http://schemas.openxmlformats.org/drawingml/2006/main"/>
+          <a:ln xmlns:a="http://schemas.openxmlformats.org/drawingml/2006/main" w="0">
+            <a:noFill/>
+            <a:prstDash val="solid"/>
+          </a:ln>
+        </p:spPr>
+        <p:txBody>
+          <a:bodyPr xmlns:a="http://schemas.openxmlformats.org/drawingml/2006/main" wrap="square" lIns="38100" tIns="19050" rIns="38100" bIns="19050" anchor="t">
+            <a:normAutofit fontScale="100000"/>
+          </a:bodyPr>
+          <a:lstStyle xmlns:a="http://schemas.openxmlformats.org/drawingml/2006/main"/>
+          <a:p xmlns:a="http://schemas.openxmlformats.org/drawingml/2006/main">
+            <a:pPr algn="l">
+              <a:lnSpc>
+                <a:spcPct val="105000"/>
+              </a:lnSpc>
+              <a:buNone/>
+              <a:defRPr sz="1650" b="0" i="0">
+                <a:solidFill>
+                  <a:srgbClr val="2A9D8F"/>
+                </a:solidFill>
+              </a:defRPr>
+            </a:pPr>
+            <a:r>
+              <a:rPr sz="1650" b="0" i="0">
+                <a:solidFill>
+                  <a:srgbClr val="2A9D8F"/>
+                </a:solidFill>
+              </a:rPr>
+              <a:t>→ child</a:t>
+            </a:r>
+          </a:p>
+        </p:txBody>
+      </p:sp>
+      <p:sp>
+        <p:nvSpPr>
+          <p:cNvPr id="17" name="">
+            <a:extLst xmlns:a="http://schemas.openxmlformats.org/drawingml/2006/main">
+              <a:ext uri="{FF2B5EF4-FFF2-40B4-BE49-F238E27FC236}">
+                <a16:creationId xmlns:a16="http://schemas.microsoft.com/office/drawing/2014/main" id="{7C780D75-C8A8-4DF6-9887-3E943E353FAB}"/>
+              </a:ext>
+            </a:extLst>
+          </p:cNvPr>
+          <p:cNvSpPr>
+            <a:spLocks xmlns:a="http://schemas.openxmlformats.org/drawingml/2006/main" noGrp="1"/>
+          </p:cNvSpPr>
+          <p:nvPr/>
+        </p:nvSpPr>
+        <p:spPr>
+          <a:xfrm xmlns:a="http://schemas.openxmlformats.org/drawingml/2006/main">
+            <a:off x="8096250" y="3086100"/>
+            <a:ext cx="3371850" cy="304800"/>
+          </a:xfrm>
+          <a:prstGeom xmlns:a="http://schemas.openxmlformats.org/drawingml/2006/main" prst="rect">
+            <a:avLst/>
+          </a:prstGeom>
+          <a:noFill xmlns:a="http://schemas.openxmlformats.org/drawingml/2006/main"/>
+          <a:ln xmlns:a="http://schemas.openxmlformats.org/drawingml/2006/main" w="0">
+            <a:noFill/>
+            <a:prstDash val="solid"/>
+          </a:ln>
+        </p:spPr>
+        <p:txBody>
+          <a:bodyPr xmlns:a="http://schemas.openxmlformats.org/drawingml/2006/main" wrap="square" lIns="38100" tIns="19050" rIns="38100" bIns="19050" anchor="t">
+            <a:normAutofit fontScale="100000"/>
+          </a:bodyPr>
+          <a:lstStyle xmlns:a="http://schemas.openxmlformats.org/drawingml/2006/main"/>
+          <a:p xmlns:a="http://schemas.openxmlformats.org/drawingml/2006/main">
+            <a:pPr algn="l">
+              <a:lnSpc>
+                <a:spcPct val="105000"/>
+              </a:lnSpc>
+              <a:buNone/>
+              <a:defRPr sz="1575" b="1" i="0">
+                <a:solidFill>
+                  <a:srgbClr val="102A43"/>
+                </a:solidFill>
+              </a:defRPr>
+            </a:pPr>
+            <a:r>
+              <a:rPr sz="1575" b="1" i="0">
+                <a:solidFill>
+                  <a:srgbClr val="102A43"/>
+                </a:solidFill>
+              </a:rPr>
+              <a:t>Upper P₂ = (z₁, z₂) = (3, 2)</a:t>
+            </a:r>
+          </a:p>
+        </p:txBody>
+      </p:sp>
+      <p:sp>
+        <p:nvSpPr>
+          <p:cNvPr id="18" name="">
+            <a:extLst xmlns:a="http://schemas.openxmlformats.org/drawingml/2006/main">
+              <a:ext uri="{FF2B5EF4-FFF2-40B4-BE49-F238E27FC236}">
+                <a16:creationId xmlns:a16="http://schemas.microsoft.com/office/drawing/2014/main" id="{98487672-58D9-47D5-A449-B62C735D7964}"/>
+              </a:ext>
+            </a:extLst>
+          </p:cNvPr>
+          <p:cNvSpPr>
+            <a:spLocks xmlns:a="http://schemas.openxmlformats.org/drawingml/2006/main" noGrp="1"/>
+          </p:cNvSpPr>
+          <p:nvPr/>
+        </p:nvSpPr>
+        <p:spPr>
+          <a:xfrm xmlns:a="http://schemas.openxmlformats.org/drawingml/2006/main">
+            <a:off x="723900" y="3552825"/>
+            <a:ext cx="10744200" cy="304800"/>
+          </a:xfrm>
+          <a:prstGeom xmlns:a="http://schemas.openxmlformats.org/drawingml/2006/main" prst="rect">
+            <a:avLst/>
+          </a:prstGeom>
+          <a:noFill xmlns:a="http://schemas.openxmlformats.org/drawingml/2006/main"/>
+          <a:ln xmlns:a="http://schemas.openxmlformats.org/drawingml/2006/main" w="0">
+            <a:noFill/>
+            <a:prstDash val="solid"/>
+          </a:ln>
+        </p:spPr>
+        <p:txBody>
+          <a:bodyPr xmlns:a="http://schemas.openxmlformats.org/drawingml/2006/main" wrap="square" lIns="38100" tIns="19050" rIns="38100" bIns="19050" anchor="t">
+            <a:normAutofit fontScale="96618"/>
           </a:bodyPr>
           <a:lstStyle xmlns:a="http://schemas.openxmlformats.org/drawingml/2006/main"/>
           <a:p xmlns:a="http://schemas.openxmlformats.org/drawingml/2006/main">
@@ -29604,44 +30400,46 @@
                 <a:spcPct val="105000"/>
               </a:lnSpc>
               <a:buNone/>
-              <a:defRPr sz="1500" b="1" i="0">
+              <a:defRPr sz="1725" b="1" i="0">
                 <a:solidFill>
                   <a:srgbClr val="102A43"/>
                 </a:solidFill>
               </a:defRPr>
             </a:pPr>
             <a:r>
-              <a:rPr sz="1500" b="1" i="0">
+              <a:rPr sz="1725" b="1" i="0">
                 <a:solidFill>
                   <a:srgbClr val="102A43"/>
                 </a:solidFill>
               </a:rPr>
-              <a:t>1</a:t>
-            </a:r>
-          </a:p>
-        </p:txBody>
-      </p:sp>
-      <p:sp>
-        <p:nvSpPr>
-          <p:cNvPr id="14" name="">
-            <a:extLst xmlns:a="http://schemas.openxmlformats.org/drawingml/2006/main">
-              <a:ext uri="{FF2B5EF4-FFF2-40B4-BE49-F238E27FC236}">
-                <a16:creationId xmlns:a16="http://schemas.microsoft.com/office/drawing/2014/main" id="{2B9EC00E-2784-4050-99DB-563F4C05866A}"/>
-              </a:ext>
-            </a:extLst>
-          </p:cNvPr>
-          <p:cNvSpPr>
-            <a:spLocks xmlns:a="http://schemas.openxmlformats.org/drawingml/2006/main" noGrp="1"/>
-          </p:cNvSpPr>
-          <p:nvPr/>
-        </p:nvSpPr>
-        <p:spPr>
-          <a:xfrm xmlns:a="http://schemas.openxmlformats.org/drawingml/2006/main">
-            <a:off x="6048375" y="2209800"/>
-            <a:ext cx="381000" cy="381000"/>
-          </a:xfrm>
-          <a:prstGeom xmlns:a="http://schemas.openxmlformats.org/drawingml/2006/main" prst="ellipse">
-            <a:avLst/>
+              <a:t>P₄ 获得 child P₂。本次 increasing 更新取 child 的几何右端点。</a:t>
+            </a:r>
+          </a:p>
+        </p:txBody>
+      </p:sp>
+      <p:sp>
+        <p:nvSpPr>
+          <p:cNvPr id="19" name="">
+            <a:extLst xmlns:a="http://schemas.openxmlformats.org/drawingml/2006/main">
+              <a:ext uri="{FF2B5EF4-FFF2-40B4-BE49-F238E27FC236}">
+                <a16:creationId xmlns:a16="http://schemas.microsoft.com/office/drawing/2014/main" id="{BA53BE2D-3992-4699-B94A-E6F397925B4E}"/>
+              </a:ext>
+            </a:extLst>
+          </p:cNvPr>
+          <p:cNvSpPr>
+            <a:spLocks xmlns:a="http://schemas.openxmlformats.org/drawingml/2006/main" noGrp="1"/>
+          </p:cNvSpPr>
+          <p:nvPr/>
+        </p:nvSpPr>
+        <p:spPr>
+          <a:xfrm xmlns:a="http://schemas.openxmlformats.org/drawingml/2006/main">
+            <a:off x="723900" y="4067175"/>
+            <a:ext cx="5257800" cy="1524000"/>
+          </a:xfrm>
+          <a:prstGeom xmlns:a="http://schemas.openxmlformats.org/drawingml/2006/main" prst="roundRect">
+            <a:avLst>
+              <a:gd name="adj" fmla="val 5000"/>
+            </a:avLst>
           </a:prstGeom>
           <a:solidFill xmlns:a="http://schemas.openxmlformats.org/drawingml/2006/main">
             <a:srgbClr val="FCEEEA"/>
@@ -29656,81 +30454,195 @@
       </p:sp>
       <p:sp>
         <p:nvSpPr>
-          <p:cNvPr id="15" name="">
-            <a:extLst xmlns:a="http://schemas.openxmlformats.org/drawingml/2006/main">
-              <a:ext uri="{FF2B5EF4-FFF2-40B4-BE49-F238E27FC236}">
-                <a16:creationId xmlns:a16="http://schemas.microsoft.com/office/drawing/2014/main" id="{809756AC-3369-4AF0-9446-6F945401A8FC}"/>
-              </a:ext>
-            </a:extLst>
-          </p:cNvPr>
-          <p:cNvSpPr>
-            <a:spLocks xmlns:a="http://schemas.openxmlformats.org/drawingml/2006/main" noGrp="1"/>
-          </p:cNvSpPr>
-          <p:nvPr/>
-        </p:nvSpPr>
-        <p:spPr>
-          <a:xfrm xmlns:a="http://schemas.openxmlformats.org/drawingml/2006/main">
-            <a:off x="6048375" y="2228850"/>
-            <a:ext cx="381000" cy="342900"/>
-          </a:xfrm>
-          <a:prstGeom xmlns:a="http://schemas.openxmlformats.org/drawingml/2006/main" prst="rect">
-            <a:avLst/>
-          </a:prstGeom>
-          <a:noFill xmlns:a="http://schemas.openxmlformats.org/drawingml/2006/main"/>
-          <a:ln xmlns:a="http://schemas.openxmlformats.org/drawingml/2006/main" w="0">
-            <a:noFill/>
-            <a:prstDash val="solid"/>
-          </a:ln>
-        </p:spPr>
-        <p:txBody>
-          <a:bodyPr xmlns:a="http://schemas.openxmlformats.org/drawingml/2006/main" wrap="square" lIns="38100" tIns="19050" rIns="38100" bIns="19050" anchor="ctr">
-            <a:normAutofit fontScale="100000"/>
-          </a:bodyPr>
-          <a:lstStyle xmlns:a="http://schemas.openxmlformats.org/drawingml/2006/main"/>
-          <a:p xmlns:a="http://schemas.openxmlformats.org/drawingml/2006/main">
-            <a:pPr algn="ctr">
-              <a:lnSpc>
-                <a:spcPct val="105000"/>
-              </a:lnSpc>
-              <a:buNone/>
-              <a:defRPr sz="1500" b="1" i="0">
-                <a:solidFill>
-                  <a:srgbClr val="102A43"/>
-                </a:solidFill>
-              </a:defRPr>
-            </a:pPr>
-            <a:r>
-              <a:rPr sz="1500" b="1" i="0">
-                <a:solidFill>
-                  <a:srgbClr val="102A43"/>
-                </a:solidFill>
-              </a:rPr>
-              <a:t>2</a:t>
-            </a:r>
-          </a:p>
-        </p:txBody>
-      </p:sp>
-      <p:sp>
-        <p:nvSpPr>
-          <p:cNvPr id="16" name="">
-            <a:extLst xmlns:a="http://schemas.openxmlformats.org/drawingml/2006/main">
-              <a:ext uri="{FF2B5EF4-FFF2-40B4-BE49-F238E27FC236}">
-                <a16:creationId xmlns:a16="http://schemas.microsoft.com/office/drawing/2014/main" id="{DC96F826-BD8E-4E37-8F52-3D136B923139}"/>
-              </a:ext>
-            </a:extLst>
-          </p:cNvPr>
-          <p:cNvSpPr>
-            <a:spLocks xmlns:a="http://schemas.openxmlformats.org/drawingml/2006/main" noGrp="1"/>
-          </p:cNvSpPr>
-          <p:nvPr/>
-        </p:nvSpPr>
-        <p:spPr>
-          <a:xfrm xmlns:a="http://schemas.openxmlformats.org/drawingml/2006/main">
-            <a:off x="8001000" y="2209800"/>
-            <a:ext cx="381000" cy="381000"/>
-          </a:xfrm>
-          <a:prstGeom xmlns:a="http://schemas.openxmlformats.org/drawingml/2006/main" prst="ellipse">
-            <a:avLst/>
+          <p:cNvPr id="20" name="">
+            <a:extLst xmlns:a="http://schemas.openxmlformats.org/drawingml/2006/main">
+              <a:ext uri="{FF2B5EF4-FFF2-40B4-BE49-F238E27FC236}">
+                <a16:creationId xmlns:a16="http://schemas.microsoft.com/office/drawing/2014/main" id="{9D556071-E156-41D1-A516-5C26154675D3}"/>
+              </a:ext>
+            </a:extLst>
+          </p:cNvPr>
+          <p:cNvSpPr>
+            <a:spLocks xmlns:a="http://schemas.openxmlformats.org/drawingml/2006/main" noGrp="1"/>
+          </p:cNvSpPr>
+          <p:nvPr/>
+        </p:nvSpPr>
+        <p:spPr>
+          <a:xfrm xmlns:a="http://schemas.openxmlformats.org/drawingml/2006/main">
+            <a:off x="876300" y="4162425"/>
+            <a:ext cx="4953000" cy="323850"/>
+          </a:xfrm>
+          <a:prstGeom xmlns:a="http://schemas.openxmlformats.org/drawingml/2006/main" prst="rect">
+            <a:avLst/>
+          </a:prstGeom>
+          <a:noFill xmlns:a="http://schemas.openxmlformats.org/drawingml/2006/main"/>
+          <a:ln xmlns:a="http://schemas.openxmlformats.org/drawingml/2006/main" w="0">
+            <a:noFill/>
+            <a:prstDash val="solid"/>
+          </a:ln>
+        </p:spPr>
+        <p:txBody>
+          <a:bodyPr xmlns:a="http://schemas.openxmlformats.org/drawingml/2006/main" wrap="square" lIns="38100" tIns="19050" rIns="38100" bIns="19050" anchor="t">
+            <a:normAutofit fontScale="100000"/>
+          </a:bodyPr>
+          <a:lstStyle xmlns:a="http://schemas.openxmlformats.org/drawingml/2006/main"/>
+          <a:p xmlns:a="http://schemas.openxmlformats.org/drawingml/2006/main">
+            <a:pPr algn="l">
+              <a:lnSpc>
+                <a:spcPct val="105000"/>
+              </a:lnSpc>
+              <a:buNone/>
+              <a:defRPr sz="1725" b="1" i="0">
+                <a:solidFill>
+                  <a:srgbClr val="E76F51"/>
+                </a:solidFill>
+              </a:defRPr>
+            </a:pPr>
+            <a:r>
+              <a:rPr sz="1725" b="1" i="0">
+                <a:solidFill>
+                  <a:srgbClr val="E76F51"/>
+                </a:solidFill>
+              </a:rPr>
+              <a:t>P₂ 的第二个存储端点：2</a:t>
+            </a:r>
+          </a:p>
+        </p:txBody>
+      </p:sp>
+      <p:sp>
+        <p:nvSpPr>
+          <p:cNvPr id="21" name="">
+            <a:extLst xmlns:a="http://schemas.openxmlformats.org/drawingml/2006/main">
+              <a:ext uri="{FF2B5EF4-FFF2-40B4-BE49-F238E27FC236}">
+                <a16:creationId xmlns:a16="http://schemas.microsoft.com/office/drawing/2014/main" id="{E4F6C889-72FA-4B62-B9C7-96A4CE08AB2D}"/>
+              </a:ext>
+            </a:extLst>
+          </p:cNvPr>
+          <p:cNvSpPr>
+            <a:spLocks xmlns:a="http://schemas.openxmlformats.org/drawingml/2006/main" noGrp="1"/>
+          </p:cNvSpPr>
+          <p:nvPr/>
+        </p:nvSpPr>
+        <p:spPr>
+          <a:xfrm xmlns:a="http://schemas.openxmlformats.org/drawingml/2006/main">
+            <a:off x="876300" y="4610100"/>
+            <a:ext cx="4953000" cy="304800"/>
+          </a:xfrm>
+          <a:prstGeom xmlns:a="http://schemas.openxmlformats.org/drawingml/2006/main" prst="rect">
+            <a:avLst/>
+          </a:prstGeom>
+          <a:noFill xmlns:a="http://schemas.openxmlformats.org/drawingml/2006/main"/>
+          <a:ln xmlns:a="http://schemas.openxmlformats.org/drawingml/2006/main" w="0">
+            <a:noFill/>
+            <a:prstDash val="solid"/>
+          </a:ln>
+        </p:spPr>
+        <p:txBody>
+          <a:bodyPr xmlns:a="http://schemas.openxmlformats.org/drawingml/2006/main" wrap="square" lIns="38100" tIns="19050" rIns="38100" bIns="19050" anchor="t">
+            <a:normAutofit fontScale="96618"/>
+          </a:bodyPr>
+          <a:lstStyle xmlns:a="http://schemas.openxmlformats.org/drawingml/2006/main"/>
+          <a:p xmlns:a="http://schemas.openxmlformats.org/drawingml/2006/main">
+            <a:pPr algn="l">
+              <a:lnSpc>
+                <a:spcPct val="105000"/>
+              </a:lnSpc>
+              <a:buNone/>
+              <a:defRPr sz="1725" b="0" i="0">
+                <a:solidFill>
+                  <a:srgbClr val="243B53"/>
+                </a:solidFill>
+              </a:defRPr>
+            </a:pPr>
+            <a:r>
+              <a:rPr sz="1725" b="0" i="0">
+                <a:solidFill>
+                  <a:srgbClr val="243B53"/>
+                </a:solidFill>
+              </a:rPr>
+              <a:t>将 4 紧接着插在 2 后</a:t>
+            </a:r>
+          </a:p>
+        </p:txBody>
+      </p:sp>
+      <p:sp>
+        <p:nvSpPr>
+          <p:cNvPr id="22" name="">
+            <a:extLst xmlns:a="http://schemas.openxmlformats.org/drawingml/2006/main">
+              <a:ext uri="{FF2B5EF4-FFF2-40B4-BE49-F238E27FC236}">
+                <a16:creationId xmlns:a16="http://schemas.microsoft.com/office/drawing/2014/main" id="{9D83AED2-06A2-46AB-A6E9-959EC34B039D}"/>
+              </a:ext>
+            </a:extLst>
+          </p:cNvPr>
+          <p:cNvSpPr>
+            <a:spLocks xmlns:a="http://schemas.openxmlformats.org/drawingml/2006/main" noGrp="1"/>
+          </p:cNvSpPr>
+          <p:nvPr/>
+        </p:nvSpPr>
+        <p:spPr>
+          <a:xfrm xmlns:a="http://schemas.openxmlformats.org/drawingml/2006/main">
+            <a:off x="876300" y="5095875"/>
+            <a:ext cx="4953000" cy="342900"/>
+          </a:xfrm>
+          <a:prstGeom xmlns:a="http://schemas.openxmlformats.org/drawingml/2006/main" prst="rect">
+            <a:avLst/>
+          </a:prstGeom>
+          <a:noFill xmlns:a="http://schemas.openxmlformats.org/drawingml/2006/main"/>
+          <a:ln xmlns:a="http://schemas.openxmlformats.org/drawingml/2006/main" w="0">
+            <a:noFill/>
+            <a:prstDash val="solid"/>
+          </a:ln>
+        </p:spPr>
+        <p:txBody>
+          <a:bodyPr xmlns:a="http://schemas.openxmlformats.org/drawingml/2006/main" wrap="square" lIns="38100" tIns="19050" rIns="38100" bIns="19050" anchor="t">
+            <a:normAutofit fontScale="100000"/>
+          </a:bodyPr>
+          <a:lstStyle xmlns:a="http://schemas.openxmlformats.org/drawingml/2006/main"/>
+          <a:p xmlns:a="http://schemas.openxmlformats.org/drawingml/2006/main">
+            <a:pPr algn="l">
+              <a:lnSpc>
+                <a:spcPct val="105000"/>
+              </a:lnSpc>
+              <a:buNone/>
+              <a:defRPr sz="1800" b="1" i="0">
+                <a:solidFill>
+                  <a:srgbClr val="E76F51"/>
+                </a:solidFill>
+              </a:defRPr>
+            </a:pPr>
+            <a:r>
+              <a:rPr sz="1800" b="1" i="0">
+                <a:solidFill>
+                  <a:srgbClr val="E76F51"/>
+                </a:solidFill>
+              </a:rPr>
+              <a:t>[1, 2, 4, 3]  错误（示意）</a:t>
+            </a:r>
+          </a:p>
+        </p:txBody>
+      </p:sp>
+      <p:sp>
+        <p:nvSpPr>
+          <p:cNvPr id="23" name="">
+            <a:extLst xmlns:a="http://schemas.openxmlformats.org/drawingml/2006/main">
+              <a:ext uri="{FF2B5EF4-FFF2-40B4-BE49-F238E27FC236}">
+                <a16:creationId xmlns:a16="http://schemas.microsoft.com/office/drawing/2014/main" id="{7196A182-029E-45EF-9243-45A34892EFD3}"/>
+              </a:ext>
+            </a:extLst>
+          </p:cNvPr>
+          <p:cNvSpPr>
+            <a:spLocks xmlns:a="http://schemas.openxmlformats.org/drawingml/2006/main" noGrp="1"/>
+          </p:cNvSpPr>
+          <p:nvPr/>
+        </p:nvSpPr>
+        <p:spPr>
+          <a:xfrm xmlns:a="http://schemas.openxmlformats.org/drawingml/2006/main">
+            <a:off x="6210300" y="4067175"/>
+            <a:ext cx="5257800" cy="1524000"/>
+          </a:xfrm>
+          <a:prstGeom xmlns:a="http://schemas.openxmlformats.org/drawingml/2006/main" prst="roundRect">
+            <a:avLst>
+              <a:gd name="adj" fmla="val 5000"/>
+            </a:avLst>
           </a:prstGeom>
           <a:solidFill xmlns:a="http://schemas.openxmlformats.org/drawingml/2006/main">
             <a:srgbClr val="E8F5F3"/>
@@ -29745,35 +30657,203 @@
       </p:sp>
       <p:sp>
         <p:nvSpPr>
-          <p:cNvPr id="17" name="">
-            <a:extLst xmlns:a="http://schemas.openxmlformats.org/drawingml/2006/main">
-              <a:ext uri="{FF2B5EF4-FFF2-40B4-BE49-F238E27FC236}">
-                <a16:creationId xmlns:a16="http://schemas.microsoft.com/office/drawing/2014/main" id="{43D694F8-B45D-4AD4-92C4-96397E53A327}"/>
-              </a:ext>
-            </a:extLst>
-          </p:cNvPr>
-          <p:cNvSpPr>
-            <a:spLocks xmlns:a="http://schemas.openxmlformats.org/drawingml/2006/main" noGrp="1"/>
-          </p:cNvSpPr>
-          <p:nvPr/>
-        </p:nvSpPr>
-        <p:spPr>
-          <a:xfrm xmlns:a="http://schemas.openxmlformats.org/drawingml/2006/main">
-            <a:off x="8001000" y="2228850"/>
-            <a:ext cx="381000" cy="342900"/>
-          </a:xfrm>
-          <a:prstGeom xmlns:a="http://schemas.openxmlformats.org/drawingml/2006/main" prst="rect">
-            <a:avLst/>
-          </a:prstGeom>
-          <a:noFill xmlns:a="http://schemas.openxmlformats.org/drawingml/2006/main"/>
-          <a:ln xmlns:a="http://schemas.openxmlformats.org/drawingml/2006/main" w="0">
-            <a:noFill/>
-            <a:prstDash val="solid"/>
-          </a:ln>
-        </p:spPr>
-        <p:txBody>
-          <a:bodyPr xmlns:a="http://schemas.openxmlformats.org/drawingml/2006/main" wrap="square" lIns="38100" tIns="19050" rIns="38100" bIns="19050" anchor="ctr">
-            <a:normAutofit fontScale="100000"/>
+          <p:cNvPr id="24" name="">
+            <a:extLst xmlns:a="http://schemas.openxmlformats.org/drawingml/2006/main">
+              <a:ext uri="{FF2B5EF4-FFF2-40B4-BE49-F238E27FC236}">
+                <a16:creationId xmlns:a16="http://schemas.microsoft.com/office/drawing/2014/main" id="{FFD7FF84-1B88-4C37-8F18-293E2DAE87BF}"/>
+              </a:ext>
+            </a:extLst>
+          </p:cNvPr>
+          <p:cNvSpPr>
+            <a:spLocks xmlns:a="http://schemas.openxmlformats.org/drawingml/2006/main" noGrp="1"/>
+          </p:cNvSpPr>
+          <p:nvPr/>
+        </p:nvSpPr>
+        <p:spPr>
+          <a:xfrm xmlns:a="http://schemas.openxmlformats.org/drawingml/2006/main">
+            <a:off x="6362700" y="4162425"/>
+            <a:ext cx="4953000" cy="323850"/>
+          </a:xfrm>
+          <a:prstGeom xmlns:a="http://schemas.openxmlformats.org/drawingml/2006/main" prst="rect">
+            <a:avLst/>
+          </a:prstGeom>
+          <a:noFill xmlns:a="http://schemas.openxmlformats.org/drawingml/2006/main"/>
+          <a:ln xmlns:a="http://schemas.openxmlformats.org/drawingml/2006/main" w="0">
+            <a:noFill/>
+            <a:prstDash val="solid"/>
+          </a:ln>
+        </p:spPr>
+        <p:txBody>
+          <a:bodyPr xmlns:a="http://schemas.openxmlformats.org/drawingml/2006/main" wrap="square" lIns="38100" tIns="19050" rIns="38100" bIns="19050" anchor="t">
+            <a:normAutofit fontScale="100000"/>
+          </a:bodyPr>
+          <a:lstStyle xmlns:a="http://schemas.openxmlformats.org/drawingml/2006/main"/>
+          <a:p xmlns:a="http://schemas.openxmlformats.org/drawingml/2006/main">
+            <a:pPr algn="l">
+              <a:lnSpc>
+                <a:spcPct val="105000"/>
+              </a:lnSpc>
+              <a:buNone/>
+              <a:defRPr sz="1725" b="1" i="0">
+                <a:solidFill>
+                  <a:srgbClr val="2A9D8F"/>
+                </a:solidFill>
+              </a:defRPr>
+            </a:pPr>
+            <a:r>
+              <a:rPr sz="1725" b="1" i="0">
+                <a:solidFill>
+                  <a:srgbClr val="2A9D8F"/>
+                </a:solidFill>
+              </a:rPr>
+              <a:t>P₂ 的几何右端点：3</a:t>
+            </a:r>
+          </a:p>
+        </p:txBody>
+      </p:sp>
+      <p:sp>
+        <p:nvSpPr>
+          <p:cNvPr id="25" name="">
+            <a:extLst xmlns:a="http://schemas.openxmlformats.org/drawingml/2006/main">
+              <a:ext uri="{FF2B5EF4-FFF2-40B4-BE49-F238E27FC236}">
+                <a16:creationId xmlns:a16="http://schemas.microsoft.com/office/drawing/2014/main" id="{1E5FE610-2FC8-40F2-B8EB-099D6BBF4A0F}"/>
+              </a:ext>
+            </a:extLst>
+          </p:cNvPr>
+          <p:cNvSpPr>
+            <a:spLocks xmlns:a="http://schemas.openxmlformats.org/drawingml/2006/main" noGrp="1"/>
+          </p:cNvSpPr>
+          <p:nvPr/>
+        </p:nvSpPr>
+        <p:spPr>
+          <a:xfrm xmlns:a="http://schemas.openxmlformats.org/drawingml/2006/main">
+            <a:off x="6362700" y="4610100"/>
+            <a:ext cx="4953000" cy="304800"/>
+          </a:xfrm>
+          <a:prstGeom xmlns:a="http://schemas.openxmlformats.org/drawingml/2006/main" prst="rect">
+            <a:avLst/>
+          </a:prstGeom>
+          <a:noFill xmlns:a="http://schemas.openxmlformats.org/drawingml/2006/main"/>
+          <a:ln xmlns:a="http://schemas.openxmlformats.org/drawingml/2006/main" w="0">
+            <a:noFill/>
+            <a:prstDash val="solid"/>
+          </a:ln>
+        </p:spPr>
+        <p:txBody>
+          <a:bodyPr xmlns:a="http://schemas.openxmlformats.org/drawingml/2006/main" wrap="square" lIns="38100" tIns="19050" rIns="38100" bIns="19050" anchor="t">
+            <a:normAutofit fontScale="96618"/>
+          </a:bodyPr>
+          <a:lstStyle xmlns:a="http://schemas.openxmlformats.org/drawingml/2006/main"/>
+          <a:p xmlns:a="http://schemas.openxmlformats.org/drawingml/2006/main">
+            <a:pPr algn="l">
+              <a:lnSpc>
+                <a:spcPct val="105000"/>
+              </a:lnSpc>
+              <a:buNone/>
+              <a:defRPr sz="1725" b="0" i="0">
+                <a:solidFill>
+                  <a:srgbClr val="243B53"/>
+                </a:solidFill>
+              </a:defRPr>
+            </a:pPr>
+            <a:r>
+              <a:rPr sz="1725" b="0" i="0">
+                <a:solidFill>
+                  <a:srgbClr val="243B53"/>
+                </a:solidFill>
+              </a:rPr>
+              <a:t>将 4 紧接着插在 3 后</a:t>
+            </a:r>
+          </a:p>
+        </p:txBody>
+      </p:sp>
+      <p:sp>
+        <p:nvSpPr>
+          <p:cNvPr id="26" name="">
+            <a:extLst xmlns:a="http://schemas.openxmlformats.org/drawingml/2006/main">
+              <a:ext uri="{FF2B5EF4-FFF2-40B4-BE49-F238E27FC236}">
+                <a16:creationId xmlns:a16="http://schemas.microsoft.com/office/drawing/2014/main" id="{B47A764F-304E-4565-9749-333EB14B1799}"/>
+              </a:ext>
+            </a:extLst>
+          </p:cNvPr>
+          <p:cNvSpPr>
+            <a:spLocks xmlns:a="http://schemas.openxmlformats.org/drawingml/2006/main" noGrp="1"/>
+          </p:cNvSpPr>
+          <p:nvPr/>
+        </p:nvSpPr>
+        <p:spPr>
+          <a:xfrm xmlns:a="http://schemas.openxmlformats.org/drawingml/2006/main">
+            <a:off x="6362700" y="5095875"/>
+            <a:ext cx="4953000" cy="342900"/>
+          </a:xfrm>
+          <a:prstGeom xmlns:a="http://schemas.openxmlformats.org/drawingml/2006/main" prst="rect">
+            <a:avLst/>
+          </a:prstGeom>
+          <a:noFill xmlns:a="http://schemas.openxmlformats.org/drawingml/2006/main"/>
+          <a:ln xmlns:a="http://schemas.openxmlformats.org/drawingml/2006/main" w="0">
+            <a:noFill/>
+            <a:prstDash val="solid"/>
+          </a:ln>
+        </p:spPr>
+        <p:txBody>
+          <a:bodyPr xmlns:a="http://schemas.openxmlformats.org/drawingml/2006/main" wrap="square" lIns="38100" tIns="19050" rIns="38100" bIns="19050" anchor="t">
+            <a:normAutofit fontScale="100000"/>
+          </a:bodyPr>
+          <a:lstStyle xmlns:a="http://schemas.openxmlformats.org/drawingml/2006/main"/>
+          <a:p xmlns:a="http://schemas.openxmlformats.org/drawingml/2006/main">
+            <a:pPr algn="l">
+              <a:lnSpc>
+                <a:spcPct val="105000"/>
+              </a:lnSpc>
+              <a:buNone/>
+              <a:defRPr sz="1800" b="1" i="0">
+                <a:solidFill>
+                  <a:srgbClr val="2A9D8F"/>
+                </a:solidFill>
+              </a:defRPr>
+            </a:pPr>
+            <a:r>
+              <a:rPr sz="1800" b="1" i="0">
+                <a:solidFill>
+                  <a:srgbClr val="2A9D8F"/>
+                </a:solidFill>
+              </a:rPr>
+              <a:t>[1, 2, 3, 4]  正确</a:t>
+            </a:r>
+          </a:p>
+        </p:txBody>
+      </p:sp>
+      <p:sp>
+        <p:nvSpPr>
+          <p:cNvPr id="27" name="">
+            <a:extLst xmlns:a="http://schemas.openxmlformats.org/drawingml/2006/main">
+              <a:ext uri="{FF2B5EF4-FFF2-40B4-BE49-F238E27FC236}">
+                <a16:creationId xmlns:a16="http://schemas.microsoft.com/office/drawing/2014/main" id="{2DEDBB45-B7D7-44BC-9BA6-4BADE249C7A6}"/>
+              </a:ext>
+            </a:extLst>
+          </p:cNvPr>
+          <p:cNvSpPr>
+            <a:spLocks xmlns:a="http://schemas.openxmlformats.org/drawingml/2006/main" noGrp="1"/>
+          </p:cNvSpPr>
+          <p:nvPr/>
+        </p:nvSpPr>
+        <p:spPr>
+          <a:xfrm xmlns:a="http://schemas.openxmlformats.org/drawingml/2006/main">
+            <a:off x="723900" y="5762625"/>
+            <a:ext cx="10744200" cy="285750"/>
+          </a:xfrm>
+          <a:prstGeom xmlns:a="http://schemas.openxmlformats.org/drawingml/2006/main" prst="rect">
+            <a:avLst/>
+          </a:prstGeom>
+          <a:noFill xmlns:a="http://schemas.openxmlformats.org/drawingml/2006/main"/>
+          <a:ln xmlns:a="http://schemas.openxmlformats.org/drawingml/2006/main" w="0">
+            <a:noFill/>
+            <a:prstDash val="solid"/>
+          </a:ln>
+        </p:spPr>
+        <p:txBody>
+          <a:bodyPr xmlns:a="http://schemas.openxmlformats.org/drawingml/2006/main" wrap="square" lIns="38100" tIns="19050" rIns="38100" bIns="19050" anchor="t">
+            <a:normAutofit fontScale="93795"/>
           </a:bodyPr>
           <a:lstStyle xmlns:a="http://schemas.openxmlformats.org/drawingml/2006/main"/>
           <a:p xmlns:a="http://schemas.openxmlformats.org/drawingml/2006/main">
@@ -29782,87 +30862,54 @@
                 <a:spcPct val="105000"/>
               </a:lnSpc>
               <a:buNone/>
-              <a:defRPr sz="1500" b="1" i="0">
+              <a:defRPr sz="1650" b="0" i="0">
                 <a:solidFill>
                   <a:srgbClr val="102A43"/>
                 </a:solidFill>
               </a:defRPr>
             </a:pPr>
             <a:r>
-              <a:rPr sz="1500" b="1" i="0">
+              <a:rPr sz="1650" b="0" i="0">
                 <a:solidFill>
                   <a:srgbClr val="102A43"/>
                 </a:solidFill>
               </a:rPr>
-              <a:t>3</a:t>
-            </a:r>
-          </a:p>
-        </p:txBody>
-      </p:sp>
-      <p:sp>
-        <p:nvSpPr>
-          <p:cNvPr id="18" name="">
-            <a:extLst xmlns:a="http://schemas.openxmlformats.org/drawingml/2006/main">
-              <a:ext uri="{FF2B5EF4-FFF2-40B4-BE49-F238E27FC236}">
-                <a16:creationId xmlns:a16="http://schemas.microsoft.com/office/drawing/2014/main" id="{72430165-32F7-4702-823B-6AE6E2DA9D68}"/>
-              </a:ext>
-            </a:extLst>
-          </p:cNvPr>
-          <p:cNvSpPr>
-            <a:spLocks xmlns:a="http://schemas.openxmlformats.org/drawingml/2006/main" noGrp="1"/>
-          </p:cNvSpPr>
-          <p:nvPr/>
-        </p:nvSpPr>
-        <p:spPr>
-          <a:xfrm xmlns:a="http://schemas.openxmlformats.org/drawingml/2006/main">
-            <a:off x="9953625" y="2209800"/>
-            <a:ext cx="381000" cy="381000"/>
-          </a:xfrm>
-          <a:prstGeom xmlns:a="http://schemas.openxmlformats.org/drawingml/2006/main" prst="ellipse">
-            <a:avLst/>
-          </a:prstGeom>
-          <a:solidFill xmlns:a="http://schemas.openxmlformats.org/drawingml/2006/main">
-            <a:srgbClr val="FFFFFF"/>
-          </a:solidFill>
-          <a:ln xmlns:a="http://schemas.openxmlformats.org/drawingml/2006/main" w="19050">
-            <a:solidFill>
-              <a:srgbClr val="52606D"/>
-            </a:solidFill>
-            <a:prstDash val="solid"/>
-          </a:ln>
-        </p:spPr>
-      </p:sp>
-      <p:sp>
-        <p:nvSpPr>
-          <p:cNvPr id="19" name="">
-            <a:extLst xmlns:a="http://schemas.openxmlformats.org/drawingml/2006/main">
-              <a:ext uri="{FF2B5EF4-FFF2-40B4-BE49-F238E27FC236}">
-                <a16:creationId xmlns:a16="http://schemas.microsoft.com/office/drawing/2014/main" id="{C5F2A0AC-1B40-4C79-9A57-1427DEDFFF01}"/>
-              </a:ext>
-            </a:extLst>
-          </p:cNvPr>
-          <p:cNvSpPr>
-            <a:spLocks xmlns:a="http://schemas.openxmlformats.org/drawingml/2006/main" noGrp="1"/>
-          </p:cNvSpPr>
-          <p:nvPr/>
-        </p:nvSpPr>
-        <p:spPr>
-          <a:xfrm xmlns:a="http://schemas.openxmlformats.org/drawingml/2006/main">
-            <a:off x="9953625" y="2228850"/>
-            <a:ext cx="381000" cy="342900"/>
-          </a:xfrm>
-          <a:prstGeom xmlns:a="http://schemas.openxmlformats.org/drawingml/2006/main" prst="rect">
-            <a:avLst/>
-          </a:prstGeom>
-          <a:noFill xmlns:a="http://schemas.openxmlformats.org/drawingml/2006/main"/>
-          <a:ln xmlns:a="http://schemas.openxmlformats.org/drawingml/2006/main" w="0">
-            <a:noFill/>
-            <a:prstDash val="solid"/>
-          </a:ln>
-        </p:spPr>
-        <p:txBody>
-          <a:bodyPr xmlns:a="http://schemas.openxmlformats.org/drawingml/2006/main" wrap="square" lIns="38100" tIns="19050" rIns="38100" bIns="19050" anchor="ctr">
-            <a:normAutofit fontScale="100000"/>
+              <a:t>这里的 anchor 是已有点，4 将紧接着插在它后面。</a:t>
+            </a:r>
+          </a:p>
+        </p:txBody>
+      </p:sp>
+      <p:sp>
+        <p:nvSpPr>
+          <p:cNvPr id="28" name="">
+            <a:extLst xmlns:a="http://schemas.openxmlformats.org/drawingml/2006/main">
+              <a:ext uri="{FF2B5EF4-FFF2-40B4-BE49-F238E27FC236}">
+                <a16:creationId xmlns:a16="http://schemas.microsoft.com/office/drawing/2014/main" id="{CBE79683-B69C-4F2E-BD94-C4263A79033B}"/>
+              </a:ext>
+            </a:extLst>
+          </p:cNvPr>
+          <p:cNvSpPr>
+            <a:spLocks xmlns:a="http://schemas.openxmlformats.org/drawingml/2006/main" noGrp="1"/>
+          </p:cNvSpPr>
+          <p:nvPr/>
+        </p:nvSpPr>
+        <p:spPr>
+          <a:xfrm xmlns:a="http://schemas.openxmlformats.org/drawingml/2006/main">
+            <a:off x="723900" y="6134100"/>
+            <a:ext cx="10744200" cy="266700"/>
+          </a:xfrm>
+          <a:prstGeom xmlns:a="http://schemas.openxmlformats.org/drawingml/2006/main" prst="rect">
+            <a:avLst/>
+          </a:prstGeom>
+          <a:noFill xmlns:a="http://schemas.openxmlformats.org/drawingml/2006/main"/>
+          <a:ln xmlns:a="http://schemas.openxmlformats.org/drawingml/2006/main" w="0">
+            <a:noFill/>
+            <a:prstDash val="solid"/>
+          </a:ln>
+        </p:spPr>
+        <p:txBody>
+          <a:bodyPr xmlns:a="http://schemas.openxmlformats.org/drawingml/2006/main" wrap="square" lIns="38100" tIns="19050" rIns="38100" bIns="19050" anchor="t">
+            <a:normAutofit fontScale="95238"/>
           </a:bodyPr>
           <a:lstStyle xmlns:a="http://schemas.openxmlformats.org/drawingml/2006/main"/>
           <a:p xmlns:a="http://schemas.openxmlformats.org/drawingml/2006/main">
@@ -29871,579 +30918,19 @@
                 <a:spcPct val="105000"/>
               </a:lnSpc>
               <a:buNone/>
-              <a:defRPr sz="1500" b="1" i="0">
-                <a:solidFill>
-                  <a:srgbClr val="102A43"/>
-                </a:solidFill>
-              </a:defRPr>
-            </a:pPr>
-            <a:r>
-              <a:rPr sz="1500" b="1" i="0">
-                <a:solidFill>
-                  <a:srgbClr val="102A43"/>
-                </a:solidFill>
-              </a:rPr>
-              <a:t>4</a:t>
-            </a:r>
-          </a:p>
-        </p:txBody>
-      </p:sp>
-      <p:sp>
-        <p:nvSpPr>
-          <p:cNvPr id="20" name="">
-            <a:extLst xmlns:a="http://schemas.openxmlformats.org/drawingml/2006/main">
-              <a:ext uri="{FF2B5EF4-FFF2-40B4-BE49-F238E27FC236}">
-                <a16:creationId xmlns:a16="http://schemas.microsoft.com/office/drawing/2014/main" id="{0FE76C16-6441-4A8A-9899-EBBFEB2F596B}"/>
-              </a:ext>
-            </a:extLst>
-          </p:cNvPr>
-          <p:cNvSpPr>
-            <a:spLocks xmlns:a="http://schemas.openxmlformats.org/drawingml/2006/main" noGrp="1"/>
-          </p:cNvSpPr>
-          <p:nvPr/>
-        </p:nvSpPr>
-        <p:spPr>
-          <a:xfrm xmlns:a="http://schemas.openxmlformats.org/drawingml/2006/main">
-            <a:off x="6858000" y="1581150"/>
-            <a:ext cx="2381250" cy="400050"/>
-          </a:xfrm>
-          <a:prstGeom xmlns:a="http://schemas.openxmlformats.org/drawingml/2006/main" prst="rect">
-            <a:avLst/>
-          </a:prstGeom>
-          <a:noFill xmlns:a="http://schemas.openxmlformats.org/drawingml/2006/main"/>
-          <a:ln xmlns:a="http://schemas.openxmlformats.org/drawingml/2006/main" w="0">
-            <a:noFill/>
-            <a:prstDash val="solid"/>
-          </a:ln>
-        </p:spPr>
-        <p:txBody>
-          <a:bodyPr xmlns:a="http://schemas.openxmlformats.org/drawingml/2006/main" wrap="square" lIns="38100" tIns="19050" rIns="38100" bIns="19050" anchor="t">
-            <a:normAutofit fontScale="100000"/>
-          </a:bodyPr>
-          <a:lstStyle xmlns:a="http://schemas.openxmlformats.org/drawingml/2006/main"/>
-          <a:p xmlns:a="http://schemas.openxmlformats.org/drawingml/2006/main">
-            <a:pPr algn="ctr">
-              <a:lnSpc>
-                <a:spcPct val="105000"/>
-              </a:lnSpc>
-              <a:buNone/>
-              <a:defRPr sz="1500" b="1" i="0">
-                <a:solidFill>
-                  <a:srgbClr val="E76F51"/>
-                </a:solidFill>
-              </a:defRPr>
-            </a:pPr>
-            <a:r>
-              <a:rPr sz="1500" b="1" i="0">
-                <a:solidFill>
-                  <a:srgbClr val="E76F51"/>
-                </a:solidFill>
-              </a:rPr>
-              <a:t>存储方向 3 → 2</a:t>
-            </a:r>
-          </a:p>
-        </p:txBody>
-      </p:sp>
-      <p:sp>
-        <p:nvSpPr>
-          <p:cNvPr id="21" name="">
-            <a:extLst xmlns:a="http://schemas.openxmlformats.org/drawingml/2006/main">
-              <a:ext uri="{FF2B5EF4-FFF2-40B4-BE49-F238E27FC236}">
-                <a16:creationId xmlns:a16="http://schemas.microsoft.com/office/drawing/2014/main" id="{937C9BE1-613A-46DD-A30C-76A9A7E855F1}"/>
-              </a:ext>
-            </a:extLst>
-          </p:cNvPr>
-          <p:cNvSpPr>
-            <a:spLocks xmlns:a="http://schemas.openxmlformats.org/drawingml/2006/main" noGrp="1"/>
-          </p:cNvSpPr>
-          <p:nvPr/>
-        </p:nvSpPr>
-        <p:spPr>
-          <a:xfrm xmlns:a="http://schemas.openxmlformats.org/drawingml/2006/main">
-            <a:off x="6153150" y="2724150"/>
-            <a:ext cx="2476500" cy="323850"/>
-          </a:xfrm>
-          <a:prstGeom xmlns:a="http://schemas.openxmlformats.org/drawingml/2006/main" prst="rect">
-            <a:avLst/>
-          </a:prstGeom>
-          <a:noFill xmlns:a="http://schemas.openxmlformats.org/drawingml/2006/main"/>
-          <a:ln xmlns:a="http://schemas.openxmlformats.org/drawingml/2006/main" w="0">
-            <a:noFill/>
-            <a:prstDash val="solid"/>
-          </a:ln>
-        </p:spPr>
-        <p:txBody>
-          <a:bodyPr xmlns:a="http://schemas.openxmlformats.org/drawingml/2006/main" wrap="square" lIns="38100" tIns="19050" rIns="38100" bIns="19050" anchor="t">
-            <a:normAutofit fontScale="100000"/>
-          </a:bodyPr>
-          <a:lstStyle xmlns:a="http://schemas.openxmlformats.org/drawingml/2006/main"/>
-          <a:p xmlns:a="http://schemas.openxmlformats.org/drawingml/2006/main">
-            <a:pPr algn="ctr">
-              <a:lnSpc>
-                <a:spcPct val="105000"/>
-              </a:lnSpc>
-              <a:buNone/>
-              <a:defRPr sz="1200" b="0" i="0">
-                <a:solidFill>
-                  <a:srgbClr val="7B8794"/>
-                </a:solidFill>
-              </a:defRPr>
-            </a:pPr>
-            <a:r>
-              <a:rPr sz="1200" b="0" i="0">
-                <a:solidFill>
-                  <a:srgbClr val="7B8794"/>
-                </a:solidFill>
-              </a:rPr>
-              <a:t>几何坐标轴</a:t>
-            </a:r>
-          </a:p>
-        </p:txBody>
-      </p:sp>
-      <p:sp>
-        <p:nvSpPr>
-          <p:cNvPr id="22" name="">
-            <a:extLst xmlns:a="http://schemas.openxmlformats.org/drawingml/2006/main">
-              <a:ext uri="{FF2B5EF4-FFF2-40B4-BE49-F238E27FC236}">
-                <a16:creationId xmlns:a16="http://schemas.microsoft.com/office/drawing/2014/main" id="{E98A5A4F-1C56-4F78-8191-DC6AEDE16280}"/>
-              </a:ext>
-            </a:extLst>
-          </p:cNvPr>
-          <p:cNvSpPr>
-            <a:spLocks xmlns:a="http://schemas.openxmlformats.org/drawingml/2006/main" noGrp="1"/>
-          </p:cNvSpPr>
-          <p:nvPr/>
-        </p:nvSpPr>
-        <p:spPr>
-          <a:xfrm xmlns:a="http://schemas.openxmlformats.org/drawingml/2006/main">
-            <a:off x="3943350" y="3409950"/>
-            <a:ext cx="3143250" cy="1466850"/>
-          </a:xfrm>
-          <a:prstGeom xmlns:a="http://schemas.openxmlformats.org/drawingml/2006/main" prst="roundRect">
-            <a:avLst>
-              <a:gd name="adj" fmla="val 5195"/>
-            </a:avLst>
-          </a:prstGeom>
-          <a:solidFill xmlns:a="http://schemas.openxmlformats.org/drawingml/2006/main">
-            <a:srgbClr val="FCEEEA"/>
-          </a:solidFill>
-          <a:ln xmlns:a="http://schemas.openxmlformats.org/drawingml/2006/main" w="19050">
-            <a:solidFill>
-              <a:srgbClr val="E76F51"/>
-            </a:solidFill>
-            <a:prstDash val="solid"/>
-          </a:ln>
-        </p:spPr>
-      </p:sp>
-      <p:sp>
-        <p:nvSpPr>
-          <p:cNvPr id="23" name="">
-            <a:extLst xmlns:a="http://schemas.openxmlformats.org/drawingml/2006/main">
-              <a:ext uri="{FF2B5EF4-FFF2-40B4-BE49-F238E27FC236}">
-                <a16:creationId xmlns:a16="http://schemas.microsoft.com/office/drawing/2014/main" id="{EF403E8E-447B-4D79-9544-9BAFB38E585D}"/>
-              </a:ext>
-            </a:extLst>
-          </p:cNvPr>
-          <p:cNvSpPr>
-            <a:spLocks xmlns:a="http://schemas.openxmlformats.org/drawingml/2006/main" noGrp="1"/>
-          </p:cNvSpPr>
-          <p:nvPr/>
-        </p:nvSpPr>
-        <p:spPr>
-          <a:xfrm xmlns:a="http://schemas.openxmlformats.org/drawingml/2006/main">
-            <a:off x="4152900" y="3562350"/>
-            <a:ext cx="2724150" cy="323850"/>
-          </a:xfrm>
-          <a:prstGeom xmlns:a="http://schemas.openxmlformats.org/drawingml/2006/main" prst="rect">
-            <a:avLst/>
-          </a:prstGeom>
-          <a:noFill xmlns:a="http://schemas.openxmlformats.org/drawingml/2006/main"/>
-          <a:ln xmlns:a="http://schemas.openxmlformats.org/drawingml/2006/main" w="0">
-            <a:noFill/>
-            <a:prstDash val="solid"/>
-          </a:ln>
-        </p:spPr>
-        <p:txBody>
-          <a:bodyPr xmlns:a="http://schemas.openxmlformats.org/drawingml/2006/main" wrap="square" lIns="38100" tIns="19050" rIns="38100" bIns="19050" anchor="t">
-            <a:normAutofit fontScale="100000"/>
-          </a:bodyPr>
-          <a:lstStyle xmlns:a="http://schemas.openxmlformats.org/drawingml/2006/main"/>
-          <a:p xmlns:a="http://schemas.openxmlformats.org/drawingml/2006/main">
-            <a:pPr algn="ctr">
-              <a:lnSpc>
-                <a:spcPct val="105000"/>
-              </a:lnSpc>
-              <a:buNone/>
-              <a:defRPr sz="1725" b="1" i="0">
-                <a:solidFill>
-                  <a:srgbClr val="E76F51"/>
-                </a:solidFill>
-              </a:defRPr>
-            </a:pPr>
-            <a:r>
-              <a:rPr sz="1725" b="1" i="0">
-                <a:solidFill>
-                  <a:srgbClr val="E76F51"/>
-                </a:solidFill>
-              </a:rPr>
-              <a:t>曲线顺序端点</a:t>
-            </a:r>
-          </a:p>
-        </p:txBody>
-      </p:sp>
-      <p:sp>
-        <p:nvSpPr>
-          <p:cNvPr id="24" name="">
-            <a:extLst xmlns:a="http://schemas.openxmlformats.org/drawingml/2006/main">
-              <a:ext uri="{FF2B5EF4-FFF2-40B4-BE49-F238E27FC236}">
-                <a16:creationId xmlns:a16="http://schemas.microsoft.com/office/drawing/2014/main" id="{E81191B0-139D-457B-AAC4-70D118214B36}"/>
-              </a:ext>
-            </a:extLst>
-          </p:cNvPr>
-          <p:cNvSpPr>
-            <a:spLocks xmlns:a="http://schemas.openxmlformats.org/drawingml/2006/main" noGrp="1"/>
-          </p:cNvSpPr>
-          <p:nvPr/>
-        </p:nvSpPr>
-        <p:spPr>
-          <a:xfrm xmlns:a="http://schemas.openxmlformats.org/drawingml/2006/main">
-            <a:off x="4171950" y="3981450"/>
-            <a:ext cx="2686050" cy="666750"/>
-          </a:xfrm>
-          <a:prstGeom xmlns:a="http://schemas.openxmlformats.org/drawingml/2006/main" prst="rect">
-            <a:avLst/>
-          </a:prstGeom>
-          <a:noFill xmlns:a="http://schemas.openxmlformats.org/drawingml/2006/main"/>
-          <a:ln xmlns:a="http://schemas.openxmlformats.org/drawingml/2006/main" w="0">
-            <a:noFill/>
-            <a:prstDash val="solid"/>
-          </a:ln>
-        </p:spPr>
-        <p:txBody>
-          <a:bodyPr xmlns:a="http://schemas.openxmlformats.org/drawingml/2006/main" wrap="square" lIns="38100" tIns="19050" rIns="38100" bIns="19050" anchor="ctr">
-            <a:normAutofit fontScale="100000"/>
-          </a:bodyPr>
-          <a:lstStyle xmlns:a="http://schemas.openxmlformats.org/drawingml/2006/main"/>
-          <a:p xmlns:a="http://schemas.openxmlformats.org/drawingml/2006/main">
-            <a:pPr algn="ctr">
-              <a:lnSpc>
-                <a:spcPct val="105000"/>
-              </a:lnSpc>
-              <a:buNone/>
               <a:defRPr sz="1500" b="0" i="0">
                 <a:solidFill>
-                  <a:srgbClr val="243B53"/>
+                  <a:srgbClr val="52606D"/>
                 </a:solidFill>
               </a:defRPr>
             </a:pPr>
             <a:r>
               <a:rPr sz="1500" b="0" i="0">
                 <a:solidFill>
-                  <a:srgbClr val="243B53"/>
-                </a:solidFill>
-              </a:rPr>
-              <a:t>anchor = 2</a:t>
-            </a:r>
-          </a:p>
-          <a:p xmlns:a="http://schemas.openxmlformats.org/drawingml/2006/main">
-            <a:pPr algn="ctr">
-              <a:lnSpc>
-                <a:spcPct val="105000"/>
-              </a:lnSpc>
-              <a:buNone/>
-              <a:defRPr sz="1500" b="0" i="0">
-                <a:solidFill>
-                  <a:srgbClr val="243B53"/>
-                </a:solidFill>
-              </a:defRPr>
-            </a:pPr>
-            <a:r>
-              <a:rPr sz="1500" b="0" i="0">
-                <a:solidFill>
-                  <a:srgbClr val="243B53"/>
-                </a:solidFill>
-              </a:rPr>
-              <a:t>结果：[1, 2, 4, 3]</a:t>
-            </a:r>
-          </a:p>
-        </p:txBody>
-      </p:sp>
-      <p:sp>
-        <p:nvSpPr>
-          <p:cNvPr id="25" name="">
-            <a:extLst xmlns:a="http://schemas.openxmlformats.org/drawingml/2006/main">
-              <a:ext uri="{FF2B5EF4-FFF2-40B4-BE49-F238E27FC236}">
-                <a16:creationId xmlns:a16="http://schemas.microsoft.com/office/drawing/2014/main" id="{5C4F382E-3146-4F5F-9CE8-AF308F94D143}"/>
-              </a:ext>
-            </a:extLst>
-          </p:cNvPr>
-          <p:cNvSpPr>
-            <a:spLocks xmlns:a="http://schemas.openxmlformats.org/drawingml/2006/main" noGrp="1"/>
-          </p:cNvSpPr>
-          <p:nvPr/>
-        </p:nvSpPr>
-        <p:spPr>
-          <a:xfrm xmlns:a="http://schemas.openxmlformats.org/drawingml/2006/main">
-            <a:off x="7524750" y="3409950"/>
-            <a:ext cx="3143250" cy="1466850"/>
-          </a:xfrm>
-          <a:prstGeom xmlns:a="http://schemas.openxmlformats.org/drawingml/2006/main" prst="roundRect">
-            <a:avLst>
-              <a:gd name="adj" fmla="val 5195"/>
-            </a:avLst>
-          </a:prstGeom>
-          <a:solidFill xmlns:a="http://schemas.openxmlformats.org/drawingml/2006/main">
-            <a:srgbClr val="E8F5F3"/>
-          </a:solidFill>
-          <a:ln xmlns:a="http://schemas.openxmlformats.org/drawingml/2006/main" w="19050">
-            <a:solidFill>
-              <a:srgbClr val="2A9D8F"/>
-            </a:solidFill>
-            <a:prstDash val="solid"/>
-          </a:ln>
-        </p:spPr>
-      </p:sp>
-      <p:sp>
-        <p:nvSpPr>
-          <p:cNvPr id="26" name="">
-            <a:extLst xmlns:a="http://schemas.openxmlformats.org/drawingml/2006/main">
-              <a:ext uri="{FF2B5EF4-FFF2-40B4-BE49-F238E27FC236}">
-                <a16:creationId xmlns:a16="http://schemas.microsoft.com/office/drawing/2014/main" id="{3C7EC42E-392D-4F65-A3F3-9315170E3C79}"/>
-              </a:ext>
-            </a:extLst>
-          </p:cNvPr>
-          <p:cNvSpPr>
-            <a:spLocks xmlns:a="http://schemas.openxmlformats.org/drawingml/2006/main" noGrp="1"/>
-          </p:cNvSpPr>
-          <p:nvPr/>
-        </p:nvSpPr>
-        <p:spPr>
-          <a:xfrm xmlns:a="http://schemas.openxmlformats.org/drawingml/2006/main">
-            <a:off x="7734300" y="3562350"/>
-            <a:ext cx="2724150" cy="323850"/>
-          </a:xfrm>
-          <a:prstGeom xmlns:a="http://schemas.openxmlformats.org/drawingml/2006/main" prst="rect">
-            <a:avLst/>
-          </a:prstGeom>
-          <a:noFill xmlns:a="http://schemas.openxmlformats.org/drawingml/2006/main"/>
-          <a:ln xmlns:a="http://schemas.openxmlformats.org/drawingml/2006/main" w="0">
-            <a:noFill/>
-            <a:prstDash val="solid"/>
-          </a:ln>
-        </p:spPr>
-        <p:txBody>
-          <a:bodyPr xmlns:a="http://schemas.openxmlformats.org/drawingml/2006/main" wrap="square" lIns="38100" tIns="19050" rIns="38100" bIns="19050" anchor="t">
-            <a:normAutofit fontScale="100000"/>
-          </a:bodyPr>
-          <a:lstStyle xmlns:a="http://schemas.openxmlformats.org/drawingml/2006/main"/>
-          <a:p xmlns:a="http://schemas.openxmlformats.org/drawingml/2006/main">
-            <a:pPr algn="ctr">
-              <a:lnSpc>
-                <a:spcPct val="105000"/>
-              </a:lnSpc>
-              <a:buNone/>
-              <a:defRPr sz="1725" b="1" i="0">
-                <a:solidFill>
-                  <a:srgbClr val="2A9D8F"/>
-                </a:solidFill>
-              </a:defRPr>
-            </a:pPr>
-            <a:r>
-              <a:rPr sz="1725" b="1" i="0">
-                <a:solidFill>
-                  <a:srgbClr val="2A9D8F"/>
-                </a:solidFill>
-              </a:rPr>
-              <a:t>几何端点</a:t>
-            </a:r>
-          </a:p>
-        </p:txBody>
-      </p:sp>
-      <p:sp>
-        <p:nvSpPr>
-          <p:cNvPr id="27" name="">
-            <a:extLst xmlns:a="http://schemas.openxmlformats.org/drawingml/2006/main">
-              <a:ext uri="{FF2B5EF4-FFF2-40B4-BE49-F238E27FC236}">
-                <a16:creationId xmlns:a16="http://schemas.microsoft.com/office/drawing/2014/main" id="{F93F37AD-79F9-4A70-AD7A-10E756344CD8}"/>
-              </a:ext>
-            </a:extLst>
-          </p:cNvPr>
-          <p:cNvSpPr>
-            <a:spLocks xmlns:a="http://schemas.openxmlformats.org/drawingml/2006/main" noGrp="1"/>
-          </p:cNvSpPr>
-          <p:nvPr/>
-        </p:nvSpPr>
-        <p:spPr>
-          <a:xfrm xmlns:a="http://schemas.openxmlformats.org/drawingml/2006/main">
-            <a:off x="7753350" y="3981450"/>
-            <a:ext cx="2686050" cy="666750"/>
-          </a:xfrm>
-          <a:prstGeom xmlns:a="http://schemas.openxmlformats.org/drawingml/2006/main" prst="rect">
-            <a:avLst/>
-          </a:prstGeom>
-          <a:noFill xmlns:a="http://schemas.openxmlformats.org/drawingml/2006/main"/>
-          <a:ln xmlns:a="http://schemas.openxmlformats.org/drawingml/2006/main" w="0">
-            <a:noFill/>
-            <a:prstDash val="solid"/>
-          </a:ln>
-        </p:spPr>
-        <p:txBody>
-          <a:bodyPr xmlns:a="http://schemas.openxmlformats.org/drawingml/2006/main" wrap="square" lIns="38100" tIns="19050" rIns="38100" bIns="19050" anchor="ctr">
-            <a:normAutofit fontScale="100000"/>
-          </a:bodyPr>
-          <a:lstStyle xmlns:a="http://schemas.openxmlformats.org/drawingml/2006/main"/>
-          <a:p xmlns:a="http://schemas.openxmlformats.org/drawingml/2006/main">
-            <a:pPr algn="ctr">
-              <a:lnSpc>
-                <a:spcPct val="105000"/>
-              </a:lnSpc>
-              <a:buNone/>
-              <a:defRPr sz="1500" b="0" i="0">
-                <a:solidFill>
-                  <a:srgbClr val="243B53"/>
-                </a:solidFill>
-              </a:defRPr>
-            </a:pPr>
-            <a:r>
-              <a:rPr sz="1500" b="0" i="0">
-                <a:solidFill>
-                  <a:srgbClr val="243B53"/>
-                </a:solidFill>
-              </a:rPr>
-              <a:t>anchor = 3</a:t>
-            </a:r>
-          </a:p>
-          <a:p xmlns:a="http://schemas.openxmlformats.org/drawingml/2006/main">
-            <a:pPr algn="ctr">
-              <a:lnSpc>
-                <a:spcPct val="105000"/>
-              </a:lnSpc>
-              <a:buNone/>
-              <a:defRPr sz="1500" b="0" i="0">
-                <a:solidFill>
-                  <a:srgbClr val="243B53"/>
-                </a:solidFill>
-              </a:defRPr>
-            </a:pPr>
-            <a:r>
-              <a:rPr sz="1500" b="0" i="0">
-                <a:solidFill>
-                  <a:srgbClr val="243B53"/>
-                </a:solidFill>
-              </a:rPr>
-              <a:t>结果：[1, 2, 3, 4]</a:t>
-            </a:r>
-          </a:p>
-        </p:txBody>
-      </p:sp>
-      <p:sp>
-        <p:nvSpPr>
-          <p:cNvPr id="28" name="">
-            <a:extLst xmlns:a="http://schemas.openxmlformats.org/drawingml/2006/main">
-              <a:ext uri="{FF2B5EF4-FFF2-40B4-BE49-F238E27FC236}">
-                <a16:creationId xmlns:a16="http://schemas.microsoft.com/office/drawing/2014/main" id="{DFB12942-6C0D-4E81-A618-09D53DD743D3}"/>
-              </a:ext>
-            </a:extLst>
-          </p:cNvPr>
-          <p:cNvSpPr>
-            <a:spLocks xmlns:a="http://schemas.openxmlformats.org/drawingml/2006/main" noGrp="1"/>
-          </p:cNvSpPr>
-          <p:nvPr/>
-        </p:nvSpPr>
-        <p:spPr>
-          <a:xfrm xmlns:a="http://schemas.openxmlformats.org/drawingml/2006/main">
-            <a:off x="3714750" y="5314950"/>
-            <a:ext cx="7239000" cy="457200"/>
-          </a:xfrm>
-          <a:prstGeom xmlns:a="http://schemas.openxmlformats.org/drawingml/2006/main" prst="rect">
-            <a:avLst/>
-          </a:prstGeom>
-          <a:noFill xmlns:a="http://schemas.openxmlformats.org/drawingml/2006/main"/>
-          <a:ln xmlns:a="http://schemas.openxmlformats.org/drawingml/2006/main" w="0">
-            <a:noFill/>
-            <a:prstDash val="solid"/>
-          </a:ln>
-        </p:spPr>
-        <p:txBody>
-          <a:bodyPr xmlns:a="http://schemas.openxmlformats.org/drawingml/2006/main" wrap="square" lIns="38100" tIns="19050" rIns="38100" bIns="19050" anchor="ctr">
-            <a:normAutofit fontScale="100000"/>
-          </a:bodyPr>
-          <a:lstStyle xmlns:a="http://schemas.openxmlformats.org/drawingml/2006/main"/>
-          <a:p xmlns:a="http://schemas.openxmlformats.org/drawingml/2006/main">
-            <a:pPr algn="ctr">
-              <a:lnSpc>
-                <a:spcPct val="105000"/>
-              </a:lnSpc>
-              <a:buNone/>
-              <a:defRPr sz="1875" b="1" i="0">
-                <a:solidFill>
-                  <a:srgbClr val="2A9D8F"/>
-                </a:solidFill>
-              </a:defRPr>
-            </a:pPr>
-            <a:r>
-              <a:rPr sz="1875" b="1" i="0">
-                <a:solidFill>
-                  <a:srgbClr val="2A9D8F"/>
-                </a:solidFill>
-              </a:rPr>
-              <a:t>可执行规则：选择几何极值。</a:t>
-            </a:r>
-          </a:p>
-        </p:txBody>
-      </p:sp>
-      <p:sp>
-        <p:nvSpPr>
-          <p:cNvPr id="29" name="">
-            <a:extLst xmlns:a="http://schemas.openxmlformats.org/drawingml/2006/main">
-              <a:ext uri="{FF2B5EF4-FFF2-40B4-BE49-F238E27FC236}">
-                <a16:creationId xmlns:a16="http://schemas.microsoft.com/office/drawing/2014/main" id="{F3DD4F1F-0A53-4E77-A0A9-F8FD773DB138}"/>
-              </a:ext>
-            </a:extLst>
-          </p:cNvPr>
-          <p:cNvSpPr>
-            <a:spLocks xmlns:a="http://schemas.openxmlformats.org/drawingml/2006/main" noGrp="1"/>
-          </p:cNvSpPr>
-          <p:nvPr/>
-        </p:nvSpPr>
-        <p:spPr>
-          <a:xfrm xmlns:a="http://schemas.openxmlformats.org/drawingml/2006/main">
-            <a:off x="3714750" y="5810250"/>
-            <a:ext cx="7239000" cy="323850"/>
-          </a:xfrm>
-          <a:prstGeom xmlns:a="http://schemas.openxmlformats.org/drawingml/2006/main" prst="rect">
-            <a:avLst/>
-          </a:prstGeom>
-          <a:noFill xmlns:a="http://schemas.openxmlformats.org/drawingml/2006/main"/>
-          <a:ln xmlns:a="http://schemas.openxmlformats.org/drawingml/2006/main" w="0">
-            <a:noFill/>
-            <a:prstDash val="solid"/>
-          </a:ln>
-        </p:spPr>
-        <p:txBody>
-          <a:bodyPr xmlns:a="http://schemas.openxmlformats.org/drawingml/2006/main" wrap="square" lIns="38100" tIns="19050" rIns="38100" bIns="19050" anchor="ctr">
-            <a:normAutofit fontScale="100000"/>
-          </a:bodyPr>
-          <a:lstStyle xmlns:a="http://schemas.openxmlformats.org/drawingml/2006/main"/>
-          <a:p xmlns:a="http://schemas.openxmlformats.org/drawingml/2006/main">
-            <a:pPr algn="ctr">
-              <a:lnSpc>
-                <a:spcPct val="105000"/>
-              </a:lnSpc>
-              <a:buNone/>
-              <a:defRPr sz="1275" b="0" i="0">
-                <a:solidFill>
                   <a:srgbClr val="52606D"/>
                 </a:solidFill>
-              </a:defRPr>
-            </a:pPr>
-            <a:r>
-              <a:rPr sz="1275" b="0" i="0">
-                <a:solidFill>
-                  <a:srgbClr val="52606D"/>
-                </a:solidFill>
-              </a:rPr>
-              <a:t>将其记录为重构澄清，而不是 1990 年论文的逐字规则。</a:t>
+              </a:rPr>
+              <a:t>这是可执行化澄清，非 1990 年论文的逐字规则。存储的曲线顺序 ≠ 几何顺序。</a:t>
             </a:r>
           </a:p>
         </p:txBody>

--- a/presentations/progress_report/Jordan_Sorting_Progress_Report_ZH.pptx
+++ b/presentations/progress_report/Jordan_Sorting_Progress_Report_ZH.pptx
@@ -2202,7 +2202,7 @@
           <a:lstStyle xmlns:a="http://schemas.openxmlformats.org/drawingml/2006/main"/>
           <a:p xmlns:a="http://schemas.openxmlformats.org/drawingml/2006/main">
             <a:r>
-              <a:t>初始化只做一次。Core 仅将前三个点按 x 坐标排序，建立 S₃ 和 upper、lower pair family，不使用 oracle 的排序答案。点的编号和 pair 的端点存储仍保持曲线顺序。从第 4 个点开始，每轮加入一个新点。Step 1、2 查看旧端点 zᵢ₋₁ 在维护列表中的邻居，不是直接取前一个曲线点 zᵢ₋₂，也不是先查新点的排序位置。它们分别找到 predecessor boundary Aᵢ 和 successor boundary Bᵢ。Step 3(a) 插入新 pair；Step 3(b) 在需要时拆分 sibling list 并转移 ownership；Step 3(c) 将新点插入有序列表。Increasing 时，Step 3(a) 使用 Aᵢ，3(b) 使用 Bᵢ。Decreasing 交换这两者的用途，并镜像左右操作；Step 1、2 仍分别返回 Aᵢ、Bᵢ。论文明确描述 increasing 情形；decreasing 来自对称重构，anchor 的细节属于可执行化澄清。这三个类别并不分别对应某个步骤。接下来两页解释 anchor 的澄清。</a:t>
+              <a:t>我们同时维护两种信息：已处理点的排序，以及 pairs 之间的父子关系。初始化只做一次，仅将前三个点按 x 坐标排序，这个有序列表称为 S₃。同时建立 upper、lower pair family，不使用 oracle 的排序答案。点的编号和 pair 的端点存储仍保持曲线顺序。从第 4 个点开始，每轮加入一个新点。我们从沿曲线的前一个点出发。Step 1、2 利用它在有序列表中的邻居，分别找到 predecessor boundary Aᵢ 和 successor boundary Bᵢ。Step 3(a) 将新 pair 放入 family 结构，并确定它的 parent。Step 3(b) 在需要时拆分 sibling list，让新包含的旧 pairs 成为新 pair 的 children。到这时，Step 3(c) 才根据维护的状态选择 anchor，将新点插入有序列表。Increasing 时，Step 3(a) 使用 Aᵢ，3(b) 使用 Bᵢ。Decreasing 交换两者的用途，并镜像左右操作；Step 1、2 仍分别返回 Aᵢ、Bᵢ。论文描述 increasing 情形；decreasing 来自对称重构，anchor 的细节属于可执行化澄清。这些类别说明重构的依据，并不分别对应某个步骤。</a:t>
             </a:r>
           </a:p>
           <a:p xmlns:a="http://schemas.openxmlformats.org/drawingml/2006/main">

--- a/presentations/progress_report/Jordan_Sorting_Progress_Report_ZH.pptx
+++ b/presentations/progress_report/Jordan_Sorting_Progress_Report_ZH.pptx
@@ -2297,12 +2297,32 @@
           <a:lstStyle xmlns:a="http://schemas.openxmlformats.org/drawingml/2006/main"/>
           <a:p xmlns:a="http://schemas.openxmlformats.org/drawingml/2006/main">
             <a:r>
-              <a:t>输入是 (3,2,1,4)。初始化只将前三个值排成 [1,2,3]，对应编号仍是 [z₃,z₂,z₁]。现在插入值为 4 的 z₄。新 upper pair P₄ 的端点是 (1,4)。Step 3(b) 后，它获得 child P₂；P₂ 仍按曲线顺序存为 (3,2)。本次从 1 到 4，因此是 increasing。我们取 child 的几何右端点作为 anchor，也就是要紧接着插入 4 的已有点。若取第二个存储端点 2，会得到 [1,2,4,3]；取几何右端点 3，则得到 [1,2,3,4]。错误顺序只是示意。存储的曲线顺序不等于几何顺序。这属于可执行化澄清，1990 年论文并未以这一具体形式表述该规则。</a:t>
-            </a:r>
-          </a:p>
-          <a:p xmlns:a="http://schemas.openxmlformats.org/drawingml/2006/main">
-            <a:r>
-              <a:t/>
+              <a:t>输入是 (3,2,1,4)。初始化后，有序列表是 [1,2,3]，但点的编号仍然按照曲线访问顺序保留。</a:t>
+            </a:r>
+          </a:p>
+          <a:p xmlns:a="http://schemas.openxmlformats.org/drawingml/2006/main">
+            <a:r>
+              <a:t>现在插入第四个点，也就是 4。Step 3(b) 完成后，新 upper pair P₄ 的端点是 (1,4)，它有一个 child：P₂，按曲线顺序存为 (3,2)。</a:t>
+            </a:r>
+          </a:p>
+          <a:p xmlns:a="http://schemas.openxmlformats.org/drawingml/2006/main">
+            <a:r>
+              <a:t>本次从 1 到 4，因此是 increasing。Child 的几何区间 [2,3] 位于新 pair 的区间 [1,4] 内。因此，4 必须排在 child 的两个端点之后。Child 的右边界是 3，所以我们选择 3 作为 anchor。</a:t>
+            </a:r>
+          </a:p>
+          <a:p xmlns:a="http://schemas.openxmlformats.org/drawingml/2006/main">
+            <a:r>
+              <a:t>如果把 4 紧挨着插在 2 后面，它就会落在列表中 child 的两个端点之间，得到 [1,2,4,3]。插在 3 后面，才得到 [1,2,3,4]。</a:t>
+            </a:r>
+          </a:p>
+          <a:p xmlns:a="http://schemas.openxmlformats.org/drawingml/2006/main">
+            <a:r>
+              <a:t>我们也可以把端点按从左到右的顺序存储，前提是保留它们的曲线身份信息。真正的错误，是把“曲线顺序中的第二个端点”当成“几何右端点”。</a:t>
+            </a:r>
+          </a:p>
+          <a:p xmlns:a="http://schemas.openxmlformats.org/drawingml/2006/main">
+            <a:r>
+              <a:t>我将这一明确选择记录为可执行化澄清，而不是 1990 年论文的逐字规则。</a:t>
             </a:r>
           </a:p>
           <a:p xmlns:a="http://schemas.openxmlformats.org/drawingml/2006/main">

--- a/presentations/progress_report/Jordan_Sorting_Progress_Report_ZH.pptx
+++ b/presentations/progress_report/Jordan_Sorting_Progress_Report_ZH.pptx
@@ -952,7 +952,7 @@
           <a:lstStyle xmlns:a="http://schemas.openxmlformats.org/drawingml/2006/main"/>
           <a:p xmlns:a="http://schemas.openxmlformats.org/drawingml/2006/main">
             <a:r>
-              <a:t>对每个 case，我用 paper 调用时间的中位数除以 reference 调用时间的中位数。然后对每个规模下的这些比值取中位数。比值在 n 为 32 时是 3.226，64 时是 2.202，128 时是 1.351，256 时是 0.851，512 时是 0.567。因此，128 时比值大于 1，256 时小于 1。在这些计时范围下，两个较大规模的 paper 调用耗时更少。由于计时范围不同，这不能证明端到端加速。Python sort 在每个测试规模上都有最低的调用时间中位数，见 Backup A。</a:t>
+              <a:t>对每个 exact case，我用 20 次 paper 调用耗时的中位数除以 20 次 reference 调用耗时的中位数。然后对同一输入规模下的这些比值取中位数，每个 case 权重相同。</a:t>
             </a:r>
           </a:p>
           <a:p xmlns:a="http://schemas.openxmlformats.org/drawingml/2006/main">
@@ -962,6 +962,56 @@
           </a:p>
           <a:p xmlns:a="http://schemas.openxmlformats.org/drawingml/2006/main">
             <a:r>
+              <a:t>比值从 32 个点时的 3.226，下降到 64 时的 2.202、128 时的 1.351、256 时的 0.851，以及 512 时的 0.567。128 时比值仍大于 1，256 时已经小于 1。</a:t>
+            </a:r>
+          </a:p>
+          <a:p xmlns:a="http://schemas.openxmlformats.org/drawingml/2006/main">
+            <a:r>
+              <a:t/>
+            </a:r>
+          </a:p>
+          <a:p xmlns:a="http://schemas.openxmlformats.org/drawingml/2006/main">
+            <a:r>
+              <a:t>在已报告的规模级汇总中，两种调用的中位耗时都随这些测试规模增加，但 reference 的耗时增长更快。</a:t>
+            </a:r>
+          </a:p>
+          <a:p xmlns:a="http://schemas.openxmlformats.org/drawingml/2006/main">
+            <a:r>
+              <a:t/>
+            </a:r>
+          </a:p>
+          <a:p xmlns:a="http://schemas.openxmlformats.org/drawingml/2006/main">
+            <a:r>
+              <a:t>一个可能的贡献因素是 oracle 的区间检查。对于这些有效输入，它会在每个 family 内逐对比较所有区间。这些检查的次数呈二次增长。这项工作包含在 reference 计时内，而 paper 输入在计时前完成认证。Paper 的初始化、Step 1 至 3 和输出恢复仍在计时内。</a:t>
+            </a:r>
+          </a:p>
+          <a:p xmlns:a="http://schemas.openxmlformats.org/drawingml/2006/main">
+            <a:r>
+              <a:t/>
+            </a:r>
+          </a:p>
+          <a:p xmlns:a="http://schemas.openxmlformats.org/drawingml/2006/main">
+            <a:r>
+              <a:t>当前测量没有单独隔离这项成本，因此尚未确认它对该趋势的贡献。</a:t>
+            </a:r>
+          </a:p>
+          <a:p xmlns:a="http://schemas.openxmlformats.org/drawingml/2006/main">
+            <a:r>
+              <a:t/>
+            </a:r>
+          </a:p>
+          <a:p xmlns:a="http://schemas.openxmlformats.org/drawingml/2006/main">
+            <a:r>
+              <a:t>这些是不同的计时范围，不能视为同口径的端到端加速，也不是线性时间的证据。Python sort 在每个测试规模上仍有最低的调用时间中位数。</a:t>
+            </a:r>
+          </a:p>
+          <a:p xmlns:a="http://schemas.openxmlformats.org/drawingml/2006/main">
+            <a:r>
+              <a:t/>
+            </a:r>
+          </a:p>
+          <a:p xmlns:a="http://schemas.openxmlformats.org/drawingml/2006/main">
+            <a:r>
               <a:t>[Sources]</a:t>
             </a:r>
           </a:p>
@@ -978,6 +1028,51 @@
           <a:p xmlns:a="http://schemas.openxmlformats.org/drawingml/2006/main">
             <a:r>
               <a:t>- docs/analysis/week12_runtime_ratios.csv</a:t>
+            </a:r>
+          </a:p>
+          <a:p xmlns:a="http://schemas.openxmlformats.org/drawingml/2006/main">
+            <a:r>
+              <a:t>- thesis/chapters/methodology.tex</a:t>
+            </a:r>
+          </a:p>
+          <a:p xmlns:a="http://schemas.openxmlformats.org/drawingml/2006/main">
+            <a:r>
+              <a:t>- results/runs/week12_formal_sorting_v1__run001/config.json</a:t>
+            </a:r>
+          </a:p>
+          <a:p xmlns:a="http://schemas.openxmlformats.org/drawingml/2006/main">
+            <a:r>
+              <a:t>- results/runs/week12_formal_sorting_v1__run001/manifest.json (source_commit: 98868b1b705f6d5f22404ee8ad7b88ad7a834f52; all source-code mechanisms below checked at this revision)</a:t>
+            </a:r>
+          </a:p>
+          <a:p xmlns:a="http://schemas.openxmlformats.org/drawingml/2006/main">
+            <a:r>
+              <a:t>- src/oracle.py</a:t>
+            </a:r>
+          </a:p>
+          <a:p xmlns:a="http://schemas.openxmlformats.org/drawingml/2006/main">
+            <a:r>
+              <a:t>- src/simplified_jordan.py</a:t>
+            </a:r>
+          </a:p>
+          <a:p xmlns:a="http://schemas.openxmlformats.org/drawingml/2006/main">
+            <a:r>
+              <a:t>- experiments/run_week11_pilot.py (run_timed_algorithm, _time_once_algorithm)</a:t>
+            </a:r>
+          </a:p>
+          <a:p xmlns:a="http://schemas.openxmlformats.org/drawingml/2006/main">
+            <a:r>
+              <a:t>- experiments/run_week12_formal_sorting.py (build_cases_and_audits, make_raw_rows)</a:t>
+            </a:r>
+          </a:p>
+          <a:p xmlns:a="http://schemas.openxmlformats.org/drawingml/2006/main">
+            <a:r>
+              <a:t>- src/paper_jordan_sort.py</a:t>
+            </a:r>
+          </a:p>
+          <a:p xmlns:a="http://schemas.openxmlformats.org/drawingml/2006/main">
+            <a:r>
+              <a:t>- src/paper_jordan.py</a:t>
             </a:r>
           </a:p>
         </p:txBody>

--- a/presentations/progress_report/Jordan_Sorting_Progress_Report_ZH.pptx
+++ b/presentations/progress_report/Jordan_Sorting_Progress_Report_ZH.pptx
@@ -455,16 +455,21 @@
         <p:txBody>
           <a:bodyPr xmlns:a="http://schemas.openxmlformats.org/drawingml/2006/main"/>
           <a:lstStyle xmlns:a="http://schemas.openxmlformats.org/drawingml/2006/main"/>
-          <a:p xmlns:a="http://schemas.openxmlformats.org/drawingml/2006/main">
-            <a:r>
-              <a:t>大家好。这次汇报介绍我的硕士论文进展，主题是使用普通 Python list 对 Simplified Jordan Sorting 进行可执行重构。上次汇报聚焦静态结构，包括 rank interval、upper 和 lower pair family、family tree，以及 oracle 支持的 reference。核心问题是，论文中的动态过程能否维护自身状态，并从中恢复输出。我将重点解释两处重构决定，再介绍验证检查和正式实验的运行时间结果。</a:t>
-            </a:r>
-          </a:p>
-          <a:p xmlns:a="http://schemas.openxmlformats.org/drawingml/2006/main">
-            <a:r>
-              <a:t/>
-            </a:r>
-          </a:p>
+          <ns0:p xmlns:ns0="http://schemas.openxmlformats.org/drawingml/2006/main">
+            <ns0:r>
+              <ns0:t>大家好。这次汇报介绍我的硕士论文进展，主题是使用普通 Python list 对 Simplified Jordan Sorting 进行可执行重构。输入按沿曲线遇到交点的顺序给出；任务是恢复这些点沿横坐标轴的顺序。上次汇报聚焦静态结构，包括 rank interval、upper 和 lower pair family、family tree，以及 oracle 支持的 reference。核心问题是，论文中的动态过程能否维护自身状态，并从中恢复输出。我将重点解释两处重构决定，再介绍验证检查和正式实验的运行时间结果。</ns0:t>
+            </ns0:r>
+          </ns0:p>
+          <ns0:p xmlns:ns0="http://schemas.openxmlformats.org/drawingml/2006/main">
+            <ns0:r>
+              <ns0:t/>
+            </ns0:r>
+          </ns0:p>
+          <ns0:p xmlns:ns0="http://schemas.openxmlformats.org/drawingml/2006/main">
+            <ns0:r>
+              <ns0:t/>
+            </ns0:r>
+          </ns0:p>
           <a:p xmlns:a="http://schemas.openxmlformats.org/drawingml/2006/main">
             <a:r>
               <a:t>[Sources]</a:t>
@@ -550,16 +555,21 @@
         <p:txBody>
           <a:bodyPr xmlns:a="http://schemas.openxmlformats.org/drawingml/2006/main"/>
           <a:lstStyle xmlns:a="http://schemas.openxmlformats.org/drawingml/2006/main"/>
-          <a:p xmlns:a="http://schemas.openxmlformats.org/drawingml/2006/main">
-            <a:r>
-              <a:t>每个有限 pair 只有一个 parent 和一个 sibling-list owner。拆分前，原 owner 控制 retained 和 acquired 两部分。拆分后，原 owner 保留 retained segment，新 owner 接收 acquired segment。两个非空侧都可能得到新 list，但只有 acquired segment 改变 parent。Split 和 transfer 构成一个 transaction：保存受影响状态，执行更新，再检查 split boundary、ownership 和局部后置条件。若检查失败，rollback 恢复 registry、ownership link 和 list ID。维护状态还包括已处理前缀的排序结果，以及两类 pair family。普通列表会产生扫描、复制、切片和 ownership rebinding 成本。这些正确性检查不能建立历史线性时间分析所需的更新界。</a:t>
-            </a:r>
-          </a:p>
-          <a:p xmlns:a="http://schemas.openxmlformats.org/drawingml/2006/main">
-            <a:r>
-              <a:t/>
-            </a:r>
-          </a:p>
+          <ns0:p xmlns:ns0="http://schemas.openxmlformats.org/drawingml/2006/main">
+            <ns0:r>
+              <ns0:t>这里的 ownership 指一张 children list 归哪个 parent pair 管理。当 children 转移时，parent 记录和列表归属必须一起保持一致。拆分前，原 parent 拥有两个片段。拆分后，它保留 retained segment，新 parent 接收 acquired segment。两个非空侧都可能得到新 list，但只有 acquired segment 改变 parent。Split 和 transfer 构成一个 transaction：保存受影响状态，执行更新，再检查边界和 ownership。若检查失败，rollback 恢复之前的状态。普通列表会产生扫描、复制、切片和 ownership rebinding 成本。这些检查不能建立历史线性时间分析所需的更新界。</ns0:t>
+            </ns0:r>
+          </ns0:p>
+          <ns0:p xmlns:ns0="http://schemas.openxmlformats.org/drawingml/2006/main">
+            <ns0:r>
+              <ns0:t/>
+            </ns0:r>
+          </ns0:p>
+          <ns0:p xmlns:ns0="http://schemas.openxmlformats.org/drawingml/2006/main">
+            <ns0:r>
+              <ns0:t/>
+            </ns0:r>
+          </ns0:p>
           <a:p xmlns:a="http://schemas.openxmlformats.org/drawingml/2006/main">
             <a:r>
               <a:t>[Sources]</a:t>
@@ -645,16 +655,21 @@
         <p:txBody>
           <a:bodyPr xmlns:a="http://schemas.openxmlformats.org/drawingml/2006/main"/>
           <a:lstStyle xmlns:a="http://schemas.openxmlformats.org/drawingml/2006/main"/>
-          <a:p xmlns:a="http://schemas.openxmlformats.org/drawingml/2006/main">
-            <a:r>
-              <a:t>Focused regression case 覆盖已知边界条件。有界穷举验证覆盖 n 不超过 8 的全部 2,074 个 oracle-valid permutation。Checked-state audit 检查 parent link、ownership、sibling list 与恢复输出。确定性重放比较同一 core 多次运行后的状态，并不是第二套独立实现。重放检查的是同一过程是否得到一致状态。另有实验检查，将保存的输出与固定设置及重算汇总比较。这些有限证据支持已评估用例，但不是对所有 Jordan sequence 的数学证明。</a:t>
-            </a:r>
-          </a:p>
-          <a:p xmlns:a="http://schemas.openxmlformats.org/drawingml/2006/main">
-            <a:r>
-              <a:t/>
-            </a:r>
-          </a:p>
+          <ns0:p xmlns:ns0="http://schemas.openxmlformats.org/drawingml/2006/main">
+            <ns0:r>
+              <ns0:t>左侧检查实现及其内部状态；右侧检查保存的实验记录，并重新计算汇总。左侧是互补的检查方式，包括重点回归用例、n 不超过 8 的全部 2,074 个 oracle-valid permutation，以及对 parent link、ownership、sibling list 和恢复输出的 checked-state audit。确定性重放比较同一 core 多次运行后的状态，并不是第二套独立实现。右侧将归档记录与固定实验设置及重算汇总核对。这些有限证据不是对所有 Jordan sequence 的数学证明。</ns0:t>
+            </ns0:r>
+          </ns0:p>
+          <ns0:p xmlns:ns0="http://schemas.openxmlformats.org/drawingml/2006/main">
+            <ns0:r>
+              <ns0:t/>
+            </ns0:r>
+          </ns0:p>
+          <ns0:p xmlns:ns0="http://schemas.openxmlformats.org/drawingml/2006/main">
+            <ns0:r>
+              <ns0:t/>
+            </ns0:r>
+          </ns0:p>
           <a:p xmlns:a="http://schemas.openxmlformats.org/drawingml/2006/main">
             <a:r>
               <a:t>[Sources]</a:t>
@@ -745,16 +760,21 @@
         <p:txBody>
           <a:bodyPr xmlns:a="http://schemas.openxmlformats.org/drawingml/2006/main"/>
           <a:lstStyle xmlns:a="http://schemas.openxmlformats.org/drawingml/2006/main"/>
-          <a:p xmlns:a="http://schemas.openxmlformats.org/drawingml/2006/main">
-            <a:r>
-              <a:t>实验使用 5 个规模，每个规模 12 个 exact case，并比较 3 个算法。每个 case-algorithm cell 包含 5 次 warm-up 和 20 次 measured call，共得到 3,600 条测量记录。这 20 次调用重复同一个 exact case，并非 20 个独立输入。每次调用获得包含相同值的 fresh list。算法位置轮转，避免某个算法总是先运行。Paper 的认证与 checked-state audit 在计时前完成。Paper 计时包含 minimal 模式下的初始化、Step 1 至 3，以及从维护顺序恢复输出。输出比较发生在计时后。Python 计时覆盖排序调用；reference 计时覆盖完整的 oracle-backed pipeline。这是三种不同的计时范围。 原实验测量了三种实现；接下来的运行时间页重点展示 paper core 和 Python sort。</a:t>
-            </a:r>
-          </a:p>
-          <a:p xmlns:a="http://schemas.openxmlformats.org/drawingml/2006/main">
-            <a:r>
-              <a:t/>
-            </a:r>
-          </a:p>
+          <ns0:p xmlns:ns0="http://schemas.openxmlformats.org/drawingml/2006/main">
+            <ns0:r>
+              <ns0:t>实验测试从 32 到 512 个点的 5 个规模。每个规模有 1 个 flat、1 个 nested 和 10 个逐步生成的有效输入，共 60 个。Flat 输入递增；nested 输入交替取剩余值中的最小值和最大值。Incremental 生成使用固定种子并检查有效性。每种算法对每个输入预热 5 次、测量 20 次，共 3,600 条记录。重复调用使用 fresh list，算法位置轮转。认证及每个 case 一次的 checked-state audit 位于 paper 计时前。Minimal 模式对全部点运行相同核心，省略详细 trace 和部分诊断检查。Paper 计时包含初始化、Step 1 至 3 和输出恢复。输出比较在计时后。Python 计时覆盖排序；reference 计时覆盖完整 oracle-backed pipeline。运行时间页展示 paper 和 Python。</ns0:t>
+            </ns0:r>
+          </ns0:p>
+          <ns0:p xmlns:ns0="http://schemas.openxmlformats.org/drawingml/2006/main">
+            <ns0:r>
+              <ns0:t/>
+            </ns0:r>
+          </ns0:p>
+          <ns0:p xmlns:ns0="http://schemas.openxmlformats.org/drawingml/2006/main">
+            <ns0:r>
+              <ns0:t/>
+            </ns0:r>
+          </ns0:p>
           <a:p xmlns:a="http://schemas.openxmlformats.org/drawingml/2006/main">
             <a:r>
               <a:t>[Sources]</a:t>
@@ -845,16 +865,21 @@
         <p:txBody>
           <a:bodyPr xmlns:a="http://schemas.openxmlformats.org/drawingml/2006/main"/>
           <a:lstStyle xmlns:a="http://schemas.openxmlformats.org/drawingml/2006/main"/>
-          <a:p xmlns:a="http://schemas.openxmlformats.org/drawingml/2006/main">
-            <a:r>
-              <a:t>全部 60 个 case 均通过认证，并各通过一次 checked-state audit。每次 measured call 都返回 expected output，没有记录正确性错误。3,600 条测量记录携带各自的 case-level audit 结果，不代表进行了 3,600 次独立 audit。这些结果仅覆盖本次测试的有效用例。</a:t>
-            </a:r>
-          </a:p>
-          <a:p xmlns:a="http://schemas.openxmlformats.org/drawingml/2006/main">
-            <a:r>
-              <a:t/>
-            </a:r>
-          </a:p>
+          <ns0:p xmlns:ns0="http://schemas.openxmlformats.org/drawingml/2006/main">
+            <ns0:r>
+              <ns0:t>本次运行时间实验中的 60 个 case 均通过认证，并各通过一次 checked-state audit。每次 measured call 都返回 expected output，没有记录正确性错误。3,600 条测量记录携带各自的 case-level audit 结果，不代表进行了 3,600 次独立 audit。这些结果仅覆盖本次测试的有效用例。</ns0:t>
+            </ns0:r>
+          </ns0:p>
+          <ns0:p xmlns:ns0="http://schemas.openxmlformats.org/drawingml/2006/main">
+            <ns0:r>
+              <ns0:t/>
+            </ns0:r>
+          </ns0:p>
+          <ns0:p xmlns:ns0="http://schemas.openxmlformats.org/drawingml/2006/main">
+            <ns0:r>
+              <ns0:t/>
+            </ns0:r>
+          </ns0:p>
           <a:p xmlns:a="http://schemas.openxmlformats.org/drawingml/2006/main">
             <a:r>
               <a:t>[Sources]</a:t>
@@ -1105,16 +1130,21 @@
         <p:txBody>
           <a:bodyPr xmlns:a="http://schemas.openxmlformats.org/drawingml/2006/main"/>
           <a:lstStyle xmlns:a="http://schemas.openxmlformats.org/drawingml/2006/main"/>
-          <a:p xmlns:a="http://schemas.openxmlformats.org/drawingml/2006/main">
-            <a:r>
-              <a:t>当前证据支持一个从维护状态恢复输出的可执行普通列表重构，并在已评估用例上得到正确结果。运行时间趋势描述的是当前实现及其计时范围。普通列表不构成线性时间实现，五个测试规模也不能确定渐近复杂度。本实验没有评估 recognition。</a:t>
-            </a:r>
-          </a:p>
-          <a:p xmlns:a="http://schemas.openxmlformats.org/drawingml/2006/main">
-            <a:r>
-              <a:t/>
-            </a:r>
-          </a:p>
+          <ns0:p xmlns:ns0="http://schemas.openxmlformats.org/drawingml/2006/main">
+            <ns0:r>
+              <ns0:t>当前证据支持一个从维护状态恢复输出的可执行普通列表重构，并在运行时间实验中的 60 个用例上得到正确结果。运行时间趋势描述的是当前实现及其计时范围。普通列表不构成线性时间实现，五个测试规模也不能确定渐近复杂度。本实验没有评估 recognition。</ns0:t>
+            </ns0:r>
+          </ns0:p>
+          <ns0:p xmlns:ns0="http://schemas.openxmlformats.org/drawingml/2006/main">
+            <ns0:r>
+              <ns0:t/>
+            </ns0:r>
+          </ns0:p>
+          <ns0:p xmlns:ns0="http://schemas.openxmlformats.org/drawingml/2006/main">
+            <ns0:r>
+              <ns0:t/>
+            </ns0:r>
+          </ns0:p>
           <a:p xmlns:a="http://schemas.openxmlformats.org/drawingml/2006/main">
             <a:r>
               <a:t>[Sources]</a:t>
@@ -1600,16 +1630,21 @@
         <p:txBody>
           <a:bodyPr xmlns:a="http://schemas.openxmlformats.org/drawingml/2006/main"/>
           <a:lstStyle xmlns:a="http://schemas.openxmlformats.org/drawingml/2006/main"/>
-          <a:p xmlns:a="http://schemas.openxmlformats.org/drawingml/2006/main">
-            <a:r>
-              <a:t>RQ1 是主要技术问题：普通列表重构能否在认证后的有效输入上，从维护状态恢复正确排序？RQ2 比较 paper call、Python sort 和完整 reference pipeline 在各自计时范围下的表现。RQ3 探索输入结构、checked operation counter 与运行时间之间的描述性关系，不作因果解释。</a:t>
-            </a:r>
-          </a:p>
-          <a:p xmlns:a="http://schemas.openxmlformats.org/drawingml/2006/main">
-            <a:r>
-              <a:t/>
-            </a:r>
-          </a:p>
+          <ns0:p xmlns:ns0="http://schemas.openxmlformats.org/drawingml/2006/main">
+            <ns0:r>
+              <ns0:t>RQ1 是主要技术问题：普通列表重构能否在认证后的有效输入上，从维护状态恢复正确排序？RQ2 比较 paper call、Python sort 和完整 reference pipeline 在各自计时范围下的表现。RQ3 探索输入结构、checked operation counter 与运行时间之间的描述性关系，不作因果解释。 本次汇报重点介绍 RQ1，以及 RQ2 中的运行时间基线；不展开结构与成本关系的分析。</ns0:t>
+            </ns0:r>
+          </ns0:p>
+          <ns0:p xmlns:ns0="http://schemas.openxmlformats.org/drawingml/2006/main">
+            <ns0:r>
+              <ns0:t/>
+            </ns0:r>
+          </ns0:p>
+          <ns0:p xmlns:ns0="http://schemas.openxmlformats.org/drawingml/2006/main">
+            <ns0:r>
+              <ns0:t/>
+            </ns0:r>
+          </ns0:p>
           <a:p xmlns:a="http://schemas.openxmlformats.org/drawingml/2006/main">
             <a:r>
               <a:t>[Sources]</a:t>
@@ -3736,19 +3771,19 @@
                 <a:spcPct val="105000"/>
               </a:lnSpc>
               <a:buNone/>
-              <a:defRPr sz="1875" b="1" i="0">
+              <a:defRPr sz="1575" b="1" i="0">
                 <a:solidFill>
                   <a:srgbClr val="102A43"/>
                 </a:solidFill>
               </a:defRPr>
             </a:pPr>
             <a:r>
-              <a:rPr sz="1875" b="1" i="0">
+              <a:rPr sz="1575" b="1" i="0">
                 <a:solidFill>
                   <a:srgbClr val="102A43"/>
                 </a:solidFill>
               </a:rPr>
-              <a:t>局部拆分与 ownership 转移</a:t>
+              <a:t>Owner：拥有这张 children list 的 parent pair</a:t>
             </a:r>
           </a:p>
         </p:txBody>
@@ -5154,7 +5189,7 @@
                   <a:srgbClr val="243B53"/>
                 </a:solidFill>
               </a:rPr>
-              <a:t>每个有限 pair 仅有一个 sibling-list owner</a:t>
+              <a:t>每个有限 pair 仅属于一张 sibling list</a:t>
             </a:r>
           </a:p>
         </p:txBody>
@@ -5714,8 +5749,8 @@
         </p:nvSpPr>
         <p:spPr>
           <a:xfrm xmlns:a="http://schemas.openxmlformats.org/drawingml/2006/main">
-            <a:off x="876300" y="1504950"/>
-            <a:ext cx="4286250" cy="266700"/>
+            <a:off x="838200" y="1390650"/>
+            <a:ext cx="4476750" cy="476250"/>
           </a:xfrm>
           <a:prstGeom xmlns:a="http://schemas.openxmlformats.org/drawingml/2006/main" prst="rect">
             <a:avLst/>
@@ -5737,19 +5772,19 @@
                 <a:spcPct val="105000"/>
               </a:lnSpc>
               <a:buNone/>
-              <a:defRPr sz="1125" b="1">
+              <a:defRPr sz="1575" b="1">
                 <a:solidFill>
                   <a:srgbClr val="187A84"/>
                 </a:solidFill>
               </a:defRPr>
             </a:pPr>
             <a:r>
-              <a:rPr sz="1125" b="1">
+              <a:rPr sz="1575" b="1">
                 <a:solidFill>
                   <a:srgbClr val="187A84"/>
                 </a:solidFill>
               </a:rPr>
-              <a:t>实现与状态验证</a:t>
+              <a:t>排序结果和内部状态是否正确？</a:t>
             </a:r>
           </a:p>
         </p:txBody>
@@ -5770,8 +5805,8 @@
         </p:nvSpPr>
         <p:spPr>
           <a:xfrm xmlns:a="http://schemas.openxmlformats.org/drawingml/2006/main">
-            <a:off x="6934200" y="1504950"/>
-            <a:ext cx="4286250" cy="266700"/>
+            <a:off x="6877050" y="1390650"/>
+            <a:ext cx="4476750" cy="628650"/>
           </a:xfrm>
           <a:prstGeom xmlns:a="http://schemas.openxmlformats.org/drawingml/2006/main" prst="rect">
             <a:avLst/>
@@ -5793,19 +5828,19 @@
                 <a:spcPct val="105000"/>
               </a:lnSpc>
               <a:buNone/>
-              <a:defRPr sz="1125" b="1">
+              <a:defRPr sz="1575" b="1">
                 <a:solidFill>
                   <a:srgbClr val="D36B4A"/>
                 </a:solidFill>
               </a:defRPr>
             </a:pPr>
             <a:r>
-              <a:rPr sz="1125" b="1">
+              <a:rPr sz="1575" b="1">
                 <a:solidFill>
                   <a:srgbClr val="D36B4A"/>
                 </a:solidFill>
               </a:rPr>
-              <a:t>实验输出检查</a:t>
+              <a:t>实验记录与汇总是否一致？</a:t>
             </a:r>
           </a:p>
         </p:txBody>
@@ -5903,62 +5938,6 @@
       </p:sp>
       <p:sp>
         <p:nvSpPr>
-          <p:cNvPr id="37" name="">
-            <a:extLst xmlns:a="http://schemas.openxmlformats.org/drawingml/2006/main">
-              <a:ext uri="{FF2B5EF4-FFF2-40B4-BE49-F238E27FC236}">
-                <a16:creationId xmlns:a16="http://schemas.microsoft.com/office/drawing/2014/main" id="{A5E089FC-ECB9-45AD-B60A-E8AE35983B42}"/>
-              </a:ext>
-            </a:extLst>
-          </p:cNvPr>
-          <p:cNvSpPr>
-            <a:spLocks xmlns:a="http://schemas.openxmlformats.org/drawingml/2006/main" noGrp="1"/>
-          </p:cNvSpPr>
-          <p:nvPr/>
-        </p:nvSpPr>
-        <p:spPr>
-          <a:xfrm xmlns:a="http://schemas.openxmlformats.org/drawingml/2006/main">
-            <a:off x="2724150" y="2505075"/>
-            <a:ext cx="685800" cy="266700"/>
-          </a:xfrm>
-          <a:prstGeom xmlns:a="http://schemas.openxmlformats.org/drawingml/2006/main" prst="rect">
-            <a:avLst/>
-          </a:prstGeom>
-          <a:noFill xmlns:a="http://schemas.openxmlformats.org/drawingml/2006/main"/>
-          <a:ln xmlns:a="http://schemas.openxmlformats.org/drawingml/2006/main" w="0">
-            <a:noFill/>
-            <a:prstDash val="solid"/>
-          </a:ln>
-        </p:spPr>
-        <p:txBody>
-          <a:bodyPr xmlns:a="http://schemas.openxmlformats.org/drawingml/2006/main" wrap="square" lIns="38100" tIns="19050" rIns="38100" bIns="19050" anchor="t">
-            <a:normAutofit fontScale="73260"/>
-          </a:bodyPr>
-          <a:lstStyle xmlns:a="http://schemas.openxmlformats.org/drawingml/2006/main"/>
-          <a:p xmlns:a="http://schemas.openxmlformats.org/drawingml/2006/main">
-            <a:pPr algn="ctr">
-              <a:lnSpc>
-                <a:spcPct val="105000"/>
-              </a:lnSpc>
-              <a:buNone/>
-              <a:defRPr sz="1950" b="1">
-                <a:solidFill>
-                  <a:srgbClr val="187A84"/>
-                </a:solidFill>
-              </a:defRPr>
-            </a:pPr>
-            <a:r>
-              <a:rPr sz="1950" b="1">
-                <a:solidFill>
-                  <a:srgbClr val="187A84"/>
-                </a:solidFill>
-              </a:rPr>
-              <a:t>↓</a:t>
-            </a:r>
-          </a:p>
-        </p:txBody>
-      </p:sp>
-      <p:sp>
-        <p:nvSpPr>
           <p:cNvPr id="38" name="">
             <a:extLst xmlns:a="http://schemas.openxmlformats.org/drawingml/2006/main">
               <a:ext uri="{FF2B5EF4-FFF2-40B4-BE49-F238E27FC236}">
@@ -6071,62 +6050,6 @@
       </p:sp>
       <p:sp>
         <p:nvSpPr>
-          <p:cNvPr id="40" name="">
-            <a:extLst xmlns:a="http://schemas.openxmlformats.org/drawingml/2006/main">
-              <a:ext uri="{FF2B5EF4-FFF2-40B4-BE49-F238E27FC236}">
-                <a16:creationId xmlns:a16="http://schemas.microsoft.com/office/drawing/2014/main" id="{4C879051-7F58-4C2E-936A-C894B4016B9A}"/>
-              </a:ext>
-            </a:extLst>
-          </p:cNvPr>
-          <p:cNvSpPr>
-            <a:spLocks xmlns:a="http://schemas.openxmlformats.org/drawingml/2006/main" noGrp="1"/>
-          </p:cNvSpPr>
-          <p:nvPr/>
-        </p:nvSpPr>
-        <p:spPr>
-          <a:xfrm xmlns:a="http://schemas.openxmlformats.org/drawingml/2006/main">
-            <a:off x="2724150" y="3552825"/>
-            <a:ext cx="685800" cy="266700"/>
-          </a:xfrm>
-          <a:prstGeom xmlns:a="http://schemas.openxmlformats.org/drawingml/2006/main" prst="rect">
-            <a:avLst/>
-          </a:prstGeom>
-          <a:noFill xmlns:a="http://schemas.openxmlformats.org/drawingml/2006/main"/>
-          <a:ln xmlns:a="http://schemas.openxmlformats.org/drawingml/2006/main" w="0">
-            <a:noFill/>
-            <a:prstDash val="solid"/>
-          </a:ln>
-        </p:spPr>
-        <p:txBody>
-          <a:bodyPr xmlns:a="http://schemas.openxmlformats.org/drawingml/2006/main" wrap="square" lIns="38100" tIns="19050" rIns="38100" bIns="19050" anchor="t">
-            <a:normAutofit fontScale="73260"/>
-          </a:bodyPr>
-          <a:lstStyle xmlns:a="http://schemas.openxmlformats.org/drawingml/2006/main"/>
-          <a:p xmlns:a="http://schemas.openxmlformats.org/drawingml/2006/main">
-            <a:pPr algn="ctr">
-              <a:lnSpc>
-                <a:spcPct val="105000"/>
-              </a:lnSpc>
-              <a:buNone/>
-              <a:defRPr sz="1950" b="1">
-                <a:solidFill>
-                  <a:srgbClr val="187A84"/>
-                </a:solidFill>
-              </a:defRPr>
-            </a:pPr>
-            <a:r>
-              <a:rPr sz="1950" b="1">
-                <a:solidFill>
-                  <a:srgbClr val="187A84"/>
-                </a:solidFill>
-              </a:rPr>
-              <a:t>↓</a:t>
-            </a:r>
-          </a:p>
-        </p:txBody>
-      </p:sp>
-      <p:sp>
-        <p:nvSpPr>
           <p:cNvPr id="41" name="">
             <a:extLst xmlns:a="http://schemas.openxmlformats.org/drawingml/2006/main">
               <a:ext uri="{FF2B5EF4-FFF2-40B4-BE49-F238E27FC236}">
@@ -6218,62 +6141,6 @@
       </p:sp>
       <p:sp>
         <p:nvSpPr>
-          <p:cNvPr id="43" name="">
-            <a:extLst xmlns:a="http://schemas.openxmlformats.org/drawingml/2006/main">
-              <a:ext uri="{FF2B5EF4-FFF2-40B4-BE49-F238E27FC236}">
-                <a16:creationId xmlns:a16="http://schemas.microsoft.com/office/drawing/2014/main" id="{5CF3D8E6-9A1D-4F82-A68D-EF77417A2316}"/>
-              </a:ext>
-            </a:extLst>
-          </p:cNvPr>
-          <p:cNvSpPr>
-            <a:spLocks xmlns:a="http://schemas.openxmlformats.org/drawingml/2006/main" noGrp="1"/>
-          </p:cNvSpPr>
-          <p:nvPr/>
-        </p:nvSpPr>
-        <p:spPr>
-          <a:xfrm xmlns:a="http://schemas.openxmlformats.org/drawingml/2006/main">
-            <a:off x="2724150" y="4410075"/>
-            <a:ext cx="685800" cy="266700"/>
-          </a:xfrm>
-          <a:prstGeom xmlns:a="http://schemas.openxmlformats.org/drawingml/2006/main" prst="rect">
-            <a:avLst/>
-          </a:prstGeom>
-          <a:noFill xmlns:a="http://schemas.openxmlformats.org/drawingml/2006/main"/>
-          <a:ln xmlns:a="http://schemas.openxmlformats.org/drawingml/2006/main" w="0">
-            <a:noFill/>
-            <a:prstDash val="solid"/>
-          </a:ln>
-        </p:spPr>
-        <p:txBody>
-          <a:bodyPr xmlns:a="http://schemas.openxmlformats.org/drawingml/2006/main" wrap="square" lIns="38100" tIns="19050" rIns="38100" bIns="19050" anchor="t">
-            <a:normAutofit fontScale="73260"/>
-          </a:bodyPr>
-          <a:lstStyle xmlns:a="http://schemas.openxmlformats.org/drawingml/2006/main"/>
-          <a:p xmlns:a="http://schemas.openxmlformats.org/drawingml/2006/main">
-            <a:pPr algn="ctr">
-              <a:lnSpc>
-                <a:spcPct val="105000"/>
-              </a:lnSpc>
-              <a:buNone/>
-              <a:defRPr sz="1950" b="1">
-                <a:solidFill>
-                  <a:srgbClr val="187A84"/>
-                </a:solidFill>
-              </a:defRPr>
-            </a:pPr>
-            <a:r>
-              <a:rPr sz="1950" b="1">
-                <a:solidFill>
-                  <a:srgbClr val="187A84"/>
-                </a:solidFill>
-              </a:rPr>
-              <a:t>↓</a:t>
-            </a:r>
-          </a:p>
-        </p:txBody>
-      </p:sp>
-      <p:sp>
-        <p:nvSpPr>
           <p:cNvPr id="44" name="">
             <a:extLst xmlns:a="http://schemas.openxmlformats.org/drawingml/2006/main">
               <a:ext uri="{FF2B5EF4-FFF2-40B4-BE49-F238E27FC236}">
@@ -6449,7 +6316,7 @@
                   <a:srgbClr val="243746"/>
                 </a:solidFill>
               </a:rPr>
-              <a:t>另一条验证路径确认保存的输出与固定实验设置及重算汇总一致。</a:t>
+              <a:t>将保存的实验记录与固定设置核对，并重新计算汇总。</a:t>
             </a:r>
           </a:p>
         </p:txBody>
@@ -6505,7 +6372,7 @@
                   <a:srgbClr val="5A6B78"/>
                 </a:solidFill>
               </a:rPr>
-              <a:t>依据归档实验输出进行核对</a:t>
+              <a:t>实验记录与汇总的一致性</a:t>
             </a:r>
           </a:p>
         </p:txBody>
@@ -6597,10 +6464,10 @@
       </p:grpSpPr>
       <p:sp>
         <p:nvSpPr>
-          <p:cNvPr id="42" name="">
-            <a:extLst xmlns:a="http://schemas.openxmlformats.org/drawingml/2006/main">
-              <a:ext uri="{FF2B5EF4-FFF2-40B4-BE49-F238E27FC236}">
-                <a16:creationId xmlns:a16="http://schemas.microsoft.com/office/drawing/2014/main" id="{7513CB37-DA34-4751-88AB-218061CF302E}"/>
+          <p:cNvPr id="28" name="">
+            <a:extLst xmlns:a="http://schemas.openxmlformats.org/drawingml/2006/main">
+              <a:ext uri="{FF2B5EF4-FFF2-40B4-BE49-F238E27FC236}">
+                <a16:creationId xmlns:a16="http://schemas.microsoft.com/office/drawing/2014/main" id="{23383C80-CDA8-49E6-A15A-F1AD3923D7F6}"/>
               </a:ext>
             </a:extLst>
           </p:cNvPr>
@@ -6656,7 +6523,7 @@
           <p:cNvPr id="2" name="">
             <a:extLst xmlns:a="http://schemas.openxmlformats.org/drawingml/2006/main">
               <a:ext uri="{FF2B5EF4-FFF2-40B4-BE49-F238E27FC236}">
-                <a16:creationId xmlns:a16="http://schemas.microsoft.com/office/drawing/2014/main" id="{85AEC88A-EFF0-43DA-A58E-B87C1A40FABC}"/>
+                <a16:creationId xmlns:a16="http://schemas.microsoft.com/office/drawing/2014/main" id="{908396AC-384D-40C2-8AB8-CE5B6A0E6EF2}"/>
               </a:ext>
             </a:extLst>
           </p:cNvPr>
@@ -6702,7 +6569,7 @@
                   <a:srgbClr val="102A43"/>
                 </a:solidFill>
               </a:rPr>
-              <a:t>正式实验将认证与 audit 保持在 paper 计时之外</a:t>
+              <a:t>运行时间实验：输入与测量</a:t>
             </a:r>
           </a:p>
         </p:txBody>
@@ -6712,7 +6579,7 @@
           <p:cNvPr id="3" name="">
             <a:extLst xmlns:a="http://schemas.openxmlformats.org/drawingml/2006/main">
               <a:ext uri="{FF2B5EF4-FFF2-40B4-BE49-F238E27FC236}">
-                <a16:creationId xmlns:a16="http://schemas.microsoft.com/office/drawing/2014/main" id="{32DAE531-EA4D-4099-BF4B-3F1A3F9B49C3}"/>
+                <a16:creationId xmlns:a16="http://schemas.microsoft.com/office/drawing/2014/main" id="{3B727B8F-FBD7-46CA-859F-7ED2D2F095CD}"/>
               </a:ext>
             </a:extLst>
           </p:cNvPr>
@@ -6743,7 +6610,7 @@
           <p:cNvPr id="4" name="">
             <a:extLst xmlns:a="http://schemas.openxmlformats.org/drawingml/2006/main">
               <a:ext uri="{FF2B5EF4-FFF2-40B4-BE49-F238E27FC236}">
-                <a16:creationId xmlns:a16="http://schemas.microsoft.com/office/drawing/2014/main" id="{F14BA395-BE0A-4CEB-AD20-FBD5B0CB1AF6}"/>
+                <a16:creationId xmlns:a16="http://schemas.microsoft.com/office/drawing/2014/main" id="{A7FFA0BE-E6A9-4BEC-802C-BE67A214B4ED}"/>
               </a:ext>
             </a:extLst>
           </p:cNvPr>
@@ -6774,7 +6641,7 @@
           <p:cNvPr id="5" name="">
             <a:extLst xmlns:a="http://schemas.openxmlformats.org/drawingml/2006/main">
               <a:ext uri="{FF2B5EF4-FFF2-40B4-BE49-F238E27FC236}">
-                <a16:creationId xmlns:a16="http://schemas.microsoft.com/office/drawing/2014/main" id="{6CB9FA0F-BB4F-4BCF-89E1-B0BD76709AAA}"/>
+                <a16:creationId xmlns:a16="http://schemas.microsoft.com/office/drawing/2014/main" id="{ED7A6DF9-59FB-49C8-B8DF-BC58A5F76A3A}"/>
               </a:ext>
             </a:extLst>
           </p:cNvPr>
@@ -6830,7 +6697,7 @@
           <p:cNvPr id="6" name="">
             <a:extLst xmlns:a="http://schemas.openxmlformats.org/drawingml/2006/main">
               <a:ext uri="{FF2B5EF4-FFF2-40B4-BE49-F238E27FC236}">
-                <a16:creationId xmlns:a16="http://schemas.microsoft.com/office/drawing/2014/main" id="{CB40EB72-74A2-4179-85E3-779D64FC2848}"/>
+                <a16:creationId xmlns:a16="http://schemas.microsoft.com/office/drawing/2014/main" id="{3D23FF19-1B5A-40E8-B641-9B025A762104}"/>
               </a:ext>
             </a:extLst>
           </p:cNvPr>
@@ -6886,1567 +6753,1173 @@
           <p:cNvPr id="7" name="">
             <a:extLst xmlns:a="http://schemas.openxmlformats.org/drawingml/2006/main">
               <a:ext uri="{FF2B5EF4-FFF2-40B4-BE49-F238E27FC236}">
-                <a16:creationId xmlns:a16="http://schemas.microsoft.com/office/drawing/2014/main" id="{626BBE21-D32F-40B1-B05A-4D23DEF22A96}"/>
-              </a:ext>
-            </a:extLst>
-          </p:cNvPr>
-          <p:cNvSpPr>
-            <a:spLocks xmlns:a="http://schemas.openxmlformats.org/drawingml/2006/main" noGrp="1"/>
-          </p:cNvSpPr>
-          <p:nvPr/>
-        </p:nvSpPr>
-        <p:spPr>
-          <a:xfrm xmlns:a="http://schemas.openxmlformats.org/drawingml/2006/main">
-            <a:off x="723900" y="1409700"/>
-            <a:ext cx="10744200" cy="781050"/>
-          </a:xfrm>
-          <a:prstGeom xmlns:a="http://schemas.openxmlformats.org/drawingml/2006/main" prst="roundRect">
-            <a:avLst>
-              <a:gd name="adj" fmla="val 9756"/>
-            </a:avLst>
-          </a:prstGeom>
-          <a:solidFill xmlns:a="http://schemas.openxmlformats.org/drawingml/2006/main">
-            <a:srgbClr val="102A43"/>
-          </a:solidFill>
-          <a:ln xmlns:a="http://schemas.openxmlformats.org/drawingml/2006/main" w="11430">
-            <a:solidFill>
-              <a:srgbClr val="102A43"/>
-            </a:solidFill>
-            <a:prstDash val="solid"/>
-          </a:ln>
-        </p:spPr>
+                <a16:creationId xmlns:a16="http://schemas.microsoft.com/office/drawing/2014/main" id="{3520776B-B0FE-4087-8AC8-49D03A7C541C}"/>
+              </a:ext>
+            </a:extLst>
+          </p:cNvPr>
+          <p:cNvSpPr>
+            <a:spLocks xmlns:a="http://schemas.openxmlformats.org/drawingml/2006/main" noGrp="1"/>
+          </p:cNvSpPr>
+          <p:nvPr/>
+        </p:nvSpPr>
+        <p:spPr>
+          <a:xfrm xmlns:a="http://schemas.openxmlformats.org/drawingml/2006/main">
+            <a:off x="781050" y="1352550"/>
+            <a:ext cx="6191250" cy="361950"/>
+          </a:xfrm>
+          <a:prstGeom xmlns:a="http://schemas.openxmlformats.org/drawingml/2006/main" prst="rect">
+            <a:avLst/>
+          </a:prstGeom>
+          <a:noFill xmlns:a="http://schemas.openxmlformats.org/drawingml/2006/main"/>
+          <a:ln xmlns:a="http://schemas.openxmlformats.org/drawingml/2006/main" w="0">
+            <a:noFill/>
+            <a:prstDash val="solid"/>
+          </a:ln>
+        </p:spPr>
+        <p:txBody>
+          <a:bodyPr xmlns:a="http://schemas.openxmlformats.org/drawingml/2006/main" wrap="square" lIns="38100" tIns="19050" rIns="38100" bIns="19050" anchor="t">
+            <a:normAutofit fontScale="100000"/>
+          </a:bodyPr>
+          <a:lstStyle xmlns:a="http://schemas.openxmlformats.org/drawingml/2006/main"/>
+          <a:p xmlns:a="http://schemas.openxmlformats.org/drawingml/2006/main">
+            <a:pPr algn="l">
+              <a:lnSpc>
+                <a:spcPct val="105000"/>
+              </a:lnSpc>
+              <a:buNone/>
+              <a:defRPr sz="1950" b="1" i="0">
+                <a:solidFill>
+                  <a:srgbClr val="102A43"/>
+                </a:solidFill>
+              </a:defRPr>
+            </a:pPr>
+            <a:r>
+              <a:rPr sz="1950" b="1" i="0">
+                <a:solidFill>
+                  <a:srgbClr val="102A43"/>
+                </a:solidFill>
+              </a:rPr>
+              <a:t>n = 32, 64, 128, 256, 512</a:t>
+            </a:r>
+          </a:p>
+        </p:txBody>
       </p:sp>
       <p:sp>
         <p:nvSpPr>
           <p:cNvPr id="8" name="">
             <a:extLst xmlns:a="http://schemas.openxmlformats.org/drawingml/2006/main">
               <a:ext uri="{FF2B5EF4-FFF2-40B4-BE49-F238E27FC236}">
-                <a16:creationId xmlns:a16="http://schemas.microsoft.com/office/drawing/2014/main" id="{AFE1E696-1EAA-44AC-9EBE-349DBC716246}"/>
-              </a:ext>
-            </a:extLst>
-          </p:cNvPr>
-          <p:cNvSpPr>
-            <a:spLocks xmlns:a="http://schemas.openxmlformats.org/drawingml/2006/main" noGrp="1"/>
-          </p:cNvSpPr>
-          <p:nvPr/>
-        </p:nvSpPr>
-        <p:spPr>
-          <a:xfrm xmlns:a="http://schemas.openxmlformats.org/drawingml/2006/main">
-            <a:off x="933450" y="1504950"/>
-            <a:ext cx="6934200" cy="514350"/>
-          </a:xfrm>
-          <a:prstGeom xmlns:a="http://schemas.openxmlformats.org/drawingml/2006/main" prst="rect">
-            <a:avLst/>
-          </a:prstGeom>
-          <a:noFill xmlns:a="http://schemas.openxmlformats.org/drawingml/2006/main"/>
-          <a:ln xmlns:a="http://schemas.openxmlformats.org/drawingml/2006/main" w="0">
-            <a:noFill/>
-            <a:prstDash val="solid"/>
-          </a:ln>
-        </p:spPr>
-        <p:txBody>
-          <a:bodyPr xmlns:a="http://schemas.openxmlformats.org/drawingml/2006/main" wrap="square" lIns="38100" tIns="19050" rIns="38100" bIns="19050" anchor="ctr">
-            <a:normAutofit fontScale="100000"/>
-          </a:bodyPr>
-          <a:lstStyle xmlns:a="http://schemas.openxmlformats.org/drawingml/2006/main"/>
-          <a:p xmlns:a="http://schemas.openxmlformats.org/drawingml/2006/main">
-            <a:pPr algn="ctr">
+                <a16:creationId xmlns:a16="http://schemas.microsoft.com/office/drawing/2014/main" id="{15F608BA-776E-423A-9CF3-82E709FB1ED7}"/>
+              </a:ext>
+            </a:extLst>
+          </p:cNvPr>
+          <p:cNvSpPr>
+            <a:spLocks xmlns:a="http://schemas.openxmlformats.org/drawingml/2006/main" noGrp="1"/>
+          </p:cNvSpPr>
+          <p:nvPr/>
+        </p:nvSpPr>
+        <p:spPr>
+          <a:xfrm xmlns:a="http://schemas.openxmlformats.org/drawingml/2006/main">
+            <a:off x="7239000" y="1352550"/>
+            <a:ext cx="4133850" cy="361950"/>
+          </a:xfrm>
+          <a:prstGeom xmlns:a="http://schemas.openxmlformats.org/drawingml/2006/main" prst="rect">
+            <a:avLst/>
+          </a:prstGeom>
+          <a:noFill xmlns:a="http://schemas.openxmlformats.org/drawingml/2006/main"/>
+          <a:ln xmlns:a="http://schemas.openxmlformats.org/drawingml/2006/main" w="0">
+            <a:noFill/>
+            <a:prstDash val="solid"/>
+          </a:ln>
+        </p:spPr>
+        <p:txBody>
+          <a:bodyPr xmlns:a="http://schemas.openxmlformats.org/drawingml/2006/main" wrap="square" lIns="38100" tIns="19050" rIns="38100" bIns="19050" anchor="t">
+            <a:normAutofit fontScale="100000"/>
+          </a:bodyPr>
+          <a:lstStyle xmlns:a="http://schemas.openxmlformats.org/drawingml/2006/main"/>
+          <a:p xmlns:a="http://schemas.openxmlformats.org/drawingml/2006/main">
+            <a:pPr algn="r">
+              <a:lnSpc>
+                <a:spcPct val="105000"/>
+              </a:lnSpc>
+              <a:buNone/>
+              <a:defRPr sz="1800" b="1" i="0">
+                <a:solidFill>
+                  <a:srgbClr val="2A9D8F"/>
+                </a:solidFill>
+              </a:defRPr>
+            </a:pPr>
+            <a:r>
+              <a:rPr sz="1800" b="1" i="0">
+                <a:solidFill>
+                  <a:srgbClr val="2A9D8F"/>
+                </a:solidFill>
+              </a:rPr>
+              <a:t>每个规模 12 个输入，共 60 个</a:t>
+            </a:r>
+          </a:p>
+        </p:txBody>
+      </p:sp>
+      <p:sp>
+        <p:nvSpPr>
+          <p:cNvPr id="9" name="">
+            <a:extLst xmlns:a="http://schemas.openxmlformats.org/drawingml/2006/main">
+              <a:ext uri="{FF2B5EF4-FFF2-40B4-BE49-F238E27FC236}">
+                <a16:creationId xmlns:a16="http://schemas.microsoft.com/office/drawing/2014/main" id="{0D92FB28-E364-46F1-8CFC-3FD34B782DA8}"/>
+              </a:ext>
+            </a:extLst>
+          </p:cNvPr>
+          <p:cNvSpPr>
+            <a:spLocks xmlns:a="http://schemas.openxmlformats.org/drawingml/2006/main" noGrp="1"/>
+          </p:cNvSpPr>
+          <p:nvPr/>
+        </p:nvSpPr>
+        <p:spPr>
+          <a:xfrm xmlns:a="http://schemas.openxmlformats.org/drawingml/2006/main">
+            <a:off x="857250" y="1876425"/>
+            <a:ext cx="2190750" cy="285750"/>
+          </a:xfrm>
+          <a:prstGeom xmlns:a="http://schemas.openxmlformats.org/drawingml/2006/main" prst="rect">
+            <a:avLst/>
+          </a:prstGeom>
+          <a:noFill xmlns:a="http://schemas.openxmlformats.org/drawingml/2006/main"/>
+          <a:ln xmlns:a="http://schemas.openxmlformats.org/drawingml/2006/main" w="0">
+            <a:noFill/>
+            <a:prstDash val="solid"/>
+          </a:ln>
+        </p:spPr>
+        <p:txBody>
+          <a:bodyPr xmlns:a="http://schemas.openxmlformats.org/drawingml/2006/main" wrap="square" lIns="38100" tIns="19050" rIns="38100" bIns="19050" anchor="t">
+            <a:normAutofit fontScale="100000"/>
+          </a:bodyPr>
+          <a:lstStyle xmlns:a="http://schemas.openxmlformats.org/drawingml/2006/main"/>
+          <a:p xmlns:a="http://schemas.openxmlformats.org/drawingml/2006/main">
+            <a:pPr algn="l">
+              <a:lnSpc>
+                <a:spcPct val="105000"/>
+              </a:lnSpc>
+              <a:buNone/>
+              <a:defRPr sz="1425" b="1" i="0">
+                <a:solidFill>
+                  <a:srgbClr val="52606D"/>
+                </a:solidFill>
+              </a:defRPr>
+            </a:pPr>
+            <a:r>
+              <a:rPr sz="1425" b="1" i="0">
+                <a:solidFill>
+                  <a:srgbClr val="52606D"/>
+                </a:solidFill>
+              </a:rPr>
+              <a:t>输入类型</a:t>
+            </a:r>
+          </a:p>
+        </p:txBody>
+      </p:sp>
+      <p:sp>
+        <p:nvSpPr>
+          <p:cNvPr id="10" name="">
+            <a:extLst xmlns:a="http://schemas.openxmlformats.org/drawingml/2006/main">
+              <a:ext uri="{FF2B5EF4-FFF2-40B4-BE49-F238E27FC236}">
+                <a16:creationId xmlns:a16="http://schemas.microsoft.com/office/drawing/2014/main" id="{CEEA1FBC-084E-476A-98DE-F407598DF34B}"/>
+              </a:ext>
+            </a:extLst>
+          </p:cNvPr>
+          <p:cNvSpPr>
+            <a:spLocks xmlns:a="http://schemas.openxmlformats.org/drawingml/2006/main" noGrp="1"/>
+          </p:cNvSpPr>
+          <p:nvPr/>
+        </p:nvSpPr>
+        <p:spPr>
+          <a:xfrm xmlns:a="http://schemas.openxmlformats.org/drawingml/2006/main">
+            <a:off x="3257550" y="1876425"/>
+            <a:ext cx="1143000" cy="285750"/>
+          </a:xfrm>
+          <a:prstGeom xmlns:a="http://schemas.openxmlformats.org/drawingml/2006/main" prst="rect">
+            <a:avLst/>
+          </a:prstGeom>
+          <a:noFill xmlns:a="http://schemas.openxmlformats.org/drawingml/2006/main"/>
+          <a:ln xmlns:a="http://schemas.openxmlformats.org/drawingml/2006/main" w="0">
+            <a:noFill/>
+            <a:prstDash val="solid"/>
+          </a:ln>
+        </p:spPr>
+        <p:txBody>
+          <a:bodyPr xmlns:a="http://schemas.openxmlformats.org/drawingml/2006/main" wrap="square" lIns="38100" tIns="19050" rIns="38100" bIns="19050" anchor="t">
+            <a:normAutofit fontScale="100000"/>
+          </a:bodyPr>
+          <a:lstStyle xmlns:a="http://schemas.openxmlformats.org/drawingml/2006/main"/>
+          <a:p xmlns:a="http://schemas.openxmlformats.org/drawingml/2006/main">
+            <a:pPr algn="l">
+              <a:lnSpc>
+                <a:spcPct val="105000"/>
+              </a:lnSpc>
+              <a:buNone/>
+              <a:defRPr sz="1425" b="1" i="0">
+                <a:solidFill>
+                  <a:srgbClr val="52606D"/>
+                </a:solidFill>
+              </a:defRPr>
+            </a:pPr>
+            <a:r>
+              <a:rPr sz="1425" b="1" i="0">
+                <a:solidFill>
+                  <a:srgbClr val="52606D"/>
+                </a:solidFill>
+              </a:rPr>
+              <a:t>每个规模</a:t>
+            </a:r>
+          </a:p>
+        </p:txBody>
+      </p:sp>
+      <p:sp>
+        <p:nvSpPr>
+          <p:cNvPr id="11" name="">
+            <a:extLst xmlns:a="http://schemas.openxmlformats.org/drawingml/2006/main">
+              <a:ext uri="{FF2B5EF4-FFF2-40B4-BE49-F238E27FC236}">
+                <a16:creationId xmlns:a16="http://schemas.microsoft.com/office/drawing/2014/main" id="{B997AC07-5484-4AE9-ABFA-B935A5FA7292}"/>
+              </a:ext>
+            </a:extLst>
+          </p:cNvPr>
+          <p:cNvSpPr>
+            <a:spLocks xmlns:a="http://schemas.openxmlformats.org/drawingml/2006/main" noGrp="1"/>
+          </p:cNvSpPr>
+          <p:nvPr/>
+        </p:nvSpPr>
+        <p:spPr>
+          <a:xfrm xmlns:a="http://schemas.openxmlformats.org/drawingml/2006/main">
+            <a:off x="4933950" y="1876425"/>
+            <a:ext cx="6305550" cy="285750"/>
+          </a:xfrm>
+          <a:prstGeom xmlns:a="http://schemas.openxmlformats.org/drawingml/2006/main" prst="rect">
+            <a:avLst/>
+          </a:prstGeom>
+          <a:noFill xmlns:a="http://schemas.openxmlformats.org/drawingml/2006/main"/>
+          <a:ln xmlns:a="http://schemas.openxmlformats.org/drawingml/2006/main" w="0">
+            <a:noFill/>
+            <a:prstDash val="solid"/>
+          </a:ln>
+        </p:spPr>
+        <p:txBody>
+          <a:bodyPr xmlns:a="http://schemas.openxmlformats.org/drawingml/2006/main" wrap="square" lIns="38100" tIns="19050" rIns="38100" bIns="19050" anchor="t">
+            <a:normAutofit fontScale="100000"/>
+          </a:bodyPr>
+          <a:lstStyle xmlns:a="http://schemas.openxmlformats.org/drawingml/2006/main"/>
+          <a:p xmlns:a="http://schemas.openxmlformats.org/drawingml/2006/main">
+            <a:pPr algn="l">
+              <a:lnSpc>
+                <a:spcPct val="105000"/>
+              </a:lnSpc>
+              <a:buNone/>
+              <a:defRPr sz="1425" b="1" i="0">
+                <a:solidFill>
+                  <a:srgbClr val="52606D"/>
+                </a:solidFill>
+              </a:defRPr>
+            </a:pPr>
+            <a:r>
+              <a:rPr sz="1425" b="1" i="0">
+                <a:solidFill>
+                  <a:srgbClr val="52606D"/>
+                </a:solidFill>
+              </a:rPr>
+              <a:t>构造方式</a:t>
+            </a:r>
+          </a:p>
+        </p:txBody>
+      </p:sp>
+      <p:sp>
+        <p:nvSpPr>
+          <p:cNvPr id="12" name="">
+            <a:extLst xmlns:a="http://schemas.openxmlformats.org/drawingml/2006/main">
+              <a:ext uri="{FF2B5EF4-FFF2-40B4-BE49-F238E27FC236}">
+                <a16:creationId xmlns:a16="http://schemas.microsoft.com/office/drawing/2014/main" id="{EF1FBE7B-14EB-4AD4-88C8-3274722A6977}"/>
+              </a:ext>
+            </a:extLst>
+          </p:cNvPr>
+          <p:cNvSpPr>
+            <a:spLocks xmlns:a="http://schemas.openxmlformats.org/drawingml/2006/main" noGrp="1"/>
+          </p:cNvSpPr>
+          <p:nvPr/>
+        </p:nvSpPr>
+        <p:spPr>
+          <a:xfrm xmlns:a="http://schemas.openxmlformats.org/drawingml/2006/main">
+            <a:off x="857250" y="2238375"/>
+            <a:ext cx="2190750" cy="361950"/>
+          </a:xfrm>
+          <a:prstGeom xmlns:a="http://schemas.openxmlformats.org/drawingml/2006/main" prst="rect">
+            <a:avLst/>
+          </a:prstGeom>
+          <a:noFill xmlns:a="http://schemas.openxmlformats.org/drawingml/2006/main"/>
+          <a:ln xmlns:a="http://schemas.openxmlformats.org/drawingml/2006/main" w="0">
+            <a:noFill/>
+            <a:prstDash val="solid"/>
+          </a:ln>
+        </p:spPr>
+        <p:txBody>
+          <a:bodyPr xmlns:a="http://schemas.openxmlformats.org/drawingml/2006/main" wrap="square" lIns="38100" tIns="19050" rIns="38100" bIns="19050" anchor="t">
+            <a:normAutofit fontScale="100000"/>
+          </a:bodyPr>
+          <a:lstStyle xmlns:a="http://schemas.openxmlformats.org/drawingml/2006/main"/>
+          <a:p xmlns:a="http://schemas.openxmlformats.org/drawingml/2006/main">
+            <a:pPr algn="l">
               <a:lnSpc>
                 <a:spcPct val="105000"/>
               </a:lnSpc>
               <a:buNone/>
               <a:defRPr sz="1725" b="1" i="0">
                 <a:solidFill>
-                  <a:srgbClr val="FFFFFF"/>
+                  <a:srgbClr val="102A43"/>
                 </a:solidFill>
               </a:defRPr>
             </a:pPr>
             <a:r>
               <a:rPr sz="1725" b="1" i="0">
                 <a:solidFill>
-                  <a:srgbClr val="FFFFFF"/>
-                </a:solidFill>
-              </a:rPr>
-              <a:t>5 个规模  ×  12 个用例  ×  3 个算法  ×  20 次重复调用</a:t>
-            </a:r>
-          </a:p>
-        </p:txBody>
-      </p:sp>
-      <p:sp>
-        <p:nvSpPr>
-          <p:cNvPr id="9" name="">
-            <a:extLst xmlns:a="http://schemas.openxmlformats.org/drawingml/2006/main">
-              <a:ext uri="{FF2B5EF4-FFF2-40B4-BE49-F238E27FC236}">
-                <a16:creationId xmlns:a16="http://schemas.microsoft.com/office/drawing/2014/main" id="{61CF5983-0D24-409A-8414-E26BB58AEB54}"/>
-              </a:ext>
-            </a:extLst>
-          </p:cNvPr>
-          <p:cNvSpPr>
-            <a:spLocks xmlns:a="http://schemas.openxmlformats.org/drawingml/2006/main" noGrp="1"/>
-          </p:cNvSpPr>
-          <p:nvPr/>
-        </p:nvSpPr>
-        <p:spPr>
-          <a:xfrm xmlns:a="http://schemas.openxmlformats.org/drawingml/2006/main">
-            <a:off x="8096250" y="1504950"/>
-            <a:ext cx="3105150" cy="514350"/>
-          </a:xfrm>
-          <a:prstGeom xmlns:a="http://schemas.openxmlformats.org/drawingml/2006/main" prst="rect">
-            <a:avLst/>
-          </a:prstGeom>
-          <a:noFill xmlns:a="http://schemas.openxmlformats.org/drawingml/2006/main"/>
-          <a:ln xmlns:a="http://schemas.openxmlformats.org/drawingml/2006/main" w="0">
-            <a:noFill/>
-            <a:prstDash val="solid"/>
-          </a:ln>
-        </p:spPr>
-        <p:txBody>
-          <a:bodyPr xmlns:a="http://schemas.openxmlformats.org/drawingml/2006/main" wrap="square" lIns="38100" tIns="19050" rIns="38100" bIns="19050" anchor="ctr">
-            <a:normAutofit fontScale="100000"/>
-          </a:bodyPr>
-          <a:lstStyle xmlns:a="http://schemas.openxmlformats.org/drawingml/2006/main"/>
-          <a:p xmlns:a="http://schemas.openxmlformats.org/drawingml/2006/main">
-            <a:pPr algn="ctr">
-              <a:lnSpc>
-                <a:spcPct val="105000"/>
-              </a:lnSpc>
-              <a:buNone/>
-              <a:defRPr sz="1875" b="1" i="0">
+                  <a:srgbClr val="102A43"/>
+                </a:solidFill>
+              </a:rPr>
+              <a:t>Flat</a:t>
+            </a:r>
+          </a:p>
+        </p:txBody>
+      </p:sp>
+      <p:sp>
+        <p:nvSpPr>
+          <p:cNvPr id="13" name="">
+            <a:extLst xmlns:a="http://schemas.openxmlformats.org/drawingml/2006/main">
+              <a:ext uri="{FF2B5EF4-FFF2-40B4-BE49-F238E27FC236}">
+                <a16:creationId xmlns:a16="http://schemas.microsoft.com/office/drawing/2014/main" id="{4379D25B-995B-4A3B-907C-8A36C59E0C31}"/>
+              </a:ext>
+            </a:extLst>
+          </p:cNvPr>
+          <p:cNvSpPr>
+            <a:spLocks xmlns:a="http://schemas.openxmlformats.org/drawingml/2006/main" noGrp="1"/>
+          </p:cNvSpPr>
+          <p:nvPr/>
+        </p:nvSpPr>
+        <p:spPr>
+          <a:xfrm xmlns:a="http://schemas.openxmlformats.org/drawingml/2006/main">
+            <a:off x="3448050" y="2238375"/>
+            <a:ext cx="952500" cy="361950"/>
+          </a:xfrm>
+          <a:prstGeom xmlns:a="http://schemas.openxmlformats.org/drawingml/2006/main" prst="rect">
+            <a:avLst/>
+          </a:prstGeom>
+          <a:noFill xmlns:a="http://schemas.openxmlformats.org/drawingml/2006/main"/>
+          <a:ln xmlns:a="http://schemas.openxmlformats.org/drawingml/2006/main" w="0">
+            <a:noFill/>
+            <a:prstDash val="solid"/>
+          </a:ln>
+        </p:spPr>
+        <p:txBody>
+          <a:bodyPr xmlns:a="http://schemas.openxmlformats.org/drawingml/2006/main" wrap="square" lIns="38100" tIns="19050" rIns="38100" bIns="19050" anchor="t">
+            <a:normAutofit fontScale="100000"/>
+          </a:bodyPr>
+          <a:lstStyle xmlns:a="http://schemas.openxmlformats.org/drawingml/2006/main"/>
+          <a:p xmlns:a="http://schemas.openxmlformats.org/drawingml/2006/main">
+            <a:pPr algn="l">
+              <a:lnSpc>
+                <a:spcPct val="105000"/>
+              </a:lnSpc>
+              <a:buNone/>
+              <a:defRPr sz="1725" b="0" i="0">
                 <a:solidFill>
                   <a:srgbClr val="2A9D8F"/>
                 </a:solidFill>
               </a:defRPr>
             </a:pPr>
             <a:r>
-              <a:rPr sz="1875" b="1" i="0">
+              <a:rPr sz="1725" b="0" i="0">
                 <a:solidFill>
                   <a:srgbClr val="2A9D8F"/>
                 </a:solidFill>
               </a:rPr>
-              <a:t>3,600 条测量记录</a:t>
-            </a:r>
-          </a:p>
-        </p:txBody>
-      </p:sp>
-      <p:sp>
-        <p:nvSpPr>
-          <p:cNvPr id="10" name="">
-            <a:extLst xmlns:a="http://schemas.openxmlformats.org/drawingml/2006/main">
-              <a:ext uri="{FF2B5EF4-FFF2-40B4-BE49-F238E27FC236}">
-                <a16:creationId xmlns:a16="http://schemas.microsoft.com/office/drawing/2014/main" id="{3F9F505A-199E-43D8-8C96-B3679D183978}"/>
-              </a:ext>
-            </a:extLst>
-          </p:cNvPr>
-          <p:cNvSpPr>
-            <a:spLocks xmlns:a="http://schemas.openxmlformats.org/drawingml/2006/main" noGrp="1"/>
-          </p:cNvSpPr>
-          <p:nvPr/>
-        </p:nvSpPr>
-        <p:spPr>
-          <a:xfrm xmlns:a="http://schemas.openxmlformats.org/drawingml/2006/main">
-            <a:off x="704850" y="2647950"/>
-            <a:ext cx="1295400" cy="781050"/>
-          </a:xfrm>
-          <a:prstGeom xmlns:a="http://schemas.openxmlformats.org/drawingml/2006/main" prst="roundRect">
-            <a:avLst>
-              <a:gd name="adj" fmla="val 8537"/>
-            </a:avLst>
-          </a:prstGeom>
-          <a:solidFill xmlns:a="http://schemas.openxmlformats.org/drawingml/2006/main">
-            <a:srgbClr val="FFFFFF"/>
-          </a:solidFill>
-          <a:ln xmlns:a="http://schemas.openxmlformats.org/drawingml/2006/main" w="14288">
-            <a:solidFill>
-              <a:srgbClr val="52606D"/>
-            </a:solidFill>
-            <a:prstDash val="solid"/>
-          </a:ln>
-        </p:spPr>
-      </p:sp>
-      <p:sp>
-        <p:nvSpPr>
-          <p:cNvPr id="11" name="">
-            <a:extLst xmlns:a="http://schemas.openxmlformats.org/drawingml/2006/main">
-              <a:ext uri="{FF2B5EF4-FFF2-40B4-BE49-F238E27FC236}">
-                <a16:creationId xmlns:a16="http://schemas.microsoft.com/office/drawing/2014/main" id="{FBF02961-B189-4A46-AD65-366F3E87D773}"/>
-              </a:ext>
-            </a:extLst>
-          </p:cNvPr>
-          <p:cNvSpPr>
-            <a:spLocks xmlns:a="http://schemas.openxmlformats.org/drawingml/2006/main" noGrp="1"/>
-          </p:cNvSpPr>
-          <p:nvPr/>
-        </p:nvSpPr>
-        <p:spPr>
-          <a:xfrm xmlns:a="http://schemas.openxmlformats.org/drawingml/2006/main">
-            <a:off x="781050" y="2762250"/>
-            <a:ext cx="1143000" cy="552450"/>
-          </a:xfrm>
-          <a:prstGeom xmlns:a="http://schemas.openxmlformats.org/drawingml/2006/main" prst="rect">
-            <a:avLst/>
-          </a:prstGeom>
-          <a:noFill xmlns:a="http://schemas.openxmlformats.org/drawingml/2006/main"/>
-          <a:ln xmlns:a="http://schemas.openxmlformats.org/drawingml/2006/main" w="0">
-            <a:noFill/>
-            <a:prstDash val="solid"/>
-          </a:ln>
-        </p:spPr>
-        <p:txBody>
-          <a:bodyPr xmlns:a="http://schemas.openxmlformats.org/drawingml/2006/main" wrap="square" lIns="38100" tIns="19050" rIns="38100" bIns="19050" anchor="ctr">
-            <a:normAutofit fontScale="100000"/>
-          </a:bodyPr>
-          <a:lstStyle xmlns:a="http://schemas.openxmlformats.org/drawingml/2006/main"/>
-          <a:p xmlns:a="http://schemas.openxmlformats.org/drawingml/2006/main">
-            <a:pPr algn="ctr">
-              <a:lnSpc>
-                <a:spcPct val="105000"/>
-              </a:lnSpc>
-              <a:buNone/>
-              <a:defRPr sz="1350" b="1" i="0">
+              <a:t>1</a:t>
+            </a:r>
+          </a:p>
+        </p:txBody>
+      </p:sp>
+      <p:sp>
+        <p:nvSpPr>
+          <p:cNvPr id="14" name="">
+            <a:extLst xmlns:a="http://schemas.openxmlformats.org/drawingml/2006/main">
+              <a:ext uri="{FF2B5EF4-FFF2-40B4-BE49-F238E27FC236}">
+                <a16:creationId xmlns:a16="http://schemas.microsoft.com/office/drawing/2014/main" id="{CC483E1F-EBEB-4138-8171-43A3F3A41210}"/>
+              </a:ext>
+            </a:extLst>
+          </p:cNvPr>
+          <p:cNvSpPr>
+            <a:spLocks xmlns:a="http://schemas.openxmlformats.org/drawingml/2006/main" noGrp="1"/>
+          </p:cNvSpPr>
+          <p:nvPr/>
+        </p:nvSpPr>
+        <p:spPr>
+          <a:xfrm xmlns:a="http://schemas.openxmlformats.org/drawingml/2006/main">
+            <a:off x="4933950" y="2238375"/>
+            <a:ext cx="6305550" cy="361950"/>
+          </a:xfrm>
+          <a:prstGeom xmlns:a="http://schemas.openxmlformats.org/drawingml/2006/main" prst="rect">
+            <a:avLst/>
+          </a:prstGeom>
+          <a:noFill xmlns:a="http://schemas.openxmlformats.org/drawingml/2006/main"/>
+          <a:ln xmlns:a="http://schemas.openxmlformats.org/drawingml/2006/main" w="0">
+            <a:noFill/>
+            <a:prstDash val="solid"/>
+          </a:ln>
+        </p:spPr>
+        <p:txBody>
+          <a:bodyPr xmlns:a="http://schemas.openxmlformats.org/drawingml/2006/main" wrap="square" lIns="38100" tIns="19050" rIns="38100" bIns="19050" anchor="t">
+            <a:normAutofit fontScale="100000"/>
+          </a:bodyPr>
+          <a:lstStyle xmlns:a="http://schemas.openxmlformats.org/drawingml/2006/main"/>
+          <a:p xmlns:a="http://schemas.openxmlformats.org/drawingml/2006/main">
+            <a:pPr algn="l">
+              <a:lnSpc>
+                <a:spcPct val="105000"/>
+              </a:lnSpc>
+              <a:buNone/>
+              <a:defRPr sz="1650" b="0" i="0">
+                <a:solidFill>
+                  <a:srgbClr val="243B53"/>
+                </a:solidFill>
+              </a:defRPr>
+            </a:pPr>
+            <a:r>
+              <a:rPr sz="1650" b="0" i="0">
+                <a:solidFill>
+                  <a:srgbClr val="243B53"/>
+                </a:solidFill>
+              </a:rPr>
+              <a:t>[1, 2, 3, …, n]</a:t>
+            </a:r>
+          </a:p>
+        </p:txBody>
+      </p:sp>
+      <p:sp>
+        <p:nvSpPr>
+          <p:cNvPr id="15" name="">
+            <a:extLst xmlns:a="http://schemas.openxmlformats.org/drawingml/2006/main">
+              <a:ext uri="{FF2B5EF4-FFF2-40B4-BE49-F238E27FC236}">
+                <a16:creationId xmlns:a16="http://schemas.microsoft.com/office/drawing/2014/main" id="{6CD39CB8-910B-46F6-A7DA-5EA10774A4F0}"/>
+              </a:ext>
+            </a:extLst>
+          </p:cNvPr>
+          <p:cNvSpPr>
+            <a:spLocks xmlns:a="http://schemas.openxmlformats.org/drawingml/2006/main" noGrp="1"/>
+          </p:cNvSpPr>
+          <p:nvPr/>
+        </p:nvSpPr>
+        <p:spPr>
+          <a:xfrm xmlns:a="http://schemas.openxmlformats.org/drawingml/2006/main">
+            <a:off x="857250" y="2676525"/>
+            <a:ext cx="2190750" cy="361950"/>
+          </a:xfrm>
+          <a:prstGeom xmlns:a="http://schemas.openxmlformats.org/drawingml/2006/main" prst="rect">
+            <a:avLst/>
+          </a:prstGeom>
+          <a:noFill xmlns:a="http://schemas.openxmlformats.org/drawingml/2006/main"/>
+          <a:ln xmlns:a="http://schemas.openxmlformats.org/drawingml/2006/main" w="0">
+            <a:noFill/>
+            <a:prstDash val="solid"/>
+          </a:ln>
+        </p:spPr>
+        <p:txBody>
+          <a:bodyPr xmlns:a="http://schemas.openxmlformats.org/drawingml/2006/main" wrap="square" lIns="38100" tIns="19050" rIns="38100" bIns="19050" anchor="t">
+            <a:normAutofit fontScale="100000"/>
+          </a:bodyPr>
+          <a:lstStyle xmlns:a="http://schemas.openxmlformats.org/drawingml/2006/main"/>
+          <a:p xmlns:a="http://schemas.openxmlformats.org/drawingml/2006/main">
+            <a:pPr algn="l">
+              <a:lnSpc>
+                <a:spcPct val="105000"/>
+              </a:lnSpc>
+              <a:buNone/>
+              <a:defRPr sz="1725" b="1" i="0">
                 <a:solidFill>
                   <a:srgbClr val="102A43"/>
                 </a:solidFill>
               </a:defRPr>
             </a:pPr>
             <a:r>
-              <a:rPr sz="1350" b="1" i="0">
+              <a:rPr sz="1725" b="1" i="0">
                 <a:solidFill>
                   <a:srgbClr val="102A43"/>
                 </a:solidFill>
               </a:rPr>
-              <a:t>生成</a:t>
-            </a:r>
-          </a:p>
-        </p:txBody>
-      </p:sp>
-      <p:sp>
-        <p:nvSpPr>
-          <p:cNvPr id="12" name="">
-            <a:extLst xmlns:a="http://schemas.openxmlformats.org/drawingml/2006/main">
-              <a:ext uri="{FF2B5EF4-FFF2-40B4-BE49-F238E27FC236}">
-                <a16:creationId xmlns:a16="http://schemas.microsoft.com/office/drawing/2014/main" id="{DBB2E503-6EF9-497C-A58F-2C1CEE7A666B}"/>
-              </a:ext>
-            </a:extLst>
-          </p:cNvPr>
-          <p:cNvSpPr>
-            <a:spLocks xmlns:a="http://schemas.openxmlformats.org/drawingml/2006/main" noGrp="1"/>
-          </p:cNvSpPr>
-          <p:nvPr/>
-        </p:nvSpPr>
-        <p:spPr>
-          <a:xfrm xmlns:a="http://schemas.openxmlformats.org/drawingml/2006/main">
-            <a:off x="2266950" y="2647950"/>
-            <a:ext cx="1295400" cy="781050"/>
-          </a:xfrm>
-          <a:prstGeom xmlns:a="http://schemas.openxmlformats.org/drawingml/2006/main" prst="roundRect">
-            <a:avLst>
-              <a:gd name="adj" fmla="val 8537"/>
-            </a:avLst>
-          </a:prstGeom>
-          <a:solidFill xmlns:a="http://schemas.openxmlformats.org/drawingml/2006/main">
-            <a:srgbClr val="FFFFFF"/>
-          </a:solidFill>
-          <a:ln xmlns:a="http://schemas.openxmlformats.org/drawingml/2006/main" w="14288">
-            <a:solidFill>
-              <a:srgbClr val="52606D"/>
-            </a:solidFill>
-            <a:prstDash val="solid"/>
-          </a:ln>
-        </p:spPr>
-      </p:sp>
-      <p:sp>
-        <p:nvSpPr>
-          <p:cNvPr id="13" name="">
-            <a:extLst xmlns:a="http://schemas.openxmlformats.org/drawingml/2006/main">
-              <a:ext uri="{FF2B5EF4-FFF2-40B4-BE49-F238E27FC236}">
-                <a16:creationId xmlns:a16="http://schemas.microsoft.com/office/drawing/2014/main" id="{BEE9872B-EE64-402E-B56B-32C93B1FC8E0}"/>
-              </a:ext>
-            </a:extLst>
-          </p:cNvPr>
-          <p:cNvSpPr>
-            <a:spLocks xmlns:a="http://schemas.openxmlformats.org/drawingml/2006/main" noGrp="1"/>
-          </p:cNvSpPr>
-          <p:nvPr/>
-        </p:nvSpPr>
-        <p:spPr>
-          <a:xfrm xmlns:a="http://schemas.openxmlformats.org/drawingml/2006/main">
-            <a:off x="2343150" y="2762250"/>
-            <a:ext cx="1143000" cy="552450"/>
-          </a:xfrm>
-          <a:prstGeom xmlns:a="http://schemas.openxmlformats.org/drawingml/2006/main" prst="rect">
-            <a:avLst/>
-          </a:prstGeom>
-          <a:noFill xmlns:a="http://schemas.openxmlformats.org/drawingml/2006/main"/>
-          <a:ln xmlns:a="http://schemas.openxmlformats.org/drawingml/2006/main" w="0">
-            <a:noFill/>
-            <a:prstDash val="solid"/>
-          </a:ln>
-        </p:spPr>
-        <p:txBody>
-          <a:bodyPr xmlns:a="http://schemas.openxmlformats.org/drawingml/2006/main" wrap="square" lIns="38100" tIns="19050" rIns="38100" bIns="19050" anchor="ctr">
-            <a:normAutofit fontScale="100000"/>
-          </a:bodyPr>
-          <a:lstStyle xmlns:a="http://schemas.openxmlformats.org/drawingml/2006/main"/>
-          <a:p xmlns:a="http://schemas.openxmlformats.org/drawingml/2006/main">
-            <a:pPr algn="ctr">
-              <a:lnSpc>
-                <a:spcPct val="105000"/>
-              </a:lnSpc>
-              <a:buNone/>
-              <a:defRPr sz="1350" b="1" i="0">
+              <a:t>Nested</a:t>
+            </a:r>
+          </a:p>
+        </p:txBody>
+      </p:sp>
+      <p:sp>
+        <p:nvSpPr>
+          <p:cNvPr id="16" name="">
+            <a:extLst xmlns:a="http://schemas.openxmlformats.org/drawingml/2006/main">
+              <a:ext uri="{FF2B5EF4-FFF2-40B4-BE49-F238E27FC236}">
+                <a16:creationId xmlns:a16="http://schemas.microsoft.com/office/drawing/2014/main" id="{E45B84A5-1C81-43B2-92BE-42178A4C41B9}"/>
+              </a:ext>
+            </a:extLst>
+          </p:cNvPr>
+          <p:cNvSpPr>
+            <a:spLocks xmlns:a="http://schemas.openxmlformats.org/drawingml/2006/main" noGrp="1"/>
+          </p:cNvSpPr>
+          <p:nvPr/>
+        </p:nvSpPr>
+        <p:spPr>
+          <a:xfrm xmlns:a="http://schemas.openxmlformats.org/drawingml/2006/main">
+            <a:off x="3448050" y="2676525"/>
+            <a:ext cx="952500" cy="361950"/>
+          </a:xfrm>
+          <a:prstGeom xmlns:a="http://schemas.openxmlformats.org/drawingml/2006/main" prst="rect">
+            <a:avLst/>
+          </a:prstGeom>
+          <a:noFill xmlns:a="http://schemas.openxmlformats.org/drawingml/2006/main"/>
+          <a:ln xmlns:a="http://schemas.openxmlformats.org/drawingml/2006/main" w="0">
+            <a:noFill/>
+            <a:prstDash val="solid"/>
+          </a:ln>
+        </p:spPr>
+        <p:txBody>
+          <a:bodyPr xmlns:a="http://schemas.openxmlformats.org/drawingml/2006/main" wrap="square" lIns="38100" tIns="19050" rIns="38100" bIns="19050" anchor="t">
+            <a:normAutofit fontScale="100000"/>
+          </a:bodyPr>
+          <a:lstStyle xmlns:a="http://schemas.openxmlformats.org/drawingml/2006/main"/>
+          <a:p xmlns:a="http://schemas.openxmlformats.org/drawingml/2006/main">
+            <a:pPr algn="l">
+              <a:lnSpc>
+                <a:spcPct val="105000"/>
+              </a:lnSpc>
+              <a:buNone/>
+              <a:defRPr sz="1725" b="0" i="0">
+                <a:solidFill>
+                  <a:srgbClr val="2A9D8F"/>
+                </a:solidFill>
+              </a:defRPr>
+            </a:pPr>
+            <a:r>
+              <a:rPr sz="1725" b="0" i="0">
+                <a:solidFill>
+                  <a:srgbClr val="2A9D8F"/>
+                </a:solidFill>
+              </a:rPr>
+              <a:t>1</a:t>
+            </a:r>
+          </a:p>
+        </p:txBody>
+      </p:sp>
+      <p:sp>
+        <p:nvSpPr>
+          <p:cNvPr id="17" name="">
+            <a:extLst xmlns:a="http://schemas.openxmlformats.org/drawingml/2006/main">
+              <a:ext uri="{FF2B5EF4-FFF2-40B4-BE49-F238E27FC236}">
+                <a16:creationId xmlns:a16="http://schemas.microsoft.com/office/drawing/2014/main" id="{82EAF0D6-78C4-4771-89FE-918A3060EB8C}"/>
+              </a:ext>
+            </a:extLst>
+          </p:cNvPr>
+          <p:cNvSpPr>
+            <a:spLocks xmlns:a="http://schemas.openxmlformats.org/drawingml/2006/main" noGrp="1"/>
+          </p:cNvSpPr>
+          <p:nvPr/>
+        </p:nvSpPr>
+        <p:spPr>
+          <a:xfrm xmlns:a="http://schemas.openxmlformats.org/drawingml/2006/main">
+            <a:off x="4933950" y="2676525"/>
+            <a:ext cx="6305550" cy="361950"/>
+          </a:xfrm>
+          <a:prstGeom xmlns:a="http://schemas.openxmlformats.org/drawingml/2006/main" prst="rect">
+            <a:avLst/>
+          </a:prstGeom>
+          <a:noFill xmlns:a="http://schemas.openxmlformats.org/drawingml/2006/main"/>
+          <a:ln xmlns:a="http://schemas.openxmlformats.org/drawingml/2006/main" w="0">
+            <a:noFill/>
+            <a:prstDash val="solid"/>
+          </a:ln>
+        </p:spPr>
+        <p:txBody>
+          <a:bodyPr xmlns:a="http://schemas.openxmlformats.org/drawingml/2006/main" wrap="square" lIns="38100" tIns="19050" rIns="38100" bIns="19050" anchor="t">
+            <a:normAutofit fontScale="100000"/>
+          </a:bodyPr>
+          <a:lstStyle xmlns:a="http://schemas.openxmlformats.org/drawingml/2006/main"/>
+          <a:p xmlns:a="http://schemas.openxmlformats.org/drawingml/2006/main">
+            <a:pPr algn="l">
+              <a:lnSpc>
+                <a:spcPct val="105000"/>
+              </a:lnSpc>
+              <a:buNone/>
+              <a:defRPr sz="1650" b="0" i="0">
+                <a:solidFill>
+                  <a:srgbClr val="243B53"/>
+                </a:solidFill>
+              </a:defRPr>
+            </a:pPr>
+            <a:r>
+              <a:rPr sz="1650" b="0" i="0">
+                <a:solidFill>
+                  <a:srgbClr val="243B53"/>
+                </a:solidFill>
+              </a:rPr>
+              <a:t>[1, n, 2, n−1, …]</a:t>
+            </a:r>
+          </a:p>
+        </p:txBody>
+      </p:sp>
+      <p:sp>
+        <p:nvSpPr>
+          <p:cNvPr id="18" name="">
+            <a:extLst xmlns:a="http://schemas.openxmlformats.org/drawingml/2006/main">
+              <a:ext uri="{FF2B5EF4-FFF2-40B4-BE49-F238E27FC236}">
+                <a16:creationId xmlns:a16="http://schemas.microsoft.com/office/drawing/2014/main" id="{471059AA-167C-4DD7-98B1-814B71F260EC}"/>
+              </a:ext>
+            </a:extLst>
+          </p:cNvPr>
+          <p:cNvSpPr>
+            <a:spLocks xmlns:a="http://schemas.openxmlformats.org/drawingml/2006/main" noGrp="1"/>
+          </p:cNvSpPr>
+          <p:nvPr/>
+        </p:nvSpPr>
+        <p:spPr>
+          <a:xfrm xmlns:a="http://schemas.openxmlformats.org/drawingml/2006/main">
+            <a:off x="857250" y="3114675"/>
+            <a:ext cx="2190750" cy="361950"/>
+          </a:xfrm>
+          <a:prstGeom xmlns:a="http://schemas.openxmlformats.org/drawingml/2006/main" prst="rect">
+            <a:avLst/>
+          </a:prstGeom>
+          <a:noFill xmlns:a="http://schemas.openxmlformats.org/drawingml/2006/main"/>
+          <a:ln xmlns:a="http://schemas.openxmlformats.org/drawingml/2006/main" w="0">
+            <a:noFill/>
+            <a:prstDash val="solid"/>
+          </a:ln>
+        </p:spPr>
+        <p:txBody>
+          <a:bodyPr xmlns:a="http://schemas.openxmlformats.org/drawingml/2006/main" wrap="square" lIns="38100" tIns="19050" rIns="38100" bIns="19050" anchor="t">
+            <a:normAutofit fontScale="100000"/>
+          </a:bodyPr>
+          <a:lstStyle xmlns:a="http://schemas.openxmlformats.org/drawingml/2006/main"/>
+          <a:p xmlns:a="http://schemas.openxmlformats.org/drawingml/2006/main">
+            <a:pPr algn="l">
+              <a:lnSpc>
+                <a:spcPct val="105000"/>
+              </a:lnSpc>
+              <a:buNone/>
+              <a:defRPr sz="1725" b="1" i="0">
                 <a:solidFill>
                   <a:srgbClr val="102A43"/>
                 </a:solidFill>
               </a:defRPr>
             </a:pPr>
             <a:r>
-              <a:rPr sz="1350" b="1" i="0">
+              <a:rPr sz="1725" b="1" i="0">
                 <a:solidFill>
                   <a:srgbClr val="102A43"/>
                 </a:solidFill>
               </a:rPr>
-              <a:t>认证</a:t>
-            </a:r>
-          </a:p>
-        </p:txBody>
-      </p:sp>
-      <p:sp>
-        <p:nvSpPr>
-          <p:cNvPr id="14" name="">
-            <a:extLst xmlns:a="http://schemas.openxmlformats.org/drawingml/2006/main">
-              <a:ext uri="{FF2B5EF4-FFF2-40B4-BE49-F238E27FC236}">
-                <a16:creationId xmlns:a16="http://schemas.microsoft.com/office/drawing/2014/main" id="{2405ABC9-E819-410D-BE60-05CED788AC92}"/>
-              </a:ext>
-            </a:extLst>
-          </p:cNvPr>
-          <p:cNvSpPr>
-            <a:spLocks xmlns:a="http://schemas.openxmlformats.org/drawingml/2006/main" noGrp="1"/>
-          </p:cNvSpPr>
-          <p:nvPr/>
-        </p:nvSpPr>
-        <p:spPr>
-          <a:xfrm xmlns:a="http://schemas.openxmlformats.org/drawingml/2006/main">
-            <a:off x="3829050" y="2647950"/>
-            <a:ext cx="1295400" cy="781050"/>
-          </a:xfrm>
-          <a:prstGeom xmlns:a="http://schemas.openxmlformats.org/drawingml/2006/main" prst="roundRect">
-            <a:avLst>
-              <a:gd name="adj" fmla="val 8537"/>
-            </a:avLst>
-          </a:prstGeom>
-          <a:solidFill xmlns:a="http://schemas.openxmlformats.org/drawingml/2006/main">
-            <a:srgbClr val="FFFFFF"/>
-          </a:solidFill>
-          <a:ln xmlns:a="http://schemas.openxmlformats.org/drawingml/2006/main" w="14288">
-            <a:solidFill>
-              <a:srgbClr val="52606D"/>
-            </a:solidFill>
-            <a:prstDash val="solid"/>
-          </a:ln>
-        </p:spPr>
-      </p:sp>
-      <p:sp>
-        <p:nvSpPr>
-          <p:cNvPr id="15" name="">
-            <a:extLst xmlns:a="http://schemas.openxmlformats.org/drawingml/2006/main">
-              <a:ext uri="{FF2B5EF4-FFF2-40B4-BE49-F238E27FC236}">
-                <a16:creationId xmlns:a16="http://schemas.microsoft.com/office/drawing/2014/main" id="{23C06668-2780-45A9-B13D-2EEECD0C7712}"/>
-              </a:ext>
-            </a:extLst>
-          </p:cNvPr>
-          <p:cNvSpPr>
-            <a:spLocks xmlns:a="http://schemas.openxmlformats.org/drawingml/2006/main" noGrp="1"/>
-          </p:cNvSpPr>
-          <p:nvPr/>
-        </p:nvSpPr>
-        <p:spPr>
-          <a:xfrm xmlns:a="http://schemas.openxmlformats.org/drawingml/2006/main">
-            <a:off x="3905250" y="2762250"/>
-            <a:ext cx="1143000" cy="552450"/>
-          </a:xfrm>
-          <a:prstGeom xmlns:a="http://schemas.openxmlformats.org/drawingml/2006/main" prst="rect">
-            <a:avLst/>
-          </a:prstGeom>
-          <a:noFill xmlns:a="http://schemas.openxmlformats.org/drawingml/2006/main"/>
-          <a:ln xmlns:a="http://schemas.openxmlformats.org/drawingml/2006/main" w="0">
-            <a:noFill/>
-            <a:prstDash val="solid"/>
-          </a:ln>
-        </p:spPr>
-        <p:txBody>
-          <a:bodyPr xmlns:a="http://schemas.openxmlformats.org/drawingml/2006/main" wrap="square" lIns="38100" tIns="19050" rIns="38100" bIns="19050" anchor="ctr">
-            <a:normAutofit fontScale="100000"/>
-          </a:bodyPr>
-          <a:lstStyle xmlns:a="http://schemas.openxmlformats.org/drawingml/2006/main"/>
-          <a:p xmlns:a="http://schemas.openxmlformats.org/drawingml/2006/main">
-            <a:pPr algn="ctr">
-              <a:lnSpc>
-                <a:spcPct val="105000"/>
-              </a:lnSpc>
-              <a:buNone/>
-              <a:defRPr sz="1125" b="1" i="0">
+              <a:t>Incremental</a:t>
+            </a:r>
+          </a:p>
+        </p:txBody>
+      </p:sp>
+      <p:sp>
+        <p:nvSpPr>
+          <p:cNvPr id="19" name="">
+            <a:extLst xmlns:a="http://schemas.openxmlformats.org/drawingml/2006/main">
+              <a:ext uri="{FF2B5EF4-FFF2-40B4-BE49-F238E27FC236}">
+                <a16:creationId xmlns:a16="http://schemas.microsoft.com/office/drawing/2014/main" id="{0C6CB5F3-3BAB-4ECB-B7E0-C96A3D9FF44F}"/>
+              </a:ext>
+            </a:extLst>
+          </p:cNvPr>
+          <p:cNvSpPr>
+            <a:spLocks xmlns:a="http://schemas.openxmlformats.org/drawingml/2006/main" noGrp="1"/>
+          </p:cNvSpPr>
+          <p:nvPr/>
+        </p:nvSpPr>
+        <p:spPr>
+          <a:xfrm xmlns:a="http://schemas.openxmlformats.org/drawingml/2006/main">
+            <a:off x="3448050" y="3114675"/>
+            <a:ext cx="952500" cy="361950"/>
+          </a:xfrm>
+          <a:prstGeom xmlns:a="http://schemas.openxmlformats.org/drawingml/2006/main" prst="rect">
+            <a:avLst/>
+          </a:prstGeom>
+          <a:noFill xmlns:a="http://schemas.openxmlformats.org/drawingml/2006/main"/>
+          <a:ln xmlns:a="http://schemas.openxmlformats.org/drawingml/2006/main" w="0">
+            <a:noFill/>
+            <a:prstDash val="solid"/>
+          </a:ln>
+        </p:spPr>
+        <p:txBody>
+          <a:bodyPr xmlns:a="http://schemas.openxmlformats.org/drawingml/2006/main" wrap="square" lIns="38100" tIns="19050" rIns="38100" bIns="19050" anchor="t">
+            <a:normAutofit fontScale="100000"/>
+          </a:bodyPr>
+          <a:lstStyle xmlns:a="http://schemas.openxmlformats.org/drawingml/2006/main"/>
+          <a:p xmlns:a="http://schemas.openxmlformats.org/drawingml/2006/main">
+            <a:pPr algn="l">
+              <a:lnSpc>
+                <a:spcPct val="105000"/>
+              </a:lnSpc>
+              <a:buNone/>
+              <a:defRPr sz="1725" b="0" i="0">
+                <a:solidFill>
+                  <a:srgbClr val="2A9D8F"/>
+                </a:solidFill>
+              </a:defRPr>
+            </a:pPr>
+            <a:r>
+              <a:rPr sz="1725" b="0" i="0">
+                <a:solidFill>
+                  <a:srgbClr val="2A9D8F"/>
+                </a:solidFill>
+              </a:rPr>
+              <a:t>10</a:t>
+            </a:r>
+          </a:p>
+        </p:txBody>
+      </p:sp>
+      <p:sp>
+        <p:nvSpPr>
+          <p:cNvPr id="20" name="">
+            <a:extLst xmlns:a="http://schemas.openxmlformats.org/drawingml/2006/main">
+              <a:ext uri="{FF2B5EF4-FFF2-40B4-BE49-F238E27FC236}">
+                <a16:creationId xmlns:a16="http://schemas.microsoft.com/office/drawing/2014/main" id="{54951E98-1668-43B1-9D0B-B683B752E6C7}"/>
+              </a:ext>
+            </a:extLst>
+          </p:cNvPr>
+          <p:cNvSpPr>
+            <a:spLocks xmlns:a="http://schemas.openxmlformats.org/drawingml/2006/main" noGrp="1"/>
+          </p:cNvSpPr>
+          <p:nvPr/>
+        </p:nvSpPr>
+        <p:spPr>
+          <a:xfrm xmlns:a="http://schemas.openxmlformats.org/drawingml/2006/main">
+            <a:off x="4933950" y="3114675"/>
+            <a:ext cx="6305550" cy="361950"/>
+          </a:xfrm>
+          <a:prstGeom xmlns:a="http://schemas.openxmlformats.org/drawingml/2006/main" prst="rect">
+            <a:avLst/>
+          </a:prstGeom>
+          <a:noFill xmlns:a="http://schemas.openxmlformats.org/drawingml/2006/main"/>
+          <a:ln xmlns:a="http://schemas.openxmlformats.org/drawingml/2006/main" w="0">
+            <a:noFill/>
+            <a:prstDash val="solid"/>
+          </a:ln>
+        </p:spPr>
+        <p:txBody>
+          <a:bodyPr xmlns:a="http://schemas.openxmlformats.org/drawingml/2006/main" wrap="square" lIns="38100" tIns="19050" rIns="38100" bIns="19050" anchor="t">
+            <a:normAutofit fontScale="100000"/>
+          </a:bodyPr>
+          <a:lstStyle xmlns:a="http://schemas.openxmlformats.org/drawingml/2006/main"/>
+          <a:p xmlns:a="http://schemas.openxmlformats.org/drawingml/2006/main">
+            <a:pPr algn="l">
+              <a:lnSpc>
+                <a:spcPct val="105000"/>
+              </a:lnSpc>
+              <a:buNone/>
+              <a:defRPr sz="1650" b="0" i="0">
+                <a:solidFill>
+                  <a:srgbClr val="243B53"/>
+                </a:solidFill>
+              </a:defRPr>
+            </a:pPr>
+            <a:r>
+              <a:rPr sz="1650" b="0" i="0">
+                <a:solidFill>
+                  <a:srgbClr val="243B53"/>
+                </a:solidFill>
+              </a:rPr>
+              <a:t>固定种子；构造过程中检查有效性</a:t>
+            </a:r>
+          </a:p>
+        </p:txBody>
+      </p:sp>
+      <p:sp>
+        <p:nvSpPr>
+          <p:cNvPr id="21" name="">
+            <a:extLst xmlns:a="http://schemas.openxmlformats.org/drawingml/2006/main">
+              <a:ext uri="{FF2B5EF4-FFF2-40B4-BE49-F238E27FC236}">
+                <a16:creationId xmlns:a16="http://schemas.microsoft.com/office/drawing/2014/main" id="{27EC0A78-7549-48CC-9672-25FFC7AEA531}"/>
+              </a:ext>
+            </a:extLst>
+          </p:cNvPr>
+          <p:cNvSpPr>
+            <a:spLocks xmlns:a="http://schemas.openxmlformats.org/drawingml/2006/main" noGrp="1"/>
+          </p:cNvSpPr>
+          <p:nvPr/>
+        </p:nvSpPr>
+        <p:spPr>
+          <a:xfrm xmlns:a="http://schemas.openxmlformats.org/drawingml/2006/main">
+            <a:off x="800100" y="3667125"/>
+            <a:ext cx="10591800" cy="323850"/>
+          </a:xfrm>
+          <a:prstGeom xmlns:a="http://schemas.openxmlformats.org/drawingml/2006/main" prst="rect">
+            <a:avLst/>
+          </a:prstGeom>
+          <a:noFill xmlns:a="http://schemas.openxmlformats.org/drawingml/2006/main"/>
+          <a:ln xmlns:a="http://schemas.openxmlformats.org/drawingml/2006/main" w="0">
+            <a:noFill/>
+            <a:prstDash val="solid"/>
+          </a:ln>
+        </p:spPr>
+        <p:txBody>
+          <a:bodyPr xmlns:a="http://schemas.openxmlformats.org/drawingml/2006/main" wrap="square" lIns="38100" tIns="19050" rIns="38100" bIns="19050" anchor="t">
+            <a:normAutofit fontScale="100000"/>
+          </a:bodyPr>
+          <a:lstStyle xmlns:a="http://schemas.openxmlformats.org/drawingml/2006/main"/>
+          <a:p xmlns:a="http://schemas.openxmlformats.org/drawingml/2006/main">
+            <a:pPr algn="l">
+              <a:lnSpc>
+                <a:spcPct val="105000"/>
+              </a:lnSpc>
+              <a:buNone/>
+              <a:defRPr sz="1725" b="1" i="0">
                 <a:solidFill>
                   <a:srgbClr val="102A43"/>
                 </a:solidFill>
               </a:defRPr>
             </a:pPr>
             <a:r>
-              <a:rPr sz="1125" b="1" i="0">
+              <a:rPr sz="1725" b="1" i="0">
                 <a:solidFill>
                   <a:srgbClr val="102A43"/>
                 </a:solidFill>
               </a:rPr>
-              <a:t>checked-state</a:t>
-            </a:r>
-          </a:p>
-          <a:p xmlns:a="http://schemas.openxmlformats.org/drawingml/2006/main">
-            <a:pPr algn="ctr">
-              <a:lnSpc>
-                <a:spcPct val="105000"/>
-              </a:lnSpc>
-              <a:buNone/>
-              <a:defRPr sz="1125" b="1" i="0">
-                <a:solidFill>
-                  <a:srgbClr val="102A43"/>
-                </a:solidFill>
-              </a:defRPr>
-            </a:pPr>
-            <a:r>
-              <a:rPr sz="1125" b="1" i="0">
-                <a:solidFill>
-                  <a:srgbClr val="102A43"/>
-                </a:solidFill>
-              </a:rPr>
-              <a:t>audit</a:t>
-            </a:r>
-          </a:p>
-        </p:txBody>
-      </p:sp>
-      <p:sp>
-        <p:nvSpPr>
-          <p:cNvPr id="16" name="">
-            <a:extLst xmlns:a="http://schemas.openxmlformats.org/drawingml/2006/main">
-              <a:ext uri="{FF2B5EF4-FFF2-40B4-BE49-F238E27FC236}">
-                <a16:creationId xmlns:a16="http://schemas.microsoft.com/office/drawing/2014/main" id="{0D9768F3-4760-4F54-9AB5-831EDA8033A8}"/>
-              </a:ext>
-            </a:extLst>
-          </p:cNvPr>
-          <p:cNvSpPr>
-            <a:spLocks xmlns:a="http://schemas.openxmlformats.org/drawingml/2006/main" noGrp="1"/>
-          </p:cNvSpPr>
-          <p:nvPr/>
-        </p:nvSpPr>
-        <p:spPr>
-          <a:xfrm xmlns:a="http://schemas.openxmlformats.org/drawingml/2006/main">
-            <a:off x="5391150" y="2647950"/>
-            <a:ext cx="1295400" cy="781050"/>
-          </a:xfrm>
-          <a:prstGeom xmlns:a="http://schemas.openxmlformats.org/drawingml/2006/main" prst="roundRect">
-            <a:avLst>
-              <a:gd name="adj" fmla="val 8537"/>
-            </a:avLst>
-          </a:prstGeom>
-          <a:solidFill xmlns:a="http://schemas.openxmlformats.org/drawingml/2006/main">
-            <a:srgbClr val="FFFFFF"/>
-          </a:solidFill>
-          <a:ln xmlns:a="http://schemas.openxmlformats.org/drawingml/2006/main" w="14288">
-            <a:solidFill>
-              <a:srgbClr val="52606D"/>
-            </a:solidFill>
-            <a:prstDash val="solid"/>
-          </a:ln>
-        </p:spPr>
-      </p:sp>
-      <p:sp>
-        <p:nvSpPr>
-          <p:cNvPr id="17" name="">
-            <a:extLst xmlns:a="http://schemas.openxmlformats.org/drawingml/2006/main">
-              <a:ext uri="{FF2B5EF4-FFF2-40B4-BE49-F238E27FC236}">
-                <a16:creationId xmlns:a16="http://schemas.microsoft.com/office/drawing/2014/main" id="{D470E525-8303-4625-9FFA-98198A5DFF99}"/>
-              </a:ext>
-            </a:extLst>
-          </p:cNvPr>
-          <p:cNvSpPr>
-            <a:spLocks xmlns:a="http://schemas.openxmlformats.org/drawingml/2006/main" noGrp="1"/>
-          </p:cNvSpPr>
-          <p:nvPr/>
-        </p:nvSpPr>
-        <p:spPr>
-          <a:xfrm xmlns:a="http://schemas.openxmlformats.org/drawingml/2006/main">
-            <a:off x="5467350" y="2762250"/>
-            <a:ext cx="1143000" cy="552450"/>
-          </a:xfrm>
-          <a:prstGeom xmlns:a="http://schemas.openxmlformats.org/drawingml/2006/main" prst="rect">
-            <a:avLst/>
-          </a:prstGeom>
-          <a:noFill xmlns:a="http://schemas.openxmlformats.org/drawingml/2006/main"/>
-          <a:ln xmlns:a="http://schemas.openxmlformats.org/drawingml/2006/main" w="0">
-            <a:noFill/>
-            <a:prstDash val="solid"/>
-          </a:ln>
-        </p:spPr>
-        <p:txBody>
-          <a:bodyPr xmlns:a="http://schemas.openxmlformats.org/drawingml/2006/main" wrap="square" lIns="38100" tIns="19050" rIns="38100" bIns="19050" anchor="ctr">
-            <a:normAutofit fontScale="100000"/>
-          </a:bodyPr>
-          <a:lstStyle xmlns:a="http://schemas.openxmlformats.org/drawingml/2006/main"/>
-          <a:p xmlns:a="http://schemas.openxmlformats.org/drawingml/2006/main">
-            <a:pPr algn="ctr">
-              <a:lnSpc>
-                <a:spcPct val="105000"/>
-              </a:lnSpc>
-              <a:buNone/>
-              <a:defRPr sz="1350" b="1" i="0">
-                <a:solidFill>
-                  <a:srgbClr val="102A43"/>
-                </a:solidFill>
-              </a:defRPr>
-            </a:pPr>
-            <a:r>
-              <a:rPr sz="1350" b="1" i="0">
-                <a:solidFill>
-                  <a:srgbClr val="102A43"/>
-                </a:solidFill>
-              </a:rPr>
-              <a:t>预热</a:t>
-            </a:r>
-          </a:p>
-        </p:txBody>
-      </p:sp>
-      <p:sp>
-        <p:nvSpPr>
-          <p:cNvPr id="18" name="">
-            <a:extLst xmlns:a="http://schemas.openxmlformats.org/drawingml/2006/main">
-              <a:ext uri="{FF2B5EF4-FFF2-40B4-BE49-F238E27FC236}">
-                <a16:creationId xmlns:a16="http://schemas.microsoft.com/office/drawing/2014/main" id="{7671190D-773E-4E3B-A490-F55133B097B6}"/>
-              </a:ext>
-            </a:extLst>
-          </p:cNvPr>
-          <p:cNvSpPr>
-            <a:spLocks xmlns:a="http://schemas.openxmlformats.org/drawingml/2006/main" noGrp="1"/>
-          </p:cNvSpPr>
-          <p:nvPr/>
-        </p:nvSpPr>
-        <p:spPr>
-          <a:xfrm xmlns:a="http://schemas.openxmlformats.org/drawingml/2006/main">
-            <a:off x="6953250" y="2647950"/>
-            <a:ext cx="1295400" cy="781050"/>
-          </a:xfrm>
-          <a:prstGeom xmlns:a="http://schemas.openxmlformats.org/drawingml/2006/main" prst="roundRect">
-            <a:avLst>
-              <a:gd name="adj" fmla="val 8537"/>
-            </a:avLst>
-          </a:prstGeom>
-          <a:solidFill xmlns:a="http://schemas.openxmlformats.org/drawingml/2006/main">
-            <a:srgbClr val="FCEEEA"/>
-          </a:solidFill>
-          <a:ln xmlns:a="http://schemas.openxmlformats.org/drawingml/2006/main" w="19050">
-            <a:solidFill>
-              <a:srgbClr val="E76F51"/>
-            </a:solidFill>
-            <a:prstDash val="solid"/>
-          </a:ln>
-        </p:spPr>
-      </p:sp>
-      <p:sp>
-        <p:nvSpPr>
-          <p:cNvPr id="19" name="">
-            <a:extLst xmlns:a="http://schemas.openxmlformats.org/drawingml/2006/main">
-              <a:ext uri="{FF2B5EF4-FFF2-40B4-BE49-F238E27FC236}">
-                <a16:creationId xmlns:a16="http://schemas.microsoft.com/office/drawing/2014/main" id="{28965313-1BE3-40BE-8873-B0B89494FEE3}"/>
-              </a:ext>
-            </a:extLst>
-          </p:cNvPr>
-          <p:cNvSpPr>
-            <a:spLocks xmlns:a="http://schemas.openxmlformats.org/drawingml/2006/main" noGrp="1"/>
-          </p:cNvSpPr>
-          <p:nvPr/>
-        </p:nvSpPr>
-        <p:spPr>
-          <a:xfrm xmlns:a="http://schemas.openxmlformats.org/drawingml/2006/main">
-            <a:off x="7029450" y="2762250"/>
-            <a:ext cx="1143000" cy="552450"/>
-          </a:xfrm>
-          <a:prstGeom xmlns:a="http://schemas.openxmlformats.org/drawingml/2006/main" prst="rect">
-            <a:avLst/>
-          </a:prstGeom>
-          <a:noFill xmlns:a="http://schemas.openxmlformats.org/drawingml/2006/main"/>
-          <a:ln xmlns:a="http://schemas.openxmlformats.org/drawingml/2006/main" w="0">
-            <a:noFill/>
-            <a:prstDash val="solid"/>
-          </a:ln>
-        </p:spPr>
-        <p:txBody>
-          <a:bodyPr xmlns:a="http://schemas.openxmlformats.org/drawingml/2006/main" wrap="square" lIns="38100" tIns="19050" rIns="38100" bIns="19050" anchor="ctr">
-            <a:normAutofit fontScale="100000"/>
-          </a:bodyPr>
-          <a:lstStyle xmlns:a="http://schemas.openxmlformats.org/drawingml/2006/main"/>
-          <a:p xmlns:a="http://schemas.openxmlformats.org/drawingml/2006/main">
-            <a:pPr algn="ctr">
-              <a:lnSpc>
-                <a:spcPct val="105000"/>
-              </a:lnSpc>
-              <a:buNone/>
-              <a:defRPr sz="1350" b="1" i="0">
+              <a:t>每个输入、每种算法：5 次预热，再测量 20 次</a:t>
+            </a:r>
+          </a:p>
+        </p:txBody>
+      </p:sp>
+      <p:sp>
+        <p:nvSpPr>
+          <p:cNvPr id="22" name="">
+            <a:extLst xmlns:a="http://schemas.openxmlformats.org/drawingml/2006/main">
+              <a:ext uri="{FF2B5EF4-FFF2-40B4-BE49-F238E27FC236}">
+                <a16:creationId xmlns:a16="http://schemas.microsoft.com/office/drawing/2014/main" id="{15E07ED1-7414-4405-AAC8-9EE30A614516}"/>
+              </a:ext>
+            </a:extLst>
+          </p:cNvPr>
+          <p:cNvSpPr>
+            <a:spLocks xmlns:a="http://schemas.openxmlformats.org/drawingml/2006/main" noGrp="1"/>
+          </p:cNvSpPr>
+          <p:nvPr/>
+        </p:nvSpPr>
+        <p:spPr>
+          <a:xfrm xmlns:a="http://schemas.openxmlformats.org/drawingml/2006/main">
+            <a:off x="800100" y="4029075"/>
+            <a:ext cx="10591800" cy="323850"/>
+          </a:xfrm>
+          <a:prstGeom xmlns:a="http://schemas.openxmlformats.org/drawingml/2006/main" prst="rect">
+            <a:avLst/>
+          </a:prstGeom>
+          <a:noFill xmlns:a="http://schemas.openxmlformats.org/drawingml/2006/main"/>
+          <a:ln xmlns:a="http://schemas.openxmlformats.org/drawingml/2006/main" w="0">
+            <a:noFill/>
+            <a:prstDash val="solid"/>
+          </a:ln>
+        </p:spPr>
+        <p:txBody>
+          <a:bodyPr xmlns:a="http://schemas.openxmlformats.org/drawingml/2006/main" wrap="square" lIns="38100" tIns="19050" rIns="38100" bIns="19050" anchor="t">
+            <a:normAutofit fontScale="100000"/>
+          </a:bodyPr>
+          <a:lstStyle xmlns:a="http://schemas.openxmlformats.org/drawingml/2006/main"/>
+          <a:p xmlns:a="http://schemas.openxmlformats.org/drawingml/2006/main">
+            <a:pPr algn="l">
+              <a:lnSpc>
+                <a:spcPct val="105000"/>
+              </a:lnSpc>
+              <a:buNone/>
+              <a:defRPr sz="1725" b="1" i="0">
+                <a:solidFill>
+                  <a:srgbClr val="2A9D8F"/>
+                </a:solidFill>
+              </a:defRPr>
+            </a:pPr>
+            <a:r>
+              <a:rPr sz="1725" b="1" i="0">
+                <a:solidFill>
+                  <a:srgbClr val="2A9D8F"/>
+                </a:solidFill>
+              </a:rPr>
+              <a:t>60 个输入 × 3 个算法 × 20 次调用 = 3,600 条测量记录</a:t>
+            </a:r>
+          </a:p>
+        </p:txBody>
+      </p:sp>
+      <p:sp>
+        <p:nvSpPr>
+          <p:cNvPr id="23" name="">
+            <a:extLst xmlns:a="http://schemas.openxmlformats.org/drawingml/2006/main">
+              <a:ext uri="{FF2B5EF4-FFF2-40B4-BE49-F238E27FC236}">
+                <a16:creationId xmlns:a16="http://schemas.microsoft.com/office/drawing/2014/main" id="{9A077561-659E-422F-93B8-5EBB24A0ACD1}"/>
+              </a:ext>
+            </a:extLst>
+          </p:cNvPr>
+          <p:cNvSpPr>
+            <a:spLocks xmlns:a="http://schemas.openxmlformats.org/drawingml/2006/main" noGrp="1"/>
+          </p:cNvSpPr>
+          <p:nvPr/>
+        </p:nvSpPr>
+        <p:spPr>
+          <a:xfrm xmlns:a="http://schemas.openxmlformats.org/drawingml/2006/main">
+            <a:off x="800100" y="4514850"/>
+            <a:ext cx="10591800" cy="304800"/>
+          </a:xfrm>
+          <a:prstGeom xmlns:a="http://schemas.openxmlformats.org/drawingml/2006/main" prst="rect">
+            <a:avLst/>
+          </a:prstGeom>
+          <a:noFill xmlns:a="http://schemas.openxmlformats.org/drawingml/2006/main"/>
+          <a:ln xmlns:a="http://schemas.openxmlformats.org/drawingml/2006/main" w="0">
+            <a:noFill/>
+            <a:prstDash val="solid"/>
+          </a:ln>
+        </p:spPr>
+        <p:txBody>
+          <a:bodyPr xmlns:a="http://schemas.openxmlformats.org/drawingml/2006/main" wrap="square" lIns="38100" tIns="19050" rIns="38100" bIns="19050" anchor="t">
+            <a:normAutofit fontScale="100000"/>
+          </a:bodyPr>
+          <a:lstStyle xmlns:a="http://schemas.openxmlformats.org/drawingml/2006/main"/>
+          <a:p xmlns:a="http://schemas.openxmlformats.org/drawingml/2006/main">
+            <a:pPr algn="l">
+              <a:lnSpc>
+                <a:spcPct val="105000"/>
+              </a:lnSpc>
+              <a:buNone/>
+              <a:defRPr sz="1500" b="0" i="0">
+                <a:solidFill>
+                  <a:srgbClr val="243B53"/>
+                </a:solidFill>
+              </a:defRPr>
+            </a:pPr>
+            <a:r>
+              <a:rPr sz="1500" b="0" i="0">
+                <a:solidFill>
+                  <a:srgbClr val="243B53"/>
+                </a:solidFill>
+              </a:rPr>
+              <a:t>Paper 计时前：认证，每个 case 一次 checked-state audit</a:t>
+            </a:r>
+          </a:p>
+        </p:txBody>
+      </p:sp>
+      <p:sp>
+        <p:nvSpPr>
+          <p:cNvPr id="24" name="">
+            <a:extLst xmlns:a="http://schemas.openxmlformats.org/drawingml/2006/main">
+              <a:ext uri="{FF2B5EF4-FFF2-40B4-BE49-F238E27FC236}">
+                <a16:creationId xmlns:a16="http://schemas.microsoft.com/office/drawing/2014/main" id="{0F664057-BBB4-4293-9E6D-75527D85342C}"/>
+              </a:ext>
+            </a:extLst>
+          </p:cNvPr>
+          <p:cNvSpPr>
+            <a:spLocks xmlns:a="http://schemas.openxmlformats.org/drawingml/2006/main" noGrp="1"/>
+          </p:cNvSpPr>
+          <p:nvPr/>
+        </p:nvSpPr>
+        <p:spPr>
+          <a:xfrm xmlns:a="http://schemas.openxmlformats.org/drawingml/2006/main">
+            <a:off x="800100" y="4857750"/>
+            <a:ext cx="10591800" cy="304800"/>
+          </a:xfrm>
+          <a:prstGeom xmlns:a="http://schemas.openxmlformats.org/drawingml/2006/main" prst="rect">
+            <a:avLst/>
+          </a:prstGeom>
+          <a:noFill xmlns:a="http://schemas.openxmlformats.org/drawingml/2006/main"/>
+          <a:ln xmlns:a="http://schemas.openxmlformats.org/drawingml/2006/main" w="0">
+            <a:noFill/>
+            <a:prstDash val="solid"/>
+          </a:ln>
+        </p:spPr>
+        <p:txBody>
+          <a:bodyPr xmlns:a="http://schemas.openxmlformats.org/drawingml/2006/main" wrap="square" lIns="38100" tIns="19050" rIns="38100" bIns="19050" anchor="t">
+            <a:normAutofit fontScale="100000"/>
+          </a:bodyPr>
+          <a:lstStyle xmlns:a="http://schemas.openxmlformats.org/drawingml/2006/main"/>
+          <a:p xmlns:a="http://schemas.openxmlformats.org/drawingml/2006/main">
+            <a:pPr algn="l">
+              <a:lnSpc>
+                <a:spcPct val="105000"/>
+              </a:lnSpc>
+              <a:buNone/>
+              <a:defRPr sz="1500" b="0" i="0">
+                <a:solidFill>
+                  <a:srgbClr val="243B53"/>
+                </a:solidFill>
+              </a:defRPr>
+            </a:pPr>
+            <a:r>
+              <a:rPr sz="1500" b="0" i="0">
+                <a:solidFill>
+                  <a:srgbClr val="243B53"/>
+                </a:solidFill>
+              </a:rPr>
+              <a:t>Paper minimal：相同核心、全部点；不记录详细 trace，省略部分诊断检查</a:t>
+            </a:r>
+          </a:p>
+        </p:txBody>
+      </p:sp>
+      <p:sp>
+        <p:nvSpPr>
+          <p:cNvPr id="25" name="">
+            <a:extLst xmlns:a="http://schemas.openxmlformats.org/drawingml/2006/main">
+              <a:ext uri="{FF2B5EF4-FFF2-40B4-BE49-F238E27FC236}">
+                <a16:creationId xmlns:a16="http://schemas.microsoft.com/office/drawing/2014/main" id="{85726E55-4107-47A9-A332-28C91FDB6A75}"/>
+              </a:ext>
+            </a:extLst>
+          </p:cNvPr>
+          <p:cNvSpPr>
+            <a:spLocks xmlns:a="http://schemas.openxmlformats.org/drawingml/2006/main" noGrp="1"/>
+          </p:cNvSpPr>
+          <p:nvPr/>
+        </p:nvSpPr>
+        <p:spPr>
+          <a:xfrm xmlns:a="http://schemas.openxmlformats.org/drawingml/2006/main">
+            <a:off x="800100" y="5200650"/>
+            <a:ext cx="10591800" cy="304800"/>
+          </a:xfrm>
+          <a:prstGeom xmlns:a="http://schemas.openxmlformats.org/drawingml/2006/main" prst="rect">
+            <a:avLst/>
+          </a:prstGeom>
+          <a:noFill xmlns:a="http://schemas.openxmlformats.org/drawingml/2006/main"/>
+          <a:ln xmlns:a="http://schemas.openxmlformats.org/drawingml/2006/main" w="0">
+            <a:noFill/>
+            <a:prstDash val="solid"/>
+          </a:ln>
+        </p:spPr>
+        <p:txBody>
+          <a:bodyPr xmlns:a="http://schemas.openxmlformats.org/drawingml/2006/main" wrap="square" lIns="38100" tIns="19050" rIns="38100" bIns="19050" anchor="t">
+            <a:normAutofit fontScale="100000"/>
+          </a:bodyPr>
+          <a:lstStyle xmlns:a="http://schemas.openxmlformats.org/drawingml/2006/main"/>
+          <a:p xmlns:a="http://schemas.openxmlformats.org/drawingml/2006/main">
+            <a:pPr algn="l">
+              <a:lnSpc>
+                <a:spcPct val="105000"/>
+              </a:lnSpc>
+              <a:buNone/>
+              <a:defRPr sz="1500" b="1" i="0">
                 <a:solidFill>
                   <a:srgbClr val="E76F51"/>
                 </a:solidFill>
               </a:defRPr>
             </a:pPr>
             <a:r>
-              <a:rPr sz="1350" b="1" i="0">
+              <a:rPr sz="1500" b="1" i="0">
                 <a:solidFill>
                   <a:srgbClr val="E76F51"/>
                 </a:solidFill>
               </a:rPr>
-              <a:t>测量</a:t>
-            </a:r>
-          </a:p>
-        </p:txBody>
-      </p:sp>
-      <p:sp>
-        <p:nvSpPr>
-          <p:cNvPr id="20" name="">
-            <a:extLst xmlns:a="http://schemas.openxmlformats.org/drawingml/2006/main">
-              <a:ext uri="{FF2B5EF4-FFF2-40B4-BE49-F238E27FC236}">
-                <a16:creationId xmlns:a16="http://schemas.microsoft.com/office/drawing/2014/main" id="{50A879CC-45EC-4C47-A508-523E31749C8A}"/>
-              </a:ext>
-            </a:extLst>
-          </p:cNvPr>
-          <p:cNvSpPr>
-            <a:spLocks xmlns:a="http://schemas.openxmlformats.org/drawingml/2006/main" noGrp="1"/>
-          </p:cNvSpPr>
-          <p:nvPr/>
-        </p:nvSpPr>
-        <p:spPr>
-          <a:xfrm xmlns:a="http://schemas.openxmlformats.org/drawingml/2006/main">
-            <a:off x="8515350" y="2647950"/>
-            <a:ext cx="1295400" cy="781050"/>
-          </a:xfrm>
-          <a:prstGeom xmlns:a="http://schemas.openxmlformats.org/drawingml/2006/main" prst="roundRect">
-            <a:avLst>
-              <a:gd name="adj" fmla="val 8537"/>
-            </a:avLst>
-          </a:prstGeom>
-          <a:solidFill xmlns:a="http://schemas.openxmlformats.org/drawingml/2006/main">
-            <a:srgbClr val="FFFFFF"/>
-          </a:solidFill>
-          <a:ln xmlns:a="http://schemas.openxmlformats.org/drawingml/2006/main" w="14288">
-            <a:solidFill>
-              <a:srgbClr val="52606D"/>
-            </a:solidFill>
-            <a:prstDash val="solid"/>
-          </a:ln>
-        </p:spPr>
-      </p:sp>
-      <p:sp>
-        <p:nvSpPr>
-          <p:cNvPr id="21" name="">
-            <a:extLst xmlns:a="http://schemas.openxmlformats.org/drawingml/2006/main">
-              <a:ext uri="{FF2B5EF4-FFF2-40B4-BE49-F238E27FC236}">
-                <a16:creationId xmlns:a16="http://schemas.microsoft.com/office/drawing/2014/main" id="{77D9F07F-BD45-407B-8B8F-65CD2DF7A598}"/>
-              </a:ext>
-            </a:extLst>
-          </p:cNvPr>
-          <p:cNvSpPr>
-            <a:spLocks xmlns:a="http://schemas.openxmlformats.org/drawingml/2006/main" noGrp="1"/>
-          </p:cNvSpPr>
-          <p:nvPr/>
-        </p:nvSpPr>
-        <p:spPr>
-          <a:xfrm xmlns:a="http://schemas.openxmlformats.org/drawingml/2006/main">
-            <a:off x="8591550" y="2762250"/>
-            <a:ext cx="1143000" cy="552450"/>
-          </a:xfrm>
-          <a:prstGeom xmlns:a="http://schemas.openxmlformats.org/drawingml/2006/main" prst="rect">
-            <a:avLst/>
-          </a:prstGeom>
-          <a:noFill xmlns:a="http://schemas.openxmlformats.org/drawingml/2006/main"/>
-          <a:ln xmlns:a="http://schemas.openxmlformats.org/drawingml/2006/main" w="0">
-            <a:noFill/>
-            <a:prstDash val="solid"/>
-          </a:ln>
-        </p:spPr>
-        <p:txBody>
-          <a:bodyPr xmlns:a="http://schemas.openxmlformats.org/drawingml/2006/main" wrap="square" lIns="38100" tIns="19050" rIns="38100" bIns="19050" anchor="ctr">
-            <a:normAutofit fontScale="100000"/>
-          </a:bodyPr>
-          <a:lstStyle xmlns:a="http://schemas.openxmlformats.org/drawingml/2006/main"/>
-          <a:p xmlns:a="http://schemas.openxmlformats.org/drawingml/2006/main">
-            <a:pPr algn="ctr">
-              <a:lnSpc>
-                <a:spcPct val="105000"/>
-              </a:lnSpc>
-              <a:buNone/>
-              <a:defRPr sz="1350" b="1" i="0">
-                <a:solidFill>
-                  <a:srgbClr val="102A43"/>
-                </a:solidFill>
-              </a:defRPr>
-            </a:pPr>
-            <a:r>
-              <a:rPr sz="1350" b="1" i="0">
-                <a:solidFill>
-                  <a:srgbClr val="102A43"/>
-                </a:solidFill>
-              </a:rPr>
-              <a:t>汇总</a:t>
-            </a:r>
-          </a:p>
-        </p:txBody>
-      </p:sp>
-      <p:sp>
-        <p:nvSpPr>
-          <p:cNvPr id="22" name="">
-            <a:extLst xmlns:a="http://schemas.openxmlformats.org/drawingml/2006/main">
-              <a:ext uri="{FF2B5EF4-FFF2-40B4-BE49-F238E27FC236}">
-                <a16:creationId xmlns:a16="http://schemas.microsoft.com/office/drawing/2014/main" id="{A5928DA0-978E-4180-86B2-6711DBDC4120}"/>
-              </a:ext>
-            </a:extLst>
-          </p:cNvPr>
-          <p:cNvSpPr>
-            <a:spLocks xmlns:a="http://schemas.openxmlformats.org/drawingml/2006/main" noGrp="1"/>
-          </p:cNvSpPr>
-          <p:nvPr/>
-        </p:nvSpPr>
-        <p:spPr>
-          <a:xfrm xmlns:a="http://schemas.openxmlformats.org/drawingml/2006/main">
-            <a:off x="10077450" y="2647950"/>
-            <a:ext cx="1295400" cy="781050"/>
-          </a:xfrm>
-          <a:prstGeom xmlns:a="http://schemas.openxmlformats.org/drawingml/2006/main" prst="roundRect">
-            <a:avLst>
-              <a:gd name="adj" fmla="val 8537"/>
-            </a:avLst>
-          </a:prstGeom>
-          <a:solidFill xmlns:a="http://schemas.openxmlformats.org/drawingml/2006/main">
-            <a:srgbClr val="FFFFFF"/>
-          </a:solidFill>
-          <a:ln xmlns:a="http://schemas.openxmlformats.org/drawingml/2006/main" w="14288">
-            <a:solidFill>
-              <a:srgbClr val="52606D"/>
-            </a:solidFill>
-            <a:prstDash val="solid"/>
-          </a:ln>
-        </p:spPr>
-      </p:sp>
-      <p:sp>
-        <p:nvSpPr>
-          <p:cNvPr id="23" name="">
-            <a:extLst xmlns:a="http://schemas.openxmlformats.org/drawingml/2006/main">
-              <a:ext uri="{FF2B5EF4-FFF2-40B4-BE49-F238E27FC236}">
-                <a16:creationId xmlns:a16="http://schemas.microsoft.com/office/drawing/2014/main" id="{22ECAB2A-9BC3-43EB-A0B9-25728678A069}"/>
-              </a:ext>
-            </a:extLst>
-          </p:cNvPr>
-          <p:cNvSpPr>
-            <a:spLocks xmlns:a="http://schemas.openxmlformats.org/drawingml/2006/main" noGrp="1"/>
-          </p:cNvSpPr>
-          <p:nvPr/>
-        </p:nvSpPr>
-        <p:spPr>
-          <a:xfrm xmlns:a="http://schemas.openxmlformats.org/drawingml/2006/main">
-            <a:off x="10153650" y="2762250"/>
-            <a:ext cx="1143000" cy="552450"/>
-          </a:xfrm>
-          <a:prstGeom xmlns:a="http://schemas.openxmlformats.org/drawingml/2006/main" prst="rect">
-            <a:avLst/>
-          </a:prstGeom>
-          <a:noFill xmlns:a="http://schemas.openxmlformats.org/drawingml/2006/main"/>
-          <a:ln xmlns:a="http://schemas.openxmlformats.org/drawingml/2006/main" w="0">
-            <a:noFill/>
-            <a:prstDash val="solid"/>
-          </a:ln>
-        </p:spPr>
-        <p:txBody>
-          <a:bodyPr xmlns:a="http://schemas.openxmlformats.org/drawingml/2006/main" wrap="square" lIns="38100" tIns="19050" rIns="38100" bIns="19050" anchor="ctr">
-            <a:normAutofit fontScale="100000"/>
-          </a:bodyPr>
-          <a:lstStyle xmlns:a="http://schemas.openxmlformats.org/drawingml/2006/main"/>
-          <a:p xmlns:a="http://schemas.openxmlformats.org/drawingml/2006/main">
-            <a:pPr algn="ctr">
-              <a:lnSpc>
-                <a:spcPct val="105000"/>
-              </a:lnSpc>
-              <a:buNone/>
-              <a:defRPr sz="1350" b="1" i="0">
-                <a:solidFill>
-                  <a:srgbClr val="102A43"/>
-                </a:solidFill>
-              </a:defRPr>
-            </a:pPr>
-            <a:r>
-              <a:rPr sz="1350" b="1" i="0">
-                <a:solidFill>
-                  <a:srgbClr val="102A43"/>
-                </a:solidFill>
-              </a:rPr>
-              <a:t>验证</a:t>
-            </a:r>
-          </a:p>
-          <a:p xmlns:a="http://schemas.openxmlformats.org/drawingml/2006/main">
-            <a:pPr algn="ctr">
-              <a:lnSpc>
-                <a:spcPct val="105000"/>
-              </a:lnSpc>
-              <a:buNone/>
-              <a:defRPr sz="1350" b="1" i="0">
-                <a:solidFill>
-                  <a:srgbClr val="102A43"/>
-                </a:solidFill>
-              </a:defRPr>
-            </a:pPr>
-            <a:r>
-              <a:rPr sz="1350" b="1" i="0">
-                <a:solidFill>
-                  <a:srgbClr val="102A43"/>
-                </a:solidFill>
-              </a:rPr>
-              <a:t>并归档</a:t>
-            </a:r>
-          </a:p>
-        </p:txBody>
-      </p:sp>
-      <p:cxnSp>
-        <p:nvCxnSpPr>
-          <p:cNvPr id="268" name=""/>
-          <p:cNvCxnSpPr>
-            <a:stCxn xmlns:a="http://schemas.openxmlformats.org/drawingml/2006/main" id="10" idx="3"/>
-            <a:endCxn xmlns:a="http://schemas.openxmlformats.org/drawingml/2006/main" id="12" idx="1"/>
-          </p:cNvCxnSpPr>
-          <p:nvPr/>
-        </p:nvCxnSpPr>
-        <p:spPr>
-          <a:xfrm xmlns:a="http://schemas.openxmlformats.org/drawingml/2006/main">
-            <a:off x="2000250" y="3038475"/>
-            <a:ext cx="266700" cy="0"/>
-          </a:xfrm>
-          <a:prstGeom xmlns:a="http://schemas.openxmlformats.org/drawingml/2006/main" prst="straightConnector1">
-            <a:avLst/>
-          </a:prstGeom>
-          <a:ln xmlns:a="http://schemas.openxmlformats.org/drawingml/2006/main" w="15240">
-            <a:solidFill>
-              <a:srgbClr val="52606D"/>
-            </a:solidFill>
-            <a:prstDash val="solid"/>
-            <a:tailEnd type="arrow" w="sm" len="sm"/>
-          </a:ln>
-        </p:spPr>
-      </p:cxnSp>
-      <p:cxnSp>
-        <p:nvCxnSpPr>
-          <p:cNvPr id="269" name=""/>
-          <p:cNvCxnSpPr>
-            <a:stCxn xmlns:a="http://schemas.openxmlformats.org/drawingml/2006/main" id="12" idx="3"/>
-            <a:endCxn xmlns:a="http://schemas.openxmlformats.org/drawingml/2006/main" id="14" idx="1"/>
-          </p:cNvCxnSpPr>
-          <p:nvPr/>
-        </p:nvCxnSpPr>
-        <p:spPr>
-          <a:xfrm xmlns:a="http://schemas.openxmlformats.org/drawingml/2006/main">
-            <a:off x="3562350" y="3038475"/>
-            <a:ext cx="266700" cy="0"/>
-          </a:xfrm>
-          <a:prstGeom xmlns:a="http://schemas.openxmlformats.org/drawingml/2006/main" prst="straightConnector1">
-            <a:avLst/>
-          </a:prstGeom>
-          <a:ln xmlns:a="http://schemas.openxmlformats.org/drawingml/2006/main" w="15240">
-            <a:solidFill>
-              <a:srgbClr val="52606D"/>
-            </a:solidFill>
-            <a:prstDash val="solid"/>
-            <a:tailEnd type="arrow" w="sm" len="sm"/>
-          </a:ln>
-        </p:spPr>
-      </p:cxnSp>
-      <p:cxnSp>
-        <p:nvCxnSpPr>
-          <p:cNvPr id="270" name=""/>
-          <p:cNvCxnSpPr>
-            <a:stCxn xmlns:a="http://schemas.openxmlformats.org/drawingml/2006/main" id="14" idx="3"/>
-            <a:endCxn xmlns:a="http://schemas.openxmlformats.org/drawingml/2006/main" id="16" idx="1"/>
-          </p:cNvCxnSpPr>
-          <p:nvPr/>
-        </p:nvCxnSpPr>
-        <p:spPr>
-          <a:xfrm xmlns:a="http://schemas.openxmlformats.org/drawingml/2006/main">
-            <a:off x="5124450" y="3038475"/>
-            <a:ext cx="266700" cy="0"/>
-          </a:xfrm>
-          <a:prstGeom xmlns:a="http://schemas.openxmlformats.org/drawingml/2006/main" prst="straightConnector1">
-            <a:avLst/>
-          </a:prstGeom>
-          <a:ln xmlns:a="http://schemas.openxmlformats.org/drawingml/2006/main" w="15240">
-            <a:solidFill>
-              <a:srgbClr val="52606D"/>
-            </a:solidFill>
-            <a:prstDash val="solid"/>
-            <a:tailEnd type="arrow" w="sm" len="sm"/>
-          </a:ln>
-        </p:spPr>
-      </p:cxnSp>
-      <p:cxnSp>
-        <p:nvCxnSpPr>
-          <p:cNvPr id="271" name=""/>
-          <p:cNvCxnSpPr>
-            <a:stCxn xmlns:a="http://schemas.openxmlformats.org/drawingml/2006/main" id="16" idx="3"/>
-            <a:endCxn xmlns:a="http://schemas.openxmlformats.org/drawingml/2006/main" id="18" idx="1"/>
-          </p:cNvCxnSpPr>
-          <p:nvPr/>
-        </p:nvCxnSpPr>
-        <p:spPr>
-          <a:xfrm xmlns:a="http://schemas.openxmlformats.org/drawingml/2006/main">
-            <a:off x="6686550" y="3038475"/>
-            <a:ext cx="266700" cy="0"/>
-          </a:xfrm>
-          <a:prstGeom xmlns:a="http://schemas.openxmlformats.org/drawingml/2006/main" prst="straightConnector1">
-            <a:avLst/>
-          </a:prstGeom>
-          <a:ln xmlns:a="http://schemas.openxmlformats.org/drawingml/2006/main" w="15240">
-            <a:solidFill>
-              <a:srgbClr val="52606D"/>
-            </a:solidFill>
-            <a:prstDash val="solid"/>
-            <a:tailEnd type="arrow" w="sm" len="sm"/>
-          </a:ln>
-        </p:spPr>
-      </p:cxnSp>
-      <p:cxnSp>
-        <p:nvCxnSpPr>
-          <p:cNvPr id="272" name=""/>
-          <p:cNvCxnSpPr>
-            <a:stCxn xmlns:a="http://schemas.openxmlformats.org/drawingml/2006/main" id="18" idx="3"/>
-            <a:endCxn xmlns:a="http://schemas.openxmlformats.org/drawingml/2006/main" id="20" idx="1"/>
-          </p:cNvCxnSpPr>
-          <p:nvPr/>
-        </p:nvCxnSpPr>
-        <p:spPr>
-          <a:xfrm xmlns:a="http://schemas.openxmlformats.org/drawingml/2006/main">
-            <a:off x="8248650" y="3038475"/>
-            <a:ext cx="266700" cy="0"/>
-          </a:xfrm>
-          <a:prstGeom xmlns:a="http://schemas.openxmlformats.org/drawingml/2006/main" prst="straightConnector1">
-            <a:avLst/>
-          </a:prstGeom>
-          <a:ln xmlns:a="http://schemas.openxmlformats.org/drawingml/2006/main" w="15240">
-            <a:solidFill>
-              <a:srgbClr val="52606D"/>
-            </a:solidFill>
-            <a:prstDash val="solid"/>
-            <a:tailEnd type="arrow" w="sm" len="sm"/>
-          </a:ln>
-        </p:spPr>
-      </p:cxnSp>
-      <p:cxnSp>
-        <p:nvCxnSpPr>
-          <p:cNvPr id="273" name=""/>
-          <p:cNvCxnSpPr>
-            <a:stCxn xmlns:a="http://schemas.openxmlformats.org/drawingml/2006/main" id="20" idx="3"/>
-            <a:endCxn xmlns:a="http://schemas.openxmlformats.org/drawingml/2006/main" id="22" idx="1"/>
-          </p:cNvCxnSpPr>
-          <p:nvPr/>
-        </p:nvCxnSpPr>
-        <p:spPr>
-          <a:xfrm xmlns:a="http://schemas.openxmlformats.org/drawingml/2006/main">
-            <a:off x="9810750" y="3038475"/>
-            <a:ext cx="266700" cy="0"/>
-          </a:xfrm>
-          <a:prstGeom xmlns:a="http://schemas.openxmlformats.org/drawingml/2006/main" prst="straightConnector1">
-            <a:avLst/>
-          </a:prstGeom>
-          <a:ln xmlns:a="http://schemas.openxmlformats.org/drawingml/2006/main" w="15240">
-            <a:solidFill>
-              <a:srgbClr val="52606D"/>
-            </a:solidFill>
-            <a:prstDash val="solid"/>
-            <a:tailEnd type="arrow" w="sm" len="sm"/>
-          </a:ln>
-        </p:spPr>
-      </p:cxnSp>
-      <p:sp>
-        <p:nvSpPr>
-          <p:cNvPr id="30" name="">
-            <a:extLst xmlns:a="http://schemas.openxmlformats.org/drawingml/2006/main">
-              <a:ext uri="{FF2B5EF4-FFF2-40B4-BE49-F238E27FC236}">
-                <a16:creationId xmlns:a16="http://schemas.microsoft.com/office/drawing/2014/main" id="{E202C37E-C549-473E-A259-B150B9D5699E}"/>
-              </a:ext>
-            </a:extLst>
-          </p:cNvPr>
-          <p:cNvSpPr>
-            <a:spLocks xmlns:a="http://schemas.openxmlformats.org/drawingml/2006/main" noGrp="1"/>
-          </p:cNvSpPr>
-          <p:nvPr/>
-        </p:nvSpPr>
-        <p:spPr>
-          <a:xfrm xmlns:a="http://schemas.openxmlformats.org/drawingml/2006/main">
-            <a:off x="723900" y="3905250"/>
-            <a:ext cx="3219450" cy="990600"/>
-          </a:xfrm>
-          <a:prstGeom xmlns:a="http://schemas.openxmlformats.org/drawingml/2006/main" prst="roundRect">
-            <a:avLst>
-              <a:gd name="adj" fmla="val 7692"/>
-            </a:avLst>
-          </a:prstGeom>
-          <a:solidFill xmlns:a="http://schemas.openxmlformats.org/drawingml/2006/main">
-            <a:srgbClr val="E8F5F3"/>
-          </a:solidFill>
-          <a:ln xmlns:a="http://schemas.openxmlformats.org/drawingml/2006/main" w="14288">
-            <a:solidFill>
-              <a:srgbClr val="2A9D8F"/>
-            </a:solidFill>
-            <a:prstDash val="solid"/>
-          </a:ln>
-        </p:spPr>
-      </p:sp>
-      <p:sp>
-        <p:nvSpPr>
-          <p:cNvPr id="31" name="">
-            <a:extLst xmlns:a="http://schemas.openxmlformats.org/drawingml/2006/main">
-              <a:ext uri="{FF2B5EF4-FFF2-40B4-BE49-F238E27FC236}">
-                <a16:creationId xmlns:a16="http://schemas.microsoft.com/office/drawing/2014/main" id="{71205807-069E-4ACF-9BFA-CA4F68F8C2CA}"/>
-              </a:ext>
-            </a:extLst>
-          </p:cNvPr>
-          <p:cNvSpPr>
-            <a:spLocks xmlns:a="http://schemas.openxmlformats.org/drawingml/2006/main" noGrp="1"/>
-          </p:cNvSpPr>
-          <p:nvPr/>
-        </p:nvSpPr>
-        <p:spPr>
-          <a:xfrm xmlns:a="http://schemas.openxmlformats.org/drawingml/2006/main">
-            <a:off x="876300" y="4038600"/>
-            <a:ext cx="2914650" cy="400050"/>
-          </a:xfrm>
-          <a:prstGeom xmlns:a="http://schemas.openxmlformats.org/drawingml/2006/main" prst="rect">
-            <a:avLst/>
-          </a:prstGeom>
-          <a:noFill xmlns:a="http://schemas.openxmlformats.org/drawingml/2006/main"/>
-          <a:ln xmlns:a="http://schemas.openxmlformats.org/drawingml/2006/main" w="0">
-            <a:noFill/>
-            <a:prstDash val="solid"/>
-          </a:ln>
-        </p:spPr>
-        <p:txBody>
-          <a:bodyPr xmlns:a="http://schemas.openxmlformats.org/drawingml/2006/main" wrap="square" lIns="38100" tIns="19050" rIns="38100" bIns="19050" anchor="ctr">
-            <a:normAutofit fontScale="100000"/>
-          </a:bodyPr>
-          <a:lstStyle xmlns:a="http://schemas.openxmlformats.org/drawingml/2006/main"/>
-          <a:p xmlns:a="http://schemas.openxmlformats.org/drawingml/2006/main">
-            <a:pPr algn="ctr">
-              <a:lnSpc>
-                <a:spcPct val="105000"/>
-              </a:lnSpc>
-              <a:buNone/>
-              <a:defRPr sz="1350" b="1" i="0">
-                <a:solidFill>
-                  <a:srgbClr val="2A9D8F"/>
-                </a:solidFill>
-              </a:defRPr>
-            </a:pPr>
-            <a:r>
-              <a:rPr sz="1350" b="1" i="0">
-                <a:solidFill>
-                  <a:srgbClr val="2A9D8F"/>
-                </a:solidFill>
-              </a:rPr>
-              <a:t>认证位于 paper 计时之外</a:t>
-            </a:r>
-          </a:p>
-        </p:txBody>
-      </p:sp>
-      <p:sp>
-        <p:nvSpPr>
-          <p:cNvPr id="32" name="">
-            <a:extLst xmlns:a="http://schemas.openxmlformats.org/drawingml/2006/main">
-              <a:ext uri="{FF2B5EF4-FFF2-40B4-BE49-F238E27FC236}">
-                <a16:creationId xmlns:a16="http://schemas.microsoft.com/office/drawing/2014/main" id="{BF133856-D029-46CA-A7C4-21C4CC1287FF}"/>
-              </a:ext>
-            </a:extLst>
-          </p:cNvPr>
-          <p:cNvSpPr>
-            <a:spLocks xmlns:a="http://schemas.openxmlformats.org/drawingml/2006/main" noGrp="1"/>
-          </p:cNvSpPr>
-          <p:nvPr/>
-        </p:nvSpPr>
-        <p:spPr>
-          <a:xfrm xmlns:a="http://schemas.openxmlformats.org/drawingml/2006/main">
-            <a:off x="895350" y="4495800"/>
-            <a:ext cx="2876550" cy="266700"/>
-          </a:xfrm>
-          <a:prstGeom xmlns:a="http://schemas.openxmlformats.org/drawingml/2006/main" prst="rect">
-            <a:avLst/>
-          </a:prstGeom>
-          <a:noFill xmlns:a="http://schemas.openxmlformats.org/drawingml/2006/main"/>
-          <a:ln xmlns:a="http://schemas.openxmlformats.org/drawingml/2006/main" w="0">
-            <a:noFill/>
-            <a:prstDash val="solid"/>
-          </a:ln>
-        </p:spPr>
-        <p:txBody>
-          <a:bodyPr xmlns:a="http://schemas.openxmlformats.org/drawingml/2006/main" wrap="square" lIns="38100" tIns="19050" rIns="38100" bIns="19050" anchor="ctr">
-            <a:normAutofit fontScale="100000"/>
-          </a:bodyPr>
-          <a:lstStyle xmlns:a="http://schemas.openxmlformats.org/drawingml/2006/main"/>
-          <a:p xmlns:a="http://schemas.openxmlformats.org/drawingml/2006/main">
-            <a:pPr algn="ctr">
-              <a:lnSpc>
-                <a:spcPct val="105000"/>
-              </a:lnSpc>
-              <a:buNone/>
-              <a:defRPr sz="1275" b="0" i="0">
-                <a:solidFill>
-                  <a:srgbClr val="243B53"/>
-                </a:solidFill>
-              </a:defRPr>
-            </a:pPr>
-            <a:r>
-              <a:rPr sz="1275" b="0" i="0">
-                <a:solidFill>
-                  <a:srgbClr val="243B53"/>
-                </a:solidFill>
-              </a:rPr>
-              <a:t>有效输入前置条件</a:t>
-            </a:r>
-          </a:p>
-        </p:txBody>
-      </p:sp>
-      <p:sp>
-        <p:nvSpPr>
-          <p:cNvPr id="33" name="">
-            <a:extLst xmlns:a="http://schemas.openxmlformats.org/drawingml/2006/main">
-              <a:ext uri="{FF2B5EF4-FFF2-40B4-BE49-F238E27FC236}">
-                <a16:creationId xmlns:a16="http://schemas.microsoft.com/office/drawing/2014/main" id="{1C4ED589-E1D5-4A8C-A2F1-E0CE9E4CD3BA}"/>
-              </a:ext>
-            </a:extLst>
-          </p:cNvPr>
-          <p:cNvSpPr>
-            <a:spLocks xmlns:a="http://schemas.openxmlformats.org/drawingml/2006/main" noGrp="1"/>
-          </p:cNvSpPr>
-          <p:nvPr/>
-        </p:nvSpPr>
-        <p:spPr>
-          <a:xfrm xmlns:a="http://schemas.openxmlformats.org/drawingml/2006/main">
-            <a:off x="4248150" y="3905250"/>
-            <a:ext cx="3219450" cy="990600"/>
-          </a:xfrm>
-          <a:prstGeom xmlns:a="http://schemas.openxmlformats.org/drawingml/2006/main" prst="roundRect">
-            <a:avLst>
-              <a:gd name="adj" fmla="val 7692"/>
-            </a:avLst>
-          </a:prstGeom>
-          <a:solidFill xmlns:a="http://schemas.openxmlformats.org/drawingml/2006/main">
-            <a:srgbClr val="E8F5F3"/>
-          </a:solidFill>
-          <a:ln xmlns:a="http://schemas.openxmlformats.org/drawingml/2006/main" w="14288">
-            <a:solidFill>
-              <a:srgbClr val="2A9D8F"/>
-            </a:solidFill>
-            <a:prstDash val="solid"/>
-          </a:ln>
-        </p:spPr>
-      </p:sp>
-      <p:sp>
-        <p:nvSpPr>
-          <p:cNvPr id="34" name="">
-            <a:extLst xmlns:a="http://schemas.openxmlformats.org/drawingml/2006/main">
-              <a:ext uri="{FF2B5EF4-FFF2-40B4-BE49-F238E27FC236}">
-                <a16:creationId xmlns:a16="http://schemas.microsoft.com/office/drawing/2014/main" id="{0D56A79E-3C0E-40C2-A0F8-E56B1B95AF68}"/>
-              </a:ext>
-            </a:extLst>
-          </p:cNvPr>
-          <p:cNvSpPr>
-            <a:spLocks xmlns:a="http://schemas.openxmlformats.org/drawingml/2006/main" noGrp="1"/>
-          </p:cNvSpPr>
-          <p:nvPr/>
-        </p:nvSpPr>
-        <p:spPr>
-          <a:xfrm xmlns:a="http://schemas.openxmlformats.org/drawingml/2006/main">
-            <a:off x="4400550" y="4038600"/>
-            <a:ext cx="2914650" cy="400050"/>
-          </a:xfrm>
-          <a:prstGeom xmlns:a="http://schemas.openxmlformats.org/drawingml/2006/main" prst="rect">
-            <a:avLst/>
-          </a:prstGeom>
-          <a:noFill xmlns:a="http://schemas.openxmlformats.org/drawingml/2006/main"/>
-          <a:ln xmlns:a="http://schemas.openxmlformats.org/drawingml/2006/main" w="0">
-            <a:noFill/>
-            <a:prstDash val="solid"/>
-          </a:ln>
-        </p:spPr>
-        <p:txBody>
-          <a:bodyPr xmlns:a="http://schemas.openxmlformats.org/drawingml/2006/main" wrap="square" lIns="38100" tIns="19050" rIns="38100" bIns="19050" anchor="ctr">
-            <a:normAutofit fontScale="85686"/>
-          </a:bodyPr>
-          <a:lstStyle xmlns:a="http://schemas.openxmlformats.org/drawingml/2006/main"/>
-          <a:p xmlns:a="http://schemas.openxmlformats.org/drawingml/2006/main">
-            <a:pPr algn="ctr">
-              <a:lnSpc>
-                <a:spcPct val="105000"/>
-              </a:lnSpc>
-              <a:buNone/>
-              <a:defRPr sz="1350" b="1" i="0">
-                <a:solidFill>
-                  <a:srgbClr val="2A9D8F"/>
-                </a:solidFill>
-              </a:defRPr>
-            </a:pPr>
-            <a:r>
-              <a:rPr sz="1350" b="1" i="0">
-                <a:solidFill>
-                  <a:srgbClr val="2A9D8F"/>
-                </a:solidFill>
-              </a:rPr>
-              <a:t>checked-state audit 位于 paper 计时之外</a:t>
-            </a:r>
-          </a:p>
-        </p:txBody>
-      </p:sp>
-      <p:sp>
-        <p:nvSpPr>
-          <p:cNvPr id="35" name="">
-            <a:extLst xmlns:a="http://schemas.openxmlformats.org/drawingml/2006/main">
-              <a:ext uri="{FF2B5EF4-FFF2-40B4-BE49-F238E27FC236}">
-                <a16:creationId xmlns:a16="http://schemas.microsoft.com/office/drawing/2014/main" id="{A7E6967C-C3F2-4372-A6A3-72ECC81B1DF3}"/>
-              </a:ext>
-            </a:extLst>
-          </p:cNvPr>
-          <p:cNvSpPr>
-            <a:spLocks xmlns:a="http://schemas.openxmlformats.org/drawingml/2006/main" noGrp="1"/>
-          </p:cNvSpPr>
-          <p:nvPr/>
-        </p:nvSpPr>
-        <p:spPr>
-          <a:xfrm xmlns:a="http://schemas.openxmlformats.org/drawingml/2006/main">
-            <a:off x="4419600" y="4495800"/>
-            <a:ext cx="2876550" cy="266700"/>
-          </a:xfrm>
-          <a:prstGeom xmlns:a="http://schemas.openxmlformats.org/drawingml/2006/main" prst="rect">
-            <a:avLst/>
-          </a:prstGeom>
-          <a:noFill xmlns:a="http://schemas.openxmlformats.org/drawingml/2006/main"/>
-          <a:ln xmlns:a="http://schemas.openxmlformats.org/drawingml/2006/main" w="0">
-            <a:noFill/>
-            <a:prstDash val="solid"/>
-          </a:ln>
-        </p:spPr>
-        <p:txBody>
-          <a:bodyPr xmlns:a="http://schemas.openxmlformats.org/drawingml/2006/main" wrap="square" lIns="38100" tIns="19050" rIns="38100" bIns="19050" anchor="ctr">
-            <a:normAutofit fontScale="100000"/>
-          </a:bodyPr>
-          <a:lstStyle xmlns:a="http://schemas.openxmlformats.org/drawingml/2006/main"/>
-          <a:p xmlns:a="http://schemas.openxmlformats.org/drawingml/2006/main">
-            <a:pPr algn="ctr">
-              <a:lnSpc>
-                <a:spcPct val="105000"/>
-              </a:lnSpc>
-              <a:buNone/>
-              <a:defRPr sz="1275" b="0" i="0">
-                <a:solidFill>
-                  <a:srgbClr val="243B53"/>
-                </a:solidFill>
-              </a:defRPr>
-            </a:pPr>
-            <a:r>
-              <a:rPr sz="1275" b="0" i="0">
-                <a:solidFill>
-                  <a:srgbClr val="243B53"/>
-                </a:solidFill>
-              </a:rPr>
-              <a:t>每个 exact case 一次 audit</a:t>
-            </a:r>
-          </a:p>
-        </p:txBody>
-      </p:sp>
-      <p:sp>
-        <p:nvSpPr>
-          <p:cNvPr id="36" name="">
-            <a:extLst xmlns:a="http://schemas.openxmlformats.org/drawingml/2006/main">
-              <a:ext uri="{FF2B5EF4-FFF2-40B4-BE49-F238E27FC236}">
-                <a16:creationId xmlns:a16="http://schemas.microsoft.com/office/drawing/2014/main" id="{31DE5C6B-DECE-4C66-8AA9-9F946F9D6EF8}"/>
-              </a:ext>
-            </a:extLst>
-          </p:cNvPr>
-          <p:cNvSpPr>
-            <a:spLocks xmlns:a="http://schemas.openxmlformats.org/drawingml/2006/main" noGrp="1"/>
-          </p:cNvSpPr>
-          <p:nvPr/>
-        </p:nvSpPr>
-        <p:spPr>
-          <a:xfrm xmlns:a="http://schemas.openxmlformats.org/drawingml/2006/main">
-            <a:off x="7772400" y="3905250"/>
-            <a:ext cx="3219450" cy="990600"/>
-          </a:xfrm>
-          <a:prstGeom xmlns:a="http://schemas.openxmlformats.org/drawingml/2006/main" prst="roundRect">
-            <a:avLst>
-              <a:gd name="adj" fmla="val 7692"/>
-            </a:avLst>
-          </a:prstGeom>
-          <a:solidFill xmlns:a="http://schemas.openxmlformats.org/drawingml/2006/main">
-            <a:srgbClr val="FCEEEA"/>
-          </a:solidFill>
-          <a:ln xmlns:a="http://schemas.openxmlformats.org/drawingml/2006/main" w="14288">
-            <a:solidFill>
-              <a:srgbClr val="E76F51"/>
-            </a:solidFill>
-            <a:prstDash val="solid"/>
-          </a:ln>
-        </p:spPr>
-      </p:sp>
-      <p:sp>
-        <p:nvSpPr>
-          <p:cNvPr id="37" name="">
-            <a:extLst xmlns:a="http://schemas.openxmlformats.org/drawingml/2006/main">
-              <a:ext uri="{FF2B5EF4-FFF2-40B4-BE49-F238E27FC236}">
-                <a16:creationId xmlns:a16="http://schemas.microsoft.com/office/drawing/2014/main" id="{C8434034-BDB1-4C52-AED5-C22E5C76D413}"/>
-              </a:ext>
-            </a:extLst>
-          </p:cNvPr>
-          <p:cNvSpPr>
-            <a:spLocks xmlns:a="http://schemas.openxmlformats.org/drawingml/2006/main" noGrp="1"/>
-          </p:cNvSpPr>
-          <p:nvPr/>
-        </p:nvSpPr>
-        <p:spPr>
-          <a:xfrm xmlns:a="http://schemas.openxmlformats.org/drawingml/2006/main">
-            <a:off x="7924800" y="4038600"/>
-            <a:ext cx="2914650" cy="400050"/>
-          </a:xfrm>
-          <a:prstGeom xmlns:a="http://schemas.openxmlformats.org/drawingml/2006/main" prst="rect">
-            <a:avLst/>
-          </a:prstGeom>
-          <a:noFill xmlns:a="http://schemas.openxmlformats.org/drawingml/2006/main"/>
-          <a:ln xmlns:a="http://schemas.openxmlformats.org/drawingml/2006/main" w="0">
-            <a:noFill/>
-            <a:prstDash val="solid"/>
-          </a:ln>
-        </p:spPr>
-        <p:txBody>
-          <a:bodyPr xmlns:a="http://schemas.openxmlformats.org/drawingml/2006/main" wrap="square" lIns="38100" tIns="19050" rIns="38100" bIns="19050" anchor="ctr">
-            <a:normAutofit fontScale="100000"/>
-          </a:bodyPr>
-          <a:lstStyle xmlns:a="http://schemas.openxmlformats.org/drawingml/2006/main"/>
-          <a:p xmlns:a="http://schemas.openxmlformats.org/drawingml/2006/main">
-            <a:pPr algn="ctr">
-              <a:lnSpc>
-                <a:spcPct val="105000"/>
-              </a:lnSpc>
-              <a:buNone/>
-              <a:defRPr sz="1350" b="1" i="0">
-                <a:solidFill>
-                  <a:srgbClr val="E76F51"/>
-                </a:solidFill>
-              </a:defRPr>
-            </a:pPr>
-            <a:r>
-              <a:rPr sz="1350" b="1" i="0">
-                <a:solidFill>
-                  <a:srgbClr val="E76F51"/>
-                </a:solidFill>
-              </a:rPr>
-              <a:t>minimal paper call 位于计时内</a:t>
-            </a:r>
-          </a:p>
-        </p:txBody>
-      </p:sp>
-      <p:sp>
-        <p:nvSpPr>
-          <p:cNvPr id="38" name="">
-            <a:extLst xmlns:a="http://schemas.openxmlformats.org/drawingml/2006/main">
-              <a:ext uri="{FF2B5EF4-FFF2-40B4-BE49-F238E27FC236}">
-                <a16:creationId xmlns:a16="http://schemas.microsoft.com/office/drawing/2014/main" id="{8DDFCE0F-57C8-4CB7-AB36-B0DAF29A725F}"/>
-              </a:ext>
-            </a:extLst>
-          </p:cNvPr>
-          <p:cNvSpPr>
-            <a:spLocks xmlns:a="http://schemas.openxmlformats.org/drawingml/2006/main" noGrp="1"/>
-          </p:cNvSpPr>
-          <p:nvPr/>
-        </p:nvSpPr>
-        <p:spPr>
-          <a:xfrm xmlns:a="http://schemas.openxmlformats.org/drawingml/2006/main">
-            <a:off x="7943850" y="4495800"/>
-            <a:ext cx="2876550" cy="266700"/>
-          </a:xfrm>
-          <a:prstGeom xmlns:a="http://schemas.openxmlformats.org/drawingml/2006/main" prst="rect">
-            <a:avLst/>
-          </a:prstGeom>
-          <a:noFill xmlns:a="http://schemas.openxmlformats.org/drawingml/2006/main"/>
-          <a:ln xmlns:a="http://schemas.openxmlformats.org/drawingml/2006/main" w="0">
-            <a:noFill/>
-            <a:prstDash val="solid"/>
-          </a:ln>
-        </p:spPr>
-        <p:txBody>
-          <a:bodyPr xmlns:a="http://schemas.openxmlformats.org/drawingml/2006/main" wrap="square" lIns="38100" tIns="19050" rIns="38100" bIns="19050" anchor="ctr">
-            <a:normAutofit fontScale="100000"/>
-          </a:bodyPr>
-          <a:lstStyle xmlns:a="http://schemas.openxmlformats.org/drawingml/2006/main"/>
-          <a:p xmlns:a="http://schemas.openxmlformats.org/drawingml/2006/main">
-            <a:pPr algn="ctr">
-              <a:lnSpc>
-                <a:spcPct val="105000"/>
-              </a:lnSpc>
-              <a:buNone/>
-              <a:defRPr sz="1275" b="0" i="0">
-                <a:solidFill>
-                  <a:srgbClr val="243B53"/>
-                </a:solidFill>
-              </a:defRPr>
-            </a:pPr>
-            <a:r>
-              <a:rPr sz="1275" b="0" i="0">
-                <a:solidFill>
-                  <a:srgbClr val="243B53"/>
-                </a:solidFill>
-              </a:rPr>
-              <a:t>输出恢复仍在计时内</a:t>
-            </a:r>
-          </a:p>
-        </p:txBody>
-      </p:sp>
-      <p:sp>
-        <p:nvSpPr>
-          <p:cNvPr id="39" name="">
-            <a:extLst xmlns:a="http://schemas.openxmlformats.org/drawingml/2006/main">
-              <a:ext uri="{FF2B5EF4-FFF2-40B4-BE49-F238E27FC236}">
-                <a16:creationId xmlns:a16="http://schemas.microsoft.com/office/drawing/2014/main" id="{E0190A84-3B4B-4B68-96A0-2BA5EDE180FB}"/>
-              </a:ext>
-            </a:extLst>
-          </p:cNvPr>
-          <p:cNvSpPr>
-            <a:spLocks xmlns:a="http://schemas.openxmlformats.org/drawingml/2006/main" noGrp="1"/>
-          </p:cNvSpPr>
-          <p:nvPr/>
-        </p:nvSpPr>
-        <p:spPr>
-          <a:xfrm xmlns:a="http://schemas.openxmlformats.org/drawingml/2006/main">
-            <a:off x="1143000" y="5124450"/>
-            <a:ext cx="9906000" cy="304800"/>
-          </a:xfrm>
-          <a:prstGeom xmlns:a="http://schemas.openxmlformats.org/drawingml/2006/main" prst="rect">
-            <a:avLst/>
-          </a:prstGeom>
-          <a:noFill xmlns:a="http://schemas.openxmlformats.org/drawingml/2006/main"/>
-          <a:ln xmlns:a="http://schemas.openxmlformats.org/drawingml/2006/main" w="0">
-            <a:noFill/>
-            <a:prstDash val="solid"/>
-          </a:ln>
-        </p:spPr>
-        <p:txBody>
-          <a:bodyPr xmlns:a="http://schemas.openxmlformats.org/drawingml/2006/main" wrap="square" lIns="38100" tIns="19050" rIns="38100" bIns="19050" anchor="ctr">
-            <a:normAutofit fontScale="100000"/>
-          </a:bodyPr>
-          <a:lstStyle xmlns:a="http://schemas.openxmlformats.org/drawingml/2006/main"/>
-          <a:p xmlns:a="http://schemas.openxmlformats.org/drawingml/2006/main">
-            <a:pPr algn="ctr">
-              <a:lnSpc>
-                <a:spcPct val="105000"/>
-              </a:lnSpc>
-              <a:buNone/>
-              <a:defRPr sz="1350" b="0" i="0">
+              <a:t>Paper 计时内：初始化、Step 1–3 和输出恢复</a:t>
+            </a:r>
+          </a:p>
+        </p:txBody>
+      </p:sp>
+      <p:sp>
+        <p:nvSpPr>
+          <p:cNvPr id="26" name="">
+            <a:extLst xmlns:a="http://schemas.openxmlformats.org/drawingml/2006/main">
+              <a:ext uri="{FF2B5EF4-FFF2-40B4-BE49-F238E27FC236}">
+                <a16:creationId xmlns:a16="http://schemas.microsoft.com/office/drawing/2014/main" id="{E5030093-8541-4C4D-BB56-F6C31092BF06}"/>
+              </a:ext>
+            </a:extLst>
+          </p:cNvPr>
+          <p:cNvSpPr>
+            <a:spLocks xmlns:a="http://schemas.openxmlformats.org/drawingml/2006/main" noGrp="1"/>
+          </p:cNvSpPr>
+          <p:nvPr/>
+        </p:nvSpPr>
+        <p:spPr>
+          <a:xfrm xmlns:a="http://schemas.openxmlformats.org/drawingml/2006/main">
+            <a:off x="800100" y="5619750"/>
+            <a:ext cx="10591800" cy="304800"/>
+          </a:xfrm>
+          <a:prstGeom xmlns:a="http://schemas.openxmlformats.org/drawingml/2006/main" prst="rect">
+            <a:avLst/>
+          </a:prstGeom>
+          <a:noFill xmlns:a="http://schemas.openxmlformats.org/drawingml/2006/main"/>
+          <a:ln xmlns:a="http://schemas.openxmlformats.org/drawingml/2006/main" w="0">
+            <a:noFill/>
+            <a:prstDash val="solid"/>
+          </a:ln>
+        </p:spPr>
+        <p:txBody>
+          <a:bodyPr xmlns:a="http://schemas.openxmlformats.org/drawingml/2006/main" wrap="square" lIns="38100" tIns="19050" rIns="38100" bIns="19050" anchor="t">
+            <a:normAutofit fontScale="100000"/>
+          </a:bodyPr>
+          <a:lstStyle xmlns:a="http://schemas.openxmlformats.org/drawingml/2006/main"/>
+          <a:p xmlns:a="http://schemas.openxmlformats.org/drawingml/2006/main">
+            <a:pPr algn="l">
+              <a:lnSpc>
+                <a:spcPct val="105000"/>
+              </a:lnSpc>
+              <a:buNone/>
+              <a:defRPr sz="1500" b="0" i="0">
                 <a:solidFill>
                   <a:srgbClr val="52606D"/>
                 </a:solidFill>
               </a:defRPr>
             </a:pPr>
             <a:r>
-              <a:rPr sz="1350" b="0" i="0">
+              <a:rPr sz="1500" b="0" i="0">
                 <a:solidFill>
                   <a:srgbClr val="52606D"/>
                 </a:solidFill>
               </a:rPr>
-              <a:t>Reference 计时包含完整 oracle-backed pipeline。Python 计时覆盖完整排序调用。</a:t>
-            </a:r>
-          </a:p>
-        </p:txBody>
-      </p:sp>
-      <p:sp>
-        <p:nvSpPr>
-          <p:cNvPr id="40" name="">
-            <a:extLst xmlns:a="http://schemas.openxmlformats.org/drawingml/2006/main">
-              <a:ext uri="{FF2B5EF4-FFF2-40B4-BE49-F238E27FC236}">
-                <a16:creationId xmlns:a16="http://schemas.microsoft.com/office/drawing/2014/main" id="{FFCCBD22-FAAE-4FBE-B581-D26DB2E213F8}"/>
-              </a:ext>
-            </a:extLst>
-          </p:cNvPr>
-          <p:cNvSpPr>
-            <a:spLocks xmlns:a="http://schemas.openxmlformats.org/drawingml/2006/main" noGrp="1"/>
-          </p:cNvSpPr>
-          <p:nvPr/>
-        </p:nvSpPr>
-        <p:spPr>
-          <a:xfrm xmlns:a="http://schemas.openxmlformats.org/drawingml/2006/main">
-            <a:off x="2019300" y="5581650"/>
-            <a:ext cx="8153400" cy="495300"/>
-          </a:xfrm>
-          <a:prstGeom xmlns:a="http://schemas.openxmlformats.org/drawingml/2006/main" prst="roundRect">
-            <a:avLst>
-              <a:gd name="adj" fmla="val 11538"/>
-            </a:avLst>
-          </a:prstGeom>
-          <a:solidFill xmlns:a="http://schemas.openxmlformats.org/drawingml/2006/main">
-            <a:srgbClr val="FCEEEA"/>
-          </a:solidFill>
-          <a:ln xmlns:a="http://schemas.openxmlformats.org/drawingml/2006/main" w="14288">
-            <a:solidFill>
-              <a:srgbClr val="E76F51"/>
-            </a:solidFill>
-            <a:prstDash val="solid"/>
-          </a:ln>
-        </p:spPr>
-      </p:sp>
-      <p:sp>
-        <p:nvSpPr>
-          <p:cNvPr id="41" name="">
-            <a:extLst xmlns:a="http://schemas.openxmlformats.org/drawingml/2006/main">
-              <a:ext uri="{FF2B5EF4-FFF2-40B4-BE49-F238E27FC236}">
-                <a16:creationId xmlns:a16="http://schemas.microsoft.com/office/drawing/2014/main" id="{E9570EB9-4BFA-43BC-BD53-C33383E763D5}"/>
-              </a:ext>
-            </a:extLst>
-          </p:cNvPr>
-          <p:cNvSpPr>
-            <a:spLocks xmlns:a="http://schemas.openxmlformats.org/drawingml/2006/main" noGrp="1"/>
-          </p:cNvSpPr>
-          <p:nvPr/>
-        </p:nvSpPr>
-        <p:spPr>
-          <a:xfrm xmlns:a="http://schemas.openxmlformats.org/drawingml/2006/main">
-            <a:off x="2190750" y="5638800"/>
-            <a:ext cx="7810500" cy="381000"/>
-          </a:xfrm>
-          <a:prstGeom xmlns:a="http://schemas.openxmlformats.org/drawingml/2006/main" prst="rect">
-            <a:avLst/>
-          </a:prstGeom>
-          <a:noFill xmlns:a="http://schemas.openxmlformats.org/drawingml/2006/main"/>
-          <a:ln xmlns:a="http://schemas.openxmlformats.org/drawingml/2006/main" w="0">
-            <a:noFill/>
-            <a:prstDash val="solid"/>
-          </a:ln>
-        </p:spPr>
-        <p:txBody>
-          <a:bodyPr xmlns:a="http://schemas.openxmlformats.org/drawingml/2006/main" wrap="square" lIns="38100" tIns="19050" rIns="38100" bIns="19050" anchor="ctr">
-            <a:normAutofit fontScale="100000"/>
-          </a:bodyPr>
-          <a:lstStyle xmlns:a="http://schemas.openxmlformats.org/drawingml/2006/main"/>
-          <a:p xmlns:a="http://schemas.openxmlformats.org/drawingml/2006/main">
-            <a:pPr algn="ctr">
-              <a:lnSpc>
-                <a:spcPct val="105000"/>
-              </a:lnSpc>
-              <a:buNone/>
-              <a:defRPr sz="1350" b="1" i="0">
-                <a:solidFill>
-                  <a:srgbClr val="E76F51"/>
-                </a:solidFill>
-              </a:defRPr>
-            </a:pPr>
-            <a:r>
-              <a:rPr sz="1350" b="1" i="0">
-                <a:solidFill>
-                  <a:srgbClr val="E76F51"/>
-                </a:solidFill>
-              </a:rPr>
-              <a:t>原实验测量三种实现；运行时间页重点展示 paper core 与 Python sort。</a:t>
+              <a:t>Python：排序调用。Reference：完整 oracle-backed pipeline。</a:t>
+            </a:r>
+          </a:p>
+        </p:txBody>
+      </p:sp>
+      <p:sp>
+        <p:nvSpPr>
+          <p:cNvPr id="27" name="">
+            <a:extLst xmlns:a="http://schemas.openxmlformats.org/drawingml/2006/main">
+              <a:ext uri="{FF2B5EF4-FFF2-40B4-BE49-F238E27FC236}">
+                <a16:creationId xmlns:a16="http://schemas.microsoft.com/office/drawing/2014/main" id="{05F5AB45-9F93-4707-B5E9-EF6FFA950E95}"/>
+              </a:ext>
+            </a:extLst>
+          </p:cNvPr>
+          <p:cNvSpPr>
+            <a:spLocks xmlns:a="http://schemas.openxmlformats.org/drawingml/2006/main" noGrp="1"/>
+          </p:cNvSpPr>
+          <p:nvPr/>
+        </p:nvSpPr>
+        <p:spPr>
+          <a:xfrm xmlns:a="http://schemas.openxmlformats.org/drawingml/2006/main">
+            <a:off x="800100" y="5962650"/>
+            <a:ext cx="10591800" cy="285750"/>
+          </a:xfrm>
+          <a:prstGeom xmlns:a="http://schemas.openxmlformats.org/drawingml/2006/main" prst="rect">
+            <a:avLst/>
+          </a:prstGeom>
+          <a:noFill xmlns:a="http://schemas.openxmlformats.org/drawingml/2006/main"/>
+          <a:ln xmlns:a="http://schemas.openxmlformats.org/drawingml/2006/main" w="0">
+            <a:noFill/>
+            <a:prstDash val="solid"/>
+          </a:ln>
+        </p:spPr>
+        <p:txBody>
+          <a:bodyPr xmlns:a="http://schemas.openxmlformats.org/drawingml/2006/main" wrap="square" lIns="38100" tIns="19050" rIns="38100" bIns="19050" anchor="t">
+            <a:normAutofit fontScale="100000"/>
+          </a:bodyPr>
+          <a:lstStyle xmlns:a="http://schemas.openxmlformats.org/drawingml/2006/main"/>
+          <a:p xmlns:a="http://schemas.openxmlformats.org/drawingml/2006/main">
+            <a:pPr algn="l">
+              <a:lnSpc>
+                <a:spcPct val="105000"/>
+              </a:lnSpc>
+              <a:buNone/>
+              <a:defRPr sz="1425" b="0" i="0">
+                <a:solidFill>
+                  <a:srgbClr val="52606D"/>
+                </a:solidFill>
+              </a:defRPr>
+            </a:pPr>
+            <a:r>
+              <a:rPr sz="1425" b="0" i="0">
+                <a:solidFill>
+                  <a:srgbClr val="52606D"/>
+                </a:solidFill>
+              </a:rPr>
+              <a:t>输出比较在计时后；运行时间页重点展示 paper core 与 Python sort。</a:t>
             </a:r>
           </a:p>
         </p:txBody>
@@ -8454,7 +7927,7 @@
     </p:spTree>
     <p:extLst>
       <p:ext uri="{BB962C8B-B14F-4D97-AF65-F5344CB8AC3E}">
-        <p14:creationId xmlns:p14="http://schemas.microsoft.com/office/powerpoint/2010/main" val="579321941"/>
+        <p14:creationId xmlns:p14="http://schemas.microsoft.com/office/powerpoint/2010/main" val="1568400411"/>
       </p:ext>
     </p:extLst>
   </p:cSld>
@@ -8587,7 +8060,7 @@
                   <a:srgbClr val="102A43"/>
                 </a:solidFill>
               </a:rPr>
-              <a:t>全部 60 个评估用例均返回正确输出</a:t>
+              <a:t>运行时间实验中的 60 个用例均返回正确输出</a:t>
             </a:r>
           </a:p>
         </p:txBody>
@@ -10575,7 +10048,7 @@
                   <a:srgbClr val="243746"/>
                 </a:solidFill>
               </a:rPr>
-              <a:t>在已评估用例中得到正确输出与固定范围的运行时间趋势</a:t>
+              <a:t>本次运行时间实验的 60 个用例均正确，并记录了耗时</a:t>
             </a:r>
           </a:p>
         </p:txBody>
